--- a/VSCA11Y_Prezentacija.pptx
+++ b/VSCA11Y_Prezentacija.pptx
@@ -114,6 +114,11 @@
       </a:defRPr>
     </a:lvl9pPr>
   </p:defaultTextStyle>
+  <p:extLst>
+    <p:ext uri="{EFAFB233-063F-42B5-8137-9DF3F51BA10A}">
+      <p15:sldGuideLst xmlns:p15="http://schemas.microsoft.com/office/powerpoint/2012/main"/>
+    </p:ext>
+  </p:extLst>
 </p:presentation>
 </file>
 
@@ -6649,7 +6654,7 @@
           <a:noFill/>
           <a:extLst>
             <a:ext uri="{909E8E84-426E-40dd-AFC4-6F175D3DCCD1}">
-              <a14:hiddenFill xmlns:a14="http://schemas.microsoft.com/office/drawing/2010/main" xmlns="">
+              <a14:hiddenFill xmlns="" xmlns:a14="http://schemas.microsoft.com/office/drawing/2010/main">
                 <a:solidFill>
                   <a:srgbClr val="FFFFFF"/>
                 </a:solidFill>
@@ -6709,7 +6714,7 @@
             </a:ln>
             <a:extLst>
               <a:ext uri="{91240B29-F687-4f45-9708-019B960494DF}">
-                <a14:hiddenLine xmlns:a14="http://schemas.microsoft.com/office/drawing/2010/main" xmlns="" w="9525">
+                <a14:hiddenLine xmlns="" xmlns:a14="http://schemas.microsoft.com/office/drawing/2010/main" w="9525">
                   <a:solidFill>
                     <a:srgbClr val="000000"/>
                   </a:solidFill>
@@ -6806,7 +6811,7 @@
             </a:ln>
             <a:extLst>
               <a:ext uri="{91240B29-F687-4f45-9708-019B960494DF}">
-                <a14:hiddenLine xmlns:a14="http://schemas.microsoft.com/office/drawing/2010/main" xmlns="" w="9525">
+                <a14:hiddenLine xmlns="" xmlns:a14="http://schemas.microsoft.com/office/drawing/2010/main" w="9525">
                   <a:solidFill>
                     <a:srgbClr val="000000"/>
                   </a:solidFill>
@@ -6903,7 +6908,7 @@
             </a:ln>
             <a:extLst>
               <a:ext uri="{91240B29-F687-4f45-9708-019B960494DF}">
-                <a14:hiddenLine xmlns:a14="http://schemas.microsoft.com/office/drawing/2010/main" xmlns="" w="9525">
+                <a14:hiddenLine xmlns="" xmlns:a14="http://schemas.microsoft.com/office/drawing/2010/main" w="9525">
                   <a:solidFill>
                     <a:srgbClr val="000000"/>
                   </a:solidFill>
@@ -6944,7 +6949,7 @@
             </a:ln>
             <a:extLst>
               <a:ext uri="{91240B29-F687-4f45-9708-019B960494DF}">
-                <a14:hiddenLine xmlns:a14="http://schemas.microsoft.com/office/drawing/2010/main" xmlns="" w="9525">
+                <a14:hiddenLine xmlns="" xmlns:a14="http://schemas.microsoft.com/office/drawing/2010/main" w="9525">
                   <a:solidFill>
                     <a:srgbClr val="000000"/>
                   </a:solidFill>
@@ -7041,7 +7046,7 @@
             </a:ln>
             <a:extLst>
               <a:ext uri="{91240B29-F687-4f45-9708-019B960494DF}">
-                <a14:hiddenLine xmlns:a14="http://schemas.microsoft.com/office/drawing/2010/main" xmlns="" w="9525">
+                <a14:hiddenLine xmlns="" xmlns:a14="http://schemas.microsoft.com/office/drawing/2010/main" w="9525">
                   <a:solidFill>
                     <a:srgbClr val="000000"/>
                   </a:solidFill>
@@ -7110,7 +7115,7 @@
             </a:ln>
             <a:extLst>
               <a:ext uri="{91240B29-F687-4f45-9708-019B960494DF}">
-                <a14:hiddenLine xmlns:a14="http://schemas.microsoft.com/office/drawing/2010/main" xmlns="" w="9525">
+                <a14:hiddenLine xmlns="" xmlns:a14="http://schemas.microsoft.com/office/drawing/2010/main" w="9525">
                   <a:solidFill>
                     <a:srgbClr val="000000"/>
                   </a:solidFill>
@@ -7179,7 +7184,7 @@
             </a:ln>
             <a:extLst>
               <a:ext uri="{91240B29-F687-4f45-9708-019B960494DF}">
-                <a14:hiddenLine xmlns:a14="http://schemas.microsoft.com/office/drawing/2010/main" xmlns="" w="9525">
+                <a14:hiddenLine xmlns="" xmlns:a14="http://schemas.microsoft.com/office/drawing/2010/main" w="9525">
                   <a:solidFill>
                     <a:srgbClr val="000000"/>
                   </a:solidFill>
@@ -7276,7 +7281,7 @@
             </a:ln>
             <a:extLst>
               <a:ext uri="{91240B29-F687-4f45-9708-019B960494DF}">
-                <a14:hiddenLine xmlns:a14="http://schemas.microsoft.com/office/drawing/2010/main" xmlns="" w="9525">
+                <a14:hiddenLine xmlns="" xmlns:a14="http://schemas.microsoft.com/office/drawing/2010/main" w="9525">
                   <a:solidFill>
                     <a:srgbClr val="000000"/>
                   </a:solidFill>
@@ -7345,7 +7350,7 @@
             </a:ln>
             <a:extLst>
               <a:ext uri="{91240B29-F687-4f45-9708-019B960494DF}">
-                <a14:hiddenLine xmlns:a14="http://schemas.microsoft.com/office/drawing/2010/main" xmlns="" w="9525">
+                <a14:hiddenLine xmlns="" xmlns:a14="http://schemas.microsoft.com/office/drawing/2010/main" w="9525">
                   <a:solidFill>
                     <a:srgbClr val="000000"/>
                   </a:solidFill>
@@ -7414,7 +7419,7 @@
             </a:ln>
             <a:extLst>
               <a:ext uri="{91240B29-F687-4f45-9708-019B960494DF}">
-                <a14:hiddenLine xmlns:a14="http://schemas.microsoft.com/office/drawing/2010/main" xmlns="" w="9525">
+                <a14:hiddenLine xmlns="" xmlns:a14="http://schemas.microsoft.com/office/drawing/2010/main" w="9525">
                   <a:solidFill>
                     <a:srgbClr val="000000"/>
                   </a:solidFill>
@@ -7511,7 +7516,7 @@
             </a:ln>
             <a:extLst>
               <a:ext uri="{91240B29-F687-4f45-9708-019B960494DF}">
-                <a14:hiddenLine xmlns:a14="http://schemas.microsoft.com/office/drawing/2010/main" xmlns="" w="9525">
+                <a14:hiddenLine xmlns="" xmlns:a14="http://schemas.microsoft.com/office/drawing/2010/main" w="9525">
                   <a:solidFill>
                     <a:srgbClr val="000000"/>
                   </a:solidFill>
@@ -7608,7 +7613,7 @@
             </a:ln>
             <a:extLst>
               <a:ext uri="{91240B29-F687-4f45-9708-019B960494DF}">
-                <a14:hiddenLine xmlns:a14="http://schemas.microsoft.com/office/drawing/2010/main" xmlns="" w="9525">
+                <a14:hiddenLine xmlns="" xmlns:a14="http://schemas.microsoft.com/office/drawing/2010/main" w="9525">
                   <a:solidFill>
                     <a:srgbClr val="000000"/>
                   </a:solidFill>
@@ -7677,7 +7682,7 @@
             </a:ln>
             <a:extLst>
               <a:ext uri="{91240B29-F687-4f45-9708-019B960494DF}">
-                <a14:hiddenLine xmlns:a14="http://schemas.microsoft.com/office/drawing/2010/main" xmlns="" w="9525">
+                <a14:hiddenLine xmlns="" xmlns:a14="http://schemas.microsoft.com/office/drawing/2010/main" w="9525">
                   <a:solidFill>
                     <a:srgbClr val="000000"/>
                   </a:solidFill>
@@ -7794,7 +7799,7 @@
             </a:ln>
             <a:extLst>
               <a:ext uri="{91240B29-F687-4f45-9708-019B960494DF}">
-                <a14:hiddenLine xmlns:a14="http://schemas.microsoft.com/office/drawing/2010/main" xmlns="" w="9525">
+                <a14:hiddenLine xmlns="" xmlns:a14="http://schemas.microsoft.com/office/drawing/2010/main" w="9525">
                   <a:solidFill>
                     <a:srgbClr val="000000"/>
                   </a:solidFill>
@@ -7863,7 +7868,7 @@
             </a:ln>
             <a:extLst>
               <a:ext uri="{91240B29-F687-4f45-9708-019B960494DF}">
-                <a14:hiddenLine xmlns:a14="http://schemas.microsoft.com/office/drawing/2010/main" xmlns="" w="9525">
+                <a14:hiddenLine xmlns="" xmlns:a14="http://schemas.microsoft.com/office/drawing/2010/main" w="9525">
                   <a:solidFill>
                     <a:srgbClr val="000000"/>
                   </a:solidFill>
@@ -7960,7 +7965,7 @@
             </a:ln>
             <a:extLst>
               <a:ext uri="{91240B29-F687-4f45-9708-019B960494DF}">
-                <a14:hiddenLine xmlns:a14="http://schemas.microsoft.com/office/drawing/2010/main" xmlns="" w="9525">
+                <a14:hiddenLine xmlns="" xmlns:a14="http://schemas.microsoft.com/office/drawing/2010/main" w="9525">
                   <a:solidFill>
                     <a:srgbClr val="000000"/>
                   </a:solidFill>
@@ -8057,7 +8062,7 @@
             </a:ln>
             <a:extLst>
               <a:ext uri="{91240B29-F687-4f45-9708-019B960494DF}">
-                <a14:hiddenLine xmlns:a14="http://schemas.microsoft.com/office/drawing/2010/main" xmlns="" w="9525">
+                <a14:hiddenLine xmlns="" xmlns:a14="http://schemas.microsoft.com/office/drawing/2010/main" w="9525">
                   <a:solidFill>
                     <a:srgbClr val="000000"/>
                   </a:solidFill>
@@ -8126,7 +8131,7 @@
             </a:ln>
             <a:extLst>
               <a:ext uri="{91240B29-F687-4f45-9708-019B960494DF}">
-                <a14:hiddenLine xmlns:a14="http://schemas.microsoft.com/office/drawing/2010/main" xmlns="" w="9525">
+                <a14:hiddenLine xmlns="" xmlns:a14="http://schemas.microsoft.com/office/drawing/2010/main" w="9525">
                   <a:solidFill>
                     <a:srgbClr val="000000"/>
                   </a:solidFill>
@@ -8223,7 +8228,7 @@
             </a:ln>
             <a:extLst>
               <a:ext uri="{91240B29-F687-4f45-9708-019B960494DF}">
-                <a14:hiddenLine xmlns:a14="http://schemas.microsoft.com/office/drawing/2010/main" xmlns="" w="9525">
+                <a14:hiddenLine xmlns="" xmlns:a14="http://schemas.microsoft.com/office/drawing/2010/main" w="9525">
                   <a:solidFill>
                     <a:srgbClr val="000000"/>
                   </a:solidFill>
@@ -8320,7 +8325,7 @@
             </a:ln>
             <a:extLst>
               <a:ext uri="{91240B29-F687-4f45-9708-019B960494DF}">
-                <a14:hiddenLine xmlns:a14="http://schemas.microsoft.com/office/drawing/2010/main" xmlns="" w="9525">
+                <a14:hiddenLine xmlns="" xmlns:a14="http://schemas.microsoft.com/office/drawing/2010/main" w="9525">
                   <a:solidFill>
                     <a:srgbClr val="000000"/>
                   </a:solidFill>
@@ -8383,7 +8388,7 @@
             </a:ln>
             <a:extLst>
               <a:ext uri="{91240B29-F687-4f45-9708-019B960494DF}">
-                <a14:hiddenLine xmlns:a14="http://schemas.microsoft.com/office/drawing/2010/main" xmlns="" w="9525">
+                <a14:hiddenLine xmlns="" xmlns:a14="http://schemas.microsoft.com/office/drawing/2010/main" w="9525">
                   <a:solidFill>
                     <a:srgbClr val="000000"/>
                   </a:solidFill>
@@ -8480,7 +8485,7 @@
             </a:ln>
             <a:extLst>
               <a:ext uri="{91240B29-F687-4f45-9708-019B960494DF}">
-                <a14:hiddenLine xmlns:a14="http://schemas.microsoft.com/office/drawing/2010/main" xmlns="" w="9525">
+                <a14:hiddenLine xmlns="" xmlns:a14="http://schemas.microsoft.com/office/drawing/2010/main" w="9525">
                   <a:solidFill>
                     <a:srgbClr val="000000"/>
                   </a:solidFill>
@@ -8543,7 +8548,7 @@
             </a:ln>
             <a:extLst>
               <a:ext uri="{91240B29-F687-4f45-9708-019B960494DF}">
-                <a14:hiddenLine xmlns:a14="http://schemas.microsoft.com/office/drawing/2010/main" xmlns="" w="9525">
+                <a14:hiddenLine xmlns="" xmlns:a14="http://schemas.microsoft.com/office/drawing/2010/main" w="9525">
                   <a:solidFill>
                     <a:srgbClr val="000000"/>
                   </a:solidFill>
@@ -8640,7 +8645,7 @@
             </a:ln>
             <a:extLst>
               <a:ext uri="{91240B29-F687-4f45-9708-019B960494DF}">
-                <a14:hiddenLine xmlns:a14="http://schemas.microsoft.com/office/drawing/2010/main" xmlns="" w="9525">
+                <a14:hiddenLine xmlns="" xmlns:a14="http://schemas.microsoft.com/office/drawing/2010/main" w="9525">
                   <a:solidFill>
                     <a:srgbClr val="000000"/>
                   </a:solidFill>
@@ -8715,7 +8720,7 @@
             </a:ln>
             <a:extLst>
               <a:ext uri="{91240B29-F687-4f45-9708-019B960494DF}">
-                <a14:hiddenLine xmlns:a14="http://schemas.microsoft.com/office/drawing/2010/main" xmlns="" w="9525">
+                <a14:hiddenLine xmlns="" xmlns:a14="http://schemas.microsoft.com/office/drawing/2010/main" w="9525">
                   <a:solidFill>
                     <a:srgbClr val="000000"/>
                   </a:solidFill>
@@ -8812,7 +8817,7 @@
             </a:ln>
             <a:extLst>
               <a:ext uri="{91240B29-F687-4f45-9708-019B960494DF}">
-                <a14:hiddenLine xmlns:a14="http://schemas.microsoft.com/office/drawing/2010/main" xmlns="" w="9525">
+                <a14:hiddenLine xmlns="" xmlns:a14="http://schemas.microsoft.com/office/drawing/2010/main" w="9525">
                   <a:solidFill>
                     <a:srgbClr val="000000"/>
                   </a:solidFill>
@@ -8887,7 +8892,7 @@
             </a:ln>
             <a:extLst>
               <a:ext uri="{91240B29-F687-4f45-9708-019B960494DF}">
-                <a14:hiddenLine xmlns:a14="http://schemas.microsoft.com/office/drawing/2010/main" xmlns="" w="9525">
+                <a14:hiddenLine xmlns="" xmlns:a14="http://schemas.microsoft.com/office/drawing/2010/main" w="9525">
                   <a:solidFill>
                     <a:srgbClr val="000000"/>
                   </a:solidFill>
@@ -8984,7 +8989,7 @@
             </a:ln>
             <a:extLst>
               <a:ext uri="{91240B29-F687-4f45-9708-019B960494DF}">
-                <a14:hiddenLine xmlns:a14="http://schemas.microsoft.com/office/drawing/2010/main" xmlns="" w="9525">
+                <a14:hiddenLine xmlns="" xmlns:a14="http://schemas.microsoft.com/office/drawing/2010/main" w="9525">
                   <a:solidFill>
                     <a:srgbClr val="000000"/>
                   </a:solidFill>
@@ -9025,7 +9030,7 @@
             </a:ln>
             <a:extLst>
               <a:ext uri="{91240B29-F687-4f45-9708-019B960494DF}">
-                <a14:hiddenLine xmlns:a14="http://schemas.microsoft.com/office/drawing/2010/main" xmlns="" w="9525">
+                <a14:hiddenLine xmlns="" xmlns:a14="http://schemas.microsoft.com/office/drawing/2010/main" w="9525">
                   <a:solidFill>
                     <a:srgbClr val="000000"/>
                   </a:solidFill>
@@ -9122,7 +9127,7 @@
             </a:ln>
             <a:extLst>
               <a:ext uri="{91240B29-F687-4f45-9708-019B960494DF}">
-                <a14:hiddenLine xmlns:a14="http://schemas.microsoft.com/office/drawing/2010/main" xmlns="" w="9525">
+                <a14:hiddenLine xmlns="" xmlns:a14="http://schemas.microsoft.com/office/drawing/2010/main" w="9525">
                   <a:solidFill>
                     <a:srgbClr val="000000"/>
                   </a:solidFill>
@@ -9191,7 +9196,7 @@
             </a:ln>
             <a:extLst>
               <a:ext uri="{91240B29-F687-4f45-9708-019B960494DF}">
-                <a14:hiddenLine xmlns:a14="http://schemas.microsoft.com/office/drawing/2010/main" xmlns="" w="9525">
+                <a14:hiddenLine xmlns="" xmlns:a14="http://schemas.microsoft.com/office/drawing/2010/main" w="9525">
                   <a:solidFill>
                     <a:srgbClr val="000000"/>
                   </a:solidFill>
@@ -9260,7 +9265,7 @@
             </a:ln>
             <a:extLst>
               <a:ext uri="{91240B29-F687-4f45-9708-019B960494DF}">
-                <a14:hiddenLine xmlns:a14="http://schemas.microsoft.com/office/drawing/2010/main" xmlns="" w="9525">
+                <a14:hiddenLine xmlns="" xmlns:a14="http://schemas.microsoft.com/office/drawing/2010/main" w="9525">
                   <a:solidFill>
                     <a:srgbClr val="000000"/>
                   </a:solidFill>
@@ -9357,7 +9362,7 @@
             </a:ln>
             <a:extLst>
               <a:ext uri="{91240B29-F687-4f45-9708-019B960494DF}">
-                <a14:hiddenLine xmlns:a14="http://schemas.microsoft.com/office/drawing/2010/main" xmlns="" w="9525">
+                <a14:hiddenLine xmlns="" xmlns:a14="http://schemas.microsoft.com/office/drawing/2010/main" w="9525">
                   <a:solidFill>
                     <a:srgbClr val="000000"/>
                   </a:solidFill>
@@ -9432,7 +9437,7 @@
             </a:ln>
             <a:extLst>
               <a:ext uri="{91240B29-F687-4f45-9708-019B960494DF}">
-                <a14:hiddenLine xmlns:a14="http://schemas.microsoft.com/office/drawing/2010/main" xmlns="" w="9525">
+                <a14:hiddenLine xmlns="" xmlns:a14="http://schemas.microsoft.com/office/drawing/2010/main" w="9525">
                   <a:solidFill>
                     <a:srgbClr val="000000"/>
                   </a:solidFill>
@@ -9501,7 +9506,7 @@
             </a:ln>
             <a:extLst>
               <a:ext uri="{91240B29-F687-4f45-9708-019B960494DF}">
-                <a14:hiddenLine xmlns:a14="http://schemas.microsoft.com/office/drawing/2010/main" xmlns="" w="9525">
+                <a14:hiddenLine xmlns="" xmlns:a14="http://schemas.microsoft.com/office/drawing/2010/main" w="9525">
                   <a:solidFill>
                     <a:srgbClr val="000000"/>
                   </a:solidFill>
@@ -9598,7 +9603,7 @@
             </a:ln>
             <a:extLst>
               <a:ext uri="{91240B29-F687-4f45-9708-019B960494DF}">
-                <a14:hiddenLine xmlns:a14="http://schemas.microsoft.com/office/drawing/2010/main" xmlns="" w="9525">
+                <a14:hiddenLine xmlns="" xmlns:a14="http://schemas.microsoft.com/office/drawing/2010/main" w="9525">
                   <a:solidFill>
                     <a:srgbClr val="000000"/>
                   </a:solidFill>
@@ -9667,7 +9672,7 @@
             </a:ln>
             <a:extLst>
               <a:ext uri="{91240B29-F687-4f45-9708-019B960494DF}">
-                <a14:hiddenLine xmlns:a14="http://schemas.microsoft.com/office/drawing/2010/main" xmlns="" w="9525">
+                <a14:hiddenLine xmlns="" xmlns:a14="http://schemas.microsoft.com/office/drawing/2010/main" w="9525">
                   <a:solidFill>
                     <a:srgbClr val="000000"/>
                   </a:solidFill>
@@ -9764,7 +9769,7 @@
             </a:ln>
             <a:extLst>
               <a:ext uri="{91240B29-F687-4f45-9708-019B960494DF}">
-                <a14:hiddenLine xmlns:a14="http://schemas.microsoft.com/office/drawing/2010/main" xmlns="" w="9525">
+                <a14:hiddenLine xmlns="" xmlns:a14="http://schemas.microsoft.com/office/drawing/2010/main" w="9525">
                   <a:solidFill>
                     <a:srgbClr val="000000"/>
                   </a:solidFill>
@@ -9833,7 +9838,7 @@
             </a:ln>
             <a:extLst>
               <a:ext uri="{91240B29-F687-4f45-9708-019B960494DF}">
-                <a14:hiddenLine xmlns:a14="http://schemas.microsoft.com/office/drawing/2010/main" xmlns="" w="9525">
+                <a14:hiddenLine xmlns="" xmlns:a14="http://schemas.microsoft.com/office/drawing/2010/main" w="9525">
                   <a:solidFill>
                     <a:srgbClr val="000000"/>
                   </a:solidFill>
@@ -9930,7 +9935,7 @@
             </a:ln>
             <a:extLst>
               <a:ext uri="{91240B29-F687-4f45-9708-019B960494DF}">
-                <a14:hiddenLine xmlns:a14="http://schemas.microsoft.com/office/drawing/2010/main" xmlns="" w="9525">
+                <a14:hiddenLine xmlns="" xmlns:a14="http://schemas.microsoft.com/office/drawing/2010/main" w="9525">
                   <a:solidFill>
                     <a:srgbClr val="000000"/>
                   </a:solidFill>
@@ -9971,7 +9976,7 @@
             </a:ln>
             <a:extLst>
               <a:ext uri="{91240B29-F687-4f45-9708-019B960494DF}">
-                <a14:hiddenLine xmlns:a14="http://schemas.microsoft.com/office/drawing/2010/main" xmlns="" w="9525">
+                <a14:hiddenLine xmlns="" xmlns:a14="http://schemas.microsoft.com/office/drawing/2010/main" w="9525">
                   <a:solidFill>
                     <a:srgbClr val="000000"/>
                   </a:solidFill>
@@ -10043,7 +10048,7 @@
             </a:ln>
             <a:extLst>
               <a:ext uri="{91240B29-F687-4f45-9708-019B960494DF}">
-                <a14:hiddenLine xmlns:a14="http://schemas.microsoft.com/office/drawing/2010/main" xmlns="" w="9525">
+                <a14:hiddenLine xmlns="" xmlns:a14="http://schemas.microsoft.com/office/drawing/2010/main" w="9525">
                   <a:solidFill>
                     <a:srgbClr val="000000"/>
                   </a:solidFill>
@@ -10140,7 +10145,7 @@
             </a:ln>
             <a:extLst>
               <a:ext uri="{91240B29-F687-4f45-9708-019B960494DF}">
-                <a14:hiddenLine xmlns:a14="http://schemas.microsoft.com/office/drawing/2010/main" xmlns="" w="9525">
+                <a14:hiddenLine xmlns="" xmlns:a14="http://schemas.microsoft.com/office/drawing/2010/main" w="9525">
                   <a:solidFill>
                     <a:srgbClr val="000000"/>
                   </a:solidFill>
@@ -10209,7 +10214,7 @@
             </a:ln>
             <a:extLst>
               <a:ext uri="{91240B29-F687-4f45-9708-019B960494DF}">
-                <a14:hiddenLine xmlns:a14="http://schemas.microsoft.com/office/drawing/2010/main" xmlns="" w="9525">
+                <a14:hiddenLine xmlns="" xmlns:a14="http://schemas.microsoft.com/office/drawing/2010/main" w="9525">
                   <a:solidFill>
                     <a:srgbClr val="000000"/>
                   </a:solidFill>
@@ -10306,7 +10311,7 @@
             </a:ln>
             <a:extLst>
               <a:ext uri="{91240B29-F687-4f45-9708-019B960494DF}">
-                <a14:hiddenLine xmlns:a14="http://schemas.microsoft.com/office/drawing/2010/main" xmlns="" w="9525">
+                <a14:hiddenLine xmlns="" xmlns:a14="http://schemas.microsoft.com/office/drawing/2010/main" w="9525">
                   <a:solidFill>
                     <a:srgbClr val="000000"/>
                   </a:solidFill>
@@ -10403,7 +10408,7 @@
             </a:ln>
             <a:extLst>
               <a:ext uri="{91240B29-F687-4f45-9708-019B960494DF}">
-                <a14:hiddenLine xmlns:a14="http://schemas.microsoft.com/office/drawing/2010/main" xmlns="" w="9525">
+                <a14:hiddenLine xmlns="" xmlns:a14="http://schemas.microsoft.com/office/drawing/2010/main" w="9525">
                   <a:solidFill>
                     <a:srgbClr val="000000"/>
                   </a:solidFill>
@@ -10475,7 +10480,7 @@
             </a:ln>
             <a:extLst>
               <a:ext uri="{91240B29-F687-4f45-9708-019B960494DF}">
-                <a14:hiddenLine xmlns:a14="http://schemas.microsoft.com/office/drawing/2010/main" xmlns="" w="9525">
+                <a14:hiddenLine xmlns="" xmlns:a14="http://schemas.microsoft.com/office/drawing/2010/main" w="9525">
                   <a:solidFill>
                     <a:srgbClr val="000000"/>
                   </a:solidFill>
@@ -10544,7 +10549,7 @@
             </a:ln>
             <a:extLst>
               <a:ext uri="{91240B29-F687-4f45-9708-019B960494DF}">
-                <a14:hiddenLine xmlns:a14="http://schemas.microsoft.com/office/drawing/2010/main" xmlns="" w="9525">
+                <a14:hiddenLine xmlns="" xmlns:a14="http://schemas.microsoft.com/office/drawing/2010/main" w="9525">
                   <a:solidFill>
                     <a:srgbClr val="000000"/>
                   </a:solidFill>
@@ -10641,7 +10646,7 @@
             </a:ln>
             <a:extLst>
               <a:ext uri="{91240B29-F687-4f45-9708-019B960494DF}">
-                <a14:hiddenLine xmlns:a14="http://schemas.microsoft.com/office/drawing/2010/main" xmlns="" w="9525">
+                <a14:hiddenLine xmlns="" xmlns:a14="http://schemas.microsoft.com/office/drawing/2010/main" w="9525">
                   <a:solidFill>
                     <a:srgbClr val="000000"/>
                   </a:solidFill>
@@ -10738,7 +10743,7 @@
             </a:ln>
             <a:extLst>
               <a:ext uri="{91240B29-F687-4f45-9708-019B960494DF}">
-                <a14:hiddenLine xmlns:a14="http://schemas.microsoft.com/office/drawing/2010/main" xmlns="" w="9525">
+                <a14:hiddenLine xmlns="" xmlns:a14="http://schemas.microsoft.com/office/drawing/2010/main" w="9525">
                   <a:solidFill>
                     <a:srgbClr val="000000"/>
                   </a:solidFill>
@@ -10807,7 +10812,7 @@
             </a:ln>
             <a:extLst>
               <a:ext uri="{91240B29-F687-4f45-9708-019B960494DF}">
-                <a14:hiddenLine xmlns:a14="http://schemas.microsoft.com/office/drawing/2010/main" xmlns="" w="9525">
+                <a14:hiddenLine xmlns="" xmlns:a14="http://schemas.microsoft.com/office/drawing/2010/main" w="9525">
                   <a:solidFill>
                     <a:srgbClr val="000000"/>
                   </a:solidFill>
@@ -10934,7 +10939,7 @@
             </a:ln>
             <a:extLst>
               <a:ext uri="{91240B29-F687-4f45-9708-019B960494DF}">
-                <a14:hiddenLine xmlns:a14="http://schemas.microsoft.com/office/drawing/2010/main" xmlns="" w="9525">
+                <a14:hiddenLine xmlns="" xmlns:a14="http://schemas.microsoft.com/office/drawing/2010/main" w="9525">
                   <a:solidFill>
                     <a:srgbClr val="000000"/>
                   </a:solidFill>
@@ -11009,7 +11014,7 @@
             </a:ln>
             <a:extLst>
               <a:ext uri="{91240B29-F687-4f45-9708-019B960494DF}">
-                <a14:hiddenLine xmlns:a14="http://schemas.microsoft.com/office/drawing/2010/main" xmlns="" w="9525">
+                <a14:hiddenLine xmlns="" xmlns:a14="http://schemas.microsoft.com/office/drawing/2010/main" w="9525">
                   <a:solidFill>
                     <a:srgbClr val="000000"/>
                   </a:solidFill>
@@ -11106,7 +11111,7 @@
             </a:ln>
             <a:extLst>
               <a:ext uri="{91240B29-F687-4f45-9708-019B960494DF}">
-                <a14:hiddenLine xmlns:a14="http://schemas.microsoft.com/office/drawing/2010/main" xmlns="" w="9525">
+                <a14:hiddenLine xmlns="" xmlns:a14="http://schemas.microsoft.com/office/drawing/2010/main" w="9525">
                   <a:solidFill>
                     <a:srgbClr val="000000"/>
                   </a:solidFill>
@@ -11253,7 +11258,7 @@
           <a:p>
             <a:fld id="{6733B157-BC8D-485A-B099-210699CD19FB}" type="datetimeFigureOut">
               <a:rPr lang="en-US" smtClean="0"/>
-              <a:t>2/6/2026</a:t>
+              <a:t>2/12/2026</a:t>
             </a:fld>
             <a:endParaRPr lang="en-US"/>
           </a:p>
@@ -11520,7 +11525,7 @@
           <a:p>
             <a:fld id="{6733B157-BC8D-485A-B099-210699CD19FB}" type="datetimeFigureOut">
               <a:rPr lang="en-US" smtClean="0"/>
-              <a:t>2/6/2026</a:t>
+              <a:t>2/12/2026</a:t>
             </a:fld>
             <a:endParaRPr lang="en-US"/>
           </a:p>
@@ -11716,7 +11721,7 @@
           <a:p>
             <a:fld id="{6733B157-BC8D-485A-B099-210699CD19FB}" type="datetimeFigureOut">
               <a:rPr lang="en-US" smtClean="0"/>
-              <a:t>2/6/2026</a:t>
+              <a:t>2/12/2026</a:t>
             </a:fld>
             <a:endParaRPr lang="en-US"/>
           </a:p>
@@ -11979,7 +11984,7 @@
           <a:p>
             <a:fld id="{6733B157-BC8D-485A-B099-210699CD19FB}" type="datetimeFigureOut">
               <a:rPr lang="en-US" smtClean="0"/>
-              <a:t>2/6/2026</a:t>
+              <a:t>2/12/2026</a:t>
             </a:fld>
             <a:endParaRPr lang="en-US"/>
           </a:p>
@@ -12413,7 +12418,7 @@
           <a:p>
             <a:fld id="{6733B157-BC8D-485A-B099-210699CD19FB}" type="datetimeFigureOut">
               <a:rPr lang="en-US" smtClean="0"/>
-              <a:t>2/6/2026</a:t>
+              <a:t>2/12/2026</a:t>
             </a:fld>
             <a:endParaRPr lang="en-US"/>
           </a:p>
@@ -12959,7 +12964,7 @@
           <a:p>
             <a:fld id="{6733B157-BC8D-485A-B099-210699CD19FB}" type="datetimeFigureOut">
               <a:rPr lang="en-US" smtClean="0"/>
-              <a:t>2/6/2026</a:t>
+              <a:t>2/12/2026</a:t>
             </a:fld>
             <a:endParaRPr lang="en-US"/>
           </a:p>
@@ -13679,7 +13684,7 @@
           <a:p>
             <a:fld id="{6733B157-BC8D-485A-B099-210699CD19FB}" type="datetimeFigureOut">
               <a:rPr lang="en-US" smtClean="0"/>
-              <a:t>2/6/2026</a:t>
+              <a:t>2/12/2026</a:t>
             </a:fld>
             <a:endParaRPr lang="en-US"/>
           </a:p>
@@ -13849,7 +13854,7 @@
           <a:p>
             <a:fld id="{6733B157-BC8D-485A-B099-210699CD19FB}" type="datetimeFigureOut">
               <a:rPr lang="en-US" smtClean="0"/>
-              <a:t>2/6/2026</a:t>
+              <a:t>2/12/2026</a:t>
             </a:fld>
             <a:endParaRPr lang="en-US"/>
           </a:p>
@@ -14029,7 +14034,7 @@
           <a:p>
             <a:fld id="{6733B157-BC8D-485A-B099-210699CD19FB}" type="datetimeFigureOut">
               <a:rPr lang="en-US" smtClean="0"/>
-              <a:t>2/6/2026</a:t>
+              <a:t>2/12/2026</a:t>
             </a:fld>
             <a:endParaRPr lang="en-US"/>
           </a:p>
@@ -14199,7 +14204,7 @@
           <a:p>
             <a:fld id="{6733B157-BC8D-485A-B099-210699CD19FB}" type="datetimeFigureOut">
               <a:rPr lang="en-US" smtClean="0"/>
-              <a:t>2/6/2026</a:t>
+              <a:t>2/12/2026</a:t>
             </a:fld>
             <a:endParaRPr lang="en-US"/>
           </a:p>
@@ -14449,7 +14454,7 @@
           <a:p>
             <a:fld id="{6733B157-BC8D-485A-B099-210699CD19FB}" type="datetimeFigureOut">
               <a:rPr lang="en-US" smtClean="0"/>
-              <a:t>2/6/2026</a:t>
+              <a:t>2/12/2026</a:t>
             </a:fld>
             <a:endParaRPr lang="en-US"/>
           </a:p>
@@ -14681,7 +14686,7 @@
           <a:p>
             <a:fld id="{6733B157-BC8D-485A-B099-210699CD19FB}" type="datetimeFigureOut">
               <a:rPr lang="en-US" smtClean="0"/>
-              <a:t>2/6/2026</a:t>
+              <a:t>2/12/2026</a:t>
             </a:fld>
             <a:endParaRPr lang="en-US"/>
           </a:p>
@@ -15062,7 +15067,7 @@
           <a:p>
             <a:fld id="{6733B157-BC8D-485A-B099-210699CD19FB}" type="datetimeFigureOut">
               <a:rPr lang="en-US" smtClean="0"/>
-              <a:t>2/6/2026</a:t>
+              <a:t>2/12/2026</a:t>
             </a:fld>
             <a:endParaRPr lang="en-US"/>
           </a:p>
@@ -15180,7 +15185,7 @@
           <a:p>
             <a:fld id="{6733B157-BC8D-485A-B099-210699CD19FB}" type="datetimeFigureOut">
               <a:rPr lang="en-US" smtClean="0"/>
-              <a:t>2/6/2026</a:t>
+              <a:t>2/12/2026</a:t>
             </a:fld>
             <a:endParaRPr lang="en-US"/>
           </a:p>
@@ -15275,7 +15280,7 @@
           <a:p>
             <a:fld id="{6733B157-BC8D-485A-B099-210699CD19FB}" type="datetimeFigureOut">
               <a:rPr lang="en-US" smtClean="0"/>
-              <a:t>2/6/2026</a:t>
+              <a:t>2/12/2026</a:t>
             </a:fld>
             <a:endParaRPr lang="en-US"/>
           </a:p>
@@ -15524,7 +15529,7 @@
           <a:p>
             <a:fld id="{6733B157-BC8D-485A-B099-210699CD19FB}" type="datetimeFigureOut">
               <a:rPr lang="en-US" smtClean="0"/>
-              <a:t>2/6/2026</a:t>
+              <a:t>2/12/2026</a:t>
             </a:fld>
             <a:endParaRPr lang="en-US"/>
           </a:p>
@@ -15804,7 +15809,7 @@
           <a:p>
             <a:fld id="{6733B157-BC8D-485A-B099-210699CD19FB}" type="datetimeFigureOut">
               <a:rPr lang="en-US" smtClean="0"/>
-              <a:t>2/6/2026</a:t>
+              <a:t>2/12/2026</a:t>
             </a:fld>
             <a:endParaRPr lang="en-US"/>
           </a:p>
@@ -15920,7 +15925,7 @@
           <a:noFill/>
           <a:extLst>
             <a:ext uri="{909E8E84-426E-40dd-AFC4-6F175D3DCCD1}">
-              <a14:hiddenFill xmlns:a14="http://schemas.microsoft.com/office/drawing/2010/main" xmlns="">
+              <a14:hiddenFill xmlns="" xmlns:a14="http://schemas.microsoft.com/office/drawing/2010/main">
                 <a:solidFill>
                   <a:srgbClr val="FFFFFF"/>
                 </a:solidFill>
@@ -15994,7 +15999,7 @@
               </a:ln>
               <a:extLst>
                 <a:ext uri="{91240B29-F687-4f45-9708-019B960494DF}">
-                  <a14:hiddenLine xmlns:a14="http://schemas.microsoft.com/office/drawing/2010/main" xmlns="" w="9525">
+                  <a14:hiddenLine xmlns="" xmlns:a14="http://schemas.microsoft.com/office/drawing/2010/main" w="9525">
                     <a:solidFill>
                       <a:srgbClr val="000000"/>
                     </a:solidFill>
@@ -16091,7 +16096,7 @@
               </a:ln>
               <a:extLst>
                 <a:ext uri="{91240B29-F687-4f45-9708-019B960494DF}">
-                  <a14:hiddenLine xmlns:a14="http://schemas.microsoft.com/office/drawing/2010/main" xmlns="" w="9525">
+                  <a14:hiddenLine xmlns="" xmlns:a14="http://schemas.microsoft.com/office/drawing/2010/main" w="9525">
                     <a:solidFill>
                       <a:srgbClr val="000000"/>
                     </a:solidFill>
@@ -16188,7 +16193,7 @@
               </a:ln>
               <a:extLst>
                 <a:ext uri="{91240B29-F687-4f45-9708-019B960494DF}">
-                  <a14:hiddenLine xmlns:a14="http://schemas.microsoft.com/office/drawing/2010/main" xmlns="" w="9525">
+                  <a14:hiddenLine xmlns="" xmlns:a14="http://schemas.microsoft.com/office/drawing/2010/main" w="9525">
                     <a:solidFill>
                       <a:srgbClr val="000000"/>
                     </a:solidFill>
@@ -16257,7 +16262,7 @@
               </a:ln>
               <a:extLst>
                 <a:ext uri="{91240B29-F687-4f45-9708-019B960494DF}">
-                  <a14:hiddenLine xmlns:a14="http://schemas.microsoft.com/office/drawing/2010/main" xmlns="" w="9525">
+                  <a14:hiddenLine xmlns="" xmlns:a14="http://schemas.microsoft.com/office/drawing/2010/main" w="9525">
                     <a:solidFill>
                       <a:srgbClr val="000000"/>
                     </a:solidFill>
@@ -16354,7 +16359,7 @@
               </a:ln>
               <a:extLst>
                 <a:ext uri="{91240B29-F687-4f45-9708-019B960494DF}">
-                  <a14:hiddenLine xmlns:a14="http://schemas.microsoft.com/office/drawing/2010/main" xmlns="" w="9525">
+                  <a14:hiddenLine xmlns="" xmlns:a14="http://schemas.microsoft.com/office/drawing/2010/main" w="9525">
                     <a:solidFill>
                       <a:srgbClr val="000000"/>
                     </a:solidFill>
@@ -16423,7 +16428,7 @@
               </a:ln>
               <a:extLst>
                 <a:ext uri="{91240B29-F687-4f45-9708-019B960494DF}">
-                  <a14:hiddenLine xmlns:a14="http://schemas.microsoft.com/office/drawing/2010/main" xmlns="" w="9525">
+                  <a14:hiddenLine xmlns="" xmlns:a14="http://schemas.microsoft.com/office/drawing/2010/main" w="9525">
                     <a:solidFill>
                       <a:srgbClr val="000000"/>
                     </a:solidFill>
@@ -16492,7 +16497,7 @@
               </a:ln>
               <a:extLst>
                 <a:ext uri="{91240B29-F687-4f45-9708-019B960494DF}">
-                  <a14:hiddenLine xmlns:a14="http://schemas.microsoft.com/office/drawing/2010/main" xmlns="" w="9525">
+                  <a14:hiddenLine xmlns="" xmlns:a14="http://schemas.microsoft.com/office/drawing/2010/main" w="9525">
                     <a:solidFill>
                       <a:srgbClr val="000000"/>
                     </a:solidFill>
@@ -16589,7 +16594,7 @@
               </a:ln>
               <a:extLst>
                 <a:ext uri="{91240B29-F687-4f45-9708-019B960494DF}">
-                  <a14:hiddenLine xmlns:a14="http://schemas.microsoft.com/office/drawing/2010/main" xmlns="" w="9525">
+                  <a14:hiddenLine xmlns="" xmlns:a14="http://schemas.microsoft.com/office/drawing/2010/main" w="9525">
                     <a:solidFill>
                       <a:srgbClr val="000000"/>
                     </a:solidFill>
@@ -16686,7 +16691,7 @@
               </a:ln>
               <a:extLst>
                 <a:ext uri="{91240B29-F687-4f45-9708-019B960494DF}">
-                  <a14:hiddenLine xmlns:a14="http://schemas.microsoft.com/office/drawing/2010/main" xmlns="" w="9525">
+                  <a14:hiddenLine xmlns="" xmlns:a14="http://schemas.microsoft.com/office/drawing/2010/main" w="9525">
                     <a:solidFill>
                       <a:srgbClr val="000000"/>
                     </a:solidFill>
@@ -16755,7 +16760,7 @@
               </a:ln>
               <a:extLst>
                 <a:ext uri="{91240B29-F687-4f45-9708-019B960494DF}">
-                  <a14:hiddenLine xmlns:a14="http://schemas.microsoft.com/office/drawing/2010/main" xmlns="" w="9525">
+                  <a14:hiddenLine xmlns="" xmlns:a14="http://schemas.microsoft.com/office/drawing/2010/main" w="9525">
                     <a:solidFill>
                       <a:srgbClr val="000000"/>
                     </a:solidFill>
@@ -16872,7 +16877,7 @@
               </a:ln>
               <a:extLst>
                 <a:ext uri="{91240B29-F687-4f45-9708-019B960494DF}">
-                  <a14:hiddenLine xmlns:a14="http://schemas.microsoft.com/office/drawing/2010/main" xmlns="" w="9525">
+                  <a14:hiddenLine xmlns="" xmlns:a14="http://schemas.microsoft.com/office/drawing/2010/main" w="9525">
                     <a:solidFill>
                       <a:srgbClr val="000000"/>
                     </a:solidFill>
@@ -16970,7 +16975,7 @@
               </a:ln>
               <a:extLst>
                 <a:ext uri="{91240B29-F687-4f45-9708-019B960494DF}">
-                  <a14:hiddenLine xmlns:a14="http://schemas.microsoft.com/office/drawing/2010/main" xmlns="" w="9525">
+                  <a14:hiddenLine xmlns="" xmlns:a14="http://schemas.microsoft.com/office/drawing/2010/main" w="9525">
                     <a:solidFill>
                       <a:srgbClr val="000000"/>
                     </a:solidFill>
@@ -17039,7 +17044,7 @@
               </a:ln>
               <a:extLst>
                 <a:ext uri="{91240B29-F687-4f45-9708-019B960494DF}">
-                  <a14:hiddenLine xmlns:a14="http://schemas.microsoft.com/office/drawing/2010/main" xmlns="" w="9525">
+                  <a14:hiddenLine xmlns="" xmlns:a14="http://schemas.microsoft.com/office/drawing/2010/main" w="9525">
                     <a:solidFill>
                       <a:srgbClr val="000000"/>
                     </a:solidFill>
@@ -17108,7 +17113,7 @@
               </a:ln>
               <a:extLst>
                 <a:ext uri="{91240B29-F687-4f45-9708-019B960494DF}">
-                  <a14:hiddenLine xmlns:a14="http://schemas.microsoft.com/office/drawing/2010/main" xmlns="" w="9525">
+                  <a14:hiddenLine xmlns="" xmlns:a14="http://schemas.microsoft.com/office/drawing/2010/main" w="9525">
                     <a:solidFill>
                       <a:srgbClr val="000000"/>
                     </a:solidFill>
@@ -17205,7 +17210,7 @@
               </a:ln>
               <a:extLst>
                 <a:ext uri="{91240B29-F687-4f45-9708-019B960494DF}">
-                  <a14:hiddenLine xmlns:a14="http://schemas.microsoft.com/office/drawing/2010/main" xmlns="" w="9525">
+                  <a14:hiddenLine xmlns="" xmlns:a14="http://schemas.microsoft.com/office/drawing/2010/main" w="9525">
                     <a:solidFill>
                       <a:srgbClr val="000000"/>
                     </a:solidFill>
@@ -17246,7 +17251,7 @@
               </a:ln>
               <a:extLst>
                 <a:ext uri="{91240B29-F687-4f45-9708-019B960494DF}">
-                  <a14:hiddenLine xmlns:a14="http://schemas.microsoft.com/office/drawing/2010/main" xmlns="" w="9525">
+                  <a14:hiddenLine xmlns="" xmlns:a14="http://schemas.microsoft.com/office/drawing/2010/main" w="9525">
                     <a:solidFill>
                       <a:srgbClr val="000000"/>
                     </a:solidFill>
@@ -17318,7 +17323,7 @@
               </a:ln>
               <a:extLst>
                 <a:ext uri="{91240B29-F687-4f45-9708-019B960494DF}">
-                  <a14:hiddenLine xmlns:a14="http://schemas.microsoft.com/office/drawing/2010/main" xmlns="" w="9525">
+                  <a14:hiddenLine xmlns="" xmlns:a14="http://schemas.microsoft.com/office/drawing/2010/main" w="9525">
                     <a:solidFill>
                       <a:srgbClr val="000000"/>
                     </a:solidFill>
@@ -17415,7 +17420,7 @@
               </a:ln>
               <a:extLst>
                 <a:ext uri="{91240B29-F687-4f45-9708-019B960494DF}">
-                  <a14:hiddenLine xmlns:a14="http://schemas.microsoft.com/office/drawing/2010/main" xmlns="" w="9525">
+                  <a14:hiddenLine xmlns="" xmlns:a14="http://schemas.microsoft.com/office/drawing/2010/main" w="9525">
                     <a:solidFill>
                       <a:srgbClr val="000000"/>
                     </a:solidFill>
@@ -17484,7 +17489,7 @@
               </a:ln>
               <a:extLst>
                 <a:ext uri="{91240B29-F687-4f45-9708-019B960494DF}">
-                  <a14:hiddenLine xmlns:a14="http://schemas.microsoft.com/office/drawing/2010/main" xmlns="" w="9525">
+                  <a14:hiddenLine xmlns="" xmlns:a14="http://schemas.microsoft.com/office/drawing/2010/main" w="9525">
                     <a:solidFill>
                       <a:srgbClr val="000000"/>
                     </a:solidFill>
@@ -17581,7 +17586,7 @@
               </a:ln>
               <a:extLst>
                 <a:ext uri="{91240B29-F687-4f45-9708-019B960494DF}">
-                  <a14:hiddenLine xmlns:a14="http://schemas.microsoft.com/office/drawing/2010/main" xmlns="" w="9525">
+                  <a14:hiddenLine xmlns="" xmlns:a14="http://schemas.microsoft.com/office/drawing/2010/main" w="9525">
                     <a:solidFill>
                       <a:srgbClr val="000000"/>
                     </a:solidFill>
@@ -17653,7 +17658,7 @@
               </a:ln>
               <a:extLst>
                 <a:ext uri="{91240B29-F687-4f45-9708-019B960494DF}">
-                  <a14:hiddenLine xmlns:a14="http://schemas.microsoft.com/office/drawing/2010/main" xmlns="" w="9525">
+                  <a14:hiddenLine xmlns="" xmlns:a14="http://schemas.microsoft.com/office/drawing/2010/main" w="9525">
                     <a:solidFill>
                       <a:srgbClr val="000000"/>
                     </a:solidFill>
@@ -17722,7 +17727,7 @@
               </a:ln>
               <a:extLst>
                 <a:ext uri="{91240B29-F687-4f45-9708-019B960494DF}">
-                  <a14:hiddenLine xmlns:a14="http://schemas.microsoft.com/office/drawing/2010/main" xmlns="" w="9525">
+                  <a14:hiddenLine xmlns="" xmlns:a14="http://schemas.microsoft.com/office/drawing/2010/main" w="9525">
                     <a:solidFill>
                       <a:srgbClr val="000000"/>
                     </a:solidFill>
@@ -17819,7 +17824,7 @@
               </a:ln>
               <a:extLst>
                 <a:ext uri="{91240B29-F687-4f45-9708-019B960494DF}">
-                  <a14:hiddenLine xmlns:a14="http://schemas.microsoft.com/office/drawing/2010/main" xmlns="" w="9525">
+                  <a14:hiddenLine xmlns="" xmlns:a14="http://schemas.microsoft.com/office/drawing/2010/main" w="9525">
                     <a:solidFill>
                       <a:srgbClr val="000000"/>
                     </a:solidFill>
@@ -17916,7 +17921,7 @@
               </a:ln>
               <a:extLst>
                 <a:ext uri="{91240B29-F687-4f45-9708-019B960494DF}">
-                  <a14:hiddenLine xmlns:a14="http://schemas.microsoft.com/office/drawing/2010/main" xmlns="" w="9525">
+                  <a14:hiddenLine xmlns="" xmlns:a14="http://schemas.microsoft.com/office/drawing/2010/main" w="9525">
                     <a:solidFill>
                       <a:srgbClr val="000000"/>
                     </a:solidFill>
@@ -17988,7 +17993,7 @@
               </a:ln>
               <a:extLst>
                 <a:ext uri="{91240B29-F687-4f45-9708-019B960494DF}">
-                  <a14:hiddenLine xmlns:a14="http://schemas.microsoft.com/office/drawing/2010/main" xmlns="" w="9525">
+                  <a14:hiddenLine xmlns="" xmlns:a14="http://schemas.microsoft.com/office/drawing/2010/main" w="9525">
                     <a:solidFill>
                       <a:srgbClr val="000000"/>
                     </a:solidFill>
@@ -18115,7 +18120,7 @@
               </a:ln>
               <a:extLst>
                 <a:ext uri="{91240B29-F687-4f45-9708-019B960494DF}">
-                  <a14:hiddenLine xmlns:a14="http://schemas.microsoft.com/office/drawing/2010/main" xmlns="" w="9525">
+                  <a14:hiddenLine xmlns="" xmlns:a14="http://schemas.microsoft.com/office/drawing/2010/main" w="9525">
                     <a:solidFill>
                       <a:srgbClr val="000000"/>
                     </a:solidFill>
@@ -18220,7 +18225,7 @@
               </a:ln>
               <a:extLst>
                 <a:ext uri="{91240B29-F687-4f45-9708-019B960494DF}">
-                  <a14:hiddenLine xmlns:a14="http://schemas.microsoft.com/office/drawing/2010/main" xmlns="" w="9525">
+                  <a14:hiddenLine xmlns="" xmlns:a14="http://schemas.microsoft.com/office/drawing/2010/main" w="9525">
                     <a:solidFill>
                       <a:srgbClr val="000000"/>
                     </a:solidFill>
@@ -18342,7 +18347,7 @@
               </a:ln>
               <a:extLst>
                 <a:ext uri="{91240B29-F687-4f45-9708-019B960494DF}">
-                  <a14:hiddenLine xmlns:a14="http://schemas.microsoft.com/office/drawing/2010/main" xmlns="" w="9525">
+                  <a14:hiddenLine xmlns="" xmlns:a14="http://schemas.microsoft.com/office/drawing/2010/main" w="9525">
                     <a:solidFill>
                       <a:srgbClr val="000000"/>
                     </a:solidFill>
@@ -18439,7 +18444,7 @@
               </a:ln>
               <a:extLst>
                 <a:ext uri="{91240B29-F687-4f45-9708-019B960494DF}">
-                  <a14:hiddenLine xmlns:a14="http://schemas.microsoft.com/office/drawing/2010/main" xmlns="" w="9525">
+                  <a14:hiddenLine xmlns="" xmlns:a14="http://schemas.microsoft.com/office/drawing/2010/main" w="9525">
                     <a:solidFill>
                       <a:srgbClr val="000000"/>
                     </a:solidFill>
@@ -18511,7 +18516,7 @@
               </a:ln>
               <a:extLst>
                 <a:ext uri="{91240B29-F687-4f45-9708-019B960494DF}">
-                  <a14:hiddenLine xmlns:a14="http://schemas.microsoft.com/office/drawing/2010/main" xmlns="" w="9525">
+                  <a14:hiddenLine xmlns="" xmlns:a14="http://schemas.microsoft.com/office/drawing/2010/main" w="9525">
                     <a:solidFill>
                       <a:srgbClr val="000000"/>
                     </a:solidFill>
@@ -18608,7 +18613,7 @@
               </a:ln>
               <a:extLst>
                 <a:ext uri="{91240B29-F687-4f45-9708-019B960494DF}">
-                  <a14:hiddenLine xmlns:a14="http://schemas.microsoft.com/office/drawing/2010/main" xmlns="" w="9525">
+                  <a14:hiddenLine xmlns="" xmlns:a14="http://schemas.microsoft.com/office/drawing/2010/main" w="9525">
                     <a:solidFill>
                       <a:srgbClr val="000000"/>
                     </a:solidFill>
@@ -18683,7 +18688,7 @@
               </a:ln>
               <a:extLst>
                 <a:ext uri="{91240B29-F687-4f45-9708-019B960494DF}">
-                  <a14:hiddenLine xmlns:a14="http://schemas.microsoft.com/office/drawing/2010/main" xmlns="" w="9525">
+                  <a14:hiddenLine xmlns="" xmlns:a14="http://schemas.microsoft.com/office/drawing/2010/main" w="9525">
                     <a:solidFill>
                       <a:srgbClr val="000000"/>
                     </a:solidFill>
@@ -18780,7 +18785,7 @@
               </a:ln>
               <a:extLst>
                 <a:ext uri="{91240B29-F687-4f45-9708-019B960494DF}">
-                  <a14:hiddenLine xmlns:a14="http://schemas.microsoft.com/office/drawing/2010/main" xmlns="" w="9525">
+                  <a14:hiddenLine xmlns="" xmlns:a14="http://schemas.microsoft.com/office/drawing/2010/main" w="9525">
                     <a:solidFill>
                       <a:srgbClr val="000000"/>
                     </a:solidFill>
@@ -18855,7 +18860,7 @@
               </a:ln>
               <a:extLst>
                 <a:ext uri="{91240B29-F687-4f45-9708-019B960494DF}">
-                  <a14:hiddenLine xmlns:a14="http://schemas.microsoft.com/office/drawing/2010/main" xmlns="" w="9525">
+                  <a14:hiddenLine xmlns="" xmlns:a14="http://schemas.microsoft.com/office/drawing/2010/main" w="9525">
                     <a:solidFill>
                       <a:srgbClr val="000000"/>
                     </a:solidFill>
@@ -18952,7 +18957,7 @@
               </a:ln>
               <a:extLst>
                 <a:ext uri="{91240B29-F687-4f45-9708-019B960494DF}">
-                  <a14:hiddenLine xmlns:a14="http://schemas.microsoft.com/office/drawing/2010/main" xmlns="" w="9525">
+                  <a14:hiddenLine xmlns="" xmlns:a14="http://schemas.microsoft.com/office/drawing/2010/main" w="9525">
                     <a:solidFill>
                       <a:srgbClr val="000000"/>
                     </a:solidFill>
@@ -18993,7 +18998,7 @@
               </a:ln>
               <a:extLst>
                 <a:ext uri="{91240B29-F687-4f45-9708-019B960494DF}">
-                  <a14:hiddenLine xmlns:a14="http://schemas.microsoft.com/office/drawing/2010/main" xmlns="" w="9525">
+                  <a14:hiddenLine xmlns="" xmlns:a14="http://schemas.microsoft.com/office/drawing/2010/main" w="9525">
                     <a:solidFill>
                       <a:srgbClr val="000000"/>
                     </a:solidFill>
@@ -19140,7 +19145,7 @@
           <a:p>
             <a:fld id="{6733B157-BC8D-485A-B099-210699CD19FB}" type="datetimeFigureOut">
               <a:rPr lang="en-US" smtClean="0"/>
-              <a:t>2/6/2026</a:t>
+              <a:t>2/12/2026</a:t>
             </a:fld>
             <a:endParaRPr lang="en-US"/>
           </a:p>
@@ -19828,7 +19833,7 @@
             <a:noFill/>
             <a:extLst>
               <a:ext uri="{909E8E84-426E-40dd-AFC4-6F175D3DCCD1}">
-                <a14:hiddenFill xmlns="" xmlns:a16="http://schemas.microsoft.com/office/drawing/2014/main" xmlns:a14="http://schemas.microsoft.com/office/drawing/2010/main" xmlns:p14="http://schemas.microsoft.com/office/powerpoint/2010/main">
+                <a14:hiddenFill xmlns:p14="http://schemas.microsoft.com/office/powerpoint/2010/main" xmlns:a14="http://schemas.microsoft.com/office/drawing/2010/main" xmlns:a16="http://schemas.microsoft.com/office/drawing/2014/main" xmlns="">
                   <a:solidFill>
                     <a:srgbClr val="FFFFFF"/>
                   </a:solidFill>
@@ -19948,7 +19953,7 @@
             </a:ln>
             <a:extLst>
               <a:ext uri="{91240B29-F687-4f45-9708-019B960494DF}">
-                <a14:hiddenLine xmlns="" xmlns:a16="http://schemas.microsoft.com/office/drawing/2014/main" xmlns:a14="http://schemas.microsoft.com/office/drawing/2010/main" xmlns:p14="http://schemas.microsoft.com/office/powerpoint/2010/main" w="9525">
+                <a14:hiddenLine xmlns:p14="http://schemas.microsoft.com/office/powerpoint/2010/main" xmlns:a14="http://schemas.microsoft.com/office/drawing/2010/main" xmlns:a16="http://schemas.microsoft.com/office/drawing/2014/main" xmlns="" w="9525">
                   <a:solidFill>
                     <a:srgbClr val="000000"/>
                   </a:solidFill>
@@ -20060,7 +20065,7 @@
             </a:ln>
             <a:extLst>
               <a:ext uri="{91240B29-F687-4f45-9708-019B960494DF}">
-                <a14:hiddenLine xmlns="" xmlns:a16="http://schemas.microsoft.com/office/drawing/2014/main" xmlns:a14="http://schemas.microsoft.com/office/drawing/2010/main" xmlns:p14="http://schemas.microsoft.com/office/powerpoint/2010/main" w="9525">
+                <a14:hiddenLine xmlns:p14="http://schemas.microsoft.com/office/powerpoint/2010/main" xmlns:a14="http://schemas.microsoft.com/office/drawing/2010/main" xmlns:a16="http://schemas.microsoft.com/office/drawing/2014/main" xmlns="" w="9525">
                   <a:solidFill>
                     <a:srgbClr val="000000"/>
                   </a:solidFill>
@@ -20172,7 +20177,7 @@
             </a:ln>
             <a:extLst>
               <a:ext uri="{91240B29-F687-4f45-9708-019B960494DF}">
-                <a14:hiddenLine xmlns="" xmlns:a16="http://schemas.microsoft.com/office/drawing/2014/main" xmlns:a14="http://schemas.microsoft.com/office/drawing/2010/main" xmlns:p14="http://schemas.microsoft.com/office/powerpoint/2010/main" w="9525">
+                <a14:hiddenLine xmlns:p14="http://schemas.microsoft.com/office/powerpoint/2010/main" xmlns:a14="http://schemas.microsoft.com/office/drawing/2010/main" xmlns:a16="http://schemas.microsoft.com/office/drawing/2014/main" xmlns="" w="9525">
                   <a:solidFill>
                     <a:srgbClr val="000000"/>
                   </a:solidFill>
@@ -20228,7 +20233,7 @@
             </a:ln>
             <a:extLst>
               <a:ext uri="{91240B29-F687-4f45-9708-019B960494DF}">
-                <a14:hiddenLine xmlns="" xmlns:a16="http://schemas.microsoft.com/office/drawing/2014/main" xmlns:a14="http://schemas.microsoft.com/office/drawing/2010/main" xmlns:p14="http://schemas.microsoft.com/office/powerpoint/2010/main" w="9525">
+                <a14:hiddenLine xmlns:p14="http://schemas.microsoft.com/office/powerpoint/2010/main" xmlns:a14="http://schemas.microsoft.com/office/drawing/2010/main" xmlns:a16="http://schemas.microsoft.com/office/drawing/2014/main" xmlns="" w="9525">
                   <a:solidFill>
                     <a:srgbClr val="000000"/>
                   </a:solidFill>
@@ -20340,7 +20345,7 @@
             </a:ln>
             <a:extLst>
               <a:ext uri="{91240B29-F687-4f45-9708-019B960494DF}">
-                <a14:hiddenLine xmlns="" xmlns:a16="http://schemas.microsoft.com/office/drawing/2014/main" xmlns:a14="http://schemas.microsoft.com/office/drawing/2010/main" xmlns:p14="http://schemas.microsoft.com/office/powerpoint/2010/main" w="9525">
+                <a14:hiddenLine xmlns:p14="http://schemas.microsoft.com/office/powerpoint/2010/main" xmlns:a14="http://schemas.microsoft.com/office/drawing/2010/main" xmlns:a16="http://schemas.microsoft.com/office/drawing/2014/main" xmlns="" w="9525">
                   <a:solidFill>
                     <a:srgbClr val="000000"/>
                   </a:solidFill>
@@ -20424,7 +20429,7 @@
             </a:ln>
             <a:extLst>
               <a:ext uri="{91240B29-F687-4f45-9708-019B960494DF}">
-                <a14:hiddenLine xmlns="" xmlns:a16="http://schemas.microsoft.com/office/drawing/2014/main" xmlns:a14="http://schemas.microsoft.com/office/drawing/2010/main" xmlns:p14="http://schemas.microsoft.com/office/powerpoint/2010/main" w="9525">
+                <a14:hiddenLine xmlns:p14="http://schemas.microsoft.com/office/powerpoint/2010/main" xmlns:a14="http://schemas.microsoft.com/office/drawing/2010/main" xmlns:a16="http://schemas.microsoft.com/office/drawing/2014/main" xmlns="" w="9525">
                   <a:solidFill>
                     <a:srgbClr val="000000"/>
                   </a:solidFill>
@@ -20508,7 +20513,7 @@
             </a:ln>
             <a:extLst>
               <a:ext uri="{91240B29-F687-4f45-9708-019B960494DF}">
-                <a14:hiddenLine xmlns="" xmlns:a16="http://schemas.microsoft.com/office/drawing/2014/main" xmlns:a14="http://schemas.microsoft.com/office/drawing/2010/main" xmlns:p14="http://schemas.microsoft.com/office/powerpoint/2010/main" w="9525">
+                <a14:hiddenLine xmlns:p14="http://schemas.microsoft.com/office/powerpoint/2010/main" xmlns:a14="http://schemas.microsoft.com/office/drawing/2010/main" xmlns:a16="http://schemas.microsoft.com/office/drawing/2014/main" xmlns="" w="9525">
                   <a:solidFill>
                     <a:srgbClr val="000000"/>
                   </a:solidFill>
@@ -20620,7 +20625,7 @@
             </a:ln>
             <a:extLst>
               <a:ext uri="{91240B29-F687-4f45-9708-019B960494DF}">
-                <a14:hiddenLine xmlns="" xmlns:a16="http://schemas.microsoft.com/office/drawing/2014/main" xmlns:a14="http://schemas.microsoft.com/office/drawing/2010/main" xmlns:p14="http://schemas.microsoft.com/office/powerpoint/2010/main" w="9525">
+                <a14:hiddenLine xmlns:p14="http://schemas.microsoft.com/office/powerpoint/2010/main" xmlns:a14="http://schemas.microsoft.com/office/drawing/2010/main" xmlns:a16="http://schemas.microsoft.com/office/drawing/2014/main" xmlns="" w="9525">
                   <a:solidFill>
                     <a:srgbClr val="000000"/>
                   </a:solidFill>
@@ -20704,7 +20709,7 @@
             </a:ln>
             <a:extLst>
               <a:ext uri="{91240B29-F687-4f45-9708-019B960494DF}">
-                <a14:hiddenLine xmlns="" xmlns:a16="http://schemas.microsoft.com/office/drawing/2014/main" xmlns:a14="http://schemas.microsoft.com/office/drawing/2010/main" xmlns:p14="http://schemas.microsoft.com/office/powerpoint/2010/main" w="9525">
+                <a14:hiddenLine xmlns:p14="http://schemas.microsoft.com/office/powerpoint/2010/main" xmlns:a14="http://schemas.microsoft.com/office/drawing/2010/main" xmlns:a16="http://schemas.microsoft.com/office/drawing/2014/main" xmlns="" w="9525">
                   <a:solidFill>
                     <a:srgbClr val="000000"/>
                   </a:solidFill>
@@ -20788,7 +20793,7 @@
             </a:ln>
             <a:extLst>
               <a:ext uri="{91240B29-F687-4f45-9708-019B960494DF}">
-                <a14:hiddenLine xmlns="" xmlns:a16="http://schemas.microsoft.com/office/drawing/2014/main" xmlns:a14="http://schemas.microsoft.com/office/drawing/2010/main" xmlns:p14="http://schemas.microsoft.com/office/powerpoint/2010/main" w="9525">
+                <a14:hiddenLine xmlns:p14="http://schemas.microsoft.com/office/powerpoint/2010/main" xmlns:a14="http://schemas.microsoft.com/office/drawing/2010/main" xmlns:a16="http://schemas.microsoft.com/office/drawing/2014/main" xmlns="" w="9525">
                   <a:solidFill>
                     <a:srgbClr val="000000"/>
                   </a:solidFill>
@@ -20900,7 +20905,7 @@
             </a:ln>
             <a:extLst>
               <a:ext uri="{91240B29-F687-4f45-9708-019B960494DF}">
-                <a14:hiddenLine xmlns="" xmlns:a16="http://schemas.microsoft.com/office/drawing/2014/main" xmlns:a14="http://schemas.microsoft.com/office/drawing/2010/main" xmlns:p14="http://schemas.microsoft.com/office/powerpoint/2010/main" w="9525">
+                <a14:hiddenLine xmlns:p14="http://schemas.microsoft.com/office/powerpoint/2010/main" xmlns:a14="http://schemas.microsoft.com/office/drawing/2010/main" xmlns:a16="http://schemas.microsoft.com/office/drawing/2014/main" xmlns="" w="9525">
                   <a:solidFill>
                     <a:srgbClr val="000000"/>
                   </a:solidFill>
@@ -21012,7 +21017,7 @@
             </a:ln>
             <a:extLst>
               <a:ext uri="{91240B29-F687-4f45-9708-019B960494DF}">
-                <a14:hiddenLine xmlns="" xmlns:a16="http://schemas.microsoft.com/office/drawing/2014/main" xmlns:a14="http://schemas.microsoft.com/office/drawing/2010/main" xmlns:p14="http://schemas.microsoft.com/office/powerpoint/2010/main" w="9525">
+                <a14:hiddenLine xmlns:p14="http://schemas.microsoft.com/office/powerpoint/2010/main" xmlns:a14="http://schemas.microsoft.com/office/drawing/2010/main" xmlns:a16="http://schemas.microsoft.com/office/drawing/2014/main" xmlns="" w="9525">
                   <a:solidFill>
                     <a:srgbClr val="000000"/>
                   </a:solidFill>
@@ -21096,7 +21101,7 @@
             </a:ln>
             <a:extLst>
               <a:ext uri="{91240B29-F687-4f45-9708-019B960494DF}">
-                <a14:hiddenLine xmlns="" xmlns:a16="http://schemas.microsoft.com/office/drawing/2014/main" xmlns:a14="http://schemas.microsoft.com/office/drawing/2010/main" xmlns:p14="http://schemas.microsoft.com/office/powerpoint/2010/main" w="9525">
+                <a14:hiddenLine xmlns:p14="http://schemas.microsoft.com/office/powerpoint/2010/main" xmlns:a14="http://schemas.microsoft.com/office/drawing/2010/main" xmlns:a16="http://schemas.microsoft.com/office/drawing/2014/main" xmlns="" w="9525">
                   <a:solidFill>
                     <a:srgbClr val="000000"/>
                   </a:solidFill>
@@ -21228,7 +21233,7 @@
             </a:ln>
             <a:extLst>
               <a:ext uri="{91240B29-F687-4f45-9708-019B960494DF}">
-                <a14:hiddenLine xmlns="" xmlns:a16="http://schemas.microsoft.com/office/drawing/2014/main" xmlns:a14="http://schemas.microsoft.com/office/drawing/2010/main" xmlns:p14="http://schemas.microsoft.com/office/powerpoint/2010/main" w="9525">
+                <a14:hiddenLine xmlns:p14="http://schemas.microsoft.com/office/powerpoint/2010/main" xmlns:a14="http://schemas.microsoft.com/office/drawing/2010/main" xmlns:a16="http://schemas.microsoft.com/office/drawing/2014/main" xmlns="" w="9525">
                   <a:solidFill>
                     <a:srgbClr val="000000"/>
                   </a:solidFill>
@@ -21312,7 +21317,7 @@
             </a:ln>
             <a:extLst>
               <a:ext uri="{91240B29-F687-4f45-9708-019B960494DF}">
-                <a14:hiddenLine xmlns="" xmlns:a16="http://schemas.microsoft.com/office/drawing/2014/main" xmlns:a14="http://schemas.microsoft.com/office/drawing/2010/main" xmlns:p14="http://schemas.microsoft.com/office/powerpoint/2010/main" w="9525">
+                <a14:hiddenLine xmlns:p14="http://schemas.microsoft.com/office/powerpoint/2010/main" xmlns:a14="http://schemas.microsoft.com/office/drawing/2010/main" xmlns:a16="http://schemas.microsoft.com/office/drawing/2014/main" xmlns="" w="9525">
                   <a:solidFill>
                     <a:srgbClr val="000000"/>
                   </a:solidFill>
@@ -21424,7 +21429,7 @@
             </a:ln>
             <a:extLst>
               <a:ext uri="{91240B29-F687-4f45-9708-019B960494DF}">
-                <a14:hiddenLine xmlns="" xmlns:a16="http://schemas.microsoft.com/office/drawing/2014/main" xmlns:a14="http://schemas.microsoft.com/office/drawing/2010/main" xmlns:p14="http://schemas.microsoft.com/office/powerpoint/2010/main" w="9525">
+                <a14:hiddenLine xmlns:p14="http://schemas.microsoft.com/office/powerpoint/2010/main" xmlns:a14="http://schemas.microsoft.com/office/drawing/2010/main" xmlns:a16="http://schemas.microsoft.com/office/drawing/2014/main" xmlns="" w="9525">
                   <a:solidFill>
                     <a:srgbClr val="000000"/>
                   </a:solidFill>
@@ -21536,7 +21541,7 @@
             </a:ln>
             <a:extLst>
               <a:ext uri="{91240B29-F687-4f45-9708-019B960494DF}">
-                <a14:hiddenLine xmlns="" xmlns:a16="http://schemas.microsoft.com/office/drawing/2014/main" xmlns:a14="http://schemas.microsoft.com/office/drawing/2010/main" xmlns:p14="http://schemas.microsoft.com/office/powerpoint/2010/main" w="9525">
+                <a14:hiddenLine xmlns:p14="http://schemas.microsoft.com/office/powerpoint/2010/main" xmlns:a14="http://schemas.microsoft.com/office/drawing/2010/main" xmlns:a16="http://schemas.microsoft.com/office/drawing/2014/main" xmlns="" w="9525">
                   <a:solidFill>
                     <a:srgbClr val="000000"/>
                   </a:solidFill>
@@ -21620,7 +21625,7 @@
             </a:ln>
             <a:extLst>
               <a:ext uri="{91240B29-F687-4f45-9708-019B960494DF}">
-                <a14:hiddenLine xmlns="" xmlns:a16="http://schemas.microsoft.com/office/drawing/2014/main" xmlns:a14="http://schemas.microsoft.com/office/drawing/2010/main" xmlns:p14="http://schemas.microsoft.com/office/powerpoint/2010/main" w="9525">
+                <a14:hiddenLine xmlns:p14="http://schemas.microsoft.com/office/powerpoint/2010/main" xmlns:a14="http://schemas.microsoft.com/office/drawing/2010/main" xmlns:a16="http://schemas.microsoft.com/office/drawing/2014/main" xmlns="" w="9525">
                   <a:solidFill>
                     <a:srgbClr val="000000"/>
                   </a:solidFill>
@@ -21732,7 +21737,7 @@
             </a:ln>
             <a:extLst>
               <a:ext uri="{91240B29-F687-4f45-9708-019B960494DF}">
-                <a14:hiddenLine xmlns="" xmlns:a16="http://schemas.microsoft.com/office/drawing/2014/main" xmlns:a14="http://schemas.microsoft.com/office/drawing/2010/main" xmlns:p14="http://schemas.microsoft.com/office/powerpoint/2010/main" w="9525">
+                <a14:hiddenLine xmlns:p14="http://schemas.microsoft.com/office/powerpoint/2010/main" xmlns:a14="http://schemas.microsoft.com/office/drawing/2010/main" xmlns:a16="http://schemas.microsoft.com/office/drawing/2014/main" xmlns="" w="9525">
                   <a:solidFill>
                     <a:srgbClr val="000000"/>
                   </a:solidFill>
@@ -21844,7 +21849,7 @@
             </a:ln>
             <a:extLst>
               <a:ext uri="{91240B29-F687-4f45-9708-019B960494DF}">
-                <a14:hiddenLine xmlns="" xmlns:a16="http://schemas.microsoft.com/office/drawing/2014/main" xmlns:a14="http://schemas.microsoft.com/office/drawing/2010/main" xmlns:p14="http://schemas.microsoft.com/office/powerpoint/2010/main" w="9525">
+                <a14:hiddenLine xmlns:p14="http://schemas.microsoft.com/office/powerpoint/2010/main" xmlns:a14="http://schemas.microsoft.com/office/drawing/2010/main" xmlns:a16="http://schemas.microsoft.com/office/drawing/2014/main" xmlns="" w="9525">
                   <a:solidFill>
                     <a:srgbClr val="000000"/>
                   </a:solidFill>
@@ -21922,7 +21927,7 @@
             </a:ln>
             <a:extLst>
               <a:ext uri="{91240B29-F687-4f45-9708-019B960494DF}">
-                <a14:hiddenLine xmlns="" xmlns:a16="http://schemas.microsoft.com/office/drawing/2014/main" xmlns:a14="http://schemas.microsoft.com/office/drawing/2010/main" xmlns:p14="http://schemas.microsoft.com/office/powerpoint/2010/main" w="9525">
+                <a14:hiddenLine xmlns:p14="http://schemas.microsoft.com/office/powerpoint/2010/main" xmlns:a14="http://schemas.microsoft.com/office/drawing/2010/main" xmlns:a16="http://schemas.microsoft.com/office/drawing/2014/main" xmlns="" w="9525">
                   <a:solidFill>
                     <a:srgbClr val="000000"/>
                   </a:solidFill>
@@ -22034,7 +22039,7 @@
             </a:ln>
             <a:extLst>
               <a:ext uri="{91240B29-F687-4f45-9708-019B960494DF}">
-                <a14:hiddenLine xmlns="" xmlns:a16="http://schemas.microsoft.com/office/drawing/2014/main" xmlns:a14="http://schemas.microsoft.com/office/drawing/2010/main" xmlns:p14="http://schemas.microsoft.com/office/powerpoint/2010/main" w="9525">
+                <a14:hiddenLine xmlns:p14="http://schemas.microsoft.com/office/powerpoint/2010/main" xmlns:a14="http://schemas.microsoft.com/office/drawing/2010/main" xmlns:a16="http://schemas.microsoft.com/office/drawing/2014/main" xmlns="" w="9525">
                   <a:solidFill>
                     <a:srgbClr val="000000"/>
                   </a:solidFill>
@@ -22112,7 +22117,7 @@
             </a:ln>
             <a:extLst>
               <a:ext uri="{91240B29-F687-4f45-9708-019B960494DF}">
-                <a14:hiddenLine xmlns="" xmlns:a16="http://schemas.microsoft.com/office/drawing/2014/main" xmlns:a14="http://schemas.microsoft.com/office/drawing/2010/main" xmlns:p14="http://schemas.microsoft.com/office/powerpoint/2010/main" w="9525">
+                <a14:hiddenLine xmlns:p14="http://schemas.microsoft.com/office/powerpoint/2010/main" xmlns:a14="http://schemas.microsoft.com/office/drawing/2010/main" xmlns:a16="http://schemas.microsoft.com/office/drawing/2014/main" xmlns="" w="9525">
                   <a:solidFill>
                     <a:srgbClr val="000000"/>
                   </a:solidFill>
@@ -22224,7 +22229,7 @@
             </a:ln>
             <a:extLst>
               <a:ext uri="{91240B29-F687-4f45-9708-019B960494DF}">
-                <a14:hiddenLine xmlns="" xmlns:a16="http://schemas.microsoft.com/office/drawing/2014/main" xmlns:a14="http://schemas.microsoft.com/office/drawing/2010/main" xmlns:p14="http://schemas.microsoft.com/office/powerpoint/2010/main" w="9525">
+                <a14:hiddenLine xmlns:p14="http://schemas.microsoft.com/office/powerpoint/2010/main" xmlns:a14="http://schemas.microsoft.com/office/drawing/2010/main" xmlns:a16="http://schemas.microsoft.com/office/drawing/2014/main" xmlns="" w="9525">
                   <a:solidFill>
                     <a:srgbClr val="000000"/>
                   </a:solidFill>
@@ -22314,7 +22319,7 @@
             </a:ln>
             <a:extLst>
               <a:ext uri="{91240B29-F687-4f45-9708-019B960494DF}">
-                <a14:hiddenLine xmlns="" xmlns:a16="http://schemas.microsoft.com/office/drawing/2014/main" xmlns:a14="http://schemas.microsoft.com/office/drawing/2010/main" xmlns:p14="http://schemas.microsoft.com/office/powerpoint/2010/main" w="9525">
+                <a14:hiddenLine xmlns:p14="http://schemas.microsoft.com/office/powerpoint/2010/main" xmlns:a14="http://schemas.microsoft.com/office/drawing/2010/main" xmlns:a16="http://schemas.microsoft.com/office/drawing/2014/main" xmlns="" w="9525">
                   <a:solidFill>
                     <a:srgbClr val="000000"/>
                   </a:solidFill>
@@ -22426,7 +22431,7 @@
             </a:ln>
             <a:extLst>
               <a:ext uri="{91240B29-F687-4f45-9708-019B960494DF}">
-                <a14:hiddenLine xmlns="" xmlns:a16="http://schemas.microsoft.com/office/drawing/2014/main" xmlns:a14="http://schemas.microsoft.com/office/drawing/2010/main" xmlns:p14="http://schemas.microsoft.com/office/powerpoint/2010/main" w="9525">
+                <a14:hiddenLine xmlns:p14="http://schemas.microsoft.com/office/powerpoint/2010/main" xmlns:a14="http://schemas.microsoft.com/office/drawing/2010/main" xmlns:a16="http://schemas.microsoft.com/office/drawing/2014/main" xmlns="" w="9525">
                   <a:solidFill>
                     <a:srgbClr val="000000"/>
                   </a:solidFill>
@@ -22516,7 +22521,7 @@
             </a:ln>
             <a:extLst>
               <a:ext uri="{91240B29-F687-4f45-9708-019B960494DF}">
-                <a14:hiddenLine xmlns="" xmlns:a16="http://schemas.microsoft.com/office/drawing/2014/main" xmlns:a14="http://schemas.microsoft.com/office/drawing/2010/main" xmlns:p14="http://schemas.microsoft.com/office/powerpoint/2010/main" w="9525">
+                <a14:hiddenLine xmlns:p14="http://schemas.microsoft.com/office/powerpoint/2010/main" xmlns:a14="http://schemas.microsoft.com/office/drawing/2010/main" xmlns:a16="http://schemas.microsoft.com/office/drawing/2014/main" xmlns="" w="9525">
                   <a:solidFill>
                     <a:srgbClr val="000000"/>
                   </a:solidFill>
@@ -22628,7 +22633,7 @@
             </a:ln>
             <a:extLst>
               <a:ext uri="{91240B29-F687-4f45-9708-019B960494DF}">
-                <a14:hiddenLine xmlns="" xmlns:a16="http://schemas.microsoft.com/office/drawing/2014/main" xmlns:a14="http://schemas.microsoft.com/office/drawing/2010/main" xmlns:p14="http://schemas.microsoft.com/office/powerpoint/2010/main" w="9525">
+                <a14:hiddenLine xmlns:p14="http://schemas.microsoft.com/office/powerpoint/2010/main" xmlns:a14="http://schemas.microsoft.com/office/drawing/2010/main" xmlns:a16="http://schemas.microsoft.com/office/drawing/2014/main" xmlns="" w="9525">
                   <a:solidFill>
                     <a:srgbClr val="000000"/>
                   </a:solidFill>
@@ -22684,7 +22689,7 @@
             </a:ln>
             <a:extLst>
               <a:ext uri="{91240B29-F687-4f45-9708-019B960494DF}">
-                <a14:hiddenLine xmlns="" xmlns:a16="http://schemas.microsoft.com/office/drawing/2014/main" xmlns:a14="http://schemas.microsoft.com/office/drawing/2010/main" xmlns:p14="http://schemas.microsoft.com/office/powerpoint/2010/main" w="9525">
+                <a14:hiddenLine xmlns:p14="http://schemas.microsoft.com/office/powerpoint/2010/main" xmlns:a14="http://schemas.microsoft.com/office/drawing/2010/main" xmlns:a16="http://schemas.microsoft.com/office/drawing/2014/main" xmlns="" w="9525">
                   <a:solidFill>
                     <a:srgbClr val="000000"/>
                   </a:solidFill>
@@ -22796,7 +22801,7 @@
             </a:ln>
             <a:extLst>
               <a:ext uri="{91240B29-F687-4f45-9708-019B960494DF}">
-                <a14:hiddenLine xmlns="" xmlns:a16="http://schemas.microsoft.com/office/drawing/2014/main" xmlns:a14="http://schemas.microsoft.com/office/drawing/2010/main" xmlns:p14="http://schemas.microsoft.com/office/powerpoint/2010/main" w="9525">
+                <a14:hiddenLine xmlns:p14="http://schemas.microsoft.com/office/powerpoint/2010/main" xmlns:a14="http://schemas.microsoft.com/office/drawing/2010/main" xmlns:a16="http://schemas.microsoft.com/office/drawing/2014/main" xmlns="" w="9525">
                   <a:solidFill>
                     <a:srgbClr val="000000"/>
                   </a:solidFill>
@@ -22880,7 +22885,7 @@
             </a:ln>
             <a:extLst>
               <a:ext uri="{91240B29-F687-4f45-9708-019B960494DF}">
-                <a14:hiddenLine xmlns="" xmlns:a16="http://schemas.microsoft.com/office/drawing/2014/main" xmlns:a14="http://schemas.microsoft.com/office/drawing/2010/main" xmlns:p14="http://schemas.microsoft.com/office/powerpoint/2010/main" w="9525">
+                <a14:hiddenLine xmlns:p14="http://schemas.microsoft.com/office/powerpoint/2010/main" xmlns:a14="http://schemas.microsoft.com/office/drawing/2010/main" xmlns:a16="http://schemas.microsoft.com/office/drawing/2014/main" xmlns="" w="9525">
                   <a:solidFill>
                     <a:srgbClr val="000000"/>
                   </a:solidFill>
@@ -22964,7 +22969,7 @@
             </a:ln>
             <a:extLst>
               <a:ext uri="{91240B29-F687-4f45-9708-019B960494DF}">
-                <a14:hiddenLine xmlns="" xmlns:a16="http://schemas.microsoft.com/office/drawing/2014/main" xmlns:a14="http://schemas.microsoft.com/office/drawing/2010/main" xmlns:p14="http://schemas.microsoft.com/office/powerpoint/2010/main" w="9525">
+                <a14:hiddenLine xmlns:p14="http://schemas.microsoft.com/office/powerpoint/2010/main" xmlns:a14="http://schemas.microsoft.com/office/drawing/2010/main" xmlns:a16="http://schemas.microsoft.com/office/drawing/2014/main" xmlns="" w="9525">
                   <a:solidFill>
                     <a:srgbClr val="000000"/>
                   </a:solidFill>
@@ -23076,7 +23081,7 @@
             </a:ln>
             <a:extLst>
               <a:ext uri="{91240B29-F687-4f45-9708-019B960494DF}">
-                <a14:hiddenLine xmlns="" xmlns:a16="http://schemas.microsoft.com/office/drawing/2014/main" xmlns:a14="http://schemas.microsoft.com/office/drawing/2010/main" xmlns:p14="http://schemas.microsoft.com/office/powerpoint/2010/main" w="9525">
+                <a14:hiddenLine xmlns:p14="http://schemas.microsoft.com/office/powerpoint/2010/main" xmlns:a14="http://schemas.microsoft.com/office/drawing/2010/main" xmlns:a16="http://schemas.microsoft.com/office/drawing/2014/main" xmlns="" w="9525">
                   <a:solidFill>
                     <a:srgbClr val="000000"/>
                   </a:solidFill>
@@ -23166,7 +23171,7 @@
             </a:ln>
             <a:extLst>
               <a:ext uri="{91240B29-F687-4f45-9708-019B960494DF}">
-                <a14:hiddenLine xmlns="" xmlns:a16="http://schemas.microsoft.com/office/drawing/2014/main" xmlns:a14="http://schemas.microsoft.com/office/drawing/2010/main" xmlns:p14="http://schemas.microsoft.com/office/powerpoint/2010/main" w="9525">
+                <a14:hiddenLine xmlns:p14="http://schemas.microsoft.com/office/powerpoint/2010/main" xmlns:a14="http://schemas.microsoft.com/office/drawing/2010/main" xmlns:a16="http://schemas.microsoft.com/office/drawing/2014/main" xmlns="" w="9525">
                   <a:solidFill>
                     <a:srgbClr val="000000"/>
                   </a:solidFill>
@@ -23250,7 +23255,7 @@
             </a:ln>
             <a:extLst>
               <a:ext uri="{91240B29-F687-4f45-9708-019B960494DF}">
-                <a14:hiddenLine xmlns="" xmlns:a16="http://schemas.microsoft.com/office/drawing/2014/main" xmlns:a14="http://schemas.microsoft.com/office/drawing/2010/main" xmlns:p14="http://schemas.microsoft.com/office/powerpoint/2010/main" w="9525">
+                <a14:hiddenLine xmlns:p14="http://schemas.microsoft.com/office/powerpoint/2010/main" xmlns:a14="http://schemas.microsoft.com/office/drawing/2010/main" xmlns:a16="http://schemas.microsoft.com/office/drawing/2014/main" xmlns="" w="9525">
                   <a:solidFill>
                     <a:srgbClr val="000000"/>
                   </a:solidFill>
@@ -23362,7 +23367,7 @@
             </a:ln>
             <a:extLst>
               <a:ext uri="{91240B29-F687-4f45-9708-019B960494DF}">
-                <a14:hiddenLine xmlns="" xmlns:a16="http://schemas.microsoft.com/office/drawing/2014/main" xmlns:a14="http://schemas.microsoft.com/office/drawing/2010/main" xmlns:p14="http://schemas.microsoft.com/office/powerpoint/2010/main" w="9525">
+                <a14:hiddenLine xmlns:p14="http://schemas.microsoft.com/office/powerpoint/2010/main" xmlns:a14="http://schemas.microsoft.com/office/drawing/2010/main" xmlns:a16="http://schemas.microsoft.com/office/drawing/2014/main" xmlns="" w="9525">
                   <a:solidFill>
                     <a:srgbClr val="000000"/>
                   </a:solidFill>
@@ -23446,7 +23451,7 @@
             </a:ln>
             <a:extLst>
               <a:ext uri="{91240B29-F687-4f45-9708-019B960494DF}">
-                <a14:hiddenLine xmlns="" xmlns:a16="http://schemas.microsoft.com/office/drawing/2014/main" xmlns:a14="http://schemas.microsoft.com/office/drawing/2010/main" xmlns:p14="http://schemas.microsoft.com/office/powerpoint/2010/main" w="9525">
+                <a14:hiddenLine xmlns:p14="http://schemas.microsoft.com/office/powerpoint/2010/main" xmlns:a14="http://schemas.microsoft.com/office/drawing/2010/main" xmlns:a16="http://schemas.microsoft.com/office/drawing/2014/main" xmlns="" w="9525">
                   <a:solidFill>
                     <a:srgbClr val="000000"/>
                   </a:solidFill>
@@ -23558,7 +23563,7 @@
             </a:ln>
             <a:extLst>
               <a:ext uri="{91240B29-F687-4f45-9708-019B960494DF}">
-                <a14:hiddenLine xmlns="" xmlns:a16="http://schemas.microsoft.com/office/drawing/2014/main" xmlns:a14="http://schemas.microsoft.com/office/drawing/2010/main" xmlns:p14="http://schemas.microsoft.com/office/powerpoint/2010/main" w="9525">
+                <a14:hiddenLine xmlns:p14="http://schemas.microsoft.com/office/powerpoint/2010/main" xmlns:a14="http://schemas.microsoft.com/office/drawing/2010/main" xmlns:a16="http://schemas.microsoft.com/office/drawing/2014/main" xmlns="" w="9525">
                   <a:solidFill>
                     <a:srgbClr val="000000"/>
                   </a:solidFill>
@@ -23642,7 +23647,7 @@
             </a:ln>
             <a:extLst>
               <a:ext uri="{91240B29-F687-4f45-9708-019B960494DF}">
-                <a14:hiddenLine xmlns="" xmlns:a16="http://schemas.microsoft.com/office/drawing/2014/main" xmlns:a14="http://schemas.microsoft.com/office/drawing/2010/main" xmlns:p14="http://schemas.microsoft.com/office/powerpoint/2010/main" w="9525">
+                <a14:hiddenLine xmlns:p14="http://schemas.microsoft.com/office/powerpoint/2010/main" xmlns:a14="http://schemas.microsoft.com/office/drawing/2010/main" xmlns:a16="http://schemas.microsoft.com/office/drawing/2014/main" xmlns="" w="9525">
                   <a:solidFill>
                     <a:srgbClr val="000000"/>
                   </a:solidFill>
@@ -23754,7 +23759,7 @@
             </a:ln>
             <a:extLst>
               <a:ext uri="{91240B29-F687-4f45-9708-019B960494DF}">
-                <a14:hiddenLine xmlns="" xmlns:a16="http://schemas.microsoft.com/office/drawing/2014/main" xmlns:a14="http://schemas.microsoft.com/office/drawing/2010/main" xmlns:p14="http://schemas.microsoft.com/office/powerpoint/2010/main" w="9525">
+                <a14:hiddenLine xmlns:p14="http://schemas.microsoft.com/office/powerpoint/2010/main" xmlns:a14="http://schemas.microsoft.com/office/drawing/2010/main" xmlns:a16="http://schemas.microsoft.com/office/drawing/2014/main" xmlns="" w="9525">
                   <a:solidFill>
                     <a:srgbClr val="000000"/>
                   </a:solidFill>
@@ -23810,7 +23815,7 @@
             </a:ln>
             <a:extLst>
               <a:ext uri="{91240B29-F687-4f45-9708-019B960494DF}">
-                <a14:hiddenLine xmlns="" xmlns:a16="http://schemas.microsoft.com/office/drawing/2014/main" xmlns:a14="http://schemas.microsoft.com/office/drawing/2010/main" xmlns:p14="http://schemas.microsoft.com/office/powerpoint/2010/main" w="9525">
+                <a14:hiddenLine xmlns:p14="http://schemas.microsoft.com/office/powerpoint/2010/main" xmlns:a14="http://schemas.microsoft.com/office/drawing/2010/main" xmlns:a16="http://schemas.microsoft.com/office/drawing/2014/main" xmlns="" w="9525">
                   <a:solidFill>
                     <a:srgbClr val="000000"/>
                   </a:solidFill>
@@ -23897,7 +23902,7 @@
             </a:ln>
             <a:extLst>
               <a:ext uri="{91240B29-F687-4f45-9708-019B960494DF}">
-                <a14:hiddenLine xmlns="" xmlns:a16="http://schemas.microsoft.com/office/drawing/2014/main" xmlns:a14="http://schemas.microsoft.com/office/drawing/2010/main" xmlns:p14="http://schemas.microsoft.com/office/powerpoint/2010/main" w="9525">
+                <a14:hiddenLine xmlns:p14="http://schemas.microsoft.com/office/powerpoint/2010/main" xmlns:a14="http://schemas.microsoft.com/office/drawing/2010/main" xmlns:a16="http://schemas.microsoft.com/office/drawing/2014/main" xmlns="" w="9525">
                   <a:solidFill>
                     <a:srgbClr val="000000"/>
                   </a:solidFill>
@@ -24009,7 +24014,7 @@
             </a:ln>
             <a:extLst>
               <a:ext uri="{91240B29-F687-4f45-9708-019B960494DF}">
-                <a14:hiddenLine xmlns="" xmlns:a16="http://schemas.microsoft.com/office/drawing/2014/main" xmlns:a14="http://schemas.microsoft.com/office/drawing/2010/main" xmlns:p14="http://schemas.microsoft.com/office/powerpoint/2010/main" w="9525">
+                <a14:hiddenLine xmlns:p14="http://schemas.microsoft.com/office/powerpoint/2010/main" xmlns:a14="http://schemas.microsoft.com/office/drawing/2010/main" xmlns:a16="http://schemas.microsoft.com/office/drawing/2014/main" xmlns="" w="9525">
                   <a:solidFill>
                     <a:srgbClr val="000000"/>
                   </a:solidFill>
@@ -24093,7 +24098,7 @@
             </a:ln>
             <a:extLst>
               <a:ext uri="{91240B29-F687-4f45-9708-019B960494DF}">
-                <a14:hiddenLine xmlns="" xmlns:a16="http://schemas.microsoft.com/office/drawing/2014/main" xmlns:a14="http://schemas.microsoft.com/office/drawing/2010/main" xmlns:p14="http://schemas.microsoft.com/office/powerpoint/2010/main" w="9525">
+                <a14:hiddenLine xmlns:p14="http://schemas.microsoft.com/office/powerpoint/2010/main" xmlns:a14="http://schemas.microsoft.com/office/drawing/2010/main" xmlns:a16="http://schemas.microsoft.com/office/drawing/2014/main" xmlns="" w="9525">
                   <a:solidFill>
                     <a:srgbClr val="000000"/>
                   </a:solidFill>
@@ -24205,7 +24210,7 @@
             </a:ln>
             <a:extLst>
               <a:ext uri="{91240B29-F687-4f45-9708-019B960494DF}">
-                <a14:hiddenLine xmlns="" xmlns:a16="http://schemas.microsoft.com/office/drawing/2014/main" xmlns:a14="http://schemas.microsoft.com/office/drawing/2010/main" xmlns:p14="http://schemas.microsoft.com/office/powerpoint/2010/main" w="9525">
+                <a14:hiddenLine xmlns:p14="http://schemas.microsoft.com/office/powerpoint/2010/main" xmlns:a14="http://schemas.microsoft.com/office/drawing/2010/main" xmlns:a16="http://schemas.microsoft.com/office/drawing/2014/main" xmlns="" w="9525">
                   <a:solidFill>
                     <a:srgbClr val="000000"/>
                   </a:solidFill>
@@ -24317,7 +24322,7 @@
             </a:ln>
             <a:extLst>
               <a:ext uri="{91240B29-F687-4f45-9708-019B960494DF}">
-                <a14:hiddenLine xmlns="" xmlns:a16="http://schemas.microsoft.com/office/drawing/2014/main" xmlns:a14="http://schemas.microsoft.com/office/drawing/2010/main" xmlns:p14="http://schemas.microsoft.com/office/powerpoint/2010/main" w="9525">
+                <a14:hiddenLine xmlns:p14="http://schemas.microsoft.com/office/powerpoint/2010/main" xmlns:a14="http://schemas.microsoft.com/office/drawing/2010/main" xmlns:a16="http://schemas.microsoft.com/office/drawing/2014/main" xmlns="" w="9525">
                   <a:solidFill>
                     <a:srgbClr val="000000"/>
                   </a:solidFill>
@@ -24404,7 +24409,7 @@
             </a:ln>
             <a:extLst>
               <a:ext uri="{91240B29-F687-4f45-9708-019B960494DF}">
-                <a14:hiddenLine xmlns="" xmlns:a16="http://schemas.microsoft.com/office/drawing/2014/main" xmlns:a14="http://schemas.microsoft.com/office/drawing/2010/main" xmlns:p14="http://schemas.microsoft.com/office/powerpoint/2010/main" w="9525">
+                <a14:hiddenLine xmlns:p14="http://schemas.microsoft.com/office/powerpoint/2010/main" xmlns:a14="http://schemas.microsoft.com/office/drawing/2010/main" xmlns:a16="http://schemas.microsoft.com/office/drawing/2014/main" xmlns="" w="9525">
                   <a:solidFill>
                     <a:srgbClr val="000000"/>
                   </a:solidFill>
@@ -24488,7 +24493,7 @@
             </a:ln>
             <a:extLst>
               <a:ext uri="{91240B29-F687-4f45-9708-019B960494DF}">
-                <a14:hiddenLine xmlns="" xmlns:a16="http://schemas.microsoft.com/office/drawing/2014/main" xmlns:a14="http://schemas.microsoft.com/office/drawing/2010/main" xmlns:p14="http://schemas.microsoft.com/office/powerpoint/2010/main" w="9525">
+                <a14:hiddenLine xmlns:p14="http://schemas.microsoft.com/office/powerpoint/2010/main" xmlns:a14="http://schemas.microsoft.com/office/drawing/2010/main" xmlns:a16="http://schemas.microsoft.com/office/drawing/2014/main" xmlns="" w="9525">
                   <a:solidFill>
                     <a:srgbClr val="000000"/>
                   </a:solidFill>
@@ -24600,7 +24605,7 @@
             </a:ln>
             <a:extLst>
               <a:ext uri="{91240B29-F687-4f45-9708-019B960494DF}">
-                <a14:hiddenLine xmlns="" xmlns:a16="http://schemas.microsoft.com/office/drawing/2014/main" xmlns:a14="http://schemas.microsoft.com/office/drawing/2010/main" xmlns:p14="http://schemas.microsoft.com/office/powerpoint/2010/main" w="9525">
+                <a14:hiddenLine xmlns:p14="http://schemas.microsoft.com/office/powerpoint/2010/main" xmlns:a14="http://schemas.microsoft.com/office/drawing/2010/main" xmlns:a16="http://schemas.microsoft.com/office/drawing/2014/main" xmlns="" w="9525">
                   <a:solidFill>
                     <a:srgbClr val="000000"/>
                   </a:solidFill>
@@ -24712,7 +24717,7 @@
             </a:ln>
             <a:extLst>
               <a:ext uri="{91240B29-F687-4f45-9708-019B960494DF}">
-                <a14:hiddenLine xmlns="" xmlns:a16="http://schemas.microsoft.com/office/drawing/2014/main" xmlns:a14="http://schemas.microsoft.com/office/drawing/2010/main" xmlns:p14="http://schemas.microsoft.com/office/powerpoint/2010/main" w="9525">
+                <a14:hiddenLine xmlns:p14="http://schemas.microsoft.com/office/powerpoint/2010/main" xmlns:a14="http://schemas.microsoft.com/office/drawing/2010/main" xmlns:a16="http://schemas.microsoft.com/office/drawing/2014/main" xmlns="" w="9525">
                   <a:solidFill>
                     <a:srgbClr val="000000"/>
                   </a:solidFill>
@@ -24796,7 +24801,7 @@
             </a:ln>
             <a:extLst>
               <a:ext uri="{91240B29-F687-4f45-9708-019B960494DF}">
-                <a14:hiddenLine xmlns="" xmlns:a16="http://schemas.microsoft.com/office/drawing/2014/main" xmlns:a14="http://schemas.microsoft.com/office/drawing/2010/main" xmlns:p14="http://schemas.microsoft.com/office/powerpoint/2010/main" w="9525">
+                <a14:hiddenLine xmlns:p14="http://schemas.microsoft.com/office/powerpoint/2010/main" xmlns:a14="http://schemas.microsoft.com/office/drawing/2010/main" xmlns:a16="http://schemas.microsoft.com/office/drawing/2014/main" xmlns="" w="9525">
                   <a:solidFill>
                     <a:srgbClr val="000000"/>
                   </a:solidFill>
@@ -24938,7 +24943,7 @@
             </a:ln>
             <a:extLst>
               <a:ext uri="{91240B29-F687-4f45-9708-019B960494DF}">
-                <a14:hiddenLine xmlns="" xmlns:a16="http://schemas.microsoft.com/office/drawing/2014/main" xmlns:a14="http://schemas.microsoft.com/office/drawing/2010/main" xmlns:p14="http://schemas.microsoft.com/office/powerpoint/2010/main" w="9525">
+                <a14:hiddenLine xmlns:p14="http://schemas.microsoft.com/office/powerpoint/2010/main" xmlns:a14="http://schemas.microsoft.com/office/drawing/2010/main" xmlns:a16="http://schemas.microsoft.com/office/drawing/2014/main" xmlns="" w="9525">
                   <a:solidFill>
                     <a:srgbClr val="000000"/>
                   </a:solidFill>
@@ -25028,7 +25033,7 @@
             </a:ln>
             <a:extLst>
               <a:ext uri="{91240B29-F687-4f45-9708-019B960494DF}">
-                <a14:hiddenLine xmlns="" xmlns:a16="http://schemas.microsoft.com/office/drawing/2014/main" xmlns:a14="http://schemas.microsoft.com/office/drawing/2010/main" xmlns:p14="http://schemas.microsoft.com/office/powerpoint/2010/main" w="9525">
+                <a14:hiddenLine xmlns:p14="http://schemas.microsoft.com/office/powerpoint/2010/main" xmlns:a14="http://schemas.microsoft.com/office/drawing/2010/main" xmlns:a16="http://schemas.microsoft.com/office/drawing/2014/main" xmlns="" w="9525">
                   <a:solidFill>
                     <a:srgbClr val="000000"/>
                   </a:solidFill>
@@ -25140,7 +25145,7 @@
             </a:ln>
             <a:extLst>
               <a:ext uri="{91240B29-F687-4f45-9708-019B960494DF}">
-                <a14:hiddenLine xmlns="" xmlns:a16="http://schemas.microsoft.com/office/drawing/2014/main" xmlns:a14="http://schemas.microsoft.com/office/drawing/2010/main" xmlns:p14="http://schemas.microsoft.com/office/powerpoint/2010/main" w="9525">
+                <a14:hiddenLine xmlns:p14="http://schemas.microsoft.com/office/powerpoint/2010/main" xmlns:a14="http://schemas.microsoft.com/office/drawing/2010/main" xmlns:a16="http://schemas.microsoft.com/office/drawing/2014/main" xmlns="" w="9525">
                   <a:solidFill>
                     <a:srgbClr val="000000"/>
                   </a:solidFill>
@@ -25741,7 +25746,7 @@
             <a:noFill/>
             <a:extLst>
               <a:ext uri="{909E8E84-426E-40dd-AFC4-6F175D3DCCD1}">
-                <a14:hiddenFill xmlns="" xmlns:a16="http://schemas.microsoft.com/office/drawing/2014/main" xmlns:a14="http://schemas.microsoft.com/office/drawing/2010/main" xmlns:p14="http://schemas.microsoft.com/office/powerpoint/2010/main">
+                <a14:hiddenFill xmlns:p14="http://schemas.microsoft.com/office/powerpoint/2010/main" xmlns:a14="http://schemas.microsoft.com/office/drawing/2010/main" xmlns:a16="http://schemas.microsoft.com/office/drawing/2014/main" xmlns="">
                   <a:solidFill>
                     <a:srgbClr val="FFFFFF"/>
                   </a:solidFill>
@@ -28693,7 +28698,7 @@
             <a:noFill/>
             <a:extLst>
               <a:ext uri="{909E8E84-426E-40dd-AFC4-6F175D3DCCD1}">
-                <a14:hiddenFill xmlns="" xmlns:a16="http://schemas.microsoft.com/office/drawing/2014/main" xmlns:a14="http://schemas.microsoft.com/office/drawing/2010/main" xmlns:p14="http://schemas.microsoft.com/office/powerpoint/2010/main">
+                <a14:hiddenFill xmlns:p14="http://schemas.microsoft.com/office/powerpoint/2010/main" xmlns:a14="http://schemas.microsoft.com/office/drawing/2010/main" xmlns:a16="http://schemas.microsoft.com/office/drawing/2014/main" xmlns="">
                   <a:solidFill>
                     <a:srgbClr val="FFFFFF"/>
                   </a:solidFill>
@@ -28850,7 +28855,7 @@
             </a:ln>
             <a:extLst>
               <a:ext uri="{91240B29-F687-4f45-9708-019B960494DF}">
-                <a14:hiddenLine xmlns="" xmlns:a16="http://schemas.microsoft.com/office/drawing/2014/main" xmlns:a14="http://schemas.microsoft.com/office/drawing/2010/main" xmlns:p14="http://schemas.microsoft.com/office/powerpoint/2010/main" w="9525">
+                <a14:hiddenLine xmlns:p14="http://schemas.microsoft.com/office/powerpoint/2010/main" xmlns:a14="http://schemas.microsoft.com/office/drawing/2010/main" xmlns:a16="http://schemas.microsoft.com/office/drawing/2014/main" xmlns="" w="9525">
                   <a:solidFill>
                     <a:srgbClr val="000000"/>
                   </a:solidFill>
@@ -28962,7 +28967,7 @@
             </a:ln>
             <a:extLst>
               <a:ext uri="{91240B29-F687-4f45-9708-019B960494DF}">
-                <a14:hiddenLine xmlns="" xmlns:a16="http://schemas.microsoft.com/office/drawing/2014/main" xmlns:a14="http://schemas.microsoft.com/office/drawing/2010/main" xmlns:p14="http://schemas.microsoft.com/office/powerpoint/2010/main" w="9525">
+                <a14:hiddenLine xmlns:p14="http://schemas.microsoft.com/office/powerpoint/2010/main" xmlns:a14="http://schemas.microsoft.com/office/drawing/2010/main" xmlns:a16="http://schemas.microsoft.com/office/drawing/2014/main" xmlns="" w="9525">
                   <a:solidFill>
                     <a:srgbClr val="000000"/>
                   </a:solidFill>
@@ -29074,7 +29079,7 @@
             </a:ln>
             <a:extLst>
               <a:ext uri="{91240B29-F687-4f45-9708-019B960494DF}">
-                <a14:hiddenLine xmlns="" xmlns:a16="http://schemas.microsoft.com/office/drawing/2014/main" xmlns:a14="http://schemas.microsoft.com/office/drawing/2010/main" xmlns:p14="http://schemas.microsoft.com/office/powerpoint/2010/main" w="9525">
+                <a14:hiddenLine xmlns:p14="http://schemas.microsoft.com/office/powerpoint/2010/main" xmlns:a14="http://schemas.microsoft.com/office/drawing/2010/main" xmlns:a16="http://schemas.microsoft.com/office/drawing/2014/main" xmlns="" w="9525">
                   <a:solidFill>
                     <a:srgbClr val="000000"/>
                   </a:solidFill>
@@ -29130,7 +29135,7 @@
             </a:ln>
             <a:extLst>
               <a:ext uri="{91240B29-F687-4f45-9708-019B960494DF}">
-                <a14:hiddenLine xmlns="" xmlns:a16="http://schemas.microsoft.com/office/drawing/2014/main" xmlns:a14="http://schemas.microsoft.com/office/drawing/2010/main" xmlns:p14="http://schemas.microsoft.com/office/powerpoint/2010/main" w="9525">
+                <a14:hiddenLine xmlns:p14="http://schemas.microsoft.com/office/powerpoint/2010/main" xmlns:a14="http://schemas.microsoft.com/office/drawing/2010/main" xmlns:a16="http://schemas.microsoft.com/office/drawing/2014/main" xmlns="" w="9525">
                   <a:solidFill>
                     <a:srgbClr val="000000"/>
                   </a:solidFill>
@@ -29242,7 +29247,7 @@
             </a:ln>
             <a:extLst>
               <a:ext uri="{91240B29-F687-4f45-9708-019B960494DF}">
-                <a14:hiddenLine xmlns="" xmlns:a16="http://schemas.microsoft.com/office/drawing/2014/main" xmlns:a14="http://schemas.microsoft.com/office/drawing/2010/main" xmlns:p14="http://schemas.microsoft.com/office/powerpoint/2010/main" w="9525">
+                <a14:hiddenLine xmlns:p14="http://schemas.microsoft.com/office/powerpoint/2010/main" xmlns:a14="http://schemas.microsoft.com/office/drawing/2010/main" xmlns:a16="http://schemas.microsoft.com/office/drawing/2014/main" xmlns="" w="9525">
                   <a:solidFill>
                     <a:srgbClr val="000000"/>
                   </a:solidFill>
@@ -29326,7 +29331,7 @@
             </a:ln>
             <a:extLst>
               <a:ext uri="{91240B29-F687-4f45-9708-019B960494DF}">
-                <a14:hiddenLine xmlns="" xmlns:a16="http://schemas.microsoft.com/office/drawing/2014/main" xmlns:a14="http://schemas.microsoft.com/office/drawing/2010/main" xmlns:p14="http://schemas.microsoft.com/office/powerpoint/2010/main" w="9525">
+                <a14:hiddenLine xmlns:p14="http://schemas.microsoft.com/office/powerpoint/2010/main" xmlns:a14="http://schemas.microsoft.com/office/drawing/2010/main" xmlns:a16="http://schemas.microsoft.com/office/drawing/2014/main" xmlns="" w="9525">
                   <a:solidFill>
                     <a:srgbClr val="000000"/>
                   </a:solidFill>
@@ -29410,7 +29415,7 @@
             </a:ln>
             <a:extLst>
               <a:ext uri="{91240B29-F687-4f45-9708-019B960494DF}">
-                <a14:hiddenLine xmlns="" xmlns:a16="http://schemas.microsoft.com/office/drawing/2014/main" xmlns:a14="http://schemas.microsoft.com/office/drawing/2010/main" xmlns:p14="http://schemas.microsoft.com/office/powerpoint/2010/main" w="9525">
+                <a14:hiddenLine xmlns:p14="http://schemas.microsoft.com/office/powerpoint/2010/main" xmlns:a14="http://schemas.microsoft.com/office/drawing/2010/main" xmlns:a16="http://schemas.microsoft.com/office/drawing/2014/main" xmlns="" w="9525">
                   <a:solidFill>
                     <a:srgbClr val="000000"/>
                   </a:solidFill>
@@ -29522,7 +29527,7 @@
             </a:ln>
             <a:extLst>
               <a:ext uri="{91240B29-F687-4f45-9708-019B960494DF}">
-                <a14:hiddenLine xmlns="" xmlns:a16="http://schemas.microsoft.com/office/drawing/2014/main" xmlns:a14="http://schemas.microsoft.com/office/drawing/2010/main" xmlns:p14="http://schemas.microsoft.com/office/powerpoint/2010/main" w="9525">
+                <a14:hiddenLine xmlns:p14="http://schemas.microsoft.com/office/powerpoint/2010/main" xmlns:a14="http://schemas.microsoft.com/office/drawing/2010/main" xmlns:a16="http://schemas.microsoft.com/office/drawing/2014/main" xmlns="" w="9525">
                   <a:solidFill>
                     <a:srgbClr val="000000"/>
                   </a:solidFill>
@@ -29606,7 +29611,7 @@
             </a:ln>
             <a:extLst>
               <a:ext uri="{91240B29-F687-4f45-9708-019B960494DF}">
-                <a14:hiddenLine xmlns="" xmlns:a16="http://schemas.microsoft.com/office/drawing/2014/main" xmlns:a14="http://schemas.microsoft.com/office/drawing/2010/main" xmlns:p14="http://schemas.microsoft.com/office/powerpoint/2010/main" w="9525">
+                <a14:hiddenLine xmlns:p14="http://schemas.microsoft.com/office/powerpoint/2010/main" xmlns:a14="http://schemas.microsoft.com/office/drawing/2010/main" xmlns:a16="http://schemas.microsoft.com/office/drawing/2014/main" xmlns="" w="9525">
                   <a:solidFill>
                     <a:srgbClr val="000000"/>
                   </a:solidFill>
@@ -29690,7 +29695,7 @@
             </a:ln>
             <a:extLst>
               <a:ext uri="{91240B29-F687-4f45-9708-019B960494DF}">
-                <a14:hiddenLine xmlns="" xmlns:a16="http://schemas.microsoft.com/office/drawing/2014/main" xmlns:a14="http://schemas.microsoft.com/office/drawing/2010/main" xmlns:p14="http://schemas.microsoft.com/office/powerpoint/2010/main" w="9525">
+                <a14:hiddenLine xmlns:p14="http://schemas.microsoft.com/office/powerpoint/2010/main" xmlns:a14="http://schemas.microsoft.com/office/drawing/2010/main" xmlns:a16="http://schemas.microsoft.com/office/drawing/2014/main" xmlns="" w="9525">
                   <a:solidFill>
                     <a:srgbClr val="000000"/>
                   </a:solidFill>
@@ -29802,7 +29807,7 @@
             </a:ln>
             <a:extLst>
               <a:ext uri="{91240B29-F687-4f45-9708-019B960494DF}">
-                <a14:hiddenLine xmlns="" xmlns:a16="http://schemas.microsoft.com/office/drawing/2014/main" xmlns:a14="http://schemas.microsoft.com/office/drawing/2010/main" xmlns:p14="http://schemas.microsoft.com/office/powerpoint/2010/main" w="9525">
+                <a14:hiddenLine xmlns:p14="http://schemas.microsoft.com/office/powerpoint/2010/main" xmlns:a14="http://schemas.microsoft.com/office/drawing/2010/main" xmlns:a16="http://schemas.microsoft.com/office/drawing/2014/main" xmlns="" w="9525">
                   <a:solidFill>
                     <a:srgbClr val="000000"/>
                   </a:solidFill>
@@ -29914,7 +29919,7 @@
             </a:ln>
             <a:extLst>
               <a:ext uri="{91240B29-F687-4f45-9708-019B960494DF}">
-                <a14:hiddenLine xmlns="" xmlns:a16="http://schemas.microsoft.com/office/drawing/2014/main" xmlns:a14="http://schemas.microsoft.com/office/drawing/2010/main" xmlns:p14="http://schemas.microsoft.com/office/powerpoint/2010/main" w="9525">
+                <a14:hiddenLine xmlns:p14="http://schemas.microsoft.com/office/powerpoint/2010/main" xmlns:a14="http://schemas.microsoft.com/office/drawing/2010/main" xmlns:a16="http://schemas.microsoft.com/office/drawing/2014/main" xmlns="" w="9525">
                   <a:solidFill>
                     <a:srgbClr val="000000"/>
                   </a:solidFill>
@@ -29998,7 +30003,7 @@
             </a:ln>
             <a:extLst>
               <a:ext uri="{91240B29-F687-4f45-9708-019B960494DF}">
-                <a14:hiddenLine xmlns="" xmlns:a16="http://schemas.microsoft.com/office/drawing/2014/main" xmlns:a14="http://schemas.microsoft.com/office/drawing/2010/main" xmlns:p14="http://schemas.microsoft.com/office/powerpoint/2010/main" w="9525">
+                <a14:hiddenLine xmlns:p14="http://schemas.microsoft.com/office/powerpoint/2010/main" xmlns:a14="http://schemas.microsoft.com/office/drawing/2010/main" xmlns:a16="http://schemas.microsoft.com/office/drawing/2014/main" xmlns="" w="9525">
                   <a:solidFill>
                     <a:srgbClr val="000000"/>
                   </a:solidFill>
@@ -30130,7 +30135,7 @@
             </a:ln>
             <a:extLst>
               <a:ext uri="{91240B29-F687-4f45-9708-019B960494DF}">
-                <a14:hiddenLine xmlns="" xmlns:a16="http://schemas.microsoft.com/office/drawing/2014/main" xmlns:a14="http://schemas.microsoft.com/office/drawing/2010/main" xmlns:p14="http://schemas.microsoft.com/office/powerpoint/2010/main" w="9525">
+                <a14:hiddenLine xmlns:p14="http://schemas.microsoft.com/office/powerpoint/2010/main" xmlns:a14="http://schemas.microsoft.com/office/drawing/2010/main" xmlns:a16="http://schemas.microsoft.com/office/drawing/2014/main" xmlns="" w="9525">
                   <a:solidFill>
                     <a:srgbClr val="000000"/>
                   </a:solidFill>
@@ -30214,7 +30219,7 @@
             </a:ln>
             <a:extLst>
               <a:ext uri="{91240B29-F687-4f45-9708-019B960494DF}">
-                <a14:hiddenLine xmlns="" xmlns:a16="http://schemas.microsoft.com/office/drawing/2014/main" xmlns:a14="http://schemas.microsoft.com/office/drawing/2010/main" xmlns:p14="http://schemas.microsoft.com/office/powerpoint/2010/main" w="9525">
+                <a14:hiddenLine xmlns:p14="http://schemas.microsoft.com/office/powerpoint/2010/main" xmlns:a14="http://schemas.microsoft.com/office/drawing/2010/main" xmlns:a16="http://schemas.microsoft.com/office/drawing/2014/main" xmlns="" w="9525">
                   <a:solidFill>
                     <a:srgbClr val="000000"/>
                   </a:solidFill>
@@ -30326,7 +30331,7 @@
             </a:ln>
             <a:extLst>
               <a:ext uri="{91240B29-F687-4f45-9708-019B960494DF}">
-                <a14:hiddenLine xmlns="" xmlns:a16="http://schemas.microsoft.com/office/drawing/2014/main" xmlns:a14="http://schemas.microsoft.com/office/drawing/2010/main" xmlns:p14="http://schemas.microsoft.com/office/powerpoint/2010/main" w="9525">
+                <a14:hiddenLine xmlns:p14="http://schemas.microsoft.com/office/powerpoint/2010/main" xmlns:a14="http://schemas.microsoft.com/office/drawing/2010/main" xmlns:a16="http://schemas.microsoft.com/office/drawing/2014/main" xmlns="" w="9525">
                   <a:solidFill>
                     <a:srgbClr val="000000"/>
                   </a:solidFill>
@@ -30438,7 +30443,7 @@
             </a:ln>
             <a:extLst>
               <a:ext uri="{91240B29-F687-4f45-9708-019B960494DF}">
-                <a14:hiddenLine xmlns="" xmlns:a16="http://schemas.microsoft.com/office/drawing/2014/main" xmlns:a14="http://schemas.microsoft.com/office/drawing/2010/main" xmlns:p14="http://schemas.microsoft.com/office/powerpoint/2010/main" w="9525">
+                <a14:hiddenLine xmlns:p14="http://schemas.microsoft.com/office/powerpoint/2010/main" xmlns:a14="http://schemas.microsoft.com/office/drawing/2010/main" xmlns:a16="http://schemas.microsoft.com/office/drawing/2014/main" xmlns="" w="9525">
                   <a:solidFill>
                     <a:srgbClr val="000000"/>
                   </a:solidFill>
@@ -30522,7 +30527,7 @@
             </a:ln>
             <a:extLst>
               <a:ext uri="{91240B29-F687-4f45-9708-019B960494DF}">
-                <a14:hiddenLine xmlns="" xmlns:a16="http://schemas.microsoft.com/office/drawing/2014/main" xmlns:a14="http://schemas.microsoft.com/office/drawing/2010/main" xmlns:p14="http://schemas.microsoft.com/office/powerpoint/2010/main" w="9525">
+                <a14:hiddenLine xmlns:p14="http://schemas.microsoft.com/office/powerpoint/2010/main" xmlns:a14="http://schemas.microsoft.com/office/drawing/2010/main" xmlns:a16="http://schemas.microsoft.com/office/drawing/2014/main" xmlns="" w="9525">
                   <a:solidFill>
                     <a:srgbClr val="000000"/>
                   </a:solidFill>
@@ -30634,7 +30639,7 @@
             </a:ln>
             <a:extLst>
               <a:ext uri="{91240B29-F687-4f45-9708-019B960494DF}">
-                <a14:hiddenLine xmlns="" xmlns:a16="http://schemas.microsoft.com/office/drawing/2014/main" xmlns:a14="http://schemas.microsoft.com/office/drawing/2010/main" xmlns:p14="http://schemas.microsoft.com/office/powerpoint/2010/main" w="9525">
+                <a14:hiddenLine xmlns:p14="http://schemas.microsoft.com/office/powerpoint/2010/main" xmlns:a14="http://schemas.microsoft.com/office/drawing/2010/main" xmlns:a16="http://schemas.microsoft.com/office/drawing/2014/main" xmlns="" w="9525">
                   <a:solidFill>
                     <a:srgbClr val="000000"/>
                   </a:solidFill>
@@ -30746,7 +30751,7 @@
             </a:ln>
             <a:extLst>
               <a:ext uri="{91240B29-F687-4f45-9708-019B960494DF}">
-                <a14:hiddenLine xmlns="" xmlns:a16="http://schemas.microsoft.com/office/drawing/2014/main" xmlns:a14="http://schemas.microsoft.com/office/drawing/2010/main" xmlns:p14="http://schemas.microsoft.com/office/powerpoint/2010/main" w="9525">
+                <a14:hiddenLine xmlns:p14="http://schemas.microsoft.com/office/powerpoint/2010/main" xmlns:a14="http://schemas.microsoft.com/office/drawing/2010/main" xmlns:a16="http://schemas.microsoft.com/office/drawing/2014/main" xmlns="" w="9525">
                   <a:solidFill>
                     <a:srgbClr val="000000"/>
                   </a:solidFill>
@@ -30824,7 +30829,7 @@
             </a:ln>
             <a:extLst>
               <a:ext uri="{91240B29-F687-4f45-9708-019B960494DF}">
-                <a14:hiddenLine xmlns="" xmlns:a16="http://schemas.microsoft.com/office/drawing/2014/main" xmlns:a14="http://schemas.microsoft.com/office/drawing/2010/main" xmlns:p14="http://schemas.microsoft.com/office/powerpoint/2010/main" w="9525">
+                <a14:hiddenLine xmlns:p14="http://schemas.microsoft.com/office/powerpoint/2010/main" xmlns:a14="http://schemas.microsoft.com/office/drawing/2010/main" xmlns:a16="http://schemas.microsoft.com/office/drawing/2014/main" xmlns="" w="9525">
                   <a:solidFill>
                     <a:srgbClr val="000000"/>
                   </a:solidFill>
@@ -30936,7 +30941,7 @@
             </a:ln>
             <a:extLst>
               <a:ext uri="{91240B29-F687-4f45-9708-019B960494DF}">
-                <a14:hiddenLine xmlns="" xmlns:a16="http://schemas.microsoft.com/office/drawing/2014/main" xmlns:a14="http://schemas.microsoft.com/office/drawing/2010/main" xmlns:p14="http://schemas.microsoft.com/office/powerpoint/2010/main" w="9525">
+                <a14:hiddenLine xmlns:p14="http://schemas.microsoft.com/office/powerpoint/2010/main" xmlns:a14="http://schemas.microsoft.com/office/drawing/2010/main" xmlns:a16="http://schemas.microsoft.com/office/drawing/2014/main" xmlns="" w="9525">
                   <a:solidFill>
                     <a:srgbClr val="000000"/>
                   </a:solidFill>
@@ -31014,7 +31019,7 @@
             </a:ln>
             <a:extLst>
               <a:ext uri="{91240B29-F687-4f45-9708-019B960494DF}">
-                <a14:hiddenLine xmlns="" xmlns:a16="http://schemas.microsoft.com/office/drawing/2014/main" xmlns:a14="http://schemas.microsoft.com/office/drawing/2010/main" xmlns:p14="http://schemas.microsoft.com/office/powerpoint/2010/main" w="9525">
+                <a14:hiddenLine xmlns:p14="http://schemas.microsoft.com/office/powerpoint/2010/main" xmlns:a14="http://schemas.microsoft.com/office/drawing/2010/main" xmlns:a16="http://schemas.microsoft.com/office/drawing/2014/main" xmlns="" w="9525">
                   <a:solidFill>
                     <a:srgbClr val="000000"/>
                   </a:solidFill>
@@ -31126,7 +31131,7 @@
             </a:ln>
             <a:extLst>
               <a:ext uri="{91240B29-F687-4f45-9708-019B960494DF}">
-                <a14:hiddenLine xmlns="" xmlns:a16="http://schemas.microsoft.com/office/drawing/2014/main" xmlns:a14="http://schemas.microsoft.com/office/drawing/2010/main" xmlns:p14="http://schemas.microsoft.com/office/powerpoint/2010/main" w="9525">
+                <a14:hiddenLine xmlns:p14="http://schemas.microsoft.com/office/powerpoint/2010/main" xmlns:a14="http://schemas.microsoft.com/office/drawing/2010/main" xmlns:a16="http://schemas.microsoft.com/office/drawing/2014/main" xmlns="" w="9525">
                   <a:solidFill>
                     <a:srgbClr val="000000"/>
                   </a:solidFill>
@@ -31216,7 +31221,7 @@
             </a:ln>
             <a:extLst>
               <a:ext uri="{91240B29-F687-4f45-9708-019B960494DF}">
-                <a14:hiddenLine xmlns="" xmlns:a16="http://schemas.microsoft.com/office/drawing/2014/main" xmlns:a14="http://schemas.microsoft.com/office/drawing/2010/main" xmlns:p14="http://schemas.microsoft.com/office/powerpoint/2010/main" w="9525">
+                <a14:hiddenLine xmlns:p14="http://schemas.microsoft.com/office/powerpoint/2010/main" xmlns:a14="http://schemas.microsoft.com/office/drawing/2010/main" xmlns:a16="http://schemas.microsoft.com/office/drawing/2014/main" xmlns="" w="9525">
                   <a:solidFill>
                     <a:srgbClr val="000000"/>
                   </a:solidFill>
@@ -31328,7 +31333,7 @@
             </a:ln>
             <a:extLst>
               <a:ext uri="{91240B29-F687-4f45-9708-019B960494DF}">
-                <a14:hiddenLine xmlns="" xmlns:a16="http://schemas.microsoft.com/office/drawing/2014/main" xmlns:a14="http://schemas.microsoft.com/office/drawing/2010/main" xmlns:p14="http://schemas.microsoft.com/office/powerpoint/2010/main" w="9525">
+                <a14:hiddenLine xmlns:p14="http://schemas.microsoft.com/office/powerpoint/2010/main" xmlns:a14="http://schemas.microsoft.com/office/drawing/2010/main" xmlns:a16="http://schemas.microsoft.com/office/drawing/2014/main" xmlns="" w="9525">
                   <a:solidFill>
                     <a:srgbClr val="000000"/>
                   </a:solidFill>
@@ -31418,7 +31423,7 @@
             </a:ln>
             <a:extLst>
               <a:ext uri="{91240B29-F687-4f45-9708-019B960494DF}">
-                <a14:hiddenLine xmlns="" xmlns:a16="http://schemas.microsoft.com/office/drawing/2014/main" xmlns:a14="http://schemas.microsoft.com/office/drawing/2010/main" xmlns:p14="http://schemas.microsoft.com/office/powerpoint/2010/main" w="9525">
+                <a14:hiddenLine xmlns:p14="http://schemas.microsoft.com/office/powerpoint/2010/main" xmlns:a14="http://schemas.microsoft.com/office/drawing/2010/main" xmlns:a16="http://schemas.microsoft.com/office/drawing/2014/main" xmlns="" w="9525">
                   <a:solidFill>
                     <a:srgbClr val="000000"/>
                   </a:solidFill>
@@ -31530,7 +31535,7 @@
             </a:ln>
             <a:extLst>
               <a:ext uri="{91240B29-F687-4f45-9708-019B960494DF}">
-                <a14:hiddenLine xmlns="" xmlns:a16="http://schemas.microsoft.com/office/drawing/2014/main" xmlns:a14="http://schemas.microsoft.com/office/drawing/2010/main" xmlns:p14="http://schemas.microsoft.com/office/powerpoint/2010/main" w="9525">
+                <a14:hiddenLine xmlns:p14="http://schemas.microsoft.com/office/powerpoint/2010/main" xmlns:a14="http://schemas.microsoft.com/office/drawing/2010/main" xmlns:a16="http://schemas.microsoft.com/office/drawing/2014/main" xmlns="" w="9525">
                   <a:solidFill>
                     <a:srgbClr val="000000"/>
                   </a:solidFill>
@@ -31586,7 +31591,7 @@
             </a:ln>
             <a:extLst>
               <a:ext uri="{91240B29-F687-4f45-9708-019B960494DF}">
-                <a14:hiddenLine xmlns="" xmlns:a16="http://schemas.microsoft.com/office/drawing/2014/main" xmlns:a14="http://schemas.microsoft.com/office/drawing/2010/main" xmlns:p14="http://schemas.microsoft.com/office/powerpoint/2010/main" w="9525">
+                <a14:hiddenLine xmlns:p14="http://schemas.microsoft.com/office/powerpoint/2010/main" xmlns:a14="http://schemas.microsoft.com/office/drawing/2010/main" xmlns:a16="http://schemas.microsoft.com/office/drawing/2014/main" xmlns="" w="9525">
                   <a:solidFill>
                     <a:srgbClr val="000000"/>
                   </a:solidFill>
@@ -31698,7 +31703,7 @@
             </a:ln>
             <a:extLst>
               <a:ext uri="{91240B29-F687-4f45-9708-019B960494DF}">
-                <a14:hiddenLine xmlns="" xmlns:a16="http://schemas.microsoft.com/office/drawing/2014/main" xmlns:a14="http://schemas.microsoft.com/office/drawing/2010/main" xmlns:p14="http://schemas.microsoft.com/office/powerpoint/2010/main" w="9525">
+                <a14:hiddenLine xmlns:p14="http://schemas.microsoft.com/office/powerpoint/2010/main" xmlns:a14="http://schemas.microsoft.com/office/drawing/2010/main" xmlns:a16="http://schemas.microsoft.com/office/drawing/2014/main" xmlns="" w="9525">
                   <a:solidFill>
                     <a:srgbClr val="000000"/>
                   </a:solidFill>
@@ -31782,7 +31787,7 @@
             </a:ln>
             <a:extLst>
               <a:ext uri="{91240B29-F687-4f45-9708-019B960494DF}">
-                <a14:hiddenLine xmlns="" xmlns:a16="http://schemas.microsoft.com/office/drawing/2014/main" xmlns:a14="http://schemas.microsoft.com/office/drawing/2010/main" xmlns:p14="http://schemas.microsoft.com/office/powerpoint/2010/main" w="9525">
+                <a14:hiddenLine xmlns:p14="http://schemas.microsoft.com/office/powerpoint/2010/main" xmlns:a14="http://schemas.microsoft.com/office/drawing/2010/main" xmlns:a16="http://schemas.microsoft.com/office/drawing/2014/main" xmlns="" w="9525">
                   <a:solidFill>
                     <a:srgbClr val="000000"/>
                   </a:solidFill>
@@ -31866,7 +31871,7 @@
             </a:ln>
             <a:extLst>
               <a:ext uri="{91240B29-F687-4f45-9708-019B960494DF}">
-                <a14:hiddenLine xmlns="" xmlns:a16="http://schemas.microsoft.com/office/drawing/2014/main" xmlns:a14="http://schemas.microsoft.com/office/drawing/2010/main" xmlns:p14="http://schemas.microsoft.com/office/powerpoint/2010/main" w="9525">
+                <a14:hiddenLine xmlns:p14="http://schemas.microsoft.com/office/powerpoint/2010/main" xmlns:a14="http://schemas.microsoft.com/office/drawing/2010/main" xmlns:a16="http://schemas.microsoft.com/office/drawing/2014/main" xmlns="" w="9525">
                   <a:solidFill>
                     <a:srgbClr val="000000"/>
                   </a:solidFill>
@@ -31978,7 +31983,7 @@
             </a:ln>
             <a:extLst>
               <a:ext uri="{91240B29-F687-4f45-9708-019B960494DF}">
-                <a14:hiddenLine xmlns="" xmlns:a16="http://schemas.microsoft.com/office/drawing/2014/main" xmlns:a14="http://schemas.microsoft.com/office/drawing/2010/main" xmlns:p14="http://schemas.microsoft.com/office/powerpoint/2010/main" w="9525">
+                <a14:hiddenLine xmlns:p14="http://schemas.microsoft.com/office/powerpoint/2010/main" xmlns:a14="http://schemas.microsoft.com/office/drawing/2010/main" xmlns:a16="http://schemas.microsoft.com/office/drawing/2014/main" xmlns="" w="9525">
                   <a:solidFill>
                     <a:srgbClr val="000000"/>
                   </a:solidFill>
@@ -32068,7 +32073,7 @@
             </a:ln>
             <a:extLst>
               <a:ext uri="{91240B29-F687-4f45-9708-019B960494DF}">
-                <a14:hiddenLine xmlns="" xmlns:a16="http://schemas.microsoft.com/office/drawing/2014/main" xmlns:a14="http://schemas.microsoft.com/office/drawing/2010/main" xmlns:p14="http://schemas.microsoft.com/office/powerpoint/2010/main" w="9525">
+                <a14:hiddenLine xmlns:p14="http://schemas.microsoft.com/office/powerpoint/2010/main" xmlns:a14="http://schemas.microsoft.com/office/drawing/2010/main" xmlns:a16="http://schemas.microsoft.com/office/drawing/2014/main" xmlns="" w="9525">
                   <a:solidFill>
                     <a:srgbClr val="000000"/>
                   </a:solidFill>
@@ -32152,7 +32157,7 @@
             </a:ln>
             <a:extLst>
               <a:ext uri="{91240B29-F687-4f45-9708-019B960494DF}">
-                <a14:hiddenLine xmlns="" xmlns:a16="http://schemas.microsoft.com/office/drawing/2014/main" xmlns:a14="http://schemas.microsoft.com/office/drawing/2010/main" xmlns:p14="http://schemas.microsoft.com/office/powerpoint/2010/main" w="9525">
+                <a14:hiddenLine xmlns:p14="http://schemas.microsoft.com/office/powerpoint/2010/main" xmlns:a14="http://schemas.microsoft.com/office/drawing/2010/main" xmlns:a16="http://schemas.microsoft.com/office/drawing/2014/main" xmlns="" w="9525">
                   <a:solidFill>
                     <a:srgbClr val="000000"/>
                   </a:solidFill>
@@ -32264,7 +32269,7 @@
             </a:ln>
             <a:extLst>
               <a:ext uri="{91240B29-F687-4f45-9708-019B960494DF}">
-                <a14:hiddenLine xmlns="" xmlns:a16="http://schemas.microsoft.com/office/drawing/2014/main" xmlns:a14="http://schemas.microsoft.com/office/drawing/2010/main" xmlns:p14="http://schemas.microsoft.com/office/powerpoint/2010/main" w="9525">
+                <a14:hiddenLine xmlns:p14="http://schemas.microsoft.com/office/powerpoint/2010/main" xmlns:a14="http://schemas.microsoft.com/office/drawing/2010/main" xmlns:a16="http://schemas.microsoft.com/office/drawing/2014/main" xmlns="" w="9525">
                   <a:solidFill>
                     <a:srgbClr val="000000"/>
                   </a:solidFill>
@@ -32348,7 +32353,7 @@
             </a:ln>
             <a:extLst>
               <a:ext uri="{91240B29-F687-4f45-9708-019B960494DF}">
-                <a14:hiddenLine xmlns="" xmlns:a16="http://schemas.microsoft.com/office/drawing/2014/main" xmlns:a14="http://schemas.microsoft.com/office/drawing/2010/main" xmlns:p14="http://schemas.microsoft.com/office/powerpoint/2010/main" w="9525">
+                <a14:hiddenLine xmlns:p14="http://schemas.microsoft.com/office/powerpoint/2010/main" xmlns:a14="http://schemas.microsoft.com/office/drawing/2010/main" xmlns:a16="http://schemas.microsoft.com/office/drawing/2014/main" xmlns="" w="9525">
                   <a:solidFill>
                     <a:srgbClr val="000000"/>
                   </a:solidFill>
@@ -32460,7 +32465,7 @@
             </a:ln>
             <a:extLst>
               <a:ext uri="{91240B29-F687-4f45-9708-019B960494DF}">
-                <a14:hiddenLine xmlns="" xmlns:a16="http://schemas.microsoft.com/office/drawing/2014/main" xmlns:a14="http://schemas.microsoft.com/office/drawing/2010/main" xmlns:p14="http://schemas.microsoft.com/office/powerpoint/2010/main" w="9525">
+                <a14:hiddenLine xmlns:p14="http://schemas.microsoft.com/office/powerpoint/2010/main" xmlns:a14="http://schemas.microsoft.com/office/drawing/2010/main" xmlns:a16="http://schemas.microsoft.com/office/drawing/2014/main" xmlns="" w="9525">
                   <a:solidFill>
                     <a:srgbClr val="000000"/>
                   </a:solidFill>
@@ -32544,7 +32549,7 @@
             </a:ln>
             <a:extLst>
               <a:ext uri="{91240B29-F687-4f45-9708-019B960494DF}">
-                <a14:hiddenLine xmlns="" xmlns:a16="http://schemas.microsoft.com/office/drawing/2014/main" xmlns:a14="http://schemas.microsoft.com/office/drawing/2010/main" xmlns:p14="http://schemas.microsoft.com/office/powerpoint/2010/main" w="9525">
+                <a14:hiddenLine xmlns:p14="http://schemas.microsoft.com/office/powerpoint/2010/main" xmlns:a14="http://schemas.microsoft.com/office/drawing/2010/main" xmlns:a16="http://schemas.microsoft.com/office/drawing/2014/main" xmlns="" w="9525">
                   <a:solidFill>
                     <a:srgbClr val="000000"/>
                   </a:solidFill>
@@ -32656,7 +32661,7 @@
             </a:ln>
             <a:extLst>
               <a:ext uri="{91240B29-F687-4f45-9708-019B960494DF}">
-                <a14:hiddenLine xmlns="" xmlns:a16="http://schemas.microsoft.com/office/drawing/2014/main" xmlns:a14="http://schemas.microsoft.com/office/drawing/2010/main" xmlns:p14="http://schemas.microsoft.com/office/powerpoint/2010/main" w="9525">
+                <a14:hiddenLine xmlns:p14="http://schemas.microsoft.com/office/powerpoint/2010/main" xmlns:a14="http://schemas.microsoft.com/office/drawing/2010/main" xmlns:a16="http://schemas.microsoft.com/office/drawing/2014/main" xmlns="" w="9525">
                   <a:solidFill>
                     <a:srgbClr val="000000"/>
                   </a:solidFill>
@@ -32712,7 +32717,7 @@
             </a:ln>
             <a:extLst>
               <a:ext uri="{91240B29-F687-4f45-9708-019B960494DF}">
-                <a14:hiddenLine xmlns="" xmlns:a16="http://schemas.microsoft.com/office/drawing/2014/main" xmlns:a14="http://schemas.microsoft.com/office/drawing/2010/main" xmlns:p14="http://schemas.microsoft.com/office/powerpoint/2010/main" w="9525">
+                <a14:hiddenLine xmlns:p14="http://schemas.microsoft.com/office/powerpoint/2010/main" xmlns:a14="http://schemas.microsoft.com/office/drawing/2010/main" xmlns:a16="http://schemas.microsoft.com/office/drawing/2014/main" xmlns="" w="9525">
                   <a:solidFill>
                     <a:srgbClr val="000000"/>
                   </a:solidFill>
@@ -32799,7 +32804,7 @@
             </a:ln>
             <a:extLst>
               <a:ext uri="{91240B29-F687-4f45-9708-019B960494DF}">
-                <a14:hiddenLine xmlns="" xmlns:a16="http://schemas.microsoft.com/office/drawing/2014/main" xmlns:a14="http://schemas.microsoft.com/office/drawing/2010/main" xmlns:p14="http://schemas.microsoft.com/office/powerpoint/2010/main" w="9525">
+                <a14:hiddenLine xmlns:p14="http://schemas.microsoft.com/office/powerpoint/2010/main" xmlns:a14="http://schemas.microsoft.com/office/drawing/2010/main" xmlns:a16="http://schemas.microsoft.com/office/drawing/2014/main" xmlns="" w="9525">
                   <a:solidFill>
                     <a:srgbClr val="000000"/>
                   </a:solidFill>
@@ -32911,7 +32916,7 @@
             </a:ln>
             <a:extLst>
               <a:ext uri="{91240B29-F687-4f45-9708-019B960494DF}">
-                <a14:hiddenLine xmlns="" xmlns:a16="http://schemas.microsoft.com/office/drawing/2014/main" xmlns:a14="http://schemas.microsoft.com/office/drawing/2010/main" xmlns:p14="http://schemas.microsoft.com/office/powerpoint/2010/main" w="9525">
+                <a14:hiddenLine xmlns:p14="http://schemas.microsoft.com/office/powerpoint/2010/main" xmlns:a14="http://schemas.microsoft.com/office/drawing/2010/main" xmlns:a16="http://schemas.microsoft.com/office/drawing/2014/main" xmlns="" w="9525">
                   <a:solidFill>
                     <a:srgbClr val="000000"/>
                   </a:solidFill>
@@ -32995,7 +33000,7 @@
             </a:ln>
             <a:extLst>
               <a:ext uri="{91240B29-F687-4f45-9708-019B960494DF}">
-                <a14:hiddenLine xmlns="" xmlns:a16="http://schemas.microsoft.com/office/drawing/2014/main" xmlns:a14="http://schemas.microsoft.com/office/drawing/2010/main" xmlns:p14="http://schemas.microsoft.com/office/powerpoint/2010/main" w="9525">
+                <a14:hiddenLine xmlns:p14="http://schemas.microsoft.com/office/powerpoint/2010/main" xmlns:a14="http://schemas.microsoft.com/office/drawing/2010/main" xmlns:a16="http://schemas.microsoft.com/office/drawing/2014/main" xmlns="" w="9525">
                   <a:solidFill>
                     <a:srgbClr val="000000"/>
                   </a:solidFill>
@@ -33107,7 +33112,7 @@
             </a:ln>
             <a:extLst>
               <a:ext uri="{91240B29-F687-4f45-9708-019B960494DF}">
-                <a14:hiddenLine xmlns="" xmlns:a16="http://schemas.microsoft.com/office/drawing/2014/main" xmlns:a14="http://schemas.microsoft.com/office/drawing/2010/main" xmlns:p14="http://schemas.microsoft.com/office/powerpoint/2010/main" w="9525">
+                <a14:hiddenLine xmlns:p14="http://schemas.microsoft.com/office/powerpoint/2010/main" xmlns:a14="http://schemas.microsoft.com/office/drawing/2010/main" xmlns:a16="http://schemas.microsoft.com/office/drawing/2014/main" xmlns="" w="9525">
                   <a:solidFill>
                     <a:srgbClr val="000000"/>
                   </a:solidFill>
@@ -33219,7 +33224,7 @@
             </a:ln>
             <a:extLst>
               <a:ext uri="{91240B29-F687-4f45-9708-019B960494DF}">
-                <a14:hiddenLine xmlns="" xmlns:a16="http://schemas.microsoft.com/office/drawing/2014/main" xmlns:a14="http://schemas.microsoft.com/office/drawing/2010/main" xmlns:p14="http://schemas.microsoft.com/office/powerpoint/2010/main" w="9525">
+                <a14:hiddenLine xmlns:p14="http://schemas.microsoft.com/office/powerpoint/2010/main" xmlns:a14="http://schemas.microsoft.com/office/drawing/2010/main" xmlns:a16="http://schemas.microsoft.com/office/drawing/2014/main" xmlns="" w="9525">
                   <a:solidFill>
                     <a:srgbClr val="000000"/>
                   </a:solidFill>
@@ -33306,7 +33311,7 @@
             </a:ln>
             <a:extLst>
               <a:ext uri="{91240B29-F687-4f45-9708-019B960494DF}">
-                <a14:hiddenLine xmlns="" xmlns:a16="http://schemas.microsoft.com/office/drawing/2014/main" xmlns:a14="http://schemas.microsoft.com/office/drawing/2010/main" xmlns:p14="http://schemas.microsoft.com/office/powerpoint/2010/main" w="9525">
+                <a14:hiddenLine xmlns:p14="http://schemas.microsoft.com/office/powerpoint/2010/main" xmlns:a14="http://schemas.microsoft.com/office/drawing/2010/main" xmlns:a16="http://schemas.microsoft.com/office/drawing/2014/main" xmlns="" w="9525">
                   <a:solidFill>
                     <a:srgbClr val="000000"/>
                   </a:solidFill>
@@ -33390,7 +33395,7 @@
             </a:ln>
             <a:extLst>
               <a:ext uri="{91240B29-F687-4f45-9708-019B960494DF}">
-                <a14:hiddenLine xmlns="" xmlns:a16="http://schemas.microsoft.com/office/drawing/2014/main" xmlns:a14="http://schemas.microsoft.com/office/drawing/2010/main" xmlns:p14="http://schemas.microsoft.com/office/powerpoint/2010/main" w="9525">
+                <a14:hiddenLine xmlns:p14="http://schemas.microsoft.com/office/powerpoint/2010/main" xmlns:a14="http://schemas.microsoft.com/office/drawing/2010/main" xmlns:a16="http://schemas.microsoft.com/office/drawing/2014/main" xmlns="" w="9525">
                   <a:solidFill>
                     <a:srgbClr val="000000"/>
                   </a:solidFill>
@@ -33502,7 +33507,7 @@
             </a:ln>
             <a:extLst>
               <a:ext uri="{91240B29-F687-4f45-9708-019B960494DF}">
-                <a14:hiddenLine xmlns="" xmlns:a16="http://schemas.microsoft.com/office/drawing/2014/main" xmlns:a14="http://schemas.microsoft.com/office/drawing/2010/main" xmlns:p14="http://schemas.microsoft.com/office/powerpoint/2010/main" w="9525">
+                <a14:hiddenLine xmlns:p14="http://schemas.microsoft.com/office/powerpoint/2010/main" xmlns:a14="http://schemas.microsoft.com/office/drawing/2010/main" xmlns:a16="http://schemas.microsoft.com/office/drawing/2014/main" xmlns="" w="9525">
                   <a:solidFill>
                     <a:srgbClr val="000000"/>
                   </a:solidFill>
@@ -33614,7 +33619,7 @@
             </a:ln>
             <a:extLst>
               <a:ext uri="{91240B29-F687-4f45-9708-019B960494DF}">
-                <a14:hiddenLine xmlns="" xmlns:a16="http://schemas.microsoft.com/office/drawing/2014/main" xmlns:a14="http://schemas.microsoft.com/office/drawing/2010/main" xmlns:p14="http://schemas.microsoft.com/office/powerpoint/2010/main" w="9525">
+                <a14:hiddenLine xmlns:p14="http://schemas.microsoft.com/office/powerpoint/2010/main" xmlns:a14="http://schemas.microsoft.com/office/drawing/2010/main" xmlns:a16="http://schemas.microsoft.com/office/drawing/2014/main" xmlns="" w="9525">
                   <a:solidFill>
                     <a:srgbClr val="000000"/>
                   </a:solidFill>
@@ -33698,7 +33703,7 @@
             </a:ln>
             <a:extLst>
               <a:ext uri="{91240B29-F687-4f45-9708-019B960494DF}">
-                <a14:hiddenLine xmlns="" xmlns:a16="http://schemas.microsoft.com/office/drawing/2014/main" xmlns:a14="http://schemas.microsoft.com/office/drawing/2010/main" xmlns:p14="http://schemas.microsoft.com/office/powerpoint/2010/main" w="9525">
+                <a14:hiddenLine xmlns:p14="http://schemas.microsoft.com/office/powerpoint/2010/main" xmlns:a14="http://schemas.microsoft.com/office/drawing/2010/main" xmlns:a16="http://schemas.microsoft.com/office/drawing/2014/main" xmlns="" w="9525">
                   <a:solidFill>
                     <a:srgbClr val="000000"/>
                   </a:solidFill>
@@ -33840,7 +33845,7 @@
             </a:ln>
             <a:extLst>
               <a:ext uri="{91240B29-F687-4f45-9708-019B960494DF}">
-                <a14:hiddenLine xmlns="" xmlns:a16="http://schemas.microsoft.com/office/drawing/2014/main" xmlns:a14="http://schemas.microsoft.com/office/drawing/2010/main" xmlns:p14="http://schemas.microsoft.com/office/powerpoint/2010/main" w="9525">
+                <a14:hiddenLine xmlns:p14="http://schemas.microsoft.com/office/powerpoint/2010/main" xmlns:a14="http://schemas.microsoft.com/office/drawing/2010/main" xmlns:a16="http://schemas.microsoft.com/office/drawing/2014/main" xmlns="" w="9525">
                   <a:solidFill>
                     <a:srgbClr val="000000"/>
                   </a:solidFill>
@@ -33930,7 +33935,7 @@
             </a:ln>
             <a:extLst>
               <a:ext uri="{91240B29-F687-4f45-9708-019B960494DF}">
-                <a14:hiddenLine xmlns="" xmlns:a16="http://schemas.microsoft.com/office/drawing/2014/main" xmlns:a14="http://schemas.microsoft.com/office/drawing/2010/main" xmlns:p14="http://schemas.microsoft.com/office/powerpoint/2010/main" w="9525">
+                <a14:hiddenLine xmlns:p14="http://schemas.microsoft.com/office/powerpoint/2010/main" xmlns:a14="http://schemas.microsoft.com/office/drawing/2010/main" xmlns:a16="http://schemas.microsoft.com/office/drawing/2014/main" xmlns="" w="9525">
                   <a:solidFill>
                     <a:srgbClr val="000000"/>
                   </a:solidFill>
@@ -34042,7 +34047,7 @@
             </a:ln>
             <a:extLst>
               <a:ext uri="{91240B29-F687-4f45-9708-019B960494DF}">
-                <a14:hiddenLine xmlns="" xmlns:a16="http://schemas.microsoft.com/office/drawing/2014/main" xmlns:a14="http://schemas.microsoft.com/office/drawing/2010/main" xmlns:p14="http://schemas.microsoft.com/office/powerpoint/2010/main" w="9525">
+                <a14:hiddenLine xmlns:p14="http://schemas.microsoft.com/office/powerpoint/2010/main" xmlns:a14="http://schemas.microsoft.com/office/drawing/2010/main" xmlns:a16="http://schemas.microsoft.com/office/drawing/2014/main" xmlns="" w="9525">
                   <a:solidFill>
                     <a:srgbClr val="000000"/>
                   </a:solidFill>
@@ -34873,7 +34878,7 @@
             <a:noFill/>
             <a:extLst>
               <a:ext uri="{909E8E84-426E-40dd-AFC4-6F175D3DCCD1}">
-                <a14:hiddenFill xmlns="" xmlns:a16="http://schemas.microsoft.com/office/drawing/2014/main" xmlns:a14="http://schemas.microsoft.com/office/drawing/2010/main" xmlns:p14="http://schemas.microsoft.com/office/powerpoint/2010/main">
+                <a14:hiddenFill xmlns:p14="http://schemas.microsoft.com/office/powerpoint/2010/main" xmlns:a14="http://schemas.microsoft.com/office/drawing/2010/main" xmlns:a16="http://schemas.microsoft.com/office/drawing/2014/main" xmlns="">
                   <a:solidFill>
                     <a:srgbClr val="FFFFFF"/>
                   </a:solidFill>
@@ -34993,7 +34998,7 @@
             </a:ln>
             <a:extLst>
               <a:ext uri="{91240B29-F687-4f45-9708-019B960494DF}">
-                <a14:hiddenLine xmlns="" xmlns:a16="http://schemas.microsoft.com/office/drawing/2014/main" xmlns:a14="http://schemas.microsoft.com/office/drawing/2010/main" xmlns:p14="http://schemas.microsoft.com/office/powerpoint/2010/main" w="9525">
+                <a14:hiddenLine xmlns:p14="http://schemas.microsoft.com/office/powerpoint/2010/main" xmlns:a14="http://schemas.microsoft.com/office/drawing/2010/main" xmlns:a16="http://schemas.microsoft.com/office/drawing/2014/main" xmlns="" w="9525">
                   <a:solidFill>
                     <a:srgbClr val="000000"/>
                   </a:solidFill>
@@ -35105,7 +35110,7 @@
             </a:ln>
             <a:extLst>
               <a:ext uri="{91240B29-F687-4f45-9708-019B960494DF}">
-                <a14:hiddenLine xmlns="" xmlns:a16="http://schemas.microsoft.com/office/drawing/2014/main" xmlns:a14="http://schemas.microsoft.com/office/drawing/2010/main" xmlns:p14="http://schemas.microsoft.com/office/powerpoint/2010/main" w="9525">
+                <a14:hiddenLine xmlns:p14="http://schemas.microsoft.com/office/powerpoint/2010/main" xmlns:a14="http://schemas.microsoft.com/office/drawing/2010/main" xmlns:a16="http://schemas.microsoft.com/office/drawing/2014/main" xmlns="" w="9525">
                   <a:solidFill>
                     <a:srgbClr val="000000"/>
                   </a:solidFill>
@@ -35217,7 +35222,7 @@
             </a:ln>
             <a:extLst>
               <a:ext uri="{91240B29-F687-4f45-9708-019B960494DF}">
-                <a14:hiddenLine xmlns="" xmlns:a16="http://schemas.microsoft.com/office/drawing/2014/main" xmlns:a14="http://schemas.microsoft.com/office/drawing/2010/main" xmlns:p14="http://schemas.microsoft.com/office/powerpoint/2010/main" w="9525">
+                <a14:hiddenLine xmlns:p14="http://schemas.microsoft.com/office/powerpoint/2010/main" xmlns:a14="http://schemas.microsoft.com/office/drawing/2010/main" xmlns:a16="http://schemas.microsoft.com/office/drawing/2014/main" xmlns="" w="9525">
                   <a:solidFill>
                     <a:srgbClr val="000000"/>
                   </a:solidFill>
@@ -35273,7 +35278,7 @@
             </a:ln>
             <a:extLst>
               <a:ext uri="{91240B29-F687-4f45-9708-019B960494DF}">
-                <a14:hiddenLine xmlns="" xmlns:a16="http://schemas.microsoft.com/office/drawing/2014/main" xmlns:a14="http://schemas.microsoft.com/office/drawing/2010/main" xmlns:p14="http://schemas.microsoft.com/office/powerpoint/2010/main" w="9525">
+                <a14:hiddenLine xmlns:p14="http://schemas.microsoft.com/office/powerpoint/2010/main" xmlns:a14="http://schemas.microsoft.com/office/drawing/2010/main" xmlns:a16="http://schemas.microsoft.com/office/drawing/2014/main" xmlns="" w="9525">
                   <a:solidFill>
                     <a:srgbClr val="000000"/>
                   </a:solidFill>
@@ -35385,7 +35390,7 @@
             </a:ln>
             <a:extLst>
               <a:ext uri="{91240B29-F687-4f45-9708-019B960494DF}">
-                <a14:hiddenLine xmlns="" xmlns:a16="http://schemas.microsoft.com/office/drawing/2014/main" xmlns:a14="http://schemas.microsoft.com/office/drawing/2010/main" xmlns:p14="http://schemas.microsoft.com/office/powerpoint/2010/main" w="9525">
+                <a14:hiddenLine xmlns:p14="http://schemas.microsoft.com/office/powerpoint/2010/main" xmlns:a14="http://schemas.microsoft.com/office/drawing/2010/main" xmlns:a16="http://schemas.microsoft.com/office/drawing/2014/main" xmlns="" w="9525">
                   <a:solidFill>
                     <a:srgbClr val="000000"/>
                   </a:solidFill>
@@ -35469,7 +35474,7 @@
             </a:ln>
             <a:extLst>
               <a:ext uri="{91240B29-F687-4f45-9708-019B960494DF}">
-                <a14:hiddenLine xmlns="" xmlns:a16="http://schemas.microsoft.com/office/drawing/2014/main" xmlns:a14="http://schemas.microsoft.com/office/drawing/2010/main" xmlns:p14="http://schemas.microsoft.com/office/powerpoint/2010/main" w="9525">
+                <a14:hiddenLine xmlns:p14="http://schemas.microsoft.com/office/powerpoint/2010/main" xmlns:a14="http://schemas.microsoft.com/office/drawing/2010/main" xmlns:a16="http://schemas.microsoft.com/office/drawing/2014/main" xmlns="" w="9525">
                   <a:solidFill>
                     <a:srgbClr val="000000"/>
                   </a:solidFill>
@@ -35553,7 +35558,7 @@
             </a:ln>
             <a:extLst>
               <a:ext uri="{91240B29-F687-4f45-9708-019B960494DF}">
-                <a14:hiddenLine xmlns="" xmlns:a16="http://schemas.microsoft.com/office/drawing/2014/main" xmlns:a14="http://schemas.microsoft.com/office/drawing/2010/main" xmlns:p14="http://schemas.microsoft.com/office/powerpoint/2010/main" w="9525">
+                <a14:hiddenLine xmlns:p14="http://schemas.microsoft.com/office/powerpoint/2010/main" xmlns:a14="http://schemas.microsoft.com/office/drawing/2010/main" xmlns:a16="http://schemas.microsoft.com/office/drawing/2014/main" xmlns="" w="9525">
                   <a:solidFill>
                     <a:srgbClr val="000000"/>
                   </a:solidFill>
@@ -35665,7 +35670,7 @@
             </a:ln>
             <a:extLst>
               <a:ext uri="{91240B29-F687-4f45-9708-019B960494DF}">
-                <a14:hiddenLine xmlns="" xmlns:a16="http://schemas.microsoft.com/office/drawing/2014/main" xmlns:a14="http://schemas.microsoft.com/office/drawing/2010/main" xmlns:p14="http://schemas.microsoft.com/office/powerpoint/2010/main" w="9525">
+                <a14:hiddenLine xmlns:p14="http://schemas.microsoft.com/office/powerpoint/2010/main" xmlns:a14="http://schemas.microsoft.com/office/drawing/2010/main" xmlns:a16="http://schemas.microsoft.com/office/drawing/2014/main" xmlns="" w="9525">
                   <a:solidFill>
                     <a:srgbClr val="000000"/>
                   </a:solidFill>
@@ -35749,7 +35754,7 @@
             </a:ln>
             <a:extLst>
               <a:ext uri="{91240B29-F687-4f45-9708-019B960494DF}">
-                <a14:hiddenLine xmlns="" xmlns:a16="http://schemas.microsoft.com/office/drawing/2014/main" xmlns:a14="http://schemas.microsoft.com/office/drawing/2010/main" xmlns:p14="http://schemas.microsoft.com/office/powerpoint/2010/main" w="9525">
+                <a14:hiddenLine xmlns:p14="http://schemas.microsoft.com/office/powerpoint/2010/main" xmlns:a14="http://schemas.microsoft.com/office/drawing/2010/main" xmlns:a16="http://schemas.microsoft.com/office/drawing/2014/main" xmlns="" w="9525">
                   <a:solidFill>
                     <a:srgbClr val="000000"/>
                   </a:solidFill>
@@ -35833,7 +35838,7 @@
             </a:ln>
             <a:extLst>
               <a:ext uri="{91240B29-F687-4f45-9708-019B960494DF}">
-                <a14:hiddenLine xmlns="" xmlns:a16="http://schemas.microsoft.com/office/drawing/2014/main" xmlns:a14="http://schemas.microsoft.com/office/drawing/2010/main" xmlns:p14="http://schemas.microsoft.com/office/powerpoint/2010/main" w="9525">
+                <a14:hiddenLine xmlns:p14="http://schemas.microsoft.com/office/powerpoint/2010/main" xmlns:a14="http://schemas.microsoft.com/office/drawing/2010/main" xmlns:a16="http://schemas.microsoft.com/office/drawing/2014/main" xmlns="" w="9525">
                   <a:solidFill>
                     <a:srgbClr val="000000"/>
                   </a:solidFill>
@@ -35945,7 +35950,7 @@
             </a:ln>
             <a:extLst>
               <a:ext uri="{91240B29-F687-4f45-9708-019B960494DF}">
-                <a14:hiddenLine xmlns="" xmlns:a16="http://schemas.microsoft.com/office/drawing/2014/main" xmlns:a14="http://schemas.microsoft.com/office/drawing/2010/main" xmlns:p14="http://schemas.microsoft.com/office/powerpoint/2010/main" w="9525">
+                <a14:hiddenLine xmlns:p14="http://schemas.microsoft.com/office/powerpoint/2010/main" xmlns:a14="http://schemas.microsoft.com/office/drawing/2010/main" xmlns:a16="http://schemas.microsoft.com/office/drawing/2014/main" xmlns="" w="9525">
                   <a:solidFill>
                     <a:srgbClr val="000000"/>
                   </a:solidFill>
@@ -36057,7 +36062,7 @@
             </a:ln>
             <a:extLst>
               <a:ext uri="{91240B29-F687-4f45-9708-019B960494DF}">
-                <a14:hiddenLine xmlns="" xmlns:a16="http://schemas.microsoft.com/office/drawing/2014/main" xmlns:a14="http://schemas.microsoft.com/office/drawing/2010/main" xmlns:p14="http://schemas.microsoft.com/office/powerpoint/2010/main" w="9525">
+                <a14:hiddenLine xmlns:p14="http://schemas.microsoft.com/office/powerpoint/2010/main" xmlns:a14="http://schemas.microsoft.com/office/drawing/2010/main" xmlns:a16="http://schemas.microsoft.com/office/drawing/2014/main" xmlns="" w="9525">
                   <a:solidFill>
                     <a:srgbClr val="000000"/>
                   </a:solidFill>
@@ -36141,7 +36146,7 @@
             </a:ln>
             <a:extLst>
               <a:ext uri="{91240B29-F687-4f45-9708-019B960494DF}">
-                <a14:hiddenLine xmlns="" xmlns:a16="http://schemas.microsoft.com/office/drawing/2014/main" xmlns:a14="http://schemas.microsoft.com/office/drawing/2010/main" xmlns:p14="http://schemas.microsoft.com/office/powerpoint/2010/main" w="9525">
+                <a14:hiddenLine xmlns:p14="http://schemas.microsoft.com/office/powerpoint/2010/main" xmlns:a14="http://schemas.microsoft.com/office/drawing/2010/main" xmlns:a16="http://schemas.microsoft.com/office/drawing/2014/main" xmlns="" w="9525">
                   <a:solidFill>
                     <a:srgbClr val="000000"/>
                   </a:solidFill>
@@ -36273,7 +36278,7 @@
             </a:ln>
             <a:extLst>
               <a:ext uri="{91240B29-F687-4f45-9708-019B960494DF}">
-                <a14:hiddenLine xmlns="" xmlns:a16="http://schemas.microsoft.com/office/drawing/2014/main" xmlns:a14="http://schemas.microsoft.com/office/drawing/2010/main" xmlns:p14="http://schemas.microsoft.com/office/powerpoint/2010/main" w="9525">
+                <a14:hiddenLine xmlns:p14="http://schemas.microsoft.com/office/powerpoint/2010/main" xmlns:a14="http://schemas.microsoft.com/office/drawing/2010/main" xmlns:a16="http://schemas.microsoft.com/office/drawing/2014/main" xmlns="" w="9525">
                   <a:solidFill>
                     <a:srgbClr val="000000"/>
                   </a:solidFill>
@@ -36357,7 +36362,7 @@
             </a:ln>
             <a:extLst>
               <a:ext uri="{91240B29-F687-4f45-9708-019B960494DF}">
-                <a14:hiddenLine xmlns="" xmlns:a16="http://schemas.microsoft.com/office/drawing/2014/main" xmlns:a14="http://schemas.microsoft.com/office/drawing/2010/main" xmlns:p14="http://schemas.microsoft.com/office/powerpoint/2010/main" w="9525">
+                <a14:hiddenLine xmlns:p14="http://schemas.microsoft.com/office/powerpoint/2010/main" xmlns:a14="http://schemas.microsoft.com/office/drawing/2010/main" xmlns:a16="http://schemas.microsoft.com/office/drawing/2014/main" xmlns="" w="9525">
                   <a:solidFill>
                     <a:srgbClr val="000000"/>
                   </a:solidFill>
@@ -36469,7 +36474,7 @@
             </a:ln>
             <a:extLst>
               <a:ext uri="{91240B29-F687-4f45-9708-019B960494DF}">
-                <a14:hiddenLine xmlns="" xmlns:a16="http://schemas.microsoft.com/office/drawing/2014/main" xmlns:a14="http://schemas.microsoft.com/office/drawing/2010/main" xmlns:p14="http://schemas.microsoft.com/office/powerpoint/2010/main" w="9525">
+                <a14:hiddenLine xmlns:p14="http://schemas.microsoft.com/office/powerpoint/2010/main" xmlns:a14="http://schemas.microsoft.com/office/drawing/2010/main" xmlns:a16="http://schemas.microsoft.com/office/drawing/2014/main" xmlns="" w="9525">
                   <a:solidFill>
                     <a:srgbClr val="000000"/>
                   </a:solidFill>
@@ -36581,7 +36586,7 @@
             </a:ln>
             <a:extLst>
               <a:ext uri="{91240B29-F687-4f45-9708-019B960494DF}">
-                <a14:hiddenLine xmlns="" xmlns:a16="http://schemas.microsoft.com/office/drawing/2014/main" xmlns:a14="http://schemas.microsoft.com/office/drawing/2010/main" xmlns:p14="http://schemas.microsoft.com/office/powerpoint/2010/main" w="9525">
+                <a14:hiddenLine xmlns:p14="http://schemas.microsoft.com/office/powerpoint/2010/main" xmlns:a14="http://schemas.microsoft.com/office/drawing/2010/main" xmlns:a16="http://schemas.microsoft.com/office/drawing/2014/main" xmlns="" w="9525">
                   <a:solidFill>
                     <a:srgbClr val="000000"/>
                   </a:solidFill>
@@ -36665,7 +36670,7 @@
             </a:ln>
             <a:extLst>
               <a:ext uri="{91240B29-F687-4f45-9708-019B960494DF}">
-                <a14:hiddenLine xmlns="" xmlns:a16="http://schemas.microsoft.com/office/drawing/2014/main" xmlns:a14="http://schemas.microsoft.com/office/drawing/2010/main" xmlns:p14="http://schemas.microsoft.com/office/powerpoint/2010/main" w="9525">
+                <a14:hiddenLine xmlns:p14="http://schemas.microsoft.com/office/powerpoint/2010/main" xmlns:a14="http://schemas.microsoft.com/office/drawing/2010/main" xmlns:a16="http://schemas.microsoft.com/office/drawing/2014/main" xmlns="" w="9525">
                   <a:solidFill>
                     <a:srgbClr val="000000"/>
                   </a:solidFill>
@@ -36777,7 +36782,7 @@
             </a:ln>
             <a:extLst>
               <a:ext uri="{91240B29-F687-4f45-9708-019B960494DF}">
-                <a14:hiddenLine xmlns="" xmlns:a16="http://schemas.microsoft.com/office/drawing/2014/main" xmlns:a14="http://schemas.microsoft.com/office/drawing/2010/main" xmlns:p14="http://schemas.microsoft.com/office/powerpoint/2010/main" w="9525">
+                <a14:hiddenLine xmlns:p14="http://schemas.microsoft.com/office/powerpoint/2010/main" xmlns:a14="http://schemas.microsoft.com/office/drawing/2010/main" xmlns:a16="http://schemas.microsoft.com/office/drawing/2014/main" xmlns="" w="9525">
                   <a:solidFill>
                     <a:srgbClr val="000000"/>
                   </a:solidFill>
@@ -36889,7 +36894,7 @@
             </a:ln>
             <a:extLst>
               <a:ext uri="{91240B29-F687-4f45-9708-019B960494DF}">
-                <a14:hiddenLine xmlns="" xmlns:a16="http://schemas.microsoft.com/office/drawing/2014/main" xmlns:a14="http://schemas.microsoft.com/office/drawing/2010/main" xmlns:p14="http://schemas.microsoft.com/office/powerpoint/2010/main" w="9525">
+                <a14:hiddenLine xmlns:p14="http://schemas.microsoft.com/office/powerpoint/2010/main" xmlns:a14="http://schemas.microsoft.com/office/drawing/2010/main" xmlns:a16="http://schemas.microsoft.com/office/drawing/2014/main" xmlns="" w="9525">
                   <a:solidFill>
                     <a:srgbClr val="000000"/>
                   </a:solidFill>
@@ -36967,7 +36972,7 @@
             </a:ln>
             <a:extLst>
               <a:ext uri="{91240B29-F687-4f45-9708-019B960494DF}">
-                <a14:hiddenLine xmlns="" xmlns:a16="http://schemas.microsoft.com/office/drawing/2014/main" xmlns:a14="http://schemas.microsoft.com/office/drawing/2010/main" xmlns:p14="http://schemas.microsoft.com/office/powerpoint/2010/main" w="9525">
+                <a14:hiddenLine xmlns:p14="http://schemas.microsoft.com/office/powerpoint/2010/main" xmlns:a14="http://schemas.microsoft.com/office/drawing/2010/main" xmlns:a16="http://schemas.microsoft.com/office/drawing/2014/main" xmlns="" w="9525">
                   <a:solidFill>
                     <a:srgbClr val="000000"/>
                   </a:solidFill>
@@ -37079,7 +37084,7 @@
             </a:ln>
             <a:extLst>
               <a:ext uri="{91240B29-F687-4f45-9708-019B960494DF}">
-                <a14:hiddenLine xmlns="" xmlns:a16="http://schemas.microsoft.com/office/drawing/2014/main" xmlns:a14="http://schemas.microsoft.com/office/drawing/2010/main" xmlns:p14="http://schemas.microsoft.com/office/powerpoint/2010/main" w="9525">
+                <a14:hiddenLine xmlns:p14="http://schemas.microsoft.com/office/powerpoint/2010/main" xmlns:a14="http://schemas.microsoft.com/office/drawing/2010/main" xmlns:a16="http://schemas.microsoft.com/office/drawing/2014/main" xmlns="" w="9525">
                   <a:solidFill>
                     <a:srgbClr val="000000"/>
                   </a:solidFill>
@@ -37157,7 +37162,7 @@
             </a:ln>
             <a:extLst>
               <a:ext uri="{91240B29-F687-4f45-9708-019B960494DF}">
-                <a14:hiddenLine xmlns="" xmlns:a16="http://schemas.microsoft.com/office/drawing/2014/main" xmlns:a14="http://schemas.microsoft.com/office/drawing/2010/main" xmlns:p14="http://schemas.microsoft.com/office/powerpoint/2010/main" w="9525">
+                <a14:hiddenLine xmlns:p14="http://schemas.microsoft.com/office/powerpoint/2010/main" xmlns:a14="http://schemas.microsoft.com/office/drawing/2010/main" xmlns:a16="http://schemas.microsoft.com/office/drawing/2014/main" xmlns="" w="9525">
                   <a:solidFill>
                     <a:srgbClr val="000000"/>
                   </a:solidFill>
@@ -37269,7 +37274,7 @@
             </a:ln>
             <a:extLst>
               <a:ext uri="{91240B29-F687-4f45-9708-019B960494DF}">
-                <a14:hiddenLine xmlns="" xmlns:a16="http://schemas.microsoft.com/office/drawing/2014/main" xmlns:a14="http://schemas.microsoft.com/office/drawing/2010/main" xmlns:p14="http://schemas.microsoft.com/office/powerpoint/2010/main" w="9525">
+                <a14:hiddenLine xmlns:p14="http://schemas.microsoft.com/office/powerpoint/2010/main" xmlns:a14="http://schemas.microsoft.com/office/drawing/2010/main" xmlns:a16="http://schemas.microsoft.com/office/drawing/2014/main" xmlns="" w="9525">
                   <a:solidFill>
                     <a:srgbClr val="000000"/>
                   </a:solidFill>
@@ -37359,7 +37364,7 @@
             </a:ln>
             <a:extLst>
               <a:ext uri="{91240B29-F687-4f45-9708-019B960494DF}">
-                <a14:hiddenLine xmlns="" xmlns:a16="http://schemas.microsoft.com/office/drawing/2014/main" xmlns:a14="http://schemas.microsoft.com/office/drawing/2010/main" xmlns:p14="http://schemas.microsoft.com/office/powerpoint/2010/main" w="9525">
+                <a14:hiddenLine xmlns:p14="http://schemas.microsoft.com/office/powerpoint/2010/main" xmlns:a14="http://schemas.microsoft.com/office/drawing/2010/main" xmlns:a16="http://schemas.microsoft.com/office/drawing/2014/main" xmlns="" w="9525">
                   <a:solidFill>
                     <a:srgbClr val="000000"/>
                   </a:solidFill>
@@ -37471,7 +37476,7 @@
             </a:ln>
             <a:extLst>
               <a:ext uri="{91240B29-F687-4f45-9708-019B960494DF}">
-                <a14:hiddenLine xmlns="" xmlns:a16="http://schemas.microsoft.com/office/drawing/2014/main" xmlns:a14="http://schemas.microsoft.com/office/drawing/2010/main" xmlns:p14="http://schemas.microsoft.com/office/powerpoint/2010/main" w="9525">
+                <a14:hiddenLine xmlns:p14="http://schemas.microsoft.com/office/powerpoint/2010/main" xmlns:a14="http://schemas.microsoft.com/office/drawing/2010/main" xmlns:a16="http://schemas.microsoft.com/office/drawing/2014/main" xmlns="" w="9525">
                   <a:solidFill>
                     <a:srgbClr val="000000"/>
                   </a:solidFill>
@@ -37561,7 +37566,7 @@
             </a:ln>
             <a:extLst>
               <a:ext uri="{91240B29-F687-4f45-9708-019B960494DF}">
-                <a14:hiddenLine xmlns="" xmlns:a16="http://schemas.microsoft.com/office/drawing/2014/main" xmlns:a14="http://schemas.microsoft.com/office/drawing/2010/main" xmlns:p14="http://schemas.microsoft.com/office/powerpoint/2010/main" w="9525">
+                <a14:hiddenLine xmlns:p14="http://schemas.microsoft.com/office/powerpoint/2010/main" xmlns:a14="http://schemas.microsoft.com/office/drawing/2010/main" xmlns:a16="http://schemas.microsoft.com/office/drawing/2014/main" xmlns="" w="9525">
                   <a:solidFill>
                     <a:srgbClr val="000000"/>
                   </a:solidFill>
@@ -37673,7 +37678,7 @@
             </a:ln>
             <a:extLst>
               <a:ext uri="{91240B29-F687-4f45-9708-019B960494DF}">
-                <a14:hiddenLine xmlns="" xmlns:a16="http://schemas.microsoft.com/office/drawing/2014/main" xmlns:a14="http://schemas.microsoft.com/office/drawing/2010/main" xmlns:p14="http://schemas.microsoft.com/office/powerpoint/2010/main" w="9525">
+                <a14:hiddenLine xmlns:p14="http://schemas.microsoft.com/office/powerpoint/2010/main" xmlns:a14="http://schemas.microsoft.com/office/drawing/2010/main" xmlns:a16="http://schemas.microsoft.com/office/drawing/2014/main" xmlns="" w="9525">
                   <a:solidFill>
                     <a:srgbClr val="000000"/>
                   </a:solidFill>
@@ -37729,7 +37734,7 @@
             </a:ln>
             <a:extLst>
               <a:ext uri="{91240B29-F687-4f45-9708-019B960494DF}">
-                <a14:hiddenLine xmlns="" xmlns:a16="http://schemas.microsoft.com/office/drawing/2014/main" xmlns:a14="http://schemas.microsoft.com/office/drawing/2010/main" xmlns:p14="http://schemas.microsoft.com/office/powerpoint/2010/main" w="9525">
+                <a14:hiddenLine xmlns:p14="http://schemas.microsoft.com/office/powerpoint/2010/main" xmlns:a14="http://schemas.microsoft.com/office/drawing/2010/main" xmlns:a16="http://schemas.microsoft.com/office/drawing/2014/main" xmlns="" w="9525">
                   <a:solidFill>
                     <a:srgbClr val="000000"/>
                   </a:solidFill>
@@ -37841,7 +37846,7 @@
             </a:ln>
             <a:extLst>
               <a:ext uri="{91240B29-F687-4f45-9708-019B960494DF}">
-                <a14:hiddenLine xmlns="" xmlns:a16="http://schemas.microsoft.com/office/drawing/2014/main" xmlns:a14="http://schemas.microsoft.com/office/drawing/2010/main" xmlns:p14="http://schemas.microsoft.com/office/powerpoint/2010/main" w="9525">
+                <a14:hiddenLine xmlns:p14="http://schemas.microsoft.com/office/powerpoint/2010/main" xmlns:a14="http://schemas.microsoft.com/office/drawing/2010/main" xmlns:a16="http://schemas.microsoft.com/office/drawing/2014/main" xmlns="" w="9525">
                   <a:solidFill>
                     <a:srgbClr val="000000"/>
                   </a:solidFill>
@@ -37925,7 +37930,7 @@
             </a:ln>
             <a:extLst>
               <a:ext uri="{91240B29-F687-4f45-9708-019B960494DF}">
-                <a14:hiddenLine xmlns="" xmlns:a16="http://schemas.microsoft.com/office/drawing/2014/main" xmlns:a14="http://schemas.microsoft.com/office/drawing/2010/main" xmlns:p14="http://schemas.microsoft.com/office/powerpoint/2010/main" w="9525">
+                <a14:hiddenLine xmlns:p14="http://schemas.microsoft.com/office/powerpoint/2010/main" xmlns:a14="http://schemas.microsoft.com/office/drawing/2010/main" xmlns:a16="http://schemas.microsoft.com/office/drawing/2014/main" xmlns="" w="9525">
                   <a:solidFill>
                     <a:srgbClr val="000000"/>
                   </a:solidFill>
@@ -38009,7 +38014,7 @@
             </a:ln>
             <a:extLst>
               <a:ext uri="{91240B29-F687-4f45-9708-019B960494DF}">
-                <a14:hiddenLine xmlns="" xmlns:a16="http://schemas.microsoft.com/office/drawing/2014/main" xmlns:a14="http://schemas.microsoft.com/office/drawing/2010/main" xmlns:p14="http://schemas.microsoft.com/office/powerpoint/2010/main" w="9525">
+                <a14:hiddenLine xmlns:p14="http://schemas.microsoft.com/office/powerpoint/2010/main" xmlns:a14="http://schemas.microsoft.com/office/drawing/2010/main" xmlns:a16="http://schemas.microsoft.com/office/drawing/2014/main" xmlns="" w="9525">
                   <a:solidFill>
                     <a:srgbClr val="000000"/>
                   </a:solidFill>
@@ -38121,7 +38126,7 @@
             </a:ln>
             <a:extLst>
               <a:ext uri="{91240B29-F687-4f45-9708-019B960494DF}">
-                <a14:hiddenLine xmlns="" xmlns:a16="http://schemas.microsoft.com/office/drawing/2014/main" xmlns:a14="http://schemas.microsoft.com/office/drawing/2010/main" xmlns:p14="http://schemas.microsoft.com/office/powerpoint/2010/main" w="9525">
+                <a14:hiddenLine xmlns:p14="http://schemas.microsoft.com/office/powerpoint/2010/main" xmlns:a14="http://schemas.microsoft.com/office/drawing/2010/main" xmlns:a16="http://schemas.microsoft.com/office/drawing/2014/main" xmlns="" w="9525">
                   <a:solidFill>
                     <a:srgbClr val="000000"/>
                   </a:solidFill>
@@ -38211,7 +38216,7 @@
             </a:ln>
             <a:extLst>
               <a:ext uri="{91240B29-F687-4f45-9708-019B960494DF}">
-                <a14:hiddenLine xmlns="" xmlns:a16="http://schemas.microsoft.com/office/drawing/2014/main" xmlns:a14="http://schemas.microsoft.com/office/drawing/2010/main" xmlns:p14="http://schemas.microsoft.com/office/powerpoint/2010/main" w="9525">
+                <a14:hiddenLine xmlns:p14="http://schemas.microsoft.com/office/powerpoint/2010/main" xmlns:a14="http://schemas.microsoft.com/office/drawing/2010/main" xmlns:a16="http://schemas.microsoft.com/office/drawing/2014/main" xmlns="" w="9525">
                   <a:solidFill>
                     <a:srgbClr val="000000"/>
                   </a:solidFill>
@@ -38295,7 +38300,7 @@
             </a:ln>
             <a:extLst>
               <a:ext uri="{91240B29-F687-4f45-9708-019B960494DF}">
-                <a14:hiddenLine xmlns="" xmlns:a16="http://schemas.microsoft.com/office/drawing/2014/main" xmlns:a14="http://schemas.microsoft.com/office/drawing/2010/main" xmlns:p14="http://schemas.microsoft.com/office/powerpoint/2010/main" w="9525">
+                <a14:hiddenLine xmlns:p14="http://schemas.microsoft.com/office/powerpoint/2010/main" xmlns:a14="http://schemas.microsoft.com/office/drawing/2010/main" xmlns:a16="http://schemas.microsoft.com/office/drawing/2014/main" xmlns="" w="9525">
                   <a:solidFill>
                     <a:srgbClr val="000000"/>
                   </a:solidFill>
@@ -38407,7 +38412,7 @@
             </a:ln>
             <a:extLst>
               <a:ext uri="{91240B29-F687-4f45-9708-019B960494DF}">
-                <a14:hiddenLine xmlns="" xmlns:a16="http://schemas.microsoft.com/office/drawing/2014/main" xmlns:a14="http://schemas.microsoft.com/office/drawing/2010/main" xmlns:p14="http://schemas.microsoft.com/office/powerpoint/2010/main" w="9525">
+                <a14:hiddenLine xmlns:p14="http://schemas.microsoft.com/office/powerpoint/2010/main" xmlns:a14="http://schemas.microsoft.com/office/drawing/2010/main" xmlns:a16="http://schemas.microsoft.com/office/drawing/2014/main" xmlns="" w="9525">
                   <a:solidFill>
                     <a:srgbClr val="000000"/>
                   </a:solidFill>
@@ -38491,7 +38496,7 @@
             </a:ln>
             <a:extLst>
               <a:ext uri="{91240B29-F687-4f45-9708-019B960494DF}">
-                <a14:hiddenLine xmlns="" xmlns:a16="http://schemas.microsoft.com/office/drawing/2014/main" xmlns:a14="http://schemas.microsoft.com/office/drawing/2010/main" xmlns:p14="http://schemas.microsoft.com/office/powerpoint/2010/main" w="9525">
+                <a14:hiddenLine xmlns:p14="http://schemas.microsoft.com/office/powerpoint/2010/main" xmlns:a14="http://schemas.microsoft.com/office/drawing/2010/main" xmlns:a16="http://schemas.microsoft.com/office/drawing/2014/main" xmlns="" w="9525">
                   <a:solidFill>
                     <a:srgbClr val="000000"/>
                   </a:solidFill>
@@ -38603,7 +38608,7 @@
             </a:ln>
             <a:extLst>
               <a:ext uri="{91240B29-F687-4f45-9708-019B960494DF}">
-                <a14:hiddenLine xmlns="" xmlns:a16="http://schemas.microsoft.com/office/drawing/2014/main" xmlns:a14="http://schemas.microsoft.com/office/drawing/2010/main" xmlns:p14="http://schemas.microsoft.com/office/powerpoint/2010/main" w="9525">
+                <a14:hiddenLine xmlns:p14="http://schemas.microsoft.com/office/powerpoint/2010/main" xmlns:a14="http://schemas.microsoft.com/office/drawing/2010/main" xmlns:a16="http://schemas.microsoft.com/office/drawing/2014/main" xmlns="" w="9525">
                   <a:solidFill>
                     <a:srgbClr val="000000"/>
                   </a:solidFill>
@@ -38687,7 +38692,7 @@
             </a:ln>
             <a:extLst>
               <a:ext uri="{91240B29-F687-4f45-9708-019B960494DF}">
-                <a14:hiddenLine xmlns="" xmlns:a16="http://schemas.microsoft.com/office/drawing/2014/main" xmlns:a14="http://schemas.microsoft.com/office/drawing/2010/main" xmlns:p14="http://schemas.microsoft.com/office/powerpoint/2010/main" w="9525">
+                <a14:hiddenLine xmlns:p14="http://schemas.microsoft.com/office/powerpoint/2010/main" xmlns:a14="http://schemas.microsoft.com/office/drawing/2010/main" xmlns:a16="http://schemas.microsoft.com/office/drawing/2014/main" xmlns="" w="9525">
                   <a:solidFill>
                     <a:srgbClr val="000000"/>
                   </a:solidFill>
@@ -38799,7 +38804,7 @@
             </a:ln>
             <a:extLst>
               <a:ext uri="{91240B29-F687-4f45-9708-019B960494DF}">
-                <a14:hiddenLine xmlns="" xmlns:a16="http://schemas.microsoft.com/office/drawing/2014/main" xmlns:a14="http://schemas.microsoft.com/office/drawing/2010/main" xmlns:p14="http://schemas.microsoft.com/office/powerpoint/2010/main" w="9525">
+                <a14:hiddenLine xmlns:p14="http://schemas.microsoft.com/office/powerpoint/2010/main" xmlns:a14="http://schemas.microsoft.com/office/drawing/2010/main" xmlns:a16="http://schemas.microsoft.com/office/drawing/2014/main" xmlns="" w="9525">
                   <a:solidFill>
                     <a:srgbClr val="000000"/>
                   </a:solidFill>
@@ -38855,7 +38860,7 @@
             </a:ln>
             <a:extLst>
               <a:ext uri="{91240B29-F687-4f45-9708-019B960494DF}">
-                <a14:hiddenLine xmlns="" xmlns:a16="http://schemas.microsoft.com/office/drawing/2014/main" xmlns:a14="http://schemas.microsoft.com/office/drawing/2010/main" xmlns:p14="http://schemas.microsoft.com/office/powerpoint/2010/main" w="9525">
+                <a14:hiddenLine xmlns:p14="http://schemas.microsoft.com/office/powerpoint/2010/main" xmlns:a14="http://schemas.microsoft.com/office/drawing/2010/main" xmlns:a16="http://schemas.microsoft.com/office/drawing/2014/main" xmlns="" w="9525">
                   <a:solidFill>
                     <a:srgbClr val="000000"/>
                   </a:solidFill>
@@ -38942,7 +38947,7 @@
             </a:ln>
             <a:extLst>
               <a:ext uri="{91240B29-F687-4f45-9708-019B960494DF}">
-                <a14:hiddenLine xmlns="" xmlns:a16="http://schemas.microsoft.com/office/drawing/2014/main" xmlns:a14="http://schemas.microsoft.com/office/drawing/2010/main" xmlns:p14="http://schemas.microsoft.com/office/powerpoint/2010/main" w="9525">
+                <a14:hiddenLine xmlns:p14="http://schemas.microsoft.com/office/powerpoint/2010/main" xmlns:a14="http://schemas.microsoft.com/office/drawing/2010/main" xmlns:a16="http://schemas.microsoft.com/office/drawing/2014/main" xmlns="" w="9525">
                   <a:solidFill>
                     <a:srgbClr val="000000"/>
                   </a:solidFill>
@@ -39054,7 +39059,7 @@
             </a:ln>
             <a:extLst>
               <a:ext uri="{91240B29-F687-4f45-9708-019B960494DF}">
-                <a14:hiddenLine xmlns="" xmlns:a16="http://schemas.microsoft.com/office/drawing/2014/main" xmlns:a14="http://schemas.microsoft.com/office/drawing/2010/main" xmlns:p14="http://schemas.microsoft.com/office/powerpoint/2010/main" w="9525">
+                <a14:hiddenLine xmlns:p14="http://schemas.microsoft.com/office/powerpoint/2010/main" xmlns:a14="http://schemas.microsoft.com/office/drawing/2010/main" xmlns:a16="http://schemas.microsoft.com/office/drawing/2014/main" xmlns="" w="9525">
                   <a:solidFill>
                     <a:srgbClr val="000000"/>
                   </a:solidFill>
@@ -39138,7 +39143,7 @@
             </a:ln>
             <a:extLst>
               <a:ext uri="{91240B29-F687-4f45-9708-019B960494DF}">
-                <a14:hiddenLine xmlns="" xmlns:a16="http://schemas.microsoft.com/office/drawing/2014/main" xmlns:a14="http://schemas.microsoft.com/office/drawing/2010/main" xmlns:p14="http://schemas.microsoft.com/office/powerpoint/2010/main" w="9525">
+                <a14:hiddenLine xmlns:p14="http://schemas.microsoft.com/office/powerpoint/2010/main" xmlns:a14="http://schemas.microsoft.com/office/drawing/2010/main" xmlns:a16="http://schemas.microsoft.com/office/drawing/2014/main" xmlns="" w="9525">
                   <a:solidFill>
                     <a:srgbClr val="000000"/>
                   </a:solidFill>
@@ -39250,7 +39255,7 @@
             </a:ln>
             <a:extLst>
               <a:ext uri="{91240B29-F687-4f45-9708-019B960494DF}">
-                <a14:hiddenLine xmlns="" xmlns:a16="http://schemas.microsoft.com/office/drawing/2014/main" xmlns:a14="http://schemas.microsoft.com/office/drawing/2010/main" xmlns:p14="http://schemas.microsoft.com/office/powerpoint/2010/main" w="9525">
+                <a14:hiddenLine xmlns:p14="http://schemas.microsoft.com/office/powerpoint/2010/main" xmlns:a14="http://schemas.microsoft.com/office/drawing/2010/main" xmlns:a16="http://schemas.microsoft.com/office/drawing/2014/main" xmlns="" w="9525">
                   <a:solidFill>
                     <a:srgbClr val="000000"/>
                   </a:solidFill>
@@ -39362,7 +39367,7 @@
             </a:ln>
             <a:extLst>
               <a:ext uri="{91240B29-F687-4f45-9708-019B960494DF}">
-                <a14:hiddenLine xmlns="" xmlns:a16="http://schemas.microsoft.com/office/drawing/2014/main" xmlns:a14="http://schemas.microsoft.com/office/drawing/2010/main" xmlns:p14="http://schemas.microsoft.com/office/powerpoint/2010/main" w="9525">
+                <a14:hiddenLine xmlns:p14="http://schemas.microsoft.com/office/powerpoint/2010/main" xmlns:a14="http://schemas.microsoft.com/office/drawing/2010/main" xmlns:a16="http://schemas.microsoft.com/office/drawing/2014/main" xmlns="" w="9525">
                   <a:solidFill>
                     <a:srgbClr val="000000"/>
                   </a:solidFill>
@@ -39449,7 +39454,7 @@
             </a:ln>
             <a:extLst>
               <a:ext uri="{91240B29-F687-4f45-9708-019B960494DF}">
-                <a14:hiddenLine xmlns="" xmlns:a16="http://schemas.microsoft.com/office/drawing/2014/main" xmlns:a14="http://schemas.microsoft.com/office/drawing/2010/main" xmlns:p14="http://schemas.microsoft.com/office/powerpoint/2010/main" w="9525">
+                <a14:hiddenLine xmlns:p14="http://schemas.microsoft.com/office/powerpoint/2010/main" xmlns:a14="http://schemas.microsoft.com/office/drawing/2010/main" xmlns:a16="http://schemas.microsoft.com/office/drawing/2014/main" xmlns="" w="9525">
                   <a:solidFill>
                     <a:srgbClr val="000000"/>
                   </a:solidFill>
@@ -39533,7 +39538,7 @@
             </a:ln>
             <a:extLst>
               <a:ext uri="{91240B29-F687-4f45-9708-019B960494DF}">
-                <a14:hiddenLine xmlns="" xmlns:a16="http://schemas.microsoft.com/office/drawing/2014/main" xmlns:a14="http://schemas.microsoft.com/office/drawing/2010/main" xmlns:p14="http://schemas.microsoft.com/office/powerpoint/2010/main" w="9525">
+                <a14:hiddenLine xmlns:p14="http://schemas.microsoft.com/office/powerpoint/2010/main" xmlns:a14="http://schemas.microsoft.com/office/drawing/2010/main" xmlns:a16="http://schemas.microsoft.com/office/drawing/2014/main" xmlns="" w="9525">
                   <a:solidFill>
                     <a:srgbClr val="000000"/>
                   </a:solidFill>
@@ -39645,7 +39650,7 @@
             </a:ln>
             <a:extLst>
               <a:ext uri="{91240B29-F687-4f45-9708-019B960494DF}">
-                <a14:hiddenLine xmlns="" xmlns:a16="http://schemas.microsoft.com/office/drawing/2014/main" xmlns:a14="http://schemas.microsoft.com/office/drawing/2010/main" xmlns:p14="http://schemas.microsoft.com/office/powerpoint/2010/main" w="9525">
+                <a14:hiddenLine xmlns:p14="http://schemas.microsoft.com/office/powerpoint/2010/main" xmlns:a14="http://schemas.microsoft.com/office/drawing/2010/main" xmlns:a16="http://schemas.microsoft.com/office/drawing/2014/main" xmlns="" w="9525">
                   <a:solidFill>
                     <a:srgbClr val="000000"/>
                   </a:solidFill>
@@ -39757,7 +39762,7 @@
             </a:ln>
             <a:extLst>
               <a:ext uri="{91240B29-F687-4f45-9708-019B960494DF}">
-                <a14:hiddenLine xmlns="" xmlns:a16="http://schemas.microsoft.com/office/drawing/2014/main" xmlns:a14="http://schemas.microsoft.com/office/drawing/2010/main" xmlns:p14="http://schemas.microsoft.com/office/powerpoint/2010/main" w="9525">
+                <a14:hiddenLine xmlns:p14="http://schemas.microsoft.com/office/powerpoint/2010/main" xmlns:a14="http://schemas.microsoft.com/office/drawing/2010/main" xmlns:a16="http://schemas.microsoft.com/office/drawing/2014/main" xmlns="" w="9525">
                   <a:solidFill>
                     <a:srgbClr val="000000"/>
                   </a:solidFill>
@@ -39841,7 +39846,7 @@
             </a:ln>
             <a:extLst>
               <a:ext uri="{91240B29-F687-4f45-9708-019B960494DF}">
-                <a14:hiddenLine xmlns="" xmlns:a16="http://schemas.microsoft.com/office/drawing/2014/main" xmlns:a14="http://schemas.microsoft.com/office/drawing/2010/main" xmlns:p14="http://schemas.microsoft.com/office/powerpoint/2010/main" w="9525">
+                <a14:hiddenLine xmlns:p14="http://schemas.microsoft.com/office/powerpoint/2010/main" xmlns:a14="http://schemas.microsoft.com/office/drawing/2010/main" xmlns:a16="http://schemas.microsoft.com/office/drawing/2014/main" xmlns="" w="9525">
                   <a:solidFill>
                     <a:srgbClr val="000000"/>
                   </a:solidFill>
@@ -39983,7 +39988,7 @@
             </a:ln>
             <a:extLst>
               <a:ext uri="{91240B29-F687-4f45-9708-019B960494DF}">
-                <a14:hiddenLine xmlns="" xmlns:a16="http://schemas.microsoft.com/office/drawing/2014/main" xmlns:a14="http://schemas.microsoft.com/office/drawing/2010/main" xmlns:p14="http://schemas.microsoft.com/office/powerpoint/2010/main" w="9525">
+                <a14:hiddenLine xmlns:p14="http://schemas.microsoft.com/office/powerpoint/2010/main" xmlns:a14="http://schemas.microsoft.com/office/drawing/2010/main" xmlns:a16="http://schemas.microsoft.com/office/drawing/2014/main" xmlns="" w="9525">
                   <a:solidFill>
                     <a:srgbClr val="000000"/>
                   </a:solidFill>
@@ -40073,7 +40078,7 @@
             </a:ln>
             <a:extLst>
               <a:ext uri="{91240B29-F687-4f45-9708-019B960494DF}">
-                <a14:hiddenLine xmlns="" xmlns:a16="http://schemas.microsoft.com/office/drawing/2014/main" xmlns:a14="http://schemas.microsoft.com/office/drawing/2010/main" xmlns:p14="http://schemas.microsoft.com/office/powerpoint/2010/main" w="9525">
+                <a14:hiddenLine xmlns:p14="http://schemas.microsoft.com/office/powerpoint/2010/main" xmlns:a14="http://schemas.microsoft.com/office/drawing/2010/main" xmlns:a16="http://schemas.microsoft.com/office/drawing/2014/main" xmlns="" w="9525">
                   <a:solidFill>
                     <a:srgbClr val="000000"/>
                   </a:solidFill>
@@ -40185,7 +40190,7 @@
             </a:ln>
             <a:extLst>
               <a:ext uri="{91240B29-F687-4f45-9708-019B960494DF}">
-                <a14:hiddenLine xmlns="" xmlns:a16="http://schemas.microsoft.com/office/drawing/2014/main" xmlns:a14="http://schemas.microsoft.com/office/drawing/2010/main" xmlns:p14="http://schemas.microsoft.com/office/powerpoint/2010/main" w="9525">
+                <a14:hiddenLine xmlns:p14="http://schemas.microsoft.com/office/powerpoint/2010/main" xmlns:a14="http://schemas.microsoft.com/office/drawing/2010/main" xmlns:a16="http://schemas.microsoft.com/office/drawing/2014/main" xmlns="" w="9525">
                   <a:solidFill>
                     <a:srgbClr val="000000"/>
                   </a:solidFill>

--- a/VSCA11Y_Prezentacija.pptx
+++ b/VSCA11Y_Prezentacija.pptx
@@ -16,9 +16,10 @@
     <p:sldId id="259" r:id="rId10"/>
     <p:sldId id="260" r:id="rId11"/>
     <p:sldId id="261" r:id="rId12"/>
-    <p:sldId id="264" r:id="rId13"/>
-    <p:sldId id="265" r:id="rId14"/>
-    <p:sldId id="266" r:id="rId15"/>
+    <p:sldId id="270" r:id="rId13"/>
+    <p:sldId id="264" r:id="rId14"/>
+    <p:sldId id="265" r:id="rId15"/>
+    <p:sldId id="266" r:id="rId16"/>
   </p:sldIdLst>
   <p:sldSz cx="12192000" cy="6858000"/>
   <p:notesSz cx="6858000" cy="9144000"/>
@@ -6761,7 +6762,7 @@
           <a:noFill/>
           <a:extLst>
             <a:ext uri="{909E8E84-426E-40dd-AFC4-6F175D3DCCD1}">
-              <a14:hiddenFill xmlns="" xmlns:a14="http://schemas.microsoft.com/office/drawing/2010/main">
+              <a14:hiddenFill xmlns:a14="http://schemas.microsoft.com/office/drawing/2010/main" xmlns="">
                 <a:solidFill>
                   <a:srgbClr val="FFFFFF"/>
                 </a:solidFill>
@@ -6821,7 +6822,7 @@
             </a:ln>
             <a:extLst>
               <a:ext uri="{91240B29-F687-4f45-9708-019B960494DF}">
-                <a14:hiddenLine xmlns="" xmlns:a14="http://schemas.microsoft.com/office/drawing/2010/main" w="9525">
+                <a14:hiddenLine xmlns:a14="http://schemas.microsoft.com/office/drawing/2010/main" xmlns="" w="9525">
                   <a:solidFill>
                     <a:srgbClr val="000000"/>
                   </a:solidFill>
@@ -6918,7 +6919,7 @@
             </a:ln>
             <a:extLst>
               <a:ext uri="{91240B29-F687-4f45-9708-019B960494DF}">
-                <a14:hiddenLine xmlns="" xmlns:a14="http://schemas.microsoft.com/office/drawing/2010/main" w="9525">
+                <a14:hiddenLine xmlns:a14="http://schemas.microsoft.com/office/drawing/2010/main" xmlns="" w="9525">
                   <a:solidFill>
                     <a:srgbClr val="000000"/>
                   </a:solidFill>
@@ -7015,7 +7016,7 @@
             </a:ln>
             <a:extLst>
               <a:ext uri="{91240B29-F687-4f45-9708-019B960494DF}">
-                <a14:hiddenLine xmlns="" xmlns:a14="http://schemas.microsoft.com/office/drawing/2010/main" w="9525">
+                <a14:hiddenLine xmlns:a14="http://schemas.microsoft.com/office/drawing/2010/main" xmlns="" w="9525">
                   <a:solidFill>
                     <a:srgbClr val="000000"/>
                   </a:solidFill>
@@ -7056,7 +7057,7 @@
             </a:ln>
             <a:extLst>
               <a:ext uri="{91240B29-F687-4f45-9708-019B960494DF}">
-                <a14:hiddenLine xmlns="" xmlns:a14="http://schemas.microsoft.com/office/drawing/2010/main" w="9525">
+                <a14:hiddenLine xmlns:a14="http://schemas.microsoft.com/office/drawing/2010/main" xmlns="" w="9525">
                   <a:solidFill>
                     <a:srgbClr val="000000"/>
                   </a:solidFill>
@@ -7153,7 +7154,7 @@
             </a:ln>
             <a:extLst>
               <a:ext uri="{91240B29-F687-4f45-9708-019B960494DF}">
-                <a14:hiddenLine xmlns="" xmlns:a14="http://schemas.microsoft.com/office/drawing/2010/main" w="9525">
+                <a14:hiddenLine xmlns:a14="http://schemas.microsoft.com/office/drawing/2010/main" xmlns="" w="9525">
                   <a:solidFill>
                     <a:srgbClr val="000000"/>
                   </a:solidFill>
@@ -7222,7 +7223,7 @@
             </a:ln>
             <a:extLst>
               <a:ext uri="{91240B29-F687-4f45-9708-019B960494DF}">
-                <a14:hiddenLine xmlns="" xmlns:a14="http://schemas.microsoft.com/office/drawing/2010/main" w="9525">
+                <a14:hiddenLine xmlns:a14="http://schemas.microsoft.com/office/drawing/2010/main" xmlns="" w="9525">
                   <a:solidFill>
                     <a:srgbClr val="000000"/>
                   </a:solidFill>
@@ -7291,7 +7292,7 @@
             </a:ln>
             <a:extLst>
               <a:ext uri="{91240B29-F687-4f45-9708-019B960494DF}">
-                <a14:hiddenLine xmlns="" xmlns:a14="http://schemas.microsoft.com/office/drawing/2010/main" w="9525">
+                <a14:hiddenLine xmlns:a14="http://schemas.microsoft.com/office/drawing/2010/main" xmlns="" w="9525">
                   <a:solidFill>
                     <a:srgbClr val="000000"/>
                   </a:solidFill>
@@ -7388,7 +7389,7 @@
             </a:ln>
             <a:extLst>
               <a:ext uri="{91240B29-F687-4f45-9708-019B960494DF}">
-                <a14:hiddenLine xmlns="" xmlns:a14="http://schemas.microsoft.com/office/drawing/2010/main" w="9525">
+                <a14:hiddenLine xmlns:a14="http://schemas.microsoft.com/office/drawing/2010/main" xmlns="" w="9525">
                   <a:solidFill>
                     <a:srgbClr val="000000"/>
                   </a:solidFill>
@@ -7457,7 +7458,7 @@
             </a:ln>
             <a:extLst>
               <a:ext uri="{91240B29-F687-4f45-9708-019B960494DF}">
-                <a14:hiddenLine xmlns="" xmlns:a14="http://schemas.microsoft.com/office/drawing/2010/main" w="9525">
+                <a14:hiddenLine xmlns:a14="http://schemas.microsoft.com/office/drawing/2010/main" xmlns="" w="9525">
                   <a:solidFill>
                     <a:srgbClr val="000000"/>
                   </a:solidFill>
@@ -7526,7 +7527,7 @@
             </a:ln>
             <a:extLst>
               <a:ext uri="{91240B29-F687-4f45-9708-019B960494DF}">
-                <a14:hiddenLine xmlns="" xmlns:a14="http://schemas.microsoft.com/office/drawing/2010/main" w="9525">
+                <a14:hiddenLine xmlns:a14="http://schemas.microsoft.com/office/drawing/2010/main" xmlns="" w="9525">
                   <a:solidFill>
                     <a:srgbClr val="000000"/>
                   </a:solidFill>
@@ -7623,7 +7624,7 @@
             </a:ln>
             <a:extLst>
               <a:ext uri="{91240B29-F687-4f45-9708-019B960494DF}">
-                <a14:hiddenLine xmlns="" xmlns:a14="http://schemas.microsoft.com/office/drawing/2010/main" w="9525">
+                <a14:hiddenLine xmlns:a14="http://schemas.microsoft.com/office/drawing/2010/main" xmlns="" w="9525">
                   <a:solidFill>
                     <a:srgbClr val="000000"/>
                   </a:solidFill>
@@ -7720,7 +7721,7 @@
             </a:ln>
             <a:extLst>
               <a:ext uri="{91240B29-F687-4f45-9708-019B960494DF}">
-                <a14:hiddenLine xmlns="" xmlns:a14="http://schemas.microsoft.com/office/drawing/2010/main" w="9525">
+                <a14:hiddenLine xmlns:a14="http://schemas.microsoft.com/office/drawing/2010/main" xmlns="" w="9525">
                   <a:solidFill>
                     <a:srgbClr val="000000"/>
                   </a:solidFill>
@@ -7789,7 +7790,7 @@
             </a:ln>
             <a:extLst>
               <a:ext uri="{91240B29-F687-4f45-9708-019B960494DF}">
-                <a14:hiddenLine xmlns="" xmlns:a14="http://schemas.microsoft.com/office/drawing/2010/main" w="9525">
+                <a14:hiddenLine xmlns:a14="http://schemas.microsoft.com/office/drawing/2010/main" xmlns="" w="9525">
                   <a:solidFill>
                     <a:srgbClr val="000000"/>
                   </a:solidFill>
@@ -7906,7 +7907,7 @@
             </a:ln>
             <a:extLst>
               <a:ext uri="{91240B29-F687-4f45-9708-019B960494DF}">
-                <a14:hiddenLine xmlns="" xmlns:a14="http://schemas.microsoft.com/office/drawing/2010/main" w="9525">
+                <a14:hiddenLine xmlns:a14="http://schemas.microsoft.com/office/drawing/2010/main" xmlns="" w="9525">
                   <a:solidFill>
                     <a:srgbClr val="000000"/>
                   </a:solidFill>
@@ -7975,7 +7976,7 @@
             </a:ln>
             <a:extLst>
               <a:ext uri="{91240B29-F687-4f45-9708-019B960494DF}">
-                <a14:hiddenLine xmlns="" xmlns:a14="http://schemas.microsoft.com/office/drawing/2010/main" w="9525">
+                <a14:hiddenLine xmlns:a14="http://schemas.microsoft.com/office/drawing/2010/main" xmlns="" w="9525">
                   <a:solidFill>
                     <a:srgbClr val="000000"/>
                   </a:solidFill>
@@ -8072,7 +8073,7 @@
             </a:ln>
             <a:extLst>
               <a:ext uri="{91240B29-F687-4f45-9708-019B960494DF}">
-                <a14:hiddenLine xmlns="" xmlns:a14="http://schemas.microsoft.com/office/drawing/2010/main" w="9525">
+                <a14:hiddenLine xmlns:a14="http://schemas.microsoft.com/office/drawing/2010/main" xmlns="" w="9525">
                   <a:solidFill>
                     <a:srgbClr val="000000"/>
                   </a:solidFill>
@@ -8169,7 +8170,7 @@
             </a:ln>
             <a:extLst>
               <a:ext uri="{91240B29-F687-4f45-9708-019B960494DF}">
-                <a14:hiddenLine xmlns="" xmlns:a14="http://schemas.microsoft.com/office/drawing/2010/main" w="9525">
+                <a14:hiddenLine xmlns:a14="http://schemas.microsoft.com/office/drawing/2010/main" xmlns="" w="9525">
                   <a:solidFill>
                     <a:srgbClr val="000000"/>
                   </a:solidFill>
@@ -8238,7 +8239,7 @@
             </a:ln>
             <a:extLst>
               <a:ext uri="{91240B29-F687-4f45-9708-019B960494DF}">
-                <a14:hiddenLine xmlns="" xmlns:a14="http://schemas.microsoft.com/office/drawing/2010/main" w="9525">
+                <a14:hiddenLine xmlns:a14="http://schemas.microsoft.com/office/drawing/2010/main" xmlns="" w="9525">
                   <a:solidFill>
                     <a:srgbClr val="000000"/>
                   </a:solidFill>
@@ -8335,7 +8336,7 @@
             </a:ln>
             <a:extLst>
               <a:ext uri="{91240B29-F687-4f45-9708-019B960494DF}">
-                <a14:hiddenLine xmlns="" xmlns:a14="http://schemas.microsoft.com/office/drawing/2010/main" w="9525">
+                <a14:hiddenLine xmlns:a14="http://schemas.microsoft.com/office/drawing/2010/main" xmlns="" w="9525">
                   <a:solidFill>
                     <a:srgbClr val="000000"/>
                   </a:solidFill>
@@ -8432,7 +8433,7 @@
             </a:ln>
             <a:extLst>
               <a:ext uri="{91240B29-F687-4f45-9708-019B960494DF}">
-                <a14:hiddenLine xmlns="" xmlns:a14="http://schemas.microsoft.com/office/drawing/2010/main" w="9525">
+                <a14:hiddenLine xmlns:a14="http://schemas.microsoft.com/office/drawing/2010/main" xmlns="" w="9525">
                   <a:solidFill>
                     <a:srgbClr val="000000"/>
                   </a:solidFill>
@@ -8495,7 +8496,7 @@
             </a:ln>
             <a:extLst>
               <a:ext uri="{91240B29-F687-4f45-9708-019B960494DF}">
-                <a14:hiddenLine xmlns="" xmlns:a14="http://schemas.microsoft.com/office/drawing/2010/main" w="9525">
+                <a14:hiddenLine xmlns:a14="http://schemas.microsoft.com/office/drawing/2010/main" xmlns="" w="9525">
                   <a:solidFill>
                     <a:srgbClr val="000000"/>
                   </a:solidFill>
@@ -8592,7 +8593,7 @@
             </a:ln>
             <a:extLst>
               <a:ext uri="{91240B29-F687-4f45-9708-019B960494DF}">
-                <a14:hiddenLine xmlns="" xmlns:a14="http://schemas.microsoft.com/office/drawing/2010/main" w="9525">
+                <a14:hiddenLine xmlns:a14="http://schemas.microsoft.com/office/drawing/2010/main" xmlns="" w="9525">
                   <a:solidFill>
                     <a:srgbClr val="000000"/>
                   </a:solidFill>
@@ -8655,7 +8656,7 @@
             </a:ln>
             <a:extLst>
               <a:ext uri="{91240B29-F687-4f45-9708-019B960494DF}">
-                <a14:hiddenLine xmlns="" xmlns:a14="http://schemas.microsoft.com/office/drawing/2010/main" w="9525">
+                <a14:hiddenLine xmlns:a14="http://schemas.microsoft.com/office/drawing/2010/main" xmlns="" w="9525">
                   <a:solidFill>
                     <a:srgbClr val="000000"/>
                   </a:solidFill>
@@ -8752,7 +8753,7 @@
             </a:ln>
             <a:extLst>
               <a:ext uri="{91240B29-F687-4f45-9708-019B960494DF}">
-                <a14:hiddenLine xmlns="" xmlns:a14="http://schemas.microsoft.com/office/drawing/2010/main" w="9525">
+                <a14:hiddenLine xmlns:a14="http://schemas.microsoft.com/office/drawing/2010/main" xmlns="" w="9525">
                   <a:solidFill>
                     <a:srgbClr val="000000"/>
                   </a:solidFill>
@@ -8827,7 +8828,7 @@
             </a:ln>
             <a:extLst>
               <a:ext uri="{91240B29-F687-4f45-9708-019B960494DF}">
-                <a14:hiddenLine xmlns="" xmlns:a14="http://schemas.microsoft.com/office/drawing/2010/main" w="9525">
+                <a14:hiddenLine xmlns:a14="http://schemas.microsoft.com/office/drawing/2010/main" xmlns="" w="9525">
                   <a:solidFill>
                     <a:srgbClr val="000000"/>
                   </a:solidFill>
@@ -8924,7 +8925,7 @@
             </a:ln>
             <a:extLst>
               <a:ext uri="{91240B29-F687-4f45-9708-019B960494DF}">
-                <a14:hiddenLine xmlns="" xmlns:a14="http://schemas.microsoft.com/office/drawing/2010/main" w="9525">
+                <a14:hiddenLine xmlns:a14="http://schemas.microsoft.com/office/drawing/2010/main" xmlns="" w="9525">
                   <a:solidFill>
                     <a:srgbClr val="000000"/>
                   </a:solidFill>
@@ -8999,7 +9000,7 @@
             </a:ln>
             <a:extLst>
               <a:ext uri="{91240B29-F687-4f45-9708-019B960494DF}">
-                <a14:hiddenLine xmlns="" xmlns:a14="http://schemas.microsoft.com/office/drawing/2010/main" w="9525">
+                <a14:hiddenLine xmlns:a14="http://schemas.microsoft.com/office/drawing/2010/main" xmlns="" w="9525">
                   <a:solidFill>
                     <a:srgbClr val="000000"/>
                   </a:solidFill>
@@ -9096,7 +9097,7 @@
             </a:ln>
             <a:extLst>
               <a:ext uri="{91240B29-F687-4f45-9708-019B960494DF}">
-                <a14:hiddenLine xmlns="" xmlns:a14="http://schemas.microsoft.com/office/drawing/2010/main" w="9525">
+                <a14:hiddenLine xmlns:a14="http://schemas.microsoft.com/office/drawing/2010/main" xmlns="" w="9525">
                   <a:solidFill>
                     <a:srgbClr val="000000"/>
                   </a:solidFill>
@@ -9137,7 +9138,7 @@
             </a:ln>
             <a:extLst>
               <a:ext uri="{91240B29-F687-4f45-9708-019B960494DF}">
-                <a14:hiddenLine xmlns="" xmlns:a14="http://schemas.microsoft.com/office/drawing/2010/main" w="9525">
+                <a14:hiddenLine xmlns:a14="http://schemas.microsoft.com/office/drawing/2010/main" xmlns="" w="9525">
                   <a:solidFill>
                     <a:srgbClr val="000000"/>
                   </a:solidFill>
@@ -9234,7 +9235,7 @@
             </a:ln>
             <a:extLst>
               <a:ext uri="{91240B29-F687-4f45-9708-019B960494DF}">
-                <a14:hiddenLine xmlns="" xmlns:a14="http://schemas.microsoft.com/office/drawing/2010/main" w="9525">
+                <a14:hiddenLine xmlns:a14="http://schemas.microsoft.com/office/drawing/2010/main" xmlns="" w="9525">
                   <a:solidFill>
                     <a:srgbClr val="000000"/>
                   </a:solidFill>
@@ -9303,7 +9304,7 @@
             </a:ln>
             <a:extLst>
               <a:ext uri="{91240B29-F687-4f45-9708-019B960494DF}">
-                <a14:hiddenLine xmlns="" xmlns:a14="http://schemas.microsoft.com/office/drawing/2010/main" w="9525">
+                <a14:hiddenLine xmlns:a14="http://schemas.microsoft.com/office/drawing/2010/main" xmlns="" w="9525">
                   <a:solidFill>
                     <a:srgbClr val="000000"/>
                   </a:solidFill>
@@ -9372,7 +9373,7 @@
             </a:ln>
             <a:extLst>
               <a:ext uri="{91240B29-F687-4f45-9708-019B960494DF}">
-                <a14:hiddenLine xmlns="" xmlns:a14="http://schemas.microsoft.com/office/drawing/2010/main" w="9525">
+                <a14:hiddenLine xmlns:a14="http://schemas.microsoft.com/office/drawing/2010/main" xmlns="" w="9525">
                   <a:solidFill>
                     <a:srgbClr val="000000"/>
                   </a:solidFill>
@@ -9469,7 +9470,7 @@
             </a:ln>
             <a:extLst>
               <a:ext uri="{91240B29-F687-4f45-9708-019B960494DF}">
-                <a14:hiddenLine xmlns="" xmlns:a14="http://schemas.microsoft.com/office/drawing/2010/main" w="9525">
+                <a14:hiddenLine xmlns:a14="http://schemas.microsoft.com/office/drawing/2010/main" xmlns="" w="9525">
                   <a:solidFill>
                     <a:srgbClr val="000000"/>
                   </a:solidFill>
@@ -9544,7 +9545,7 @@
             </a:ln>
             <a:extLst>
               <a:ext uri="{91240B29-F687-4f45-9708-019B960494DF}">
-                <a14:hiddenLine xmlns="" xmlns:a14="http://schemas.microsoft.com/office/drawing/2010/main" w="9525">
+                <a14:hiddenLine xmlns:a14="http://schemas.microsoft.com/office/drawing/2010/main" xmlns="" w="9525">
                   <a:solidFill>
                     <a:srgbClr val="000000"/>
                   </a:solidFill>
@@ -9613,7 +9614,7 @@
             </a:ln>
             <a:extLst>
               <a:ext uri="{91240B29-F687-4f45-9708-019B960494DF}">
-                <a14:hiddenLine xmlns="" xmlns:a14="http://schemas.microsoft.com/office/drawing/2010/main" w="9525">
+                <a14:hiddenLine xmlns:a14="http://schemas.microsoft.com/office/drawing/2010/main" xmlns="" w="9525">
                   <a:solidFill>
                     <a:srgbClr val="000000"/>
                   </a:solidFill>
@@ -9710,7 +9711,7 @@
             </a:ln>
             <a:extLst>
               <a:ext uri="{91240B29-F687-4f45-9708-019B960494DF}">
-                <a14:hiddenLine xmlns="" xmlns:a14="http://schemas.microsoft.com/office/drawing/2010/main" w="9525">
+                <a14:hiddenLine xmlns:a14="http://schemas.microsoft.com/office/drawing/2010/main" xmlns="" w="9525">
                   <a:solidFill>
                     <a:srgbClr val="000000"/>
                   </a:solidFill>
@@ -9779,7 +9780,7 @@
             </a:ln>
             <a:extLst>
               <a:ext uri="{91240B29-F687-4f45-9708-019B960494DF}">
-                <a14:hiddenLine xmlns="" xmlns:a14="http://schemas.microsoft.com/office/drawing/2010/main" w="9525">
+                <a14:hiddenLine xmlns:a14="http://schemas.microsoft.com/office/drawing/2010/main" xmlns="" w="9525">
                   <a:solidFill>
                     <a:srgbClr val="000000"/>
                   </a:solidFill>
@@ -9876,7 +9877,7 @@
             </a:ln>
             <a:extLst>
               <a:ext uri="{91240B29-F687-4f45-9708-019B960494DF}">
-                <a14:hiddenLine xmlns="" xmlns:a14="http://schemas.microsoft.com/office/drawing/2010/main" w="9525">
+                <a14:hiddenLine xmlns:a14="http://schemas.microsoft.com/office/drawing/2010/main" xmlns="" w="9525">
                   <a:solidFill>
                     <a:srgbClr val="000000"/>
                   </a:solidFill>
@@ -9945,7 +9946,7 @@
             </a:ln>
             <a:extLst>
               <a:ext uri="{91240B29-F687-4f45-9708-019B960494DF}">
-                <a14:hiddenLine xmlns="" xmlns:a14="http://schemas.microsoft.com/office/drawing/2010/main" w="9525">
+                <a14:hiddenLine xmlns:a14="http://schemas.microsoft.com/office/drawing/2010/main" xmlns="" w="9525">
                   <a:solidFill>
                     <a:srgbClr val="000000"/>
                   </a:solidFill>
@@ -10042,7 +10043,7 @@
             </a:ln>
             <a:extLst>
               <a:ext uri="{91240B29-F687-4f45-9708-019B960494DF}">
-                <a14:hiddenLine xmlns="" xmlns:a14="http://schemas.microsoft.com/office/drawing/2010/main" w="9525">
+                <a14:hiddenLine xmlns:a14="http://schemas.microsoft.com/office/drawing/2010/main" xmlns="" w="9525">
                   <a:solidFill>
                     <a:srgbClr val="000000"/>
                   </a:solidFill>
@@ -10083,7 +10084,7 @@
             </a:ln>
             <a:extLst>
               <a:ext uri="{91240B29-F687-4f45-9708-019B960494DF}">
-                <a14:hiddenLine xmlns="" xmlns:a14="http://schemas.microsoft.com/office/drawing/2010/main" w="9525">
+                <a14:hiddenLine xmlns:a14="http://schemas.microsoft.com/office/drawing/2010/main" xmlns="" w="9525">
                   <a:solidFill>
                     <a:srgbClr val="000000"/>
                   </a:solidFill>
@@ -10155,7 +10156,7 @@
             </a:ln>
             <a:extLst>
               <a:ext uri="{91240B29-F687-4f45-9708-019B960494DF}">
-                <a14:hiddenLine xmlns="" xmlns:a14="http://schemas.microsoft.com/office/drawing/2010/main" w="9525">
+                <a14:hiddenLine xmlns:a14="http://schemas.microsoft.com/office/drawing/2010/main" xmlns="" w="9525">
                   <a:solidFill>
                     <a:srgbClr val="000000"/>
                   </a:solidFill>
@@ -10252,7 +10253,7 @@
             </a:ln>
             <a:extLst>
               <a:ext uri="{91240B29-F687-4f45-9708-019B960494DF}">
-                <a14:hiddenLine xmlns="" xmlns:a14="http://schemas.microsoft.com/office/drawing/2010/main" w="9525">
+                <a14:hiddenLine xmlns:a14="http://schemas.microsoft.com/office/drawing/2010/main" xmlns="" w="9525">
                   <a:solidFill>
                     <a:srgbClr val="000000"/>
                   </a:solidFill>
@@ -10321,7 +10322,7 @@
             </a:ln>
             <a:extLst>
               <a:ext uri="{91240B29-F687-4f45-9708-019B960494DF}">
-                <a14:hiddenLine xmlns="" xmlns:a14="http://schemas.microsoft.com/office/drawing/2010/main" w="9525">
+                <a14:hiddenLine xmlns:a14="http://schemas.microsoft.com/office/drawing/2010/main" xmlns="" w="9525">
                   <a:solidFill>
                     <a:srgbClr val="000000"/>
                   </a:solidFill>
@@ -10418,7 +10419,7 @@
             </a:ln>
             <a:extLst>
               <a:ext uri="{91240B29-F687-4f45-9708-019B960494DF}">
-                <a14:hiddenLine xmlns="" xmlns:a14="http://schemas.microsoft.com/office/drawing/2010/main" w="9525">
+                <a14:hiddenLine xmlns:a14="http://schemas.microsoft.com/office/drawing/2010/main" xmlns="" w="9525">
                   <a:solidFill>
                     <a:srgbClr val="000000"/>
                   </a:solidFill>
@@ -10515,7 +10516,7 @@
             </a:ln>
             <a:extLst>
               <a:ext uri="{91240B29-F687-4f45-9708-019B960494DF}">
-                <a14:hiddenLine xmlns="" xmlns:a14="http://schemas.microsoft.com/office/drawing/2010/main" w="9525">
+                <a14:hiddenLine xmlns:a14="http://schemas.microsoft.com/office/drawing/2010/main" xmlns="" w="9525">
                   <a:solidFill>
                     <a:srgbClr val="000000"/>
                   </a:solidFill>
@@ -10587,7 +10588,7 @@
             </a:ln>
             <a:extLst>
               <a:ext uri="{91240B29-F687-4f45-9708-019B960494DF}">
-                <a14:hiddenLine xmlns="" xmlns:a14="http://schemas.microsoft.com/office/drawing/2010/main" w="9525">
+                <a14:hiddenLine xmlns:a14="http://schemas.microsoft.com/office/drawing/2010/main" xmlns="" w="9525">
                   <a:solidFill>
                     <a:srgbClr val="000000"/>
                   </a:solidFill>
@@ -10656,7 +10657,7 @@
             </a:ln>
             <a:extLst>
               <a:ext uri="{91240B29-F687-4f45-9708-019B960494DF}">
-                <a14:hiddenLine xmlns="" xmlns:a14="http://schemas.microsoft.com/office/drawing/2010/main" w="9525">
+                <a14:hiddenLine xmlns:a14="http://schemas.microsoft.com/office/drawing/2010/main" xmlns="" w="9525">
                   <a:solidFill>
                     <a:srgbClr val="000000"/>
                   </a:solidFill>
@@ -10753,7 +10754,7 @@
             </a:ln>
             <a:extLst>
               <a:ext uri="{91240B29-F687-4f45-9708-019B960494DF}">
-                <a14:hiddenLine xmlns="" xmlns:a14="http://schemas.microsoft.com/office/drawing/2010/main" w="9525">
+                <a14:hiddenLine xmlns:a14="http://schemas.microsoft.com/office/drawing/2010/main" xmlns="" w="9525">
                   <a:solidFill>
                     <a:srgbClr val="000000"/>
                   </a:solidFill>
@@ -10850,7 +10851,7 @@
             </a:ln>
             <a:extLst>
               <a:ext uri="{91240B29-F687-4f45-9708-019B960494DF}">
-                <a14:hiddenLine xmlns="" xmlns:a14="http://schemas.microsoft.com/office/drawing/2010/main" w="9525">
+                <a14:hiddenLine xmlns:a14="http://schemas.microsoft.com/office/drawing/2010/main" xmlns="" w="9525">
                   <a:solidFill>
                     <a:srgbClr val="000000"/>
                   </a:solidFill>
@@ -10919,7 +10920,7 @@
             </a:ln>
             <a:extLst>
               <a:ext uri="{91240B29-F687-4f45-9708-019B960494DF}">
-                <a14:hiddenLine xmlns="" xmlns:a14="http://schemas.microsoft.com/office/drawing/2010/main" w="9525">
+                <a14:hiddenLine xmlns:a14="http://schemas.microsoft.com/office/drawing/2010/main" xmlns="" w="9525">
                   <a:solidFill>
                     <a:srgbClr val="000000"/>
                   </a:solidFill>
@@ -11046,7 +11047,7 @@
             </a:ln>
             <a:extLst>
               <a:ext uri="{91240B29-F687-4f45-9708-019B960494DF}">
-                <a14:hiddenLine xmlns="" xmlns:a14="http://schemas.microsoft.com/office/drawing/2010/main" w="9525">
+                <a14:hiddenLine xmlns:a14="http://schemas.microsoft.com/office/drawing/2010/main" xmlns="" w="9525">
                   <a:solidFill>
                     <a:srgbClr val="000000"/>
                   </a:solidFill>
@@ -11121,7 +11122,7 @@
             </a:ln>
             <a:extLst>
               <a:ext uri="{91240B29-F687-4f45-9708-019B960494DF}">
-                <a14:hiddenLine xmlns="" xmlns:a14="http://schemas.microsoft.com/office/drawing/2010/main" w="9525">
+                <a14:hiddenLine xmlns:a14="http://schemas.microsoft.com/office/drawing/2010/main" xmlns="" w="9525">
                   <a:solidFill>
                     <a:srgbClr val="000000"/>
                   </a:solidFill>
@@ -11218,7 +11219,7 @@
             </a:ln>
             <a:extLst>
               <a:ext uri="{91240B29-F687-4f45-9708-019B960494DF}">
-                <a14:hiddenLine xmlns="" xmlns:a14="http://schemas.microsoft.com/office/drawing/2010/main" w="9525">
+                <a14:hiddenLine xmlns:a14="http://schemas.microsoft.com/office/drawing/2010/main" xmlns="" w="9525">
                   <a:solidFill>
                     <a:srgbClr val="000000"/>
                   </a:solidFill>
@@ -11365,7 +11366,7 @@
           <a:p>
             <a:fld id="{6733B157-BC8D-485A-B099-210699CD19FB}" type="datetimeFigureOut">
               <a:rPr lang="en-US" smtClean="0"/>
-              <a:t>3/31/2026</a:t>
+              <a:t>4/5/2026</a:t>
             </a:fld>
             <a:endParaRPr lang="en-US"/>
           </a:p>
@@ -11632,7 +11633,7 @@
           <a:p>
             <a:fld id="{6733B157-BC8D-485A-B099-210699CD19FB}" type="datetimeFigureOut">
               <a:rPr lang="en-US" smtClean="0"/>
-              <a:t>3/31/2026</a:t>
+              <a:t>4/5/2026</a:t>
             </a:fld>
             <a:endParaRPr lang="en-US"/>
           </a:p>
@@ -11828,7 +11829,7 @@
           <a:p>
             <a:fld id="{6733B157-BC8D-485A-B099-210699CD19FB}" type="datetimeFigureOut">
               <a:rPr lang="en-US" smtClean="0"/>
-              <a:t>3/31/2026</a:t>
+              <a:t>4/5/2026</a:t>
             </a:fld>
             <a:endParaRPr lang="en-US"/>
           </a:p>
@@ -12091,7 +12092,7 @@
           <a:p>
             <a:fld id="{6733B157-BC8D-485A-B099-210699CD19FB}" type="datetimeFigureOut">
               <a:rPr lang="en-US" smtClean="0"/>
-              <a:t>3/31/2026</a:t>
+              <a:t>4/5/2026</a:t>
             </a:fld>
             <a:endParaRPr lang="en-US"/>
           </a:p>
@@ -12525,7 +12526,7 @@
           <a:p>
             <a:fld id="{6733B157-BC8D-485A-B099-210699CD19FB}" type="datetimeFigureOut">
               <a:rPr lang="en-US" smtClean="0"/>
-              <a:t>3/31/2026</a:t>
+              <a:t>4/5/2026</a:t>
             </a:fld>
             <a:endParaRPr lang="en-US"/>
           </a:p>
@@ -13071,7 +13072,7 @@
           <a:p>
             <a:fld id="{6733B157-BC8D-485A-B099-210699CD19FB}" type="datetimeFigureOut">
               <a:rPr lang="en-US" smtClean="0"/>
-              <a:t>3/31/2026</a:t>
+              <a:t>4/5/2026</a:t>
             </a:fld>
             <a:endParaRPr lang="en-US"/>
           </a:p>
@@ -13791,7 +13792,7 @@
           <a:p>
             <a:fld id="{6733B157-BC8D-485A-B099-210699CD19FB}" type="datetimeFigureOut">
               <a:rPr lang="en-US" smtClean="0"/>
-              <a:t>3/31/2026</a:t>
+              <a:t>4/5/2026</a:t>
             </a:fld>
             <a:endParaRPr lang="en-US"/>
           </a:p>
@@ -13961,7 +13962,7 @@
           <a:p>
             <a:fld id="{6733B157-BC8D-485A-B099-210699CD19FB}" type="datetimeFigureOut">
               <a:rPr lang="en-US" smtClean="0"/>
-              <a:t>3/31/2026</a:t>
+              <a:t>4/5/2026</a:t>
             </a:fld>
             <a:endParaRPr lang="en-US"/>
           </a:p>
@@ -14141,7 +14142,7 @@
           <a:p>
             <a:fld id="{6733B157-BC8D-485A-B099-210699CD19FB}" type="datetimeFigureOut">
               <a:rPr lang="en-US" smtClean="0"/>
-              <a:t>3/31/2026</a:t>
+              <a:t>4/5/2026</a:t>
             </a:fld>
             <a:endParaRPr lang="en-US"/>
           </a:p>
@@ -14311,7 +14312,7 @@
           <a:p>
             <a:fld id="{6733B157-BC8D-485A-B099-210699CD19FB}" type="datetimeFigureOut">
               <a:rPr lang="en-US" smtClean="0"/>
-              <a:t>3/31/2026</a:t>
+              <a:t>4/5/2026</a:t>
             </a:fld>
             <a:endParaRPr lang="en-US"/>
           </a:p>
@@ -14561,7 +14562,7 @@
           <a:p>
             <a:fld id="{6733B157-BC8D-485A-B099-210699CD19FB}" type="datetimeFigureOut">
               <a:rPr lang="en-US" smtClean="0"/>
-              <a:t>3/31/2026</a:t>
+              <a:t>4/5/2026</a:t>
             </a:fld>
             <a:endParaRPr lang="en-US"/>
           </a:p>
@@ -14793,7 +14794,7 @@
           <a:p>
             <a:fld id="{6733B157-BC8D-485A-B099-210699CD19FB}" type="datetimeFigureOut">
               <a:rPr lang="en-US" smtClean="0"/>
-              <a:t>3/31/2026</a:t>
+              <a:t>4/5/2026</a:t>
             </a:fld>
             <a:endParaRPr lang="en-US"/>
           </a:p>
@@ -15174,7 +15175,7 @@
           <a:p>
             <a:fld id="{6733B157-BC8D-485A-B099-210699CD19FB}" type="datetimeFigureOut">
               <a:rPr lang="en-US" smtClean="0"/>
-              <a:t>3/31/2026</a:t>
+              <a:t>4/5/2026</a:t>
             </a:fld>
             <a:endParaRPr lang="en-US"/>
           </a:p>
@@ -15292,7 +15293,7 @@
           <a:p>
             <a:fld id="{6733B157-BC8D-485A-B099-210699CD19FB}" type="datetimeFigureOut">
               <a:rPr lang="en-US" smtClean="0"/>
-              <a:t>3/31/2026</a:t>
+              <a:t>4/5/2026</a:t>
             </a:fld>
             <a:endParaRPr lang="en-US"/>
           </a:p>
@@ -15387,7 +15388,7 @@
           <a:p>
             <a:fld id="{6733B157-BC8D-485A-B099-210699CD19FB}" type="datetimeFigureOut">
               <a:rPr lang="en-US" smtClean="0"/>
-              <a:t>3/31/2026</a:t>
+              <a:t>4/5/2026</a:t>
             </a:fld>
             <a:endParaRPr lang="en-US"/>
           </a:p>
@@ -15636,7 +15637,7 @@
           <a:p>
             <a:fld id="{6733B157-BC8D-485A-B099-210699CD19FB}" type="datetimeFigureOut">
               <a:rPr lang="en-US" smtClean="0"/>
-              <a:t>3/31/2026</a:t>
+              <a:t>4/5/2026</a:t>
             </a:fld>
             <a:endParaRPr lang="en-US"/>
           </a:p>
@@ -15916,7 +15917,7 @@
           <a:p>
             <a:fld id="{6733B157-BC8D-485A-B099-210699CD19FB}" type="datetimeFigureOut">
               <a:rPr lang="en-US" smtClean="0"/>
-              <a:t>3/31/2026</a:t>
+              <a:t>4/5/2026</a:t>
             </a:fld>
             <a:endParaRPr lang="en-US"/>
           </a:p>
@@ -16032,7 +16033,7 @@
           <a:noFill/>
           <a:extLst>
             <a:ext uri="{909E8E84-426E-40dd-AFC4-6F175D3DCCD1}">
-              <a14:hiddenFill xmlns="" xmlns:a14="http://schemas.microsoft.com/office/drawing/2010/main">
+              <a14:hiddenFill xmlns:a14="http://schemas.microsoft.com/office/drawing/2010/main" xmlns="">
                 <a:solidFill>
                   <a:srgbClr val="FFFFFF"/>
                 </a:solidFill>
@@ -16106,7 +16107,7 @@
               </a:ln>
               <a:extLst>
                 <a:ext uri="{91240B29-F687-4f45-9708-019B960494DF}">
-                  <a14:hiddenLine xmlns="" xmlns:a14="http://schemas.microsoft.com/office/drawing/2010/main" w="9525">
+                  <a14:hiddenLine xmlns:a14="http://schemas.microsoft.com/office/drawing/2010/main" xmlns="" w="9525">
                     <a:solidFill>
                       <a:srgbClr val="000000"/>
                     </a:solidFill>
@@ -16203,7 +16204,7 @@
               </a:ln>
               <a:extLst>
                 <a:ext uri="{91240B29-F687-4f45-9708-019B960494DF}">
-                  <a14:hiddenLine xmlns="" xmlns:a14="http://schemas.microsoft.com/office/drawing/2010/main" w="9525">
+                  <a14:hiddenLine xmlns:a14="http://schemas.microsoft.com/office/drawing/2010/main" xmlns="" w="9525">
                     <a:solidFill>
                       <a:srgbClr val="000000"/>
                     </a:solidFill>
@@ -16300,7 +16301,7 @@
               </a:ln>
               <a:extLst>
                 <a:ext uri="{91240B29-F687-4f45-9708-019B960494DF}">
-                  <a14:hiddenLine xmlns="" xmlns:a14="http://schemas.microsoft.com/office/drawing/2010/main" w="9525">
+                  <a14:hiddenLine xmlns:a14="http://schemas.microsoft.com/office/drawing/2010/main" xmlns="" w="9525">
                     <a:solidFill>
                       <a:srgbClr val="000000"/>
                     </a:solidFill>
@@ -16369,7 +16370,7 @@
               </a:ln>
               <a:extLst>
                 <a:ext uri="{91240B29-F687-4f45-9708-019B960494DF}">
-                  <a14:hiddenLine xmlns="" xmlns:a14="http://schemas.microsoft.com/office/drawing/2010/main" w="9525">
+                  <a14:hiddenLine xmlns:a14="http://schemas.microsoft.com/office/drawing/2010/main" xmlns="" w="9525">
                     <a:solidFill>
                       <a:srgbClr val="000000"/>
                     </a:solidFill>
@@ -16466,7 +16467,7 @@
               </a:ln>
               <a:extLst>
                 <a:ext uri="{91240B29-F687-4f45-9708-019B960494DF}">
-                  <a14:hiddenLine xmlns="" xmlns:a14="http://schemas.microsoft.com/office/drawing/2010/main" w="9525">
+                  <a14:hiddenLine xmlns:a14="http://schemas.microsoft.com/office/drawing/2010/main" xmlns="" w="9525">
                     <a:solidFill>
                       <a:srgbClr val="000000"/>
                     </a:solidFill>
@@ -16535,7 +16536,7 @@
               </a:ln>
               <a:extLst>
                 <a:ext uri="{91240B29-F687-4f45-9708-019B960494DF}">
-                  <a14:hiddenLine xmlns="" xmlns:a14="http://schemas.microsoft.com/office/drawing/2010/main" w="9525">
+                  <a14:hiddenLine xmlns:a14="http://schemas.microsoft.com/office/drawing/2010/main" xmlns="" w="9525">
                     <a:solidFill>
                       <a:srgbClr val="000000"/>
                     </a:solidFill>
@@ -16604,7 +16605,7 @@
               </a:ln>
               <a:extLst>
                 <a:ext uri="{91240B29-F687-4f45-9708-019B960494DF}">
-                  <a14:hiddenLine xmlns="" xmlns:a14="http://schemas.microsoft.com/office/drawing/2010/main" w="9525">
+                  <a14:hiddenLine xmlns:a14="http://schemas.microsoft.com/office/drawing/2010/main" xmlns="" w="9525">
                     <a:solidFill>
                       <a:srgbClr val="000000"/>
                     </a:solidFill>
@@ -16701,7 +16702,7 @@
               </a:ln>
               <a:extLst>
                 <a:ext uri="{91240B29-F687-4f45-9708-019B960494DF}">
-                  <a14:hiddenLine xmlns="" xmlns:a14="http://schemas.microsoft.com/office/drawing/2010/main" w="9525">
+                  <a14:hiddenLine xmlns:a14="http://schemas.microsoft.com/office/drawing/2010/main" xmlns="" w="9525">
                     <a:solidFill>
                       <a:srgbClr val="000000"/>
                     </a:solidFill>
@@ -16798,7 +16799,7 @@
               </a:ln>
               <a:extLst>
                 <a:ext uri="{91240B29-F687-4f45-9708-019B960494DF}">
-                  <a14:hiddenLine xmlns="" xmlns:a14="http://schemas.microsoft.com/office/drawing/2010/main" w="9525">
+                  <a14:hiddenLine xmlns:a14="http://schemas.microsoft.com/office/drawing/2010/main" xmlns="" w="9525">
                     <a:solidFill>
                       <a:srgbClr val="000000"/>
                     </a:solidFill>
@@ -16867,7 +16868,7 @@
               </a:ln>
               <a:extLst>
                 <a:ext uri="{91240B29-F687-4f45-9708-019B960494DF}">
-                  <a14:hiddenLine xmlns="" xmlns:a14="http://schemas.microsoft.com/office/drawing/2010/main" w="9525">
+                  <a14:hiddenLine xmlns:a14="http://schemas.microsoft.com/office/drawing/2010/main" xmlns="" w="9525">
                     <a:solidFill>
                       <a:srgbClr val="000000"/>
                     </a:solidFill>
@@ -16984,7 +16985,7 @@
               </a:ln>
               <a:extLst>
                 <a:ext uri="{91240B29-F687-4f45-9708-019B960494DF}">
-                  <a14:hiddenLine xmlns="" xmlns:a14="http://schemas.microsoft.com/office/drawing/2010/main" w="9525">
+                  <a14:hiddenLine xmlns:a14="http://schemas.microsoft.com/office/drawing/2010/main" xmlns="" w="9525">
                     <a:solidFill>
                       <a:srgbClr val="000000"/>
                     </a:solidFill>
@@ -17082,7 +17083,7 @@
               </a:ln>
               <a:extLst>
                 <a:ext uri="{91240B29-F687-4f45-9708-019B960494DF}">
-                  <a14:hiddenLine xmlns="" xmlns:a14="http://schemas.microsoft.com/office/drawing/2010/main" w="9525">
+                  <a14:hiddenLine xmlns:a14="http://schemas.microsoft.com/office/drawing/2010/main" xmlns="" w="9525">
                     <a:solidFill>
                       <a:srgbClr val="000000"/>
                     </a:solidFill>
@@ -17151,7 +17152,7 @@
               </a:ln>
               <a:extLst>
                 <a:ext uri="{91240B29-F687-4f45-9708-019B960494DF}">
-                  <a14:hiddenLine xmlns="" xmlns:a14="http://schemas.microsoft.com/office/drawing/2010/main" w="9525">
+                  <a14:hiddenLine xmlns:a14="http://schemas.microsoft.com/office/drawing/2010/main" xmlns="" w="9525">
                     <a:solidFill>
                       <a:srgbClr val="000000"/>
                     </a:solidFill>
@@ -17220,7 +17221,7 @@
               </a:ln>
               <a:extLst>
                 <a:ext uri="{91240B29-F687-4f45-9708-019B960494DF}">
-                  <a14:hiddenLine xmlns="" xmlns:a14="http://schemas.microsoft.com/office/drawing/2010/main" w="9525">
+                  <a14:hiddenLine xmlns:a14="http://schemas.microsoft.com/office/drawing/2010/main" xmlns="" w="9525">
                     <a:solidFill>
                       <a:srgbClr val="000000"/>
                     </a:solidFill>
@@ -17317,7 +17318,7 @@
               </a:ln>
               <a:extLst>
                 <a:ext uri="{91240B29-F687-4f45-9708-019B960494DF}">
-                  <a14:hiddenLine xmlns="" xmlns:a14="http://schemas.microsoft.com/office/drawing/2010/main" w="9525">
+                  <a14:hiddenLine xmlns:a14="http://schemas.microsoft.com/office/drawing/2010/main" xmlns="" w="9525">
                     <a:solidFill>
                       <a:srgbClr val="000000"/>
                     </a:solidFill>
@@ -17358,7 +17359,7 @@
               </a:ln>
               <a:extLst>
                 <a:ext uri="{91240B29-F687-4f45-9708-019B960494DF}">
-                  <a14:hiddenLine xmlns="" xmlns:a14="http://schemas.microsoft.com/office/drawing/2010/main" w="9525">
+                  <a14:hiddenLine xmlns:a14="http://schemas.microsoft.com/office/drawing/2010/main" xmlns="" w="9525">
                     <a:solidFill>
                       <a:srgbClr val="000000"/>
                     </a:solidFill>
@@ -17430,7 +17431,7 @@
               </a:ln>
               <a:extLst>
                 <a:ext uri="{91240B29-F687-4f45-9708-019B960494DF}">
-                  <a14:hiddenLine xmlns="" xmlns:a14="http://schemas.microsoft.com/office/drawing/2010/main" w="9525">
+                  <a14:hiddenLine xmlns:a14="http://schemas.microsoft.com/office/drawing/2010/main" xmlns="" w="9525">
                     <a:solidFill>
                       <a:srgbClr val="000000"/>
                     </a:solidFill>
@@ -17527,7 +17528,7 @@
               </a:ln>
               <a:extLst>
                 <a:ext uri="{91240B29-F687-4f45-9708-019B960494DF}">
-                  <a14:hiddenLine xmlns="" xmlns:a14="http://schemas.microsoft.com/office/drawing/2010/main" w="9525">
+                  <a14:hiddenLine xmlns:a14="http://schemas.microsoft.com/office/drawing/2010/main" xmlns="" w="9525">
                     <a:solidFill>
                       <a:srgbClr val="000000"/>
                     </a:solidFill>
@@ -17596,7 +17597,7 @@
               </a:ln>
               <a:extLst>
                 <a:ext uri="{91240B29-F687-4f45-9708-019B960494DF}">
-                  <a14:hiddenLine xmlns="" xmlns:a14="http://schemas.microsoft.com/office/drawing/2010/main" w="9525">
+                  <a14:hiddenLine xmlns:a14="http://schemas.microsoft.com/office/drawing/2010/main" xmlns="" w="9525">
                     <a:solidFill>
                       <a:srgbClr val="000000"/>
                     </a:solidFill>
@@ -17693,7 +17694,7 @@
               </a:ln>
               <a:extLst>
                 <a:ext uri="{91240B29-F687-4f45-9708-019B960494DF}">
-                  <a14:hiddenLine xmlns="" xmlns:a14="http://schemas.microsoft.com/office/drawing/2010/main" w="9525">
+                  <a14:hiddenLine xmlns:a14="http://schemas.microsoft.com/office/drawing/2010/main" xmlns="" w="9525">
                     <a:solidFill>
                       <a:srgbClr val="000000"/>
                     </a:solidFill>
@@ -17765,7 +17766,7 @@
               </a:ln>
               <a:extLst>
                 <a:ext uri="{91240B29-F687-4f45-9708-019B960494DF}">
-                  <a14:hiddenLine xmlns="" xmlns:a14="http://schemas.microsoft.com/office/drawing/2010/main" w="9525">
+                  <a14:hiddenLine xmlns:a14="http://schemas.microsoft.com/office/drawing/2010/main" xmlns="" w="9525">
                     <a:solidFill>
                       <a:srgbClr val="000000"/>
                     </a:solidFill>
@@ -17834,7 +17835,7 @@
               </a:ln>
               <a:extLst>
                 <a:ext uri="{91240B29-F687-4f45-9708-019B960494DF}">
-                  <a14:hiddenLine xmlns="" xmlns:a14="http://schemas.microsoft.com/office/drawing/2010/main" w="9525">
+                  <a14:hiddenLine xmlns:a14="http://schemas.microsoft.com/office/drawing/2010/main" xmlns="" w="9525">
                     <a:solidFill>
                       <a:srgbClr val="000000"/>
                     </a:solidFill>
@@ -17931,7 +17932,7 @@
               </a:ln>
               <a:extLst>
                 <a:ext uri="{91240B29-F687-4f45-9708-019B960494DF}">
-                  <a14:hiddenLine xmlns="" xmlns:a14="http://schemas.microsoft.com/office/drawing/2010/main" w="9525">
+                  <a14:hiddenLine xmlns:a14="http://schemas.microsoft.com/office/drawing/2010/main" xmlns="" w="9525">
                     <a:solidFill>
                       <a:srgbClr val="000000"/>
                     </a:solidFill>
@@ -18028,7 +18029,7 @@
               </a:ln>
               <a:extLst>
                 <a:ext uri="{91240B29-F687-4f45-9708-019B960494DF}">
-                  <a14:hiddenLine xmlns="" xmlns:a14="http://schemas.microsoft.com/office/drawing/2010/main" w="9525">
+                  <a14:hiddenLine xmlns:a14="http://schemas.microsoft.com/office/drawing/2010/main" xmlns="" w="9525">
                     <a:solidFill>
                       <a:srgbClr val="000000"/>
                     </a:solidFill>
@@ -18100,7 +18101,7 @@
               </a:ln>
               <a:extLst>
                 <a:ext uri="{91240B29-F687-4f45-9708-019B960494DF}">
-                  <a14:hiddenLine xmlns="" xmlns:a14="http://schemas.microsoft.com/office/drawing/2010/main" w="9525">
+                  <a14:hiddenLine xmlns:a14="http://schemas.microsoft.com/office/drawing/2010/main" xmlns="" w="9525">
                     <a:solidFill>
                       <a:srgbClr val="000000"/>
                     </a:solidFill>
@@ -18227,7 +18228,7 @@
               </a:ln>
               <a:extLst>
                 <a:ext uri="{91240B29-F687-4f45-9708-019B960494DF}">
-                  <a14:hiddenLine xmlns="" xmlns:a14="http://schemas.microsoft.com/office/drawing/2010/main" w="9525">
+                  <a14:hiddenLine xmlns:a14="http://schemas.microsoft.com/office/drawing/2010/main" xmlns="" w="9525">
                     <a:solidFill>
                       <a:srgbClr val="000000"/>
                     </a:solidFill>
@@ -18332,7 +18333,7 @@
               </a:ln>
               <a:extLst>
                 <a:ext uri="{91240B29-F687-4f45-9708-019B960494DF}">
-                  <a14:hiddenLine xmlns="" xmlns:a14="http://schemas.microsoft.com/office/drawing/2010/main" w="9525">
+                  <a14:hiddenLine xmlns:a14="http://schemas.microsoft.com/office/drawing/2010/main" xmlns="" w="9525">
                     <a:solidFill>
                       <a:srgbClr val="000000"/>
                     </a:solidFill>
@@ -18454,7 +18455,7 @@
               </a:ln>
               <a:extLst>
                 <a:ext uri="{91240B29-F687-4f45-9708-019B960494DF}">
-                  <a14:hiddenLine xmlns="" xmlns:a14="http://schemas.microsoft.com/office/drawing/2010/main" w="9525">
+                  <a14:hiddenLine xmlns:a14="http://schemas.microsoft.com/office/drawing/2010/main" xmlns="" w="9525">
                     <a:solidFill>
                       <a:srgbClr val="000000"/>
                     </a:solidFill>
@@ -18551,7 +18552,7 @@
               </a:ln>
               <a:extLst>
                 <a:ext uri="{91240B29-F687-4f45-9708-019B960494DF}">
-                  <a14:hiddenLine xmlns="" xmlns:a14="http://schemas.microsoft.com/office/drawing/2010/main" w="9525">
+                  <a14:hiddenLine xmlns:a14="http://schemas.microsoft.com/office/drawing/2010/main" xmlns="" w="9525">
                     <a:solidFill>
                       <a:srgbClr val="000000"/>
                     </a:solidFill>
@@ -18623,7 +18624,7 @@
               </a:ln>
               <a:extLst>
                 <a:ext uri="{91240B29-F687-4f45-9708-019B960494DF}">
-                  <a14:hiddenLine xmlns="" xmlns:a14="http://schemas.microsoft.com/office/drawing/2010/main" w="9525">
+                  <a14:hiddenLine xmlns:a14="http://schemas.microsoft.com/office/drawing/2010/main" xmlns="" w="9525">
                     <a:solidFill>
                       <a:srgbClr val="000000"/>
                     </a:solidFill>
@@ -18720,7 +18721,7 @@
               </a:ln>
               <a:extLst>
                 <a:ext uri="{91240B29-F687-4f45-9708-019B960494DF}">
-                  <a14:hiddenLine xmlns="" xmlns:a14="http://schemas.microsoft.com/office/drawing/2010/main" w="9525">
+                  <a14:hiddenLine xmlns:a14="http://schemas.microsoft.com/office/drawing/2010/main" xmlns="" w="9525">
                     <a:solidFill>
                       <a:srgbClr val="000000"/>
                     </a:solidFill>
@@ -18795,7 +18796,7 @@
               </a:ln>
               <a:extLst>
                 <a:ext uri="{91240B29-F687-4f45-9708-019B960494DF}">
-                  <a14:hiddenLine xmlns="" xmlns:a14="http://schemas.microsoft.com/office/drawing/2010/main" w="9525">
+                  <a14:hiddenLine xmlns:a14="http://schemas.microsoft.com/office/drawing/2010/main" xmlns="" w="9525">
                     <a:solidFill>
                       <a:srgbClr val="000000"/>
                     </a:solidFill>
@@ -18892,7 +18893,7 @@
               </a:ln>
               <a:extLst>
                 <a:ext uri="{91240B29-F687-4f45-9708-019B960494DF}">
-                  <a14:hiddenLine xmlns="" xmlns:a14="http://schemas.microsoft.com/office/drawing/2010/main" w="9525">
+                  <a14:hiddenLine xmlns:a14="http://schemas.microsoft.com/office/drawing/2010/main" xmlns="" w="9525">
                     <a:solidFill>
                       <a:srgbClr val="000000"/>
                     </a:solidFill>
@@ -18967,7 +18968,7 @@
               </a:ln>
               <a:extLst>
                 <a:ext uri="{91240B29-F687-4f45-9708-019B960494DF}">
-                  <a14:hiddenLine xmlns="" xmlns:a14="http://schemas.microsoft.com/office/drawing/2010/main" w="9525">
+                  <a14:hiddenLine xmlns:a14="http://schemas.microsoft.com/office/drawing/2010/main" xmlns="" w="9525">
                     <a:solidFill>
                       <a:srgbClr val="000000"/>
                     </a:solidFill>
@@ -19064,7 +19065,7 @@
               </a:ln>
               <a:extLst>
                 <a:ext uri="{91240B29-F687-4f45-9708-019B960494DF}">
-                  <a14:hiddenLine xmlns="" xmlns:a14="http://schemas.microsoft.com/office/drawing/2010/main" w="9525">
+                  <a14:hiddenLine xmlns:a14="http://schemas.microsoft.com/office/drawing/2010/main" xmlns="" w="9525">
                     <a:solidFill>
                       <a:srgbClr val="000000"/>
                     </a:solidFill>
@@ -19105,7 +19106,7 @@
               </a:ln>
               <a:extLst>
                 <a:ext uri="{91240B29-F687-4f45-9708-019B960494DF}">
-                  <a14:hiddenLine xmlns="" xmlns:a14="http://schemas.microsoft.com/office/drawing/2010/main" w="9525">
+                  <a14:hiddenLine xmlns:a14="http://schemas.microsoft.com/office/drawing/2010/main" xmlns="" w="9525">
                     <a:solidFill>
                       <a:srgbClr val="000000"/>
                     </a:solidFill>
@@ -19252,7 +19253,7 @@
           <a:p>
             <a:fld id="{6733B157-BC8D-485A-B099-210699CD19FB}" type="datetimeFigureOut">
               <a:rPr lang="en-US" smtClean="0"/>
-              <a:t>3/31/2026</a:t>
+              <a:t>4/5/2026</a:t>
             </a:fld>
             <a:endParaRPr lang="en-US"/>
           </a:p>
@@ -19690,14 +19691,16 @@
         </p:nvSpPr>
         <p:spPr/>
         <p:txBody>
-          <a:bodyPr/>
+          <a:bodyPr>
+            <a:normAutofit/>
+          </a:bodyPr>
           <a:lstStyle/>
           <a:p>
             <a:r>
-              <a:rPr lang="hr-HR" dirty="0"/>
+              <a:rPr lang="hr-HR" sz="7200" b="1" dirty="0"/>
               <a:t>VSC A11Y</a:t>
             </a:r>
-            <a:endParaRPr lang="en-US" dirty="0"/>
+            <a:endParaRPr lang="en-US" sz="7200" b="1" dirty="0"/>
           </a:p>
         </p:txBody>
       </p:sp>
@@ -19742,6 +19745,56 @@
           </a:p>
         </p:txBody>
       </p:sp>
+      <p:pic>
+        <p:nvPicPr>
+          <p:cNvPr id="5" name="Picture 4">
+            <a:extLst>
+              <a:ext uri="{FF2B5EF4-FFF2-40B4-BE49-F238E27FC236}">
+                <a16:creationId xmlns:a16="http://schemas.microsoft.com/office/drawing/2014/main" id="{F5484668-51A9-325E-1743-AD8E980A5BD9}"/>
+              </a:ext>
+            </a:extLst>
+          </p:cNvPr>
+          <p:cNvPicPr>
+            <a:picLocks noChangeAspect="1"/>
+          </p:cNvPicPr>
+          <p:nvPr/>
+        </p:nvPicPr>
+        <p:blipFill>
+          <a:blip r:embed="rId2">
+            <a:extLst>
+              <a:ext uri="{28A0092B-C50C-407E-A947-70E740481C1C}">
+                <a14:useLocalDpi xmlns:a14="http://schemas.microsoft.com/office/drawing/2010/main" val="0"/>
+              </a:ext>
+            </a:extLst>
+          </a:blip>
+          <a:srcRect l="11028" t="8175" r="10305" b="12514"/>
+          <a:stretch>
+            <a:fillRect/>
+          </a:stretch>
+        </p:blipFill>
+        <p:spPr>
+          <a:xfrm rot="20802091">
+            <a:off x="8440517" y="1516618"/>
+            <a:ext cx="2265546" cy="2284054"/>
+          </a:xfrm>
+          <a:prstGeom prst="roundRect">
+            <a:avLst>
+              <a:gd name="adj" fmla="val 8594"/>
+            </a:avLst>
+          </a:prstGeom>
+          <a:solidFill>
+            <a:srgbClr val="FFFFFF">
+              <a:shade val="85000"/>
+            </a:srgbClr>
+          </a:solidFill>
+          <a:ln>
+            <a:noFill/>
+          </a:ln>
+          <a:effectLst>
+            <a:reflection blurRad="12700" stA="38000" endPos="28000" dist="5000" dir="5400000" sy="-100000" algn="bl" rotWithShape="0"/>
+          </a:effectLst>
+        </p:spPr>
+      </p:pic>
     </p:spTree>
     <p:extLst>
       <p:ext uri="{BB962C8B-B14F-4D97-AF65-F5344CB8AC3E}">
@@ -19809,585 +19862,6 @@
           </a:p>
         </p:txBody>
       </p:sp>
-      <p:sp>
-        <p:nvSpPr>
-          <p:cNvPr id="4" name="Rectangle 1">
-            <a:extLst>
-              <a:ext uri="{FF2B5EF4-FFF2-40B4-BE49-F238E27FC236}">
-                <a16:creationId xmlns:a16="http://schemas.microsoft.com/office/drawing/2014/main" id="{9CA482DF-6767-25A4-E23E-B6D378E7E7D6}"/>
-              </a:ext>
-            </a:extLst>
-          </p:cNvPr>
-          <p:cNvSpPr>
-            <a:spLocks noGrp="1" noChangeArrowheads="1"/>
-          </p:cNvSpPr>
-          <p:nvPr>
-            <p:ph idx="1"/>
-          </p:nvPr>
-        </p:nvSpPr>
-        <p:spPr bwMode="auto">
-          <a:xfrm>
-            <a:off x="838200" y="1997167"/>
-            <a:ext cx="6235840" cy="3662541"/>
-          </a:xfrm>
-          <a:prstGeom prst="rect">
-            <a:avLst/>
-          </a:prstGeom>
-          <a:noFill/>
-          <a:ln>
-            <a:noFill/>
-          </a:ln>
-          <a:effectLst/>
-          <a:extLst>
-            <a:ext uri="{909E8E84-426E-40DD-AFC4-6F175D3DCCD1}">
-              <a14:hiddenFill xmlns:a14="http://schemas.microsoft.com/office/drawing/2010/main">
-                <a:solidFill>
-                  <a:schemeClr val="accent1"/>
-                </a:solidFill>
-              </a14:hiddenFill>
-            </a:ext>
-            <a:ext uri="{91240B29-F687-4F45-9708-019B960494DF}">
-              <a14:hiddenLine xmlns:a14="http://schemas.microsoft.com/office/drawing/2010/main" w="9525">
-                <a:solidFill>
-                  <a:schemeClr val="tx1"/>
-                </a:solidFill>
-                <a:miter lim="800000"/>
-                <a:headEnd/>
-                <a:tailEnd/>
-              </a14:hiddenLine>
-            </a:ext>
-            <a:ext uri="{AF507438-7753-43E0-B8FC-AC1667EBCBE1}">
-              <a14:hiddenEffects xmlns:a14="http://schemas.microsoft.com/office/drawing/2010/main">
-                <a:effectLst>
-                  <a:outerShdw dist="35921" dir="2700000" algn="ctr" rotWithShape="0">
-                    <a:schemeClr val="bg2"/>
-                  </a:outerShdw>
-                </a:effectLst>
-              </a14:hiddenEffects>
-            </a:ext>
-          </a:extLst>
-        </p:spPr>
-        <p:txBody>
-          <a:bodyPr vert="horz" wrap="square" lIns="91440" tIns="45720" rIns="91440" bIns="45720" numCol="1" anchor="ctr" anchorCtr="0" compatLnSpc="1">
-            <a:prstTxWarp prst="textNoShape">
-              <a:avLst/>
-            </a:prstTxWarp>
-            <a:spAutoFit/>
-          </a:bodyPr>
-          <a:lstStyle/>
-          <a:p>
-            <a:pPr marL="0" marR="0" lvl="0" indent="0" algn="l" defTabSz="914400" rtl="0" eaLnBrk="0" fontAlgn="base" latinLnBrk="0" hangingPunct="0">
-              <a:lnSpc>
-                <a:spcPct val="100000"/>
-              </a:lnSpc>
-              <a:spcBef>
-                <a:spcPct val="0"/>
-              </a:spcBef>
-              <a:spcAft>
-                <a:spcPct val="0"/>
-              </a:spcAft>
-              <a:buClrTx/>
-              <a:buSzTx/>
-              <a:buFontTx/>
-              <a:buChar char="•"/>
-              <a:tabLst/>
-            </a:pPr>
-            <a:r>
-              <a:rPr kumimoji="0" lang="en-US" altLang="en-US" b="1" i="0" u="none" strike="noStrike" cap="none" normalizeH="0" baseline="0" dirty="0">
-                <a:ln>
-                  <a:noFill/>
-                </a:ln>
-                <a:solidFill>
-                  <a:schemeClr val="tx1"/>
-                </a:solidFill>
-                <a:effectLst/>
-                <a:latin typeface="Arial" panose="020B0604020202020204" pitchFamily="34" charset="0"/>
-              </a:rPr>
-              <a:t>Error</a:t>
-            </a:r>
-            <a:endParaRPr kumimoji="0" lang="en-US" altLang="en-US" b="0" i="0" u="none" strike="noStrike" cap="none" normalizeH="0" baseline="0" dirty="0">
-              <a:ln>
-                <a:noFill/>
-              </a:ln>
-              <a:solidFill>
-                <a:schemeClr val="tx1"/>
-              </a:solidFill>
-              <a:effectLst/>
-              <a:latin typeface="Arial" panose="020B0604020202020204" pitchFamily="34" charset="0"/>
-            </a:endParaRPr>
-          </a:p>
-          <a:p>
-            <a:pPr marL="457200" lvl="1" indent="0" eaLnBrk="0" fontAlgn="base" hangingPunct="0">
-              <a:lnSpc>
-                <a:spcPct val="100000"/>
-              </a:lnSpc>
-              <a:spcBef>
-                <a:spcPct val="0"/>
-              </a:spcBef>
-              <a:spcAft>
-                <a:spcPct val="0"/>
-              </a:spcAft>
-              <a:buFontTx/>
-              <a:buChar char="•"/>
-            </a:pPr>
-            <a:r>
-              <a:rPr kumimoji="0" lang="en-US" altLang="en-US" sz="2800" b="0" i="0" u="none" strike="noStrike" cap="none" normalizeH="0" baseline="0" dirty="0" err="1">
-                <a:ln>
-                  <a:noFill/>
-                </a:ln>
-                <a:solidFill>
-                  <a:schemeClr val="tx1"/>
-                </a:solidFill>
-                <a:effectLst/>
-                <a:latin typeface="Arial" panose="020B0604020202020204" pitchFamily="34" charset="0"/>
-              </a:rPr>
-              <a:t>Crveni</a:t>
-            </a:r>
-            <a:r>
-              <a:rPr kumimoji="0" lang="en-US" altLang="en-US" sz="2800" b="0" i="0" u="none" strike="noStrike" cap="none" normalizeH="0" baseline="0" dirty="0">
-                <a:ln>
-                  <a:noFill/>
-                </a:ln>
-                <a:solidFill>
-                  <a:schemeClr val="tx1"/>
-                </a:solidFill>
-                <a:effectLst/>
-                <a:latin typeface="Arial" panose="020B0604020202020204" pitchFamily="34" charset="0"/>
-              </a:rPr>
-              <a:t> </a:t>
-            </a:r>
-            <a:r>
-              <a:rPr kumimoji="0" lang="en-US" altLang="en-US" sz="2800" b="0" i="0" u="none" strike="noStrike" cap="none" normalizeH="0" baseline="0" dirty="0" err="1">
-                <a:ln>
-                  <a:noFill/>
-                </a:ln>
-                <a:solidFill>
-                  <a:schemeClr val="tx1"/>
-                </a:solidFill>
-                <a:effectLst/>
-                <a:latin typeface="Arial" panose="020B0604020202020204" pitchFamily="34" charset="0"/>
-              </a:rPr>
-              <a:t>okvir</a:t>
-            </a:r>
-            <a:endParaRPr kumimoji="0" lang="en-US" altLang="en-US" sz="2800" b="0" i="0" u="none" strike="noStrike" cap="none" normalizeH="0" baseline="0" dirty="0">
-              <a:ln>
-                <a:noFill/>
-              </a:ln>
-              <a:solidFill>
-                <a:schemeClr val="tx1"/>
-              </a:solidFill>
-              <a:effectLst/>
-              <a:latin typeface="Arial" panose="020B0604020202020204" pitchFamily="34" charset="0"/>
-            </a:endParaRPr>
-          </a:p>
-          <a:p>
-            <a:pPr marL="457200" lvl="1" indent="0" eaLnBrk="0" fontAlgn="base" hangingPunct="0">
-              <a:lnSpc>
-                <a:spcPct val="100000"/>
-              </a:lnSpc>
-              <a:spcBef>
-                <a:spcPct val="0"/>
-              </a:spcBef>
-              <a:spcAft>
-                <a:spcPct val="0"/>
-              </a:spcAft>
-              <a:buFontTx/>
-              <a:buChar char="•"/>
-            </a:pPr>
-            <a:r>
-              <a:rPr kumimoji="0" lang="en-US" altLang="en-US" sz="2800" b="0" i="0" u="none" strike="noStrike" cap="none" normalizeH="0" baseline="0" dirty="0" err="1">
-                <a:ln>
-                  <a:noFill/>
-                </a:ln>
-                <a:solidFill>
-                  <a:schemeClr val="tx1"/>
-                </a:solidFill>
-                <a:effectLst/>
-                <a:latin typeface="Arial" panose="020B0604020202020204" pitchFamily="34" charset="0"/>
-              </a:rPr>
-              <a:t>Simbol</a:t>
-            </a:r>
-            <a:r>
-              <a:rPr kumimoji="0" lang="en-US" altLang="en-US" sz="2800" b="0" i="0" u="none" strike="noStrike" cap="none" normalizeH="0" baseline="0" dirty="0">
-                <a:ln>
-                  <a:noFill/>
-                </a:ln>
-                <a:solidFill>
-                  <a:schemeClr val="tx1"/>
-                </a:solidFill>
-                <a:effectLst/>
-                <a:latin typeface="Arial" panose="020B0604020202020204" pitchFamily="34" charset="0"/>
-              </a:rPr>
-              <a:t> </a:t>
-            </a:r>
-          </a:p>
-          <a:p>
-            <a:pPr marL="0" marR="0" lvl="0" indent="0" algn="l" defTabSz="914400" rtl="0" eaLnBrk="0" fontAlgn="base" latinLnBrk="0" hangingPunct="0">
-              <a:lnSpc>
-                <a:spcPct val="100000"/>
-              </a:lnSpc>
-              <a:spcBef>
-                <a:spcPct val="0"/>
-              </a:spcBef>
-              <a:spcAft>
-                <a:spcPct val="0"/>
-              </a:spcAft>
-              <a:buClrTx/>
-              <a:buSzTx/>
-              <a:buFontTx/>
-              <a:buChar char="•"/>
-              <a:tabLst/>
-            </a:pPr>
-            <a:r>
-              <a:rPr kumimoji="0" lang="en-US" altLang="en-US" b="1" i="0" u="none" strike="noStrike" cap="none" normalizeH="0" baseline="0" dirty="0">
-                <a:ln>
-                  <a:noFill/>
-                </a:ln>
-                <a:solidFill>
-                  <a:schemeClr val="tx1"/>
-                </a:solidFill>
-                <a:effectLst/>
-                <a:latin typeface="Arial" panose="020B0604020202020204" pitchFamily="34" charset="0"/>
-              </a:rPr>
-              <a:t>Warning</a:t>
-            </a:r>
-            <a:endParaRPr kumimoji="0" lang="en-US" altLang="en-US" b="0" i="0" u="none" strike="noStrike" cap="none" normalizeH="0" baseline="0" dirty="0">
-              <a:ln>
-                <a:noFill/>
-              </a:ln>
-              <a:solidFill>
-                <a:schemeClr val="tx1"/>
-              </a:solidFill>
-              <a:effectLst/>
-              <a:latin typeface="Arial" panose="020B0604020202020204" pitchFamily="34" charset="0"/>
-            </a:endParaRPr>
-          </a:p>
-          <a:p>
-            <a:pPr marL="457200" lvl="1" indent="0" eaLnBrk="0" fontAlgn="base" hangingPunct="0">
-              <a:lnSpc>
-                <a:spcPct val="100000"/>
-              </a:lnSpc>
-              <a:spcBef>
-                <a:spcPct val="0"/>
-              </a:spcBef>
-              <a:spcAft>
-                <a:spcPct val="0"/>
-              </a:spcAft>
-              <a:buFontTx/>
-              <a:buChar char="•"/>
-            </a:pPr>
-            <a:r>
-              <a:rPr kumimoji="0" lang="en-US" altLang="en-US" sz="2800" b="0" i="0" u="none" strike="noStrike" cap="none" normalizeH="0" baseline="0" dirty="0" err="1">
-                <a:ln>
-                  <a:noFill/>
-                </a:ln>
-                <a:solidFill>
-                  <a:schemeClr val="tx1"/>
-                </a:solidFill>
-                <a:effectLst/>
-                <a:latin typeface="Arial" panose="020B0604020202020204" pitchFamily="34" charset="0"/>
-              </a:rPr>
-              <a:t>Žuti</a:t>
-            </a:r>
-            <a:r>
-              <a:rPr kumimoji="0" lang="en-US" altLang="en-US" sz="2800" b="0" i="0" u="none" strike="noStrike" cap="none" normalizeH="0" baseline="0" dirty="0">
-                <a:ln>
-                  <a:noFill/>
-                </a:ln>
-                <a:solidFill>
-                  <a:schemeClr val="tx1"/>
-                </a:solidFill>
-                <a:effectLst/>
-                <a:latin typeface="Arial" panose="020B0604020202020204" pitchFamily="34" charset="0"/>
-              </a:rPr>
-              <a:t> </a:t>
-            </a:r>
-            <a:r>
-              <a:rPr kumimoji="0" lang="en-US" altLang="en-US" sz="2800" b="0" i="0" u="none" strike="noStrike" cap="none" normalizeH="0" baseline="0" dirty="0" err="1">
-                <a:ln>
-                  <a:noFill/>
-                </a:ln>
-                <a:solidFill>
-                  <a:schemeClr val="tx1"/>
-                </a:solidFill>
-                <a:effectLst/>
-                <a:latin typeface="Arial" panose="020B0604020202020204" pitchFamily="34" charset="0"/>
-              </a:rPr>
-              <a:t>okvir</a:t>
-            </a:r>
-            <a:endParaRPr kumimoji="0" lang="en-US" altLang="en-US" sz="2800" b="0" i="0" u="none" strike="noStrike" cap="none" normalizeH="0" baseline="0" dirty="0">
-              <a:ln>
-                <a:noFill/>
-              </a:ln>
-              <a:solidFill>
-                <a:schemeClr val="tx1"/>
-              </a:solidFill>
-              <a:effectLst/>
-              <a:latin typeface="Arial" panose="020B0604020202020204" pitchFamily="34" charset="0"/>
-            </a:endParaRPr>
-          </a:p>
-          <a:p>
-            <a:pPr marL="457200" lvl="1" indent="0" eaLnBrk="0" fontAlgn="base" hangingPunct="0">
-              <a:lnSpc>
-                <a:spcPct val="100000"/>
-              </a:lnSpc>
-              <a:spcBef>
-                <a:spcPct val="0"/>
-              </a:spcBef>
-              <a:spcAft>
-                <a:spcPct val="0"/>
-              </a:spcAft>
-              <a:buFontTx/>
-              <a:buChar char="•"/>
-            </a:pPr>
-            <a:r>
-              <a:rPr kumimoji="0" lang="en-US" altLang="en-US" sz="2800" b="0" i="0" u="none" strike="noStrike" cap="none" normalizeH="0" baseline="0" dirty="0" err="1">
-                <a:ln>
-                  <a:noFill/>
-                </a:ln>
-                <a:solidFill>
-                  <a:schemeClr val="tx1"/>
-                </a:solidFill>
-                <a:effectLst/>
-                <a:latin typeface="Arial" panose="020B0604020202020204" pitchFamily="34" charset="0"/>
-              </a:rPr>
-              <a:t>Simbol</a:t>
-            </a:r>
-            <a:r>
-              <a:rPr kumimoji="0" lang="en-US" altLang="en-US" sz="2800" b="0" i="0" u="none" strike="noStrike" cap="none" normalizeH="0" baseline="0" dirty="0">
-                <a:ln>
-                  <a:noFill/>
-                </a:ln>
-                <a:solidFill>
-                  <a:schemeClr val="tx1"/>
-                </a:solidFill>
-                <a:effectLst/>
-                <a:latin typeface="Arial" panose="020B0604020202020204" pitchFamily="34" charset="0"/>
-              </a:rPr>
-              <a:t> </a:t>
-            </a:r>
-          </a:p>
-          <a:p>
-            <a:pPr marL="457200" lvl="1" indent="0" eaLnBrk="0" fontAlgn="base" hangingPunct="0">
-              <a:lnSpc>
-                <a:spcPct val="100000"/>
-              </a:lnSpc>
-              <a:spcBef>
-                <a:spcPct val="0"/>
-              </a:spcBef>
-              <a:spcAft>
-                <a:spcPct val="0"/>
-              </a:spcAft>
-              <a:buFontTx/>
-              <a:buChar char="•"/>
-            </a:pPr>
-            <a:r>
-              <a:rPr kumimoji="0" lang="en-US" altLang="en-US" sz="2800" b="0" i="0" u="none" strike="noStrike" cap="none" normalizeH="0" baseline="0" dirty="0">
-                <a:ln>
-                  <a:noFill/>
-                </a:ln>
-                <a:solidFill>
-                  <a:schemeClr val="tx1"/>
-                </a:solidFill>
-                <a:effectLst/>
-                <a:latin typeface="Arial" panose="020B0604020202020204" pitchFamily="34" charset="0"/>
-              </a:rPr>
-              <a:t>Ne </a:t>
-            </a:r>
-            <a:r>
-              <a:rPr kumimoji="0" lang="en-US" altLang="en-US" sz="2800" b="0" i="0" u="none" strike="noStrike" cap="none" normalizeH="0" baseline="0" dirty="0" err="1">
-                <a:ln>
-                  <a:noFill/>
-                </a:ln>
-                <a:solidFill>
-                  <a:schemeClr val="tx1"/>
-                </a:solidFill>
-                <a:effectLst/>
-                <a:latin typeface="Arial" panose="020B0604020202020204" pitchFamily="34" charset="0"/>
-              </a:rPr>
-              <a:t>oslanja</a:t>
-            </a:r>
-            <a:r>
-              <a:rPr kumimoji="0" lang="en-US" altLang="en-US" sz="2800" b="0" i="0" u="none" strike="noStrike" cap="none" normalizeH="0" baseline="0" dirty="0">
-                <a:ln>
-                  <a:noFill/>
-                </a:ln>
-                <a:solidFill>
-                  <a:schemeClr val="tx1"/>
-                </a:solidFill>
-                <a:effectLst/>
-                <a:latin typeface="Arial" panose="020B0604020202020204" pitchFamily="34" charset="0"/>
-              </a:rPr>
-              <a:t> se </a:t>
-            </a:r>
-            <a:r>
-              <a:rPr kumimoji="0" lang="en-US" altLang="en-US" sz="2800" b="0" i="0" u="none" strike="noStrike" cap="none" normalizeH="0" baseline="0" dirty="0" err="1">
-                <a:ln>
-                  <a:noFill/>
-                </a:ln>
-                <a:solidFill>
-                  <a:schemeClr val="tx1"/>
-                </a:solidFill>
-                <a:effectLst/>
-                <a:latin typeface="Arial" panose="020B0604020202020204" pitchFamily="34" charset="0"/>
-              </a:rPr>
-              <a:t>samo</a:t>
-            </a:r>
-            <a:r>
-              <a:rPr kumimoji="0" lang="en-US" altLang="en-US" sz="2800" b="0" i="0" u="none" strike="noStrike" cap="none" normalizeH="0" baseline="0" dirty="0">
-                <a:ln>
-                  <a:noFill/>
-                </a:ln>
-                <a:solidFill>
-                  <a:schemeClr val="tx1"/>
-                </a:solidFill>
-                <a:effectLst/>
-                <a:latin typeface="Arial" panose="020B0604020202020204" pitchFamily="34" charset="0"/>
-              </a:rPr>
-              <a:t> </a:t>
-            </a:r>
-            <a:r>
-              <a:rPr kumimoji="0" lang="en-US" altLang="en-US" sz="2800" b="0" i="0" u="none" strike="noStrike" cap="none" normalizeH="0" baseline="0" dirty="0" err="1">
-                <a:ln>
-                  <a:noFill/>
-                </a:ln>
-                <a:solidFill>
-                  <a:schemeClr val="tx1"/>
-                </a:solidFill>
-                <a:effectLst/>
-                <a:latin typeface="Arial" panose="020B0604020202020204" pitchFamily="34" charset="0"/>
-              </a:rPr>
-              <a:t>na</a:t>
-            </a:r>
-            <a:r>
-              <a:rPr kumimoji="0" lang="en-US" altLang="en-US" sz="2800" b="0" i="0" u="none" strike="noStrike" cap="none" normalizeH="0" baseline="0" dirty="0">
-                <a:ln>
-                  <a:noFill/>
-                </a:ln>
-                <a:solidFill>
-                  <a:schemeClr val="tx1"/>
-                </a:solidFill>
-                <a:effectLst/>
-                <a:latin typeface="Arial" panose="020B0604020202020204" pitchFamily="34" charset="0"/>
-              </a:rPr>
-              <a:t> </a:t>
-            </a:r>
-            <a:r>
-              <a:rPr kumimoji="0" lang="en-US" altLang="en-US" sz="2800" b="0" i="0" u="none" strike="noStrike" cap="none" normalizeH="0" baseline="0" dirty="0" err="1">
-                <a:ln>
-                  <a:noFill/>
-                </a:ln>
-                <a:solidFill>
-                  <a:schemeClr val="tx1"/>
-                </a:solidFill>
-                <a:effectLst/>
-                <a:latin typeface="Arial" panose="020B0604020202020204" pitchFamily="34" charset="0"/>
-              </a:rPr>
-              <a:t>boje</a:t>
-            </a:r>
-            <a:endParaRPr kumimoji="0" lang="en-US" altLang="en-US" sz="2800" b="0" i="0" u="none" strike="noStrike" cap="none" normalizeH="0" baseline="0" dirty="0">
-              <a:ln>
-                <a:noFill/>
-              </a:ln>
-              <a:solidFill>
-                <a:schemeClr val="tx1"/>
-              </a:solidFill>
-              <a:effectLst/>
-              <a:latin typeface="Arial" panose="020B0604020202020204" pitchFamily="34" charset="0"/>
-            </a:endParaRPr>
-          </a:p>
-          <a:p>
-            <a:pPr marL="457200" lvl="1" indent="0" eaLnBrk="0" fontAlgn="base" hangingPunct="0">
-              <a:lnSpc>
-                <a:spcPct val="100000"/>
-              </a:lnSpc>
-              <a:spcBef>
-                <a:spcPct val="0"/>
-              </a:spcBef>
-              <a:spcAft>
-                <a:spcPct val="0"/>
-              </a:spcAft>
-              <a:buFontTx/>
-              <a:buChar char="•"/>
-            </a:pPr>
-            <a:r>
-              <a:rPr kumimoji="0" lang="en-US" altLang="en-US" sz="2800" b="0" i="0" u="none" strike="noStrike" cap="none" normalizeH="0" baseline="0" dirty="0" err="1">
-                <a:ln>
-                  <a:noFill/>
-                </a:ln>
-                <a:solidFill>
-                  <a:schemeClr val="tx1"/>
-                </a:solidFill>
-                <a:effectLst/>
-                <a:latin typeface="Arial" panose="020B0604020202020204" pitchFamily="34" charset="0"/>
-              </a:rPr>
-              <a:t>Pogodno</a:t>
-            </a:r>
-            <a:r>
-              <a:rPr kumimoji="0" lang="en-US" altLang="en-US" sz="2800" b="0" i="0" u="none" strike="noStrike" cap="none" normalizeH="0" baseline="0" dirty="0">
-                <a:ln>
-                  <a:noFill/>
-                </a:ln>
-                <a:solidFill>
-                  <a:schemeClr val="tx1"/>
-                </a:solidFill>
-                <a:effectLst/>
-                <a:latin typeface="Arial" panose="020B0604020202020204" pitchFamily="34" charset="0"/>
-              </a:rPr>
-              <a:t> za </a:t>
-            </a:r>
-            <a:r>
-              <a:rPr kumimoji="0" lang="en-US" altLang="en-US" sz="2800" b="0" i="0" u="none" strike="noStrike" cap="none" normalizeH="0" baseline="0" dirty="0" err="1">
-                <a:ln>
-                  <a:noFill/>
-                </a:ln>
-                <a:solidFill>
-                  <a:schemeClr val="tx1"/>
-                </a:solidFill>
-                <a:effectLst/>
-                <a:latin typeface="Arial" panose="020B0604020202020204" pitchFamily="34" charset="0"/>
-              </a:rPr>
-              <a:t>osobe</a:t>
-            </a:r>
-            <a:r>
-              <a:rPr kumimoji="0" lang="en-US" altLang="en-US" sz="2800" b="0" i="0" u="none" strike="noStrike" cap="none" normalizeH="0" baseline="0" dirty="0">
-                <a:ln>
-                  <a:noFill/>
-                </a:ln>
-                <a:solidFill>
-                  <a:schemeClr val="tx1"/>
-                </a:solidFill>
-                <a:effectLst/>
-                <a:latin typeface="Arial" panose="020B0604020202020204" pitchFamily="34" charset="0"/>
-              </a:rPr>
-              <a:t> s </a:t>
-            </a:r>
-            <a:r>
-              <a:rPr kumimoji="0" lang="en-US" altLang="en-US" sz="2800" b="0" i="0" u="none" strike="noStrike" cap="none" normalizeH="0" baseline="0" dirty="0" err="1">
-                <a:ln>
-                  <a:noFill/>
-                </a:ln>
-                <a:solidFill>
-                  <a:schemeClr val="tx1"/>
-                </a:solidFill>
-                <a:effectLst/>
-                <a:latin typeface="Arial" panose="020B0604020202020204" pitchFamily="34" charset="0"/>
-              </a:rPr>
-              <a:t>daltonizmom</a:t>
-            </a:r>
-            <a:endParaRPr kumimoji="0" lang="en-US" altLang="en-US" sz="2800" b="0" i="0" u="none" strike="noStrike" cap="none" normalizeH="0" baseline="0" dirty="0">
-              <a:ln>
-                <a:noFill/>
-              </a:ln>
-              <a:solidFill>
-                <a:schemeClr val="tx1"/>
-              </a:solidFill>
-              <a:effectLst/>
-              <a:latin typeface="Arial" panose="020B0604020202020204" pitchFamily="34" charset="0"/>
-            </a:endParaRPr>
-          </a:p>
-        </p:txBody>
-      </p:sp>
       <p:pic>
         <p:nvPicPr>
           <p:cNvPr id="6" name="Graphic 5">
@@ -20452,7 +19926,7 @@
         </p:blipFill>
         <p:spPr>
           <a:xfrm>
-            <a:off x="5332968" y="1973804"/>
+            <a:off x="5562878" y="1357803"/>
             <a:ext cx="6017656" cy="2256621"/>
           </a:xfrm>
           <a:prstGeom prst="roundRect">
@@ -20473,6 +19947,65 @@
           </a:effectLst>
         </p:spPr>
       </p:pic>
+      <p:sp>
+        <p:nvSpPr>
+          <p:cNvPr id="3" name="TextBox 2">
+            <a:extLst>
+              <a:ext uri="{FF2B5EF4-FFF2-40B4-BE49-F238E27FC236}">
+                <a16:creationId xmlns:a16="http://schemas.microsoft.com/office/drawing/2014/main" id="{822E10C2-9B25-516D-7051-1B6EA3E76E56}"/>
+              </a:ext>
+            </a:extLst>
+          </p:cNvPr>
+          <p:cNvSpPr txBox="1"/>
+          <p:nvPr/>
+        </p:nvSpPr>
+        <p:spPr>
+          <a:xfrm>
+            <a:off x="983225" y="2089810"/>
+            <a:ext cx="4375355" cy="2246769"/>
+          </a:xfrm>
+          <a:prstGeom prst="rect">
+            <a:avLst/>
+          </a:prstGeom>
+          <a:noFill/>
+        </p:spPr>
+        <p:txBody>
+          <a:bodyPr wrap="square" rtlCol="0">
+            <a:spAutoFit/>
+          </a:bodyPr>
+          <a:lstStyle/>
+          <a:p>
+            <a:pPr marL="457200" indent="-457200">
+              <a:buFont typeface="Arial" panose="020B0604020202020204" pitchFamily="34" charset="0"/>
+              <a:buChar char="•"/>
+            </a:pPr>
+            <a:r>
+              <a:rPr lang="hr-HR" sz="2800" dirty="0"/>
+              <a:t>Okviri</a:t>
+            </a:r>
+          </a:p>
+          <a:p>
+            <a:pPr marL="457200" indent="-457200">
+              <a:buFont typeface="Arial" panose="020B0604020202020204" pitchFamily="34" charset="0"/>
+              <a:buChar char="•"/>
+            </a:pPr>
+            <a:r>
+              <a:rPr lang="hr-HR" sz="2800" dirty="0"/>
+              <a:t>Ne oslanja se samo na boje</a:t>
+            </a:r>
+          </a:p>
+          <a:p>
+            <a:pPr marL="457200" indent="-457200">
+              <a:buFont typeface="Arial" panose="020B0604020202020204" pitchFamily="34" charset="0"/>
+              <a:buChar char="•"/>
+            </a:pPr>
+            <a:r>
+              <a:rPr lang="hr-HR" sz="2800" dirty="0"/>
+              <a:t>Pogodno za osobe s daltonizmom</a:t>
+            </a:r>
+          </a:p>
+        </p:txBody>
+      </p:sp>
     </p:spTree>
     <p:extLst>
       <p:ext uri="{BB962C8B-B14F-4D97-AF65-F5344CB8AC3E}">
@@ -20483,6 +20016,9 @@
   <p:clrMapOvr>
     <a:masterClrMapping/>
   </p:clrMapOvr>
+  <p:transition spd="slow">
+    <p:randomBar dir="vert"/>
+  </p:transition>
 </p:sld>
 </file>
 
@@ -21047,6 +20583,18 @@
   <p:clrMapOvr>
     <a:masterClrMapping/>
   </p:clrMapOvr>
+  <mc:AlternateContent xmlns:mc="http://schemas.openxmlformats.org/markup-compatibility/2006">
+    <mc:Choice xmlns:p15="http://schemas.microsoft.com/office/powerpoint/2012/main" Requires="p15">
+      <p:transition xmlns:p14="http://schemas.microsoft.com/office/powerpoint/2010/main" spd="slow" p14:dur="1250">
+        <p15:prstTrans prst="peelOff"/>
+      </p:transition>
+    </mc:Choice>
+    <mc:Fallback>
+      <p:transition spd="slow">
+        <p:fade/>
+      </p:transition>
+    </mc:Fallback>
+  </mc:AlternateContent>
   <p:timing>
     <p:tnLst>
       <p:par>
@@ -21673,6 +21221,187 @@
           <p:cNvPr id="2" name="Title 1">
             <a:extLst>
               <a:ext uri="{FF2B5EF4-FFF2-40B4-BE49-F238E27FC236}">
+                <a16:creationId xmlns:a16="http://schemas.microsoft.com/office/drawing/2014/main" id="{0CBDFD02-FCB8-7539-8A5D-69A8988E54BD}"/>
+              </a:ext>
+            </a:extLst>
+          </p:cNvPr>
+          <p:cNvSpPr>
+            <a:spLocks noGrp="1"/>
+          </p:cNvSpPr>
+          <p:nvPr>
+            <p:ph type="title"/>
+          </p:nvPr>
+        </p:nvSpPr>
+        <p:spPr/>
+        <p:txBody>
+          <a:bodyPr/>
+          <a:lstStyle/>
+          <a:p>
+            <a:r>
+              <a:rPr lang="hr-HR" dirty="0" err="1"/>
+              <a:t>MOGUćnosti</a:t>
+            </a:r>
+            <a:endParaRPr lang="en-US" dirty="0"/>
+          </a:p>
+        </p:txBody>
+      </p:sp>
+      <p:sp>
+        <p:nvSpPr>
+          <p:cNvPr id="3" name="Content Placeholder 2">
+            <a:extLst>
+              <a:ext uri="{FF2B5EF4-FFF2-40B4-BE49-F238E27FC236}">
+                <a16:creationId xmlns:a16="http://schemas.microsoft.com/office/drawing/2014/main" id="{9E1DFF32-90ED-4D14-D950-613F2837F211}"/>
+              </a:ext>
+            </a:extLst>
+          </p:cNvPr>
+          <p:cNvSpPr>
+            <a:spLocks noGrp="1"/>
+          </p:cNvSpPr>
+          <p:nvPr>
+            <p:ph idx="1"/>
+          </p:nvPr>
+        </p:nvSpPr>
+        <p:spPr/>
+        <p:txBody>
+          <a:bodyPr/>
+          <a:lstStyle/>
+          <a:p>
+            <a:r>
+              <a:rPr lang="hr-HR" dirty="0"/>
+              <a:t>Mijenjanje boja </a:t>
+            </a:r>
+            <a:r>
+              <a:rPr lang="hr-HR" dirty="0" err="1"/>
+              <a:t>errora</a:t>
+            </a:r>
+            <a:r>
+              <a:rPr lang="hr-HR" dirty="0"/>
+              <a:t> i </a:t>
+            </a:r>
+            <a:r>
+              <a:rPr lang="hr-HR" dirty="0" err="1"/>
+              <a:t>warninga</a:t>
+            </a:r>
+            <a:endParaRPr lang="hr-HR" dirty="0"/>
+          </a:p>
+          <a:p>
+            <a:r>
+              <a:rPr lang="hr-HR" dirty="0"/>
+              <a:t>Mijenjanje tema ovisno o vrsti daltonizma</a:t>
+            </a:r>
+          </a:p>
+          <a:p>
+            <a:r>
+              <a:rPr lang="hr-HR" dirty="0"/>
+              <a:t>Svijetla i tamna tema za svaki poremećaj</a:t>
+            </a:r>
+          </a:p>
+          <a:p>
+            <a:r>
+              <a:rPr lang="hr-HR" dirty="0"/>
+              <a:t>Ugrađen </a:t>
+            </a:r>
+            <a:r>
+              <a:rPr lang="hr-HR" dirty="0" err="1"/>
+              <a:t>Ishihara</a:t>
+            </a:r>
+            <a:r>
+              <a:rPr lang="hr-HR" dirty="0"/>
+              <a:t> test u ekstenziju</a:t>
+            </a:r>
+          </a:p>
+          <a:p>
+            <a:r>
+              <a:rPr lang="hr-HR" dirty="0"/>
+              <a:t>Mijenjanje veličine teksta u terminalu</a:t>
+            </a:r>
+            <a:endParaRPr lang="en-US" dirty="0"/>
+          </a:p>
+        </p:txBody>
+      </p:sp>
+      <p:pic>
+        <p:nvPicPr>
+          <p:cNvPr id="5" name="Picture 4">
+            <a:extLst>
+              <a:ext uri="{FF2B5EF4-FFF2-40B4-BE49-F238E27FC236}">
+                <a16:creationId xmlns:a16="http://schemas.microsoft.com/office/drawing/2014/main" id="{9E6FAAEE-E5F8-23A8-C4C4-69ABD4A4D015}"/>
+              </a:ext>
+            </a:extLst>
+          </p:cNvPr>
+          <p:cNvPicPr>
+            <a:picLocks noChangeAspect="1"/>
+          </p:cNvPicPr>
+          <p:nvPr/>
+        </p:nvPicPr>
+        <p:blipFill>
+          <a:blip r:embed="rId2">
+            <a:extLst>
+              <a:ext uri="{28A0092B-C50C-407E-A947-70E740481C1C}">
+                <a14:useLocalDpi xmlns:a14="http://schemas.microsoft.com/office/drawing/2010/main" val="0"/>
+              </a:ext>
+            </a:extLst>
+          </a:blip>
+          <a:stretch>
+            <a:fillRect/>
+          </a:stretch>
+        </p:blipFill>
+        <p:spPr>
+          <a:xfrm>
+            <a:off x="7608710" y="56679"/>
+            <a:ext cx="2429214" cy="6744641"/>
+          </a:xfrm>
+          <a:prstGeom prst="rect">
+            <a:avLst/>
+          </a:prstGeom>
+        </p:spPr>
+      </p:pic>
+    </p:spTree>
+    <p:extLst>
+      <p:ext uri="{BB962C8B-B14F-4D97-AF65-F5344CB8AC3E}">
+        <p14:creationId xmlns:p14="http://schemas.microsoft.com/office/powerpoint/2010/main" val="714983561"/>
+      </p:ext>
+    </p:extLst>
+  </p:cSld>
+  <p:clrMapOvr>
+    <a:masterClrMapping/>
+  </p:clrMapOvr>
+  <mc:AlternateContent xmlns:mc="http://schemas.openxmlformats.org/markup-compatibility/2006">
+    <mc:Choice xmlns:p15="http://schemas.microsoft.com/office/powerpoint/2012/main" Requires="p15">
+      <p:transition xmlns:p14="http://schemas.microsoft.com/office/powerpoint/2010/main" spd="slow" p14:dur="1250">
+        <p15:prstTrans prst="pageCurlDouble"/>
+      </p:transition>
+    </mc:Choice>
+    <mc:Fallback>
+      <p:transition spd="slow">
+        <p:fade/>
+      </p:transition>
+    </mc:Fallback>
+  </mc:AlternateContent>
+</p:sld>
+</file>
+
+<file path=ppt/slides/slide13.xml><?xml version="1.0" encoding="utf-8"?>
+<p:sld xmlns:a="http://schemas.openxmlformats.org/drawingml/2006/main" xmlns:r="http://schemas.openxmlformats.org/officeDocument/2006/relationships" xmlns:p="http://schemas.openxmlformats.org/presentationml/2006/main">
+  <p:cSld>
+    <p:spTree>
+      <p:nvGrpSpPr>
+        <p:cNvPr id="1" name=""/>
+        <p:cNvGrpSpPr/>
+        <p:nvPr/>
+      </p:nvGrpSpPr>
+      <p:grpSpPr>
+        <a:xfrm>
+          <a:off x="0" y="0"/>
+          <a:ext cx="0" cy="0"/>
+          <a:chOff x="0" y="0"/>
+          <a:chExt cx="0" cy="0"/>
+        </a:xfrm>
+      </p:grpSpPr>
+      <p:sp>
+        <p:nvSpPr>
+          <p:cNvPr id="2" name="Title 1">
+            <a:extLst>
+              <a:ext uri="{FF2B5EF4-FFF2-40B4-BE49-F238E27FC236}">
                 <a16:creationId xmlns:a16="http://schemas.microsoft.com/office/drawing/2014/main" id="{6D5AB4C9-37F2-5BC7-348C-EE2A418153D1}"/>
               </a:ext>
             </a:extLst>
@@ -21716,7 +21445,7 @@
         <p:spPr bwMode="auto">
           <a:xfrm>
             <a:off x="838200" y="2060020"/>
-            <a:ext cx="6298327" cy="2217082"/>
+            <a:ext cx="6477607" cy="2217082"/>
           </a:xfrm>
           <a:prstGeom prst="rect">
             <a:avLst/>
@@ -21845,7 +21574,59 @@
                 <a:effectLst/>
                 <a:latin typeface="Arial" panose="020B0604020202020204" pitchFamily="34" charset="0"/>
               </a:rPr>
-              <a:t>Python – Ishihara test</a:t>
+              <a:t>Python </a:t>
+            </a:r>
+            <a:r>
+              <a:rPr kumimoji="0" lang="hr-HR" altLang="en-US" sz="3200" b="0" i="0" u="none" strike="noStrike" cap="none" normalizeH="0" baseline="0" dirty="0">
+                <a:ln>
+                  <a:noFill/>
+                </a:ln>
+                <a:solidFill>
+                  <a:schemeClr val="tx1"/>
+                </a:solidFill>
+                <a:effectLst/>
+                <a:latin typeface="Arial" panose="020B0604020202020204" pitchFamily="34" charset="0"/>
+              </a:rPr>
+              <a:t>+ </a:t>
+            </a:r>
+            <a:r>
+              <a:rPr kumimoji="0" lang="hr-HR" altLang="en-US" sz="3200" b="0" i="0" u="none" strike="noStrike" cap="none" normalizeH="0" baseline="0" dirty="0" err="1">
+                <a:ln>
+                  <a:noFill/>
+                </a:ln>
+                <a:solidFill>
+                  <a:schemeClr val="tx1"/>
+                </a:solidFill>
+                <a:effectLst/>
+                <a:latin typeface="Arial" panose="020B0604020202020204" pitchFamily="34" charset="0"/>
+              </a:rPr>
+              <a:t>WebView</a:t>
+            </a:r>
+            <a:r>
+              <a:rPr kumimoji="0" lang="hr-HR" altLang="en-US" sz="3200" b="0" i="0" u="none" strike="noStrike" cap="none" normalizeH="0" baseline="0" dirty="0">
+                <a:ln>
+                  <a:noFill/>
+                </a:ln>
+                <a:solidFill>
+                  <a:schemeClr val="tx1"/>
+                </a:solidFill>
+                <a:effectLst/>
+                <a:latin typeface="Arial" panose="020B0604020202020204" pitchFamily="34" charset="0"/>
+              </a:rPr>
+              <a:t> </a:t>
+            </a:r>
+            <a:r>
+              <a:rPr kumimoji="0" lang="en-US" altLang="en-US" sz="3200" b="0" i="0" u="none" strike="noStrike" cap="none" normalizeH="0" baseline="0" dirty="0">
+                <a:ln>
+                  <a:noFill/>
+                </a:ln>
+                <a:solidFill>
+                  <a:schemeClr val="tx1"/>
+                </a:solidFill>
+                <a:effectLst/>
+                <a:latin typeface="Arial" panose="020B0604020202020204" pitchFamily="34" charset="0"/>
+              </a:rPr>
+              <a:t>– Ishihara test</a:t>
             </a:r>
             <a:endParaRPr kumimoji="0" lang="hr-HR" altLang="en-US" sz="3200" b="0" i="0" u="none" strike="noStrike" cap="none" normalizeH="0" baseline="0" dirty="0">
               <a:ln>
@@ -22002,6 +21783,18 @@
   <p:clrMapOvr>
     <a:masterClrMapping/>
   </p:clrMapOvr>
+  <mc:AlternateContent xmlns:mc="http://schemas.openxmlformats.org/markup-compatibility/2006">
+    <mc:Choice xmlns:p14="http://schemas.microsoft.com/office/powerpoint/2010/main" Requires="p14">
+      <p:transition spd="slow" p14:dur="900">
+        <p14:warp dir="in"/>
+      </p:transition>
+    </mc:Choice>
+    <mc:Fallback>
+      <p:transition spd="slow">
+        <p:fade/>
+      </p:transition>
+    </mc:Fallback>
+  </mc:AlternateContent>
   <p:timing>
     <p:tnLst>
       <p:par>
@@ -22221,7 +22014,7 @@
 </p:sld>
 </file>
 
-<file path=ppt/slides/slide13.xml><?xml version="1.0" encoding="utf-8"?>
+<file path=ppt/slides/slide14.xml><?xml version="1.0" encoding="utf-8"?>
 <p:sld xmlns:a="http://schemas.openxmlformats.org/drawingml/2006/main" xmlns:r="http://schemas.openxmlformats.org/officeDocument/2006/relationships" xmlns:p="http://schemas.openxmlformats.org/presentationml/2006/main">
   <p:cSld>
     <p:bg>
@@ -22406,7 +22199,7 @@
             <a:noFill/>
             <a:extLst>
               <a:ext uri="{909E8E84-426E-40dd-AFC4-6F175D3DCCD1}">
-                <a14:hiddenFill xmlns:p14="http://schemas.microsoft.com/office/powerpoint/2010/main" xmlns:a14="http://schemas.microsoft.com/office/drawing/2010/main" xmlns:a16="http://schemas.microsoft.com/office/drawing/2014/main" xmlns="">
+                <a14:hiddenFill xmlns="" xmlns:a16="http://schemas.microsoft.com/office/drawing/2014/main" xmlns:a14="http://schemas.microsoft.com/office/drawing/2010/main" xmlns:p14="http://schemas.microsoft.com/office/powerpoint/2010/main">
                   <a:solidFill>
                     <a:srgbClr val="FFFFFF"/>
                   </a:solidFill>
@@ -22526,7 +22319,7 @@
             </a:ln>
             <a:extLst>
               <a:ext uri="{91240B29-F687-4f45-9708-019B960494DF}">
-                <a14:hiddenLine xmlns:p14="http://schemas.microsoft.com/office/powerpoint/2010/main" xmlns:a14="http://schemas.microsoft.com/office/drawing/2010/main" xmlns:a16="http://schemas.microsoft.com/office/drawing/2014/main" xmlns="" w="9525">
+                <a14:hiddenLine xmlns="" xmlns:a16="http://schemas.microsoft.com/office/drawing/2014/main" xmlns:a14="http://schemas.microsoft.com/office/drawing/2010/main" xmlns:p14="http://schemas.microsoft.com/office/powerpoint/2010/main" w="9525">
                   <a:solidFill>
                     <a:srgbClr val="000000"/>
                   </a:solidFill>
@@ -22638,7 +22431,7 @@
             </a:ln>
             <a:extLst>
               <a:ext uri="{91240B29-F687-4f45-9708-019B960494DF}">
-                <a14:hiddenLine xmlns:p14="http://schemas.microsoft.com/office/powerpoint/2010/main" xmlns:a14="http://schemas.microsoft.com/office/drawing/2010/main" xmlns:a16="http://schemas.microsoft.com/office/drawing/2014/main" xmlns="" w="9525">
+                <a14:hiddenLine xmlns="" xmlns:a16="http://schemas.microsoft.com/office/drawing/2014/main" xmlns:a14="http://schemas.microsoft.com/office/drawing/2010/main" xmlns:p14="http://schemas.microsoft.com/office/powerpoint/2010/main" w="9525">
                   <a:solidFill>
                     <a:srgbClr val="000000"/>
                   </a:solidFill>
@@ -22750,7 +22543,7 @@
             </a:ln>
             <a:extLst>
               <a:ext uri="{91240B29-F687-4f45-9708-019B960494DF}">
-                <a14:hiddenLine xmlns:p14="http://schemas.microsoft.com/office/powerpoint/2010/main" xmlns:a14="http://schemas.microsoft.com/office/drawing/2010/main" xmlns:a16="http://schemas.microsoft.com/office/drawing/2014/main" xmlns="" w="9525">
+                <a14:hiddenLine xmlns="" xmlns:a16="http://schemas.microsoft.com/office/drawing/2014/main" xmlns:a14="http://schemas.microsoft.com/office/drawing/2010/main" xmlns:p14="http://schemas.microsoft.com/office/powerpoint/2010/main" w="9525">
                   <a:solidFill>
                     <a:srgbClr val="000000"/>
                   </a:solidFill>
@@ -22806,7 +22599,7 @@
             </a:ln>
             <a:extLst>
               <a:ext uri="{91240B29-F687-4f45-9708-019B960494DF}">
-                <a14:hiddenLine xmlns:p14="http://schemas.microsoft.com/office/powerpoint/2010/main" xmlns:a14="http://schemas.microsoft.com/office/drawing/2010/main" xmlns:a16="http://schemas.microsoft.com/office/drawing/2014/main" xmlns="" w="9525">
+                <a14:hiddenLine xmlns="" xmlns:a16="http://schemas.microsoft.com/office/drawing/2014/main" xmlns:a14="http://schemas.microsoft.com/office/drawing/2010/main" xmlns:p14="http://schemas.microsoft.com/office/powerpoint/2010/main" w="9525">
                   <a:solidFill>
                     <a:srgbClr val="000000"/>
                   </a:solidFill>
@@ -22918,7 +22711,7 @@
             </a:ln>
             <a:extLst>
               <a:ext uri="{91240B29-F687-4f45-9708-019B960494DF}">
-                <a14:hiddenLine xmlns:p14="http://schemas.microsoft.com/office/powerpoint/2010/main" xmlns:a14="http://schemas.microsoft.com/office/drawing/2010/main" xmlns:a16="http://schemas.microsoft.com/office/drawing/2014/main" xmlns="" w="9525">
+                <a14:hiddenLine xmlns="" xmlns:a16="http://schemas.microsoft.com/office/drawing/2014/main" xmlns:a14="http://schemas.microsoft.com/office/drawing/2010/main" xmlns:p14="http://schemas.microsoft.com/office/powerpoint/2010/main" w="9525">
                   <a:solidFill>
                     <a:srgbClr val="000000"/>
                   </a:solidFill>
@@ -23002,7 +22795,7 @@
             </a:ln>
             <a:extLst>
               <a:ext uri="{91240B29-F687-4f45-9708-019B960494DF}">
-                <a14:hiddenLine xmlns:p14="http://schemas.microsoft.com/office/powerpoint/2010/main" xmlns:a14="http://schemas.microsoft.com/office/drawing/2010/main" xmlns:a16="http://schemas.microsoft.com/office/drawing/2014/main" xmlns="" w="9525">
+                <a14:hiddenLine xmlns="" xmlns:a16="http://schemas.microsoft.com/office/drawing/2014/main" xmlns:a14="http://schemas.microsoft.com/office/drawing/2010/main" xmlns:p14="http://schemas.microsoft.com/office/powerpoint/2010/main" w="9525">
                   <a:solidFill>
                     <a:srgbClr val="000000"/>
                   </a:solidFill>
@@ -23086,7 +22879,7 @@
             </a:ln>
             <a:extLst>
               <a:ext uri="{91240B29-F687-4f45-9708-019B960494DF}">
-                <a14:hiddenLine xmlns:p14="http://schemas.microsoft.com/office/powerpoint/2010/main" xmlns:a14="http://schemas.microsoft.com/office/drawing/2010/main" xmlns:a16="http://schemas.microsoft.com/office/drawing/2014/main" xmlns="" w="9525">
+                <a14:hiddenLine xmlns="" xmlns:a16="http://schemas.microsoft.com/office/drawing/2014/main" xmlns:a14="http://schemas.microsoft.com/office/drawing/2010/main" xmlns:p14="http://schemas.microsoft.com/office/powerpoint/2010/main" w="9525">
                   <a:solidFill>
                     <a:srgbClr val="000000"/>
                   </a:solidFill>
@@ -23198,7 +22991,7 @@
             </a:ln>
             <a:extLst>
               <a:ext uri="{91240B29-F687-4f45-9708-019B960494DF}">
-                <a14:hiddenLine xmlns:p14="http://schemas.microsoft.com/office/powerpoint/2010/main" xmlns:a14="http://schemas.microsoft.com/office/drawing/2010/main" xmlns:a16="http://schemas.microsoft.com/office/drawing/2014/main" xmlns="" w="9525">
+                <a14:hiddenLine xmlns="" xmlns:a16="http://schemas.microsoft.com/office/drawing/2014/main" xmlns:a14="http://schemas.microsoft.com/office/drawing/2010/main" xmlns:p14="http://schemas.microsoft.com/office/powerpoint/2010/main" w="9525">
                   <a:solidFill>
                     <a:srgbClr val="000000"/>
                   </a:solidFill>
@@ -23282,7 +23075,7 @@
             </a:ln>
             <a:extLst>
               <a:ext uri="{91240B29-F687-4f45-9708-019B960494DF}">
-                <a14:hiddenLine xmlns:p14="http://schemas.microsoft.com/office/powerpoint/2010/main" xmlns:a14="http://schemas.microsoft.com/office/drawing/2010/main" xmlns:a16="http://schemas.microsoft.com/office/drawing/2014/main" xmlns="" w="9525">
+                <a14:hiddenLine xmlns="" xmlns:a16="http://schemas.microsoft.com/office/drawing/2014/main" xmlns:a14="http://schemas.microsoft.com/office/drawing/2010/main" xmlns:p14="http://schemas.microsoft.com/office/powerpoint/2010/main" w="9525">
                   <a:solidFill>
                     <a:srgbClr val="000000"/>
                   </a:solidFill>
@@ -23366,7 +23159,7 @@
             </a:ln>
             <a:extLst>
               <a:ext uri="{91240B29-F687-4f45-9708-019B960494DF}">
-                <a14:hiddenLine xmlns:p14="http://schemas.microsoft.com/office/powerpoint/2010/main" xmlns:a14="http://schemas.microsoft.com/office/drawing/2010/main" xmlns:a16="http://schemas.microsoft.com/office/drawing/2014/main" xmlns="" w="9525">
+                <a14:hiddenLine xmlns="" xmlns:a16="http://schemas.microsoft.com/office/drawing/2014/main" xmlns:a14="http://schemas.microsoft.com/office/drawing/2010/main" xmlns:p14="http://schemas.microsoft.com/office/powerpoint/2010/main" w="9525">
                   <a:solidFill>
                     <a:srgbClr val="000000"/>
                   </a:solidFill>
@@ -23478,7 +23271,7 @@
             </a:ln>
             <a:extLst>
               <a:ext uri="{91240B29-F687-4f45-9708-019B960494DF}">
-                <a14:hiddenLine xmlns:p14="http://schemas.microsoft.com/office/powerpoint/2010/main" xmlns:a14="http://schemas.microsoft.com/office/drawing/2010/main" xmlns:a16="http://schemas.microsoft.com/office/drawing/2014/main" xmlns="" w="9525">
+                <a14:hiddenLine xmlns="" xmlns:a16="http://schemas.microsoft.com/office/drawing/2014/main" xmlns:a14="http://schemas.microsoft.com/office/drawing/2010/main" xmlns:p14="http://schemas.microsoft.com/office/powerpoint/2010/main" w="9525">
                   <a:solidFill>
                     <a:srgbClr val="000000"/>
                   </a:solidFill>
@@ -23590,7 +23383,7 @@
             </a:ln>
             <a:extLst>
               <a:ext uri="{91240B29-F687-4f45-9708-019B960494DF}">
-                <a14:hiddenLine xmlns:p14="http://schemas.microsoft.com/office/powerpoint/2010/main" xmlns:a14="http://schemas.microsoft.com/office/drawing/2010/main" xmlns:a16="http://schemas.microsoft.com/office/drawing/2014/main" xmlns="" w="9525">
+                <a14:hiddenLine xmlns="" xmlns:a16="http://schemas.microsoft.com/office/drawing/2014/main" xmlns:a14="http://schemas.microsoft.com/office/drawing/2010/main" xmlns:p14="http://schemas.microsoft.com/office/powerpoint/2010/main" w="9525">
                   <a:solidFill>
                     <a:srgbClr val="000000"/>
                   </a:solidFill>
@@ -23674,7 +23467,7 @@
             </a:ln>
             <a:extLst>
               <a:ext uri="{91240B29-F687-4f45-9708-019B960494DF}">
-                <a14:hiddenLine xmlns:p14="http://schemas.microsoft.com/office/powerpoint/2010/main" xmlns:a14="http://schemas.microsoft.com/office/drawing/2010/main" xmlns:a16="http://schemas.microsoft.com/office/drawing/2014/main" xmlns="" w="9525">
+                <a14:hiddenLine xmlns="" xmlns:a16="http://schemas.microsoft.com/office/drawing/2014/main" xmlns:a14="http://schemas.microsoft.com/office/drawing/2010/main" xmlns:p14="http://schemas.microsoft.com/office/powerpoint/2010/main" w="9525">
                   <a:solidFill>
                     <a:srgbClr val="000000"/>
                   </a:solidFill>
@@ -23806,7 +23599,7 @@
             </a:ln>
             <a:extLst>
               <a:ext uri="{91240B29-F687-4f45-9708-019B960494DF}">
-                <a14:hiddenLine xmlns:p14="http://schemas.microsoft.com/office/powerpoint/2010/main" xmlns:a14="http://schemas.microsoft.com/office/drawing/2010/main" xmlns:a16="http://schemas.microsoft.com/office/drawing/2014/main" xmlns="" w="9525">
+                <a14:hiddenLine xmlns="" xmlns:a16="http://schemas.microsoft.com/office/drawing/2014/main" xmlns:a14="http://schemas.microsoft.com/office/drawing/2010/main" xmlns:p14="http://schemas.microsoft.com/office/powerpoint/2010/main" w="9525">
                   <a:solidFill>
                     <a:srgbClr val="000000"/>
                   </a:solidFill>
@@ -23890,7 +23683,7 @@
             </a:ln>
             <a:extLst>
               <a:ext uri="{91240B29-F687-4f45-9708-019B960494DF}">
-                <a14:hiddenLine xmlns:p14="http://schemas.microsoft.com/office/powerpoint/2010/main" xmlns:a14="http://schemas.microsoft.com/office/drawing/2010/main" xmlns:a16="http://schemas.microsoft.com/office/drawing/2014/main" xmlns="" w="9525">
+                <a14:hiddenLine xmlns="" xmlns:a16="http://schemas.microsoft.com/office/drawing/2014/main" xmlns:a14="http://schemas.microsoft.com/office/drawing/2010/main" xmlns:p14="http://schemas.microsoft.com/office/powerpoint/2010/main" w="9525">
                   <a:solidFill>
                     <a:srgbClr val="000000"/>
                   </a:solidFill>
@@ -24002,7 +23795,7 @@
             </a:ln>
             <a:extLst>
               <a:ext uri="{91240B29-F687-4f45-9708-019B960494DF}">
-                <a14:hiddenLine xmlns:p14="http://schemas.microsoft.com/office/powerpoint/2010/main" xmlns:a14="http://schemas.microsoft.com/office/drawing/2010/main" xmlns:a16="http://schemas.microsoft.com/office/drawing/2014/main" xmlns="" w="9525">
+                <a14:hiddenLine xmlns="" xmlns:a16="http://schemas.microsoft.com/office/drawing/2014/main" xmlns:a14="http://schemas.microsoft.com/office/drawing/2010/main" xmlns:p14="http://schemas.microsoft.com/office/powerpoint/2010/main" w="9525">
                   <a:solidFill>
                     <a:srgbClr val="000000"/>
                   </a:solidFill>
@@ -24114,7 +23907,7 @@
             </a:ln>
             <a:extLst>
               <a:ext uri="{91240B29-F687-4f45-9708-019B960494DF}">
-                <a14:hiddenLine xmlns:p14="http://schemas.microsoft.com/office/powerpoint/2010/main" xmlns:a14="http://schemas.microsoft.com/office/drawing/2010/main" xmlns:a16="http://schemas.microsoft.com/office/drawing/2014/main" xmlns="" w="9525">
+                <a14:hiddenLine xmlns="" xmlns:a16="http://schemas.microsoft.com/office/drawing/2014/main" xmlns:a14="http://schemas.microsoft.com/office/drawing/2010/main" xmlns:p14="http://schemas.microsoft.com/office/powerpoint/2010/main" w="9525">
                   <a:solidFill>
                     <a:srgbClr val="000000"/>
                   </a:solidFill>
@@ -24198,7 +23991,7 @@
             </a:ln>
             <a:extLst>
               <a:ext uri="{91240B29-F687-4f45-9708-019B960494DF}">
-                <a14:hiddenLine xmlns:p14="http://schemas.microsoft.com/office/powerpoint/2010/main" xmlns:a14="http://schemas.microsoft.com/office/drawing/2010/main" xmlns:a16="http://schemas.microsoft.com/office/drawing/2014/main" xmlns="" w="9525">
+                <a14:hiddenLine xmlns="" xmlns:a16="http://schemas.microsoft.com/office/drawing/2014/main" xmlns:a14="http://schemas.microsoft.com/office/drawing/2010/main" xmlns:p14="http://schemas.microsoft.com/office/powerpoint/2010/main" w="9525">
                   <a:solidFill>
                     <a:srgbClr val="000000"/>
                   </a:solidFill>
@@ -24310,7 +24103,7 @@
             </a:ln>
             <a:extLst>
               <a:ext uri="{91240B29-F687-4f45-9708-019B960494DF}">
-                <a14:hiddenLine xmlns:p14="http://schemas.microsoft.com/office/powerpoint/2010/main" xmlns:a14="http://schemas.microsoft.com/office/drawing/2010/main" xmlns:a16="http://schemas.microsoft.com/office/drawing/2014/main" xmlns="" w="9525">
+                <a14:hiddenLine xmlns="" xmlns:a16="http://schemas.microsoft.com/office/drawing/2014/main" xmlns:a14="http://schemas.microsoft.com/office/drawing/2010/main" xmlns:p14="http://schemas.microsoft.com/office/powerpoint/2010/main" w="9525">
                   <a:solidFill>
                     <a:srgbClr val="000000"/>
                   </a:solidFill>
@@ -24422,7 +24215,7 @@
             </a:ln>
             <a:extLst>
               <a:ext uri="{91240B29-F687-4f45-9708-019B960494DF}">
-                <a14:hiddenLine xmlns:p14="http://schemas.microsoft.com/office/powerpoint/2010/main" xmlns:a14="http://schemas.microsoft.com/office/drawing/2010/main" xmlns:a16="http://schemas.microsoft.com/office/drawing/2014/main" xmlns="" w="9525">
+                <a14:hiddenLine xmlns="" xmlns:a16="http://schemas.microsoft.com/office/drawing/2014/main" xmlns:a14="http://schemas.microsoft.com/office/drawing/2010/main" xmlns:p14="http://schemas.microsoft.com/office/powerpoint/2010/main" w="9525">
                   <a:solidFill>
                     <a:srgbClr val="000000"/>
                   </a:solidFill>
@@ -24500,7 +24293,7 @@
             </a:ln>
             <a:extLst>
               <a:ext uri="{91240B29-F687-4f45-9708-019B960494DF}">
-                <a14:hiddenLine xmlns:p14="http://schemas.microsoft.com/office/powerpoint/2010/main" xmlns:a14="http://schemas.microsoft.com/office/drawing/2010/main" xmlns:a16="http://schemas.microsoft.com/office/drawing/2014/main" xmlns="" w="9525">
+                <a14:hiddenLine xmlns="" xmlns:a16="http://schemas.microsoft.com/office/drawing/2014/main" xmlns:a14="http://schemas.microsoft.com/office/drawing/2010/main" xmlns:p14="http://schemas.microsoft.com/office/powerpoint/2010/main" w="9525">
                   <a:solidFill>
                     <a:srgbClr val="000000"/>
                   </a:solidFill>
@@ -24612,7 +24405,7 @@
             </a:ln>
             <a:extLst>
               <a:ext uri="{91240B29-F687-4f45-9708-019B960494DF}">
-                <a14:hiddenLine xmlns:p14="http://schemas.microsoft.com/office/powerpoint/2010/main" xmlns:a14="http://schemas.microsoft.com/office/drawing/2010/main" xmlns:a16="http://schemas.microsoft.com/office/drawing/2014/main" xmlns="" w="9525">
+                <a14:hiddenLine xmlns="" xmlns:a16="http://schemas.microsoft.com/office/drawing/2014/main" xmlns:a14="http://schemas.microsoft.com/office/drawing/2010/main" xmlns:p14="http://schemas.microsoft.com/office/powerpoint/2010/main" w="9525">
                   <a:solidFill>
                     <a:srgbClr val="000000"/>
                   </a:solidFill>
@@ -24690,7 +24483,7 @@
             </a:ln>
             <a:extLst>
               <a:ext uri="{91240B29-F687-4f45-9708-019B960494DF}">
-                <a14:hiddenLine xmlns:p14="http://schemas.microsoft.com/office/powerpoint/2010/main" xmlns:a14="http://schemas.microsoft.com/office/drawing/2010/main" xmlns:a16="http://schemas.microsoft.com/office/drawing/2014/main" xmlns="" w="9525">
+                <a14:hiddenLine xmlns="" xmlns:a16="http://schemas.microsoft.com/office/drawing/2014/main" xmlns:a14="http://schemas.microsoft.com/office/drawing/2010/main" xmlns:p14="http://schemas.microsoft.com/office/powerpoint/2010/main" w="9525">
                   <a:solidFill>
                     <a:srgbClr val="000000"/>
                   </a:solidFill>
@@ -24802,7 +24595,7 @@
             </a:ln>
             <a:extLst>
               <a:ext uri="{91240B29-F687-4f45-9708-019B960494DF}">
-                <a14:hiddenLine xmlns:p14="http://schemas.microsoft.com/office/powerpoint/2010/main" xmlns:a14="http://schemas.microsoft.com/office/drawing/2010/main" xmlns:a16="http://schemas.microsoft.com/office/drawing/2014/main" xmlns="" w="9525">
+                <a14:hiddenLine xmlns="" xmlns:a16="http://schemas.microsoft.com/office/drawing/2014/main" xmlns:a14="http://schemas.microsoft.com/office/drawing/2010/main" xmlns:p14="http://schemas.microsoft.com/office/powerpoint/2010/main" w="9525">
                   <a:solidFill>
                     <a:srgbClr val="000000"/>
                   </a:solidFill>
@@ -24892,7 +24685,7 @@
             </a:ln>
             <a:extLst>
               <a:ext uri="{91240B29-F687-4f45-9708-019B960494DF}">
-                <a14:hiddenLine xmlns:p14="http://schemas.microsoft.com/office/powerpoint/2010/main" xmlns:a14="http://schemas.microsoft.com/office/drawing/2010/main" xmlns:a16="http://schemas.microsoft.com/office/drawing/2014/main" xmlns="" w="9525">
+                <a14:hiddenLine xmlns="" xmlns:a16="http://schemas.microsoft.com/office/drawing/2014/main" xmlns:a14="http://schemas.microsoft.com/office/drawing/2010/main" xmlns:p14="http://schemas.microsoft.com/office/powerpoint/2010/main" w="9525">
                   <a:solidFill>
                     <a:srgbClr val="000000"/>
                   </a:solidFill>
@@ -25004,7 +24797,7 @@
             </a:ln>
             <a:extLst>
               <a:ext uri="{91240B29-F687-4f45-9708-019B960494DF}">
-                <a14:hiddenLine xmlns:p14="http://schemas.microsoft.com/office/powerpoint/2010/main" xmlns:a14="http://schemas.microsoft.com/office/drawing/2010/main" xmlns:a16="http://schemas.microsoft.com/office/drawing/2014/main" xmlns="" w="9525">
+                <a14:hiddenLine xmlns="" xmlns:a16="http://schemas.microsoft.com/office/drawing/2014/main" xmlns:a14="http://schemas.microsoft.com/office/drawing/2010/main" xmlns:p14="http://schemas.microsoft.com/office/powerpoint/2010/main" w="9525">
                   <a:solidFill>
                     <a:srgbClr val="000000"/>
                   </a:solidFill>
@@ -25094,7 +24887,7 @@
             </a:ln>
             <a:extLst>
               <a:ext uri="{91240B29-F687-4f45-9708-019B960494DF}">
-                <a14:hiddenLine xmlns:p14="http://schemas.microsoft.com/office/powerpoint/2010/main" xmlns:a14="http://schemas.microsoft.com/office/drawing/2010/main" xmlns:a16="http://schemas.microsoft.com/office/drawing/2014/main" xmlns="" w="9525">
+                <a14:hiddenLine xmlns="" xmlns:a16="http://schemas.microsoft.com/office/drawing/2014/main" xmlns:a14="http://schemas.microsoft.com/office/drawing/2010/main" xmlns:p14="http://schemas.microsoft.com/office/powerpoint/2010/main" w="9525">
                   <a:solidFill>
                     <a:srgbClr val="000000"/>
                   </a:solidFill>
@@ -25206,7 +24999,7 @@
             </a:ln>
             <a:extLst>
               <a:ext uri="{91240B29-F687-4f45-9708-019B960494DF}">
-                <a14:hiddenLine xmlns:p14="http://schemas.microsoft.com/office/powerpoint/2010/main" xmlns:a14="http://schemas.microsoft.com/office/drawing/2010/main" xmlns:a16="http://schemas.microsoft.com/office/drawing/2014/main" xmlns="" w="9525">
+                <a14:hiddenLine xmlns="" xmlns:a16="http://schemas.microsoft.com/office/drawing/2014/main" xmlns:a14="http://schemas.microsoft.com/office/drawing/2010/main" xmlns:p14="http://schemas.microsoft.com/office/powerpoint/2010/main" w="9525">
                   <a:solidFill>
                     <a:srgbClr val="000000"/>
                   </a:solidFill>
@@ -25262,7 +25055,7 @@
             </a:ln>
             <a:extLst>
               <a:ext uri="{91240B29-F687-4f45-9708-019B960494DF}">
-                <a14:hiddenLine xmlns:p14="http://schemas.microsoft.com/office/powerpoint/2010/main" xmlns:a14="http://schemas.microsoft.com/office/drawing/2010/main" xmlns:a16="http://schemas.microsoft.com/office/drawing/2014/main" xmlns="" w="9525">
+                <a14:hiddenLine xmlns="" xmlns:a16="http://schemas.microsoft.com/office/drawing/2014/main" xmlns:a14="http://schemas.microsoft.com/office/drawing/2010/main" xmlns:p14="http://schemas.microsoft.com/office/powerpoint/2010/main" w="9525">
                   <a:solidFill>
                     <a:srgbClr val="000000"/>
                   </a:solidFill>
@@ -25374,7 +25167,7 @@
             </a:ln>
             <a:extLst>
               <a:ext uri="{91240B29-F687-4f45-9708-019B960494DF}">
-                <a14:hiddenLine xmlns:p14="http://schemas.microsoft.com/office/powerpoint/2010/main" xmlns:a14="http://schemas.microsoft.com/office/drawing/2010/main" xmlns:a16="http://schemas.microsoft.com/office/drawing/2014/main" xmlns="" w="9525">
+                <a14:hiddenLine xmlns="" xmlns:a16="http://schemas.microsoft.com/office/drawing/2014/main" xmlns:a14="http://schemas.microsoft.com/office/drawing/2010/main" xmlns:p14="http://schemas.microsoft.com/office/powerpoint/2010/main" w="9525">
                   <a:solidFill>
                     <a:srgbClr val="000000"/>
                   </a:solidFill>
@@ -25458,7 +25251,7 @@
             </a:ln>
             <a:extLst>
               <a:ext uri="{91240B29-F687-4f45-9708-019B960494DF}">
-                <a14:hiddenLine xmlns:p14="http://schemas.microsoft.com/office/powerpoint/2010/main" xmlns:a14="http://schemas.microsoft.com/office/drawing/2010/main" xmlns:a16="http://schemas.microsoft.com/office/drawing/2014/main" xmlns="" w="9525">
+                <a14:hiddenLine xmlns="" xmlns:a16="http://schemas.microsoft.com/office/drawing/2014/main" xmlns:a14="http://schemas.microsoft.com/office/drawing/2010/main" xmlns:p14="http://schemas.microsoft.com/office/powerpoint/2010/main" w="9525">
                   <a:solidFill>
                     <a:srgbClr val="000000"/>
                   </a:solidFill>
@@ -25542,7 +25335,7 @@
             </a:ln>
             <a:extLst>
               <a:ext uri="{91240B29-F687-4f45-9708-019B960494DF}">
-                <a14:hiddenLine xmlns:p14="http://schemas.microsoft.com/office/powerpoint/2010/main" xmlns:a14="http://schemas.microsoft.com/office/drawing/2010/main" xmlns:a16="http://schemas.microsoft.com/office/drawing/2014/main" xmlns="" w="9525">
+                <a14:hiddenLine xmlns="" xmlns:a16="http://schemas.microsoft.com/office/drawing/2014/main" xmlns:a14="http://schemas.microsoft.com/office/drawing/2010/main" xmlns:p14="http://schemas.microsoft.com/office/powerpoint/2010/main" w="9525">
                   <a:solidFill>
                     <a:srgbClr val="000000"/>
                   </a:solidFill>
@@ -25654,7 +25447,7 @@
             </a:ln>
             <a:extLst>
               <a:ext uri="{91240B29-F687-4f45-9708-019B960494DF}">
-                <a14:hiddenLine xmlns:p14="http://schemas.microsoft.com/office/powerpoint/2010/main" xmlns:a14="http://schemas.microsoft.com/office/drawing/2010/main" xmlns:a16="http://schemas.microsoft.com/office/drawing/2014/main" xmlns="" w="9525">
+                <a14:hiddenLine xmlns="" xmlns:a16="http://schemas.microsoft.com/office/drawing/2014/main" xmlns:a14="http://schemas.microsoft.com/office/drawing/2010/main" xmlns:p14="http://schemas.microsoft.com/office/powerpoint/2010/main" w="9525">
                   <a:solidFill>
                     <a:srgbClr val="000000"/>
                   </a:solidFill>
@@ -25744,7 +25537,7 @@
             </a:ln>
             <a:extLst>
               <a:ext uri="{91240B29-F687-4f45-9708-019B960494DF}">
-                <a14:hiddenLine xmlns:p14="http://schemas.microsoft.com/office/powerpoint/2010/main" xmlns:a14="http://schemas.microsoft.com/office/drawing/2010/main" xmlns:a16="http://schemas.microsoft.com/office/drawing/2014/main" xmlns="" w="9525">
+                <a14:hiddenLine xmlns="" xmlns:a16="http://schemas.microsoft.com/office/drawing/2014/main" xmlns:a14="http://schemas.microsoft.com/office/drawing/2010/main" xmlns:p14="http://schemas.microsoft.com/office/powerpoint/2010/main" w="9525">
                   <a:solidFill>
                     <a:srgbClr val="000000"/>
                   </a:solidFill>
@@ -25828,7 +25621,7 @@
             </a:ln>
             <a:extLst>
               <a:ext uri="{91240B29-F687-4f45-9708-019B960494DF}">
-                <a14:hiddenLine xmlns:p14="http://schemas.microsoft.com/office/powerpoint/2010/main" xmlns:a14="http://schemas.microsoft.com/office/drawing/2010/main" xmlns:a16="http://schemas.microsoft.com/office/drawing/2014/main" xmlns="" w="9525">
+                <a14:hiddenLine xmlns="" xmlns:a16="http://schemas.microsoft.com/office/drawing/2014/main" xmlns:a14="http://schemas.microsoft.com/office/drawing/2010/main" xmlns:p14="http://schemas.microsoft.com/office/powerpoint/2010/main" w="9525">
                   <a:solidFill>
                     <a:srgbClr val="000000"/>
                   </a:solidFill>
@@ -25940,7 +25733,7 @@
             </a:ln>
             <a:extLst>
               <a:ext uri="{91240B29-F687-4f45-9708-019B960494DF}">
-                <a14:hiddenLine xmlns:p14="http://schemas.microsoft.com/office/powerpoint/2010/main" xmlns:a14="http://schemas.microsoft.com/office/drawing/2010/main" xmlns:a16="http://schemas.microsoft.com/office/drawing/2014/main" xmlns="" w="9525">
+                <a14:hiddenLine xmlns="" xmlns:a16="http://schemas.microsoft.com/office/drawing/2014/main" xmlns:a14="http://schemas.microsoft.com/office/drawing/2010/main" xmlns:p14="http://schemas.microsoft.com/office/powerpoint/2010/main" w="9525">
                   <a:solidFill>
                     <a:srgbClr val="000000"/>
                   </a:solidFill>
@@ -26024,7 +25817,7 @@
             </a:ln>
             <a:extLst>
               <a:ext uri="{91240B29-F687-4f45-9708-019B960494DF}">
-                <a14:hiddenLine xmlns:p14="http://schemas.microsoft.com/office/powerpoint/2010/main" xmlns:a14="http://schemas.microsoft.com/office/drawing/2010/main" xmlns:a16="http://schemas.microsoft.com/office/drawing/2014/main" xmlns="" w="9525">
+                <a14:hiddenLine xmlns="" xmlns:a16="http://schemas.microsoft.com/office/drawing/2014/main" xmlns:a14="http://schemas.microsoft.com/office/drawing/2010/main" xmlns:p14="http://schemas.microsoft.com/office/powerpoint/2010/main" w="9525">
                   <a:solidFill>
                     <a:srgbClr val="000000"/>
                   </a:solidFill>
@@ -26136,7 +25929,7 @@
             </a:ln>
             <a:extLst>
               <a:ext uri="{91240B29-F687-4f45-9708-019B960494DF}">
-                <a14:hiddenLine xmlns:p14="http://schemas.microsoft.com/office/powerpoint/2010/main" xmlns:a14="http://schemas.microsoft.com/office/drawing/2010/main" xmlns:a16="http://schemas.microsoft.com/office/drawing/2014/main" xmlns="" w="9525">
+                <a14:hiddenLine xmlns="" xmlns:a16="http://schemas.microsoft.com/office/drawing/2014/main" xmlns:a14="http://schemas.microsoft.com/office/drawing/2010/main" xmlns:p14="http://schemas.microsoft.com/office/powerpoint/2010/main" w="9525">
                   <a:solidFill>
                     <a:srgbClr val="000000"/>
                   </a:solidFill>
@@ -26220,7 +26013,7 @@
             </a:ln>
             <a:extLst>
               <a:ext uri="{91240B29-F687-4f45-9708-019B960494DF}">
-                <a14:hiddenLine xmlns:p14="http://schemas.microsoft.com/office/powerpoint/2010/main" xmlns:a14="http://schemas.microsoft.com/office/drawing/2010/main" xmlns:a16="http://schemas.microsoft.com/office/drawing/2014/main" xmlns="" w="9525">
+                <a14:hiddenLine xmlns="" xmlns:a16="http://schemas.microsoft.com/office/drawing/2014/main" xmlns:a14="http://schemas.microsoft.com/office/drawing/2010/main" xmlns:p14="http://schemas.microsoft.com/office/powerpoint/2010/main" w="9525">
                   <a:solidFill>
                     <a:srgbClr val="000000"/>
                   </a:solidFill>
@@ -26332,7 +26125,7 @@
             </a:ln>
             <a:extLst>
               <a:ext uri="{91240B29-F687-4f45-9708-019B960494DF}">
-                <a14:hiddenLine xmlns:p14="http://schemas.microsoft.com/office/powerpoint/2010/main" xmlns:a14="http://schemas.microsoft.com/office/drawing/2010/main" xmlns:a16="http://schemas.microsoft.com/office/drawing/2014/main" xmlns="" w="9525">
+                <a14:hiddenLine xmlns="" xmlns:a16="http://schemas.microsoft.com/office/drawing/2014/main" xmlns:a14="http://schemas.microsoft.com/office/drawing/2010/main" xmlns:p14="http://schemas.microsoft.com/office/powerpoint/2010/main" w="9525">
                   <a:solidFill>
                     <a:srgbClr val="000000"/>
                   </a:solidFill>
@@ -26388,7 +26181,7 @@
             </a:ln>
             <a:extLst>
               <a:ext uri="{91240B29-F687-4f45-9708-019B960494DF}">
-                <a14:hiddenLine xmlns:p14="http://schemas.microsoft.com/office/powerpoint/2010/main" xmlns:a14="http://schemas.microsoft.com/office/drawing/2010/main" xmlns:a16="http://schemas.microsoft.com/office/drawing/2014/main" xmlns="" w="9525">
+                <a14:hiddenLine xmlns="" xmlns:a16="http://schemas.microsoft.com/office/drawing/2014/main" xmlns:a14="http://schemas.microsoft.com/office/drawing/2010/main" xmlns:p14="http://schemas.microsoft.com/office/powerpoint/2010/main" w="9525">
                   <a:solidFill>
                     <a:srgbClr val="000000"/>
                   </a:solidFill>
@@ -26475,7 +26268,7 @@
             </a:ln>
             <a:extLst>
               <a:ext uri="{91240B29-F687-4f45-9708-019B960494DF}">
-                <a14:hiddenLine xmlns:p14="http://schemas.microsoft.com/office/powerpoint/2010/main" xmlns:a14="http://schemas.microsoft.com/office/drawing/2010/main" xmlns:a16="http://schemas.microsoft.com/office/drawing/2014/main" xmlns="" w="9525">
+                <a14:hiddenLine xmlns="" xmlns:a16="http://schemas.microsoft.com/office/drawing/2014/main" xmlns:a14="http://schemas.microsoft.com/office/drawing/2010/main" xmlns:p14="http://schemas.microsoft.com/office/powerpoint/2010/main" w="9525">
                   <a:solidFill>
                     <a:srgbClr val="000000"/>
                   </a:solidFill>
@@ -26587,7 +26380,7 @@
             </a:ln>
             <a:extLst>
               <a:ext uri="{91240B29-F687-4f45-9708-019B960494DF}">
-                <a14:hiddenLine xmlns:p14="http://schemas.microsoft.com/office/powerpoint/2010/main" xmlns:a14="http://schemas.microsoft.com/office/drawing/2010/main" xmlns:a16="http://schemas.microsoft.com/office/drawing/2014/main" xmlns="" w="9525">
+                <a14:hiddenLine xmlns="" xmlns:a16="http://schemas.microsoft.com/office/drawing/2014/main" xmlns:a14="http://schemas.microsoft.com/office/drawing/2010/main" xmlns:p14="http://schemas.microsoft.com/office/powerpoint/2010/main" w="9525">
                   <a:solidFill>
                     <a:srgbClr val="000000"/>
                   </a:solidFill>
@@ -26671,7 +26464,7 @@
             </a:ln>
             <a:extLst>
               <a:ext uri="{91240B29-F687-4f45-9708-019B960494DF}">
-                <a14:hiddenLine xmlns:p14="http://schemas.microsoft.com/office/powerpoint/2010/main" xmlns:a14="http://schemas.microsoft.com/office/drawing/2010/main" xmlns:a16="http://schemas.microsoft.com/office/drawing/2014/main" xmlns="" w="9525">
+                <a14:hiddenLine xmlns="" xmlns:a16="http://schemas.microsoft.com/office/drawing/2014/main" xmlns:a14="http://schemas.microsoft.com/office/drawing/2010/main" xmlns:p14="http://schemas.microsoft.com/office/powerpoint/2010/main" w="9525">
                   <a:solidFill>
                     <a:srgbClr val="000000"/>
                   </a:solidFill>
@@ -26783,7 +26576,7 @@
             </a:ln>
             <a:extLst>
               <a:ext uri="{91240B29-F687-4f45-9708-019B960494DF}">
-                <a14:hiddenLine xmlns:p14="http://schemas.microsoft.com/office/powerpoint/2010/main" xmlns:a14="http://schemas.microsoft.com/office/drawing/2010/main" xmlns:a16="http://schemas.microsoft.com/office/drawing/2014/main" xmlns="" w="9525">
+                <a14:hiddenLine xmlns="" xmlns:a16="http://schemas.microsoft.com/office/drawing/2014/main" xmlns:a14="http://schemas.microsoft.com/office/drawing/2010/main" xmlns:p14="http://schemas.microsoft.com/office/powerpoint/2010/main" w="9525">
                   <a:solidFill>
                     <a:srgbClr val="000000"/>
                   </a:solidFill>
@@ -26895,7 +26688,7 @@
             </a:ln>
             <a:extLst>
               <a:ext uri="{91240B29-F687-4f45-9708-019B960494DF}">
-                <a14:hiddenLine xmlns:p14="http://schemas.microsoft.com/office/powerpoint/2010/main" xmlns:a14="http://schemas.microsoft.com/office/drawing/2010/main" xmlns:a16="http://schemas.microsoft.com/office/drawing/2014/main" xmlns="" w="9525">
+                <a14:hiddenLine xmlns="" xmlns:a16="http://schemas.microsoft.com/office/drawing/2014/main" xmlns:a14="http://schemas.microsoft.com/office/drawing/2010/main" xmlns:p14="http://schemas.microsoft.com/office/powerpoint/2010/main" w="9525">
                   <a:solidFill>
                     <a:srgbClr val="000000"/>
                   </a:solidFill>
@@ -26982,7 +26775,7 @@
             </a:ln>
             <a:extLst>
               <a:ext uri="{91240B29-F687-4f45-9708-019B960494DF}">
-                <a14:hiddenLine xmlns:p14="http://schemas.microsoft.com/office/powerpoint/2010/main" xmlns:a14="http://schemas.microsoft.com/office/drawing/2010/main" xmlns:a16="http://schemas.microsoft.com/office/drawing/2014/main" xmlns="" w="9525">
+                <a14:hiddenLine xmlns="" xmlns:a16="http://schemas.microsoft.com/office/drawing/2014/main" xmlns:a14="http://schemas.microsoft.com/office/drawing/2010/main" xmlns:p14="http://schemas.microsoft.com/office/powerpoint/2010/main" w="9525">
                   <a:solidFill>
                     <a:srgbClr val="000000"/>
                   </a:solidFill>
@@ -27066,7 +26859,7 @@
             </a:ln>
             <a:extLst>
               <a:ext uri="{91240B29-F687-4f45-9708-019B960494DF}">
-                <a14:hiddenLine xmlns:p14="http://schemas.microsoft.com/office/powerpoint/2010/main" xmlns:a14="http://schemas.microsoft.com/office/drawing/2010/main" xmlns:a16="http://schemas.microsoft.com/office/drawing/2014/main" xmlns="" w="9525">
+                <a14:hiddenLine xmlns="" xmlns:a16="http://schemas.microsoft.com/office/drawing/2014/main" xmlns:a14="http://schemas.microsoft.com/office/drawing/2010/main" xmlns:p14="http://schemas.microsoft.com/office/powerpoint/2010/main" w="9525">
                   <a:solidFill>
                     <a:srgbClr val="000000"/>
                   </a:solidFill>
@@ -27178,7 +26971,7 @@
             </a:ln>
             <a:extLst>
               <a:ext uri="{91240B29-F687-4f45-9708-019B960494DF}">
-                <a14:hiddenLine xmlns:p14="http://schemas.microsoft.com/office/powerpoint/2010/main" xmlns:a14="http://schemas.microsoft.com/office/drawing/2010/main" xmlns:a16="http://schemas.microsoft.com/office/drawing/2014/main" xmlns="" w="9525">
+                <a14:hiddenLine xmlns="" xmlns:a16="http://schemas.microsoft.com/office/drawing/2014/main" xmlns:a14="http://schemas.microsoft.com/office/drawing/2010/main" xmlns:p14="http://schemas.microsoft.com/office/powerpoint/2010/main" w="9525">
                   <a:solidFill>
                     <a:srgbClr val="000000"/>
                   </a:solidFill>
@@ -27290,7 +27083,7 @@
             </a:ln>
             <a:extLst>
               <a:ext uri="{91240B29-F687-4f45-9708-019B960494DF}">
-                <a14:hiddenLine xmlns:p14="http://schemas.microsoft.com/office/powerpoint/2010/main" xmlns:a14="http://schemas.microsoft.com/office/drawing/2010/main" xmlns:a16="http://schemas.microsoft.com/office/drawing/2014/main" xmlns="" w="9525">
+                <a14:hiddenLine xmlns="" xmlns:a16="http://schemas.microsoft.com/office/drawing/2014/main" xmlns:a14="http://schemas.microsoft.com/office/drawing/2010/main" xmlns:p14="http://schemas.microsoft.com/office/powerpoint/2010/main" w="9525">
                   <a:solidFill>
                     <a:srgbClr val="000000"/>
                   </a:solidFill>
@@ -27374,7 +27167,7 @@
             </a:ln>
             <a:extLst>
               <a:ext uri="{91240B29-F687-4f45-9708-019B960494DF}">
-                <a14:hiddenLine xmlns:p14="http://schemas.microsoft.com/office/powerpoint/2010/main" xmlns:a14="http://schemas.microsoft.com/office/drawing/2010/main" xmlns:a16="http://schemas.microsoft.com/office/drawing/2014/main" xmlns="" w="9525">
+                <a14:hiddenLine xmlns="" xmlns:a16="http://schemas.microsoft.com/office/drawing/2014/main" xmlns:a14="http://schemas.microsoft.com/office/drawing/2010/main" xmlns:p14="http://schemas.microsoft.com/office/powerpoint/2010/main" w="9525">
                   <a:solidFill>
                     <a:srgbClr val="000000"/>
                   </a:solidFill>
@@ -27516,7 +27309,7 @@
             </a:ln>
             <a:extLst>
               <a:ext uri="{91240B29-F687-4f45-9708-019B960494DF}">
-                <a14:hiddenLine xmlns:p14="http://schemas.microsoft.com/office/powerpoint/2010/main" xmlns:a14="http://schemas.microsoft.com/office/drawing/2010/main" xmlns:a16="http://schemas.microsoft.com/office/drawing/2014/main" xmlns="" w="9525">
+                <a14:hiddenLine xmlns="" xmlns:a16="http://schemas.microsoft.com/office/drawing/2014/main" xmlns:a14="http://schemas.microsoft.com/office/drawing/2010/main" xmlns:p14="http://schemas.microsoft.com/office/powerpoint/2010/main" w="9525">
                   <a:solidFill>
                     <a:srgbClr val="000000"/>
                   </a:solidFill>
@@ -27606,7 +27399,7 @@
             </a:ln>
             <a:extLst>
               <a:ext uri="{91240B29-F687-4f45-9708-019B960494DF}">
-                <a14:hiddenLine xmlns:p14="http://schemas.microsoft.com/office/powerpoint/2010/main" xmlns:a14="http://schemas.microsoft.com/office/drawing/2010/main" xmlns:a16="http://schemas.microsoft.com/office/drawing/2014/main" xmlns="" w="9525">
+                <a14:hiddenLine xmlns="" xmlns:a16="http://schemas.microsoft.com/office/drawing/2014/main" xmlns:a14="http://schemas.microsoft.com/office/drawing/2010/main" xmlns:p14="http://schemas.microsoft.com/office/powerpoint/2010/main" w="9525">
                   <a:solidFill>
                     <a:srgbClr val="000000"/>
                   </a:solidFill>
@@ -27718,7 +27511,7 @@
             </a:ln>
             <a:extLst>
               <a:ext uri="{91240B29-F687-4f45-9708-019B960494DF}">
-                <a14:hiddenLine xmlns:p14="http://schemas.microsoft.com/office/powerpoint/2010/main" xmlns:a14="http://schemas.microsoft.com/office/drawing/2010/main" xmlns:a16="http://schemas.microsoft.com/office/drawing/2014/main" xmlns="" w="9525">
+                <a14:hiddenLine xmlns="" xmlns:a16="http://schemas.microsoft.com/office/drawing/2014/main" xmlns:a14="http://schemas.microsoft.com/office/drawing/2010/main" xmlns:p14="http://schemas.microsoft.com/office/powerpoint/2010/main" w="9525">
                   <a:solidFill>
                     <a:srgbClr val="000000"/>
                   </a:solidFill>
@@ -28069,6 +27862,34 @@
               </a:rPr>
               <a:t>nadograđivati</a:t>
             </a:r>
+            <a:endParaRPr kumimoji="0" lang="hr-HR" altLang="en-US" sz="1800" b="0" i="0" u="none" strike="noStrike" cap="none" normalizeH="0" baseline="0" dirty="0">
+              <a:ln>
+                <a:noFill/>
+              </a:ln>
+              <a:effectLst/>
+              <a:latin typeface="Arial" panose="020B0604020202020204" pitchFamily="34" charset="0"/>
+            </a:endParaRPr>
+          </a:p>
+          <a:p>
+            <a:pPr marL="0" marR="0" lvl="0" indent="0" defTabSz="914400" rtl="0" eaLnBrk="0" fontAlgn="base" latinLnBrk="0" hangingPunct="0">
+              <a:spcBef>
+                <a:spcPct val="0"/>
+              </a:spcBef>
+              <a:spcAft>
+                <a:spcPts val="600"/>
+              </a:spcAft>
+              <a:buClrTx/>
+              <a:buSzTx/>
+              <a:buFontTx/>
+              <a:buChar char="•"/>
+              <a:tabLst/>
+            </a:pPr>
+            <a:r>
+              <a:rPr lang="hr-HR" altLang="en-US" sz="1800" dirty="0">
+                <a:latin typeface="Arial" panose="020B0604020202020204" pitchFamily="34" charset="0"/>
+              </a:rPr>
+              <a:t>Dostupan svima</a:t>
+            </a:r>
             <a:endParaRPr kumimoji="0" lang="en-US" altLang="en-US" sz="1800" b="0" i="0" u="none" strike="noStrike" cap="none" normalizeH="0" baseline="0" dirty="0">
               <a:ln>
                 <a:noFill/>
@@ -28126,6 +27947,18 @@
   <p:clrMapOvr>
     <a:masterClrMapping/>
   </p:clrMapOvr>
+  <mc:AlternateContent xmlns:mc="http://schemas.openxmlformats.org/markup-compatibility/2006">
+    <mc:Choice xmlns:p14="http://schemas.microsoft.com/office/powerpoint/2010/main" Requires="p14">
+      <p:transition spd="slow" p14:dur="2500">
+        <p:checker/>
+      </p:transition>
+    </mc:Choice>
+    <mc:Fallback>
+      <p:transition spd="slow">
+        <p:checker/>
+      </p:transition>
+    </mc:Fallback>
+  </mc:AlternateContent>
   <p:timing>
     <p:tnLst>
       <p:par>
@@ -28378,6 +28211,67 @@
                       </p:childTnLst>
                     </p:cTn>
                   </p:par>
+                  <p:par>
+                    <p:cTn id="23" fill="hold">
+                      <p:stCondLst>
+                        <p:cond delay="indefinite"/>
+                      </p:stCondLst>
+                      <p:childTnLst>
+                        <p:par>
+                          <p:cTn id="24" fill="hold">
+                            <p:stCondLst>
+                              <p:cond delay="0"/>
+                            </p:stCondLst>
+                            <p:childTnLst>
+                              <p:par>
+                                <p:cTn id="25" presetID="21" presetClass="entr" presetSubtype="1" fill="hold" grpId="0" nodeType="clickEffect">
+                                  <p:stCondLst>
+                                    <p:cond delay="0"/>
+                                  </p:stCondLst>
+                                  <p:childTnLst>
+                                    <p:set>
+                                      <p:cBhvr>
+                                        <p:cTn id="26" dur="1" fill="hold">
+                                          <p:stCondLst>
+                                            <p:cond delay="0"/>
+                                          </p:stCondLst>
+                                        </p:cTn>
+                                        <p:tgtEl>
+                                          <p:spTgt spid="4">
+                                            <p:txEl>
+                                              <p:pRg st="4" end="4"/>
+                                            </p:txEl>
+                                          </p:spTgt>
+                                        </p:tgtEl>
+                                        <p:attrNameLst>
+                                          <p:attrName>style.visibility</p:attrName>
+                                        </p:attrNameLst>
+                                      </p:cBhvr>
+                                      <p:to>
+                                        <p:strVal val="visible"/>
+                                      </p:to>
+                                    </p:set>
+                                    <p:animEffect transition="in" filter="wheel(1)">
+                                      <p:cBhvr>
+                                        <p:cTn id="27" dur="1250"/>
+                                        <p:tgtEl>
+                                          <p:spTgt spid="4">
+                                            <p:txEl>
+                                              <p:pRg st="4" end="4"/>
+                                            </p:txEl>
+                                          </p:spTgt>
+                                        </p:tgtEl>
+                                      </p:cBhvr>
+                                    </p:animEffect>
+                                  </p:childTnLst>
+                                </p:cTn>
+                              </p:par>
+                            </p:childTnLst>
+                          </p:cTn>
+                        </p:par>
+                      </p:childTnLst>
+                    </p:cTn>
+                  </p:par>
                 </p:childTnLst>
               </p:cTn>
               <p:prevCondLst>
@@ -28406,7 +28300,7 @@
 </p:sld>
 </file>
 
-<file path=ppt/slides/slide14.xml><?xml version="1.0" encoding="utf-8"?>
+<file path=ppt/slides/slide15.xml><?xml version="1.0" encoding="utf-8"?>
 <p:sld xmlns:a="http://schemas.openxmlformats.org/drawingml/2006/main" xmlns:r="http://schemas.openxmlformats.org/officeDocument/2006/relationships" xmlns:p="http://schemas.openxmlformats.org/presentationml/2006/main">
   <p:cSld>
     <p:bg>
@@ -28586,6 +28480,18 @@
   <p:clrMapOvr>
     <a:masterClrMapping/>
   </p:clrMapOvr>
+  <mc:AlternateContent xmlns:mc="http://schemas.openxmlformats.org/markup-compatibility/2006">
+    <mc:Choice xmlns:p14="http://schemas.microsoft.com/office/powerpoint/2010/main" Requires="p14">
+      <p:transition spd="slow" p14:dur="1500">
+        <p:split orient="vert"/>
+      </p:transition>
+    </mc:Choice>
+    <mc:Fallback>
+      <p:transition spd="slow">
+        <p:split orient="vert"/>
+      </p:transition>
+    </mc:Fallback>
+  </mc:AlternateContent>
 </p:sld>
 </file>
 
@@ -28774,7 +28680,7 @@
             <a:noFill/>
             <a:extLst>
               <a:ext uri="{909E8E84-426E-40dd-AFC4-6F175D3DCCD1}">
-                <a14:hiddenFill xmlns:p14="http://schemas.microsoft.com/office/powerpoint/2010/main" xmlns:a14="http://schemas.microsoft.com/office/drawing/2010/main" xmlns:a16="http://schemas.microsoft.com/office/drawing/2014/main" xmlns="">
+                <a14:hiddenFill xmlns="" xmlns:a16="http://schemas.microsoft.com/office/drawing/2014/main" xmlns:a14="http://schemas.microsoft.com/office/drawing/2010/main" xmlns:p14="http://schemas.microsoft.com/office/powerpoint/2010/main">
                   <a:solidFill>
                     <a:srgbClr val="FFFFFF"/>
                   </a:solidFill>
@@ -31538,6 +31444,9 @@
   <p:clrMapOvr>
     <a:masterClrMapping/>
   </p:clrMapOvr>
+  <p:transition spd="slow">
+    <p:push dir="u"/>
+  </p:transition>
   <p:timing>
     <p:tnLst>
       <p:par>
@@ -32003,7 +31912,7 @@
             <a:noFill/>
             <a:extLst>
               <a:ext uri="{909E8E84-426E-40dd-AFC4-6F175D3DCCD1}">
-                <a14:hiddenFill xmlns:p14="http://schemas.microsoft.com/office/powerpoint/2010/main" xmlns:a14="http://schemas.microsoft.com/office/drawing/2010/main" xmlns:a16="http://schemas.microsoft.com/office/drawing/2014/main" xmlns="">
+                <a14:hiddenFill xmlns="" xmlns:a16="http://schemas.microsoft.com/office/drawing/2014/main" xmlns:a14="http://schemas.microsoft.com/office/drawing/2010/main" xmlns:p14="http://schemas.microsoft.com/office/powerpoint/2010/main">
                   <a:solidFill>
                     <a:srgbClr val="FFFFFF"/>
                   </a:solidFill>
@@ -32160,7 +32069,7 @@
             </a:ln>
             <a:extLst>
               <a:ext uri="{91240B29-F687-4f45-9708-019B960494DF}">
-                <a14:hiddenLine xmlns:p14="http://schemas.microsoft.com/office/powerpoint/2010/main" xmlns:a14="http://schemas.microsoft.com/office/drawing/2010/main" xmlns:a16="http://schemas.microsoft.com/office/drawing/2014/main" xmlns="" w="9525">
+                <a14:hiddenLine xmlns="" xmlns:a16="http://schemas.microsoft.com/office/drawing/2014/main" xmlns:a14="http://schemas.microsoft.com/office/drawing/2010/main" xmlns:p14="http://schemas.microsoft.com/office/powerpoint/2010/main" w="9525">
                   <a:solidFill>
                     <a:srgbClr val="000000"/>
                   </a:solidFill>
@@ -32272,7 +32181,7 @@
             </a:ln>
             <a:extLst>
               <a:ext uri="{91240B29-F687-4f45-9708-019B960494DF}">
-                <a14:hiddenLine xmlns:p14="http://schemas.microsoft.com/office/powerpoint/2010/main" xmlns:a14="http://schemas.microsoft.com/office/drawing/2010/main" xmlns:a16="http://schemas.microsoft.com/office/drawing/2014/main" xmlns="" w="9525">
+                <a14:hiddenLine xmlns="" xmlns:a16="http://schemas.microsoft.com/office/drawing/2014/main" xmlns:a14="http://schemas.microsoft.com/office/drawing/2010/main" xmlns:p14="http://schemas.microsoft.com/office/powerpoint/2010/main" w="9525">
                   <a:solidFill>
                     <a:srgbClr val="000000"/>
                   </a:solidFill>
@@ -32384,7 +32293,7 @@
             </a:ln>
             <a:extLst>
               <a:ext uri="{91240B29-F687-4f45-9708-019B960494DF}">
-                <a14:hiddenLine xmlns:p14="http://schemas.microsoft.com/office/powerpoint/2010/main" xmlns:a14="http://schemas.microsoft.com/office/drawing/2010/main" xmlns:a16="http://schemas.microsoft.com/office/drawing/2014/main" xmlns="" w="9525">
+                <a14:hiddenLine xmlns="" xmlns:a16="http://schemas.microsoft.com/office/drawing/2014/main" xmlns:a14="http://schemas.microsoft.com/office/drawing/2010/main" xmlns:p14="http://schemas.microsoft.com/office/powerpoint/2010/main" w="9525">
                   <a:solidFill>
                     <a:srgbClr val="000000"/>
                   </a:solidFill>
@@ -32440,7 +32349,7 @@
             </a:ln>
             <a:extLst>
               <a:ext uri="{91240B29-F687-4f45-9708-019B960494DF}">
-                <a14:hiddenLine xmlns:p14="http://schemas.microsoft.com/office/powerpoint/2010/main" xmlns:a14="http://schemas.microsoft.com/office/drawing/2010/main" xmlns:a16="http://schemas.microsoft.com/office/drawing/2014/main" xmlns="" w="9525">
+                <a14:hiddenLine xmlns="" xmlns:a16="http://schemas.microsoft.com/office/drawing/2014/main" xmlns:a14="http://schemas.microsoft.com/office/drawing/2010/main" xmlns:p14="http://schemas.microsoft.com/office/powerpoint/2010/main" w="9525">
                   <a:solidFill>
                     <a:srgbClr val="000000"/>
                   </a:solidFill>
@@ -32552,7 +32461,7 @@
             </a:ln>
             <a:extLst>
               <a:ext uri="{91240B29-F687-4f45-9708-019B960494DF}">
-                <a14:hiddenLine xmlns:p14="http://schemas.microsoft.com/office/powerpoint/2010/main" xmlns:a14="http://schemas.microsoft.com/office/drawing/2010/main" xmlns:a16="http://schemas.microsoft.com/office/drawing/2014/main" xmlns="" w="9525">
+                <a14:hiddenLine xmlns="" xmlns:a16="http://schemas.microsoft.com/office/drawing/2014/main" xmlns:a14="http://schemas.microsoft.com/office/drawing/2010/main" xmlns:p14="http://schemas.microsoft.com/office/powerpoint/2010/main" w="9525">
                   <a:solidFill>
                     <a:srgbClr val="000000"/>
                   </a:solidFill>
@@ -32636,7 +32545,7 @@
             </a:ln>
             <a:extLst>
               <a:ext uri="{91240B29-F687-4f45-9708-019B960494DF}">
-                <a14:hiddenLine xmlns:p14="http://schemas.microsoft.com/office/powerpoint/2010/main" xmlns:a14="http://schemas.microsoft.com/office/drawing/2010/main" xmlns:a16="http://schemas.microsoft.com/office/drawing/2014/main" xmlns="" w="9525">
+                <a14:hiddenLine xmlns="" xmlns:a16="http://schemas.microsoft.com/office/drawing/2014/main" xmlns:a14="http://schemas.microsoft.com/office/drawing/2010/main" xmlns:p14="http://schemas.microsoft.com/office/powerpoint/2010/main" w="9525">
                   <a:solidFill>
                     <a:srgbClr val="000000"/>
                   </a:solidFill>
@@ -32720,7 +32629,7 @@
             </a:ln>
             <a:extLst>
               <a:ext uri="{91240B29-F687-4f45-9708-019B960494DF}">
-                <a14:hiddenLine xmlns:p14="http://schemas.microsoft.com/office/powerpoint/2010/main" xmlns:a14="http://schemas.microsoft.com/office/drawing/2010/main" xmlns:a16="http://schemas.microsoft.com/office/drawing/2014/main" xmlns="" w="9525">
+                <a14:hiddenLine xmlns="" xmlns:a16="http://schemas.microsoft.com/office/drawing/2014/main" xmlns:a14="http://schemas.microsoft.com/office/drawing/2010/main" xmlns:p14="http://schemas.microsoft.com/office/powerpoint/2010/main" w="9525">
                   <a:solidFill>
                     <a:srgbClr val="000000"/>
                   </a:solidFill>
@@ -32832,7 +32741,7 @@
             </a:ln>
             <a:extLst>
               <a:ext uri="{91240B29-F687-4f45-9708-019B960494DF}">
-                <a14:hiddenLine xmlns:p14="http://schemas.microsoft.com/office/powerpoint/2010/main" xmlns:a14="http://schemas.microsoft.com/office/drawing/2010/main" xmlns:a16="http://schemas.microsoft.com/office/drawing/2014/main" xmlns="" w="9525">
+                <a14:hiddenLine xmlns="" xmlns:a16="http://schemas.microsoft.com/office/drawing/2014/main" xmlns:a14="http://schemas.microsoft.com/office/drawing/2010/main" xmlns:p14="http://schemas.microsoft.com/office/powerpoint/2010/main" w="9525">
                   <a:solidFill>
                     <a:srgbClr val="000000"/>
                   </a:solidFill>
@@ -32916,7 +32825,7 @@
             </a:ln>
             <a:extLst>
               <a:ext uri="{91240B29-F687-4f45-9708-019B960494DF}">
-                <a14:hiddenLine xmlns:p14="http://schemas.microsoft.com/office/powerpoint/2010/main" xmlns:a14="http://schemas.microsoft.com/office/drawing/2010/main" xmlns:a16="http://schemas.microsoft.com/office/drawing/2014/main" xmlns="" w="9525">
+                <a14:hiddenLine xmlns="" xmlns:a16="http://schemas.microsoft.com/office/drawing/2014/main" xmlns:a14="http://schemas.microsoft.com/office/drawing/2010/main" xmlns:p14="http://schemas.microsoft.com/office/powerpoint/2010/main" w="9525">
                   <a:solidFill>
                     <a:srgbClr val="000000"/>
                   </a:solidFill>
@@ -33000,7 +32909,7 @@
             </a:ln>
             <a:extLst>
               <a:ext uri="{91240B29-F687-4f45-9708-019B960494DF}">
-                <a14:hiddenLine xmlns:p14="http://schemas.microsoft.com/office/powerpoint/2010/main" xmlns:a14="http://schemas.microsoft.com/office/drawing/2010/main" xmlns:a16="http://schemas.microsoft.com/office/drawing/2014/main" xmlns="" w="9525">
+                <a14:hiddenLine xmlns="" xmlns:a16="http://schemas.microsoft.com/office/drawing/2014/main" xmlns:a14="http://schemas.microsoft.com/office/drawing/2010/main" xmlns:p14="http://schemas.microsoft.com/office/powerpoint/2010/main" w="9525">
                   <a:solidFill>
                     <a:srgbClr val="000000"/>
                   </a:solidFill>
@@ -33112,7 +33021,7 @@
             </a:ln>
             <a:extLst>
               <a:ext uri="{91240B29-F687-4f45-9708-019B960494DF}">
-                <a14:hiddenLine xmlns:p14="http://schemas.microsoft.com/office/powerpoint/2010/main" xmlns:a14="http://schemas.microsoft.com/office/drawing/2010/main" xmlns:a16="http://schemas.microsoft.com/office/drawing/2014/main" xmlns="" w="9525">
+                <a14:hiddenLine xmlns="" xmlns:a16="http://schemas.microsoft.com/office/drawing/2014/main" xmlns:a14="http://schemas.microsoft.com/office/drawing/2010/main" xmlns:p14="http://schemas.microsoft.com/office/powerpoint/2010/main" w="9525">
                   <a:solidFill>
                     <a:srgbClr val="000000"/>
                   </a:solidFill>
@@ -33224,7 +33133,7 @@
             </a:ln>
             <a:extLst>
               <a:ext uri="{91240B29-F687-4f45-9708-019B960494DF}">
-                <a14:hiddenLine xmlns:p14="http://schemas.microsoft.com/office/powerpoint/2010/main" xmlns:a14="http://schemas.microsoft.com/office/drawing/2010/main" xmlns:a16="http://schemas.microsoft.com/office/drawing/2014/main" xmlns="" w="9525">
+                <a14:hiddenLine xmlns="" xmlns:a16="http://schemas.microsoft.com/office/drawing/2014/main" xmlns:a14="http://schemas.microsoft.com/office/drawing/2010/main" xmlns:p14="http://schemas.microsoft.com/office/powerpoint/2010/main" w="9525">
                   <a:solidFill>
                     <a:srgbClr val="000000"/>
                   </a:solidFill>
@@ -33308,7 +33217,7 @@
             </a:ln>
             <a:extLst>
               <a:ext uri="{91240B29-F687-4f45-9708-019B960494DF}">
-                <a14:hiddenLine xmlns:p14="http://schemas.microsoft.com/office/powerpoint/2010/main" xmlns:a14="http://schemas.microsoft.com/office/drawing/2010/main" xmlns:a16="http://schemas.microsoft.com/office/drawing/2014/main" xmlns="" w="9525">
+                <a14:hiddenLine xmlns="" xmlns:a16="http://schemas.microsoft.com/office/drawing/2014/main" xmlns:a14="http://schemas.microsoft.com/office/drawing/2010/main" xmlns:p14="http://schemas.microsoft.com/office/powerpoint/2010/main" w="9525">
                   <a:solidFill>
                     <a:srgbClr val="000000"/>
                   </a:solidFill>
@@ -33440,7 +33349,7 @@
             </a:ln>
             <a:extLst>
               <a:ext uri="{91240B29-F687-4f45-9708-019B960494DF}">
-                <a14:hiddenLine xmlns:p14="http://schemas.microsoft.com/office/powerpoint/2010/main" xmlns:a14="http://schemas.microsoft.com/office/drawing/2010/main" xmlns:a16="http://schemas.microsoft.com/office/drawing/2014/main" xmlns="" w="9525">
+                <a14:hiddenLine xmlns="" xmlns:a16="http://schemas.microsoft.com/office/drawing/2014/main" xmlns:a14="http://schemas.microsoft.com/office/drawing/2010/main" xmlns:p14="http://schemas.microsoft.com/office/powerpoint/2010/main" w="9525">
                   <a:solidFill>
                     <a:srgbClr val="000000"/>
                   </a:solidFill>
@@ -33524,7 +33433,7 @@
             </a:ln>
             <a:extLst>
               <a:ext uri="{91240B29-F687-4f45-9708-019B960494DF}">
-                <a14:hiddenLine xmlns:p14="http://schemas.microsoft.com/office/powerpoint/2010/main" xmlns:a14="http://schemas.microsoft.com/office/drawing/2010/main" xmlns:a16="http://schemas.microsoft.com/office/drawing/2014/main" xmlns="" w="9525">
+                <a14:hiddenLine xmlns="" xmlns:a16="http://schemas.microsoft.com/office/drawing/2014/main" xmlns:a14="http://schemas.microsoft.com/office/drawing/2010/main" xmlns:p14="http://schemas.microsoft.com/office/powerpoint/2010/main" w="9525">
                   <a:solidFill>
                     <a:srgbClr val="000000"/>
                   </a:solidFill>
@@ -33636,7 +33545,7 @@
             </a:ln>
             <a:extLst>
               <a:ext uri="{91240B29-F687-4f45-9708-019B960494DF}">
-                <a14:hiddenLine xmlns:p14="http://schemas.microsoft.com/office/powerpoint/2010/main" xmlns:a14="http://schemas.microsoft.com/office/drawing/2010/main" xmlns:a16="http://schemas.microsoft.com/office/drawing/2014/main" xmlns="" w="9525">
+                <a14:hiddenLine xmlns="" xmlns:a16="http://schemas.microsoft.com/office/drawing/2014/main" xmlns:a14="http://schemas.microsoft.com/office/drawing/2010/main" xmlns:p14="http://schemas.microsoft.com/office/powerpoint/2010/main" w="9525">
                   <a:solidFill>
                     <a:srgbClr val="000000"/>
                   </a:solidFill>
@@ -33748,7 +33657,7 @@
             </a:ln>
             <a:extLst>
               <a:ext uri="{91240B29-F687-4f45-9708-019B960494DF}">
-                <a14:hiddenLine xmlns:p14="http://schemas.microsoft.com/office/powerpoint/2010/main" xmlns:a14="http://schemas.microsoft.com/office/drawing/2010/main" xmlns:a16="http://schemas.microsoft.com/office/drawing/2014/main" xmlns="" w="9525">
+                <a14:hiddenLine xmlns="" xmlns:a16="http://schemas.microsoft.com/office/drawing/2014/main" xmlns:a14="http://schemas.microsoft.com/office/drawing/2010/main" xmlns:p14="http://schemas.microsoft.com/office/powerpoint/2010/main" w="9525">
                   <a:solidFill>
                     <a:srgbClr val="000000"/>
                   </a:solidFill>
@@ -33832,7 +33741,7 @@
             </a:ln>
             <a:extLst>
               <a:ext uri="{91240B29-F687-4f45-9708-019B960494DF}">
-                <a14:hiddenLine xmlns:p14="http://schemas.microsoft.com/office/powerpoint/2010/main" xmlns:a14="http://schemas.microsoft.com/office/drawing/2010/main" xmlns:a16="http://schemas.microsoft.com/office/drawing/2014/main" xmlns="" w="9525">
+                <a14:hiddenLine xmlns="" xmlns:a16="http://schemas.microsoft.com/office/drawing/2014/main" xmlns:a14="http://schemas.microsoft.com/office/drawing/2010/main" xmlns:p14="http://schemas.microsoft.com/office/powerpoint/2010/main" w="9525">
                   <a:solidFill>
                     <a:srgbClr val="000000"/>
                   </a:solidFill>
@@ -33944,7 +33853,7 @@
             </a:ln>
             <a:extLst>
               <a:ext uri="{91240B29-F687-4f45-9708-019B960494DF}">
-                <a14:hiddenLine xmlns:p14="http://schemas.microsoft.com/office/powerpoint/2010/main" xmlns:a14="http://schemas.microsoft.com/office/drawing/2010/main" xmlns:a16="http://schemas.microsoft.com/office/drawing/2014/main" xmlns="" w="9525">
+                <a14:hiddenLine xmlns="" xmlns:a16="http://schemas.microsoft.com/office/drawing/2014/main" xmlns:a14="http://schemas.microsoft.com/office/drawing/2010/main" xmlns:p14="http://schemas.microsoft.com/office/powerpoint/2010/main" w="9525">
                   <a:solidFill>
                     <a:srgbClr val="000000"/>
                   </a:solidFill>
@@ -34056,7 +33965,7 @@
             </a:ln>
             <a:extLst>
               <a:ext uri="{91240B29-F687-4f45-9708-019B960494DF}">
-                <a14:hiddenLine xmlns:p14="http://schemas.microsoft.com/office/powerpoint/2010/main" xmlns:a14="http://schemas.microsoft.com/office/drawing/2010/main" xmlns:a16="http://schemas.microsoft.com/office/drawing/2014/main" xmlns="" w="9525">
+                <a14:hiddenLine xmlns="" xmlns:a16="http://schemas.microsoft.com/office/drawing/2014/main" xmlns:a14="http://schemas.microsoft.com/office/drawing/2010/main" xmlns:p14="http://schemas.microsoft.com/office/powerpoint/2010/main" w="9525">
                   <a:solidFill>
                     <a:srgbClr val="000000"/>
                   </a:solidFill>
@@ -34134,7 +34043,7 @@
             </a:ln>
             <a:extLst>
               <a:ext uri="{91240B29-F687-4f45-9708-019B960494DF}">
-                <a14:hiddenLine xmlns:p14="http://schemas.microsoft.com/office/powerpoint/2010/main" xmlns:a14="http://schemas.microsoft.com/office/drawing/2010/main" xmlns:a16="http://schemas.microsoft.com/office/drawing/2014/main" xmlns="" w="9525">
+                <a14:hiddenLine xmlns="" xmlns:a16="http://schemas.microsoft.com/office/drawing/2014/main" xmlns:a14="http://schemas.microsoft.com/office/drawing/2010/main" xmlns:p14="http://schemas.microsoft.com/office/powerpoint/2010/main" w="9525">
                   <a:solidFill>
                     <a:srgbClr val="000000"/>
                   </a:solidFill>
@@ -34246,7 +34155,7 @@
             </a:ln>
             <a:extLst>
               <a:ext uri="{91240B29-F687-4f45-9708-019B960494DF}">
-                <a14:hiddenLine xmlns:p14="http://schemas.microsoft.com/office/powerpoint/2010/main" xmlns:a14="http://schemas.microsoft.com/office/drawing/2010/main" xmlns:a16="http://schemas.microsoft.com/office/drawing/2014/main" xmlns="" w="9525">
+                <a14:hiddenLine xmlns="" xmlns:a16="http://schemas.microsoft.com/office/drawing/2014/main" xmlns:a14="http://schemas.microsoft.com/office/drawing/2010/main" xmlns:p14="http://schemas.microsoft.com/office/powerpoint/2010/main" w="9525">
                   <a:solidFill>
                     <a:srgbClr val="000000"/>
                   </a:solidFill>
@@ -34324,7 +34233,7 @@
             </a:ln>
             <a:extLst>
               <a:ext uri="{91240B29-F687-4f45-9708-019B960494DF}">
-                <a14:hiddenLine xmlns:p14="http://schemas.microsoft.com/office/powerpoint/2010/main" xmlns:a14="http://schemas.microsoft.com/office/drawing/2010/main" xmlns:a16="http://schemas.microsoft.com/office/drawing/2014/main" xmlns="" w="9525">
+                <a14:hiddenLine xmlns="" xmlns:a16="http://schemas.microsoft.com/office/drawing/2014/main" xmlns:a14="http://schemas.microsoft.com/office/drawing/2010/main" xmlns:p14="http://schemas.microsoft.com/office/powerpoint/2010/main" w="9525">
                   <a:solidFill>
                     <a:srgbClr val="000000"/>
                   </a:solidFill>
@@ -34436,7 +34345,7 @@
             </a:ln>
             <a:extLst>
               <a:ext uri="{91240B29-F687-4f45-9708-019B960494DF}">
-                <a14:hiddenLine xmlns:p14="http://schemas.microsoft.com/office/powerpoint/2010/main" xmlns:a14="http://schemas.microsoft.com/office/drawing/2010/main" xmlns:a16="http://schemas.microsoft.com/office/drawing/2014/main" xmlns="" w="9525">
+                <a14:hiddenLine xmlns="" xmlns:a16="http://schemas.microsoft.com/office/drawing/2014/main" xmlns:a14="http://schemas.microsoft.com/office/drawing/2010/main" xmlns:p14="http://schemas.microsoft.com/office/powerpoint/2010/main" w="9525">
                   <a:solidFill>
                     <a:srgbClr val="000000"/>
                   </a:solidFill>
@@ -34526,7 +34435,7 @@
             </a:ln>
             <a:extLst>
               <a:ext uri="{91240B29-F687-4f45-9708-019B960494DF}">
-                <a14:hiddenLine xmlns:p14="http://schemas.microsoft.com/office/powerpoint/2010/main" xmlns:a14="http://schemas.microsoft.com/office/drawing/2010/main" xmlns:a16="http://schemas.microsoft.com/office/drawing/2014/main" xmlns="" w="9525">
+                <a14:hiddenLine xmlns="" xmlns:a16="http://schemas.microsoft.com/office/drawing/2014/main" xmlns:a14="http://schemas.microsoft.com/office/drawing/2010/main" xmlns:p14="http://schemas.microsoft.com/office/powerpoint/2010/main" w="9525">
                   <a:solidFill>
                     <a:srgbClr val="000000"/>
                   </a:solidFill>
@@ -34638,7 +34547,7 @@
             </a:ln>
             <a:extLst>
               <a:ext uri="{91240B29-F687-4f45-9708-019B960494DF}">
-                <a14:hiddenLine xmlns:p14="http://schemas.microsoft.com/office/powerpoint/2010/main" xmlns:a14="http://schemas.microsoft.com/office/drawing/2010/main" xmlns:a16="http://schemas.microsoft.com/office/drawing/2014/main" xmlns="" w="9525">
+                <a14:hiddenLine xmlns="" xmlns:a16="http://schemas.microsoft.com/office/drawing/2014/main" xmlns:a14="http://schemas.microsoft.com/office/drawing/2010/main" xmlns:p14="http://schemas.microsoft.com/office/powerpoint/2010/main" w="9525">
                   <a:solidFill>
                     <a:srgbClr val="000000"/>
                   </a:solidFill>
@@ -34728,7 +34637,7 @@
             </a:ln>
             <a:extLst>
               <a:ext uri="{91240B29-F687-4f45-9708-019B960494DF}">
-                <a14:hiddenLine xmlns:p14="http://schemas.microsoft.com/office/powerpoint/2010/main" xmlns:a14="http://schemas.microsoft.com/office/drawing/2010/main" xmlns:a16="http://schemas.microsoft.com/office/drawing/2014/main" xmlns="" w="9525">
+                <a14:hiddenLine xmlns="" xmlns:a16="http://schemas.microsoft.com/office/drawing/2014/main" xmlns:a14="http://schemas.microsoft.com/office/drawing/2010/main" xmlns:p14="http://schemas.microsoft.com/office/powerpoint/2010/main" w="9525">
                   <a:solidFill>
                     <a:srgbClr val="000000"/>
                   </a:solidFill>
@@ -34840,7 +34749,7 @@
             </a:ln>
             <a:extLst>
               <a:ext uri="{91240B29-F687-4f45-9708-019B960494DF}">
-                <a14:hiddenLine xmlns:p14="http://schemas.microsoft.com/office/powerpoint/2010/main" xmlns:a14="http://schemas.microsoft.com/office/drawing/2010/main" xmlns:a16="http://schemas.microsoft.com/office/drawing/2014/main" xmlns="" w="9525">
+                <a14:hiddenLine xmlns="" xmlns:a16="http://schemas.microsoft.com/office/drawing/2014/main" xmlns:a14="http://schemas.microsoft.com/office/drawing/2010/main" xmlns:p14="http://schemas.microsoft.com/office/powerpoint/2010/main" w="9525">
                   <a:solidFill>
                     <a:srgbClr val="000000"/>
                   </a:solidFill>
@@ -34896,7 +34805,7 @@
             </a:ln>
             <a:extLst>
               <a:ext uri="{91240B29-F687-4f45-9708-019B960494DF}">
-                <a14:hiddenLine xmlns:p14="http://schemas.microsoft.com/office/powerpoint/2010/main" xmlns:a14="http://schemas.microsoft.com/office/drawing/2010/main" xmlns:a16="http://schemas.microsoft.com/office/drawing/2014/main" xmlns="" w="9525">
+                <a14:hiddenLine xmlns="" xmlns:a16="http://schemas.microsoft.com/office/drawing/2014/main" xmlns:a14="http://schemas.microsoft.com/office/drawing/2010/main" xmlns:p14="http://schemas.microsoft.com/office/powerpoint/2010/main" w="9525">
                   <a:solidFill>
                     <a:srgbClr val="000000"/>
                   </a:solidFill>
@@ -35008,7 +34917,7 @@
             </a:ln>
             <a:extLst>
               <a:ext uri="{91240B29-F687-4f45-9708-019B960494DF}">
-                <a14:hiddenLine xmlns:p14="http://schemas.microsoft.com/office/powerpoint/2010/main" xmlns:a14="http://schemas.microsoft.com/office/drawing/2010/main" xmlns:a16="http://schemas.microsoft.com/office/drawing/2014/main" xmlns="" w="9525">
+                <a14:hiddenLine xmlns="" xmlns:a16="http://schemas.microsoft.com/office/drawing/2014/main" xmlns:a14="http://schemas.microsoft.com/office/drawing/2010/main" xmlns:p14="http://schemas.microsoft.com/office/powerpoint/2010/main" w="9525">
                   <a:solidFill>
                     <a:srgbClr val="000000"/>
                   </a:solidFill>
@@ -35092,7 +35001,7 @@
             </a:ln>
             <a:extLst>
               <a:ext uri="{91240B29-F687-4f45-9708-019B960494DF}">
-                <a14:hiddenLine xmlns:p14="http://schemas.microsoft.com/office/powerpoint/2010/main" xmlns:a14="http://schemas.microsoft.com/office/drawing/2010/main" xmlns:a16="http://schemas.microsoft.com/office/drawing/2014/main" xmlns="" w="9525">
+                <a14:hiddenLine xmlns="" xmlns:a16="http://schemas.microsoft.com/office/drawing/2014/main" xmlns:a14="http://schemas.microsoft.com/office/drawing/2010/main" xmlns:p14="http://schemas.microsoft.com/office/powerpoint/2010/main" w="9525">
                   <a:solidFill>
                     <a:srgbClr val="000000"/>
                   </a:solidFill>
@@ -35176,7 +35085,7 @@
             </a:ln>
             <a:extLst>
               <a:ext uri="{91240B29-F687-4f45-9708-019B960494DF}">
-                <a14:hiddenLine xmlns:p14="http://schemas.microsoft.com/office/powerpoint/2010/main" xmlns:a14="http://schemas.microsoft.com/office/drawing/2010/main" xmlns:a16="http://schemas.microsoft.com/office/drawing/2014/main" xmlns="" w="9525">
+                <a14:hiddenLine xmlns="" xmlns:a16="http://schemas.microsoft.com/office/drawing/2014/main" xmlns:a14="http://schemas.microsoft.com/office/drawing/2010/main" xmlns:p14="http://schemas.microsoft.com/office/powerpoint/2010/main" w="9525">
                   <a:solidFill>
                     <a:srgbClr val="000000"/>
                   </a:solidFill>
@@ -35288,7 +35197,7 @@
             </a:ln>
             <a:extLst>
               <a:ext uri="{91240B29-F687-4f45-9708-019B960494DF}">
-                <a14:hiddenLine xmlns:p14="http://schemas.microsoft.com/office/powerpoint/2010/main" xmlns:a14="http://schemas.microsoft.com/office/drawing/2010/main" xmlns:a16="http://schemas.microsoft.com/office/drawing/2014/main" xmlns="" w="9525">
+                <a14:hiddenLine xmlns="" xmlns:a16="http://schemas.microsoft.com/office/drawing/2014/main" xmlns:a14="http://schemas.microsoft.com/office/drawing/2010/main" xmlns:p14="http://schemas.microsoft.com/office/powerpoint/2010/main" w="9525">
                   <a:solidFill>
                     <a:srgbClr val="000000"/>
                   </a:solidFill>
@@ -35378,7 +35287,7 @@
             </a:ln>
             <a:extLst>
               <a:ext uri="{91240B29-F687-4f45-9708-019B960494DF}">
-                <a14:hiddenLine xmlns:p14="http://schemas.microsoft.com/office/powerpoint/2010/main" xmlns:a14="http://schemas.microsoft.com/office/drawing/2010/main" xmlns:a16="http://schemas.microsoft.com/office/drawing/2014/main" xmlns="" w="9525">
+                <a14:hiddenLine xmlns="" xmlns:a16="http://schemas.microsoft.com/office/drawing/2014/main" xmlns:a14="http://schemas.microsoft.com/office/drawing/2010/main" xmlns:p14="http://schemas.microsoft.com/office/powerpoint/2010/main" w="9525">
                   <a:solidFill>
                     <a:srgbClr val="000000"/>
                   </a:solidFill>
@@ -35462,7 +35371,7 @@
             </a:ln>
             <a:extLst>
               <a:ext uri="{91240B29-F687-4f45-9708-019B960494DF}">
-                <a14:hiddenLine xmlns:p14="http://schemas.microsoft.com/office/powerpoint/2010/main" xmlns:a14="http://schemas.microsoft.com/office/drawing/2010/main" xmlns:a16="http://schemas.microsoft.com/office/drawing/2014/main" xmlns="" w="9525">
+                <a14:hiddenLine xmlns="" xmlns:a16="http://schemas.microsoft.com/office/drawing/2014/main" xmlns:a14="http://schemas.microsoft.com/office/drawing/2010/main" xmlns:p14="http://schemas.microsoft.com/office/powerpoint/2010/main" w="9525">
                   <a:solidFill>
                     <a:srgbClr val="000000"/>
                   </a:solidFill>
@@ -35574,7 +35483,7 @@
             </a:ln>
             <a:extLst>
               <a:ext uri="{91240B29-F687-4f45-9708-019B960494DF}">
-                <a14:hiddenLine xmlns:p14="http://schemas.microsoft.com/office/powerpoint/2010/main" xmlns:a14="http://schemas.microsoft.com/office/drawing/2010/main" xmlns:a16="http://schemas.microsoft.com/office/drawing/2014/main" xmlns="" w="9525">
+                <a14:hiddenLine xmlns="" xmlns:a16="http://schemas.microsoft.com/office/drawing/2014/main" xmlns:a14="http://schemas.microsoft.com/office/drawing/2010/main" xmlns:p14="http://schemas.microsoft.com/office/powerpoint/2010/main" w="9525">
                   <a:solidFill>
                     <a:srgbClr val="000000"/>
                   </a:solidFill>
@@ -35658,7 +35567,7 @@
             </a:ln>
             <a:extLst>
               <a:ext uri="{91240B29-F687-4f45-9708-019B960494DF}">
-                <a14:hiddenLine xmlns:p14="http://schemas.microsoft.com/office/powerpoint/2010/main" xmlns:a14="http://schemas.microsoft.com/office/drawing/2010/main" xmlns:a16="http://schemas.microsoft.com/office/drawing/2014/main" xmlns="" w="9525">
+                <a14:hiddenLine xmlns="" xmlns:a16="http://schemas.microsoft.com/office/drawing/2014/main" xmlns:a14="http://schemas.microsoft.com/office/drawing/2010/main" xmlns:p14="http://schemas.microsoft.com/office/powerpoint/2010/main" w="9525">
                   <a:solidFill>
                     <a:srgbClr val="000000"/>
                   </a:solidFill>
@@ -35770,7 +35679,7 @@
             </a:ln>
             <a:extLst>
               <a:ext uri="{91240B29-F687-4f45-9708-019B960494DF}">
-                <a14:hiddenLine xmlns:p14="http://schemas.microsoft.com/office/powerpoint/2010/main" xmlns:a14="http://schemas.microsoft.com/office/drawing/2010/main" xmlns:a16="http://schemas.microsoft.com/office/drawing/2014/main" xmlns="" w="9525">
+                <a14:hiddenLine xmlns="" xmlns:a16="http://schemas.microsoft.com/office/drawing/2014/main" xmlns:a14="http://schemas.microsoft.com/office/drawing/2010/main" xmlns:p14="http://schemas.microsoft.com/office/powerpoint/2010/main" w="9525">
                   <a:solidFill>
                     <a:srgbClr val="000000"/>
                   </a:solidFill>
@@ -35854,7 +35763,7 @@
             </a:ln>
             <a:extLst>
               <a:ext uri="{91240B29-F687-4f45-9708-019B960494DF}">
-                <a14:hiddenLine xmlns:p14="http://schemas.microsoft.com/office/powerpoint/2010/main" xmlns:a14="http://schemas.microsoft.com/office/drawing/2010/main" xmlns:a16="http://schemas.microsoft.com/office/drawing/2014/main" xmlns="" w="9525">
+                <a14:hiddenLine xmlns="" xmlns:a16="http://schemas.microsoft.com/office/drawing/2014/main" xmlns:a14="http://schemas.microsoft.com/office/drawing/2010/main" xmlns:p14="http://schemas.microsoft.com/office/powerpoint/2010/main" w="9525">
                   <a:solidFill>
                     <a:srgbClr val="000000"/>
                   </a:solidFill>
@@ -35966,7 +35875,7 @@
             </a:ln>
             <a:extLst>
               <a:ext uri="{91240B29-F687-4f45-9708-019B960494DF}">
-                <a14:hiddenLine xmlns:p14="http://schemas.microsoft.com/office/powerpoint/2010/main" xmlns:a14="http://schemas.microsoft.com/office/drawing/2010/main" xmlns:a16="http://schemas.microsoft.com/office/drawing/2014/main" xmlns="" w="9525">
+                <a14:hiddenLine xmlns="" xmlns:a16="http://schemas.microsoft.com/office/drawing/2014/main" xmlns:a14="http://schemas.microsoft.com/office/drawing/2010/main" xmlns:p14="http://schemas.microsoft.com/office/powerpoint/2010/main" w="9525">
                   <a:solidFill>
                     <a:srgbClr val="000000"/>
                   </a:solidFill>
@@ -36022,7 +35931,7 @@
             </a:ln>
             <a:extLst>
               <a:ext uri="{91240B29-F687-4f45-9708-019B960494DF}">
-                <a14:hiddenLine xmlns:p14="http://schemas.microsoft.com/office/powerpoint/2010/main" xmlns:a14="http://schemas.microsoft.com/office/drawing/2010/main" xmlns:a16="http://schemas.microsoft.com/office/drawing/2014/main" xmlns="" w="9525">
+                <a14:hiddenLine xmlns="" xmlns:a16="http://schemas.microsoft.com/office/drawing/2014/main" xmlns:a14="http://schemas.microsoft.com/office/drawing/2010/main" xmlns:p14="http://schemas.microsoft.com/office/powerpoint/2010/main" w="9525">
                   <a:solidFill>
                     <a:srgbClr val="000000"/>
                   </a:solidFill>
@@ -36109,7 +36018,7 @@
             </a:ln>
             <a:extLst>
               <a:ext uri="{91240B29-F687-4f45-9708-019B960494DF}">
-                <a14:hiddenLine xmlns:p14="http://schemas.microsoft.com/office/powerpoint/2010/main" xmlns:a14="http://schemas.microsoft.com/office/drawing/2010/main" xmlns:a16="http://schemas.microsoft.com/office/drawing/2014/main" xmlns="" w="9525">
+                <a14:hiddenLine xmlns="" xmlns:a16="http://schemas.microsoft.com/office/drawing/2014/main" xmlns:a14="http://schemas.microsoft.com/office/drawing/2010/main" xmlns:p14="http://schemas.microsoft.com/office/powerpoint/2010/main" w="9525">
                   <a:solidFill>
                     <a:srgbClr val="000000"/>
                   </a:solidFill>
@@ -36221,7 +36130,7 @@
             </a:ln>
             <a:extLst>
               <a:ext uri="{91240B29-F687-4f45-9708-019B960494DF}">
-                <a14:hiddenLine xmlns:p14="http://schemas.microsoft.com/office/powerpoint/2010/main" xmlns:a14="http://schemas.microsoft.com/office/drawing/2010/main" xmlns:a16="http://schemas.microsoft.com/office/drawing/2014/main" xmlns="" w="9525">
+                <a14:hiddenLine xmlns="" xmlns:a16="http://schemas.microsoft.com/office/drawing/2014/main" xmlns:a14="http://schemas.microsoft.com/office/drawing/2010/main" xmlns:p14="http://schemas.microsoft.com/office/powerpoint/2010/main" w="9525">
                   <a:solidFill>
                     <a:srgbClr val="000000"/>
                   </a:solidFill>
@@ -36305,7 +36214,7 @@
             </a:ln>
             <a:extLst>
               <a:ext uri="{91240B29-F687-4f45-9708-019B960494DF}">
-                <a14:hiddenLine xmlns:p14="http://schemas.microsoft.com/office/powerpoint/2010/main" xmlns:a14="http://schemas.microsoft.com/office/drawing/2010/main" xmlns:a16="http://schemas.microsoft.com/office/drawing/2014/main" xmlns="" w="9525">
+                <a14:hiddenLine xmlns="" xmlns:a16="http://schemas.microsoft.com/office/drawing/2014/main" xmlns:a14="http://schemas.microsoft.com/office/drawing/2010/main" xmlns:p14="http://schemas.microsoft.com/office/powerpoint/2010/main" w="9525">
                   <a:solidFill>
                     <a:srgbClr val="000000"/>
                   </a:solidFill>
@@ -36417,7 +36326,7 @@
             </a:ln>
             <a:extLst>
               <a:ext uri="{91240B29-F687-4f45-9708-019B960494DF}">
-                <a14:hiddenLine xmlns:p14="http://schemas.microsoft.com/office/powerpoint/2010/main" xmlns:a14="http://schemas.microsoft.com/office/drawing/2010/main" xmlns:a16="http://schemas.microsoft.com/office/drawing/2014/main" xmlns="" w="9525">
+                <a14:hiddenLine xmlns="" xmlns:a16="http://schemas.microsoft.com/office/drawing/2014/main" xmlns:a14="http://schemas.microsoft.com/office/drawing/2010/main" xmlns:p14="http://schemas.microsoft.com/office/powerpoint/2010/main" w="9525">
                   <a:solidFill>
                     <a:srgbClr val="000000"/>
                   </a:solidFill>
@@ -36529,7 +36438,7 @@
             </a:ln>
             <a:extLst>
               <a:ext uri="{91240B29-F687-4f45-9708-019B960494DF}">
-                <a14:hiddenLine xmlns:p14="http://schemas.microsoft.com/office/powerpoint/2010/main" xmlns:a14="http://schemas.microsoft.com/office/drawing/2010/main" xmlns:a16="http://schemas.microsoft.com/office/drawing/2014/main" xmlns="" w="9525">
+                <a14:hiddenLine xmlns="" xmlns:a16="http://schemas.microsoft.com/office/drawing/2014/main" xmlns:a14="http://schemas.microsoft.com/office/drawing/2010/main" xmlns:p14="http://schemas.microsoft.com/office/powerpoint/2010/main" w="9525">
                   <a:solidFill>
                     <a:srgbClr val="000000"/>
                   </a:solidFill>
@@ -36616,7 +36525,7 @@
             </a:ln>
             <a:extLst>
               <a:ext uri="{91240B29-F687-4f45-9708-019B960494DF}">
-                <a14:hiddenLine xmlns:p14="http://schemas.microsoft.com/office/powerpoint/2010/main" xmlns:a14="http://schemas.microsoft.com/office/drawing/2010/main" xmlns:a16="http://schemas.microsoft.com/office/drawing/2014/main" xmlns="" w="9525">
+                <a14:hiddenLine xmlns="" xmlns:a16="http://schemas.microsoft.com/office/drawing/2014/main" xmlns:a14="http://schemas.microsoft.com/office/drawing/2010/main" xmlns:p14="http://schemas.microsoft.com/office/powerpoint/2010/main" w="9525">
                   <a:solidFill>
                     <a:srgbClr val="000000"/>
                   </a:solidFill>
@@ -36700,7 +36609,7 @@
             </a:ln>
             <a:extLst>
               <a:ext uri="{91240B29-F687-4f45-9708-019B960494DF}">
-                <a14:hiddenLine xmlns:p14="http://schemas.microsoft.com/office/powerpoint/2010/main" xmlns:a14="http://schemas.microsoft.com/office/drawing/2010/main" xmlns:a16="http://schemas.microsoft.com/office/drawing/2014/main" xmlns="" w="9525">
+                <a14:hiddenLine xmlns="" xmlns:a16="http://schemas.microsoft.com/office/drawing/2014/main" xmlns:a14="http://schemas.microsoft.com/office/drawing/2010/main" xmlns:p14="http://schemas.microsoft.com/office/powerpoint/2010/main" w="9525">
                   <a:solidFill>
                     <a:srgbClr val="000000"/>
                   </a:solidFill>
@@ -36812,7 +36721,7 @@
             </a:ln>
             <a:extLst>
               <a:ext uri="{91240B29-F687-4f45-9708-019B960494DF}">
-                <a14:hiddenLine xmlns:p14="http://schemas.microsoft.com/office/powerpoint/2010/main" xmlns:a14="http://schemas.microsoft.com/office/drawing/2010/main" xmlns:a16="http://schemas.microsoft.com/office/drawing/2014/main" xmlns="" w="9525">
+                <a14:hiddenLine xmlns="" xmlns:a16="http://schemas.microsoft.com/office/drawing/2014/main" xmlns:a14="http://schemas.microsoft.com/office/drawing/2010/main" xmlns:p14="http://schemas.microsoft.com/office/powerpoint/2010/main" w="9525">
                   <a:solidFill>
                     <a:srgbClr val="000000"/>
                   </a:solidFill>
@@ -36924,7 +36833,7 @@
             </a:ln>
             <a:extLst>
               <a:ext uri="{91240B29-F687-4f45-9708-019B960494DF}">
-                <a14:hiddenLine xmlns:p14="http://schemas.microsoft.com/office/powerpoint/2010/main" xmlns:a14="http://schemas.microsoft.com/office/drawing/2010/main" xmlns:a16="http://schemas.microsoft.com/office/drawing/2014/main" xmlns="" w="9525">
+                <a14:hiddenLine xmlns="" xmlns:a16="http://schemas.microsoft.com/office/drawing/2014/main" xmlns:a14="http://schemas.microsoft.com/office/drawing/2010/main" xmlns:p14="http://schemas.microsoft.com/office/powerpoint/2010/main" w="9525">
                   <a:solidFill>
                     <a:srgbClr val="000000"/>
                   </a:solidFill>
@@ -37008,7 +36917,7 @@
             </a:ln>
             <a:extLst>
               <a:ext uri="{91240B29-F687-4f45-9708-019B960494DF}">
-                <a14:hiddenLine xmlns:p14="http://schemas.microsoft.com/office/powerpoint/2010/main" xmlns:a14="http://schemas.microsoft.com/office/drawing/2010/main" xmlns:a16="http://schemas.microsoft.com/office/drawing/2014/main" xmlns="" w="9525">
+                <a14:hiddenLine xmlns="" xmlns:a16="http://schemas.microsoft.com/office/drawing/2014/main" xmlns:a14="http://schemas.microsoft.com/office/drawing/2010/main" xmlns:p14="http://schemas.microsoft.com/office/powerpoint/2010/main" w="9525">
                   <a:solidFill>
                     <a:srgbClr val="000000"/>
                   </a:solidFill>
@@ -37150,7 +37059,7 @@
             </a:ln>
             <a:extLst>
               <a:ext uri="{91240B29-F687-4f45-9708-019B960494DF}">
-                <a14:hiddenLine xmlns:p14="http://schemas.microsoft.com/office/powerpoint/2010/main" xmlns:a14="http://schemas.microsoft.com/office/drawing/2010/main" xmlns:a16="http://schemas.microsoft.com/office/drawing/2014/main" xmlns="" w="9525">
+                <a14:hiddenLine xmlns="" xmlns:a16="http://schemas.microsoft.com/office/drawing/2014/main" xmlns:a14="http://schemas.microsoft.com/office/drawing/2010/main" xmlns:p14="http://schemas.microsoft.com/office/powerpoint/2010/main" w="9525">
                   <a:solidFill>
                     <a:srgbClr val="000000"/>
                   </a:solidFill>
@@ -37240,7 +37149,7 @@
             </a:ln>
             <a:extLst>
               <a:ext uri="{91240B29-F687-4f45-9708-019B960494DF}">
-                <a14:hiddenLine xmlns:p14="http://schemas.microsoft.com/office/powerpoint/2010/main" xmlns:a14="http://schemas.microsoft.com/office/drawing/2010/main" xmlns:a16="http://schemas.microsoft.com/office/drawing/2014/main" xmlns="" w="9525">
+                <a14:hiddenLine xmlns="" xmlns:a16="http://schemas.microsoft.com/office/drawing/2014/main" xmlns:a14="http://schemas.microsoft.com/office/drawing/2010/main" xmlns:p14="http://schemas.microsoft.com/office/powerpoint/2010/main" w="9525">
                   <a:solidFill>
                     <a:srgbClr val="000000"/>
                   </a:solidFill>
@@ -37352,7 +37261,7 @@
             </a:ln>
             <a:extLst>
               <a:ext uri="{91240B29-F687-4f45-9708-019B960494DF}">
-                <a14:hiddenLine xmlns:p14="http://schemas.microsoft.com/office/powerpoint/2010/main" xmlns:a14="http://schemas.microsoft.com/office/drawing/2010/main" xmlns:a16="http://schemas.microsoft.com/office/drawing/2014/main" xmlns="" w="9525">
+                <a14:hiddenLine xmlns="" xmlns:a16="http://schemas.microsoft.com/office/drawing/2014/main" xmlns:a14="http://schemas.microsoft.com/office/drawing/2010/main" xmlns:p14="http://schemas.microsoft.com/office/powerpoint/2010/main" w="9525">
                   <a:solidFill>
                     <a:srgbClr val="000000"/>
                   </a:solidFill>
@@ -37935,6 +37844,18 @@
   <p:clrMapOvr>
     <a:masterClrMapping/>
   </p:clrMapOvr>
+  <mc:AlternateContent xmlns:mc="http://schemas.openxmlformats.org/markup-compatibility/2006">
+    <mc:Choice xmlns:p14="http://schemas.microsoft.com/office/powerpoint/2010/main" Requires="p14">
+      <p:transition spd="slow" p14:dur="800">
+        <p:circle/>
+      </p:transition>
+    </mc:Choice>
+    <mc:Fallback>
+      <p:transition spd="slow">
+        <p:circle/>
+      </p:transition>
+    </mc:Fallback>
+  </mc:AlternateContent>
   <p:timing>
     <p:tnLst>
       <p:par>
@@ -38323,6 +38244,18 @@
   <p:clrMapOvr>
     <a:masterClrMapping/>
   </p:clrMapOvr>
+  <mc:AlternateContent xmlns:mc="http://schemas.openxmlformats.org/markup-compatibility/2006">
+    <mc:Choice xmlns:p15="http://schemas.microsoft.com/office/powerpoint/2012/main" Requires="p15">
+      <p:transition xmlns:p14="http://schemas.microsoft.com/office/powerpoint/2010/main" spd="slow" p14:dur="2000">
+        <p15:prstTrans prst="prestige"/>
+      </p:transition>
+    </mc:Choice>
+    <mc:Fallback>
+      <p:transition spd="slow">
+        <p:fade/>
+      </p:transition>
+    </mc:Fallback>
+  </mc:AlternateContent>
   <p:timing>
     <p:tnLst>
       <p:par>
@@ -39205,6 +39138,18 @@
   <p:clrMapOvr>
     <a:masterClrMapping/>
   </p:clrMapOvr>
+  <mc:AlternateContent xmlns:mc="http://schemas.openxmlformats.org/markup-compatibility/2006">
+    <mc:Choice xmlns:p14="http://schemas.microsoft.com/office/powerpoint/2010/main" Requires="p14">
+      <p:transition spd="slow" p14:dur="1600">
+        <p14:gallery dir="l"/>
+      </p:transition>
+    </mc:Choice>
+    <mc:Fallback>
+      <p:transition spd="slow">
+        <p:fade/>
+      </p:transition>
+    </mc:Fallback>
+  </mc:AlternateContent>
   <p:timing>
     <p:tnLst>
       <p:par>
@@ -39886,6 +39831,18 @@
   <p:clrMapOvr>
     <a:masterClrMapping/>
   </p:clrMapOvr>
+  <mc:AlternateContent xmlns:mc="http://schemas.openxmlformats.org/markup-compatibility/2006">
+    <mc:Choice xmlns:p14="http://schemas.microsoft.com/office/powerpoint/2010/main" Requires="p14">
+      <p:transition spd="slow" p14:dur="1600">
+        <p14:prism isInverted="1"/>
+      </p:transition>
+    </mc:Choice>
+    <mc:Fallback>
+      <p:transition spd="slow">
+        <p:fade/>
+      </p:transition>
+    </mc:Fallback>
+  </mc:AlternateContent>
   <p:timing>
     <p:tnLst>
       <p:par>
@@ -40725,12 +40682,39 @@
   <p:clrMapOvr>
     <a:masterClrMapping/>
   </p:clrMapOvr>
+  <p:transition spd="slow">
+    <p:push dir="u"/>
+  </p:transition>
 </p:sld>
 </file>
 
 <file path=ppt/slides/slide8.xml><?xml version="1.0" encoding="utf-8"?>
 <p:sld xmlns:a="http://schemas.openxmlformats.org/drawingml/2006/main" xmlns:r="http://schemas.openxmlformats.org/officeDocument/2006/relationships" xmlns:p="http://schemas.openxmlformats.org/presentationml/2006/main">
   <p:cSld>
+    <p:bg>
+      <p:bgPr>
+        <a:blipFill>
+          <a:blip r:embed="rId2">
+            <a:duotone>
+              <a:schemeClr val="bg2">
+                <a:shade val="88000"/>
+                <a:hueMod val="106000"/>
+                <a:satMod val="140000"/>
+                <a:lumMod val="54000"/>
+              </a:schemeClr>
+              <a:schemeClr val="bg2">
+                <a:tint val="98000"/>
+                <a:hueMod val="90000"/>
+                <a:satMod val="150000"/>
+                <a:lumMod val="160000"/>
+              </a:schemeClr>
+            </a:duotone>
+          </a:blip>
+          <a:stretch/>
+        </a:blipFill>
+        <a:effectLst/>
+      </p:bgPr>
+    </p:bg>
     <p:spTree>
       <p:nvGrpSpPr>
         <p:cNvPr id="1" name=""/>
@@ -40745,6 +40729,123 @@
           <a:chExt cx="0" cy="0"/>
         </a:xfrm>
       </p:grpSpPr>
+      <p:sp useBgFill="1">
+        <p:nvSpPr>
+          <p:cNvPr id="1031" name="Rectangle 1030">
+            <a:extLst>
+              <a:ext uri="{FF2B5EF4-FFF2-40B4-BE49-F238E27FC236}">
+                <a16:creationId xmlns:a16="http://schemas.microsoft.com/office/drawing/2014/main" id="{C2E4E997-8672-4FFD-B8EC-9932A8E4714B}"/>
+              </a:ext>
+              <a:ext uri="{C183D7F6-B498-43B3-948B-1728B52AA6E4}">
+                <adec:decorative xmlns:adec="http://schemas.microsoft.com/office/drawing/2017/decorative" val="1"/>
+              </a:ext>
+            </a:extLst>
+          </p:cNvPr>
+          <p:cNvSpPr>
+            <a:spLocks noGrp="1" noRot="1" noChangeAspect="1" noMove="1" noResize="1" noEditPoints="1" noAdjustHandles="1" noChangeArrowheads="1" noChangeShapeType="1" noTextEdit="1"/>
+          </p:cNvSpPr>
+          <p:nvPr>
+            <p:extLst>
+              <p:ext uri="{386F3935-93C4-4BCD-93E2-E3B085C9AB24}">
+                <p16:designElem xmlns:p16="http://schemas.microsoft.com/office/powerpoint/2015/main" val="1"/>
+              </p:ext>
+            </p:extLst>
+          </p:nvPr>
+        </p:nvSpPr>
+        <p:spPr>
+          <a:xfrm>
+            <a:off x="0" y="0"/>
+            <a:ext cx="12192000" cy="6858000"/>
+          </a:xfrm>
+          <a:prstGeom prst="rect">
+            <a:avLst/>
+          </a:prstGeom>
+          <a:ln>
+            <a:noFill/>
+          </a:ln>
+        </p:spPr>
+        <p:style>
+          <a:lnRef idx="2">
+            <a:schemeClr val="accent1">
+              <a:shade val="50000"/>
+            </a:schemeClr>
+          </a:lnRef>
+          <a:fillRef idx="1003">
+            <a:schemeClr val="dk2"/>
+          </a:fillRef>
+          <a:effectRef idx="0">
+            <a:schemeClr val="accent1"/>
+          </a:effectRef>
+          <a:fontRef idx="minor">
+            <a:schemeClr val="lt1"/>
+          </a:fontRef>
+        </p:style>
+        <p:txBody>
+          <a:bodyPr rtlCol="0" anchor="ctr"/>
+          <a:lstStyle/>
+          <a:p>
+            <a:pPr algn="ctr"/>
+            <a:endParaRPr lang="en-US"/>
+          </a:p>
+        </p:txBody>
+      </p:sp>
+      <p:pic>
+        <p:nvPicPr>
+          <p:cNvPr id="1033" name="Picture 2">
+            <a:extLst>
+              <a:ext uri="{FF2B5EF4-FFF2-40B4-BE49-F238E27FC236}">
+                <a16:creationId xmlns:a16="http://schemas.microsoft.com/office/drawing/2014/main" id="{FE6BA9E6-1D9E-4D30-B528-D49FA1342E4E}"/>
+              </a:ext>
+              <a:ext uri="{C183D7F6-B498-43B3-948B-1728B52AA6E4}">
+                <adec:decorative xmlns:adec="http://schemas.microsoft.com/office/drawing/2017/decorative" val="1"/>
+              </a:ext>
+            </a:extLst>
+          </p:cNvPr>
+          <p:cNvPicPr>
+            <a:picLocks noGrp="1" noRot="1" noChangeAspect="1" noMove="1" noResize="1" noEditPoints="1" noAdjustHandles="1" noChangeArrowheads="1" noChangeShapeType="1" noCrop="1"/>
+          </p:cNvPicPr>
+          <p:nvPr>
+            <p:extLst>
+              <p:ext uri="{386F3935-93C4-4BCD-93E2-E3B085C9AB24}">
+                <p16:designElem xmlns:p16="http://schemas.microsoft.com/office/powerpoint/2015/main" val="1"/>
+              </p:ext>
+            </p:extLst>
+          </p:nvPr>
+        </p:nvPicPr>
+        <p:blipFill>
+          <a:blip r:embed="rId3">
+            <a:alphaModFix amt="30000"/>
+            <a:extLst>
+              <a:ext uri="{28A0092B-C50C-407E-A947-70E740481C1C}">
+                <a14:useLocalDpi xmlns:a14="http://schemas.microsoft.com/office/drawing/2010/main" val="0"/>
+              </a:ext>
+            </a:extLst>
+          </a:blip>
+          <a:srcRect/>
+          <a:stretch>
+            <a:fillRect/>
+          </a:stretch>
+        </p:blipFill>
+        <p:spPr bwMode="auto">
+          <a:xfrm>
+            <a:off x="0" y="0"/>
+            <a:ext cx="12192003" cy="6858001"/>
+          </a:xfrm>
+          <a:prstGeom prst="rect">
+            <a:avLst/>
+          </a:prstGeom>
+          <a:noFill/>
+          <a:extLst>
+            <a:ext uri="{909E8E84-426E-40dd-AFC4-6F175D3DCCD1}">
+              <a14:hiddenFill xmlns="" xmlns:a16="http://schemas.microsoft.com/office/drawing/2014/main" xmlns:p14="http://schemas.microsoft.com/office/powerpoint/2010/main" xmlns:a14="http://schemas.microsoft.com/office/drawing/2010/main">
+                <a:solidFill>
+                  <a:srgbClr val="FFFFFF"/>
+                </a:solidFill>
+              </a14:hiddenFill>
+            </a:ext>
+          </a:extLst>
+        </p:spPr>
+      </p:pic>
       <p:sp>
         <p:nvSpPr>
           <p:cNvPr id="2" name="Title 1">
@@ -40761,16 +40862,23 @@
             <p:ph type="title"/>
           </p:nvPr>
         </p:nvSpPr>
-        <p:spPr/>
+        <p:spPr>
+          <a:xfrm>
+            <a:off x="1141413" y="618518"/>
+            <a:ext cx="4459286" cy="1478570"/>
+          </a:xfrm>
+        </p:spPr>
         <p:txBody>
-          <a:bodyPr/>
+          <a:bodyPr>
+            <a:normAutofit/>
+          </a:bodyPr>
           <a:lstStyle/>
           <a:p>
             <a:r>
-              <a:rPr lang="hr-HR" dirty="0"/>
+              <a:rPr lang="hr-HR" sz="3200"/>
               <a:t>KAKO RADI ISHIHARA TEST?</a:t>
             </a:r>
-            <a:endParaRPr lang="en-US" dirty="0"/>
+            <a:endParaRPr lang="en-US" sz="3200"/>
           </a:p>
         </p:txBody>
       </p:sp>
@@ -40792,17 +40900,12 @@
         </p:nvSpPr>
         <p:spPr bwMode="auto">
           <a:xfrm>
-            <a:off x="838200" y="1869679"/>
-            <a:ext cx="7074373" cy="2239844"/>
+            <a:off x="1141412" y="2249487"/>
+            <a:ext cx="4459287" cy="3965046"/>
           </a:xfrm>
           <a:prstGeom prst="rect">
             <a:avLst/>
           </a:prstGeom>
-          <a:noFill/>
-          <a:ln>
-            <a:noFill/>
-          </a:ln>
-          <a:effectLst/>
           <a:extLst>
             <a:ext uri="{909E8E84-426E-40DD-AFC4-6F175D3DCCD1}">
               <a14:hiddenFill xmlns:a14="http://schemas.microsoft.com/office/drawing/2010/main">
@@ -40833,23 +40936,20 @@
           </a:extLst>
         </p:spPr>
         <p:txBody>
-          <a:bodyPr vert="horz" wrap="none" lIns="91440" tIns="45720" rIns="91440" bIns="45720" numCol="1" anchor="ctr" anchorCtr="0" compatLnSpc="1">
+          <a:bodyPr vert="horz" lIns="91440" tIns="45720" rIns="91440" bIns="45720" numCol="1" anchorCtr="0" compatLnSpc="1">
             <a:prstTxWarp prst="textNoShape">
               <a:avLst/>
             </a:prstTxWarp>
-            <a:spAutoFit/>
+            <a:normAutofit/>
           </a:bodyPr>
           <a:lstStyle/>
           <a:p>
-            <a:pPr marL="0" marR="0" lvl="0" indent="0" algn="l" defTabSz="914400" rtl="0" eaLnBrk="0" fontAlgn="base" latinLnBrk="0" hangingPunct="0">
-              <a:lnSpc>
-                <a:spcPct val="150000"/>
-              </a:lnSpc>
+            <a:pPr marL="0" marR="0" lvl="0" indent="0" defTabSz="914400" rtl="0" eaLnBrk="0" fontAlgn="base" latinLnBrk="0" hangingPunct="0">
               <a:spcBef>
                 <a:spcPct val="0"/>
               </a:spcBef>
               <a:spcAft>
-                <a:spcPct val="0"/>
+                <a:spcPts val="600"/>
               </a:spcAft>
               <a:buClrTx/>
               <a:buSzTx/>
@@ -40858,65 +40958,50 @@
               <a:tabLst/>
             </a:pPr>
             <a:r>
-              <a:rPr kumimoji="0" lang="en-US" altLang="en-US" b="0" i="0" u="none" strike="noStrike" cap="none" normalizeH="0" baseline="0" dirty="0" err="1">
+              <a:rPr kumimoji="0" lang="en-US" altLang="en-US" sz="2000" b="0" i="0" u="none" strike="noStrike" cap="none" normalizeH="0" baseline="0" dirty="0" err="1">
                 <a:ln>
                   <a:noFill/>
                 </a:ln>
-                <a:solidFill>
-                  <a:schemeClr val="tx1"/>
-                </a:solidFill>
                 <a:effectLst/>
                 <a:latin typeface="Arial" panose="020B0604020202020204" pitchFamily="34" charset="0"/>
               </a:rPr>
               <a:t>Implementiran</a:t>
             </a:r>
             <a:r>
-              <a:rPr kumimoji="0" lang="en-US" altLang="en-US" b="0" i="0" u="none" strike="noStrike" cap="none" normalizeH="0" baseline="0" dirty="0">
+              <a:rPr kumimoji="0" lang="en-US" altLang="en-US" sz="2000" b="0" i="0" u="none" strike="noStrike" cap="none" normalizeH="0" baseline="0" dirty="0">
                 <a:ln>
                   <a:noFill/>
                 </a:ln>
-                <a:solidFill>
-                  <a:schemeClr val="tx1"/>
-                </a:solidFill>
                 <a:effectLst/>
                 <a:latin typeface="Arial" panose="020B0604020202020204" pitchFamily="34" charset="0"/>
               </a:rPr>
               <a:t> u </a:t>
             </a:r>
             <a:r>
-              <a:rPr kumimoji="0" lang="en-US" altLang="en-US" b="0" i="0" u="none" strike="noStrike" cap="none" normalizeH="0" baseline="0" dirty="0" err="1">
+              <a:rPr kumimoji="0" lang="en-US" altLang="en-US" sz="2000" b="0" i="0" u="none" strike="noStrike" cap="none" normalizeH="0" baseline="0" dirty="0" err="1">
                 <a:ln>
                   <a:noFill/>
                 </a:ln>
-                <a:solidFill>
-                  <a:schemeClr val="tx1"/>
-                </a:solidFill>
                 <a:effectLst/>
                 <a:latin typeface="Arial" panose="020B0604020202020204" pitchFamily="34" charset="0"/>
               </a:rPr>
               <a:t>Pythonu</a:t>
             </a:r>
-            <a:endParaRPr kumimoji="0" lang="en-US" altLang="en-US" b="0" i="0" u="none" strike="noStrike" cap="none" normalizeH="0" baseline="0" dirty="0">
+            <a:endParaRPr kumimoji="0" lang="en-US" altLang="en-US" sz="2000" b="0" i="0" u="none" strike="noStrike" cap="none" normalizeH="0" baseline="0" dirty="0">
               <a:ln>
                 <a:noFill/>
               </a:ln>
-              <a:solidFill>
-                <a:schemeClr val="tx1"/>
-              </a:solidFill>
               <a:effectLst/>
               <a:latin typeface="Arial" panose="020B0604020202020204" pitchFamily="34" charset="0"/>
             </a:endParaRPr>
           </a:p>
           <a:p>
-            <a:pPr marL="0" marR="0" lvl="0" indent="0" algn="l" defTabSz="914400" rtl="0" eaLnBrk="0" fontAlgn="base" latinLnBrk="0" hangingPunct="0">
-              <a:lnSpc>
-                <a:spcPct val="150000"/>
-              </a:lnSpc>
+            <a:pPr marL="0" marR="0" lvl="0" indent="0" defTabSz="914400" rtl="0" eaLnBrk="0" fontAlgn="base" latinLnBrk="0" hangingPunct="0">
               <a:spcBef>
                 <a:spcPct val="0"/>
               </a:spcBef>
               <a:spcAft>
-                <a:spcPct val="0"/>
+                <a:spcPts val="600"/>
               </a:spcAft>
               <a:buClrTx/>
               <a:buSzTx/>
@@ -40925,143 +41010,110 @@
               <a:tabLst/>
             </a:pPr>
             <a:r>
-              <a:rPr kumimoji="0" lang="en-US" altLang="en-US" b="0" i="0" u="none" strike="noStrike" cap="none" normalizeH="0" baseline="0" dirty="0" err="1">
+              <a:rPr kumimoji="0" lang="en-US" altLang="en-US" sz="2000" b="0" i="0" u="none" strike="noStrike" cap="none" normalizeH="0" baseline="0" dirty="0" err="1">
                 <a:ln>
                   <a:noFill/>
                 </a:ln>
-                <a:solidFill>
-                  <a:schemeClr val="tx1"/>
-                </a:solidFill>
                 <a:effectLst/>
                 <a:latin typeface="Arial" panose="020B0604020202020204" pitchFamily="34" charset="0"/>
               </a:rPr>
               <a:t>Koristi</a:t>
             </a:r>
             <a:r>
-              <a:rPr kumimoji="0" lang="en-US" altLang="en-US" b="0" i="0" u="none" strike="noStrike" cap="none" normalizeH="0" baseline="0" dirty="0">
+              <a:rPr kumimoji="0" lang="en-US" altLang="en-US" sz="2000" b="0" i="0" u="none" strike="noStrike" cap="none" normalizeH="0" baseline="0" dirty="0">
                 <a:ln>
                   <a:noFill/>
                 </a:ln>
-                <a:solidFill>
-                  <a:schemeClr val="tx1"/>
-                </a:solidFill>
                 <a:effectLst/>
                 <a:latin typeface="Arial" panose="020B0604020202020204" pitchFamily="34" charset="0"/>
               </a:rPr>
               <a:t> PIL (P</a:t>
             </a:r>
             <a:r>
-              <a:rPr kumimoji="0" lang="hr-HR" altLang="en-US" b="0" i="0" u="none" strike="noStrike" cap="none" normalizeH="0" baseline="0" dirty="0" err="1">
+              <a:rPr kumimoji="0" lang="hr-HR" altLang="en-US" sz="2000" b="0" i="0" u="none" strike="noStrike" cap="none" normalizeH="0" baseline="0" dirty="0" err="1">
                 <a:ln>
                   <a:noFill/>
                 </a:ln>
-                <a:solidFill>
-                  <a:schemeClr val="tx1"/>
-                </a:solidFill>
                 <a:effectLst/>
                 <a:latin typeface="Arial" panose="020B0604020202020204" pitchFamily="34" charset="0"/>
               </a:rPr>
               <a:t>ython</a:t>
             </a:r>
             <a:r>
-              <a:rPr kumimoji="0" lang="hr-HR" altLang="en-US" b="0" i="0" u="none" strike="noStrike" cap="none" normalizeH="0" baseline="0" dirty="0">
+              <a:rPr kumimoji="0" lang="hr-HR" altLang="en-US" sz="2000" b="0" i="0" u="none" strike="noStrike" cap="none" normalizeH="0" baseline="0" dirty="0">
                 <a:ln>
                   <a:noFill/>
                 </a:ln>
-                <a:solidFill>
-                  <a:schemeClr val="tx1"/>
-                </a:solidFill>
                 <a:effectLst/>
                 <a:latin typeface="Arial" panose="020B0604020202020204" pitchFamily="34" charset="0"/>
               </a:rPr>
               <a:t> </a:t>
             </a:r>
             <a:r>
-              <a:rPr kumimoji="0" lang="hr-HR" altLang="en-US" b="0" i="0" u="none" strike="noStrike" cap="none" normalizeH="0" baseline="0" dirty="0" err="1">
+              <a:rPr kumimoji="0" lang="hr-HR" altLang="en-US" sz="2000" b="0" i="0" u="none" strike="noStrike" cap="none" normalizeH="0" baseline="0" dirty="0" err="1">
                 <a:ln>
                   <a:noFill/>
                 </a:ln>
-                <a:solidFill>
-                  <a:schemeClr val="tx1"/>
-                </a:solidFill>
                 <a:effectLst/>
                 <a:latin typeface="Arial" panose="020B0604020202020204" pitchFamily="34" charset="0"/>
               </a:rPr>
               <a:t>Imaging</a:t>
             </a:r>
             <a:r>
-              <a:rPr kumimoji="0" lang="hr-HR" altLang="en-US" b="0" i="0" u="none" strike="noStrike" cap="none" normalizeH="0" baseline="0" dirty="0">
+              <a:rPr kumimoji="0" lang="hr-HR" altLang="en-US" sz="2000" b="0" i="0" u="none" strike="noStrike" cap="none" normalizeH="0" baseline="0" dirty="0">
                 <a:ln>
                   <a:noFill/>
                 </a:ln>
-                <a:solidFill>
-                  <a:schemeClr val="tx1"/>
-                </a:solidFill>
                 <a:effectLst/>
                 <a:latin typeface="Arial" panose="020B0604020202020204" pitchFamily="34" charset="0"/>
               </a:rPr>
               <a:t> </a:t>
             </a:r>
             <a:r>
-              <a:rPr kumimoji="0" lang="hr-HR" altLang="en-US" b="0" i="0" u="none" strike="noStrike" cap="none" normalizeH="0" baseline="0" dirty="0" err="1">
+              <a:rPr kumimoji="0" lang="hr-HR" altLang="en-US" sz="2000" b="0" i="0" u="none" strike="noStrike" cap="none" normalizeH="0" baseline="0" dirty="0" err="1">
                 <a:ln>
                   <a:noFill/>
                 </a:ln>
-                <a:solidFill>
-                  <a:schemeClr val="tx1"/>
-                </a:solidFill>
                 <a:effectLst/>
                 <a:latin typeface="Arial" panose="020B0604020202020204" pitchFamily="34" charset="0"/>
               </a:rPr>
               <a:t>Library</a:t>
             </a:r>
             <a:r>
-              <a:rPr kumimoji="0" lang="en-US" altLang="en-US" b="0" i="0" u="none" strike="noStrike" cap="none" normalizeH="0" baseline="0" dirty="0">
+              <a:rPr kumimoji="0" lang="en-US" altLang="en-US" sz="2000" b="0" i="0" u="none" strike="noStrike" cap="none" normalizeH="0" baseline="0" dirty="0">
                 <a:ln>
                   <a:noFill/>
                 </a:ln>
-                <a:solidFill>
-                  <a:schemeClr val="tx1"/>
-                </a:solidFill>
                 <a:effectLst/>
                 <a:latin typeface="Arial" panose="020B0604020202020204" pitchFamily="34" charset="0"/>
               </a:rPr>
               <a:t>) </a:t>
             </a:r>
             <a:r>
-              <a:rPr kumimoji="0" lang="en-US" altLang="en-US" b="0" i="0" u="none" strike="noStrike" cap="none" normalizeH="0" baseline="0" dirty="0" err="1">
+              <a:rPr kumimoji="0" lang="en-US" altLang="en-US" sz="2000" b="0" i="0" u="none" strike="noStrike" cap="none" normalizeH="0" baseline="0" dirty="0" err="1">
                 <a:ln>
                   <a:noFill/>
                 </a:ln>
-                <a:solidFill>
-                  <a:schemeClr val="tx1"/>
-                </a:solidFill>
                 <a:effectLst/>
                 <a:latin typeface="Arial" panose="020B0604020202020204" pitchFamily="34" charset="0"/>
               </a:rPr>
               <a:t>biblioteku</a:t>
             </a:r>
-            <a:endParaRPr kumimoji="0" lang="en-US" altLang="en-US" b="0" i="0" u="none" strike="noStrike" cap="none" normalizeH="0" baseline="0" dirty="0">
+            <a:endParaRPr kumimoji="0" lang="en-US" altLang="en-US" sz="2000" b="0" i="0" u="none" strike="noStrike" cap="none" normalizeH="0" baseline="0" dirty="0">
               <a:ln>
                 <a:noFill/>
               </a:ln>
-              <a:solidFill>
-                <a:schemeClr val="tx1"/>
-              </a:solidFill>
               <a:effectLst/>
               <a:latin typeface="Arial" panose="020B0604020202020204" pitchFamily="34" charset="0"/>
             </a:endParaRPr>
           </a:p>
           <a:p>
-            <a:pPr marL="0" marR="0" lvl="0" indent="0" algn="l" defTabSz="914400" rtl="0" eaLnBrk="0" fontAlgn="base" latinLnBrk="0" hangingPunct="0">
-              <a:lnSpc>
-                <a:spcPct val="150000"/>
-              </a:lnSpc>
+            <a:pPr marL="0" marR="0" lvl="0" indent="0" defTabSz="914400" rtl="0" eaLnBrk="0" fontAlgn="base" latinLnBrk="0" hangingPunct="0">
               <a:spcBef>
                 <a:spcPct val="0"/>
               </a:spcBef>
               <a:spcAft>
-                <a:spcPct val="0"/>
+                <a:spcPts val="600"/>
               </a:spcAft>
               <a:buClrTx/>
               <a:buSzTx/>
@@ -41070,91 +41122,70 @@
               <a:tabLst/>
             </a:pPr>
             <a:r>
-              <a:rPr kumimoji="0" lang="en-US" altLang="en-US" b="0" i="0" u="none" strike="noStrike" cap="none" normalizeH="0" baseline="0" dirty="0" err="1">
+              <a:rPr kumimoji="0" lang="en-US" altLang="en-US" sz="2000" b="0" i="0" u="none" strike="noStrike" cap="none" normalizeH="0" baseline="0" dirty="0" err="1">
                 <a:ln>
                   <a:noFill/>
                 </a:ln>
-                <a:solidFill>
-                  <a:schemeClr val="tx1"/>
-                </a:solidFill>
                 <a:effectLst/>
                 <a:latin typeface="Arial" panose="020B0604020202020204" pitchFamily="34" charset="0"/>
               </a:rPr>
               <a:t>Algoritamski</a:t>
             </a:r>
             <a:r>
-              <a:rPr kumimoji="0" lang="en-US" altLang="en-US" b="0" i="0" u="none" strike="noStrike" cap="none" normalizeH="0" baseline="0" dirty="0">
+              <a:rPr kumimoji="0" lang="en-US" altLang="en-US" sz="2000" b="0" i="0" u="none" strike="noStrike" cap="none" normalizeH="0" baseline="0" dirty="0">
                 <a:ln>
                   <a:noFill/>
                 </a:ln>
-                <a:solidFill>
-                  <a:schemeClr val="tx1"/>
-                </a:solidFill>
                 <a:effectLst/>
                 <a:latin typeface="Arial" panose="020B0604020202020204" pitchFamily="34" charset="0"/>
               </a:rPr>
               <a:t> </a:t>
             </a:r>
             <a:r>
-              <a:rPr kumimoji="0" lang="en-US" altLang="en-US" b="0" i="0" u="none" strike="noStrike" cap="none" normalizeH="0" baseline="0" dirty="0" err="1">
+              <a:rPr kumimoji="0" lang="en-US" altLang="en-US" sz="2000" b="0" i="0" u="none" strike="noStrike" cap="none" normalizeH="0" baseline="0" dirty="0" err="1">
                 <a:ln>
                   <a:noFill/>
                 </a:ln>
-                <a:solidFill>
-                  <a:schemeClr val="tx1"/>
-                </a:solidFill>
                 <a:effectLst/>
                 <a:latin typeface="Arial" panose="020B0604020202020204" pitchFamily="34" charset="0"/>
               </a:rPr>
               <a:t>generira</a:t>
             </a:r>
             <a:r>
-              <a:rPr kumimoji="0" lang="en-US" altLang="en-US" b="0" i="0" u="none" strike="noStrike" cap="none" normalizeH="0" baseline="0" dirty="0">
+              <a:rPr kumimoji="0" lang="en-US" altLang="en-US" sz="2000" b="0" i="0" u="none" strike="noStrike" cap="none" normalizeH="0" baseline="0" dirty="0">
                 <a:ln>
                   <a:noFill/>
                 </a:ln>
-                <a:solidFill>
-                  <a:schemeClr val="tx1"/>
-                </a:solidFill>
                 <a:effectLst/>
                 <a:latin typeface="Arial" panose="020B0604020202020204" pitchFamily="34" charset="0"/>
               </a:rPr>
               <a:t> Ishihara </a:t>
             </a:r>
             <a:r>
-              <a:rPr kumimoji="0" lang="en-US" altLang="en-US" b="0" i="0" u="none" strike="noStrike" cap="none" normalizeH="0" baseline="0" dirty="0" err="1">
+              <a:rPr kumimoji="0" lang="en-US" altLang="en-US" sz="2000" b="0" i="0" u="none" strike="noStrike" cap="none" normalizeH="0" baseline="0" dirty="0" err="1">
                 <a:ln>
                   <a:noFill/>
                 </a:ln>
-                <a:solidFill>
-                  <a:schemeClr val="tx1"/>
-                </a:solidFill>
                 <a:effectLst/>
                 <a:latin typeface="Arial" panose="020B0604020202020204" pitchFamily="34" charset="0"/>
               </a:rPr>
               <a:t>ploče</a:t>
             </a:r>
-            <a:endParaRPr kumimoji="0" lang="en-US" altLang="en-US" b="0" i="0" u="none" strike="noStrike" cap="none" normalizeH="0" baseline="0" dirty="0">
+            <a:endParaRPr kumimoji="0" lang="en-US" altLang="en-US" sz="2000" b="0" i="0" u="none" strike="noStrike" cap="none" normalizeH="0" baseline="0" dirty="0">
               <a:ln>
                 <a:noFill/>
               </a:ln>
-              <a:solidFill>
-                <a:schemeClr val="tx1"/>
-              </a:solidFill>
               <a:effectLst/>
               <a:latin typeface="Arial" panose="020B0604020202020204" pitchFamily="34" charset="0"/>
             </a:endParaRPr>
           </a:p>
           <a:p>
-            <a:pPr marL="0" marR="0" lvl="0" indent="0" algn="l" defTabSz="914400" rtl="0" eaLnBrk="0" fontAlgn="base" latinLnBrk="0" hangingPunct="0">
-              <a:lnSpc>
-                <a:spcPct val="150000"/>
-              </a:lnSpc>
+            <a:pPr marL="0" marR="0" lvl="0" indent="0" defTabSz="914400" rtl="0" eaLnBrk="0" fontAlgn="base" latinLnBrk="0" hangingPunct="0">
               <a:spcBef>
                 <a:spcPct val="0"/>
               </a:spcBef>
               <a:spcAft>
-                <a:spcPct val="0"/>
+                <a:spcPts val="600"/>
               </a:spcAft>
               <a:buClrTx/>
               <a:buSzTx/>
@@ -41163,161 +41194,2845 @@
               <a:tabLst/>
             </a:pPr>
             <a:r>
-              <a:rPr kumimoji="0" lang="en-US" altLang="en-US" b="0" i="0" u="none" strike="noStrike" cap="none" normalizeH="0" baseline="0" dirty="0" err="1">
+              <a:rPr kumimoji="0" lang="en-US" altLang="en-US" sz="2000" b="0" i="0" u="none" strike="noStrike" cap="none" normalizeH="0" baseline="0" dirty="0" err="1">
                 <a:ln>
                   <a:noFill/>
                 </a:ln>
-                <a:solidFill>
-                  <a:schemeClr val="tx1"/>
-                </a:solidFill>
                 <a:effectLst/>
                 <a:latin typeface="Arial" panose="020B0604020202020204" pitchFamily="34" charset="0"/>
               </a:rPr>
               <a:t>Različite</a:t>
             </a:r>
             <a:r>
-              <a:rPr kumimoji="0" lang="en-US" altLang="en-US" b="0" i="0" u="none" strike="noStrike" cap="none" normalizeH="0" baseline="0" dirty="0">
+              <a:rPr kumimoji="0" lang="en-US" altLang="en-US" sz="2000" b="0" i="0" u="none" strike="noStrike" cap="none" normalizeH="0" baseline="0" dirty="0">
                 <a:ln>
                   <a:noFill/>
                 </a:ln>
-                <a:solidFill>
-                  <a:schemeClr val="tx1"/>
-                </a:solidFill>
                 <a:effectLst/>
                 <a:latin typeface="Arial" panose="020B0604020202020204" pitchFamily="34" charset="0"/>
               </a:rPr>
               <a:t> </a:t>
             </a:r>
             <a:r>
-              <a:rPr kumimoji="0" lang="en-US" altLang="en-US" b="0" i="0" u="none" strike="noStrike" cap="none" normalizeH="0" baseline="0" dirty="0" err="1">
+              <a:rPr kumimoji="0" lang="en-US" altLang="en-US" sz="2000" b="0" i="0" u="none" strike="noStrike" cap="none" normalizeH="0" baseline="0" dirty="0" err="1">
                 <a:ln>
                   <a:noFill/>
                 </a:ln>
-                <a:solidFill>
-                  <a:schemeClr val="tx1"/>
-                </a:solidFill>
                 <a:effectLst/>
                 <a:latin typeface="Arial" panose="020B0604020202020204" pitchFamily="34" charset="0"/>
               </a:rPr>
               <a:t>palete</a:t>
             </a:r>
             <a:r>
-              <a:rPr kumimoji="0" lang="en-US" altLang="en-US" b="0" i="0" u="none" strike="noStrike" cap="none" normalizeH="0" baseline="0" dirty="0">
+              <a:rPr kumimoji="0" lang="en-US" altLang="en-US" sz="2000" b="0" i="0" u="none" strike="noStrike" cap="none" normalizeH="0" baseline="0" dirty="0">
                 <a:ln>
                   <a:noFill/>
                 </a:ln>
-                <a:solidFill>
-                  <a:schemeClr val="tx1"/>
-                </a:solidFill>
                 <a:effectLst/>
                 <a:latin typeface="Arial" panose="020B0604020202020204" pitchFamily="34" charset="0"/>
               </a:rPr>
               <a:t> </a:t>
             </a:r>
             <a:r>
-              <a:rPr kumimoji="0" lang="en-US" altLang="en-US" b="0" i="0" u="none" strike="noStrike" cap="none" normalizeH="0" baseline="0" dirty="0" err="1">
+              <a:rPr kumimoji="0" lang="en-US" altLang="en-US" sz="2000" b="0" i="0" u="none" strike="noStrike" cap="none" normalizeH="0" baseline="0" dirty="0" err="1">
                 <a:ln>
                   <a:noFill/>
                 </a:ln>
-                <a:solidFill>
-                  <a:schemeClr val="tx1"/>
-                </a:solidFill>
                 <a:effectLst/>
                 <a:latin typeface="Arial" panose="020B0604020202020204" pitchFamily="34" charset="0"/>
               </a:rPr>
               <a:t>boja</a:t>
             </a:r>
             <a:r>
-              <a:rPr kumimoji="0" lang="en-US" altLang="en-US" b="0" i="0" u="none" strike="noStrike" cap="none" normalizeH="0" baseline="0" dirty="0">
+              <a:rPr kumimoji="0" lang="en-US" altLang="en-US" sz="2000" b="0" i="0" u="none" strike="noStrike" cap="none" normalizeH="0" baseline="0" dirty="0">
                 <a:ln>
                   <a:noFill/>
                 </a:ln>
-                <a:solidFill>
-                  <a:schemeClr val="tx1"/>
-                </a:solidFill>
                 <a:effectLst/>
                 <a:latin typeface="Arial" panose="020B0604020202020204" pitchFamily="34" charset="0"/>
               </a:rPr>
               <a:t> za </a:t>
             </a:r>
             <a:r>
-              <a:rPr kumimoji="0" lang="en-US" altLang="en-US" b="0" i="0" u="none" strike="noStrike" cap="none" normalizeH="0" baseline="0" dirty="0" err="1">
+              <a:rPr kumimoji="0" lang="en-US" altLang="en-US" sz="2000" b="0" i="0" u="none" strike="noStrike" cap="none" normalizeH="0" baseline="0" dirty="0" err="1">
                 <a:ln>
                   <a:noFill/>
                 </a:ln>
-                <a:solidFill>
-                  <a:schemeClr val="tx1"/>
-                </a:solidFill>
                 <a:effectLst/>
                 <a:latin typeface="Arial" panose="020B0604020202020204" pitchFamily="34" charset="0"/>
               </a:rPr>
               <a:t>različite</a:t>
             </a:r>
             <a:r>
-              <a:rPr kumimoji="0" lang="en-US" altLang="en-US" b="0" i="0" u="none" strike="noStrike" cap="none" normalizeH="0" baseline="0" dirty="0">
+              <a:rPr kumimoji="0" lang="en-US" altLang="en-US" sz="2000" b="0" i="0" u="none" strike="noStrike" cap="none" normalizeH="0" baseline="0" dirty="0">
                 <a:ln>
                   <a:noFill/>
                 </a:ln>
-                <a:solidFill>
-                  <a:schemeClr val="tx1"/>
-                </a:solidFill>
                 <a:effectLst/>
                 <a:latin typeface="Arial" panose="020B0604020202020204" pitchFamily="34" charset="0"/>
               </a:rPr>
               <a:t> </a:t>
             </a:r>
             <a:r>
-              <a:rPr kumimoji="0" lang="en-US" altLang="en-US" b="0" i="0" u="none" strike="noStrike" cap="none" normalizeH="0" baseline="0" dirty="0" err="1">
+              <a:rPr kumimoji="0" lang="en-US" altLang="en-US" sz="2000" b="0" i="0" u="none" strike="noStrike" cap="none" normalizeH="0" baseline="0" dirty="0" err="1">
                 <a:ln>
                   <a:noFill/>
                 </a:ln>
-                <a:solidFill>
-                  <a:schemeClr val="tx1"/>
-                </a:solidFill>
                 <a:effectLst/>
                 <a:latin typeface="Arial" panose="020B0604020202020204" pitchFamily="34" charset="0"/>
               </a:rPr>
               <a:t>tipove</a:t>
             </a:r>
             <a:r>
-              <a:rPr kumimoji="0" lang="en-US" altLang="en-US" b="0" i="0" u="none" strike="noStrike" cap="none" normalizeH="0" baseline="0" dirty="0">
+              <a:rPr kumimoji="0" lang="en-US" altLang="en-US" sz="2000" b="0" i="0" u="none" strike="noStrike" cap="none" normalizeH="0" baseline="0" dirty="0">
                 <a:ln>
                   <a:noFill/>
                 </a:ln>
-                <a:solidFill>
-                  <a:schemeClr val="tx1"/>
-                </a:solidFill>
                 <a:effectLst/>
                 <a:latin typeface="Arial" panose="020B0604020202020204" pitchFamily="34" charset="0"/>
               </a:rPr>
               <a:t> </a:t>
             </a:r>
             <a:r>
-              <a:rPr kumimoji="0" lang="en-US" altLang="en-US" b="0" i="0" u="none" strike="noStrike" cap="none" normalizeH="0" baseline="0" dirty="0" err="1">
+              <a:rPr kumimoji="0" lang="en-US" altLang="en-US" sz="2000" b="0" i="0" u="none" strike="noStrike" cap="none" normalizeH="0" baseline="0" dirty="0" err="1">
                 <a:ln>
                   <a:noFill/>
                 </a:ln>
-                <a:solidFill>
-                  <a:schemeClr val="tx1"/>
-                </a:solidFill>
                 <a:effectLst/>
                 <a:latin typeface="Arial" panose="020B0604020202020204" pitchFamily="34" charset="0"/>
               </a:rPr>
               <a:t>daltonizma</a:t>
             </a:r>
-            <a:endParaRPr kumimoji="0" lang="en-US" altLang="en-US" b="0" i="0" u="none" strike="noStrike" cap="none" normalizeH="0" baseline="0" dirty="0">
+            <a:endParaRPr kumimoji="0" lang="hr-HR" altLang="en-US" sz="2000" b="0" i="0" u="none" strike="noStrike" cap="none" normalizeH="0" baseline="0" dirty="0">
               <a:ln>
                 <a:noFill/>
               </a:ln>
-              <a:solidFill>
-                <a:schemeClr val="tx1"/>
-              </a:solidFill>
+              <a:effectLst/>
+              <a:latin typeface="Arial" panose="020B0604020202020204" pitchFamily="34" charset="0"/>
+            </a:endParaRPr>
+          </a:p>
+          <a:p>
+            <a:pPr marL="0" marR="0" lvl="0" indent="0" defTabSz="914400" rtl="0" eaLnBrk="0" fontAlgn="base" latinLnBrk="0" hangingPunct="0">
+              <a:spcBef>
+                <a:spcPct val="0"/>
+              </a:spcBef>
+              <a:spcAft>
+                <a:spcPts val="600"/>
+              </a:spcAft>
+              <a:buClrTx/>
+              <a:buSzTx/>
+              <a:buFontTx/>
+              <a:buChar char="•"/>
+              <a:tabLst/>
+            </a:pPr>
+            <a:r>
+              <a:rPr lang="hr-HR" altLang="en-US" sz="2000" dirty="0">
+                <a:latin typeface="Arial" panose="020B0604020202020204" pitchFamily="34" charset="0"/>
+              </a:rPr>
+              <a:t>Novija verzija pretvorena iz Python u </a:t>
+            </a:r>
+            <a:r>
+              <a:rPr lang="hr-HR" altLang="en-US" sz="2000" dirty="0" err="1">
+                <a:latin typeface="Arial" panose="020B0604020202020204" pitchFamily="34" charset="0"/>
+              </a:rPr>
+              <a:t>WebView</a:t>
+            </a:r>
+            <a:r>
+              <a:rPr lang="hr-HR" altLang="en-US" sz="2000" dirty="0">
+                <a:latin typeface="Arial" panose="020B0604020202020204" pitchFamily="34" charset="0"/>
+              </a:rPr>
+              <a:t> za lakše uklapanje</a:t>
+            </a:r>
+            <a:endParaRPr kumimoji="0" lang="en-US" altLang="en-US" sz="2000" b="0" i="0" u="none" strike="noStrike" cap="none" normalizeH="0" baseline="0" dirty="0">
+              <a:ln>
+                <a:noFill/>
+              </a:ln>
               <a:effectLst/>
               <a:latin typeface="Arial" panose="020B0604020202020204" pitchFamily="34" charset="0"/>
             </a:endParaRPr>
           </a:p>
         </p:txBody>
       </p:sp>
+      <p:pic>
+        <p:nvPicPr>
+          <p:cNvPr id="1026" name="Picture 2" descr="Python (programming language) - Wikipedia">
+            <a:extLst>
+              <a:ext uri="{FF2B5EF4-FFF2-40B4-BE49-F238E27FC236}">
+                <a16:creationId xmlns:a16="http://schemas.microsoft.com/office/drawing/2014/main" id="{3D9E59A5-3EF2-59C1-FF6E-512DC0680A58}"/>
+              </a:ext>
+            </a:extLst>
+          </p:cNvPr>
+          <p:cNvPicPr>
+            <a:picLocks noChangeAspect="1" noChangeArrowheads="1"/>
+          </p:cNvPicPr>
+          <p:nvPr/>
+        </p:nvPicPr>
+        <p:blipFill>
+          <a:blip r:embed="rId4">
+            <a:extLst>
+              <a:ext uri="{28A0092B-C50C-407E-A947-70E740481C1C}">
+                <a14:useLocalDpi xmlns:a14="http://schemas.microsoft.com/office/drawing/2010/main" val="0"/>
+              </a:ext>
+            </a:extLst>
+          </a:blip>
+          <a:stretch>
+            <a:fillRect/>
+          </a:stretch>
+        </p:blipFill>
+        <p:spPr bwMode="auto">
+          <a:xfrm>
+            <a:off x="6096000" y="688386"/>
+            <a:ext cx="5456279" cy="5456279"/>
+          </a:xfrm>
+          <a:prstGeom prst="round2DiagRect">
+            <a:avLst>
+              <a:gd name="adj1" fmla="val 5608"/>
+              <a:gd name="adj2" fmla="val 0"/>
+            </a:avLst>
+          </a:prstGeom>
+          <a:noFill/>
+          <a:ln w="19050" cap="sq">
+            <a:solidFill>
+              <a:schemeClr val="tx2">
+                <a:lumMod val="60000"/>
+                <a:lumOff val="40000"/>
+                <a:alpha val="60000"/>
+              </a:schemeClr>
+            </a:solidFill>
+            <a:miter lim="800000"/>
+          </a:ln>
+          <a:effectLst>
+            <a:outerShdw blurRad="88900" dist="38100" dir="5400000" algn="t" rotWithShape="0">
+              <a:prstClr val="black">
+                <a:alpha val="40000"/>
+              </a:prstClr>
+            </a:outerShdw>
+          </a:effectLst>
+          <a:extLst>
+            <a:ext uri="{909E8E84-426E-40DD-AFC4-6F175D3DCCD1}">
+              <a14:hiddenFill xmlns:a14="http://schemas.microsoft.com/office/drawing/2010/main">
+                <a:solidFill>
+                  <a:srgbClr val="FFFFFF"/>
+                </a:solidFill>
+              </a14:hiddenFill>
+            </a:ext>
+          </a:extLst>
+        </p:spPr>
+      </p:pic>
+      <p:grpSp>
+        <p:nvGrpSpPr>
+          <p:cNvPr id="1035" name="Group 1034">
+            <a:extLst>
+              <a:ext uri="{FF2B5EF4-FFF2-40B4-BE49-F238E27FC236}">
+                <a16:creationId xmlns:a16="http://schemas.microsoft.com/office/drawing/2014/main" id="{453E4DEE-E996-40F8-8635-0FF43D7348F9}"/>
+              </a:ext>
+              <a:ext uri="{C183D7F6-B498-43B3-948B-1728B52AA6E4}">
+                <adec:decorative xmlns:adec="http://schemas.microsoft.com/office/drawing/2017/decorative" val="1"/>
+              </a:ext>
+            </a:extLst>
+          </p:cNvPr>
+          <p:cNvGrpSpPr>
+            <a:grpSpLocks noGrp="1" noUngrp="1" noRot="1" noChangeAspect="1" noMove="1" noResize="1"/>
+          </p:cNvGrpSpPr>
+          <p:nvPr>
+            <p:extLst>
+              <p:ext uri="{386F3935-93C4-4BCD-93E2-E3B085C9AB24}">
+                <p16:designElem xmlns:p16="http://schemas.microsoft.com/office/powerpoint/2015/main" val="1"/>
+              </p:ext>
+            </p:extLst>
+          </p:nvPr>
+        </p:nvGrpSpPr>
+        <p:grpSpPr>
+          <a:xfrm>
+            <a:off x="0" y="0"/>
+            <a:ext cx="1220788" cy="6858001"/>
+            <a:chOff x="-14288" y="0"/>
+            <a:chExt cx="1220788" cy="6858001"/>
+          </a:xfrm>
+          <a:gradFill flip="none" rotWithShape="1">
+            <a:gsLst>
+              <a:gs pos="0">
+                <a:schemeClr val="tx2"/>
+              </a:gs>
+              <a:gs pos="100000">
+                <a:schemeClr val="bg2">
+                  <a:lumMod val="60000"/>
+                  <a:lumOff val="40000"/>
+                </a:schemeClr>
+              </a:gs>
+            </a:gsLst>
+            <a:lin ang="5400000" scaled="0"/>
+            <a:tileRect/>
+          </a:gradFill>
+        </p:grpSpPr>
+        <p:sp>
+          <p:nvSpPr>
+            <p:cNvPr id="1036" name="Rectangle 5">
+              <a:extLst>
+                <a:ext uri="{FF2B5EF4-FFF2-40B4-BE49-F238E27FC236}">
+                  <a16:creationId xmlns:a16="http://schemas.microsoft.com/office/drawing/2014/main" id="{08BD1D3E-43CE-49EB-A424-0738950C6424}"/>
+                </a:ext>
+                <a:ext uri="{C183D7F6-B498-43B3-948B-1728B52AA6E4}">
+                  <adec:decorative xmlns:adec="http://schemas.microsoft.com/office/drawing/2017/decorative" val="1"/>
+                </a:ext>
+              </a:extLst>
+            </p:cNvPr>
+            <p:cNvSpPr>
+              <a:spLocks noChangeArrowheads="1"/>
+            </p:cNvSpPr>
+            <p:nvPr>
+              <p:extLst>
+                <p:ext uri="{386F3935-93C4-4BCD-93E2-E3B085C9AB24}">
+                  <p16:designElem xmlns:p16="http://schemas.microsoft.com/office/powerpoint/2015/main" val="1"/>
+                </p:ext>
+              </p:extLst>
+            </p:nvPr>
+          </p:nvSpPr>
+          <p:spPr bwMode="auto">
+            <a:xfrm>
+              <a:off x="114300" y="4763"/>
+              <a:ext cx="23813" cy="2181225"/>
+            </a:xfrm>
+            <a:prstGeom prst="rect">
+              <a:avLst/>
+            </a:prstGeom>
+            <a:grpFill/>
+            <a:ln>
+              <a:noFill/>
+            </a:ln>
+            <a:extLst>
+              <a:ext uri="{91240B29-F687-4f45-9708-019B960494DF}">
+                <a14:hiddenLine xmlns="" xmlns:a16="http://schemas.microsoft.com/office/drawing/2014/main" xmlns:p14="http://schemas.microsoft.com/office/powerpoint/2010/main" xmlns:a14="http://schemas.microsoft.com/office/drawing/2010/main" w="9525">
+                  <a:solidFill>
+                    <a:srgbClr val="000000"/>
+                  </a:solidFill>
+                  <a:miter lim="800000"/>
+                  <a:headEnd/>
+                  <a:tailEnd/>
+                </a14:hiddenLine>
+              </a:ext>
+            </a:extLst>
+          </p:spPr>
+          <p:txBody>
+            <a:bodyPr/>
+            <a:lstStyle/>
+            <a:p>
+              <a:endParaRPr lang="en-US"/>
+            </a:p>
+          </p:txBody>
+        </p:sp>
+        <p:sp>
+          <p:nvSpPr>
+            <p:cNvPr id="1037" name="Freeform 6">
+              <a:extLst>
+                <a:ext uri="{FF2B5EF4-FFF2-40B4-BE49-F238E27FC236}">
+                  <a16:creationId xmlns:a16="http://schemas.microsoft.com/office/drawing/2014/main" id="{E9182037-E3FA-489A-95D5-29E4248420D8}"/>
+                </a:ext>
+                <a:ext uri="{C183D7F6-B498-43B3-948B-1728B52AA6E4}">
+                  <adec:decorative xmlns:adec="http://schemas.microsoft.com/office/drawing/2017/decorative" val="1"/>
+                </a:ext>
+              </a:extLst>
+            </p:cNvPr>
+            <p:cNvSpPr>
+              <a:spLocks noEditPoints="1"/>
+            </p:cNvSpPr>
+            <p:nvPr>
+              <p:extLst>
+                <p:ext uri="{386F3935-93C4-4BCD-93E2-E3B085C9AB24}">
+                  <p16:designElem xmlns:p16="http://schemas.microsoft.com/office/powerpoint/2015/main" val="1"/>
+                </p:ext>
+              </p:extLst>
+            </p:nvPr>
+          </p:nvSpPr>
+          <p:spPr bwMode="auto">
+            <a:xfrm>
+              <a:off x="33337" y="2176463"/>
+              <a:ext cx="190500" cy="190500"/>
+            </a:xfrm>
+            <a:custGeom>
+              <a:avLst/>
+              <a:gdLst/>
+              <a:ahLst/>
+              <a:cxnLst/>
+              <a:rect l="0" t="0" r="r" b="b"/>
+              <a:pathLst>
+                <a:path w="40" h="40">
+                  <a:moveTo>
+                    <a:pt x="20" y="40"/>
+                  </a:moveTo>
+                  <a:cubicBezTo>
+                    <a:pt x="9" y="40"/>
+                    <a:pt x="0" y="31"/>
+                    <a:pt x="0" y="20"/>
+                  </a:cubicBezTo>
+                  <a:cubicBezTo>
+                    <a:pt x="0" y="9"/>
+                    <a:pt x="9" y="0"/>
+                    <a:pt x="20" y="0"/>
+                  </a:cubicBezTo>
+                  <a:cubicBezTo>
+                    <a:pt x="31" y="0"/>
+                    <a:pt x="40" y="9"/>
+                    <a:pt x="40" y="20"/>
+                  </a:cubicBezTo>
+                  <a:cubicBezTo>
+                    <a:pt x="40" y="31"/>
+                    <a:pt x="31" y="40"/>
+                    <a:pt x="20" y="40"/>
+                  </a:cubicBezTo>
+                  <a:close/>
+                  <a:moveTo>
+                    <a:pt x="20" y="4"/>
+                  </a:moveTo>
+                  <a:cubicBezTo>
+                    <a:pt x="11" y="4"/>
+                    <a:pt x="4" y="11"/>
+                    <a:pt x="4" y="20"/>
+                  </a:cubicBezTo>
+                  <a:cubicBezTo>
+                    <a:pt x="4" y="29"/>
+                    <a:pt x="11" y="36"/>
+                    <a:pt x="20" y="36"/>
+                  </a:cubicBezTo>
+                  <a:cubicBezTo>
+                    <a:pt x="28" y="36"/>
+                    <a:pt x="36" y="29"/>
+                    <a:pt x="36" y="20"/>
+                  </a:cubicBezTo>
+                  <a:cubicBezTo>
+                    <a:pt x="36" y="11"/>
+                    <a:pt x="28" y="4"/>
+                    <a:pt x="20" y="4"/>
+                  </a:cubicBezTo>
+                  <a:close/>
+                </a:path>
+              </a:pathLst>
+            </a:custGeom>
+            <a:grpFill/>
+            <a:ln>
+              <a:noFill/>
+            </a:ln>
+            <a:extLst>
+              <a:ext uri="{91240B29-F687-4f45-9708-019B960494DF}">
+                <a14:hiddenLine xmlns="" xmlns:a16="http://schemas.microsoft.com/office/drawing/2014/main" xmlns:p14="http://schemas.microsoft.com/office/powerpoint/2010/main" xmlns:a14="http://schemas.microsoft.com/office/drawing/2010/main" w="9525">
+                  <a:solidFill>
+                    <a:srgbClr val="000000"/>
+                  </a:solidFill>
+                  <a:round/>
+                  <a:headEnd/>
+                  <a:tailEnd/>
+                </a14:hiddenLine>
+              </a:ext>
+            </a:extLst>
+          </p:spPr>
+          <p:txBody>
+            <a:bodyPr/>
+            <a:lstStyle/>
+            <a:p>
+              <a:endParaRPr lang="en-US"/>
+            </a:p>
+          </p:txBody>
+        </p:sp>
+        <p:sp>
+          <p:nvSpPr>
+            <p:cNvPr id="1038" name="Freeform 7">
+              <a:extLst>
+                <a:ext uri="{FF2B5EF4-FFF2-40B4-BE49-F238E27FC236}">
+                  <a16:creationId xmlns:a16="http://schemas.microsoft.com/office/drawing/2014/main" id="{E8864E76-AD7F-4BEE-B3F6-A78FA42AEFAC}"/>
+                </a:ext>
+                <a:ext uri="{C183D7F6-B498-43B3-948B-1728B52AA6E4}">
+                  <adec:decorative xmlns:adec="http://schemas.microsoft.com/office/drawing/2017/decorative" val="1"/>
+                </a:ext>
+              </a:extLst>
+            </p:cNvPr>
+            <p:cNvSpPr>
+              <a:spLocks noEditPoints="1"/>
+            </p:cNvSpPr>
+            <p:nvPr>
+              <p:extLst>
+                <p:ext uri="{386F3935-93C4-4BCD-93E2-E3B085C9AB24}">
+                  <p16:designElem xmlns:p16="http://schemas.microsoft.com/office/powerpoint/2015/main" val="1"/>
+                </p:ext>
+              </p:extLst>
+            </p:nvPr>
+          </p:nvSpPr>
+          <p:spPr bwMode="auto">
+            <a:xfrm>
+              <a:off x="28575" y="4021138"/>
+              <a:ext cx="190500" cy="188913"/>
+            </a:xfrm>
+            <a:custGeom>
+              <a:avLst/>
+              <a:gdLst/>
+              <a:ahLst/>
+              <a:cxnLst/>
+              <a:rect l="0" t="0" r="r" b="b"/>
+              <a:pathLst>
+                <a:path w="40" h="40">
+                  <a:moveTo>
+                    <a:pt x="20" y="40"/>
+                  </a:moveTo>
+                  <a:cubicBezTo>
+                    <a:pt x="9" y="40"/>
+                    <a:pt x="0" y="31"/>
+                    <a:pt x="0" y="20"/>
+                  </a:cubicBezTo>
+                  <a:cubicBezTo>
+                    <a:pt x="0" y="9"/>
+                    <a:pt x="9" y="0"/>
+                    <a:pt x="20" y="0"/>
+                  </a:cubicBezTo>
+                  <a:cubicBezTo>
+                    <a:pt x="31" y="0"/>
+                    <a:pt x="40" y="9"/>
+                    <a:pt x="40" y="20"/>
+                  </a:cubicBezTo>
+                  <a:cubicBezTo>
+                    <a:pt x="40" y="31"/>
+                    <a:pt x="31" y="40"/>
+                    <a:pt x="20" y="40"/>
+                  </a:cubicBezTo>
+                  <a:close/>
+                  <a:moveTo>
+                    <a:pt x="20" y="4"/>
+                  </a:moveTo>
+                  <a:cubicBezTo>
+                    <a:pt x="12" y="4"/>
+                    <a:pt x="4" y="11"/>
+                    <a:pt x="4" y="20"/>
+                  </a:cubicBezTo>
+                  <a:cubicBezTo>
+                    <a:pt x="4" y="29"/>
+                    <a:pt x="12" y="36"/>
+                    <a:pt x="20" y="36"/>
+                  </a:cubicBezTo>
+                  <a:cubicBezTo>
+                    <a:pt x="29" y="36"/>
+                    <a:pt x="36" y="29"/>
+                    <a:pt x="36" y="20"/>
+                  </a:cubicBezTo>
+                  <a:cubicBezTo>
+                    <a:pt x="36" y="11"/>
+                    <a:pt x="29" y="4"/>
+                    <a:pt x="20" y="4"/>
+                  </a:cubicBezTo>
+                  <a:close/>
+                </a:path>
+              </a:pathLst>
+            </a:custGeom>
+            <a:grpFill/>
+            <a:ln>
+              <a:noFill/>
+            </a:ln>
+            <a:extLst>
+              <a:ext uri="{91240B29-F687-4f45-9708-019B960494DF}">
+                <a14:hiddenLine xmlns="" xmlns:a16="http://schemas.microsoft.com/office/drawing/2014/main" xmlns:p14="http://schemas.microsoft.com/office/powerpoint/2010/main" xmlns:a14="http://schemas.microsoft.com/office/drawing/2010/main" w="9525">
+                  <a:solidFill>
+                    <a:srgbClr val="000000"/>
+                  </a:solidFill>
+                  <a:round/>
+                  <a:headEnd/>
+                  <a:tailEnd/>
+                </a14:hiddenLine>
+              </a:ext>
+            </a:extLst>
+          </p:spPr>
+          <p:txBody>
+            <a:bodyPr/>
+            <a:lstStyle/>
+            <a:p>
+              <a:endParaRPr lang="en-US"/>
+            </a:p>
+          </p:txBody>
+        </p:sp>
+        <p:sp>
+          <p:nvSpPr>
+            <p:cNvPr id="1039" name="Freeform 8">
+              <a:extLst>
+                <a:ext uri="{FF2B5EF4-FFF2-40B4-BE49-F238E27FC236}">
+                  <a16:creationId xmlns:a16="http://schemas.microsoft.com/office/drawing/2014/main" id="{8AD071B3-046D-4479-91FE-01E9AD7C8AAB}"/>
+                </a:ext>
+                <a:ext uri="{C183D7F6-B498-43B3-948B-1728B52AA6E4}">
+                  <adec:decorative xmlns:adec="http://schemas.microsoft.com/office/drawing/2017/decorative" val="1"/>
+                </a:ext>
+              </a:extLst>
+            </p:cNvPr>
+            <p:cNvSpPr/>
+            <p:nvPr>
+              <p:extLst>
+                <p:ext uri="{386F3935-93C4-4BCD-93E2-E3B085C9AB24}">
+                  <p16:designElem xmlns:p16="http://schemas.microsoft.com/office/powerpoint/2015/main" val="1"/>
+                </p:ext>
+              </p:extLst>
+            </p:nvPr>
+          </p:nvSpPr>
+          <p:spPr bwMode="auto">
+            <a:xfrm>
+              <a:off x="200025" y="4763"/>
+              <a:ext cx="369888" cy="1811338"/>
+            </a:xfrm>
+            <a:custGeom>
+              <a:avLst/>
+              <a:gdLst/>
+              <a:ahLst/>
+              <a:cxnLst/>
+              <a:rect l="0" t="0" r="r" b="b"/>
+              <a:pathLst>
+                <a:path w="233" h="1141">
+                  <a:moveTo>
+                    <a:pt x="218" y="1141"/>
+                  </a:moveTo>
+                  <a:lnTo>
+                    <a:pt x="0" y="626"/>
+                  </a:lnTo>
+                  <a:lnTo>
+                    <a:pt x="0" y="0"/>
+                  </a:lnTo>
+                  <a:lnTo>
+                    <a:pt x="15" y="0"/>
+                  </a:lnTo>
+                  <a:lnTo>
+                    <a:pt x="15" y="623"/>
+                  </a:lnTo>
+                  <a:lnTo>
+                    <a:pt x="233" y="1135"/>
+                  </a:lnTo>
+                  <a:lnTo>
+                    <a:pt x="218" y="1141"/>
+                  </a:lnTo>
+                  <a:close/>
+                </a:path>
+              </a:pathLst>
+            </a:custGeom>
+            <a:grpFill/>
+            <a:ln>
+              <a:noFill/>
+            </a:ln>
+            <a:extLst>
+              <a:ext uri="{91240B29-F687-4f45-9708-019B960494DF}">
+                <a14:hiddenLine xmlns="" xmlns:a16="http://schemas.microsoft.com/office/drawing/2014/main" xmlns:p14="http://schemas.microsoft.com/office/powerpoint/2010/main" xmlns:a14="http://schemas.microsoft.com/office/drawing/2010/main" w="9525">
+                  <a:solidFill>
+                    <a:srgbClr val="000000"/>
+                  </a:solidFill>
+                  <a:round/>
+                  <a:headEnd/>
+                  <a:tailEnd/>
+                </a14:hiddenLine>
+              </a:ext>
+            </a:extLst>
+          </p:spPr>
+          <p:txBody>
+            <a:bodyPr/>
+            <a:lstStyle/>
+            <a:p>
+              <a:endParaRPr lang="en-US"/>
+            </a:p>
+          </p:txBody>
+        </p:sp>
+        <p:sp>
+          <p:nvSpPr>
+            <p:cNvPr id="1040" name="Freeform 9">
+              <a:extLst>
+                <a:ext uri="{FF2B5EF4-FFF2-40B4-BE49-F238E27FC236}">
+                  <a16:creationId xmlns:a16="http://schemas.microsoft.com/office/drawing/2014/main" id="{91D776F5-E902-4A4D-A75D-A46E063C9F38}"/>
+                </a:ext>
+                <a:ext uri="{C183D7F6-B498-43B3-948B-1728B52AA6E4}">
+                  <adec:decorative xmlns:adec="http://schemas.microsoft.com/office/drawing/2017/decorative" val="1"/>
+                </a:ext>
+              </a:extLst>
+            </p:cNvPr>
+            <p:cNvSpPr>
+              <a:spLocks noEditPoints="1"/>
+            </p:cNvSpPr>
+            <p:nvPr>
+              <p:extLst>
+                <p:ext uri="{386F3935-93C4-4BCD-93E2-E3B085C9AB24}">
+                  <p16:designElem xmlns:p16="http://schemas.microsoft.com/office/powerpoint/2015/main" val="1"/>
+                </p:ext>
+              </p:extLst>
+            </p:nvPr>
+          </p:nvSpPr>
+          <p:spPr bwMode="auto">
+            <a:xfrm>
+              <a:off x="503237" y="1801813"/>
+              <a:ext cx="190500" cy="188913"/>
+            </a:xfrm>
+            <a:custGeom>
+              <a:avLst/>
+              <a:gdLst/>
+              <a:ahLst/>
+              <a:cxnLst/>
+              <a:rect l="0" t="0" r="r" b="b"/>
+              <a:pathLst>
+                <a:path w="40" h="40">
+                  <a:moveTo>
+                    <a:pt x="20" y="40"/>
+                  </a:moveTo>
+                  <a:cubicBezTo>
+                    <a:pt x="9" y="40"/>
+                    <a:pt x="0" y="31"/>
+                    <a:pt x="0" y="20"/>
+                  </a:cubicBezTo>
+                  <a:cubicBezTo>
+                    <a:pt x="0" y="9"/>
+                    <a:pt x="9" y="0"/>
+                    <a:pt x="20" y="0"/>
+                  </a:cubicBezTo>
+                  <a:cubicBezTo>
+                    <a:pt x="33" y="0"/>
+                    <a:pt x="40" y="6"/>
+                    <a:pt x="40" y="20"/>
+                  </a:cubicBezTo>
+                  <a:cubicBezTo>
+                    <a:pt x="40" y="31"/>
+                    <a:pt x="31" y="40"/>
+                    <a:pt x="20" y="40"/>
+                  </a:cubicBezTo>
+                  <a:close/>
+                  <a:moveTo>
+                    <a:pt x="20" y="4"/>
+                  </a:moveTo>
+                  <a:cubicBezTo>
+                    <a:pt x="11" y="4"/>
+                    <a:pt x="4" y="11"/>
+                    <a:pt x="4" y="20"/>
+                  </a:cubicBezTo>
+                  <a:cubicBezTo>
+                    <a:pt x="4" y="29"/>
+                    <a:pt x="11" y="36"/>
+                    <a:pt x="20" y="36"/>
+                  </a:cubicBezTo>
+                  <a:cubicBezTo>
+                    <a:pt x="28" y="36"/>
+                    <a:pt x="36" y="29"/>
+                    <a:pt x="36" y="20"/>
+                  </a:cubicBezTo>
+                  <a:cubicBezTo>
+                    <a:pt x="36" y="9"/>
+                    <a:pt x="31" y="4"/>
+                    <a:pt x="20" y="4"/>
+                  </a:cubicBezTo>
+                  <a:close/>
+                </a:path>
+              </a:pathLst>
+            </a:custGeom>
+            <a:grpFill/>
+            <a:ln>
+              <a:noFill/>
+            </a:ln>
+            <a:extLst>
+              <a:ext uri="{91240B29-F687-4f45-9708-019B960494DF}">
+                <a14:hiddenLine xmlns="" xmlns:a16="http://schemas.microsoft.com/office/drawing/2014/main" xmlns:p14="http://schemas.microsoft.com/office/powerpoint/2010/main" xmlns:a14="http://schemas.microsoft.com/office/drawing/2010/main" w="9525">
+                  <a:solidFill>
+                    <a:srgbClr val="000000"/>
+                  </a:solidFill>
+                  <a:round/>
+                  <a:headEnd/>
+                  <a:tailEnd/>
+                </a14:hiddenLine>
+              </a:ext>
+            </a:extLst>
+          </p:spPr>
+          <p:txBody>
+            <a:bodyPr/>
+            <a:lstStyle/>
+            <a:p>
+              <a:endParaRPr lang="en-US"/>
+            </a:p>
+          </p:txBody>
+        </p:sp>
+        <p:sp>
+          <p:nvSpPr>
+            <p:cNvPr id="1041" name="Freeform 10">
+              <a:extLst>
+                <a:ext uri="{FF2B5EF4-FFF2-40B4-BE49-F238E27FC236}">
+                  <a16:creationId xmlns:a16="http://schemas.microsoft.com/office/drawing/2014/main" id="{EBED8F24-A998-4952-AB68-E2074F0746FE}"/>
+                </a:ext>
+                <a:ext uri="{C183D7F6-B498-43B3-948B-1728B52AA6E4}">
+                  <adec:decorative xmlns:adec="http://schemas.microsoft.com/office/drawing/2017/decorative" val="1"/>
+                </a:ext>
+              </a:extLst>
+            </p:cNvPr>
+            <p:cNvSpPr/>
+            <p:nvPr>
+              <p:extLst>
+                <p:ext uri="{386F3935-93C4-4BCD-93E2-E3B085C9AB24}">
+                  <p16:designElem xmlns:p16="http://schemas.microsoft.com/office/powerpoint/2015/main" val="1"/>
+                </p:ext>
+              </p:extLst>
+            </p:nvPr>
+          </p:nvSpPr>
+          <p:spPr bwMode="auto">
+            <a:xfrm>
+              <a:off x="285750" y="4763"/>
+              <a:ext cx="369888" cy="1430338"/>
+            </a:xfrm>
+            <a:custGeom>
+              <a:avLst/>
+              <a:gdLst/>
+              <a:ahLst/>
+              <a:cxnLst/>
+              <a:rect l="0" t="0" r="r" b="b"/>
+              <a:pathLst>
+                <a:path w="233" h="901">
+                  <a:moveTo>
+                    <a:pt x="221" y="901"/>
+                  </a:moveTo>
+                  <a:lnTo>
+                    <a:pt x="0" y="383"/>
+                  </a:lnTo>
+                  <a:lnTo>
+                    <a:pt x="0" y="0"/>
+                  </a:lnTo>
+                  <a:lnTo>
+                    <a:pt x="18" y="0"/>
+                  </a:lnTo>
+                  <a:lnTo>
+                    <a:pt x="18" y="380"/>
+                  </a:lnTo>
+                  <a:lnTo>
+                    <a:pt x="233" y="895"/>
+                  </a:lnTo>
+                  <a:lnTo>
+                    <a:pt x="221" y="901"/>
+                  </a:lnTo>
+                  <a:close/>
+                </a:path>
+              </a:pathLst>
+            </a:custGeom>
+            <a:grpFill/>
+            <a:ln>
+              <a:noFill/>
+            </a:ln>
+            <a:extLst>
+              <a:ext uri="{91240B29-F687-4f45-9708-019B960494DF}">
+                <a14:hiddenLine xmlns="" xmlns:a16="http://schemas.microsoft.com/office/drawing/2014/main" xmlns:p14="http://schemas.microsoft.com/office/powerpoint/2010/main" xmlns:a14="http://schemas.microsoft.com/office/drawing/2010/main" w="9525">
+                  <a:solidFill>
+                    <a:srgbClr val="000000"/>
+                  </a:solidFill>
+                  <a:round/>
+                  <a:headEnd/>
+                  <a:tailEnd/>
+                </a14:hiddenLine>
+              </a:ext>
+            </a:extLst>
+          </p:spPr>
+          <p:txBody>
+            <a:bodyPr/>
+            <a:lstStyle/>
+            <a:p>
+              <a:endParaRPr lang="en-US"/>
+            </a:p>
+          </p:txBody>
+        </p:sp>
+        <p:sp>
+          <p:nvSpPr>
+            <p:cNvPr id="1042" name="Freeform 11">
+              <a:extLst>
+                <a:ext uri="{FF2B5EF4-FFF2-40B4-BE49-F238E27FC236}">
+                  <a16:creationId xmlns:a16="http://schemas.microsoft.com/office/drawing/2014/main" id="{74D7A646-8CDC-49B3-9C44-3EF38DB4264C}"/>
+                </a:ext>
+                <a:ext uri="{C183D7F6-B498-43B3-948B-1728B52AA6E4}">
+                  <adec:decorative xmlns:adec="http://schemas.microsoft.com/office/drawing/2017/decorative" val="1"/>
+                </a:ext>
+              </a:extLst>
+            </p:cNvPr>
+            <p:cNvSpPr/>
+            <p:nvPr>
+              <p:extLst>
+                <p:ext uri="{386F3935-93C4-4BCD-93E2-E3B085C9AB24}">
+                  <p16:designElem xmlns:p16="http://schemas.microsoft.com/office/powerpoint/2015/main" val="1"/>
+                </p:ext>
+              </p:extLst>
+            </p:nvPr>
+          </p:nvSpPr>
+          <p:spPr bwMode="auto">
+            <a:xfrm>
+              <a:off x="546100" y="0"/>
+              <a:ext cx="152400" cy="912813"/>
+            </a:xfrm>
+            <a:custGeom>
+              <a:avLst/>
+              <a:gdLst/>
+              <a:ahLst/>
+              <a:cxnLst/>
+              <a:rect l="0" t="0" r="r" b="b"/>
+              <a:pathLst>
+                <a:path w="96" h="575">
+                  <a:moveTo>
+                    <a:pt x="96" y="575"/>
+                  </a:moveTo>
+                  <a:lnTo>
+                    <a:pt x="78" y="575"/>
+                  </a:lnTo>
+                  <a:lnTo>
+                    <a:pt x="78" y="192"/>
+                  </a:lnTo>
+                  <a:lnTo>
+                    <a:pt x="0" y="6"/>
+                  </a:lnTo>
+                  <a:lnTo>
+                    <a:pt x="15" y="0"/>
+                  </a:lnTo>
+                  <a:lnTo>
+                    <a:pt x="96" y="189"/>
+                  </a:lnTo>
+                  <a:lnTo>
+                    <a:pt x="96" y="575"/>
+                  </a:lnTo>
+                  <a:close/>
+                </a:path>
+              </a:pathLst>
+            </a:custGeom>
+            <a:grpFill/>
+            <a:ln>
+              <a:noFill/>
+            </a:ln>
+            <a:extLst>
+              <a:ext uri="{91240B29-F687-4f45-9708-019B960494DF}">
+                <a14:hiddenLine xmlns="" xmlns:a16="http://schemas.microsoft.com/office/drawing/2014/main" xmlns:p14="http://schemas.microsoft.com/office/powerpoint/2010/main" xmlns:a14="http://schemas.microsoft.com/office/drawing/2010/main" w="9525">
+                  <a:solidFill>
+                    <a:srgbClr val="000000"/>
+                  </a:solidFill>
+                  <a:round/>
+                  <a:headEnd/>
+                  <a:tailEnd/>
+                </a14:hiddenLine>
+              </a:ext>
+            </a:extLst>
+          </p:spPr>
+          <p:txBody>
+            <a:bodyPr/>
+            <a:lstStyle/>
+            <a:p>
+              <a:endParaRPr lang="en-US"/>
+            </a:p>
+          </p:txBody>
+        </p:sp>
+        <p:sp>
+          <p:nvSpPr>
+            <p:cNvPr id="1043" name="Freeform 12">
+              <a:extLst>
+                <a:ext uri="{FF2B5EF4-FFF2-40B4-BE49-F238E27FC236}">
+                  <a16:creationId xmlns:a16="http://schemas.microsoft.com/office/drawing/2014/main" id="{D4E99D14-E4F4-419B-9AAF-8D1CEAB28A2D}"/>
+                </a:ext>
+                <a:ext uri="{C183D7F6-B498-43B3-948B-1728B52AA6E4}">
+                  <adec:decorative xmlns:adec="http://schemas.microsoft.com/office/drawing/2017/decorative" val="1"/>
+                </a:ext>
+              </a:extLst>
+            </p:cNvPr>
+            <p:cNvSpPr>
+              <a:spLocks noEditPoints="1"/>
+            </p:cNvSpPr>
+            <p:nvPr>
+              <p:extLst>
+                <p:ext uri="{386F3935-93C4-4BCD-93E2-E3B085C9AB24}">
+                  <p16:designElem xmlns:p16="http://schemas.microsoft.com/office/powerpoint/2015/main" val="1"/>
+                </p:ext>
+              </p:extLst>
+            </p:nvPr>
+          </p:nvSpPr>
+          <p:spPr bwMode="auto">
+            <a:xfrm>
+              <a:off x="588962" y="1420813"/>
+              <a:ext cx="190500" cy="190500"/>
+            </a:xfrm>
+            <a:custGeom>
+              <a:avLst/>
+              <a:gdLst/>
+              <a:ahLst/>
+              <a:cxnLst/>
+              <a:rect l="0" t="0" r="r" b="b"/>
+              <a:pathLst>
+                <a:path w="40" h="40">
+                  <a:moveTo>
+                    <a:pt x="20" y="40"/>
+                  </a:moveTo>
+                  <a:cubicBezTo>
+                    <a:pt x="9" y="40"/>
+                    <a:pt x="0" y="31"/>
+                    <a:pt x="0" y="20"/>
+                  </a:cubicBezTo>
+                  <a:cubicBezTo>
+                    <a:pt x="0" y="9"/>
+                    <a:pt x="9" y="0"/>
+                    <a:pt x="20" y="0"/>
+                  </a:cubicBezTo>
+                  <a:cubicBezTo>
+                    <a:pt x="33" y="0"/>
+                    <a:pt x="40" y="7"/>
+                    <a:pt x="40" y="20"/>
+                  </a:cubicBezTo>
+                  <a:cubicBezTo>
+                    <a:pt x="40" y="31"/>
+                    <a:pt x="31" y="40"/>
+                    <a:pt x="20" y="40"/>
+                  </a:cubicBezTo>
+                  <a:close/>
+                  <a:moveTo>
+                    <a:pt x="20" y="4"/>
+                  </a:moveTo>
+                  <a:cubicBezTo>
+                    <a:pt x="11" y="4"/>
+                    <a:pt x="4" y="11"/>
+                    <a:pt x="4" y="20"/>
+                  </a:cubicBezTo>
+                  <a:cubicBezTo>
+                    <a:pt x="4" y="29"/>
+                    <a:pt x="11" y="36"/>
+                    <a:pt x="20" y="36"/>
+                  </a:cubicBezTo>
+                  <a:cubicBezTo>
+                    <a:pt x="29" y="36"/>
+                    <a:pt x="36" y="29"/>
+                    <a:pt x="36" y="20"/>
+                  </a:cubicBezTo>
+                  <a:cubicBezTo>
+                    <a:pt x="36" y="9"/>
+                    <a:pt x="31" y="4"/>
+                    <a:pt x="20" y="4"/>
+                  </a:cubicBezTo>
+                  <a:close/>
+                </a:path>
+              </a:pathLst>
+            </a:custGeom>
+            <a:grpFill/>
+            <a:ln>
+              <a:noFill/>
+            </a:ln>
+            <a:extLst>
+              <a:ext uri="{91240B29-F687-4f45-9708-019B960494DF}">
+                <a14:hiddenLine xmlns="" xmlns:a16="http://schemas.microsoft.com/office/drawing/2014/main" xmlns:p14="http://schemas.microsoft.com/office/powerpoint/2010/main" xmlns:a14="http://schemas.microsoft.com/office/drawing/2010/main" w="9525">
+                  <a:solidFill>
+                    <a:srgbClr val="000000"/>
+                  </a:solidFill>
+                  <a:round/>
+                  <a:headEnd/>
+                  <a:tailEnd/>
+                </a14:hiddenLine>
+              </a:ext>
+            </a:extLst>
+          </p:spPr>
+          <p:txBody>
+            <a:bodyPr/>
+            <a:lstStyle/>
+            <a:p>
+              <a:endParaRPr lang="en-US"/>
+            </a:p>
+          </p:txBody>
+        </p:sp>
+        <p:sp>
+          <p:nvSpPr>
+            <p:cNvPr id="1044" name="Freeform 13">
+              <a:extLst>
+                <a:ext uri="{FF2B5EF4-FFF2-40B4-BE49-F238E27FC236}">
+                  <a16:creationId xmlns:a16="http://schemas.microsoft.com/office/drawing/2014/main" id="{377E106C-5445-4A52-9F7E-DA1738744291}"/>
+                </a:ext>
+                <a:ext uri="{C183D7F6-B498-43B3-948B-1728B52AA6E4}">
+                  <adec:decorative xmlns:adec="http://schemas.microsoft.com/office/drawing/2017/decorative" val="1"/>
+                </a:ext>
+              </a:extLst>
+            </p:cNvPr>
+            <p:cNvSpPr>
+              <a:spLocks noEditPoints="1"/>
+            </p:cNvSpPr>
+            <p:nvPr>
+              <p:extLst>
+                <p:ext uri="{386F3935-93C4-4BCD-93E2-E3B085C9AB24}">
+                  <p16:designElem xmlns:p16="http://schemas.microsoft.com/office/powerpoint/2015/main" val="1"/>
+                </p:ext>
+              </p:extLst>
+            </p:nvPr>
+          </p:nvSpPr>
+          <p:spPr bwMode="auto">
+            <a:xfrm>
+              <a:off x="588962" y="903288"/>
+              <a:ext cx="190500" cy="190500"/>
+            </a:xfrm>
+            <a:custGeom>
+              <a:avLst/>
+              <a:gdLst/>
+              <a:ahLst/>
+              <a:cxnLst/>
+              <a:rect l="0" t="0" r="r" b="b"/>
+              <a:pathLst>
+                <a:path w="40" h="40">
+                  <a:moveTo>
+                    <a:pt x="20" y="40"/>
+                  </a:moveTo>
+                  <a:cubicBezTo>
+                    <a:pt x="9" y="40"/>
+                    <a:pt x="0" y="31"/>
+                    <a:pt x="0" y="20"/>
+                  </a:cubicBezTo>
+                  <a:cubicBezTo>
+                    <a:pt x="0" y="9"/>
+                    <a:pt x="9" y="0"/>
+                    <a:pt x="20" y="0"/>
+                  </a:cubicBezTo>
+                  <a:cubicBezTo>
+                    <a:pt x="31" y="0"/>
+                    <a:pt x="40" y="9"/>
+                    <a:pt x="40" y="20"/>
+                  </a:cubicBezTo>
+                  <a:cubicBezTo>
+                    <a:pt x="40" y="31"/>
+                    <a:pt x="31" y="40"/>
+                    <a:pt x="20" y="40"/>
+                  </a:cubicBezTo>
+                  <a:close/>
+                  <a:moveTo>
+                    <a:pt x="20" y="4"/>
+                  </a:moveTo>
+                  <a:cubicBezTo>
+                    <a:pt x="11" y="4"/>
+                    <a:pt x="4" y="11"/>
+                    <a:pt x="4" y="20"/>
+                  </a:cubicBezTo>
+                  <a:cubicBezTo>
+                    <a:pt x="4" y="29"/>
+                    <a:pt x="11" y="36"/>
+                    <a:pt x="20" y="36"/>
+                  </a:cubicBezTo>
+                  <a:cubicBezTo>
+                    <a:pt x="29" y="36"/>
+                    <a:pt x="36" y="29"/>
+                    <a:pt x="36" y="20"/>
+                  </a:cubicBezTo>
+                  <a:cubicBezTo>
+                    <a:pt x="36" y="11"/>
+                    <a:pt x="29" y="4"/>
+                    <a:pt x="20" y="4"/>
+                  </a:cubicBezTo>
+                  <a:close/>
+                </a:path>
+              </a:pathLst>
+            </a:custGeom>
+            <a:grpFill/>
+            <a:ln>
+              <a:noFill/>
+            </a:ln>
+            <a:extLst>
+              <a:ext uri="{91240B29-F687-4f45-9708-019B960494DF}">
+                <a14:hiddenLine xmlns="" xmlns:a16="http://schemas.microsoft.com/office/drawing/2014/main" xmlns:p14="http://schemas.microsoft.com/office/powerpoint/2010/main" xmlns:a14="http://schemas.microsoft.com/office/drawing/2010/main" w="9525">
+                  <a:solidFill>
+                    <a:srgbClr val="000000"/>
+                  </a:solidFill>
+                  <a:round/>
+                  <a:headEnd/>
+                  <a:tailEnd/>
+                </a14:hiddenLine>
+              </a:ext>
+            </a:extLst>
+          </p:spPr>
+          <p:txBody>
+            <a:bodyPr/>
+            <a:lstStyle/>
+            <a:p>
+              <a:endParaRPr lang="en-US"/>
+            </a:p>
+          </p:txBody>
+        </p:sp>
+        <p:sp>
+          <p:nvSpPr>
+            <p:cNvPr id="1045" name="Freeform 14">
+              <a:extLst>
+                <a:ext uri="{FF2B5EF4-FFF2-40B4-BE49-F238E27FC236}">
+                  <a16:creationId xmlns:a16="http://schemas.microsoft.com/office/drawing/2014/main" id="{752BFE96-D378-4BAE-A64B-F851A34C4770}"/>
+                </a:ext>
+                <a:ext uri="{C183D7F6-B498-43B3-948B-1728B52AA6E4}">
+                  <adec:decorative xmlns:adec="http://schemas.microsoft.com/office/drawing/2017/decorative" val="1"/>
+                </a:ext>
+              </a:extLst>
+            </p:cNvPr>
+            <p:cNvSpPr/>
+            <p:nvPr>
+              <p:extLst>
+                <p:ext uri="{386F3935-93C4-4BCD-93E2-E3B085C9AB24}">
+                  <p16:designElem xmlns:p16="http://schemas.microsoft.com/office/powerpoint/2015/main" val="1"/>
+                </p:ext>
+              </p:extLst>
+            </p:nvPr>
+          </p:nvSpPr>
+          <p:spPr bwMode="auto">
+            <a:xfrm>
+              <a:off x="641350" y="0"/>
+              <a:ext cx="422275" cy="527050"/>
+            </a:xfrm>
+            <a:custGeom>
+              <a:avLst/>
+              <a:gdLst/>
+              <a:ahLst/>
+              <a:cxnLst/>
+              <a:rect l="0" t="0" r="r" b="b"/>
+              <a:pathLst>
+                <a:path w="266" h="332">
+                  <a:moveTo>
+                    <a:pt x="257" y="332"/>
+                  </a:moveTo>
+                  <a:lnTo>
+                    <a:pt x="48" y="123"/>
+                  </a:lnTo>
+                  <a:lnTo>
+                    <a:pt x="0" y="6"/>
+                  </a:lnTo>
+                  <a:lnTo>
+                    <a:pt x="15" y="0"/>
+                  </a:lnTo>
+                  <a:lnTo>
+                    <a:pt x="63" y="114"/>
+                  </a:lnTo>
+                  <a:lnTo>
+                    <a:pt x="266" y="320"/>
+                  </a:lnTo>
+                  <a:lnTo>
+                    <a:pt x="257" y="332"/>
+                  </a:lnTo>
+                  <a:close/>
+                </a:path>
+              </a:pathLst>
+            </a:custGeom>
+            <a:grpFill/>
+            <a:ln>
+              <a:noFill/>
+            </a:ln>
+            <a:extLst>
+              <a:ext uri="{91240B29-F687-4f45-9708-019B960494DF}">
+                <a14:hiddenLine xmlns="" xmlns:a16="http://schemas.microsoft.com/office/drawing/2014/main" xmlns:p14="http://schemas.microsoft.com/office/powerpoint/2010/main" xmlns:a14="http://schemas.microsoft.com/office/drawing/2010/main" w="9525">
+                  <a:solidFill>
+                    <a:srgbClr val="000000"/>
+                  </a:solidFill>
+                  <a:round/>
+                  <a:headEnd/>
+                  <a:tailEnd/>
+                </a14:hiddenLine>
+              </a:ext>
+            </a:extLst>
+          </p:spPr>
+          <p:txBody>
+            <a:bodyPr/>
+            <a:lstStyle/>
+            <a:p>
+              <a:endParaRPr lang="en-US"/>
+            </a:p>
+          </p:txBody>
+        </p:sp>
+        <p:sp>
+          <p:nvSpPr>
+            <p:cNvPr id="1046" name="Freeform 15">
+              <a:extLst>
+                <a:ext uri="{FF2B5EF4-FFF2-40B4-BE49-F238E27FC236}">
+                  <a16:creationId xmlns:a16="http://schemas.microsoft.com/office/drawing/2014/main" id="{B88FFB19-5A5E-4078-B467-9D4ABD21BD9A}"/>
+                </a:ext>
+                <a:ext uri="{C183D7F6-B498-43B3-948B-1728B52AA6E4}">
+                  <adec:decorative xmlns:adec="http://schemas.microsoft.com/office/drawing/2017/decorative" val="1"/>
+                </a:ext>
+              </a:extLst>
+            </p:cNvPr>
+            <p:cNvSpPr>
+              <a:spLocks noEditPoints="1"/>
+            </p:cNvSpPr>
+            <p:nvPr>
+              <p:extLst>
+                <p:ext uri="{386F3935-93C4-4BCD-93E2-E3B085C9AB24}">
+                  <p16:designElem xmlns:p16="http://schemas.microsoft.com/office/powerpoint/2015/main" val="1"/>
+                </p:ext>
+              </p:extLst>
+            </p:nvPr>
+          </p:nvSpPr>
+          <p:spPr bwMode="auto">
+            <a:xfrm>
+              <a:off x="1020762" y="488950"/>
+              <a:ext cx="161925" cy="147638"/>
+            </a:xfrm>
+            <a:custGeom>
+              <a:avLst/>
+              <a:gdLst/>
+              <a:ahLst/>
+              <a:cxnLst/>
+              <a:rect l="0" t="0" r="r" b="b"/>
+              <a:pathLst>
+                <a:path w="34" h="31">
+                  <a:moveTo>
+                    <a:pt x="17" y="31"/>
+                  </a:moveTo>
+                  <a:cubicBezTo>
+                    <a:pt x="13" y="31"/>
+                    <a:pt x="9" y="30"/>
+                    <a:pt x="6" y="27"/>
+                  </a:cubicBezTo>
+                  <a:cubicBezTo>
+                    <a:pt x="0" y="20"/>
+                    <a:pt x="0" y="10"/>
+                    <a:pt x="6" y="4"/>
+                  </a:cubicBezTo>
+                  <a:cubicBezTo>
+                    <a:pt x="9" y="1"/>
+                    <a:pt x="13" y="0"/>
+                    <a:pt x="17" y="0"/>
+                  </a:cubicBezTo>
+                  <a:cubicBezTo>
+                    <a:pt x="21" y="0"/>
+                    <a:pt x="25" y="1"/>
+                    <a:pt x="28" y="4"/>
+                  </a:cubicBezTo>
+                  <a:cubicBezTo>
+                    <a:pt x="34" y="10"/>
+                    <a:pt x="34" y="20"/>
+                    <a:pt x="28" y="27"/>
+                  </a:cubicBezTo>
+                  <a:cubicBezTo>
+                    <a:pt x="25" y="30"/>
+                    <a:pt x="21" y="31"/>
+                    <a:pt x="17" y="31"/>
+                  </a:cubicBezTo>
+                  <a:close/>
+                  <a:moveTo>
+                    <a:pt x="17" y="4"/>
+                  </a:moveTo>
+                  <a:cubicBezTo>
+                    <a:pt x="14" y="4"/>
+                    <a:pt x="11" y="5"/>
+                    <a:pt x="9" y="7"/>
+                  </a:cubicBezTo>
+                  <a:cubicBezTo>
+                    <a:pt x="4" y="12"/>
+                    <a:pt x="4" y="19"/>
+                    <a:pt x="9" y="24"/>
+                  </a:cubicBezTo>
+                  <a:cubicBezTo>
+                    <a:pt x="11" y="26"/>
+                    <a:pt x="14" y="27"/>
+                    <a:pt x="17" y="27"/>
+                  </a:cubicBezTo>
+                  <a:cubicBezTo>
+                    <a:pt x="20" y="27"/>
+                    <a:pt x="23" y="26"/>
+                    <a:pt x="25" y="24"/>
+                  </a:cubicBezTo>
+                  <a:cubicBezTo>
+                    <a:pt x="30" y="19"/>
+                    <a:pt x="30" y="12"/>
+                    <a:pt x="25" y="7"/>
+                  </a:cubicBezTo>
+                  <a:cubicBezTo>
+                    <a:pt x="23" y="5"/>
+                    <a:pt x="20" y="4"/>
+                    <a:pt x="17" y="4"/>
+                  </a:cubicBezTo>
+                  <a:close/>
+                </a:path>
+              </a:pathLst>
+            </a:custGeom>
+            <a:grpFill/>
+            <a:ln>
+              <a:noFill/>
+            </a:ln>
+            <a:extLst>
+              <a:ext uri="{91240B29-F687-4f45-9708-019B960494DF}">
+                <a14:hiddenLine xmlns="" xmlns:a16="http://schemas.microsoft.com/office/drawing/2014/main" xmlns:p14="http://schemas.microsoft.com/office/powerpoint/2010/main" xmlns:a14="http://schemas.microsoft.com/office/drawing/2010/main" w="9525">
+                  <a:solidFill>
+                    <a:srgbClr val="000000"/>
+                  </a:solidFill>
+                  <a:round/>
+                  <a:headEnd/>
+                  <a:tailEnd/>
+                </a14:hiddenLine>
+              </a:ext>
+            </a:extLst>
+          </p:spPr>
+          <p:txBody>
+            <a:bodyPr/>
+            <a:lstStyle/>
+            <a:p>
+              <a:endParaRPr lang="en-US"/>
+            </a:p>
+          </p:txBody>
+        </p:sp>
+        <p:sp>
+          <p:nvSpPr>
+            <p:cNvPr id="1047" name="Line 16">
+              <a:extLst>
+                <a:ext uri="{FF2B5EF4-FFF2-40B4-BE49-F238E27FC236}">
+                  <a16:creationId xmlns:a16="http://schemas.microsoft.com/office/drawing/2014/main" id="{11042975-3D19-4728-BCDA-D3F5CD633EDB}"/>
+                </a:ext>
+                <a:ext uri="{C183D7F6-B498-43B3-948B-1728B52AA6E4}">
+                  <adec:decorative xmlns:adec="http://schemas.microsoft.com/office/drawing/2017/decorative" val="1"/>
+                </a:ext>
+              </a:extLst>
+            </p:cNvPr>
+            <p:cNvSpPr>
+              <a:spLocks noChangeShapeType="1"/>
+            </p:cNvSpPr>
+            <p:nvPr>
+              <p:extLst>
+                <p:ext uri="{386F3935-93C4-4BCD-93E2-E3B085C9AB24}">
+                  <p16:designElem xmlns:p16="http://schemas.microsoft.com/office/powerpoint/2015/main" val="1"/>
+                </p:ext>
+              </p:extLst>
+            </p:nvPr>
+          </p:nvSpPr>
+          <p:spPr bwMode="auto">
+            <a:xfrm>
+              <a:off x="-4763" y="9525"/>
+              <a:ext cx="0" cy="0"/>
+            </a:xfrm>
+            <a:prstGeom prst="line">
+              <a:avLst/>
+            </a:prstGeom>
+            <a:grpFill/>
+            <a:ln w="15" cap="flat">
+              <a:solidFill>
+                <a:srgbClr val="FFFFFF"/>
+              </a:solidFill>
+              <a:prstDash val="solid"/>
+              <a:miter lim="800000"/>
+              <a:headEnd/>
+              <a:tailEnd/>
+            </a:ln>
+          </p:spPr>
+          <p:txBody>
+            <a:bodyPr/>
+            <a:lstStyle/>
+            <a:p>
+              <a:endParaRPr lang="en-US"/>
+            </a:p>
+          </p:txBody>
+        </p:sp>
+        <p:sp>
+          <p:nvSpPr>
+            <p:cNvPr id="1048" name="Freeform 17">
+              <a:extLst>
+                <a:ext uri="{FF2B5EF4-FFF2-40B4-BE49-F238E27FC236}">
+                  <a16:creationId xmlns:a16="http://schemas.microsoft.com/office/drawing/2014/main" id="{A28972BD-D2E1-4DCA-A907-2E3B6F606649}"/>
+                </a:ext>
+                <a:ext uri="{C183D7F6-B498-43B3-948B-1728B52AA6E4}">
+                  <adec:decorative xmlns:adec="http://schemas.microsoft.com/office/drawing/2017/decorative" val="1"/>
+                </a:ext>
+              </a:extLst>
+            </p:cNvPr>
+            <p:cNvSpPr/>
+            <p:nvPr>
+              <p:extLst>
+                <p:ext uri="{386F3935-93C4-4BCD-93E2-E3B085C9AB24}">
+                  <p16:designElem xmlns:p16="http://schemas.microsoft.com/office/powerpoint/2015/main" val="1"/>
+                </p:ext>
+              </p:extLst>
+            </p:nvPr>
+          </p:nvSpPr>
+          <p:spPr bwMode="auto">
+            <a:xfrm>
+              <a:off x="9525" y="1801813"/>
+              <a:ext cx="123825" cy="127000"/>
+            </a:xfrm>
+            <a:custGeom>
+              <a:avLst/>
+              <a:gdLst/>
+              <a:ahLst/>
+              <a:cxnLst/>
+              <a:rect l="0" t="0" r="r" b="b"/>
+              <a:pathLst>
+                <a:path w="78" h="80">
+                  <a:moveTo>
+                    <a:pt x="6" y="80"/>
+                  </a:moveTo>
+                  <a:lnTo>
+                    <a:pt x="0" y="71"/>
+                  </a:lnTo>
+                  <a:lnTo>
+                    <a:pt x="69" y="0"/>
+                  </a:lnTo>
+                  <a:lnTo>
+                    <a:pt x="78" y="9"/>
+                  </a:lnTo>
+                  <a:lnTo>
+                    <a:pt x="6" y="80"/>
+                  </a:lnTo>
+                  <a:close/>
+                </a:path>
+              </a:pathLst>
+            </a:custGeom>
+            <a:grpFill/>
+            <a:ln>
+              <a:noFill/>
+            </a:ln>
+            <a:extLst>
+              <a:ext uri="{91240B29-F687-4f45-9708-019B960494DF}">
+                <a14:hiddenLine xmlns="" xmlns:a16="http://schemas.microsoft.com/office/drawing/2014/main" xmlns:p14="http://schemas.microsoft.com/office/powerpoint/2010/main" xmlns:a14="http://schemas.microsoft.com/office/drawing/2010/main" w="9525">
+                  <a:solidFill>
+                    <a:srgbClr val="000000"/>
+                  </a:solidFill>
+                  <a:round/>
+                  <a:headEnd/>
+                  <a:tailEnd/>
+                </a14:hiddenLine>
+              </a:ext>
+            </a:extLst>
+          </p:spPr>
+          <p:txBody>
+            <a:bodyPr/>
+            <a:lstStyle/>
+            <a:p>
+              <a:endParaRPr lang="en-US"/>
+            </a:p>
+          </p:txBody>
+        </p:sp>
+        <p:sp>
+          <p:nvSpPr>
+            <p:cNvPr id="1049" name="Freeform 18">
+              <a:extLst>
+                <a:ext uri="{FF2B5EF4-FFF2-40B4-BE49-F238E27FC236}">
+                  <a16:creationId xmlns:a16="http://schemas.microsoft.com/office/drawing/2014/main" id="{1C806824-5C2D-4747-B038-69EE4074B366}"/>
+                </a:ext>
+                <a:ext uri="{C183D7F6-B498-43B3-948B-1728B52AA6E4}">
+                  <adec:decorative xmlns:adec="http://schemas.microsoft.com/office/drawing/2017/decorative" val="1"/>
+                </a:ext>
+              </a:extLst>
+            </p:cNvPr>
+            <p:cNvSpPr/>
+            <p:nvPr>
+              <p:extLst>
+                <p:ext uri="{386F3935-93C4-4BCD-93E2-E3B085C9AB24}">
+                  <p16:designElem xmlns:p16="http://schemas.microsoft.com/office/powerpoint/2015/main" val="1"/>
+                </p:ext>
+              </p:extLst>
+            </p:nvPr>
+          </p:nvSpPr>
+          <p:spPr bwMode="auto">
+            <a:xfrm>
+              <a:off x="-9525" y="3549650"/>
+              <a:ext cx="147638" cy="481013"/>
+            </a:xfrm>
+            <a:custGeom>
+              <a:avLst/>
+              <a:gdLst/>
+              <a:ahLst/>
+              <a:cxnLst/>
+              <a:rect l="0" t="0" r="r" b="b"/>
+              <a:pathLst>
+                <a:path w="93" h="303">
+                  <a:moveTo>
+                    <a:pt x="93" y="303"/>
+                  </a:moveTo>
+                  <a:lnTo>
+                    <a:pt x="78" y="303"/>
+                  </a:lnTo>
+                  <a:lnTo>
+                    <a:pt x="78" y="78"/>
+                  </a:lnTo>
+                  <a:lnTo>
+                    <a:pt x="0" y="12"/>
+                  </a:lnTo>
+                  <a:lnTo>
+                    <a:pt x="12" y="0"/>
+                  </a:lnTo>
+                  <a:lnTo>
+                    <a:pt x="93" y="69"/>
+                  </a:lnTo>
+                  <a:lnTo>
+                    <a:pt x="93" y="303"/>
+                  </a:lnTo>
+                  <a:close/>
+                </a:path>
+              </a:pathLst>
+            </a:custGeom>
+            <a:grpFill/>
+            <a:ln>
+              <a:noFill/>
+            </a:ln>
+            <a:extLst>
+              <a:ext uri="{91240B29-F687-4f45-9708-019B960494DF}">
+                <a14:hiddenLine xmlns="" xmlns:a16="http://schemas.microsoft.com/office/drawing/2014/main" xmlns:p14="http://schemas.microsoft.com/office/powerpoint/2010/main" xmlns:a14="http://schemas.microsoft.com/office/drawing/2010/main" w="9525">
+                  <a:solidFill>
+                    <a:srgbClr val="000000"/>
+                  </a:solidFill>
+                  <a:round/>
+                  <a:headEnd/>
+                  <a:tailEnd/>
+                </a14:hiddenLine>
+              </a:ext>
+            </a:extLst>
+          </p:spPr>
+          <p:txBody>
+            <a:bodyPr/>
+            <a:lstStyle/>
+            <a:p>
+              <a:endParaRPr lang="en-US"/>
+            </a:p>
+          </p:txBody>
+        </p:sp>
+        <p:sp>
+          <p:nvSpPr>
+            <p:cNvPr id="1050" name="Freeform 19">
+              <a:extLst>
+                <a:ext uri="{FF2B5EF4-FFF2-40B4-BE49-F238E27FC236}">
+                  <a16:creationId xmlns:a16="http://schemas.microsoft.com/office/drawing/2014/main" id="{3B33F710-16D7-4F48-BFCA-66C9CA2352CB}"/>
+                </a:ext>
+                <a:ext uri="{C183D7F6-B498-43B3-948B-1728B52AA6E4}">
+                  <adec:decorative xmlns:adec="http://schemas.microsoft.com/office/drawing/2017/decorative" val="1"/>
+                </a:ext>
+              </a:extLst>
+            </p:cNvPr>
+            <p:cNvSpPr/>
+            <p:nvPr>
+              <p:extLst>
+                <p:ext uri="{386F3935-93C4-4BCD-93E2-E3B085C9AB24}">
+                  <p16:designElem xmlns:p16="http://schemas.microsoft.com/office/powerpoint/2015/main" val="1"/>
+                </p:ext>
+              </p:extLst>
+            </p:nvPr>
+          </p:nvSpPr>
+          <p:spPr bwMode="auto">
+            <a:xfrm>
+              <a:off x="128587" y="1382713"/>
+              <a:ext cx="142875" cy="476250"/>
+            </a:xfrm>
+            <a:custGeom>
+              <a:avLst/>
+              <a:gdLst/>
+              <a:ahLst/>
+              <a:cxnLst/>
+              <a:rect l="0" t="0" r="r" b="b"/>
+              <a:pathLst>
+                <a:path w="90" h="300">
+                  <a:moveTo>
+                    <a:pt x="90" y="300"/>
+                  </a:moveTo>
+                  <a:lnTo>
+                    <a:pt x="78" y="300"/>
+                  </a:lnTo>
+                  <a:lnTo>
+                    <a:pt x="78" y="84"/>
+                  </a:lnTo>
+                  <a:lnTo>
+                    <a:pt x="0" y="9"/>
+                  </a:lnTo>
+                  <a:lnTo>
+                    <a:pt x="9" y="0"/>
+                  </a:lnTo>
+                  <a:lnTo>
+                    <a:pt x="90" y="81"/>
+                  </a:lnTo>
+                  <a:lnTo>
+                    <a:pt x="90" y="300"/>
+                  </a:lnTo>
+                  <a:close/>
+                </a:path>
+              </a:pathLst>
+            </a:custGeom>
+            <a:grpFill/>
+            <a:ln>
+              <a:noFill/>
+            </a:ln>
+            <a:extLst>
+              <a:ext uri="{91240B29-F687-4f45-9708-019B960494DF}">
+                <a14:hiddenLine xmlns="" xmlns:a16="http://schemas.microsoft.com/office/drawing/2014/main" xmlns:p14="http://schemas.microsoft.com/office/powerpoint/2010/main" xmlns:a14="http://schemas.microsoft.com/office/drawing/2010/main" w="9525">
+                  <a:solidFill>
+                    <a:srgbClr val="000000"/>
+                  </a:solidFill>
+                  <a:round/>
+                  <a:headEnd/>
+                  <a:tailEnd/>
+                </a14:hiddenLine>
+              </a:ext>
+            </a:extLst>
+          </p:spPr>
+          <p:txBody>
+            <a:bodyPr/>
+            <a:lstStyle/>
+            <a:p>
+              <a:endParaRPr lang="en-US"/>
+            </a:p>
+          </p:txBody>
+        </p:sp>
+        <p:sp>
+          <p:nvSpPr>
+            <p:cNvPr id="1051" name="Freeform 20">
+              <a:extLst>
+                <a:ext uri="{FF2B5EF4-FFF2-40B4-BE49-F238E27FC236}">
+                  <a16:creationId xmlns:a16="http://schemas.microsoft.com/office/drawing/2014/main" id="{6C8C8ED4-90FA-4E97-AAF0-D5D51E6A935E}"/>
+                </a:ext>
+                <a:ext uri="{C183D7F6-B498-43B3-948B-1728B52AA6E4}">
+                  <adec:decorative xmlns:adec="http://schemas.microsoft.com/office/drawing/2017/decorative" val="1"/>
+                </a:ext>
+              </a:extLst>
+            </p:cNvPr>
+            <p:cNvSpPr>
+              <a:spLocks noEditPoints="1"/>
+            </p:cNvSpPr>
+            <p:nvPr>
+              <p:extLst>
+                <p:ext uri="{386F3935-93C4-4BCD-93E2-E3B085C9AB24}">
+                  <p16:designElem xmlns:p16="http://schemas.microsoft.com/office/powerpoint/2015/main" val="1"/>
+                </p:ext>
+              </p:extLst>
+            </p:nvPr>
+          </p:nvSpPr>
+          <p:spPr bwMode="auto">
+            <a:xfrm>
+              <a:off x="204787" y="1849438"/>
+              <a:ext cx="114300" cy="107950"/>
+            </a:xfrm>
+            <a:custGeom>
+              <a:avLst/>
+              <a:gdLst/>
+              <a:ahLst/>
+              <a:cxnLst/>
+              <a:rect l="0" t="0" r="r" b="b"/>
+              <a:pathLst>
+                <a:path w="24" h="23">
+                  <a:moveTo>
+                    <a:pt x="12" y="23"/>
+                  </a:moveTo>
+                  <a:cubicBezTo>
+                    <a:pt x="6" y="23"/>
+                    <a:pt x="0" y="18"/>
+                    <a:pt x="0" y="12"/>
+                  </a:cubicBezTo>
+                  <a:cubicBezTo>
+                    <a:pt x="0" y="5"/>
+                    <a:pt x="6" y="0"/>
+                    <a:pt x="12" y="0"/>
+                  </a:cubicBezTo>
+                  <a:cubicBezTo>
+                    <a:pt x="18" y="0"/>
+                    <a:pt x="24" y="5"/>
+                    <a:pt x="24" y="12"/>
+                  </a:cubicBezTo>
+                  <a:cubicBezTo>
+                    <a:pt x="24" y="18"/>
+                    <a:pt x="18" y="23"/>
+                    <a:pt x="12" y="23"/>
+                  </a:cubicBezTo>
+                  <a:close/>
+                  <a:moveTo>
+                    <a:pt x="12" y="4"/>
+                  </a:moveTo>
+                  <a:cubicBezTo>
+                    <a:pt x="8" y="4"/>
+                    <a:pt x="4" y="8"/>
+                    <a:pt x="4" y="12"/>
+                  </a:cubicBezTo>
+                  <a:cubicBezTo>
+                    <a:pt x="4" y="16"/>
+                    <a:pt x="8" y="19"/>
+                    <a:pt x="12" y="19"/>
+                  </a:cubicBezTo>
+                  <a:cubicBezTo>
+                    <a:pt x="16" y="19"/>
+                    <a:pt x="20" y="16"/>
+                    <a:pt x="20" y="12"/>
+                  </a:cubicBezTo>
+                  <a:cubicBezTo>
+                    <a:pt x="20" y="8"/>
+                    <a:pt x="16" y="4"/>
+                    <a:pt x="12" y="4"/>
+                  </a:cubicBezTo>
+                  <a:close/>
+                </a:path>
+              </a:pathLst>
+            </a:custGeom>
+            <a:grpFill/>
+            <a:ln>
+              <a:noFill/>
+            </a:ln>
+            <a:extLst>
+              <a:ext uri="{91240B29-F687-4f45-9708-019B960494DF}">
+                <a14:hiddenLine xmlns="" xmlns:a16="http://schemas.microsoft.com/office/drawing/2014/main" xmlns:p14="http://schemas.microsoft.com/office/powerpoint/2010/main" xmlns:a14="http://schemas.microsoft.com/office/drawing/2010/main" w="9525">
+                  <a:solidFill>
+                    <a:srgbClr val="000000"/>
+                  </a:solidFill>
+                  <a:round/>
+                  <a:headEnd/>
+                  <a:tailEnd/>
+                </a14:hiddenLine>
+              </a:ext>
+            </a:extLst>
+          </p:spPr>
+          <p:txBody>
+            <a:bodyPr/>
+            <a:lstStyle/>
+            <a:p>
+              <a:endParaRPr lang="en-US"/>
+            </a:p>
+          </p:txBody>
+        </p:sp>
+        <p:sp>
+          <p:nvSpPr>
+            <p:cNvPr id="1052" name="Rectangle 21">
+              <a:extLst>
+                <a:ext uri="{FF2B5EF4-FFF2-40B4-BE49-F238E27FC236}">
+                  <a16:creationId xmlns:a16="http://schemas.microsoft.com/office/drawing/2014/main" id="{6C5EB9C1-B25F-4172-8A96-5950ECC828FC}"/>
+                </a:ext>
+                <a:ext uri="{C183D7F6-B498-43B3-948B-1728B52AA6E4}">
+                  <adec:decorative xmlns:adec="http://schemas.microsoft.com/office/drawing/2017/decorative" val="1"/>
+                </a:ext>
+              </a:extLst>
+            </p:cNvPr>
+            <p:cNvSpPr>
+              <a:spLocks noChangeArrowheads="1"/>
+            </p:cNvSpPr>
+            <p:nvPr>
+              <p:extLst>
+                <p:ext uri="{386F3935-93C4-4BCD-93E2-E3B085C9AB24}">
+                  <p16:designElem xmlns:p16="http://schemas.microsoft.com/office/powerpoint/2015/main" val="1"/>
+                </p:ext>
+              </p:extLst>
+            </p:nvPr>
+          </p:nvSpPr>
+          <p:spPr bwMode="auto">
+            <a:xfrm>
+              <a:off x="133350" y="4662488"/>
+              <a:ext cx="23813" cy="2181225"/>
+            </a:xfrm>
+            <a:prstGeom prst="rect">
+              <a:avLst/>
+            </a:prstGeom>
+            <a:grpFill/>
+            <a:ln>
+              <a:noFill/>
+            </a:ln>
+            <a:extLst>
+              <a:ext uri="{91240B29-F687-4f45-9708-019B960494DF}">
+                <a14:hiddenLine xmlns="" xmlns:a16="http://schemas.microsoft.com/office/drawing/2014/main" xmlns:p14="http://schemas.microsoft.com/office/powerpoint/2010/main" xmlns:a14="http://schemas.microsoft.com/office/drawing/2010/main" w="9525">
+                  <a:solidFill>
+                    <a:srgbClr val="000000"/>
+                  </a:solidFill>
+                  <a:miter lim="800000"/>
+                  <a:headEnd/>
+                  <a:tailEnd/>
+                </a14:hiddenLine>
+              </a:ext>
+            </a:extLst>
+          </p:spPr>
+          <p:txBody>
+            <a:bodyPr/>
+            <a:lstStyle/>
+            <a:p>
+              <a:endParaRPr lang="en-US"/>
+            </a:p>
+          </p:txBody>
+        </p:sp>
+        <p:sp>
+          <p:nvSpPr>
+            <p:cNvPr id="1053" name="Freeform 22">
+              <a:extLst>
+                <a:ext uri="{FF2B5EF4-FFF2-40B4-BE49-F238E27FC236}">
+                  <a16:creationId xmlns:a16="http://schemas.microsoft.com/office/drawing/2014/main" id="{097E6E8A-9373-4655-882B-21715CCE97EE}"/>
+                </a:ext>
+                <a:ext uri="{C183D7F6-B498-43B3-948B-1728B52AA6E4}">
+                  <adec:decorative xmlns:adec="http://schemas.microsoft.com/office/drawing/2017/decorative" val="1"/>
+                </a:ext>
+              </a:extLst>
+            </p:cNvPr>
+            <p:cNvSpPr/>
+            <p:nvPr>
+              <p:extLst>
+                <p:ext uri="{386F3935-93C4-4BCD-93E2-E3B085C9AB24}">
+                  <p16:designElem xmlns:p16="http://schemas.microsoft.com/office/powerpoint/2015/main" val="1"/>
+                </p:ext>
+              </p:extLst>
+            </p:nvPr>
+          </p:nvSpPr>
+          <p:spPr bwMode="auto">
+            <a:xfrm>
+              <a:off x="223837" y="5041900"/>
+              <a:ext cx="369888" cy="1801813"/>
+            </a:xfrm>
+            <a:custGeom>
+              <a:avLst/>
+              <a:gdLst/>
+              <a:ahLst/>
+              <a:cxnLst/>
+              <a:rect l="0" t="0" r="r" b="b"/>
+              <a:pathLst>
+                <a:path w="233" h="1135">
+                  <a:moveTo>
+                    <a:pt x="15" y="1135"/>
+                  </a:moveTo>
+                  <a:lnTo>
+                    <a:pt x="0" y="1135"/>
+                  </a:lnTo>
+                  <a:lnTo>
+                    <a:pt x="0" y="515"/>
+                  </a:lnTo>
+                  <a:lnTo>
+                    <a:pt x="0" y="512"/>
+                  </a:lnTo>
+                  <a:lnTo>
+                    <a:pt x="218" y="0"/>
+                  </a:lnTo>
+                  <a:lnTo>
+                    <a:pt x="233" y="6"/>
+                  </a:lnTo>
+                  <a:lnTo>
+                    <a:pt x="15" y="518"/>
+                  </a:lnTo>
+                  <a:lnTo>
+                    <a:pt x="15" y="1135"/>
+                  </a:lnTo>
+                  <a:close/>
+                </a:path>
+              </a:pathLst>
+            </a:custGeom>
+            <a:grpFill/>
+            <a:ln>
+              <a:noFill/>
+            </a:ln>
+            <a:extLst>
+              <a:ext uri="{91240B29-F687-4f45-9708-019B960494DF}">
+                <a14:hiddenLine xmlns="" xmlns:a16="http://schemas.microsoft.com/office/drawing/2014/main" xmlns:p14="http://schemas.microsoft.com/office/powerpoint/2010/main" xmlns:a14="http://schemas.microsoft.com/office/drawing/2010/main" w="9525">
+                  <a:solidFill>
+                    <a:srgbClr val="000000"/>
+                  </a:solidFill>
+                  <a:round/>
+                  <a:headEnd/>
+                  <a:tailEnd/>
+                </a14:hiddenLine>
+              </a:ext>
+            </a:extLst>
+          </p:spPr>
+          <p:txBody>
+            <a:bodyPr/>
+            <a:lstStyle/>
+            <a:p>
+              <a:endParaRPr lang="en-US"/>
+            </a:p>
+          </p:txBody>
+        </p:sp>
+        <p:sp>
+          <p:nvSpPr>
+            <p:cNvPr id="1054" name="Freeform 23">
+              <a:extLst>
+                <a:ext uri="{FF2B5EF4-FFF2-40B4-BE49-F238E27FC236}">
+                  <a16:creationId xmlns:a16="http://schemas.microsoft.com/office/drawing/2014/main" id="{EB8CC766-1206-4372-ACAF-8230AF4D5421}"/>
+                </a:ext>
+                <a:ext uri="{C183D7F6-B498-43B3-948B-1728B52AA6E4}">
+                  <adec:decorative xmlns:adec="http://schemas.microsoft.com/office/drawing/2017/decorative" val="1"/>
+                </a:ext>
+              </a:extLst>
+            </p:cNvPr>
+            <p:cNvSpPr>
+              <a:spLocks noEditPoints="1"/>
+            </p:cNvSpPr>
+            <p:nvPr>
+              <p:extLst>
+                <p:ext uri="{386F3935-93C4-4BCD-93E2-E3B085C9AB24}">
+                  <p16:designElem xmlns:p16="http://schemas.microsoft.com/office/powerpoint/2015/main" val="1"/>
+                </p:ext>
+              </p:extLst>
+            </p:nvPr>
+          </p:nvSpPr>
+          <p:spPr bwMode="auto">
+            <a:xfrm>
+              <a:off x="52387" y="4481513"/>
+              <a:ext cx="190500" cy="190500"/>
+            </a:xfrm>
+            <a:custGeom>
+              <a:avLst/>
+              <a:gdLst/>
+              <a:ahLst/>
+              <a:cxnLst/>
+              <a:rect l="0" t="0" r="r" b="b"/>
+              <a:pathLst>
+                <a:path w="40" h="40">
+                  <a:moveTo>
+                    <a:pt x="20" y="40"/>
+                  </a:moveTo>
+                  <a:cubicBezTo>
+                    <a:pt x="9" y="40"/>
+                    <a:pt x="0" y="31"/>
+                    <a:pt x="0" y="20"/>
+                  </a:cubicBezTo>
+                  <a:cubicBezTo>
+                    <a:pt x="0" y="9"/>
+                    <a:pt x="9" y="0"/>
+                    <a:pt x="20" y="0"/>
+                  </a:cubicBezTo>
+                  <a:cubicBezTo>
+                    <a:pt x="31" y="0"/>
+                    <a:pt x="40" y="9"/>
+                    <a:pt x="40" y="20"/>
+                  </a:cubicBezTo>
+                  <a:cubicBezTo>
+                    <a:pt x="40" y="31"/>
+                    <a:pt x="31" y="40"/>
+                    <a:pt x="20" y="40"/>
+                  </a:cubicBezTo>
+                  <a:close/>
+                  <a:moveTo>
+                    <a:pt x="20" y="4"/>
+                  </a:moveTo>
+                  <a:cubicBezTo>
+                    <a:pt x="11" y="4"/>
+                    <a:pt x="4" y="11"/>
+                    <a:pt x="4" y="20"/>
+                  </a:cubicBezTo>
+                  <a:cubicBezTo>
+                    <a:pt x="4" y="29"/>
+                    <a:pt x="11" y="36"/>
+                    <a:pt x="20" y="36"/>
+                  </a:cubicBezTo>
+                  <a:cubicBezTo>
+                    <a:pt x="28" y="36"/>
+                    <a:pt x="36" y="29"/>
+                    <a:pt x="36" y="20"/>
+                  </a:cubicBezTo>
+                  <a:cubicBezTo>
+                    <a:pt x="36" y="11"/>
+                    <a:pt x="28" y="4"/>
+                    <a:pt x="20" y="4"/>
+                  </a:cubicBezTo>
+                  <a:close/>
+                </a:path>
+              </a:pathLst>
+            </a:custGeom>
+            <a:grpFill/>
+            <a:ln>
+              <a:noFill/>
+            </a:ln>
+            <a:extLst>
+              <a:ext uri="{91240B29-F687-4f45-9708-019B960494DF}">
+                <a14:hiddenLine xmlns="" xmlns:a16="http://schemas.microsoft.com/office/drawing/2014/main" xmlns:p14="http://schemas.microsoft.com/office/powerpoint/2010/main" xmlns:a14="http://schemas.microsoft.com/office/drawing/2010/main" w="9525">
+                  <a:solidFill>
+                    <a:srgbClr val="000000"/>
+                  </a:solidFill>
+                  <a:round/>
+                  <a:headEnd/>
+                  <a:tailEnd/>
+                </a14:hiddenLine>
+              </a:ext>
+            </a:extLst>
+          </p:spPr>
+          <p:txBody>
+            <a:bodyPr/>
+            <a:lstStyle/>
+            <a:p>
+              <a:endParaRPr lang="en-US"/>
+            </a:p>
+          </p:txBody>
+        </p:sp>
+        <p:sp>
+          <p:nvSpPr>
+            <p:cNvPr id="1055" name="Freeform 24">
+              <a:extLst>
+                <a:ext uri="{FF2B5EF4-FFF2-40B4-BE49-F238E27FC236}">
+                  <a16:creationId xmlns:a16="http://schemas.microsoft.com/office/drawing/2014/main" id="{1C8E2511-2489-47B2-9C19-C410910DD901}"/>
+                </a:ext>
+                <a:ext uri="{C183D7F6-B498-43B3-948B-1728B52AA6E4}">
+                  <adec:decorative xmlns:adec="http://schemas.microsoft.com/office/drawing/2017/decorative" val="1"/>
+                </a:ext>
+              </a:extLst>
+            </p:cNvPr>
+            <p:cNvSpPr/>
+            <p:nvPr>
+              <p:extLst>
+                <p:ext uri="{386F3935-93C4-4BCD-93E2-E3B085C9AB24}">
+                  <p16:designElem xmlns:p16="http://schemas.microsoft.com/office/powerpoint/2015/main" val="1"/>
+                </p:ext>
+              </p:extLst>
+            </p:nvPr>
+          </p:nvSpPr>
+          <p:spPr bwMode="auto">
+            <a:xfrm>
+              <a:off x="-14288" y="5627688"/>
+              <a:ext cx="85725" cy="1216025"/>
+            </a:xfrm>
+            <a:custGeom>
+              <a:avLst/>
+              <a:gdLst/>
+              <a:ahLst/>
+              <a:cxnLst/>
+              <a:rect l="0" t="0" r="r" b="b"/>
+              <a:pathLst>
+                <a:path w="54" h="766">
+                  <a:moveTo>
+                    <a:pt x="54" y="766"/>
+                  </a:moveTo>
+                  <a:lnTo>
+                    <a:pt x="36" y="766"/>
+                  </a:lnTo>
+                  <a:lnTo>
+                    <a:pt x="36" y="149"/>
+                  </a:lnTo>
+                  <a:lnTo>
+                    <a:pt x="0" y="3"/>
+                  </a:lnTo>
+                  <a:lnTo>
+                    <a:pt x="18" y="0"/>
+                  </a:lnTo>
+                  <a:lnTo>
+                    <a:pt x="54" y="146"/>
+                  </a:lnTo>
+                  <a:lnTo>
+                    <a:pt x="54" y="766"/>
+                  </a:lnTo>
+                  <a:close/>
+                </a:path>
+              </a:pathLst>
+            </a:custGeom>
+            <a:grpFill/>
+            <a:ln>
+              <a:noFill/>
+            </a:ln>
+            <a:extLst>
+              <a:ext uri="{91240B29-F687-4f45-9708-019B960494DF}">
+                <a14:hiddenLine xmlns="" xmlns:a16="http://schemas.microsoft.com/office/drawing/2014/main" xmlns:p14="http://schemas.microsoft.com/office/powerpoint/2010/main" xmlns:a14="http://schemas.microsoft.com/office/drawing/2010/main" w="9525">
+                  <a:solidFill>
+                    <a:srgbClr val="000000"/>
+                  </a:solidFill>
+                  <a:round/>
+                  <a:headEnd/>
+                  <a:tailEnd/>
+                </a14:hiddenLine>
+              </a:ext>
+            </a:extLst>
+          </p:spPr>
+          <p:txBody>
+            <a:bodyPr/>
+            <a:lstStyle/>
+            <a:p>
+              <a:endParaRPr lang="en-US"/>
+            </a:p>
+          </p:txBody>
+        </p:sp>
+        <p:sp>
+          <p:nvSpPr>
+            <p:cNvPr id="1056" name="Freeform 25">
+              <a:extLst>
+                <a:ext uri="{FF2B5EF4-FFF2-40B4-BE49-F238E27FC236}">
+                  <a16:creationId xmlns:a16="http://schemas.microsoft.com/office/drawing/2014/main" id="{D7820196-0A47-47EF-832C-A688E8977D60}"/>
+                </a:ext>
+                <a:ext uri="{C183D7F6-B498-43B3-948B-1728B52AA6E4}">
+                  <adec:decorative xmlns:adec="http://schemas.microsoft.com/office/drawing/2017/decorative" val="1"/>
+                </a:ext>
+              </a:extLst>
+            </p:cNvPr>
+            <p:cNvSpPr>
+              <a:spLocks noEditPoints="1"/>
+            </p:cNvSpPr>
+            <p:nvPr>
+              <p:extLst>
+                <p:ext uri="{386F3935-93C4-4BCD-93E2-E3B085C9AB24}">
+                  <p16:designElem xmlns:p16="http://schemas.microsoft.com/office/powerpoint/2015/main" val="1"/>
+                </p:ext>
+              </p:extLst>
+            </p:nvPr>
+          </p:nvSpPr>
+          <p:spPr bwMode="auto">
+            <a:xfrm>
+              <a:off x="527050" y="4867275"/>
+              <a:ext cx="190500" cy="188913"/>
+            </a:xfrm>
+            <a:custGeom>
+              <a:avLst/>
+              <a:gdLst/>
+              <a:ahLst/>
+              <a:cxnLst/>
+              <a:rect l="0" t="0" r="r" b="b"/>
+              <a:pathLst>
+                <a:path w="40" h="40">
+                  <a:moveTo>
+                    <a:pt x="20" y="40"/>
+                  </a:moveTo>
+                  <a:cubicBezTo>
+                    <a:pt x="9" y="40"/>
+                    <a:pt x="0" y="31"/>
+                    <a:pt x="0" y="20"/>
+                  </a:cubicBezTo>
+                  <a:cubicBezTo>
+                    <a:pt x="0" y="9"/>
+                    <a:pt x="9" y="0"/>
+                    <a:pt x="20" y="0"/>
+                  </a:cubicBezTo>
+                  <a:cubicBezTo>
+                    <a:pt x="31" y="0"/>
+                    <a:pt x="40" y="9"/>
+                    <a:pt x="40" y="20"/>
+                  </a:cubicBezTo>
+                  <a:cubicBezTo>
+                    <a:pt x="40" y="31"/>
+                    <a:pt x="31" y="40"/>
+                    <a:pt x="20" y="40"/>
+                  </a:cubicBezTo>
+                  <a:close/>
+                  <a:moveTo>
+                    <a:pt x="20" y="4"/>
+                  </a:moveTo>
+                  <a:cubicBezTo>
+                    <a:pt x="11" y="4"/>
+                    <a:pt x="4" y="11"/>
+                    <a:pt x="4" y="20"/>
+                  </a:cubicBezTo>
+                  <a:cubicBezTo>
+                    <a:pt x="4" y="29"/>
+                    <a:pt x="11" y="36"/>
+                    <a:pt x="20" y="36"/>
+                  </a:cubicBezTo>
+                  <a:cubicBezTo>
+                    <a:pt x="29" y="36"/>
+                    <a:pt x="36" y="29"/>
+                    <a:pt x="36" y="20"/>
+                  </a:cubicBezTo>
+                  <a:cubicBezTo>
+                    <a:pt x="36" y="11"/>
+                    <a:pt x="29" y="4"/>
+                    <a:pt x="20" y="4"/>
+                  </a:cubicBezTo>
+                  <a:close/>
+                </a:path>
+              </a:pathLst>
+            </a:custGeom>
+            <a:grpFill/>
+            <a:ln>
+              <a:noFill/>
+            </a:ln>
+            <a:extLst>
+              <a:ext uri="{91240B29-F687-4f45-9708-019B960494DF}">
+                <a14:hiddenLine xmlns="" xmlns:a16="http://schemas.microsoft.com/office/drawing/2014/main" xmlns:p14="http://schemas.microsoft.com/office/powerpoint/2010/main" xmlns:a14="http://schemas.microsoft.com/office/drawing/2010/main" w="9525">
+                  <a:solidFill>
+                    <a:srgbClr val="000000"/>
+                  </a:solidFill>
+                  <a:round/>
+                  <a:headEnd/>
+                  <a:tailEnd/>
+                </a14:hiddenLine>
+              </a:ext>
+            </a:extLst>
+          </p:spPr>
+          <p:txBody>
+            <a:bodyPr/>
+            <a:lstStyle/>
+            <a:p>
+              <a:endParaRPr lang="en-US"/>
+            </a:p>
+          </p:txBody>
+        </p:sp>
+        <p:sp>
+          <p:nvSpPr>
+            <p:cNvPr id="1057" name="Freeform 26">
+              <a:extLst>
+                <a:ext uri="{FF2B5EF4-FFF2-40B4-BE49-F238E27FC236}">
+                  <a16:creationId xmlns:a16="http://schemas.microsoft.com/office/drawing/2014/main" id="{4982E0BF-34AE-48A3-AD6B-E0F3CD05DB34}"/>
+                </a:ext>
+                <a:ext uri="{C183D7F6-B498-43B3-948B-1728B52AA6E4}">
+                  <adec:decorative xmlns:adec="http://schemas.microsoft.com/office/drawing/2017/decorative" val="1"/>
+                </a:ext>
+              </a:extLst>
+            </p:cNvPr>
+            <p:cNvSpPr/>
+            <p:nvPr>
+              <p:extLst>
+                <p:ext uri="{386F3935-93C4-4BCD-93E2-E3B085C9AB24}">
+                  <p16:designElem xmlns:p16="http://schemas.microsoft.com/office/powerpoint/2015/main" val="1"/>
+                </p:ext>
+              </p:extLst>
+            </p:nvPr>
+          </p:nvSpPr>
+          <p:spPr bwMode="auto">
+            <a:xfrm>
+              <a:off x="309562" y="5422900"/>
+              <a:ext cx="374650" cy="1425575"/>
+            </a:xfrm>
+            <a:custGeom>
+              <a:avLst/>
+              <a:gdLst/>
+              <a:ahLst/>
+              <a:cxnLst/>
+              <a:rect l="0" t="0" r="r" b="b"/>
+              <a:pathLst>
+                <a:path w="236" h="898">
+                  <a:moveTo>
+                    <a:pt x="18" y="898"/>
+                  </a:moveTo>
+                  <a:lnTo>
+                    <a:pt x="0" y="898"/>
+                  </a:lnTo>
+                  <a:lnTo>
+                    <a:pt x="0" y="515"/>
+                  </a:lnTo>
+                  <a:lnTo>
+                    <a:pt x="3" y="512"/>
+                  </a:lnTo>
+                  <a:lnTo>
+                    <a:pt x="221" y="0"/>
+                  </a:lnTo>
+                  <a:lnTo>
+                    <a:pt x="236" y="6"/>
+                  </a:lnTo>
+                  <a:lnTo>
+                    <a:pt x="18" y="518"/>
+                  </a:lnTo>
+                  <a:lnTo>
+                    <a:pt x="18" y="898"/>
+                  </a:lnTo>
+                  <a:close/>
+                </a:path>
+              </a:pathLst>
+            </a:custGeom>
+            <a:grpFill/>
+            <a:ln>
+              <a:noFill/>
+            </a:ln>
+            <a:extLst>
+              <a:ext uri="{91240B29-F687-4f45-9708-019B960494DF}">
+                <a14:hiddenLine xmlns="" xmlns:a16="http://schemas.microsoft.com/office/drawing/2014/main" xmlns:p14="http://schemas.microsoft.com/office/powerpoint/2010/main" xmlns:a14="http://schemas.microsoft.com/office/drawing/2010/main" w="9525">
+                  <a:solidFill>
+                    <a:srgbClr val="000000"/>
+                  </a:solidFill>
+                  <a:round/>
+                  <a:headEnd/>
+                  <a:tailEnd/>
+                </a14:hiddenLine>
+              </a:ext>
+            </a:extLst>
+          </p:spPr>
+          <p:txBody>
+            <a:bodyPr/>
+            <a:lstStyle/>
+            <a:p>
+              <a:endParaRPr lang="en-US"/>
+            </a:p>
+          </p:txBody>
+        </p:sp>
+        <p:sp>
+          <p:nvSpPr>
+            <p:cNvPr id="1058" name="Freeform 27">
+              <a:extLst>
+                <a:ext uri="{FF2B5EF4-FFF2-40B4-BE49-F238E27FC236}">
+                  <a16:creationId xmlns:a16="http://schemas.microsoft.com/office/drawing/2014/main" id="{CD34643B-9DF2-4310-8868-48252C3393F0}"/>
+                </a:ext>
+                <a:ext uri="{C183D7F6-B498-43B3-948B-1728B52AA6E4}">
+                  <adec:decorative xmlns:adec="http://schemas.microsoft.com/office/drawing/2017/decorative" val="1"/>
+                </a:ext>
+              </a:extLst>
+            </p:cNvPr>
+            <p:cNvSpPr/>
+            <p:nvPr>
+              <p:extLst>
+                <p:ext uri="{386F3935-93C4-4BCD-93E2-E3B085C9AB24}">
+                  <p16:designElem xmlns:p16="http://schemas.microsoft.com/office/powerpoint/2015/main" val="1"/>
+                </p:ext>
+              </p:extLst>
+            </p:nvPr>
+          </p:nvSpPr>
+          <p:spPr bwMode="auto">
+            <a:xfrm>
+              <a:off x="569912" y="5945188"/>
+              <a:ext cx="152400" cy="912813"/>
+            </a:xfrm>
+            <a:custGeom>
+              <a:avLst/>
+              <a:gdLst/>
+              <a:ahLst/>
+              <a:cxnLst/>
+              <a:rect l="0" t="0" r="r" b="b"/>
+              <a:pathLst>
+                <a:path w="96" h="575">
+                  <a:moveTo>
+                    <a:pt x="15" y="575"/>
+                  </a:moveTo>
+                  <a:lnTo>
+                    <a:pt x="0" y="569"/>
+                  </a:lnTo>
+                  <a:lnTo>
+                    <a:pt x="81" y="383"/>
+                  </a:lnTo>
+                  <a:lnTo>
+                    <a:pt x="81" y="0"/>
+                  </a:lnTo>
+                  <a:lnTo>
+                    <a:pt x="96" y="0"/>
+                  </a:lnTo>
+                  <a:lnTo>
+                    <a:pt x="96" y="386"/>
+                  </a:lnTo>
+                  <a:lnTo>
+                    <a:pt x="15" y="575"/>
+                  </a:lnTo>
+                  <a:close/>
+                </a:path>
+              </a:pathLst>
+            </a:custGeom>
+            <a:grpFill/>
+            <a:ln>
+              <a:noFill/>
+            </a:ln>
+            <a:extLst>
+              <a:ext uri="{91240B29-F687-4f45-9708-019B960494DF}">
+                <a14:hiddenLine xmlns="" xmlns:a16="http://schemas.microsoft.com/office/drawing/2014/main" xmlns:p14="http://schemas.microsoft.com/office/powerpoint/2010/main" xmlns:a14="http://schemas.microsoft.com/office/drawing/2010/main" w="9525">
+                  <a:solidFill>
+                    <a:srgbClr val="000000"/>
+                  </a:solidFill>
+                  <a:round/>
+                  <a:headEnd/>
+                  <a:tailEnd/>
+                </a14:hiddenLine>
+              </a:ext>
+            </a:extLst>
+          </p:spPr>
+          <p:txBody>
+            <a:bodyPr/>
+            <a:lstStyle/>
+            <a:p>
+              <a:endParaRPr lang="en-US"/>
+            </a:p>
+          </p:txBody>
+        </p:sp>
+        <p:sp>
+          <p:nvSpPr>
+            <p:cNvPr id="1059" name="Freeform 28">
+              <a:extLst>
+                <a:ext uri="{FF2B5EF4-FFF2-40B4-BE49-F238E27FC236}">
+                  <a16:creationId xmlns:a16="http://schemas.microsoft.com/office/drawing/2014/main" id="{4E020C4E-AF64-44A8-B830-779541D8D549}"/>
+                </a:ext>
+                <a:ext uri="{C183D7F6-B498-43B3-948B-1728B52AA6E4}">
+                  <adec:decorative xmlns:adec="http://schemas.microsoft.com/office/drawing/2017/decorative" val="1"/>
+                </a:ext>
+              </a:extLst>
+            </p:cNvPr>
+            <p:cNvSpPr>
+              <a:spLocks noEditPoints="1"/>
+            </p:cNvSpPr>
+            <p:nvPr>
+              <p:extLst>
+                <p:ext uri="{386F3935-93C4-4BCD-93E2-E3B085C9AB24}">
+                  <p16:designElem xmlns:p16="http://schemas.microsoft.com/office/powerpoint/2015/main" val="1"/>
+                </p:ext>
+              </p:extLst>
+            </p:nvPr>
+          </p:nvSpPr>
+          <p:spPr bwMode="auto">
+            <a:xfrm>
+              <a:off x="612775" y="5246688"/>
+              <a:ext cx="190500" cy="190500"/>
+            </a:xfrm>
+            <a:custGeom>
+              <a:avLst/>
+              <a:gdLst/>
+              <a:ahLst/>
+              <a:cxnLst/>
+              <a:rect l="0" t="0" r="r" b="b"/>
+              <a:pathLst>
+                <a:path w="40" h="40">
+                  <a:moveTo>
+                    <a:pt x="20" y="40"/>
+                  </a:moveTo>
+                  <a:cubicBezTo>
+                    <a:pt x="9" y="40"/>
+                    <a:pt x="0" y="31"/>
+                    <a:pt x="0" y="20"/>
+                  </a:cubicBezTo>
+                  <a:cubicBezTo>
+                    <a:pt x="0" y="9"/>
+                    <a:pt x="9" y="0"/>
+                    <a:pt x="20" y="0"/>
+                  </a:cubicBezTo>
+                  <a:cubicBezTo>
+                    <a:pt x="31" y="0"/>
+                    <a:pt x="40" y="9"/>
+                    <a:pt x="40" y="20"/>
+                  </a:cubicBezTo>
+                  <a:cubicBezTo>
+                    <a:pt x="40" y="31"/>
+                    <a:pt x="31" y="40"/>
+                    <a:pt x="20" y="40"/>
+                  </a:cubicBezTo>
+                  <a:close/>
+                  <a:moveTo>
+                    <a:pt x="20" y="4"/>
+                  </a:moveTo>
+                  <a:cubicBezTo>
+                    <a:pt x="12" y="4"/>
+                    <a:pt x="4" y="11"/>
+                    <a:pt x="4" y="20"/>
+                  </a:cubicBezTo>
+                  <a:cubicBezTo>
+                    <a:pt x="4" y="29"/>
+                    <a:pt x="12" y="36"/>
+                    <a:pt x="20" y="36"/>
+                  </a:cubicBezTo>
+                  <a:cubicBezTo>
+                    <a:pt x="29" y="36"/>
+                    <a:pt x="36" y="29"/>
+                    <a:pt x="36" y="20"/>
+                  </a:cubicBezTo>
+                  <a:cubicBezTo>
+                    <a:pt x="36" y="11"/>
+                    <a:pt x="29" y="4"/>
+                    <a:pt x="20" y="4"/>
+                  </a:cubicBezTo>
+                  <a:close/>
+                </a:path>
+              </a:pathLst>
+            </a:custGeom>
+            <a:grpFill/>
+            <a:ln>
+              <a:noFill/>
+            </a:ln>
+            <a:extLst>
+              <a:ext uri="{91240B29-F687-4f45-9708-019B960494DF}">
+                <a14:hiddenLine xmlns="" xmlns:a16="http://schemas.microsoft.com/office/drawing/2014/main" xmlns:p14="http://schemas.microsoft.com/office/powerpoint/2010/main" xmlns:a14="http://schemas.microsoft.com/office/drawing/2010/main" w="9525">
+                  <a:solidFill>
+                    <a:srgbClr val="000000"/>
+                  </a:solidFill>
+                  <a:round/>
+                  <a:headEnd/>
+                  <a:tailEnd/>
+                </a14:hiddenLine>
+              </a:ext>
+            </a:extLst>
+          </p:spPr>
+          <p:txBody>
+            <a:bodyPr/>
+            <a:lstStyle/>
+            <a:p>
+              <a:endParaRPr lang="en-US"/>
+            </a:p>
+          </p:txBody>
+        </p:sp>
+        <p:sp>
+          <p:nvSpPr>
+            <p:cNvPr id="1060" name="Freeform 29">
+              <a:extLst>
+                <a:ext uri="{FF2B5EF4-FFF2-40B4-BE49-F238E27FC236}">
+                  <a16:creationId xmlns:a16="http://schemas.microsoft.com/office/drawing/2014/main" id="{D97BC3D3-B1B3-4825-9169-BBEF1DBCF055}"/>
+                </a:ext>
+                <a:ext uri="{C183D7F6-B498-43B3-948B-1728B52AA6E4}">
+                  <adec:decorative xmlns:adec="http://schemas.microsoft.com/office/drawing/2017/decorative" val="1"/>
+                </a:ext>
+              </a:extLst>
+            </p:cNvPr>
+            <p:cNvSpPr>
+              <a:spLocks noEditPoints="1"/>
+            </p:cNvSpPr>
+            <p:nvPr>
+              <p:extLst>
+                <p:ext uri="{386F3935-93C4-4BCD-93E2-E3B085C9AB24}">
+                  <p16:designElem xmlns:p16="http://schemas.microsoft.com/office/powerpoint/2015/main" val="1"/>
+                </p:ext>
+              </p:extLst>
+            </p:nvPr>
+          </p:nvSpPr>
+          <p:spPr bwMode="auto">
+            <a:xfrm>
+              <a:off x="612775" y="5764213"/>
+              <a:ext cx="190500" cy="190500"/>
+            </a:xfrm>
+            <a:custGeom>
+              <a:avLst/>
+              <a:gdLst/>
+              <a:ahLst/>
+              <a:cxnLst/>
+              <a:rect l="0" t="0" r="r" b="b"/>
+              <a:pathLst>
+                <a:path w="40" h="40">
+                  <a:moveTo>
+                    <a:pt x="20" y="40"/>
+                  </a:moveTo>
+                  <a:cubicBezTo>
+                    <a:pt x="9" y="40"/>
+                    <a:pt x="0" y="31"/>
+                    <a:pt x="0" y="20"/>
+                  </a:cubicBezTo>
+                  <a:cubicBezTo>
+                    <a:pt x="0" y="9"/>
+                    <a:pt x="9" y="0"/>
+                    <a:pt x="20" y="0"/>
+                  </a:cubicBezTo>
+                  <a:cubicBezTo>
+                    <a:pt x="31" y="0"/>
+                    <a:pt x="40" y="9"/>
+                    <a:pt x="40" y="20"/>
+                  </a:cubicBezTo>
+                  <a:cubicBezTo>
+                    <a:pt x="40" y="31"/>
+                    <a:pt x="31" y="40"/>
+                    <a:pt x="20" y="40"/>
+                  </a:cubicBezTo>
+                  <a:close/>
+                  <a:moveTo>
+                    <a:pt x="20" y="4"/>
+                  </a:moveTo>
+                  <a:cubicBezTo>
+                    <a:pt x="12" y="4"/>
+                    <a:pt x="4" y="11"/>
+                    <a:pt x="4" y="20"/>
+                  </a:cubicBezTo>
+                  <a:cubicBezTo>
+                    <a:pt x="4" y="29"/>
+                    <a:pt x="12" y="36"/>
+                    <a:pt x="20" y="36"/>
+                  </a:cubicBezTo>
+                  <a:cubicBezTo>
+                    <a:pt x="29" y="36"/>
+                    <a:pt x="36" y="29"/>
+                    <a:pt x="36" y="20"/>
+                  </a:cubicBezTo>
+                  <a:cubicBezTo>
+                    <a:pt x="36" y="11"/>
+                    <a:pt x="29" y="4"/>
+                    <a:pt x="20" y="4"/>
+                  </a:cubicBezTo>
+                  <a:close/>
+                </a:path>
+              </a:pathLst>
+            </a:custGeom>
+            <a:grpFill/>
+            <a:ln>
+              <a:noFill/>
+            </a:ln>
+            <a:extLst>
+              <a:ext uri="{91240B29-F687-4f45-9708-019B960494DF}">
+                <a14:hiddenLine xmlns="" xmlns:a16="http://schemas.microsoft.com/office/drawing/2014/main" xmlns:p14="http://schemas.microsoft.com/office/powerpoint/2010/main" xmlns:a14="http://schemas.microsoft.com/office/drawing/2010/main" w="9525">
+                  <a:solidFill>
+                    <a:srgbClr val="000000"/>
+                  </a:solidFill>
+                  <a:round/>
+                  <a:headEnd/>
+                  <a:tailEnd/>
+                </a14:hiddenLine>
+              </a:ext>
+            </a:extLst>
+          </p:spPr>
+          <p:txBody>
+            <a:bodyPr/>
+            <a:lstStyle/>
+            <a:p>
+              <a:endParaRPr lang="en-US"/>
+            </a:p>
+          </p:txBody>
+        </p:sp>
+        <p:sp>
+          <p:nvSpPr>
+            <p:cNvPr id="1061" name="Freeform 30">
+              <a:extLst>
+                <a:ext uri="{FF2B5EF4-FFF2-40B4-BE49-F238E27FC236}">
+                  <a16:creationId xmlns:a16="http://schemas.microsoft.com/office/drawing/2014/main" id="{A750DC4F-1DAF-470E-98C6-6C68DEB93363}"/>
+                </a:ext>
+                <a:ext uri="{C183D7F6-B498-43B3-948B-1728B52AA6E4}">
+                  <adec:decorative xmlns:adec="http://schemas.microsoft.com/office/drawing/2017/decorative" val="1"/>
+                </a:ext>
+              </a:extLst>
+            </p:cNvPr>
+            <p:cNvSpPr/>
+            <p:nvPr>
+              <p:extLst>
+                <p:ext uri="{386F3935-93C4-4BCD-93E2-E3B085C9AB24}">
+                  <p16:designElem xmlns:p16="http://schemas.microsoft.com/office/powerpoint/2015/main" val="1"/>
+                </p:ext>
+              </p:extLst>
+            </p:nvPr>
+          </p:nvSpPr>
+          <p:spPr bwMode="auto">
+            <a:xfrm>
+              <a:off x="669925" y="6330950"/>
+              <a:ext cx="417513" cy="517525"/>
+            </a:xfrm>
+            <a:custGeom>
+              <a:avLst/>
+              <a:gdLst/>
+              <a:ahLst/>
+              <a:cxnLst/>
+              <a:rect l="0" t="0" r="r" b="b"/>
+              <a:pathLst>
+                <a:path w="263" h="326">
+                  <a:moveTo>
+                    <a:pt x="15" y="326"/>
+                  </a:moveTo>
+                  <a:lnTo>
+                    <a:pt x="0" y="320"/>
+                  </a:lnTo>
+                  <a:lnTo>
+                    <a:pt x="45" y="206"/>
+                  </a:lnTo>
+                  <a:lnTo>
+                    <a:pt x="48" y="206"/>
+                  </a:lnTo>
+                  <a:lnTo>
+                    <a:pt x="254" y="0"/>
+                  </a:lnTo>
+                  <a:lnTo>
+                    <a:pt x="263" y="12"/>
+                  </a:lnTo>
+                  <a:lnTo>
+                    <a:pt x="60" y="215"/>
+                  </a:lnTo>
+                  <a:lnTo>
+                    <a:pt x="15" y="326"/>
+                  </a:lnTo>
+                  <a:close/>
+                </a:path>
+              </a:pathLst>
+            </a:custGeom>
+            <a:grpFill/>
+            <a:ln>
+              <a:noFill/>
+            </a:ln>
+            <a:extLst>
+              <a:ext uri="{91240B29-F687-4f45-9708-019B960494DF}">
+                <a14:hiddenLine xmlns="" xmlns:a16="http://schemas.microsoft.com/office/drawing/2014/main" xmlns:p14="http://schemas.microsoft.com/office/powerpoint/2010/main" xmlns:a14="http://schemas.microsoft.com/office/drawing/2010/main" w="9525">
+                  <a:solidFill>
+                    <a:srgbClr val="000000"/>
+                  </a:solidFill>
+                  <a:round/>
+                  <a:headEnd/>
+                  <a:tailEnd/>
+                </a14:hiddenLine>
+              </a:ext>
+            </a:extLst>
+          </p:spPr>
+          <p:txBody>
+            <a:bodyPr/>
+            <a:lstStyle/>
+            <a:p>
+              <a:endParaRPr lang="en-US"/>
+            </a:p>
+          </p:txBody>
+        </p:sp>
+        <p:sp>
+          <p:nvSpPr>
+            <p:cNvPr id="1062" name="Freeform 31">
+              <a:extLst>
+                <a:ext uri="{FF2B5EF4-FFF2-40B4-BE49-F238E27FC236}">
+                  <a16:creationId xmlns:a16="http://schemas.microsoft.com/office/drawing/2014/main" id="{2F99594A-5BBD-4E10-A818-8BE52B7D952C}"/>
+                </a:ext>
+                <a:ext uri="{C183D7F6-B498-43B3-948B-1728B52AA6E4}">
+                  <adec:decorative xmlns:adec="http://schemas.microsoft.com/office/drawing/2017/decorative" val="1"/>
+                </a:ext>
+              </a:extLst>
+            </p:cNvPr>
+            <p:cNvSpPr>
+              <a:spLocks noEditPoints="1"/>
+            </p:cNvSpPr>
+            <p:nvPr>
+              <p:extLst>
+                <p:ext uri="{386F3935-93C4-4BCD-93E2-E3B085C9AB24}">
+                  <p16:designElem xmlns:p16="http://schemas.microsoft.com/office/powerpoint/2015/main" val="1"/>
+                </p:ext>
+              </p:extLst>
+            </p:nvPr>
+          </p:nvSpPr>
+          <p:spPr bwMode="auto">
+            <a:xfrm>
+              <a:off x="1049337" y="6221413"/>
+              <a:ext cx="157163" cy="147638"/>
+            </a:xfrm>
+            <a:custGeom>
+              <a:avLst/>
+              <a:gdLst/>
+              <a:ahLst/>
+              <a:cxnLst/>
+              <a:rect l="0" t="0" r="r" b="b"/>
+              <a:pathLst>
+                <a:path w="33" h="31">
+                  <a:moveTo>
+                    <a:pt x="16" y="31"/>
+                  </a:moveTo>
+                  <a:cubicBezTo>
+                    <a:pt x="12" y="31"/>
+                    <a:pt x="8" y="29"/>
+                    <a:pt x="5" y="26"/>
+                  </a:cubicBezTo>
+                  <a:cubicBezTo>
+                    <a:pt x="2" y="24"/>
+                    <a:pt x="0" y="20"/>
+                    <a:pt x="0" y="15"/>
+                  </a:cubicBezTo>
+                  <a:cubicBezTo>
+                    <a:pt x="0" y="11"/>
+                    <a:pt x="2" y="7"/>
+                    <a:pt x="5" y="4"/>
+                  </a:cubicBezTo>
+                  <a:cubicBezTo>
+                    <a:pt x="8" y="1"/>
+                    <a:pt x="12" y="0"/>
+                    <a:pt x="16" y="0"/>
+                  </a:cubicBezTo>
+                  <a:cubicBezTo>
+                    <a:pt x="20" y="0"/>
+                    <a:pt x="24" y="1"/>
+                    <a:pt x="27" y="4"/>
+                  </a:cubicBezTo>
+                  <a:cubicBezTo>
+                    <a:pt x="33" y="10"/>
+                    <a:pt x="33" y="20"/>
+                    <a:pt x="27" y="26"/>
+                  </a:cubicBezTo>
+                  <a:cubicBezTo>
+                    <a:pt x="24" y="29"/>
+                    <a:pt x="20" y="31"/>
+                    <a:pt x="16" y="31"/>
+                  </a:cubicBezTo>
+                  <a:close/>
+                  <a:moveTo>
+                    <a:pt x="16" y="4"/>
+                  </a:moveTo>
+                  <a:cubicBezTo>
+                    <a:pt x="13" y="4"/>
+                    <a:pt x="10" y="5"/>
+                    <a:pt x="8" y="7"/>
+                  </a:cubicBezTo>
+                  <a:cubicBezTo>
+                    <a:pt x="6" y="9"/>
+                    <a:pt x="4" y="12"/>
+                    <a:pt x="4" y="15"/>
+                  </a:cubicBezTo>
+                  <a:cubicBezTo>
+                    <a:pt x="4" y="19"/>
+                    <a:pt x="6" y="21"/>
+                    <a:pt x="8" y="24"/>
+                  </a:cubicBezTo>
+                  <a:cubicBezTo>
+                    <a:pt x="10" y="26"/>
+                    <a:pt x="13" y="27"/>
+                    <a:pt x="16" y="27"/>
+                  </a:cubicBezTo>
+                  <a:cubicBezTo>
+                    <a:pt x="19" y="27"/>
+                    <a:pt x="22" y="26"/>
+                    <a:pt x="24" y="24"/>
+                  </a:cubicBezTo>
+                  <a:cubicBezTo>
+                    <a:pt x="29" y="19"/>
+                    <a:pt x="29" y="12"/>
+                    <a:pt x="24" y="7"/>
+                  </a:cubicBezTo>
+                  <a:cubicBezTo>
+                    <a:pt x="22" y="5"/>
+                    <a:pt x="19" y="4"/>
+                    <a:pt x="16" y="4"/>
+                  </a:cubicBezTo>
+                  <a:close/>
+                </a:path>
+              </a:pathLst>
+            </a:custGeom>
+            <a:grpFill/>
+            <a:ln>
+              <a:noFill/>
+            </a:ln>
+            <a:extLst>
+              <a:ext uri="{91240B29-F687-4f45-9708-019B960494DF}">
+                <a14:hiddenLine xmlns="" xmlns:a16="http://schemas.microsoft.com/office/drawing/2014/main" xmlns:p14="http://schemas.microsoft.com/office/powerpoint/2010/main" xmlns:a14="http://schemas.microsoft.com/office/drawing/2010/main" w="9525">
+                  <a:solidFill>
+                    <a:srgbClr val="000000"/>
+                  </a:solidFill>
+                  <a:round/>
+                  <a:headEnd/>
+                  <a:tailEnd/>
+                </a14:hiddenLine>
+              </a:ext>
+            </a:extLst>
+          </p:spPr>
+          <p:txBody>
+            <a:bodyPr/>
+            <a:lstStyle/>
+            <a:p>
+              <a:endParaRPr lang="en-US"/>
+            </a:p>
+          </p:txBody>
+        </p:sp>
+      </p:grpSp>
     </p:spTree>
     <p:extLst>
       <p:ext uri="{BB962C8B-B14F-4D97-AF65-F5344CB8AC3E}">
@@ -41328,6 +44043,18 @@
   <p:clrMapOvr>
     <a:masterClrMapping/>
   </p:clrMapOvr>
+  <mc:AlternateContent xmlns:mc="http://schemas.openxmlformats.org/markup-compatibility/2006">
+    <mc:Choice xmlns:p14="http://schemas.microsoft.com/office/powerpoint/2010/main" Requires="p14">
+      <p:transition spd="slow" p14:dur="1500">
+        <p:split orient="vert"/>
+      </p:transition>
+    </mc:Choice>
+    <mc:Fallback>
+      <p:transition spd="slow">
+        <p:split orient="vert"/>
+      </p:transition>
+    </mc:Fallback>
+  </mc:AlternateContent>
   <p:timing>
     <p:tnLst>
       <p:par>
@@ -41580,6 +44307,67 @@
                       </p:childTnLst>
                     </p:cTn>
                   </p:par>
+                  <p:par>
+                    <p:cTn id="23" fill="hold">
+                      <p:stCondLst>
+                        <p:cond delay="indefinite"/>
+                      </p:stCondLst>
+                      <p:childTnLst>
+                        <p:par>
+                          <p:cTn id="24" fill="hold">
+                            <p:stCondLst>
+                              <p:cond delay="0"/>
+                            </p:stCondLst>
+                            <p:childTnLst>
+                              <p:par>
+                                <p:cTn id="25" presetID="16" presetClass="entr" presetSubtype="21" fill="hold" grpId="0" nodeType="clickEffect">
+                                  <p:stCondLst>
+                                    <p:cond delay="0"/>
+                                  </p:stCondLst>
+                                  <p:childTnLst>
+                                    <p:set>
+                                      <p:cBhvr>
+                                        <p:cTn id="26" dur="1" fill="hold">
+                                          <p:stCondLst>
+                                            <p:cond delay="0"/>
+                                          </p:stCondLst>
+                                        </p:cTn>
+                                        <p:tgtEl>
+                                          <p:spTgt spid="4">
+                                            <p:txEl>
+                                              <p:pRg st="4" end="4"/>
+                                            </p:txEl>
+                                          </p:spTgt>
+                                        </p:tgtEl>
+                                        <p:attrNameLst>
+                                          <p:attrName>style.visibility</p:attrName>
+                                        </p:attrNameLst>
+                                      </p:cBhvr>
+                                      <p:to>
+                                        <p:strVal val="visible"/>
+                                      </p:to>
+                                    </p:set>
+                                    <p:animEffect transition="in" filter="barn(inVertical)">
+                                      <p:cBhvr>
+                                        <p:cTn id="27" dur="500"/>
+                                        <p:tgtEl>
+                                          <p:spTgt spid="4">
+                                            <p:txEl>
+                                              <p:pRg st="4" end="4"/>
+                                            </p:txEl>
+                                          </p:spTgt>
+                                        </p:tgtEl>
+                                      </p:cBhvr>
+                                    </p:animEffect>
+                                  </p:childTnLst>
+                                </p:cTn>
+                              </p:par>
+                            </p:childTnLst>
+                          </p:cTn>
+                        </p:par>
+                      </p:childTnLst>
+                    </p:cTn>
+                  </p:par>
                 </p:childTnLst>
               </p:cTn>
               <p:prevCondLst>
@@ -41793,7 +44581,7 @@
             <a:noFill/>
             <a:extLst>
               <a:ext uri="{909E8E84-426E-40dd-AFC4-6F175D3DCCD1}">
-                <a14:hiddenFill xmlns:p14="http://schemas.microsoft.com/office/powerpoint/2010/main" xmlns:a14="http://schemas.microsoft.com/office/drawing/2010/main" xmlns:a16="http://schemas.microsoft.com/office/drawing/2014/main" xmlns="">
+                <a14:hiddenFill xmlns="" xmlns:a16="http://schemas.microsoft.com/office/drawing/2014/main" xmlns:a14="http://schemas.microsoft.com/office/drawing/2010/main" xmlns:p14="http://schemas.microsoft.com/office/powerpoint/2010/main">
                   <a:solidFill>
                     <a:srgbClr val="FFFFFF"/>
                   </a:solidFill>
@@ -41821,7 +44609,7 @@
         </p:nvSpPr>
         <p:spPr>
           <a:xfrm>
-            <a:off x="6448425" y="618518"/>
+            <a:off x="2163765" y="259253"/>
             <a:ext cx="4598985" cy="1478570"/>
           </a:xfrm>
         </p:spPr>
@@ -41832,10 +44620,10 @@
           <a:lstStyle/>
           <a:p>
             <a:r>
-              <a:rPr lang="hr-HR" dirty="0"/>
+              <a:rPr lang="hr-HR" sz="4800" dirty="0"/>
               <a:t>RJEŠENJE</a:t>
             </a:r>
-            <a:endParaRPr lang="en-US" dirty="0"/>
+            <a:endParaRPr lang="en-US" sz="4800" dirty="0"/>
           </a:p>
         </p:txBody>
       </p:sp>
@@ -41913,7 +44701,7 @@
             </a:ln>
             <a:extLst>
               <a:ext uri="{91240B29-F687-4f45-9708-019B960494DF}">
-                <a14:hiddenLine xmlns:p14="http://schemas.microsoft.com/office/powerpoint/2010/main" xmlns:a14="http://schemas.microsoft.com/office/drawing/2010/main" xmlns:a16="http://schemas.microsoft.com/office/drawing/2014/main" xmlns="" w="9525">
+                <a14:hiddenLine xmlns="" xmlns:a16="http://schemas.microsoft.com/office/drawing/2014/main" xmlns:a14="http://schemas.microsoft.com/office/drawing/2010/main" xmlns:p14="http://schemas.microsoft.com/office/powerpoint/2010/main" w="9525">
                   <a:solidFill>
                     <a:srgbClr val="000000"/>
                   </a:solidFill>
@@ -42025,7 +44813,7 @@
             </a:ln>
             <a:extLst>
               <a:ext uri="{91240B29-F687-4f45-9708-019B960494DF}">
-                <a14:hiddenLine xmlns:p14="http://schemas.microsoft.com/office/powerpoint/2010/main" xmlns:a14="http://schemas.microsoft.com/office/drawing/2010/main" xmlns:a16="http://schemas.microsoft.com/office/drawing/2014/main" xmlns="" w="9525">
+                <a14:hiddenLine xmlns="" xmlns:a16="http://schemas.microsoft.com/office/drawing/2014/main" xmlns:a14="http://schemas.microsoft.com/office/drawing/2010/main" xmlns:p14="http://schemas.microsoft.com/office/powerpoint/2010/main" w="9525">
                   <a:solidFill>
                     <a:srgbClr val="000000"/>
                   </a:solidFill>
@@ -42137,7 +44925,7 @@
             </a:ln>
             <a:extLst>
               <a:ext uri="{91240B29-F687-4f45-9708-019B960494DF}">
-                <a14:hiddenLine xmlns:p14="http://schemas.microsoft.com/office/powerpoint/2010/main" xmlns:a14="http://schemas.microsoft.com/office/drawing/2010/main" xmlns:a16="http://schemas.microsoft.com/office/drawing/2014/main" xmlns="" w="9525">
+                <a14:hiddenLine xmlns="" xmlns:a16="http://schemas.microsoft.com/office/drawing/2014/main" xmlns:a14="http://schemas.microsoft.com/office/drawing/2010/main" xmlns:p14="http://schemas.microsoft.com/office/powerpoint/2010/main" w="9525">
                   <a:solidFill>
                     <a:srgbClr val="000000"/>
                   </a:solidFill>
@@ -42193,7 +44981,7 @@
             </a:ln>
             <a:extLst>
               <a:ext uri="{91240B29-F687-4f45-9708-019B960494DF}">
-                <a14:hiddenLine xmlns:p14="http://schemas.microsoft.com/office/powerpoint/2010/main" xmlns:a14="http://schemas.microsoft.com/office/drawing/2010/main" xmlns:a16="http://schemas.microsoft.com/office/drawing/2014/main" xmlns="" w="9525">
+                <a14:hiddenLine xmlns="" xmlns:a16="http://schemas.microsoft.com/office/drawing/2014/main" xmlns:a14="http://schemas.microsoft.com/office/drawing/2010/main" xmlns:p14="http://schemas.microsoft.com/office/powerpoint/2010/main" w="9525">
                   <a:solidFill>
                     <a:srgbClr val="000000"/>
                   </a:solidFill>
@@ -42305,7 +45093,7 @@
             </a:ln>
             <a:extLst>
               <a:ext uri="{91240B29-F687-4f45-9708-019B960494DF}">
-                <a14:hiddenLine xmlns:p14="http://schemas.microsoft.com/office/powerpoint/2010/main" xmlns:a14="http://schemas.microsoft.com/office/drawing/2010/main" xmlns:a16="http://schemas.microsoft.com/office/drawing/2014/main" xmlns="" w="9525">
+                <a14:hiddenLine xmlns="" xmlns:a16="http://schemas.microsoft.com/office/drawing/2014/main" xmlns:a14="http://schemas.microsoft.com/office/drawing/2010/main" xmlns:p14="http://schemas.microsoft.com/office/powerpoint/2010/main" w="9525">
                   <a:solidFill>
                     <a:srgbClr val="000000"/>
                   </a:solidFill>
@@ -42389,7 +45177,7 @@
             </a:ln>
             <a:extLst>
               <a:ext uri="{91240B29-F687-4f45-9708-019B960494DF}">
-                <a14:hiddenLine xmlns:p14="http://schemas.microsoft.com/office/powerpoint/2010/main" xmlns:a14="http://schemas.microsoft.com/office/drawing/2010/main" xmlns:a16="http://schemas.microsoft.com/office/drawing/2014/main" xmlns="" w="9525">
+                <a14:hiddenLine xmlns="" xmlns:a16="http://schemas.microsoft.com/office/drawing/2014/main" xmlns:a14="http://schemas.microsoft.com/office/drawing/2010/main" xmlns:p14="http://schemas.microsoft.com/office/powerpoint/2010/main" w="9525">
                   <a:solidFill>
                     <a:srgbClr val="000000"/>
                   </a:solidFill>
@@ -42473,7 +45261,7 @@
             </a:ln>
             <a:extLst>
               <a:ext uri="{91240B29-F687-4f45-9708-019B960494DF}">
-                <a14:hiddenLine xmlns:p14="http://schemas.microsoft.com/office/powerpoint/2010/main" xmlns:a14="http://schemas.microsoft.com/office/drawing/2010/main" xmlns:a16="http://schemas.microsoft.com/office/drawing/2014/main" xmlns="" w="9525">
+                <a14:hiddenLine xmlns="" xmlns:a16="http://schemas.microsoft.com/office/drawing/2014/main" xmlns:a14="http://schemas.microsoft.com/office/drawing/2010/main" xmlns:p14="http://schemas.microsoft.com/office/powerpoint/2010/main" w="9525">
                   <a:solidFill>
                     <a:srgbClr val="000000"/>
                   </a:solidFill>
@@ -42585,7 +45373,7 @@
             </a:ln>
             <a:extLst>
               <a:ext uri="{91240B29-F687-4f45-9708-019B960494DF}">
-                <a14:hiddenLine xmlns:p14="http://schemas.microsoft.com/office/powerpoint/2010/main" xmlns:a14="http://schemas.microsoft.com/office/drawing/2010/main" xmlns:a16="http://schemas.microsoft.com/office/drawing/2014/main" xmlns="" w="9525">
+                <a14:hiddenLine xmlns="" xmlns:a16="http://schemas.microsoft.com/office/drawing/2014/main" xmlns:a14="http://schemas.microsoft.com/office/drawing/2010/main" xmlns:p14="http://schemas.microsoft.com/office/powerpoint/2010/main" w="9525">
                   <a:solidFill>
                     <a:srgbClr val="000000"/>
                   </a:solidFill>
@@ -42669,7 +45457,7 @@
             </a:ln>
             <a:extLst>
               <a:ext uri="{91240B29-F687-4f45-9708-019B960494DF}">
-                <a14:hiddenLine xmlns:p14="http://schemas.microsoft.com/office/powerpoint/2010/main" xmlns:a14="http://schemas.microsoft.com/office/drawing/2010/main" xmlns:a16="http://schemas.microsoft.com/office/drawing/2014/main" xmlns="" w="9525">
+                <a14:hiddenLine xmlns="" xmlns:a16="http://schemas.microsoft.com/office/drawing/2014/main" xmlns:a14="http://schemas.microsoft.com/office/drawing/2010/main" xmlns:p14="http://schemas.microsoft.com/office/powerpoint/2010/main" w="9525">
                   <a:solidFill>
                     <a:srgbClr val="000000"/>
                   </a:solidFill>
@@ -42753,7 +45541,7 @@
             </a:ln>
             <a:extLst>
               <a:ext uri="{91240B29-F687-4f45-9708-019B960494DF}">
-                <a14:hiddenLine xmlns:p14="http://schemas.microsoft.com/office/powerpoint/2010/main" xmlns:a14="http://schemas.microsoft.com/office/drawing/2010/main" xmlns:a16="http://schemas.microsoft.com/office/drawing/2014/main" xmlns="" w="9525">
+                <a14:hiddenLine xmlns="" xmlns:a16="http://schemas.microsoft.com/office/drawing/2014/main" xmlns:a14="http://schemas.microsoft.com/office/drawing/2010/main" xmlns:p14="http://schemas.microsoft.com/office/powerpoint/2010/main" w="9525">
                   <a:solidFill>
                     <a:srgbClr val="000000"/>
                   </a:solidFill>
@@ -42865,7 +45653,7 @@
             </a:ln>
             <a:extLst>
               <a:ext uri="{91240B29-F687-4f45-9708-019B960494DF}">
-                <a14:hiddenLine xmlns:p14="http://schemas.microsoft.com/office/powerpoint/2010/main" xmlns:a14="http://schemas.microsoft.com/office/drawing/2010/main" xmlns:a16="http://schemas.microsoft.com/office/drawing/2014/main" xmlns="" w="9525">
+                <a14:hiddenLine xmlns="" xmlns:a16="http://schemas.microsoft.com/office/drawing/2014/main" xmlns:a14="http://schemas.microsoft.com/office/drawing/2010/main" xmlns:p14="http://schemas.microsoft.com/office/powerpoint/2010/main" w="9525">
                   <a:solidFill>
                     <a:srgbClr val="000000"/>
                   </a:solidFill>
@@ -42977,7 +45765,7 @@
             </a:ln>
             <a:extLst>
               <a:ext uri="{91240B29-F687-4f45-9708-019B960494DF}">
-                <a14:hiddenLine xmlns:p14="http://schemas.microsoft.com/office/powerpoint/2010/main" xmlns:a14="http://schemas.microsoft.com/office/drawing/2010/main" xmlns:a16="http://schemas.microsoft.com/office/drawing/2014/main" xmlns="" w="9525">
+                <a14:hiddenLine xmlns="" xmlns:a16="http://schemas.microsoft.com/office/drawing/2014/main" xmlns:a14="http://schemas.microsoft.com/office/drawing/2010/main" xmlns:p14="http://schemas.microsoft.com/office/powerpoint/2010/main" w="9525">
                   <a:solidFill>
                     <a:srgbClr val="000000"/>
                   </a:solidFill>
@@ -43061,7 +45849,7 @@
             </a:ln>
             <a:extLst>
               <a:ext uri="{91240B29-F687-4f45-9708-019B960494DF}">
-                <a14:hiddenLine xmlns:p14="http://schemas.microsoft.com/office/powerpoint/2010/main" xmlns:a14="http://schemas.microsoft.com/office/drawing/2010/main" xmlns:a16="http://schemas.microsoft.com/office/drawing/2014/main" xmlns="" w="9525">
+                <a14:hiddenLine xmlns="" xmlns:a16="http://schemas.microsoft.com/office/drawing/2014/main" xmlns:a14="http://schemas.microsoft.com/office/drawing/2010/main" xmlns:p14="http://schemas.microsoft.com/office/powerpoint/2010/main" w="9525">
                   <a:solidFill>
                     <a:srgbClr val="000000"/>
                   </a:solidFill>
@@ -43193,7 +45981,7 @@
             </a:ln>
             <a:extLst>
               <a:ext uri="{91240B29-F687-4f45-9708-019B960494DF}">
-                <a14:hiddenLine xmlns:p14="http://schemas.microsoft.com/office/powerpoint/2010/main" xmlns:a14="http://schemas.microsoft.com/office/drawing/2010/main" xmlns:a16="http://schemas.microsoft.com/office/drawing/2014/main" xmlns="" w="9525">
+                <a14:hiddenLine xmlns="" xmlns:a16="http://schemas.microsoft.com/office/drawing/2014/main" xmlns:a14="http://schemas.microsoft.com/office/drawing/2010/main" xmlns:p14="http://schemas.microsoft.com/office/powerpoint/2010/main" w="9525">
                   <a:solidFill>
                     <a:srgbClr val="000000"/>
                   </a:solidFill>
@@ -43277,7 +46065,7 @@
             </a:ln>
             <a:extLst>
               <a:ext uri="{91240B29-F687-4f45-9708-019B960494DF}">
-                <a14:hiddenLine xmlns:p14="http://schemas.microsoft.com/office/powerpoint/2010/main" xmlns:a14="http://schemas.microsoft.com/office/drawing/2010/main" xmlns:a16="http://schemas.microsoft.com/office/drawing/2014/main" xmlns="" w="9525">
+                <a14:hiddenLine xmlns="" xmlns:a16="http://schemas.microsoft.com/office/drawing/2014/main" xmlns:a14="http://schemas.microsoft.com/office/drawing/2010/main" xmlns:p14="http://schemas.microsoft.com/office/powerpoint/2010/main" w="9525">
                   <a:solidFill>
                     <a:srgbClr val="000000"/>
                   </a:solidFill>
@@ -43389,7 +46177,7 @@
             </a:ln>
             <a:extLst>
               <a:ext uri="{91240B29-F687-4f45-9708-019B960494DF}">
-                <a14:hiddenLine xmlns:p14="http://schemas.microsoft.com/office/powerpoint/2010/main" xmlns:a14="http://schemas.microsoft.com/office/drawing/2010/main" xmlns:a16="http://schemas.microsoft.com/office/drawing/2014/main" xmlns="" w="9525">
+                <a14:hiddenLine xmlns="" xmlns:a16="http://schemas.microsoft.com/office/drawing/2014/main" xmlns:a14="http://schemas.microsoft.com/office/drawing/2010/main" xmlns:p14="http://schemas.microsoft.com/office/powerpoint/2010/main" w="9525">
                   <a:solidFill>
                     <a:srgbClr val="000000"/>
                   </a:solidFill>
@@ -43501,7 +46289,7 @@
             </a:ln>
             <a:extLst>
               <a:ext uri="{91240B29-F687-4f45-9708-019B960494DF}">
-                <a14:hiddenLine xmlns:p14="http://schemas.microsoft.com/office/powerpoint/2010/main" xmlns:a14="http://schemas.microsoft.com/office/drawing/2010/main" xmlns:a16="http://schemas.microsoft.com/office/drawing/2014/main" xmlns="" w="9525">
+                <a14:hiddenLine xmlns="" xmlns:a16="http://schemas.microsoft.com/office/drawing/2014/main" xmlns:a14="http://schemas.microsoft.com/office/drawing/2010/main" xmlns:p14="http://schemas.microsoft.com/office/powerpoint/2010/main" w="9525">
                   <a:solidFill>
                     <a:srgbClr val="000000"/>
                   </a:solidFill>
@@ -43585,7 +46373,7 @@
             </a:ln>
             <a:extLst>
               <a:ext uri="{91240B29-F687-4f45-9708-019B960494DF}">
-                <a14:hiddenLine xmlns:p14="http://schemas.microsoft.com/office/powerpoint/2010/main" xmlns:a14="http://schemas.microsoft.com/office/drawing/2010/main" xmlns:a16="http://schemas.microsoft.com/office/drawing/2014/main" xmlns="" w="9525">
+                <a14:hiddenLine xmlns="" xmlns:a16="http://schemas.microsoft.com/office/drawing/2014/main" xmlns:a14="http://schemas.microsoft.com/office/drawing/2010/main" xmlns:p14="http://schemas.microsoft.com/office/powerpoint/2010/main" w="9525">
                   <a:solidFill>
                     <a:srgbClr val="000000"/>
                   </a:solidFill>
@@ -43697,7 +46485,7 @@
             </a:ln>
             <a:extLst>
               <a:ext uri="{91240B29-F687-4f45-9708-019B960494DF}">
-                <a14:hiddenLine xmlns:p14="http://schemas.microsoft.com/office/powerpoint/2010/main" xmlns:a14="http://schemas.microsoft.com/office/drawing/2010/main" xmlns:a16="http://schemas.microsoft.com/office/drawing/2014/main" xmlns="" w="9525">
+                <a14:hiddenLine xmlns="" xmlns:a16="http://schemas.microsoft.com/office/drawing/2014/main" xmlns:a14="http://schemas.microsoft.com/office/drawing/2010/main" xmlns:p14="http://schemas.microsoft.com/office/powerpoint/2010/main" w="9525">
                   <a:solidFill>
                     <a:srgbClr val="000000"/>
                   </a:solidFill>
@@ -43809,7 +46597,7 @@
             </a:ln>
             <a:extLst>
               <a:ext uri="{91240B29-F687-4f45-9708-019B960494DF}">
-                <a14:hiddenLine xmlns:p14="http://schemas.microsoft.com/office/powerpoint/2010/main" xmlns:a14="http://schemas.microsoft.com/office/drawing/2010/main" xmlns:a16="http://schemas.microsoft.com/office/drawing/2014/main" xmlns="" w="9525">
+                <a14:hiddenLine xmlns="" xmlns:a16="http://schemas.microsoft.com/office/drawing/2014/main" xmlns:a14="http://schemas.microsoft.com/office/drawing/2010/main" xmlns:p14="http://schemas.microsoft.com/office/powerpoint/2010/main" w="9525">
                   <a:solidFill>
                     <a:srgbClr val="000000"/>
                   </a:solidFill>
@@ -43887,7 +46675,7 @@
             </a:ln>
             <a:extLst>
               <a:ext uri="{91240B29-F687-4f45-9708-019B960494DF}">
-                <a14:hiddenLine xmlns:p14="http://schemas.microsoft.com/office/powerpoint/2010/main" xmlns:a14="http://schemas.microsoft.com/office/drawing/2010/main" xmlns:a16="http://schemas.microsoft.com/office/drawing/2014/main" xmlns="" w="9525">
+                <a14:hiddenLine xmlns="" xmlns:a16="http://schemas.microsoft.com/office/drawing/2014/main" xmlns:a14="http://schemas.microsoft.com/office/drawing/2010/main" xmlns:p14="http://schemas.microsoft.com/office/powerpoint/2010/main" w="9525">
                   <a:solidFill>
                     <a:srgbClr val="000000"/>
                   </a:solidFill>
@@ -43999,7 +46787,7 @@
             </a:ln>
             <a:extLst>
               <a:ext uri="{91240B29-F687-4f45-9708-019B960494DF}">
-                <a14:hiddenLine xmlns:p14="http://schemas.microsoft.com/office/powerpoint/2010/main" xmlns:a14="http://schemas.microsoft.com/office/drawing/2010/main" xmlns:a16="http://schemas.microsoft.com/office/drawing/2014/main" xmlns="" w="9525">
+                <a14:hiddenLine xmlns="" xmlns:a16="http://schemas.microsoft.com/office/drawing/2014/main" xmlns:a14="http://schemas.microsoft.com/office/drawing/2010/main" xmlns:p14="http://schemas.microsoft.com/office/powerpoint/2010/main" w="9525">
                   <a:solidFill>
                     <a:srgbClr val="000000"/>
                   </a:solidFill>
@@ -44077,7 +46865,7 @@
             </a:ln>
             <a:extLst>
               <a:ext uri="{91240B29-F687-4f45-9708-019B960494DF}">
-                <a14:hiddenLine xmlns:p14="http://schemas.microsoft.com/office/powerpoint/2010/main" xmlns:a14="http://schemas.microsoft.com/office/drawing/2010/main" xmlns:a16="http://schemas.microsoft.com/office/drawing/2014/main" xmlns="" w="9525">
+                <a14:hiddenLine xmlns="" xmlns:a16="http://schemas.microsoft.com/office/drawing/2014/main" xmlns:a14="http://schemas.microsoft.com/office/drawing/2010/main" xmlns:p14="http://schemas.microsoft.com/office/powerpoint/2010/main" w="9525">
                   <a:solidFill>
                     <a:srgbClr val="000000"/>
                   </a:solidFill>
@@ -44189,7 +46977,7 @@
             </a:ln>
             <a:extLst>
               <a:ext uri="{91240B29-F687-4f45-9708-019B960494DF}">
-                <a14:hiddenLine xmlns:p14="http://schemas.microsoft.com/office/powerpoint/2010/main" xmlns:a14="http://schemas.microsoft.com/office/drawing/2010/main" xmlns:a16="http://schemas.microsoft.com/office/drawing/2014/main" xmlns="" w="9525">
+                <a14:hiddenLine xmlns="" xmlns:a16="http://schemas.microsoft.com/office/drawing/2014/main" xmlns:a14="http://schemas.microsoft.com/office/drawing/2010/main" xmlns:p14="http://schemas.microsoft.com/office/powerpoint/2010/main" w="9525">
                   <a:solidFill>
                     <a:srgbClr val="000000"/>
                   </a:solidFill>
@@ -44279,7 +47067,7 @@
             </a:ln>
             <a:extLst>
               <a:ext uri="{91240B29-F687-4f45-9708-019B960494DF}">
-                <a14:hiddenLine xmlns:p14="http://schemas.microsoft.com/office/powerpoint/2010/main" xmlns:a14="http://schemas.microsoft.com/office/drawing/2010/main" xmlns:a16="http://schemas.microsoft.com/office/drawing/2014/main" xmlns="" w="9525">
+                <a14:hiddenLine xmlns="" xmlns:a16="http://schemas.microsoft.com/office/drawing/2014/main" xmlns:a14="http://schemas.microsoft.com/office/drawing/2010/main" xmlns:p14="http://schemas.microsoft.com/office/powerpoint/2010/main" w="9525">
                   <a:solidFill>
                     <a:srgbClr val="000000"/>
                   </a:solidFill>
@@ -44391,7 +47179,7 @@
             </a:ln>
             <a:extLst>
               <a:ext uri="{91240B29-F687-4f45-9708-019B960494DF}">
-                <a14:hiddenLine xmlns:p14="http://schemas.microsoft.com/office/powerpoint/2010/main" xmlns:a14="http://schemas.microsoft.com/office/drawing/2010/main" xmlns:a16="http://schemas.microsoft.com/office/drawing/2014/main" xmlns="" w="9525">
+                <a14:hiddenLine xmlns="" xmlns:a16="http://schemas.microsoft.com/office/drawing/2014/main" xmlns:a14="http://schemas.microsoft.com/office/drawing/2010/main" xmlns:p14="http://schemas.microsoft.com/office/powerpoint/2010/main" w="9525">
                   <a:solidFill>
                     <a:srgbClr val="000000"/>
                   </a:solidFill>
@@ -44481,7 +47269,7 @@
             </a:ln>
             <a:extLst>
               <a:ext uri="{91240B29-F687-4f45-9708-019B960494DF}">
-                <a14:hiddenLine xmlns:p14="http://schemas.microsoft.com/office/powerpoint/2010/main" xmlns:a14="http://schemas.microsoft.com/office/drawing/2010/main" xmlns:a16="http://schemas.microsoft.com/office/drawing/2014/main" xmlns="" w="9525">
+                <a14:hiddenLine xmlns="" xmlns:a16="http://schemas.microsoft.com/office/drawing/2014/main" xmlns:a14="http://schemas.microsoft.com/office/drawing/2010/main" xmlns:p14="http://schemas.microsoft.com/office/powerpoint/2010/main" w="9525">
                   <a:solidFill>
                     <a:srgbClr val="000000"/>
                   </a:solidFill>
@@ -44593,7 +47381,7 @@
             </a:ln>
             <a:extLst>
               <a:ext uri="{91240B29-F687-4f45-9708-019B960494DF}">
-                <a14:hiddenLine xmlns:p14="http://schemas.microsoft.com/office/powerpoint/2010/main" xmlns:a14="http://schemas.microsoft.com/office/drawing/2010/main" xmlns:a16="http://schemas.microsoft.com/office/drawing/2014/main" xmlns="" w="9525">
+                <a14:hiddenLine xmlns="" xmlns:a16="http://schemas.microsoft.com/office/drawing/2014/main" xmlns:a14="http://schemas.microsoft.com/office/drawing/2010/main" xmlns:p14="http://schemas.microsoft.com/office/powerpoint/2010/main" w="9525">
                   <a:solidFill>
                     <a:srgbClr val="000000"/>
                   </a:solidFill>
@@ -44649,7 +47437,7 @@
             </a:ln>
             <a:extLst>
               <a:ext uri="{91240B29-F687-4f45-9708-019B960494DF}">
-                <a14:hiddenLine xmlns:p14="http://schemas.microsoft.com/office/powerpoint/2010/main" xmlns:a14="http://schemas.microsoft.com/office/drawing/2010/main" xmlns:a16="http://schemas.microsoft.com/office/drawing/2014/main" xmlns="" w="9525">
+                <a14:hiddenLine xmlns="" xmlns:a16="http://schemas.microsoft.com/office/drawing/2014/main" xmlns:a14="http://schemas.microsoft.com/office/drawing/2010/main" xmlns:p14="http://schemas.microsoft.com/office/powerpoint/2010/main" w="9525">
                   <a:solidFill>
                     <a:srgbClr val="000000"/>
                   </a:solidFill>
@@ -44761,7 +47549,7 @@
             </a:ln>
             <a:extLst>
               <a:ext uri="{91240B29-F687-4f45-9708-019B960494DF}">
-                <a14:hiddenLine xmlns:p14="http://schemas.microsoft.com/office/powerpoint/2010/main" xmlns:a14="http://schemas.microsoft.com/office/drawing/2010/main" xmlns:a16="http://schemas.microsoft.com/office/drawing/2014/main" xmlns="" w="9525">
+                <a14:hiddenLine xmlns="" xmlns:a16="http://schemas.microsoft.com/office/drawing/2014/main" xmlns:a14="http://schemas.microsoft.com/office/drawing/2010/main" xmlns:p14="http://schemas.microsoft.com/office/powerpoint/2010/main" w="9525">
                   <a:solidFill>
                     <a:srgbClr val="000000"/>
                   </a:solidFill>
@@ -44845,7 +47633,7 @@
             </a:ln>
             <a:extLst>
               <a:ext uri="{91240B29-F687-4f45-9708-019B960494DF}">
-                <a14:hiddenLine xmlns:p14="http://schemas.microsoft.com/office/powerpoint/2010/main" xmlns:a14="http://schemas.microsoft.com/office/drawing/2010/main" xmlns:a16="http://schemas.microsoft.com/office/drawing/2014/main" xmlns="" w="9525">
+                <a14:hiddenLine xmlns="" xmlns:a16="http://schemas.microsoft.com/office/drawing/2014/main" xmlns:a14="http://schemas.microsoft.com/office/drawing/2010/main" xmlns:p14="http://schemas.microsoft.com/office/powerpoint/2010/main" w="9525">
                   <a:solidFill>
                     <a:srgbClr val="000000"/>
                   </a:solidFill>
@@ -44929,7 +47717,7 @@
             </a:ln>
             <a:extLst>
               <a:ext uri="{91240B29-F687-4f45-9708-019B960494DF}">
-                <a14:hiddenLine xmlns:p14="http://schemas.microsoft.com/office/powerpoint/2010/main" xmlns:a14="http://schemas.microsoft.com/office/drawing/2010/main" xmlns:a16="http://schemas.microsoft.com/office/drawing/2014/main" xmlns="" w="9525">
+                <a14:hiddenLine xmlns="" xmlns:a16="http://schemas.microsoft.com/office/drawing/2014/main" xmlns:a14="http://schemas.microsoft.com/office/drawing/2010/main" xmlns:p14="http://schemas.microsoft.com/office/powerpoint/2010/main" w="9525">
                   <a:solidFill>
                     <a:srgbClr val="000000"/>
                   </a:solidFill>
@@ -45041,7 +47829,7 @@
             </a:ln>
             <a:extLst>
               <a:ext uri="{91240B29-F687-4f45-9708-019B960494DF}">
-                <a14:hiddenLine xmlns:p14="http://schemas.microsoft.com/office/powerpoint/2010/main" xmlns:a14="http://schemas.microsoft.com/office/drawing/2010/main" xmlns:a16="http://schemas.microsoft.com/office/drawing/2014/main" xmlns="" w="9525">
+                <a14:hiddenLine xmlns="" xmlns:a16="http://schemas.microsoft.com/office/drawing/2014/main" xmlns:a14="http://schemas.microsoft.com/office/drawing/2010/main" xmlns:p14="http://schemas.microsoft.com/office/powerpoint/2010/main" w="9525">
                   <a:solidFill>
                     <a:srgbClr val="000000"/>
                   </a:solidFill>
@@ -45131,7 +47919,7 @@
             </a:ln>
             <a:extLst>
               <a:ext uri="{91240B29-F687-4f45-9708-019B960494DF}">
-                <a14:hiddenLine xmlns:p14="http://schemas.microsoft.com/office/powerpoint/2010/main" xmlns:a14="http://schemas.microsoft.com/office/drawing/2010/main" xmlns:a16="http://schemas.microsoft.com/office/drawing/2014/main" xmlns="" w="9525">
+                <a14:hiddenLine xmlns="" xmlns:a16="http://schemas.microsoft.com/office/drawing/2014/main" xmlns:a14="http://schemas.microsoft.com/office/drawing/2010/main" xmlns:p14="http://schemas.microsoft.com/office/powerpoint/2010/main" w="9525">
                   <a:solidFill>
                     <a:srgbClr val="000000"/>
                   </a:solidFill>
@@ -45215,7 +48003,7 @@
             </a:ln>
             <a:extLst>
               <a:ext uri="{91240B29-F687-4f45-9708-019B960494DF}">
-                <a14:hiddenLine xmlns:p14="http://schemas.microsoft.com/office/powerpoint/2010/main" xmlns:a14="http://schemas.microsoft.com/office/drawing/2010/main" xmlns:a16="http://schemas.microsoft.com/office/drawing/2014/main" xmlns="" w="9525">
+                <a14:hiddenLine xmlns="" xmlns:a16="http://schemas.microsoft.com/office/drawing/2014/main" xmlns:a14="http://schemas.microsoft.com/office/drawing/2010/main" xmlns:p14="http://schemas.microsoft.com/office/powerpoint/2010/main" w="9525">
                   <a:solidFill>
                     <a:srgbClr val="000000"/>
                   </a:solidFill>
@@ -45327,7 +48115,7 @@
             </a:ln>
             <a:extLst>
               <a:ext uri="{91240B29-F687-4f45-9708-019B960494DF}">
-                <a14:hiddenLine xmlns:p14="http://schemas.microsoft.com/office/powerpoint/2010/main" xmlns:a14="http://schemas.microsoft.com/office/drawing/2010/main" xmlns:a16="http://schemas.microsoft.com/office/drawing/2014/main" xmlns="" w="9525">
+                <a14:hiddenLine xmlns="" xmlns:a16="http://schemas.microsoft.com/office/drawing/2014/main" xmlns:a14="http://schemas.microsoft.com/office/drawing/2010/main" xmlns:p14="http://schemas.microsoft.com/office/powerpoint/2010/main" w="9525">
                   <a:solidFill>
                     <a:srgbClr val="000000"/>
                   </a:solidFill>
@@ -45411,7 +48199,7 @@
             </a:ln>
             <a:extLst>
               <a:ext uri="{91240B29-F687-4f45-9708-019B960494DF}">
-                <a14:hiddenLine xmlns:p14="http://schemas.microsoft.com/office/powerpoint/2010/main" xmlns:a14="http://schemas.microsoft.com/office/drawing/2010/main" xmlns:a16="http://schemas.microsoft.com/office/drawing/2014/main" xmlns="" w="9525">
+                <a14:hiddenLine xmlns="" xmlns:a16="http://schemas.microsoft.com/office/drawing/2014/main" xmlns:a14="http://schemas.microsoft.com/office/drawing/2010/main" xmlns:p14="http://schemas.microsoft.com/office/powerpoint/2010/main" w="9525">
                   <a:solidFill>
                     <a:srgbClr val="000000"/>
                   </a:solidFill>
@@ -45523,7 +48311,7 @@
             </a:ln>
             <a:extLst>
               <a:ext uri="{91240B29-F687-4f45-9708-019B960494DF}">
-                <a14:hiddenLine xmlns:p14="http://schemas.microsoft.com/office/powerpoint/2010/main" xmlns:a14="http://schemas.microsoft.com/office/drawing/2010/main" xmlns:a16="http://schemas.microsoft.com/office/drawing/2014/main" xmlns="" w="9525">
+                <a14:hiddenLine xmlns="" xmlns:a16="http://schemas.microsoft.com/office/drawing/2014/main" xmlns:a14="http://schemas.microsoft.com/office/drawing/2010/main" xmlns:p14="http://schemas.microsoft.com/office/powerpoint/2010/main" w="9525">
                   <a:solidFill>
                     <a:srgbClr val="000000"/>
                   </a:solidFill>
@@ -45607,7 +48395,7 @@
             </a:ln>
             <a:extLst>
               <a:ext uri="{91240B29-F687-4f45-9708-019B960494DF}">
-                <a14:hiddenLine xmlns:p14="http://schemas.microsoft.com/office/powerpoint/2010/main" xmlns:a14="http://schemas.microsoft.com/office/drawing/2010/main" xmlns:a16="http://schemas.microsoft.com/office/drawing/2014/main" xmlns="" w="9525">
+                <a14:hiddenLine xmlns="" xmlns:a16="http://schemas.microsoft.com/office/drawing/2014/main" xmlns:a14="http://schemas.microsoft.com/office/drawing/2010/main" xmlns:p14="http://schemas.microsoft.com/office/powerpoint/2010/main" w="9525">
                   <a:solidFill>
                     <a:srgbClr val="000000"/>
                   </a:solidFill>
@@ -45719,7 +48507,7 @@
             </a:ln>
             <a:extLst>
               <a:ext uri="{91240B29-F687-4f45-9708-019B960494DF}">
-                <a14:hiddenLine xmlns:p14="http://schemas.microsoft.com/office/powerpoint/2010/main" xmlns:a14="http://schemas.microsoft.com/office/drawing/2010/main" xmlns:a16="http://schemas.microsoft.com/office/drawing/2014/main" xmlns="" w="9525">
+                <a14:hiddenLine xmlns="" xmlns:a16="http://schemas.microsoft.com/office/drawing/2014/main" xmlns:a14="http://schemas.microsoft.com/office/drawing/2010/main" xmlns:p14="http://schemas.microsoft.com/office/powerpoint/2010/main" w="9525">
                   <a:solidFill>
                     <a:srgbClr val="000000"/>
                   </a:solidFill>
@@ -45775,7 +48563,7 @@
             </a:ln>
             <a:extLst>
               <a:ext uri="{91240B29-F687-4f45-9708-019B960494DF}">
-                <a14:hiddenLine xmlns:p14="http://schemas.microsoft.com/office/powerpoint/2010/main" xmlns:a14="http://schemas.microsoft.com/office/drawing/2010/main" xmlns:a16="http://schemas.microsoft.com/office/drawing/2014/main" xmlns="" w="9525">
+                <a14:hiddenLine xmlns="" xmlns:a16="http://schemas.microsoft.com/office/drawing/2014/main" xmlns:a14="http://schemas.microsoft.com/office/drawing/2010/main" xmlns:p14="http://schemas.microsoft.com/office/powerpoint/2010/main" w="9525">
                   <a:solidFill>
                     <a:srgbClr val="000000"/>
                   </a:solidFill>
@@ -45862,7 +48650,7 @@
             </a:ln>
             <a:extLst>
               <a:ext uri="{91240B29-F687-4f45-9708-019B960494DF}">
-                <a14:hiddenLine xmlns:p14="http://schemas.microsoft.com/office/powerpoint/2010/main" xmlns:a14="http://schemas.microsoft.com/office/drawing/2010/main" xmlns:a16="http://schemas.microsoft.com/office/drawing/2014/main" xmlns="" w="9525">
+                <a14:hiddenLine xmlns="" xmlns:a16="http://schemas.microsoft.com/office/drawing/2014/main" xmlns:a14="http://schemas.microsoft.com/office/drawing/2010/main" xmlns:p14="http://schemas.microsoft.com/office/powerpoint/2010/main" w="9525">
                   <a:solidFill>
                     <a:srgbClr val="000000"/>
                   </a:solidFill>
@@ -45974,7 +48762,7 @@
             </a:ln>
             <a:extLst>
               <a:ext uri="{91240B29-F687-4f45-9708-019B960494DF}">
-                <a14:hiddenLine xmlns:p14="http://schemas.microsoft.com/office/powerpoint/2010/main" xmlns:a14="http://schemas.microsoft.com/office/drawing/2010/main" xmlns:a16="http://schemas.microsoft.com/office/drawing/2014/main" xmlns="" w="9525">
+                <a14:hiddenLine xmlns="" xmlns:a16="http://schemas.microsoft.com/office/drawing/2014/main" xmlns:a14="http://schemas.microsoft.com/office/drawing/2010/main" xmlns:p14="http://schemas.microsoft.com/office/powerpoint/2010/main" w="9525">
                   <a:solidFill>
                     <a:srgbClr val="000000"/>
                   </a:solidFill>
@@ -46058,7 +48846,7 @@
             </a:ln>
             <a:extLst>
               <a:ext uri="{91240B29-F687-4f45-9708-019B960494DF}">
-                <a14:hiddenLine xmlns:p14="http://schemas.microsoft.com/office/powerpoint/2010/main" xmlns:a14="http://schemas.microsoft.com/office/drawing/2010/main" xmlns:a16="http://schemas.microsoft.com/office/drawing/2014/main" xmlns="" w="9525">
+                <a14:hiddenLine xmlns="" xmlns:a16="http://schemas.microsoft.com/office/drawing/2014/main" xmlns:a14="http://schemas.microsoft.com/office/drawing/2010/main" xmlns:p14="http://schemas.microsoft.com/office/powerpoint/2010/main" w="9525">
                   <a:solidFill>
                     <a:srgbClr val="000000"/>
                   </a:solidFill>
@@ -46170,7 +48958,7 @@
             </a:ln>
             <a:extLst>
               <a:ext uri="{91240B29-F687-4f45-9708-019B960494DF}">
-                <a14:hiddenLine xmlns:p14="http://schemas.microsoft.com/office/powerpoint/2010/main" xmlns:a14="http://schemas.microsoft.com/office/drawing/2010/main" xmlns:a16="http://schemas.microsoft.com/office/drawing/2014/main" xmlns="" w="9525">
+                <a14:hiddenLine xmlns="" xmlns:a16="http://schemas.microsoft.com/office/drawing/2014/main" xmlns:a14="http://schemas.microsoft.com/office/drawing/2010/main" xmlns:p14="http://schemas.microsoft.com/office/powerpoint/2010/main" w="9525">
                   <a:solidFill>
                     <a:srgbClr val="000000"/>
                   </a:solidFill>
@@ -46282,7 +49070,7 @@
             </a:ln>
             <a:extLst>
               <a:ext uri="{91240B29-F687-4f45-9708-019B960494DF}">
-                <a14:hiddenLine xmlns:p14="http://schemas.microsoft.com/office/powerpoint/2010/main" xmlns:a14="http://schemas.microsoft.com/office/drawing/2010/main" xmlns:a16="http://schemas.microsoft.com/office/drawing/2014/main" xmlns="" w="9525">
+                <a14:hiddenLine xmlns="" xmlns:a16="http://schemas.microsoft.com/office/drawing/2014/main" xmlns:a14="http://schemas.microsoft.com/office/drawing/2010/main" xmlns:p14="http://schemas.microsoft.com/office/powerpoint/2010/main" w="9525">
                   <a:solidFill>
                     <a:srgbClr val="000000"/>
                   </a:solidFill>
@@ -46369,7 +49157,7 @@
             </a:ln>
             <a:extLst>
               <a:ext uri="{91240B29-F687-4f45-9708-019B960494DF}">
-                <a14:hiddenLine xmlns:p14="http://schemas.microsoft.com/office/powerpoint/2010/main" xmlns:a14="http://schemas.microsoft.com/office/drawing/2010/main" xmlns:a16="http://schemas.microsoft.com/office/drawing/2014/main" xmlns="" w="9525">
+                <a14:hiddenLine xmlns="" xmlns:a16="http://schemas.microsoft.com/office/drawing/2014/main" xmlns:a14="http://schemas.microsoft.com/office/drawing/2010/main" xmlns:p14="http://schemas.microsoft.com/office/powerpoint/2010/main" w="9525">
                   <a:solidFill>
                     <a:srgbClr val="000000"/>
                   </a:solidFill>
@@ -46453,7 +49241,7 @@
             </a:ln>
             <a:extLst>
               <a:ext uri="{91240B29-F687-4f45-9708-019B960494DF}">
-                <a14:hiddenLine xmlns:p14="http://schemas.microsoft.com/office/powerpoint/2010/main" xmlns:a14="http://schemas.microsoft.com/office/drawing/2010/main" xmlns:a16="http://schemas.microsoft.com/office/drawing/2014/main" xmlns="" w="9525">
+                <a14:hiddenLine xmlns="" xmlns:a16="http://schemas.microsoft.com/office/drawing/2014/main" xmlns:a14="http://schemas.microsoft.com/office/drawing/2010/main" xmlns:p14="http://schemas.microsoft.com/office/powerpoint/2010/main" w="9525">
                   <a:solidFill>
                     <a:srgbClr val="000000"/>
                   </a:solidFill>
@@ -46565,7 +49353,7 @@
             </a:ln>
             <a:extLst>
               <a:ext uri="{91240B29-F687-4f45-9708-019B960494DF}">
-                <a14:hiddenLine xmlns:p14="http://schemas.microsoft.com/office/powerpoint/2010/main" xmlns:a14="http://schemas.microsoft.com/office/drawing/2010/main" xmlns:a16="http://schemas.microsoft.com/office/drawing/2014/main" xmlns="" w="9525">
+                <a14:hiddenLine xmlns="" xmlns:a16="http://schemas.microsoft.com/office/drawing/2014/main" xmlns:a14="http://schemas.microsoft.com/office/drawing/2010/main" xmlns:p14="http://schemas.microsoft.com/office/powerpoint/2010/main" w="9525">
                   <a:solidFill>
                     <a:srgbClr val="000000"/>
                   </a:solidFill>
@@ -46677,7 +49465,7 @@
             </a:ln>
             <a:extLst>
               <a:ext uri="{91240B29-F687-4f45-9708-019B960494DF}">
-                <a14:hiddenLine xmlns:p14="http://schemas.microsoft.com/office/powerpoint/2010/main" xmlns:a14="http://schemas.microsoft.com/office/drawing/2010/main" xmlns:a16="http://schemas.microsoft.com/office/drawing/2014/main" xmlns="" w="9525">
+                <a14:hiddenLine xmlns="" xmlns:a16="http://schemas.microsoft.com/office/drawing/2014/main" xmlns:a14="http://schemas.microsoft.com/office/drawing/2010/main" xmlns:p14="http://schemas.microsoft.com/office/powerpoint/2010/main" w="9525">
                   <a:solidFill>
                     <a:srgbClr val="000000"/>
                   </a:solidFill>
@@ -46761,7 +49549,7 @@
             </a:ln>
             <a:extLst>
               <a:ext uri="{91240B29-F687-4f45-9708-019B960494DF}">
-                <a14:hiddenLine xmlns:p14="http://schemas.microsoft.com/office/powerpoint/2010/main" xmlns:a14="http://schemas.microsoft.com/office/drawing/2010/main" xmlns:a16="http://schemas.microsoft.com/office/drawing/2014/main" xmlns="" w="9525">
+                <a14:hiddenLine xmlns="" xmlns:a16="http://schemas.microsoft.com/office/drawing/2014/main" xmlns:a14="http://schemas.microsoft.com/office/drawing/2010/main" xmlns:p14="http://schemas.microsoft.com/office/powerpoint/2010/main" w="9525">
                   <a:solidFill>
                     <a:srgbClr val="000000"/>
                   </a:solidFill>
@@ -46903,7 +49691,7 @@
             </a:ln>
             <a:extLst>
               <a:ext uri="{91240B29-F687-4f45-9708-019B960494DF}">
-                <a14:hiddenLine xmlns:p14="http://schemas.microsoft.com/office/powerpoint/2010/main" xmlns:a14="http://schemas.microsoft.com/office/drawing/2010/main" xmlns:a16="http://schemas.microsoft.com/office/drawing/2014/main" xmlns="" w="9525">
+                <a14:hiddenLine xmlns="" xmlns:a16="http://schemas.microsoft.com/office/drawing/2014/main" xmlns:a14="http://schemas.microsoft.com/office/drawing/2010/main" xmlns:p14="http://schemas.microsoft.com/office/powerpoint/2010/main" w="9525">
                   <a:solidFill>
                     <a:srgbClr val="000000"/>
                   </a:solidFill>
@@ -46993,7 +49781,7 @@
             </a:ln>
             <a:extLst>
               <a:ext uri="{91240B29-F687-4f45-9708-019B960494DF}">
-                <a14:hiddenLine xmlns:p14="http://schemas.microsoft.com/office/powerpoint/2010/main" xmlns:a14="http://schemas.microsoft.com/office/drawing/2010/main" xmlns:a16="http://schemas.microsoft.com/office/drawing/2014/main" xmlns="" w="9525">
+                <a14:hiddenLine xmlns="" xmlns:a16="http://schemas.microsoft.com/office/drawing/2014/main" xmlns:a14="http://schemas.microsoft.com/office/drawing/2010/main" xmlns:p14="http://schemas.microsoft.com/office/powerpoint/2010/main" w="9525">
                   <a:solidFill>
                     <a:srgbClr val="000000"/>
                   </a:solidFill>
@@ -47105,7 +49893,7 @@
             </a:ln>
             <a:extLst>
               <a:ext uri="{91240B29-F687-4f45-9708-019B960494DF}">
-                <a14:hiddenLine xmlns:p14="http://schemas.microsoft.com/office/powerpoint/2010/main" xmlns:a14="http://schemas.microsoft.com/office/drawing/2010/main" xmlns:a16="http://schemas.microsoft.com/office/drawing/2014/main" xmlns="" w="9525">
+                <a14:hiddenLine xmlns="" xmlns:a16="http://schemas.microsoft.com/office/drawing/2014/main" xmlns:a14="http://schemas.microsoft.com/office/drawing/2010/main" xmlns:p14="http://schemas.microsoft.com/office/powerpoint/2010/main" w="9525">
                   <a:solidFill>
                     <a:srgbClr val="000000"/>
                   </a:solidFill>
@@ -47143,8 +49931,8 @@
         </p:nvSpPr>
         <p:spPr bwMode="auto">
           <a:xfrm>
-            <a:off x="6448425" y="2249487"/>
-            <a:ext cx="4598986" cy="3541714"/>
+            <a:off x="5025234" y="101751"/>
+            <a:ext cx="8366917" cy="3541714"/>
           </a:xfrm>
           <a:prstGeom prst="rect">
             <a:avLst/>
@@ -47541,10 +50329,10 @@
       </p:sp>
       <p:pic>
         <p:nvPicPr>
-          <p:cNvPr id="6" name="Picture 5">
+          <p:cNvPr id="5" name="Picture 4">
             <a:extLst>
               <a:ext uri="{FF2B5EF4-FFF2-40B4-BE49-F238E27FC236}">
-                <a16:creationId xmlns:a16="http://schemas.microsoft.com/office/drawing/2014/main" id="{6B365FAA-0022-AE22-C682-60984645F62D}"/>
+                <a16:creationId xmlns:a16="http://schemas.microsoft.com/office/drawing/2014/main" id="{98519632-8091-0DE0-059A-61D9D72375E4}"/>
               </a:ext>
             </a:extLst>
           </p:cNvPr>
@@ -47561,21 +50349,63 @@
               </a:ext>
             </a:extLst>
           </a:blip>
-          <a:srcRect l="275" r="45008"/>
           <a:stretch>
             <a:fillRect/>
           </a:stretch>
         </p:blipFill>
         <p:spPr>
           <a:xfrm>
-            <a:off x="-5597" y="10"/>
-            <a:ext cx="6101597" cy="6857990"/>
+            <a:off x="-1" y="2747963"/>
+            <a:ext cx="12198297" cy="4124897"/>
           </a:xfrm>
           <a:prstGeom prst="rect">
             <a:avLst/>
           </a:prstGeom>
         </p:spPr>
       </p:pic>
+      <p:cxnSp>
+        <p:nvCxnSpPr>
+          <p:cNvPr id="8" name="Straight Connector 7">
+            <a:extLst>
+              <a:ext uri="{FF2B5EF4-FFF2-40B4-BE49-F238E27FC236}">
+                <a16:creationId xmlns:a16="http://schemas.microsoft.com/office/drawing/2014/main" id="{EE412585-E34A-B7A1-6AF8-2B101542845F}"/>
+              </a:ext>
+            </a:extLst>
+          </p:cNvPr>
+          <p:cNvCxnSpPr>
+            <a:cxnSpLocks/>
+          </p:cNvCxnSpPr>
+          <p:nvPr/>
+        </p:nvCxnSpPr>
+        <p:spPr>
+          <a:xfrm>
+            <a:off x="4813592" y="226219"/>
+            <a:ext cx="0" cy="1544638"/>
+          </a:xfrm>
+          <a:prstGeom prst="line">
+            <a:avLst/>
+          </a:prstGeom>
+          <a:ln w="19050">
+            <a:solidFill>
+              <a:schemeClr val="tx1"/>
+            </a:solidFill>
+          </a:ln>
+        </p:spPr>
+        <p:style>
+          <a:lnRef idx="1">
+            <a:schemeClr val="dk1"/>
+          </a:lnRef>
+          <a:fillRef idx="0">
+            <a:schemeClr val="dk1"/>
+          </a:fillRef>
+          <a:effectRef idx="0">
+            <a:schemeClr val="dk1"/>
+          </a:effectRef>
+          <a:fontRef idx="minor">
+            <a:schemeClr val="tx1"/>
+          </a:fontRef>
+        </p:style>
+      </p:cxnSp>
     </p:spTree>
     <p:extLst>
       <p:ext uri="{BB962C8B-B14F-4D97-AF65-F5344CB8AC3E}">
@@ -47586,6 +50416,9 @@
   <p:clrMapOvr>
     <a:masterClrMapping/>
   </p:clrMapOvr>
+  <p:transition spd="med">
+    <p:pull/>
+  </p:transition>
   <p:timing>
     <p:tnLst>
       <p:par>

--- a/VSCA11Y_Prezentacija.pptx
+++ b/VSCA11Y_Prezentacija.pptx
@@ -19,7 +19,9 @@
     <p:sldId id="270" r:id="rId13"/>
     <p:sldId id="264" r:id="rId14"/>
     <p:sldId id="265" r:id="rId15"/>
-    <p:sldId id="266" r:id="rId16"/>
+    <p:sldId id="271" r:id="rId16"/>
+    <p:sldId id="272" r:id="rId17"/>
+    <p:sldId id="266" r:id="rId18"/>
   </p:sldIdLst>
   <p:sldSz cx="12192000" cy="6858000"/>
   <p:notesSz cx="6858000" cy="9144000"/>
@@ -6762,7 +6764,7 @@
           <a:noFill/>
           <a:extLst>
             <a:ext uri="{909E8E84-426E-40dd-AFC4-6F175D3DCCD1}">
-              <a14:hiddenFill xmlns:a14="http://schemas.microsoft.com/office/drawing/2010/main" xmlns="">
+              <a14:hiddenFill xmlns="" xmlns:a14="http://schemas.microsoft.com/office/drawing/2010/main">
                 <a:solidFill>
                   <a:srgbClr val="FFFFFF"/>
                 </a:solidFill>
@@ -6822,7 +6824,7 @@
             </a:ln>
             <a:extLst>
               <a:ext uri="{91240B29-F687-4f45-9708-019B960494DF}">
-                <a14:hiddenLine xmlns:a14="http://schemas.microsoft.com/office/drawing/2010/main" xmlns="" w="9525">
+                <a14:hiddenLine xmlns="" xmlns:a14="http://schemas.microsoft.com/office/drawing/2010/main" w="9525">
                   <a:solidFill>
                     <a:srgbClr val="000000"/>
                   </a:solidFill>
@@ -6919,7 +6921,7 @@
             </a:ln>
             <a:extLst>
               <a:ext uri="{91240B29-F687-4f45-9708-019B960494DF}">
-                <a14:hiddenLine xmlns:a14="http://schemas.microsoft.com/office/drawing/2010/main" xmlns="" w="9525">
+                <a14:hiddenLine xmlns="" xmlns:a14="http://schemas.microsoft.com/office/drawing/2010/main" w="9525">
                   <a:solidFill>
                     <a:srgbClr val="000000"/>
                   </a:solidFill>
@@ -7016,7 +7018,7 @@
             </a:ln>
             <a:extLst>
               <a:ext uri="{91240B29-F687-4f45-9708-019B960494DF}">
-                <a14:hiddenLine xmlns:a14="http://schemas.microsoft.com/office/drawing/2010/main" xmlns="" w="9525">
+                <a14:hiddenLine xmlns="" xmlns:a14="http://schemas.microsoft.com/office/drawing/2010/main" w="9525">
                   <a:solidFill>
                     <a:srgbClr val="000000"/>
                   </a:solidFill>
@@ -7057,7 +7059,7 @@
             </a:ln>
             <a:extLst>
               <a:ext uri="{91240B29-F687-4f45-9708-019B960494DF}">
-                <a14:hiddenLine xmlns:a14="http://schemas.microsoft.com/office/drawing/2010/main" xmlns="" w="9525">
+                <a14:hiddenLine xmlns="" xmlns:a14="http://schemas.microsoft.com/office/drawing/2010/main" w="9525">
                   <a:solidFill>
                     <a:srgbClr val="000000"/>
                   </a:solidFill>
@@ -7154,7 +7156,7 @@
             </a:ln>
             <a:extLst>
               <a:ext uri="{91240B29-F687-4f45-9708-019B960494DF}">
-                <a14:hiddenLine xmlns:a14="http://schemas.microsoft.com/office/drawing/2010/main" xmlns="" w="9525">
+                <a14:hiddenLine xmlns="" xmlns:a14="http://schemas.microsoft.com/office/drawing/2010/main" w="9525">
                   <a:solidFill>
                     <a:srgbClr val="000000"/>
                   </a:solidFill>
@@ -7223,7 +7225,7 @@
             </a:ln>
             <a:extLst>
               <a:ext uri="{91240B29-F687-4f45-9708-019B960494DF}">
-                <a14:hiddenLine xmlns:a14="http://schemas.microsoft.com/office/drawing/2010/main" xmlns="" w="9525">
+                <a14:hiddenLine xmlns="" xmlns:a14="http://schemas.microsoft.com/office/drawing/2010/main" w="9525">
                   <a:solidFill>
                     <a:srgbClr val="000000"/>
                   </a:solidFill>
@@ -7292,7 +7294,7 @@
             </a:ln>
             <a:extLst>
               <a:ext uri="{91240B29-F687-4f45-9708-019B960494DF}">
-                <a14:hiddenLine xmlns:a14="http://schemas.microsoft.com/office/drawing/2010/main" xmlns="" w="9525">
+                <a14:hiddenLine xmlns="" xmlns:a14="http://schemas.microsoft.com/office/drawing/2010/main" w="9525">
                   <a:solidFill>
                     <a:srgbClr val="000000"/>
                   </a:solidFill>
@@ -7389,7 +7391,7 @@
             </a:ln>
             <a:extLst>
               <a:ext uri="{91240B29-F687-4f45-9708-019B960494DF}">
-                <a14:hiddenLine xmlns:a14="http://schemas.microsoft.com/office/drawing/2010/main" xmlns="" w="9525">
+                <a14:hiddenLine xmlns="" xmlns:a14="http://schemas.microsoft.com/office/drawing/2010/main" w="9525">
                   <a:solidFill>
                     <a:srgbClr val="000000"/>
                   </a:solidFill>
@@ -7458,7 +7460,7 @@
             </a:ln>
             <a:extLst>
               <a:ext uri="{91240B29-F687-4f45-9708-019B960494DF}">
-                <a14:hiddenLine xmlns:a14="http://schemas.microsoft.com/office/drawing/2010/main" xmlns="" w="9525">
+                <a14:hiddenLine xmlns="" xmlns:a14="http://schemas.microsoft.com/office/drawing/2010/main" w="9525">
                   <a:solidFill>
                     <a:srgbClr val="000000"/>
                   </a:solidFill>
@@ -7527,7 +7529,7 @@
             </a:ln>
             <a:extLst>
               <a:ext uri="{91240B29-F687-4f45-9708-019B960494DF}">
-                <a14:hiddenLine xmlns:a14="http://schemas.microsoft.com/office/drawing/2010/main" xmlns="" w="9525">
+                <a14:hiddenLine xmlns="" xmlns:a14="http://schemas.microsoft.com/office/drawing/2010/main" w="9525">
                   <a:solidFill>
                     <a:srgbClr val="000000"/>
                   </a:solidFill>
@@ -7624,7 +7626,7 @@
             </a:ln>
             <a:extLst>
               <a:ext uri="{91240B29-F687-4f45-9708-019B960494DF}">
-                <a14:hiddenLine xmlns:a14="http://schemas.microsoft.com/office/drawing/2010/main" xmlns="" w="9525">
+                <a14:hiddenLine xmlns="" xmlns:a14="http://schemas.microsoft.com/office/drawing/2010/main" w="9525">
                   <a:solidFill>
                     <a:srgbClr val="000000"/>
                   </a:solidFill>
@@ -7721,7 +7723,7 @@
             </a:ln>
             <a:extLst>
               <a:ext uri="{91240B29-F687-4f45-9708-019B960494DF}">
-                <a14:hiddenLine xmlns:a14="http://schemas.microsoft.com/office/drawing/2010/main" xmlns="" w="9525">
+                <a14:hiddenLine xmlns="" xmlns:a14="http://schemas.microsoft.com/office/drawing/2010/main" w="9525">
                   <a:solidFill>
                     <a:srgbClr val="000000"/>
                   </a:solidFill>
@@ -7790,7 +7792,7 @@
             </a:ln>
             <a:extLst>
               <a:ext uri="{91240B29-F687-4f45-9708-019B960494DF}">
-                <a14:hiddenLine xmlns:a14="http://schemas.microsoft.com/office/drawing/2010/main" xmlns="" w="9525">
+                <a14:hiddenLine xmlns="" xmlns:a14="http://schemas.microsoft.com/office/drawing/2010/main" w="9525">
                   <a:solidFill>
                     <a:srgbClr val="000000"/>
                   </a:solidFill>
@@ -7907,7 +7909,7 @@
             </a:ln>
             <a:extLst>
               <a:ext uri="{91240B29-F687-4f45-9708-019B960494DF}">
-                <a14:hiddenLine xmlns:a14="http://schemas.microsoft.com/office/drawing/2010/main" xmlns="" w="9525">
+                <a14:hiddenLine xmlns="" xmlns:a14="http://schemas.microsoft.com/office/drawing/2010/main" w="9525">
                   <a:solidFill>
                     <a:srgbClr val="000000"/>
                   </a:solidFill>
@@ -7976,7 +7978,7 @@
             </a:ln>
             <a:extLst>
               <a:ext uri="{91240B29-F687-4f45-9708-019B960494DF}">
-                <a14:hiddenLine xmlns:a14="http://schemas.microsoft.com/office/drawing/2010/main" xmlns="" w="9525">
+                <a14:hiddenLine xmlns="" xmlns:a14="http://schemas.microsoft.com/office/drawing/2010/main" w="9525">
                   <a:solidFill>
                     <a:srgbClr val="000000"/>
                   </a:solidFill>
@@ -8073,7 +8075,7 @@
             </a:ln>
             <a:extLst>
               <a:ext uri="{91240B29-F687-4f45-9708-019B960494DF}">
-                <a14:hiddenLine xmlns:a14="http://schemas.microsoft.com/office/drawing/2010/main" xmlns="" w="9525">
+                <a14:hiddenLine xmlns="" xmlns:a14="http://schemas.microsoft.com/office/drawing/2010/main" w="9525">
                   <a:solidFill>
                     <a:srgbClr val="000000"/>
                   </a:solidFill>
@@ -8170,7 +8172,7 @@
             </a:ln>
             <a:extLst>
               <a:ext uri="{91240B29-F687-4f45-9708-019B960494DF}">
-                <a14:hiddenLine xmlns:a14="http://schemas.microsoft.com/office/drawing/2010/main" xmlns="" w="9525">
+                <a14:hiddenLine xmlns="" xmlns:a14="http://schemas.microsoft.com/office/drawing/2010/main" w="9525">
                   <a:solidFill>
                     <a:srgbClr val="000000"/>
                   </a:solidFill>
@@ -8239,7 +8241,7 @@
             </a:ln>
             <a:extLst>
               <a:ext uri="{91240B29-F687-4f45-9708-019B960494DF}">
-                <a14:hiddenLine xmlns:a14="http://schemas.microsoft.com/office/drawing/2010/main" xmlns="" w="9525">
+                <a14:hiddenLine xmlns="" xmlns:a14="http://schemas.microsoft.com/office/drawing/2010/main" w="9525">
                   <a:solidFill>
                     <a:srgbClr val="000000"/>
                   </a:solidFill>
@@ -8336,7 +8338,7 @@
             </a:ln>
             <a:extLst>
               <a:ext uri="{91240B29-F687-4f45-9708-019B960494DF}">
-                <a14:hiddenLine xmlns:a14="http://schemas.microsoft.com/office/drawing/2010/main" xmlns="" w="9525">
+                <a14:hiddenLine xmlns="" xmlns:a14="http://schemas.microsoft.com/office/drawing/2010/main" w="9525">
                   <a:solidFill>
                     <a:srgbClr val="000000"/>
                   </a:solidFill>
@@ -8433,7 +8435,7 @@
             </a:ln>
             <a:extLst>
               <a:ext uri="{91240B29-F687-4f45-9708-019B960494DF}">
-                <a14:hiddenLine xmlns:a14="http://schemas.microsoft.com/office/drawing/2010/main" xmlns="" w="9525">
+                <a14:hiddenLine xmlns="" xmlns:a14="http://schemas.microsoft.com/office/drawing/2010/main" w="9525">
                   <a:solidFill>
                     <a:srgbClr val="000000"/>
                   </a:solidFill>
@@ -8496,7 +8498,7 @@
             </a:ln>
             <a:extLst>
               <a:ext uri="{91240B29-F687-4f45-9708-019B960494DF}">
-                <a14:hiddenLine xmlns:a14="http://schemas.microsoft.com/office/drawing/2010/main" xmlns="" w="9525">
+                <a14:hiddenLine xmlns="" xmlns:a14="http://schemas.microsoft.com/office/drawing/2010/main" w="9525">
                   <a:solidFill>
                     <a:srgbClr val="000000"/>
                   </a:solidFill>
@@ -8593,7 +8595,7 @@
             </a:ln>
             <a:extLst>
               <a:ext uri="{91240B29-F687-4f45-9708-019B960494DF}">
-                <a14:hiddenLine xmlns:a14="http://schemas.microsoft.com/office/drawing/2010/main" xmlns="" w="9525">
+                <a14:hiddenLine xmlns="" xmlns:a14="http://schemas.microsoft.com/office/drawing/2010/main" w="9525">
                   <a:solidFill>
                     <a:srgbClr val="000000"/>
                   </a:solidFill>
@@ -8656,7 +8658,7 @@
             </a:ln>
             <a:extLst>
               <a:ext uri="{91240B29-F687-4f45-9708-019B960494DF}">
-                <a14:hiddenLine xmlns:a14="http://schemas.microsoft.com/office/drawing/2010/main" xmlns="" w="9525">
+                <a14:hiddenLine xmlns="" xmlns:a14="http://schemas.microsoft.com/office/drawing/2010/main" w="9525">
                   <a:solidFill>
                     <a:srgbClr val="000000"/>
                   </a:solidFill>
@@ -8753,7 +8755,7 @@
             </a:ln>
             <a:extLst>
               <a:ext uri="{91240B29-F687-4f45-9708-019B960494DF}">
-                <a14:hiddenLine xmlns:a14="http://schemas.microsoft.com/office/drawing/2010/main" xmlns="" w="9525">
+                <a14:hiddenLine xmlns="" xmlns:a14="http://schemas.microsoft.com/office/drawing/2010/main" w="9525">
                   <a:solidFill>
                     <a:srgbClr val="000000"/>
                   </a:solidFill>
@@ -8828,7 +8830,7 @@
             </a:ln>
             <a:extLst>
               <a:ext uri="{91240B29-F687-4f45-9708-019B960494DF}">
-                <a14:hiddenLine xmlns:a14="http://schemas.microsoft.com/office/drawing/2010/main" xmlns="" w="9525">
+                <a14:hiddenLine xmlns="" xmlns:a14="http://schemas.microsoft.com/office/drawing/2010/main" w="9525">
                   <a:solidFill>
                     <a:srgbClr val="000000"/>
                   </a:solidFill>
@@ -8925,7 +8927,7 @@
             </a:ln>
             <a:extLst>
               <a:ext uri="{91240B29-F687-4f45-9708-019B960494DF}">
-                <a14:hiddenLine xmlns:a14="http://schemas.microsoft.com/office/drawing/2010/main" xmlns="" w="9525">
+                <a14:hiddenLine xmlns="" xmlns:a14="http://schemas.microsoft.com/office/drawing/2010/main" w="9525">
                   <a:solidFill>
                     <a:srgbClr val="000000"/>
                   </a:solidFill>
@@ -9000,7 +9002,7 @@
             </a:ln>
             <a:extLst>
               <a:ext uri="{91240B29-F687-4f45-9708-019B960494DF}">
-                <a14:hiddenLine xmlns:a14="http://schemas.microsoft.com/office/drawing/2010/main" xmlns="" w="9525">
+                <a14:hiddenLine xmlns="" xmlns:a14="http://schemas.microsoft.com/office/drawing/2010/main" w="9525">
                   <a:solidFill>
                     <a:srgbClr val="000000"/>
                   </a:solidFill>
@@ -9097,7 +9099,7 @@
             </a:ln>
             <a:extLst>
               <a:ext uri="{91240B29-F687-4f45-9708-019B960494DF}">
-                <a14:hiddenLine xmlns:a14="http://schemas.microsoft.com/office/drawing/2010/main" xmlns="" w="9525">
+                <a14:hiddenLine xmlns="" xmlns:a14="http://schemas.microsoft.com/office/drawing/2010/main" w="9525">
                   <a:solidFill>
                     <a:srgbClr val="000000"/>
                   </a:solidFill>
@@ -9138,7 +9140,7 @@
             </a:ln>
             <a:extLst>
               <a:ext uri="{91240B29-F687-4f45-9708-019B960494DF}">
-                <a14:hiddenLine xmlns:a14="http://schemas.microsoft.com/office/drawing/2010/main" xmlns="" w="9525">
+                <a14:hiddenLine xmlns="" xmlns:a14="http://schemas.microsoft.com/office/drawing/2010/main" w="9525">
                   <a:solidFill>
                     <a:srgbClr val="000000"/>
                   </a:solidFill>
@@ -9235,7 +9237,7 @@
             </a:ln>
             <a:extLst>
               <a:ext uri="{91240B29-F687-4f45-9708-019B960494DF}">
-                <a14:hiddenLine xmlns:a14="http://schemas.microsoft.com/office/drawing/2010/main" xmlns="" w="9525">
+                <a14:hiddenLine xmlns="" xmlns:a14="http://schemas.microsoft.com/office/drawing/2010/main" w="9525">
                   <a:solidFill>
                     <a:srgbClr val="000000"/>
                   </a:solidFill>
@@ -9304,7 +9306,7 @@
             </a:ln>
             <a:extLst>
               <a:ext uri="{91240B29-F687-4f45-9708-019B960494DF}">
-                <a14:hiddenLine xmlns:a14="http://schemas.microsoft.com/office/drawing/2010/main" xmlns="" w="9525">
+                <a14:hiddenLine xmlns="" xmlns:a14="http://schemas.microsoft.com/office/drawing/2010/main" w="9525">
                   <a:solidFill>
                     <a:srgbClr val="000000"/>
                   </a:solidFill>
@@ -9373,7 +9375,7 @@
             </a:ln>
             <a:extLst>
               <a:ext uri="{91240B29-F687-4f45-9708-019B960494DF}">
-                <a14:hiddenLine xmlns:a14="http://schemas.microsoft.com/office/drawing/2010/main" xmlns="" w="9525">
+                <a14:hiddenLine xmlns="" xmlns:a14="http://schemas.microsoft.com/office/drawing/2010/main" w="9525">
                   <a:solidFill>
                     <a:srgbClr val="000000"/>
                   </a:solidFill>
@@ -9470,7 +9472,7 @@
             </a:ln>
             <a:extLst>
               <a:ext uri="{91240B29-F687-4f45-9708-019B960494DF}">
-                <a14:hiddenLine xmlns:a14="http://schemas.microsoft.com/office/drawing/2010/main" xmlns="" w="9525">
+                <a14:hiddenLine xmlns="" xmlns:a14="http://schemas.microsoft.com/office/drawing/2010/main" w="9525">
                   <a:solidFill>
                     <a:srgbClr val="000000"/>
                   </a:solidFill>
@@ -9545,7 +9547,7 @@
             </a:ln>
             <a:extLst>
               <a:ext uri="{91240B29-F687-4f45-9708-019B960494DF}">
-                <a14:hiddenLine xmlns:a14="http://schemas.microsoft.com/office/drawing/2010/main" xmlns="" w="9525">
+                <a14:hiddenLine xmlns="" xmlns:a14="http://schemas.microsoft.com/office/drawing/2010/main" w="9525">
                   <a:solidFill>
                     <a:srgbClr val="000000"/>
                   </a:solidFill>
@@ -9614,7 +9616,7 @@
             </a:ln>
             <a:extLst>
               <a:ext uri="{91240B29-F687-4f45-9708-019B960494DF}">
-                <a14:hiddenLine xmlns:a14="http://schemas.microsoft.com/office/drawing/2010/main" xmlns="" w="9525">
+                <a14:hiddenLine xmlns="" xmlns:a14="http://schemas.microsoft.com/office/drawing/2010/main" w="9525">
                   <a:solidFill>
                     <a:srgbClr val="000000"/>
                   </a:solidFill>
@@ -9711,7 +9713,7 @@
             </a:ln>
             <a:extLst>
               <a:ext uri="{91240B29-F687-4f45-9708-019B960494DF}">
-                <a14:hiddenLine xmlns:a14="http://schemas.microsoft.com/office/drawing/2010/main" xmlns="" w="9525">
+                <a14:hiddenLine xmlns="" xmlns:a14="http://schemas.microsoft.com/office/drawing/2010/main" w="9525">
                   <a:solidFill>
                     <a:srgbClr val="000000"/>
                   </a:solidFill>
@@ -9780,7 +9782,7 @@
             </a:ln>
             <a:extLst>
               <a:ext uri="{91240B29-F687-4f45-9708-019B960494DF}">
-                <a14:hiddenLine xmlns:a14="http://schemas.microsoft.com/office/drawing/2010/main" xmlns="" w="9525">
+                <a14:hiddenLine xmlns="" xmlns:a14="http://schemas.microsoft.com/office/drawing/2010/main" w="9525">
                   <a:solidFill>
                     <a:srgbClr val="000000"/>
                   </a:solidFill>
@@ -9877,7 +9879,7 @@
             </a:ln>
             <a:extLst>
               <a:ext uri="{91240B29-F687-4f45-9708-019B960494DF}">
-                <a14:hiddenLine xmlns:a14="http://schemas.microsoft.com/office/drawing/2010/main" xmlns="" w="9525">
+                <a14:hiddenLine xmlns="" xmlns:a14="http://schemas.microsoft.com/office/drawing/2010/main" w="9525">
                   <a:solidFill>
                     <a:srgbClr val="000000"/>
                   </a:solidFill>
@@ -9946,7 +9948,7 @@
             </a:ln>
             <a:extLst>
               <a:ext uri="{91240B29-F687-4f45-9708-019B960494DF}">
-                <a14:hiddenLine xmlns:a14="http://schemas.microsoft.com/office/drawing/2010/main" xmlns="" w="9525">
+                <a14:hiddenLine xmlns="" xmlns:a14="http://schemas.microsoft.com/office/drawing/2010/main" w="9525">
                   <a:solidFill>
                     <a:srgbClr val="000000"/>
                   </a:solidFill>
@@ -10043,7 +10045,7 @@
             </a:ln>
             <a:extLst>
               <a:ext uri="{91240B29-F687-4f45-9708-019B960494DF}">
-                <a14:hiddenLine xmlns:a14="http://schemas.microsoft.com/office/drawing/2010/main" xmlns="" w="9525">
+                <a14:hiddenLine xmlns="" xmlns:a14="http://schemas.microsoft.com/office/drawing/2010/main" w="9525">
                   <a:solidFill>
                     <a:srgbClr val="000000"/>
                   </a:solidFill>
@@ -10084,7 +10086,7 @@
             </a:ln>
             <a:extLst>
               <a:ext uri="{91240B29-F687-4f45-9708-019B960494DF}">
-                <a14:hiddenLine xmlns:a14="http://schemas.microsoft.com/office/drawing/2010/main" xmlns="" w="9525">
+                <a14:hiddenLine xmlns="" xmlns:a14="http://schemas.microsoft.com/office/drawing/2010/main" w="9525">
                   <a:solidFill>
                     <a:srgbClr val="000000"/>
                   </a:solidFill>
@@ -10156,7 +10158,7 @@
             </a:ln>
             <a:extLst>
               <a:ext uri="{91240B29-F687-4f45-9708-019B960494DF}">
-                <a14:hiddenLine xmlns:a14="http://schemas.microsoft.com/office/drawing/2010/main" xmlns="" w="9525">
+                <a14:hiddenLine xmlns="" xmlns:a14="http://schemas.microsoft.com/office/drawing/2010/main" w="9525">
                   <a:solidFill>
                     <a:srgbClr val="000000"/>
                   </a:solidFill>
@@ -10253,7 +10255,7 @@
             </a:ln>
             <a:extLst>
               <a:ext uri="{91240B29-F687-4f45-9708-019B960494DF}">
-                <a14:hiddenLine xmlns:a14="http://schemas.microsoft.com/office/drawing/2010/main" xmlns="" w="9525">
+                <a14:hiddenLine xmlns="" xmlns:a14="http://schemas.microsoft.com/office/drawing/2010/main" w="9525">
                   <a:solidFill>
                     <a:srgbClr val="000000"/>
                   </a:solidFill>
@@ -10322,7 +10324,7 @@
             </a:ln>
             <a:extLst>
               <a:ext uri="{91240B29-F687-4f45-9708-019B960494DF}">
-                <a14:hiddenLine xmlns:a14="http://schemas.microsoft.com/office/drawing/2010/main" xmlns="" w="9525">
+                <a14:hiddenLine xmlns="" xmlns:a14="http://schemas.microsoft.com/office/drawing/2010/main" w="9525">
                   <a:solidFill>
                     <a:srgbClr val="000000"/>
                   </a:solidFill>
@@ -10419,7 +10421,7 @@
             </a:ln>
             <a:extLst>
               <a:ext uri="{91240B29-F687-4f45-9708-019B960494DF}">
-                <a14:hiddenLine xmlns:a14="http://schemas.microsoft.com/office/drawing/2010/main" xmlns="" w="9525">
+                <a14:hiddenLine xmlns="" xmlns:a14="http://schemas.microsoft.com/office/drawing/2010/main" w="9525">
                   <a:solidFill>
                     <a:srgbClr val="000000"/>
                   </a:solidFill>
@@ -10516,7 +10518,7 @@
             </a:ln>
             <a:extLst>
               <a:ext uri="{91240B29-F687-4f45-9708-019B960494DF}">
-                <a14:hiddenLine xmlns:a14="http://schemas.microsoft.com/office/drawing/2010/main" xmlns="" w="9525">
+                <a14:hiddenLine xmlns="" xmlns:a14="http://schemas.microsoft.com/office/drawing/2010/main" w="9525">
                   <a:solidFill>
                     <a:srgbClr val="000000"/>
                   </a:solidFill>
@@ -10588,7 +10590,7 @@
             </a:ln>
             <a:extLst>
               <a:ext uri="{91240B29-F687-4f45-9708-019B960494DF}">
-                <a14:hiddenLine xmlns:a14="http://schemas.microsoft.com/office/drawing/2010/main" xmlns="" w="9525">
+                <a14:hiddenLine xmlns="" xmlns:a14="http://schemas.microsoft.com/office/drawing/2010/main" w="9525">
                   <a:solidFill>
                     <a:srgbClr val="000000"/>
                   </a:solidFill>
@@ -10657,7 +10659,7 @@
             </a:ln>
             <a:extLst>
               <a:ext uri="{91240B29-F687-4f45-9708-019B960494DF}">
-                <a14:hiddenLine xmlns:a14="http://schemas.microsoft.com/office/drawing/2010/main" xmlns="" w="9525">
+                <a14:hiddenLine xmlns="" xmlns:a14="http://schemas.microsoft.com/office/drawing/2010/main" w="9525">
                   <a:solidFill>
                     <a:srgbClr val="000000"/>
                   </a:solidFill>
@@ -10754,7 +10756,7 @@
             </a:ln>
             <a:extLst>
               <a:ext uri="{91240B29-F687-4f45-9708-019B960494DF}">
-                <a14:hiddenLine xmlns:a14="http://schemas.microsoft.com/office/drawing/2010/main" xmlns="" w="9525">
+                <a14:hiddenLine xmlns="" xmlns:a14="http://schemas.microsoft.com/office/drawing/2010/main" w="9525">
                   <a:solidFill>
                     <a:srgbClr val="000000"/>
                   </a:solidFill>
@@ -10851,7 +10853,7 @@
             </a:ln>
             <a:extLst>
               <a:ext uri="{91240B29-F687-4f45-9708-019B960494DF}">
-                <a14:hiddenLine xmlns:a14="http://schemas.microsoft.com/office/drawing/2010/main" xmlns="" w="9525">
+                <a14:hiddenLine xmlns="" xmlns:a14="http://schemas.microsoft.com/office/drawing/2010/main" w="9525">
                   <a:solidFill>
                     <a:srgbClr val="000000"/>
                   </a:solidFill>
@@ -10920,7 +10922,7 @@
             </a:ln>
             <a:extLst>
               <a:ext uri="{91240B29-F687-4f45-9708-019B960494DF}">
-                <a14:hiddenLine xmlns:a14="http://schemas.microsoft.com/office/drawing/2010/main" xmlns="" w="9525">
+                <a14:hiddenLine xmlns="" xmlns:a14="http://schemas.microsoft.com/office/drawing/2010/main" w="9525">
                   <a:solidFill>
                     <a:srgbClr val="000000"/>
                   </a:solidFill>
@@ -11047,7 +11049,7 @@
             </a:ln>
             <a:extLst>
               <a:ext uri="{91240B29-F687-4f45-9708-019B960494DF}">
-                <a14:hiddenLine xmlns:a14="http://schemas.microsoft.com/office/drawing/2010/main" xmlns="" w="9525">
+                <a14:hiddenLine xmlns="" xmlns:a14="http://schemas.microsoft.com/office/drawing/2010/main" w="9525">
                   <a:solidFill>
                     <a:srgbClr val="000000"/>
                   </a:solidFill>
@@ -11122,7 +11124,7 @@
             </a:ln>
             <a:extLst>
               <a:ext uri="{91240B29-F687-4f45-9708-019B960494DF}">
-                <a14:hiddenLine xmlns:a14="http://schemas.microsoft.com/office/drawing/2010/main" xmlns="" w="9525">
+                <a14:hiddenLine xmlns="" xmlns:a14="http://schemas.microsoft.com/office/drawing/2010/main" w="9525">
                   <a:solidFill>
                     <a:srgbClr val="000000"/>
                   </a:solidFill>
@@ -11219,7 +11221,7 @@
             </a:ln>
             <a:extLst>
               <a:ext uri="{91240B29-F687-4f45-9708-019B960494DF}">
-                <a14:hiddenLine xmlns:a14="http://schemas.microsoft.com/office/drawing/2010/main" xmlns="" w="9525">
+                <a14:hiddenLine xmlns="" xmlns:a14="http://schemas.microsoft.com/office/drawing/2010/main" w="9525">
                   <a:solidFill>
                     <a:srgbClr val="000000"/>
                   </a:solidFill>
@@ -11366,7 +11368,7 @@
           <a:p>
             <a:fld id="{6733B157-BC8D-485A-B099-210699CD19FB}" type="datetimeFigureOut">
               <a:rPr lang="en-US" smtClean="0"/>
-              <a:t>4/5/2026</a:t>
+              <a:t>4/6/2026</a:t>
             </a:fld>
             <a:endParaRPr lang="en-US"/>
           </a:p>
@@ -11633,7 +11635,7 @@
           <a:p>
             <a:fld id="{6733B157-BC8D-485A-B099-210699CD19FB}" type="datetimeFigureOut">
               <a:rPr lang="en-US" smtClean="0"/>
-              <a:t>4/5/2026</a:t>
+              <a:t>4/6/2026</a:t>
             </a:fld>
             <a:endParaRPr lang="en-US"/>
           </a:p>
@@ -11829,7 +11831,7 @@
           <a:p>
             <a:fld id="{6733B157-BC8D-485A-B099-210699CD19FB}" type="datetimeFigureOut">
               <a:rPr lang="en-US" smtClean="0"/>
-              <a:t>4/5/2026</a:t>
+              <a:t>4/6/2026</a:t>
             </a:fld>
             <a:endParaRPr lang="en-US"/>
           </a:p>
@@ -12092,7 +12094,7 @@
           <a:p>
             <a:fld id="{6733B157-BC8D-485A-B099-210699CD19FB}" type="datetimeFigureOut">
               <a:rPr lang="en-US" smtClean="0"/>
-              <a:t>4/5/2026</a:t>
+              <a:t>4/6/2026</a:t>
             </a:fld>
             <a:endParaRPr lang="en-US"/>
           </a:p>
@@ -12526,7 +12528,7 @@
           <a:p>
             <a:fld id="{6733B157-BC8D-485A-B099-210699CD19FB}" type="datetimeFigureOut">
               <a:rPr lang="en-US" smtClean="0"/>
-              <a:t>4/5/2026</a:t>
+              <a:t>4/6/2026</a:t>
             </a:fld>
             <a:endParaRPr lang="en-US"/>
           </a:p>
@@ -13072,7 +13074,7 @@
           <a:p>
             <a:fld id="{6733B157-BC8D-485A-B099-210699CD19FB}" type="datetimeFigureOut">
               <a:rPr lang="en-US" smtClean="0"/>
-              <a:t>4/5/2026</a:t>
+              <a:t>4/6/2026</a:t>
             </a:fld>
             <a:endParaRPr lang="en-US"/>
           </a:p>
@@ -13792,7 +13794,7 @@
           <a:p>
             <a:fld id="{6733B157-BC8D-485A-B099-210699CD19FB}" type="datetimeFigureOut">
               <a:rPr lang="en-US" smtClean="0"/>
-              <a:t>4/5/2026</a:t>
+              <a:t>4/6/2026</a:t>
             </a:fld>
             <a:endParaRPr lang="en-US"/>
           </a:p>
@@ -13962,7 +13964,7 @@
           <a:p>
             <a:fld id="{6733B157-BC8D-485A-B099-210699CD19FB}" type="datetimeFigureOut">
               <a:rPr lang="en-US" smtClean="0"/>
-              <a:t>4/5/2026</a:t>
+              <a:t>4/6/2026</a:t>
             </a:fld>
             <a:endParaRPr lang="en-US"/>
           </a:p>
@@ -14142,7 +14144,7 @@
           <a:p>
             <a:fld id="{6733B157-BC8D-485A-B099-210699CD19FB}" type="datetimeFigureOut">
               <a:rPr lang="en-US" smtClean="0"/>
-              <a:t>4/5/2026</a:t>
+              <a:t>4/6/2026</a:t>
             </a:fld>
             <a:endParaRPr lang="en-US"/>
           </a:p>
@@ -14312,7 +14314,7 @@
           <a:p>
             <a:fld id="{6733B157-BC8D-485A-B099-210699CD19FB}" type="datetimeFigureOut">
               <a:rPr lang="en-US" smtClean="0"/>
-              <a:t>4/5/2026</a:t>
+              <a:t>4/6/2026</a:t>
             </a:fld>
             <a:endParaRPr lang="en-US"/>
           </a:p>
@@ -14562,7 +14564,7 @@
           <a:p>
             <a:fld id="{6733B157-BC8D-485A-B099-210699CD19FB}" type="datetimeFigureOut">
               <a:rPr lang="en-US" smtClean="0"/>
-              <a:t>4/5/2026</a:t>
+              <a:t>4/6/2026</a:t>
             </a:fld>
             <a:endParaRPr lang="en-US"/>
           </a:p>
@@ -14794,7 +14796,7 @@
           <a:p>
             <a:fld id="{6733B157-BC8D-485A-B099-210699CD19FB}" type="datetimeFigureOut">
               <a:rPr lang="en-US" smtClean="0"/>
-              <a:t>4/5/2026</a:t>
+              <a:t>4/6/2026</a:t>
             </a:fld>
             <a:endParaRPr lang="en-US"/>
           </a:p>
@@ -15175,7 +15177,7 @@
           <a:p>
             <a:fld id="{6733B157-BC8D-485A-B099-210699CD19FB}" type="datetimeFigureOut">
               <a:rPr lang="en-US" smtClean="0"/>
-              <a:t>4/5/2026</a:t>
+              <a:t>4/6/2026</a:t>
             </a:fld>
             <a:endParaRPr lang="en-US"/>
           </a:p>
@@ -15293,7 +15295,7 @@
           <a:p>
             <a:fld id="{6733B157-BC8D-485A-B099-210699CD19FB}" type="datetimeFigureOut">
               <a:rPr lang="en-US" smtClean="0"/>
-              <a:t>4/5/2026</a:t>
+              <a:t>4/6/2026</a:t>
             </a:fld>
             <a:endParaRPr lang="en-US"/>
           </a:p>
@@ -15388,7 +15390,7 @@
           <a:p>
             <a:fld id="{6733B157-BC8D-485A-B099-210699CD19FB}" type="datetimeFigureOut">
               <a:rPr lang="en-US" smtClean="0"/>
-              <a:t>4/5/2026</a:t>
+              <a:t>4/6/2026</a:t>
             </a:fld>
             <a:endParaRPr lang="en-US"/>
           </a:p>
@@ -15637,7 +15639,7 @@
           <a:p>
             <a:fld id="{6733B157-BC8D-485A-B099-210699CD19FB}" type="datetimeFigureOut">
               <a:rPr lang="en-US" smtClean="0"/>
-              <a:t>4/5/2026</a:t>
+              <a:t>4/6/2026</a:t>
             </a:fld>
             <a:endParaRPr lang="en-US"/>
           </a:p>
@@ -15917,7 +15919,7 @@
           <a:p>
             <a:fld id="{6733B157-BC8D-485A-B099-210699CD19FB}" type="datetimeFigureOut">
               <a:rPr lang="en-US" smtClean="0"/>
-              <a:t>4/5/2026</a:t>
+              <a:t>4/6/2026</a:t>
             </a:fld>
             <a:endParaRPr lang="en-US"/>
           </a:p>
@@ -16033,7 +16035,7 @@
           <a:noFill/>
           <a:extLst>
             <a:ext uri="{909E8E84-426E-40dd-AFC4-6F175D3DCCD1}">
-              <a14:hiddenFill xmlns:a14="http://schemas.microsoft.com/office/drawing/2010/main" xmlns="">
+              <a14:hiddenFill xmlns="" xmlns:a14="http://schemas.microsoft.com/office/drawing/2010/main">
                 <a:solidFill>
                   <a:srgbClr val="FFFFFF"/>
                 </a:solidFill>
@@ -16107,7 +16109,7 @@
               </a:ln>
               <a:extLst>
                 <a:ext uri="{91240B29-F687-4f45-9708-019B960494DF}">
-                  <a14:hiddenLine xmlns:a14="http://schemas.microsoft.com/office/drawing/2010/main" xmlns="" w="9525">
+                  <a14:hiddenLine xmlns="" xmlns:a14="http://schemas.microsoft.com/office/drawing/2010/main" w="9525">
                     <a:solidFill>
                       <a:srgbClr val="000000"/>
                     </a:solidFill>
@@ -16204,7 +16206,7 @@
               </a:ln>
               <a:extLst>
                 <a:ext uri="{91240B29-F687-4f45-9708-019B960494DF}">
-                  <a14:hiddenLine xmlns:a14="http://schemas.microsoft.com/office/drawing/2010/main" xmlns="" w="9525">
+                  <a14:hiddenLine xmlns="" xmlns:a14="http://schemas.microsoft.com/office/drawing/2010/main" w="9525">
                     <a:solidFill>
                       <a:srgbClr val="000000"/>
                     </a:solidFill>
@@ -16301,7 +16303,7 @@
               </a:ln>
               <a:extLst>
                 <a:ext uri="{91240B29-F687-4f45-9708-019B960494DF}">
-                  <a14:hiddenLine xmlns:a14="http://schemas.microsoft.com/office/drawing/2010/main" xmlns="" w="9525">
+                  <a14:hiddenLine xmlns="" xmlns:a14="http://schemas.microsoft.com/office/drawing/2010/main" w="9525">
                     <a:solidFill>
                       <a:srgbClr val="000000"/>
                     </a:solidFill>
@@ -16370,7 +16372,7 @@
               </a:ln>
               <a:extLst>
                 <a:ext uri="{91240B29-F687-4f45-9708-019B960494DF}">
-                  <a14:hiddenLine xmlns:a14="http://schemas.microsoft.com/office/drawing/2010/main" xmlns="" w="9525">
+                  <a14:hiddenLine xmlns="" xmlns:a14="http://schemas.microsoft.com/office/drawing/2010/main" w="9525">
                     <a:solidFill>
                       <a:srgbClr val="000000"/>
                     </a:solidFill>
@@ -16467,7 +16469,7 @@
               </a:ln>
               <a:extLst>
                 <a:ext uri="{91240B29-F687-4f45-9708-019B960494DF}">
-                  <a14:hiddenLine xmlns:a14="http://schemas.microsoft.com/office/drawing/2010/main" xmlns="" w="9525">
+                  <a14:hiddenLine xmlns="" xmlns:a14="http://schemas.microsoft.com/office/drawing/2010/main" w="9525">
                     <a:solidFill>
                       <a:srgbClr val="000000"/>
                     </a:solidFill>
@@ -16536,7 +16538,7 @@
               </a:ln>
               <a:extLst>
                 <a:ext uri="{91240B29-F687-4f45-9708-019B960494DF}">
-                  <a14:hiddenLine xmlns:a14="http://schemas.microsoft.com/office/drawing/2010/main" xmlns="" w="9525">
+                  <a14:hiddenLine xmlns="" xmlns:a14="http://schemas.microsoft.com/office/drawing/2010/main" w="9525">
                     <a:solidFill>
                       <a:srgbClr val="000000"/>
                     </a:solidFill>
@@ -16605,7 +16607,7 @@
               </a:ln>
               <a:extLst>
                 <a:ext uri="{91240B29-F687-4f45-9708-019B960494DF}">
-                  <a14:hiddenLine xmlns:a14="http://schemas.microsoft.com/office/drawing/2010/main" xmlns="" w="9525">
+                  <a14:hiddenLine xmlns="" xmlns:a14="http://schemas.microsoft.com/office/drawing/2010/main" w="9525">
                     <a:solidFill>
                       <a:srgbClr val="000000"/>
                     </a:solidFill>
@@ -16702,7 +16704,7 @@
               </a:ln>
               <a:extLst>
                 <a:ext uri="{91240B29-F687-4f45-9708-019B960494DF}">
-                  <a14:hiddenLine xmlns:a14="http://schemas.microsoft.com/office/drawing/2010/main" xmlns="" w="9525">
+                  <a14:hiddenLine xmlns="" xmlns:a14="http://schemas.microsoft.com/office/drawing/2010/main" w="9525">
                     <a:solidFill>
                       <a:srgbClr val="000000"/>
                     </a:solidFill>
@@ -16799,7 +16801,7 @@
               </a:ln>
               <a:extLst>
                 <a:ext uri="{91240B29-F687-4f45-9708-019B960494DF}">
-                  <a14:hiddenLine xmlns:a14="http://schemas.microsoft.com/office/drawing/2010/main" xmlns="" w="9525">
+                  <a14:hiddenLine xmlns="" xmlns:a14="http://schemas.microsoft.com/office/drawing/2010/main" w="9525">
                     <a:solidFill>
                       <a:srgbClr val="000000"/>
                     </a:solidFill>
@@ -16868,7 +16870,7 @@
               </a:ln>
               <a:extLst>
                 <a:ext uri="{91240B29-F687-4f45-9708-019B960494DF}">
-                  <a14:hiddenLine xmlns:a14="http://schemas.microsoft.com/office/drawing/2010/main" xmlns="" w="9525">
+                  <a14:hiddenLine xmlns="" xmlns:a14="http://schemas.microsoft.com/office/drawing/2010/main" w="9525">
                     <a:solidFill>
                       <a:srgbClr val="000000"/>
                     </a:solidFill>
@@ -16985,7 +16987,7 @@
               </a:ln>
               <a:extLst>
                 <a:ext uri="{91240B29-F687-4f45-9708-019B960494DF}">
-                  <a14:hiddenLine xmlns:a14="http://schemas.microsoft.com/office/drawing/2010/main" xmlns="" w="9525">
+                  <a14:hiddenLine xmlns="" xmlns:a14="http://schemas.microsoft.com/office/drawing/2010/main" w="9525">
                     <a:solidFill>
                       <a:srgbClr val="000000"/>
                     </a:solidFill>
@@ -17083,7 +17085,7 @@
               </a:ln>
               <a:extLst>
                 <a:ext uri="{91240B29-F687-4f45-9708-019B960494DF}">
-                  <a14:hiddenLine xmlns:a14="http://schemas.microsoft.com/office/drawing/2010/main" xmlns="" w="9525">
+                  <a14:hiddenLine xmlns="" xmlns:a14="http://schemas.microsoft.com/office/drawing/2010/main" w="9525">
                     <a:solidFill>
                       <a:srgbClr val="000000"/>
                     </a:solidFill>
@@ -17152,7 +17154,7 @@
               </a:ln>
               <a:extLst>
                 <a:ext uri="{91240B29-F687-4f45-9708-019B960494DF}">
-                  <a14:hiddenLine xmlns:a14="http://schemas.microsoft.com/office/drawing/2010/main" xmlns="" w="9525">
+                  <a14:hiddenLine xmlns="" xmlns:a14="http://schemas.microsoft.com/office/drawing/2010/main" w="9525">
                     <a:solidFill>
                       <a:srgbClr val="000000"/>
                     </a:solidFill>
@@ -17221,7 +17223,7 @@
               </a:ln>
               <a:extLst>
                 <a:ext uri="{91240B29-F687-4f45-9708-019B960494DF}">
-                  <a14:hiddenLine xmlns:a14="http://schemas.microsoft.com/office/drawing/2010/main" xmlns="" w="9525">
+                  <a14:hiddenLine xmlns="" xmlns:a14="http://schemas.microsoft.com/office/drawing/2010/main" w="9525">
                     <a:solidFill>
                       <a:srgbClr val="000000"/>
                     </a:solidFill>
@@ -17318,7 +17320,7 @@
               </a:ln>
               <a:extLst>
                 <a:ext uri="{91240B29-F687-4f45-9708-019B960494DF}">
-                  <a14:hiddenLine xmlns:a14="http://schemas.microsoft.com/office/drawing/2010/main" xmlns="" w="9525">
+                  <a14:hiddenLine xmlns="" xmlns:a14="http://schemas.microsoft.com/office/drawing/2010/main" w="9525">
                     <a:solidFill>
                       <a:srgbClr val="000000"/>
                     </a:solidFill>
@@ -17359,7 +17361,7 @@
               </a:ln>
               <a:extLst>
                 <a:ext uri="{91240B29-F687-4f45-9708-019B960494DF}">
-                  <a14:hiddenLine xmlns:a14="http://schemas.microsoft.com/office/drawing/2010/main" xmlns="" w="9525">
+                  <a14:hiddenLine xmlns="" xmlns:a14="http://schemas.microsoft.com/office/drawing/2010/main" w="9525">
                     <a:solidFill>
                       <a:srgbClr val="000000"/>
                     </a:solidFill>
@@ -17431,7 +17433,7 @@
               </a:ln>
               <a:extLst>
                 <a:ext uri="{91240B29-F687-4f45-9708-019B960494DF}">
-                  <a14:hiddenLine xmlns:a14="http://schemas.microsoft.com/office/drawing/2010/main" xmlns="" w="9525">
+                  <a14:hiddenLine xmlns="" xmlns:a14="http://schemas.microsoft.com/office/drawing/2010/main" w="9525">
                     <a:solidFill>
                       <a:srgbClr val="000000"/>
                     </a:solidFill>
@@ -17528,7 +17530,7 @@
               </a:ln>
               <a:extLst>
                 <a:ext uri="{91240B29-F687-4f45-9708-019B960494DF}">
-                  <a14:hiddenLine xmlns:a14="http://schemas.microsoft.com/office/drawing/2010/main" xmlns="" w="9525">
+                  <a14:hiddenLine xmlns="" xmlns:a14="http://schemas.microsoft.com/office/drawing/2010/main" w="9525">
                     <a:solidFill>
                       <a:srgbClr val="000000"/>
                     </a:solidFill>
@@ -17597,7 +17599,7 @@
               </a:ln>
               <a:extLst>
                 <a:ext uri="{91240B29-F687-4f45-9708-019B960494DF}">
-                  <a14:hiddenLine xmlns:a14="http://schemas.microsoft.com/office/drawing/2010/main" xmlns="" w="9525">
+                  <a14:hiddenLine xmlns="" xmlns:a14="http://schemas.microsoft.com/office/drawing/2010/main" w="9525">
                     <a:solidFill>
                       <a:srgbClr val="000000"/>
                     </a:solidFill>
@@ -17694,7 +17696,7 @@
               </a:ln>
               <a:extLst>
                 <a:ext uri="{91240B29-F687-4f45-9708-019B960494DF}">
-                  <a14:hiddenLine xmlns:a14="http://schemas.microsoft.com/office/drawing/2010/main" xmlns="" w="9525">
+                  <a14:hiddenLine xmlns="" xmlns:a14="http://schemas.microsoft.com/office/drawing/2010/main" w="9525">
                     <a:solidFill>
                       <a:srgbClr val="000000"/>
                     </a:solidFill>
@@ -17766,7 +17768,7 @@
               </a:ln>
               <a:extLst>
                 <a:ext uri="{91240B29-F687-4f45-9708-019B960494DF}">
-                  <a14:hiddenLine xmlns:a14="http://schemas.microsoft.com/office/drawing/2010/main" xmlns="" w="9525">
+                  <a14:hiddenLine xmlns="" xmlns:a14="http://schemas.microsoft.com/office/drawing/2010/main" w="9525">
                     <a:solidFill>
                       <a:srgbClr val="000000"/>
                     </a:solidFill>
@@ -17835,7 +17837,7 @@
               </a:ln>
               <a:extLst>
                 <a:ext uri="{91240B29-F687-4f45-9708-019B960494DF}">
-                  <a14:hiddenLine xmlns:a14="http://schemas.microsoft.com/office/drawing/2010/main" xmlns="" w="9525">
+                  <a14:hiddenLine xmlns="" xmlns:a14="http://schemas.microsoft.com/office/drawing/2010/main" w="9525">
                     <a:solidFill>
                       <a:srgbClr val="000000"/>
                     </a:solidFill>
@@ -17932,7 +17934,7 @@
               </a:ln>
               <a:extLst>
                 <a:ext uri="{91240B29-F687-4f45-9708-019B960494DF}">
-                  <a14:hiddenLine xmlns:a14="http://schemas.microsoft.com/office/drawing/2010/main" xmlns="" w="9525">
+                  <a14:hiddenLine xmlns="" xmlns:a14="http://schemas.microsoft.com/office/drawing/2010/main" w="9525">
                     <a:solidFill>
                       <a:srgbClr val="000000"/>
                     </a:solidFill>
@@ -18029,7 +18031,7 @@
               </a:ln>
               <a:extLst>
                 <a:ext uri="{91240B29-F687-4f45-9708-019B960494DF}">
-                  <a14:hiddenLine xmlns:a14="http://schemas.microsoft.com/office/drawing/2010/main" xmlns="" w="9525">
+                  <a14:hiddenLine xmlns="" xmlns:a14="http://schemas.microsoft.com/office/drawing/2010/main" w="9525">
                     <a:solidFill>
                       <a:srgbClr val="000000"/>
                     </a:solidFill>
@@ -18101,7 +18103,7 @@
               </a:ln>
               <a:extLst>
                 <a:ext uri="{91240B29-F687-4f45-9708-019B960494DF}">
-                  <a14:hiddenLine xmlns:a14="http://schemas.microsoft.com/office/drawing/2010/main" xmlns="" w="9525">
+                  <a14:hiddenLine xmlns="" xmlns:a14="http://schemas.microsoft.com/office/drawing/2010/main" w="9525">
                     <a:solidFill>
                       <a:srgbClr val="000000"/>
                     </a:solidFill>
@@ -18228,7 +18230,7 @@
               </a:ln>
               <a:extLst>
                 <a:ext uri="{91240B29-F687-4f45-9708-019B960494DF}">
-                  <a14:hiddenLine xmlns:a14="http://schemas.microsoft.com/office/drawing/2010/main" xmlns="" w="9525">
+                  <a14:hiddenLine xmlns="" xmlns:a14="http://schemas.microsoft.com/office/drawing/2010/main" w="9525">
                     <a:solidFill>
                       <a:srgbClr val="000000"/>
                     </a:solidFill>
@@ -18333,7 +18335,7 @@
               </a:ln>
               <a:extLst>
                 <a:ext uri="{91240B29-F687-4f45-9708-019B960494DF}">
-                  <a14:hiddenLine xmlns:a14="http://schemas.microsoft.com/office/drawing/2010/main" xmlns="" w="9525">
+                  <a14:hiddenLine xmlns="" xmlns:a14="http://schemas.microsoft.com/office/drawing/2010/main" w="9525">
                     <a:solidFill>
                       <a:srgbClr val="000000"/>
                     </a:solidFill>
@@ -18455,7 +18457,7 @@
               </a:ln>
               <a:extLst>
                 <a:ext uri="{91240B29-F687-4f45-9708-019B960494DF}">
-                  <a14:hiddenLine xmlns:a14="http://schemas.microsoft.com/office/drawing/2010/main" xmlns="" w="9525">
+                  <a14:hiddenLine xmlns="" xmlns:a14="http://schemas.microsoft.com/office/drawing/2010/main" w="9525">
                     <a:solidFill>
                       <a:srgbClr val="000000"/>
                     </a:solidFill>
@@ -18552,7 +18554,7 @@
               </a:ln>
               <a:extLst>
                 <a:ext uri="{91240B29-F687-4f45-9708-019B960494DF}">
-                  <a14:hiddenLine xmlns:a14="http://schemas.microsoft.com/office/drawing/2010/main" xmlns="" w="9525">
+                  <a14:hiddenLine xmlns="" xmlns:a14="http://schemas.microsoft.com/office/drawing/2010/main" w="9525">
                     <a:solidFill>
                       <a:srgbClr val="000000"/>
                     </a:solidFill>
@@ -18624,7 +18626,7 @@
               </a:ln>
               <a:extLst>
                 <a:ext uri="{91240B29-F687-4f45-9708-019B960494DF}">
-                  <a14:hiddenLine xmlns:a14="http://schemas.microsoft.com/office/drawing/2010/main" xmlns="" w="9525">
+                  <a14:hiddenLine xmlns="" xmlns:a14="http://schemas.microsoft.com/office/drawing/2010/main" w="9525">
                     <a:solidFill>
                       <a:srgbClr val="000000"/>
                     </a:solidFill>
@@ -18721,7 +18723,7 @@
               </a:ln>
               <a:extLst>
                 <a:ext uri="{91240B29-F687-4f45-9708-019B960494DF}">
-                  <a14:hiddenLine xmlns:a14="http://schemas.microsoft.com/office/drawing/2010/main" xmlns="" w="9525">
+                  <a14:hiddenLine xmlns="" xmlns:a14="http://schemas.microsoft.com/office/drawing/2010/main" w="9525">
                     <a:solidFill>
                       <a:srgbClr val="000000"/>
                     </a:solidFill>
@@ -18796,7 +18798,7 @@
               </a:ln>
               <a:extLst>
                 <a:ext uri="{91240B29-F687-4f45-9708-019B960494DF}">
-                  <a14:hiddenLine xmlns:a14="http://schemas.microsoft.com/office/drawing/2010/main" xmlns="" w="9525">
+                  <a14:hiddenLine xmlns="" xmlns:a14="http://schemas.microsoft.com/office/drawing/2010/main" w="9525">
                     <a:solidFill>
                       <a:srgbClr val="000000"/>
                     </a:solidFill>
@@ -18893,7 +18895,7 @@
               </a:ln>
               <a:extLst>
                 <a:ext uri="{91240B29-F687-4f45-9708-019B960494DF}">
-                  <a14:hiddenLine xmlns:a14="http://schemas.microsoft.com/office/drawing/2010/main" xmlns="" w="9525">
+                  <a14:hiddenLine xmlns="" xmlns:a14="http://schemas.microsoft.com/office/drawing/2010/main" w="9525">
                     <a:solidFill>
                       <a:srgbClr val="000000"/>
                     </a:solidFill>
@@ -18968,7 +18970,7 @@
               </a:ln>
               <a:extLst>
                 <a:ext uri="{91240B29-F687-4f45-9708-019B960494DF}">
-                  <a14:hiddenLine xmlns:a14="http://schemas.microsoft.com/office/drawing/2010/main" xmlns="" w="9525">
+                  <a14:hiddenLine xmlns="" xmlns:a14="http://schemas.microsoft.com/office/drawing/2010/main" w="9525">
                     <a:solidFill>
                       <a:srgbClr val="000000"/>
                     </a:solidFill>
@@ -19065,7 +19067,7 @@
               </a:ln>
               <a:extLst>
                 <a:ext uri="{91240B29-F687-4f45-9708-019B960494DF}">
-                  <a14:hiddenLine xmlns:a14="http://schemas.microsoft.com/office/drawing/2010/main" xmlns="" w="9525">
+                  <a14:hiddenLine xmlns="" xmlns:a14="http://schemas.microsoft.com/office/drawing/2010/main" w="9525">
                     <a:solidFill>
                       <a:srgbClr val="000000"/>
                     </a:solidFill>
@@ -19106,7 +19108,7 @@
               </a:ln>
               <a:extLst>
                 <a:ext uri="{91240B29-F687-4f45-9708-019B960494DF}">
-                  <a14:hiddenLine xmlns:a14="http://schemas.microsoft.com/office/drawing/2010/main" xmlns="" w="9525">
+                  <a14:hiddenLine xmlns="" xmlns:a14="http://schemas.microsoft.com/office/drawing/2010/main" w="9525">
                     <a:solidFill>
                       <a:srgbClr val="000000"/>
                     </a:solidFill>
@@ -19253,7 +19255,7 @@
           <a:p>
             <a:fld id="{6733B157-BC8D-485A-B099-210699CD19FB}" type="datetimeFigureOut">
               <a:rPr lang="en-US" smtClean="0"/>
-              <a:t>4/5/2026</a:t>
+              <a:t>4/6/2026</a:t>
             </a:fld>
             <a:endParaRPr lang="en-US"/>
           </a:p>
@@ -20583,13 +20585,13 @@
   <p:clrMapOvr>
     <a:masterClrMapping/>
   </p:clrMapOvr>
-  <mc:AlternateContent xmlns:mc="http://schemas.openxmlformats.org/markup-compatibility/2006">
-    <mc:Choice xmlns:p15="http://schemas.microsoft.com/office/powerpoint/2012/main" Requires="p15">
+  <mc:AlternateContent xmlns:mc="http://schemas.openxmlformats.org/markup-compatibility/2006" xmlns:p15="http://schemas.microsoft.com/office/powerpoint/2012/main">
+    <mc:Choice Requires="p15">
       <p:transition xmlns:p14="http://schemas.microsoft.com/office/powerpoint/2010/main" spd="slow" p14:dur="1250">
         <p15:prstTrans prst="peelOff"/>
       </p:transition>
     </mc:Choice>
-    <mc:Fallback>
+    <mc:Fallback xmlns="">
       <p:transition spd="slow">
         <p:fade/>
       </p:transition>
@@ -21365,13 +21367,13 @@
   <p:clrMapOvr>
     <a:masterClrMapping/>
   </p:clrMapOvr>
-  <mc:AlternateContent xmlns:mc="http://schemas.openxmlformats.org/markup-compatibility/2006">
-    <mc:Choice xmlns:p15="http://schemas.microsoft.com/office/powerpoint/2012/main" Requires="p15">
+  <mc:AlternateContent xmlns:mc="http://schemas.openxmlformats.org/markup-compatibility/2006" xmlns:p15="http://schemas.microsoft.com/office/powerpoint/2012/main">
+    <mc:Choice Requires="p15">
       <p:transition xmlns:p14="http://schemas.microsoft.com/office/powerpoint/2010/main" spd="slow" p14:dur="1250">
         <p15:prstTrans prst="pageCurlDouble"/>
       </p:transition>
     </mc:Choice>
-    <mc:Fallback>
+    <mc:Fallback xmlns="">
       <p:transition spd="slow">
         <p:fade/>
       </p:transition>
@@ -21783,13 +21785,13 @@
   <p:clrMapOvr>
     <a:masterClrMapping/>
   </p:clrMapOvr>
-  <mc:AlternateContent xmlns:mc="http://schemas.openxmlformats.org/markup-compatibility/2006">
-    <mc:Choice xmlns:p14="http://schemas.microsoft.com/office/powerpoint/2010/main" Requires="p14">
+  <mc:AlternateContent xmlns:mc="http://schemas.openxmlformats.org/markup-compatibility/2006" xmlns:p14="http://schemas.microsoft.com/office/powerpoint/2010/main">
+    <mc:Choice Requires="p14">
       <p:transition spd="slow" p14:dur="900">
         <p14:warp dir="in"/>
       </p:transition>
     </mc:Choice>
-    <mc:Fallback>
+    <mc:Fallback xmlns="">
       <p:transition spd="slow">
         <p:fade/>
       </p:transition>
@@ -22199,7 +22201,7 @@
             <a:noFill/>
             <a:extLst>
               <a:ext uri="{909E8E84-426E-40dd-AFC4-6F175D3DCCD1}">
-                <a14:hiddenFill xmlns="" xmlns:a16="http://schemas.microsoft.com/office/drawing/2014/main" xmlns:a14="http://schemas.microsoft.com/office/drawing/2010/main" xmlns:p14="http://schemas.microsoft.com/office/powerpoint/2010/main">
+                <a14:hiddenFill xmlns:p14="http://schemas.microsoft.com/office/powerpoint/2010/main" xmlns:a14="http://schemas.microsoft.com/office/drawing/2010/main" xmlns:a16="http://schemas.microsoft.com/office/drawing/2014/main" xmlns="">
                   <a:solidFill>
                     <a:srgbClr val="FFFFFF"/>
                   </a:solidFill>
@@ -22319,7 +22321,7 @@
             </a:ln>
             <a:extLst>
               <a:ext uri="{91240B29-F687-4f45-9708-019B960494DF}">
-                <a14:hiddenLine xmlns="" xmlns:a16="http://schemas.microsoft.com/office/drawing/2014/main" xmlns:a14="http://schemas.microsoft.com/office/drawing/2010/main" xmlns:p14="http://schemas.microsoft.com/office/powerpoint/2010/main" w="9525">
+                <a14:hiddenLine xmlns:p14="http://schemas.microsoft.com/office/powerpoint/2010/main" xmlns:a14="http://schemas.microsoft.com/office/drawing/2010/main" xmlns:a16="http://schemas.microsoft.com/office/drawing/2014/main" xmlns="" w="9525">
                   <a:solidFill>
                     <a:srgbClr val="000000"/>
                   </a:solidFill>
@@ -22431,7 +22433,7 @@
             </a:ln>
             <a:extLst>
               <a:ext uri="{91240B29-F687-4f45-9708-019B960494DF}">
-                <a14:hiddenLine xmlns="" xmlns:a16="http://schemas.microsoft.com/office/drawing/2014/main" xmlns:a14="http://schemas.microsoft.com/office/drawing/2010/main" xmlns:p14="http://schemas.microsoft.com/office/powerpoint/2010/main" w="9525">
+                <a14:hiddenLine xmlns:p14="http://schemas.microsoft.com/office/powerpoint/2010/main" xmlns:a14="http://schemas.microsoft.com/office/drawing/2010/main" xmlns:a16="http://schemas.microsoft.com/office/drawing/2014/main" xmlns="" w="9525">
                   <a:solidFill>
                     <a:srgbClr val="000000"/>
                   </a:solidFill>
@@ -22543,7 +22545,7 @@
             </a:ln>
             <a:extLst>
               <a:ext uri="{91240B29-F687-4f45-9708-019B960494DF}">
-                <a14:hiddenLine xmlns="" xmlns:a16="http://schemas.microsoft.com/office/drawing/2014/main" xmlns:a14="http://schemas.microsoft.com/office/drawing/2010/main" xmlns:p14="http://schemas.microsoft.com/office/powerpoint/2010/main" w="9525">
+                <a14:hiddenLine xmlns:p14="http://schemas.microsoft.com/office/powerpoint/2010/main" xmlns:a14="http://schemas.microsoft.com/office/drawing/2010/main" xmlns:a16="http://schemas.microsoft.com/office/drawing/2014/main" xmlns="" w="9525">
                   <a:solidFill>
                     <a:srgbClr val="000000"/>
                   </a:solidFill>
@@ -22599,7 +22601,7 @@
             </a:ln>
             <a:extLst>
               <a:ext uri="{91240B29-F687-4f45-9708-019B960494DF}">
-                <a14:hiddenLine xmlns="" xmlns:a16="http://schemas.microsoft.com/office/drawing/2014/main" xmlns:a14="http://schemas.microsoft.com/office/drawing/2010/main" xmlns:p14="http://schemas.microsoft.com/office/powerpoint/2010/main" w="9525">
+                <a14:hiddenLine xmlns:p14="http://schemas.microsoft.com/office/powerpoint/2010/main" xmlns:a14="http://schemas.microsoft.com/office/drawing/2010/main" xmlns:a16="http://schemas.microsoft.com/office/drawing/2014/main" xmlns="" w="9525">
                   <a:solidFill>
                     <a:srgbClr val="000000"/>
                   </a:solidFill>
@@ -22711,7 +22713,7 @@
             </a:ln>
             <a:extLst>
               <a:ext uri="{91240B29-F687-4f45-9708-019B960494DF}">
-                <a14:hiddenLine xmlns="" xmlns:a16="http://schemas.microsoft.com/office/drawing/2014/main" xmlns:a14="http://schemas.microsoft.com/office/drawing/2010/main" xmlns:p14="http://schemas.microsoft.com/office/powerpoint/2010/main" w="9525">
+                <a14:hiddenLine xmlns:p14="http://schemas.microsoft.com/office/powerpoint/2010/main" xmlns:a14="http://schemas.microsoft.com/office/drawing/2010/main" xmlns:a16="http://schemas.microsoft.com/office/drawing/2014/main" xmlns="" w="9525">
                   <a:solidFill>
                     <a:srgbClr val="000000"/>
                   </a:solidFill>
@@ -22795,7 +22797,7 @@
             </a:ln>
             <a:extLst>
               <a:ext uri="{91240B29-F687-4f45-9708-019B960494DF}">
-                <a14:hiddenLine xmlns="" xmlns:a16="http://schemas.microsoft.com/office/drawing/2014/main" xmlns:a14="http://schemas.microsoft.com/office/drawing/2010/main" xmlns:p14="http://schemas.microsoft.com/office/powerpoint/2010/main" w="9525">
+                <a14:hiddenLine xmlns:p14="http://schemas.microsoft.com/office/powerpoint/2010/main" xmlns:a14="http://schemas.microsoft.com/office/drawing/2010/main" xmlns:a16="http://schemas.microsoft.com/office/drawing/2014/main" xmlns="" w="9525">
                   <a:solidFill>
                     <a:srgbClr val="000000"/>
                   </a:solidFill>
@@ -22879,7 +22881,7 @@
             </a:ln>
             <a:extLst>
               <a:ext uri="{91240B29-F687-4f45-9708-019B960494DF}">
-                <a14:hiddenLine xmlns="" xmlns:a16="http://schemas.microsoft.com/office/drawing/2014/main" xmlns:a14="http://schemas.microsoft.com/office/drawing/2010/main" xmlns:p14="http://schemas.microsoft.com/office/powerpoint/2010/main" w="9525">
+                <a14:hiddenLine xmlns:p14="http://schemas.microsoft.com/office/powerpoint/2010/main" xmlns:a14="http://schemas.microsoft.com/office/drawing/2010/main" xmlns:a16="http://schemas.microsoft.com/office/drawing/2014/main" xmlns="" w="9525">
                   <a:solidFill>
                     <a:srgbClr val="000000"/>
                   </a:solidFill>
@@ -22991,7 +22993,7 @@
             </a:ln>
             <a:extLst>
               <a:ext uri="{91240B29-F687-4f45-9708-019B960494DF}">
-                <a14:hiddenLine xmlns="" xmlns:a16="http://schemas.microsoft.com/office/drawing/2014/main" xmlns:a14="http://schemas.microsoft.com/office/drawing/2010/main" xmlns:p14="http://schemas.microsoft.com/office/powerpoint/2010/main" w="9525">
+                <a14:hiddenLine xmlns:p14="http://schemas.microsoft.com/office/powerpoint/2010/main" xmlns:a14="http://schemas.microsoft.com/office/drawing/2010/main" xmlns:a16="http://schemas.microsoft.com/office/drawing/2014/main" xmlns="" w="9525">
                   <a:solidFill>
                     <a:srgbClr val="000000"/>
                   </a:solidFill>
@@ -23075,7 +23077,7 @@
             </a:ln>
             <a:extLst>
               <a:ext uri="{91240B29-F687-4f45-9708-019B960494DF}">
-                <a14:hiddenLine xmlns="" xmlns:a16="http://schemas.microsoft.com/office/drawing/2014/main" xmlns:a14="http://schemas.microsoft.com/office/drawing/2010/main" xmlns:p14="http://schemas.microsoft.com/office/powerpoint/2010/main" w="9525">
+                <a14:hiddenLine xmlns:p14="http://schemas.microsoft.com/office/powerpoint/2010/main" xmlns:a14="http://schemas.microsoft.com/office/drawing/2010/main" xmlns:a16="http://schemas.microsoft.com/office/drawing/2014/main" xmlns="" w="9525">
                   <a:solidFill>
                     <a:srgbClr val="000000"/>
                   </a:solidFill>
@@ -23159,7 +23161,7 @@
             </a:ln>
             <a:extLst>
               <a:ext uri="{91240B29-F687-4f45-9708-019B960494DF}">
-                <a14:hiddenLine xmlns="" xmlns:a16="http://schemas.microsoft.com/office/drawing/2014/main" xmlns:a14="http://schemas.microsoft.com/office/drawing/2010/main" xmlns:p14="http://schemas.microsoft.com/office/powerpoint/2010/main" w="9525">
+                <a14:hiddenLine xmlns:p14="http://schemas.microsoft.com/office/powerpoint/2010/main" xmlns:a14="http://schemas.microsoft.com/office/drawing/2010/main" xmlns:a16="http://schemas.microsoft.com/office/drawing/2014/main" xmlns="" w="9525">
                   <a:solidFill>
                     <a:srgbClr val="000000"/>
                   </a:solidFill>
@@ -23271,7 +23273,7 @@
             </a:ln>
             <a:extLst>
               <a:ext uri="{91240B29-F687-4f45-9708-019B960494DF}">
-                <a14:hiddenLine xmlns="" xmlns:a16="http://schemas.microsoft.com/office/drawing/2014/main" xmlns:a14="http://schemas.microsoft.com/office/drawing/2010/main" xmlns:p14="http://schemas.microsoft.com/office/powerpoint/2010/main" w="9525">
+                <a14:hiddenLine xmlns:p14="http://schemas.microsoft.com/office/powerpoint/2010/main" xmlns:a14="http://schemas.microsoft.com/office/drawing/2010/main" xmlns:a16="http://schemas.microsoft.com/office/drawing/2014/main" xmlns="" w="9525">
                   <a:solidFill>
                     <a:srgbClr val="000000"/>
                   </a:solidFill>
@@ -23383,7 +23385,7 @@
             </a:ln>
             <a:extLst>
               <a:ext uri="{91240B29-F687-4f45-9708-019B960494DF}">
-                <a14:hiddenLine xmlns="" xmlns:a16="http://schemas.microsoft.com/office/drawing/2014/main" xmlns:a14="http://schemas.microsoft.com/office/drawing/2010/main" xmlns:p14="http://schemas.microsoft.com/office/powerpoint/2010/main" w="9525">
+                <a14:hiddenLine xmlns:p14="http://schemas.microsoft.com/office/powerpoint/2010/main" xmlns:a14="http://schemas.microsoft.com/office/drawing/2010/main" xmlns:a16="http://schemas.microsoft.com/office/drawing/2014/main" xmlns="" w="9525">
                   <a:solidFill>
                     <a:srgbClr val="000000"/>
                   </a:solidFill>
@@ -23467,7 +23469,7 @@
             </a:ln>
             <a:extLst>
               <a:ext uri="{91240B29-F687-4f45-9708-019B960494DF}">
-                <a14:hiddenLine xmlns="" xmlns:a16="http://schemas.microsoft.com/office/drawing/2014/main" xmlns:a14="http://schemas.microsoft.com/office/drawing/2010/main" xmlns:p14="http://schemas.microsoft.com/office/powerpoint/2010/main" w="9525">
+                <a14:hiddenLine xmlns:p14="http://schemas.microsoft.com/office/powerpoint/2010/main" xmlns:a14="http://schemas.microsoft.com/office/drawing/2010/main" xmlns:a16="http://schemas.microsoft.com/office/drawing/2014/main" xmlns="" w="9525">
                   <a:solidFill>
                     <a:srgbClr val="000000"/>
                   </a:solidFill>
@@ -23599,7 +23601,7 @@
             </a:ln>
             <a:extLst>
               <a:ext uri="{91240B29-F687-4f45-9708-019B960494DF}">
-                <a14:hiddenLine xmlns="" xmlns:a16="http://schemas.microsoft.com/office/drawing/2014/main" xmlns:a14="http://schemas.microsoft.com/office/drawing/2010/main" xmlns:p14="http://schemas.microsoft.com/office/powerpoint/2010/main" w="9525">
+                <a14:hiddenLine xmlns:p14="http://schemas.microsoft.com/office/powerpoint/2010/main" xmlns:a14="http://schemas.microsoft.com/office/drawing/2010/main" xmlns:a16="http://schemas.microsoft.com/office/drawing/2014/main" xmlns="" w="9525">
                   <a:solidFill>
                     <a:srgbClr val="000000"/>
                   </a:solidFill>
@@ -23683,7 +23685,7 @@
             </a:ln>
             <a:extLst>
               <a:ext uri="{91240B29-F687-4f45-9708-019B960494DF}">
-                <a14:hiddenLine xmlns="" xmlns:a16="http://schemas.microsoft.com/office/drawing/2014/main" xmlns:a14="http://schemas.microsoft.com/office/drawing/2010/main" xmlns:p14="http://schemas.microsoft.com/office/powerpoint/2010/main" w="9525">
+                <a14:hiddenLine xmlns:p14="http://schemas.microsoft.com/office/powerpoint/2010/main" xmlns:a14="http://schemas.microsoft.com/office/drawing/2010/main" xmlns:a16="http://schemas.microsoft.com/office/drawing/2014/main" xmlns="" w="9525">
                   <a:solidFill>
                     <a:srgbClr val="000000"/>
                   </a:solidFill>
@@ -23795,7 +23797,7 @@
             </a:ln>
             <a:extLst>
               <a:ext uri="{91240B29-F687-4f45-9708-019B960494DF}">
-                <a14:hiddenLine xmlns="" xmlns:a16="http://schemas.microsoft.com/office/drawing/2014/main" xmlns:a14="http://schemas.microsoft.com/office/drawing/2010/main" xmlns:p14="http://schemas.microsoft.com/office/powerpoint/2010/main" w="9525">
+                <a14:hiddenLine xmlns:p14="http://schemas.microsoft.com/office/powerpoint/2010/main" xmlns:a14="http://schemas.microsoft.com/office/drawing/2010/main" xmlns:a16="http://schemas.microsoft.com/office/drawing/2014/main" xmlns="" w="9525">
                   <a:solidFill>
                     <a:srgbClr val="000000"/>
                   </a:solidFill>
@@ -23907,7 +23909,7 @@
             </a:ln>
             <a:extLst>
               <a:ext uri="{91240B29-F687-4f45-9708-019B960494DF}">
-                <a14:hiddenLine xmlns="" xmlns:a16="http://schemas.microsoft.com/office/drawing/2014/main" xmlns:a14="http://schemas.microsoft.com/office/drawing/2010/main" xmlns:p14="http://schemas.microsoft.com/office/powerpoint/2010/main" w="9525">
+                <a14:hiddenLine xmlns:p14="http://schemas.microsoft.com/office/powerpoint/2010/main" xmlns:a14="http://schemas.microsoft.com/office/drawing/2010/main" xmlns:a16="http://schemas.microsoft.com/office/drawing/2014/main" xmlns="" w="9525">
                   <a:solidFill>
                     <a:srgbClr val="000000"/>
                   </a:solidFill>
@@ -23991,7 +23993,7 @@
             </a:ln>
             <a:extLst>
               <a:ext uri="{91240B29-F687-4f45-9708-019B960494DF}">
-                <a14:hiddenLine xmlns="" xmlns:a16="http://schemas.microsoft.com/office/drawing/2014/main" xmlns:a14="http://schemas.microsoft.com/office/drawing/2010/main" xmlns:p14="http://schemas.microsoft.com/office/powerpoint/2010/main" w="9525">
+                <a14:hiddenLine xmlns:p14="http://schemas.microsoft.com/office/powerpoint/2010/main" xmlns:a14="http://schemas.microsoft.com/office/drawing/2010/main" xmlns:a16="http://schemas.microsoft.com/office/drawing/2014/main" xmlns="" w="9525">
                   <a:solidFill>
                     <a:srgbClr val="000000"/>
                   </a:solidFill>
@@ -24103,7 +24105,7 @@
             </a:ln>
             <a:extLst>
               <a:ext uri="{91240B29-F687-4f45-9708-019B960494DF}">
-                <a14:hiddenLine xmlns="" xmlns:a16="http://schemas.microsoft.com/office/drawing/2014/main" xmlns:a14="http://schemas.microsoft.com/office/drawing/2010/main" xmlns:p14="http://schemas.microsoft.com/office/powerpoint/2010/main" w="9525">
+                <a14:hiddenLine xmlns:p14="http://schemas.microsoft.com/office/powerpoint/2010/main" xmlns:a14="http://schemas.microsoft.com/office/drawing/2010/main" xmlns:a16="http://schemas.microsoft.com/office/drawing/2014/main" xmlns="" w="9525">
                   <a:solidFill>
                     <a:srgbClr val="000000"/>
                   </a:solidFill>
@@ -24215,7 +24217,7 @@
             </a:ln>
             <a:extLst>
               <a:ext uri="{91240B29-F687-4f45-9708-019B960494DF}">
-                <a14:hiddenLine xmlns="" xmlns:a16="http://schemas.microsoft.com/office/drawing/2014/main" xmlns:a14="http://schemas.microsoft.com/office/drawing/2010/main" xmlns:p14="http://schemas.microsoft.com/office/powerpoint/2010/main" w="9525">
+                <a14:hiddenLine xmlns:p14="http://schemas.microsoft.com/office/powerpoint/2010/main" xmlns:a14="http://schemas.microsoft.com/office/drawing/2010/main" xmlns:a16="http://schemas.microsoft.com/office/drawing/2014/main" xmlns="" w="9525">
                   <a:solidFill>
                     <a:srgbClr val="000000"/>
                   </a:solidFill>
@@ -24293,7 +24295,7 @@
             </a:ln>
             <a:extLst>
               <a:ext uri="{91240B29-F687-4f45-9708-019B960494DF}">
-                <a14:hiddenLine xmlns="" xmlns:a16="http://schemas.microsoft.com/office/drawing/2014/main" xmlns:a14="http://schemas.microsoft.com/office/drawing/2010/main" xmlns:p14="http://schemas.microsoft.com/office/powerpoint/2010/main" w="9525">
+                <a14:hiddenLine xmlns:p14="http://schemas.microsoft.com/office/powerpoint/2010/main" xmlns:a14="http://schemas.microsoft.com/office/drawing/2010/main" xmlns:a16="http://schemas.microsoft.com/office/drawing/2014/main" xmlns="" w="9525">
                   <a:solidFill>
                     <a:srgbClr val="000000"/>
                   </a:solidFill>
@@ -24405,7 +24407,7 @@
             </a:ln>
             <a:extLst>
               <a:ext uri="{91240B29-F687-4f45-9708-019B960494DF}">
-                <a14:hiddenLine xmlns="" xmlns:a16="http://schemas.microsoft.com/office/drawing/2014/main" xmlns:a14="http://schemas.microsoft.com/office/drawing/2010/main" xmlns:p14="http://schemas.microsoft.com/office/powerpoint/2010/main" w="9525">
+                <a14:hiddenLine xmlns:p14="http://schemas.microsoft.com/office/powerpoint/2010/main" xmlns:a14="http://schemas.microsoft.com/office/drawing/2010/main" xmlns:a16="http://schemas.microsoft.com/office/drawing/2014/main" xmlns="" w="9525">
                   <a:solidFill>
                     <a:srgbClr val="000000"/>
                   </a:solidFill>
@@ -24483,7 +24485,7 @@
             </a:ln>
             <a:extLst>
               <a:ext uri="{91240B29-F687-4f45-9708-019B960494DF}">
-                <a14:hiddenLine xmlns="" xmlns:a16="http://schemas.microsoft.com/office/drawing/2014/main" xmlns:a14="http://schemas.microsoft.com/office/drawing/2010/main" xmlns:p14="http://schemas.microsoft.com/office/powerpoint/2010/main" w="9525">
+                <a14:hiddenLine xmlns:p14="http://schemas.microsoft.com/office/powerpoint/2010/main" xmlns:a14="http://schemas.microsoft.com/office/drawing/2010/main" xmlns:a16="http://schemas.microsoft.com/office/drawing/2014/main" xmlns="" w="9525">
                   <a:solidFill>
                     <a:srgbClr val="000000"/>
                   </a:solidFill>
@@ -24595,7 +24597,7 @@
             </a:ln>
             <a:extLst>
               <a:ext uri="{91240B29-F687-4f45-9708-019B960494DF}">
-                <a14:hiddenLine xmlns="" xmlns:a16="http://schemas.microsoft.com/office/drawing/2014/main" xmlns:a14="http://schemas.microsoft.com/office/drawing/2010/main" xmlns:p14="http://schemas.microsoft.com/office/powerpoint/2010/main" w="9525">
+                <a14:hiddenLine xmlns:p14="http://schemas.microsoft.com/office/powerpoint/2010/main" xmlns:a14="http://schemas.microsoft.com/office/drawing/2010/main" xmlns:a16="http://schemas.microsoft.com/office/drawing/2014/main" xmlns="" w="9525">
                   <a:solidFill>
                     <a:srgbClr val="000000"/>
                   </a:solidFill>
@@ -24685,7 +24687,7 @@
             </a:ln>
             <a:extLst>
               <a:ext uri="{91240B29-F687-4f45-9708-019B960494DF}">
-                <a14:hiddenLine xmlns="" xmlns:a16="http://schemas.microsoft.com/office/drawing/2014/main" xmlns:a14="http://schemas.microsoft.com/office/drawing/2010/main" xmlns:p14="http://schemas.microsoft.com/office/powerpoint/2010/main" w="9525">
+                <a14:hiddenLine xmlns:p14="http://schemas.microsoft.com/office/powerpoint/2010/main" xmlns:a14="http://schemas.microsoft.com/office/drawing/2010/main" xmlns:a16="http://schemas.microsoft.com/office/drawing/2014/main" xmlns="" w="9525">
                   <a:solidFill>
                     <a:srgbClr val="000000"/>
                   </a:solidFill>
@@ -24797,7 +24799,7 @@
             </a:ln>
             <a:extLst>
               <a:ext uri="{91240B29-F687-4f45-9708-019B960494DF}">
-                <a14:hiddenLine xmlns="" xmlns:a16="http://schemas.microsoft.com/office/drawing/2014/main" xmlns:a14="http://schemas.microsoft.com/office/drawing/2010/main" xmlns:p14="http://schemas.microsoft.com/office/powerpoint/2010/main" w="9525">
+                <a14:hiddenLine xmlns:p14="http://schemas.microsoft.com/office/powerpoint/2010/main" xmlns:a14="http://schemas.microsoft.com/office/drawing/2010/main" xmlns:a16="http://schemas.microsoft.com/office/drawing/2014/main" xmlns="" w="9525">
                   <a:solidFill>
                     <a:srgbClr val="000000"/>
                   </a:solidFill>
@@ -24887,7 +24889,7 @@
             </a:ln>
             <a:extLst>
               <a:ext uri="{91240B29-F687-4f45-9708-019B960494DF}">
-                <a14:hiddenLine xmlns="" xmlns:a16="http://schemas.microsoft.com/office/drawing/2014/main" xmlns:a14="http://schemas.microsoft.com/office/drawing/2010/main" xmlns:p14="http://schemas.microsoft.com/office/powerpoint/2010/main" w="9525">
+                <a14:hiddenLine xmlns:p14="http://schemas.microsoft.com/office/powerpoint/2010/main" xmlns:a14="http://schemas.microsoft.com/office/drawing/2010/main" xmlns:a16="http://schemas.microsoft.com/office/drawing/2014/main" xmlns="" w="9525">
                   <a:solidFill>
                     <a:srgbClr val="000000"/>
                   </a:solidFill>
@@ -24999,7 +25001,7 @@
             </a:ln>
             <a:extLst>
               <a:ext uri="{91240B29-F687-4f45-9708-019B960494DF}">
-                <a14:hiddenLine xmlns="" xmlns:a16="http://schemas.microsoft.com/office/drawing/2014/main" xmlns:a14="http://schemas.microsoft.com/office/drawing/2010/main" xmlns:p14="http://schemas.microsoft.com/office/powerpoint/2010/main" w="9525">
+                <a14:hiddenLine xmlns:p14="http://schemas.microsoft.com/office/powerpoint/2010/main" xmlns:a14="http://schemas.microsoft.com/office/drawing/2010/main" xmlns:a16="http://schemas.microsoft.com/office/drawing/2014/main" xmlns="" w="9525">
                   <a:solidFill>
                     <a:srgbClr val="000000"/>
                   </a:solidFill>
@@ -25055,7 +25057,7 @@
             </a:ln>
             <a:extLst>
               <a:ext uri="{91240B29-F687-4f45-9708-019B960494DF}">
-                <a14:hiddenLine xmlns="" xmlns:a16="http://schemas.microsoft.com/office/drawing/2014/main" xmlns:a14="http://schemas.microsoft.com/office/drawing/2010/main" xmlns:p14="http://schemas.microsoft.com/office/powerpoint/2010/main" w="9525">
+                <a14:hiddenLine xmlns:p14="http://schemas.microsoft.com/office/powerpoint/2010/main" xmlns:a14="http://schemas.microsoft.com/office/drawing/2010/main" xmlns:a16="http://schemas.microsoft.com/office/drawing/2014/main" xmlns="" w="9525">
                   <a:solidFill>
                     <a:srgbClr val="000000"/>
                   </a:solidFill>
@@ -25167,7 +25169,7 @@
             </a:ln>
             <a:extLst>
               <a:ext uri="{91240B29-F687-4f45-9708-019B960494DF}">
-                <a14:hiddenLine xmlns="" xmlns:a16="http://schemas.microsoft.com/office/drawing/2014/main" xmlns:a14="http://schemas.microsoft.com/office/drawing/2010/main" xmlns:p14="http://schemas.microsoft.com/office/powerpoint/2010/main" w="9525">
+                <a14:hiddenLine xmlns:p14="http://schemas.microsoft.com/office/powerpoint/2010/main" xmlns:a14="http://schemas.microsoft.com/office/drawing/2010/main" xmlns:a16="http://schemas.microsoft.com/office/drawing/2014/main" xmlns="" w="9525">
                   <a:solidFill>
                     <a:srgbClr val="000000"/>
                   </a:solidFill>
@@ -25251,7 +25253,7 @@
             </a:ln>
             <a:extLst>
               <a:ext uri="{91240B29-F687-4f45-9708-019B960494DF}">
-                <a14:hiddenLine xmlns="" xmlns:a16="http://schemas.microsoft.com/office/drawing/2014/main" xmlns:a14="http://schemas.microsoft.com/office/drawing/2010/main" xmlns:p14="http://schemas.microsoft.com/office/powerpoint/2010/main" w="9525">
+                <a14:hiddenLine xmlns:p14="http://schemas.microsoft.com/office/powerpoint/2010/main" xmlns:a14="http://schemas.microsoft.com/office/drawing/2010/main" xmlns:a16="http://schemas.microsoft.com/office/drawing/2014/main" xmlns="" w="9525">
                   <a:solidFill>
                     <a:srgbClr val="000000"/>
                   </a:solidFill>
@@ -25335,7 +25337,7 @@
             </a:ln>
             <a:extLst>
               <a:ext uri="{91240B29-F687-4f45-9708-019B960494DF}">
-                <a14:hiddenLine xmlns="" xmlns:a16="http://schemas.microsoft.com/office/drawing/2014/main" xmlns:a14="http://schemas.microsoft.com/office/drawing/2010/main" xmlns:p14="http://schemas.microsoft.com/office/powerpoint/2010/main" w="9525">
+                <a14:hiddenLine xmlns:p14="http://schemas.microsoft.com/office/powerpoint/2010/main" xmlns:a14="http://schemas.microsoft.com/office/drawing/2010/main" xmlns:a16="http://schemas.microsoft.com/office/drawing/2014/main" xmlns="" w="9525">
                   <a:solidFill>
                     <a:srgbClr val="000000"/>
                   </a:solidFill>
@@ -25447,7 +25449,7 @@
             </a:ln>
             <a:extLst>
               <a:ext uri="{91240B29-F687-4f45-9708-019B960494DF}">
-                <a14:hiddenLine xmlns="" xmlns:a16="http://schemas.microsoft.com/office/drawing/2014/main" xmlns:a14="http://schemas.microsoft.com/office/drawing/2010/main" xmlns:p14="http://schemas.microsoft.com/office/powerpoint/2010/main" w="9525">
+                <a14:hiddenLine xmlns:p14="http://schemas.microsoft.com/office/powerpoint/2010/main" xmlns:a14="http://schemas.microsoft.com/office/drawing/2010/main" xmlns:a16="http://schemas.microsoft.com/office/drawing/2014/main" xmlns="" w="9525">
                   <a:solidFill>
                     <a:srgbClr val="000000"/>
                   </a:solidFill>
@@ -25537,7 +25539,7 @@
             </a:ln>
             <a:extLst>
               <a:ext uri="{91240B29-F687-4f45-9708-019B960494DF}">
-                <a14:hiddenLine xmlns="" xmlns:a16="http://schemas.microsoft.com/office/drawing/2014/main" xmlns:a14="http://schemas.microsoft.com/office/drawing/2010/main" xmlns:p14="http://schemas.microsoft.com/office/powerpoint/2010/main" w="9525">
+                <a14:hiddenLine xmlns:p14="http://schemas.microsoft.com/office/powerpoint/2010/main" xmlns:a14="http://schemas.microsoft.com/office/drawing/2010/main" xmlns:a16="http://schemas.microsoft.com/office/drawing/2014/main" xmlns="" w="9525">
                   <a:solidFill>
                     <a:srgbClr val="000000"/>
                   </a:solidFill>
@@ -25621,7 +25623,7 @@
             </a:ln>
             <a:extLst>
               <a:ext uri="{91240B29-F687-4f45-9708-019B960494DF}">
-                <a14:hiddenLine xmlns="" xmlns:a16="http://schemas.microsoft.com/office/drawing/2014/main" xmlns:a14="http://schemas.microsoft.com/office/drawing/2010/main" xmlns:p14="http://schemas.microsoft.com/office/powerpoint/2010/main" w="9525">
+                <a14:hiddenLine xmlns:p14="http://schemas.microsoft.com/office/powerpoint/2010/main" xmlns:a14="http://schemas.microsoft.com/office/drawing/2010/main" xmlns:a16="http://schemas.microsoft.com/office/drawing/2014/main" xmlns="" w="9525">
                   <a:solidFill>
                     <a:srgbClr val="000000"/>
                   </a:solidFill>
@@ -25733,7 +25735,7 @@
             </a:ln>
             <a:extLst>
               <a:ext uri="{91240B29-F687-4f45-9708-019B960494DF}">
-                <a14:hiddenLine xmlns="" xmlns:a16="http://schemas.microsoft.com/office/drawing/2014/main" xmlns:a14="http://schemas.microsoft.com/office/drawing/2010/main" xmlns:p14="http://schemas.microsoft.com/office/powerpoint/2010/main" w="9525">
+                <a14:hiddenLine xmlns:p14="http://schemas.microsoft.com/office/powerpoint/2010/main" xmlns:a14="http://schemas.microsoft.com/office/drawing/2010/main" xmlns:a16="http://schemas.microsoft.com/office/drawing/2014/main" xmlns="" w="9525">
                   <a:solidFill>
                     <a:srgbClr val="000000"/>
                   </a:solidFill>
@@ -25817,7 +25819,7 @@
             </a:ln>
             <a:extLst>
               <a:ext uri="{91240B29-F687-4f45-9708-019B960494DF}">
-                <a14:hiddenLine xmlns="" xmlns:a16="http://schemas.microsoft.com/office/drawing/2014/main" xmlns:a14="http://schemas.microsoft.com/office/drawing/2010/main" xmlns:p14="http://schemas.microsoft.com/office/powerpoint/2010/main" w="9525">
+                <a14:hiddenLine xmlns:p14="http://schemas.microsoft.com/office/powerpoint/2010/main" xmlns:a14="http://schemas.microsoft.com/office/drawing/2010/main" xmlns:a16="http://schemas.microsoft.com/office/drawing/2014/main" xmlns="" w="9525">
                   <a:solidFill>
                     <a:srgbClr val="000000"/>
                   </a:solidFill>
@@ -25929,7 +25931,7 @@
             </a:ln>
             <a:extLst>
               <a:ext uri="{91240B29-F687-4f45-9708-019B960494DF}">
-                <a14:hiddenLine xmlns="" xmlns:a16="http://schemas.microsoft.com/office/drawing/2014/main" xmlns:a14="http://schemas.microsoft.com/office/drawing/2010/main" xmlns:p14="http://schemas.microsoft.com/office/powerpoint/2010/main" w="9525">
+                <a14:hiddenLine xmlns:p14="http://schemas.microsoft.com/office/powerpoint/2010/main" xmlns:a14="http://schemas.microsoft.com/office/drawing/2010/main" xmlns:a16="http://schemas.microsoft.com/office/drawing/2014/main" xmlns="" w="9525">
                   <a:solidFill>
                     <a:srgbClr val="000000"/>
                   </a:solidFill>
@@ -26013,7 +26015,7 @@
             </a:ln>
             <a:extLst>
               <a:ext uri="{91240B29-F687-4f45-9708-019B960494DF}">
-                <a14:hiddenLine xmlns="" xmlns:a16="http://schemas.microsoft.com/office/drawing/2014/main" xmlns:a14="http://schemas.microsoft.com/office/drawing/2010/main" xmlns:p14="http://schemas.microsoft.com/office/powerpoint/2010/main" w="9525">
+                <a14:hiddenLine xmlns:p14="http://schemas.microsoft.com/office/powerpoint/2010/main" xmlns:a14="http://schemas.microsoft.com/office/drawing/2010/main" xmlns:a16="http://schemas.microsoft.com/office/drawing/2014/main" xmlns="" w="9525">
                   <a:solidFill>
                     <a:srgbClr val="000000"/>
                   </a:solidFill>
@@ -26125,7 +26127,7 @@
             </a:ln>
             <a:extLst>
               <a:ext uri="{91240B29-F687-4f45-9708-019B960494DF}">
-                <a14:hiddenLine xmlns="" xmlns:a16="http://schemas.microsoft.com/office/drawing/2014/main" xmlns:a14="http://schemas.microsoft.com/office/drawing/2010/main" xmlns:p14="http://schemas.microsoft.com/office/powerpoint/2010/main" w="9525">
+                <a14:hiddenLine xmlns:p14="http://schemas.microsoft.com/office/powerpoint/2010/main" xmlns:a14="http://schemas.microsoft.com/office/drawing/2010/main" xmlns:a16="http://schemas.microsoft.com/office/drawing/2014/main" xmlns="" w="9525">
                   <a:solidFill>
                     <a:srgbClr val="000000"/>
                   </a:solidFill>
@@ -26181,7 +26183,7 @@
             </a:ln>
             <a:extLst>
               <a:ext uri="{91240B29-F687-4f45-9708-019B960494DF}">
-                <a14:hiddenLine xmlns="" xmlns:a16="http://schemas.microsoft.com/office/drawing/2014/main" xmlns:a14="http://schemas.microsoft.com/office/drawing/2010/main" xmlns:p14="http://schemas.microsoft.com/office/powerpoint/2010/main" w="9525">
+                <a14:hiddenLine xmlns:p14="http://schemas.microsoft.com/office/powerpoint/2010/main" xmlns:a14="http://schemas.microsoft.com/office/drawing/2010/main" xmlns:a16="http://schemas.microsoft.com/office/drawing/2014/main" xmlns="" w="9525">
                   <a:solidFill>
                     <a:srgbClr val="000000"/>
                   </a:solidFill>
@@ -26268,7 +26270,7 @@
             </a:ln>
             <a:extLst>
               <a:ext uri="{91240B29-F687-4f45-9708-019B960494DF}">
-                <a14:hiddenLine xmlns="" xmlns:a16="http://schemas.microsoft.com/office/drawing/2014/main" xmlns:a14="http://schemas.microsoft.com/office/drawing/2010/main" xmlns:p14="http://schemas.microsoft.com/office/powerpoint/2010/main" w="9525">
+                <a14:hiddenLine xmlns:p14="http://schemas.microsoft.com/office/powerpoint/2010/main" xmlns:a14="http://schemas.microsoft.com/office/drawing/2010/main" xmlns:a16="http://schemas.microsoft.com/office/drawing/2014/main" xmlns="" w="9525">
                   <a:solidFill>
                     <a:srgbClr val="000000"/>
                   </a:solidFill>
@@ -26380,7 +26382,7 @@
             </a:ln>
             <a:extLst>
               <a:ext uri="{91240B29-F687-4f45-9708-019B960494DF}">
-                <a14:hiddenLine xmlns="" xmlns:a16="http://schemas.microsoft.com/office/drawing/2014/main" xmlns:a14="http://schemas.microsoft.com/office/drawing/2010/main" xmlns:p14="http://schemas.microsoft.com/office/powerpoint/2010/main" w="9525">
+                <a14:hiddenLine xmlns:p14="http://schemas.microsoft.com/office/powerpoint/2010/main" xmlns:a14="http://schemas.microsoft.com/office/drawing/2010/main" xmlns:a16="http://schemas.microsoft.com/office/drawing/2014/main" xmlns="" w="9525">
                   <a:solidFill>
                     <a:srgbClr val="000000"/>
                   </a:solidFill>
@@ -26464,7 +26466,7 @@
             </a:ln>
             <a:extLst>
               <a:ext uri="{91240B29-F687-4f45-9708-019B960494DF}">
-                <a14:hiddenLine xmlns="" xmlns:a16="http://schemas.microsoft.com/office/drawing/2014/main" xmlns:a14="http://schemas.microsoft.com/office/drawing/2010/main" xmlns:p14="http://schemas.microsoft.com/office/powerpoint/2010/main" w="9525">
+                <a14:hiddenLine xmlns:p14="http://schemas.microsoft.com/office/powerpoint/2010/main" xmlns:a14="http://schemas.microsoft.com/office/drawing/2010/main" xmlns:a16="http://schemas.microsoft.com/office/drawing/2014/main" xmlns="" w="9525">
                   <a:solidFill>
                     <a:srgbClr val="000000"/>
                   </a:solidFill>
@@ -26576,7 +26578,7 @@
             </a:ln>
             <a:extLst>
               <a:ext uri="{91240B29-F687-4f45-9708-019B960494DF}">
-                <a14:hiddenLine xmlns="" xmlns:a16="http://schemas.microsoft.com/office/drawing/2014/main" xmlns:a14="http://schemas.microsoft.com/office/drawing/2010/main" xmlns:p14="http://schemas.microsoft.com/office/powerpoint/2010/main" w="9525">
+                <a14:hiddenLine xmlns:p14="http://schemas.microsoft.com/office/powerpoint/2010/main" xmlns:a14="http://schemas.microsoft.com/office/drawing/2010/main" xmlns:a16="http://schemas.microsoft.com/office/drawing/2014/main" xmlns="" w="9525">
                   <a:solidFill>
                     <a:srgbClr val="000000"/>
                   </a:solidFill>
@@ -26688,7 +26690,7 @@
             </a:ln>
             <a:extLst>
               <a:ext uri="{91240B29-F687-4f45-9708-019B960494DF}">
-                <a14:hiddenLine xmlns="" xmlns:a16="http://schemas.microsoft.com/office/drawing/2014/main" xmlns:a14="http://schemas.microsoft.com/office/drawing/2010/main" xmlns:p14="http://schemas.microsoft.com/office/powerpoint/2010/main" w="9525">
+                <a14:hiddenLine xmlns:p14="http://schemas.microsoft.com/office/powerpoint/2010/main" xmlns:a14="http://schemas.microsoft.com/office/drawing/2010/main" xmlns:a16="http://schemas.microsoft.com/office/drawing/2014/main" xmlns="" w="9525">
                   <a:solidFill>
                     <a:srgbClr val="000000"/>
                   </a:solidFill>
@@ -26775,7 +26777,7 @@
             </a:ln>
             <a:extLst>
               <a:ext uri="{91240B29-F687-4f45-9708-019B960494DF}">
-                <a14:hiddenLine xmlns="" xmlns:a16="http://schemas.microsoft.com/office/drawing/2014/main" xmlns:a14="http://schemas.microsoft.com/office/drawing/2010/main" xmlns:p14="http://schemas.microsoft.com/office/powerpoint/2010/main" w="9525">
+                <a14:hiddenLine xmlns:p14="http://schemas.microsoft.com/office/powerpoint/2010/main" xmlns:a14="http://schemas.microsoft.com/office/drawing/2010/main" xmlns:a16="http://schemas.microsoft.com/office/drawing/2014/main" xmlns="" w="9525">
                   <a:solidFill>
                     <a:srgbClr val="000000"/>
                   </a:solidFill>
@@ -26859,7 +26861,7 @@
             </a:ln>
             <a:extLst>
               <a:ext uri="{91240B29-F687-4f45-9708-019B960494DF}">
-                <a14:hiddenLine xmlns="" xmlns:a16="http://schemas.microsoft.com/office/drawing/2014/main" xmlns:a14="http://schemas.microsoft.com/office/drawing/2010/main" xmlns:p14="http://schemas.microsoft.com/office/powerpoint/2010/main" w="9525">
+                <a14:hiddenLine xmlns:p14="http://schemas.microsoft.com/office/powerpoint/2010/main" xmlns:a14="http://schemas.microsoft.com/office/drawing/2010/main" xmlns:a16="http://schemas.microsoft.com/office/drawing/2014/main" xmlns="" w="9525">
                   <a:solidFill>
                     <a:srgbClr val="000000"/>
                   </a:solidFill>
@@ -26971,7 +26973,7 @@
             </a:ln>
             <a:extLst>
               <a:ext uri="{91240B29-F687-4f45-9708-019B960494DF}">
-                <a14:hiddenLine xmlns="" xmlns:a16="http://schemas.microsoft.com/office/drawing/2014/main" xmlns:a14="http://schemas.microsoft.com/office/drawing/2010/main" xmlns:p14="http://schemas.microsoft.com/office/powerpoint/2010/main" w="9525">
+                <a14:hiddenLine xmlns:p14="http://schemas.microsoft.com/office/powerpoint/2010/main" xmlns:a14="http://schemas.microsoft.com/office/drawing/2010/main" xmlns:a16="http://schemas.microsoft.com/office/drawing/2014/main" xmlns="" w="9525">
                   <a:solidFill>
                     <a:srgbClr val="000000"/>
                   </a:solidFill>
@@ -27083,7 +27085,7 @@
             </a:ln>
             <a:extLst>
               <a:ext uri="{91240B29-F687-4f45-9708-019B960494DF}">
-                <a14:hiddenLine xmlns="" xmlns:a16="http://schemas.microsoft.com/office/drawing/2014/main" xmlns:a14="http://schemas.microsoft.com/office/drawing/2010/main" xmlns:p14="http://schemas.microsoft.com/office/powerpoint/2010/main" w="9525">
+                <a14:hiddenLine xmlns:p14="http://schemas.microsoft.com/office/powerpoint/2010/main" xmlns:a14="http://schemas.microsoft.com/office/drawing/2010/main" xmlns:a16="http://schemas.microsoft.com/office/drawing/2014/main" xmlns="" w="9525">
                   <a:solidFill>
                     <a:srgbClr val="000000"/>
                   </a:solidFill>
@@ -27167,7 +27169,7 @@
             </a:ln>
             <a:extLst>
               <a:ext uri="{91240B29-F687-4f45-9708-019B960494DF}">
-                <a14:hiddenLine xmlns="" xmlns:a16="http://schemas.microsoft.com/office/drawing/2014/main" xmlns:a14="http://schemas.microsoft.com/office/drawing/2010/main" xmlns:p14="http://schemas.microsoft.com/office/powerpoint/2010/main" w="9525">
+                <a14:hiddenLine xmlns:p14="http://schemas.microsoft.com/office/powerpoint/2010/main" xmlns:a14="http://schemas.microsoft.com/office/drawing/2010/main" xmlns:a16="http://schemas.microsoft.com/office/drawing/2014/main" xmlns="" w="9525">
                   <a:solidFill>
                     <a:srgbClr val="000000"/>
                   </a:solidFill>
@@ -27309,7 +27311,7 @@
             </a:ln>
             <a:extLst>
               <a:ext uri="{91240B29-F687-4f45-9708-019B960494DF}">
-                <a14:hiddenLine xmlns="" xmlns:a16="http://schemas.microsoft.com/office/drawing/2014/main" xmlns:a14="http://schemas.microsoft.com/office/drawing/2010/main" xmlns:p14="http://schemas.microsoft.com/office/powerpoint/2010/main" w="9525">
+                <a14:hiddenLine xmlns:p14="http://schemas.microsoft.com/office/powerpoint/2010/main" xmlns:a14="http://schemas.microsoft.com/office/drawing/2010/main" xmlns:a16="http://schemas.microsoft.com/office/drawing/2014/main" xmlns="" w="9525">
                   <a:solidFill>
                     <a:srgbClr val="000000"/>
                   </a:solidFill>
@@ -27399,7 +27401,7 @@
             </a:ln>
             <a:extLst>
               <a:ext uri="{91240B29-F687-4f45-9708-019B960494DF}">
-                <a14:hiddenLine xmlns="" xmlns:a16="http://schemas.microsoft.com/office/drawing/2014/main" xmlns:a14="http://schemas.microsoft.com/office/drawing/2010/main" xmlns:p14="http://schemas.microsoft.com/office/powerpoint/2010/main" w="9525">
+                <a14:hiddenLine xmlns:p14="http://schemas.microsoft.com/office/powerpoint/2010/main" xmlns:a14="http://schemas.microsoft.com/office/drawing/2010/main" xmlns:a16="http://schemas.microsoft.com/office/drawing/2014/main" xmlns="" w="9525">
                   <a:solidFill>
                     <a:srgbClr val="000000"/>
                   </a:solidFill>
@@ -27511,7 +27513,7 @@
             </a:ln>
             <a:extLst>
               <a:ext uri="{91240B29-F687-4f45-9708-019B960494DF}">
-                <a14:hiddenLine xmlns="" xmlns:a16="http://schemas.microsoft.com/office/drawing/2014/main" xmlns:a14="http://schemas.microsoft.com/office/drawing/2010/main" xmlns:p14="http://schemas.microsoft.com/office/powerpoint/2010/main" w="9525">
+                <a14:hiddenLine xmlns:p14="http://schemas.microsoft.com/office/powerpoint/2010/main" xmlns:a14="http://schemas.microsoft.com/office/drawing/2010/main" xmlns:a16="http://schemas.microsoft.com/office/drawing/2014/main" xmlns="" w="9525">
                   <a:solidFill>
                     <a:srgbClr val="000000"/>
                   </a:solidFill>
@@ -27947,13 +27949,13 @@
   <p:clrMapOvr>
     <a:masterClrMapping/>
   </p:clrMapOvr>
-  <mc:AlternateContent xmlns:mc="http://schemas.openxmlformats.org/markup-compatibility/2006">
-    <mc:Choice xmlns:p14="http://schemas.microsoft.com/office/powerpoint/2010/main" Requires="p14">
+  <mc:AlternateContent xmlns:mc="http://schemas.openxmlformats.org/markup-compatibility/2006" xmlns:p14="http://schemas.microsoft.com/office/powerpoint/2010/main">
+    <mc:Choice Requires="p14">
       <p:transition spd="slow" p14:dur="2500">
         <p:checker/>
       </p:transition>
     </mc:Choice>
-    <mc:Fallback>
+    <mc:Fallback xmlns="">
       <p:transition spd="slow">
         <p:checker/>
       </p:transition>
@@ -28303,6 +28305,363 @@
 <file path=ppt/slides/slide15.xml><?xml version="1.0" encoding="utf-8"?>
 <p:sld xmlns:a="http://schemas.openxmlformats.org/drawingml/2006/main" xmlns:r="http://schemas.openxmlformats.org/officeDocument/2006/relationships" xmlns:p="http://schemas.openxmlformats.org/presentationml/2006/main">
   <p:cSld>
+    <p:spTree>
+      <p:nvGrpSpPr>
+        <p:cNvPr id="1" name=""/>
+        <p:cNvGrpSpPr/>
+        <p:nvPr/>
+      </p:nvGrpSpPr>
+      <p:grpSpPr>
+        <a:xfrm>
+          <a:off x="0" y="0"/>
+          <a:ext cx="0" cy="0"/>
+          <a:chOff x="0" y="0"/>
+          <a:chExt cx="0" cy="0"/>
+        </a:xfrm>
+      </p:grpSpPr>
+      <p:sp>
+        <p:nvSpPr>
+          <p:cNvPr id="2" name="Title 1">
+            <a:extLst>
+              <a:ext uri="{FF2B5EF4-FFF2-40B4-BE49-F238E27FC236}">
+                <a16:creationId xmlns:a16="http://schemas.microsoft.com/office/drawing/2014/main" id="{DAD3F605-B66F-EDF3-B2A1-1C176C43E7CF}"/>
+              </a:ext>
+            </a:extLst>
+          </p:cNvPr>
+          <p:cNvSpPr>
+            <a:spLocks noGrp="1"/>
+          </p:cNvSpPr>
+          <p:nvPr>
+            <p:ph type="title"/>
+          </p:nvPr>
+        </p:nvSpPr>
+        <p:spPr/>
+        <p:txBody>
+          <a:bodyPr/>
+          <a:lstStyle/>
+          <a:p>
+            <a:r>
+              <a:rPr lang="hr-HR" dirty="0"/>
+              <a:t>Plan daljnjeg razvoja</a:t>
+            </a:r>
+            <a:endParaRPr lang="en-US" dirty="0"/>
+          </a:p>
+        </p:txBody>
+      </p:sp>
+      <p:sp>
+        <p:nvSpPr>
+          <p:cNvPr id="3" name="Content Placeholder 2">
+            <a:extLst>
+              <a:ext uri="{FF2B5EF4-FFF2-40B4-BE49-F238E27FC236}">
+                <a16:creationId xmlns:a16="http://schemas.microsoft.com/office/drawing/2014/main" id="{8295AB1F-9C22-0716-EF91-E24907931980}"/>
+              </a:ext>
+            </a:extLst>
+          </p:cNvPr>
+          <p:cNvSpPr>
+            <a:spLocks noGrp="1"/>
+          </p:cNvSpPr>
+          <p:nvPr>
+            <p:ph idx="1"/>
+          </p:nvPr>
+        </p:nvSpPr>
+        <p:spPr/>
+        <p:txBody>
+          <a:bodyPr/>
+          <a:lstStyle/>
+          <a:p>
+            <a:r>
+              <a:rPr lang="hr-HR" dirty="0"/>
+              <a:t>Dodati nove mogućnosti(npr. vrste označavanja)</a:t>
+            </a:r>
+          </a:p>
+          <a:p>
+            <a:r>
+              <a:rPr lang="hr-HR" dirty="0"/>
+              <a:t>Podijeliti ekstenziju s više osoba</a:t>
+            </a:r>
+          </a:p>
+          <a:p>
+            <a:r>
+              <a:rPr lang="hr-HR" dirty="0"/>
+              <a:t>Pomoći ljudima s drugim poteškoćama</a:t>
+            </a:r>
+          </a:p>
+          <a:p>
+            <a:endParaRPr lang="hr-HR" dirty="0"/>
+          </a:p>
+          <a:p>
+            <a:endParaRPr lang="en-US" dirty="0"/>
+          </a:p>
+        </p:txBody>
+      </p:sp>
+      <p:pic>
+        <p:nvPicPr>
+          <p:cNvPr id="5" name="Picture 4">
+            <a:extLst>
+              <a:ext uri="{FF2B5EF4-FFF2-40B4-BE49-F238E27FC236}">
+                <a16:creationId xmlns:a16="http://schemas.microsoft.com/office/drawing/2014/main" id="{4C656693-CFDA-4E38-9151-E4CED359B071}"/>
+              </a:ext>
+            </a:extLst>
+          </p:cNvPr>
+          <p:cNvPicPr>
+            <a:picLocks noChangeAspect="1"/>
+          </p:cNvPicPr>
+          <p:nvPr/>
+        </p:nvPicPr>
+        <p:blipFill>
+          <a:blip r:embed="rId2">
+            <a:extLst>
+              <a:ext uri="{28A0092B-C50C-407E-A947-70E740481C1C}">
+                <a14:useLocalDpi xmlns:a14="http://schemas.microsoft.com/office/drawing/2010/main" val="0"/>
+              </a:ext>
+            </a:extLst>
+          </a:blip>
+          <a:stretch>
+            <a:fillRect/>
+          </a:stretch>
+        </p:blipFill>
+        <p:spPr>
+          <a:xfrm>
+            <a:off x="6881812" y="2757487"/>
+            <a:ext cx="4367213" cy="3373886"/>
+          </a:xfrm>
+          <a:prstGeom prst="rect">
+            <a:avLst/>
+          </a:prstGeom>
+        </p:spPr>
+      </p:pic>
+    </p:spTree>
+    <p:extLst>
+      <p:ext uri="{BB962C8B-B14F-4D97-AF65-F5344CB8AC3E}">
+        <p14:creationId xmlns:p14="http://schemas.microsoft.com/office/powerpoint/2010/main" val="2753080093"/>
+      </p:ext>
+    </p:extLst>
+  </p:cSld>
+  <p:clrMapOvr>
+    <a:masterClrMapping/>
+  </p:clrMapOvr>
+</p:sld>
+</file>
+
+<file path=ppt/slides/slide16.xml><?xml version="1.0" encoding="utf-8"?>
+<p:sld xmlns:a="http://schemas.openxmlformats.org/drawingml/2006/main" xmlns:r="http://schemas.openxmlformats.org/officeDocument/2006/relationships" xmlns:p="http://schemas.openxmlformats.org/presentationml/2006/main">
+  <p:cSld>
+    <p:spTree>
+      <p:nvGrpSpPr>
+        <p:cNvPr id="1" name=""/>
+        <p:cNvGrpSpPr/>
+        <p:nvPr/>
+      </p:nvGrpSpPr>
+      <p:grpSpPr>
+        <a:xfrm>
+          <a:off x="0" y="0"/>
+          <a:ext cx="0" cy="0"/>
+          <a:chOff x="0" y="0"/>
+          <a:chExt cx="0" cy="0"/>
+        </a:xfrm>
+      </p:grpSpPr>
+      <p:sp>
+        <p:nvSpPr>
+          <p:cNvPr id="2" name="Title 1">
+            <a:extLst>
+              <a:ext uri="{FF2B5EF4-FFF2-40B4-BE49-F238E27FC236}">
+                <a16:creationId xmlns:a16="http://schemas.microsoft.com/office/drawing/2014/main" id="{B23AF4DE-BB11-04A0-2082-1130EBE9819F}"/>
+              </a:ext>
+            </a:extLst>
+          </p:cNvPr>
+          <p:cNvSpPr>
+            <a:spLocks noGrp="1"/>
+          </p:cNvSpPr>
+          <p:nvPr>
+            <p:ph type="title"/>
+          </p:nvPr>
+        </p:nvSpPr>
+        <p:spPr/>
+        <p:txBody>
+          <a:bodyPr/>
+          <a:lstStyle/>
+          <a:p>
+            <a:r>
+              <a:rPr lang="hr-HR" dirty="0" err="1"/>
+              <a:t>SLIČna</a:t>
+            </a:r>
+            <a:r>
+              <a:rPr lang="hr-HR" dirty="0"/>
+              <a:t> rješenja</a:t>
+            </a:r>
+            <a:endParaRPr lang="en-US" dirty="0"/>
+          </a:p>
+        </p:txBody>
+      </p:sp>
+      <p:sp>
+        <p:nvSpPr>
+          <p:cNvPr id="3" name="Content Placeholder 2">
+            <a:extLst>
+              <a:ext uri="{FF2B5EF4-FFF2-40B4-BE49-F238E27FC236}">
+                <a16:creationId xmlns:a16="http://schemas.microsoft.com/office/drawing/2014/main" id="{3E018779-69B0-B1EA-F9A1-89C4662F15EB}"/>
+              </a:ext>
+            </a:extLst>
+          </p:cNvPr>
+          <p:cNvSpPr>
+            <a:spLocks noGrp="1"/>
+          </p:cNvSpPr>
+          <p:nvPr>
+            <p:ph idx="1"/>
+          </p:nvPr>
+        </p:nvSpPr>
+        <p:spPr/>
+        <p:txBody>
+          <a:bodyPr/>
+          <a:lstStyle/>
+          <a:p>
+            <a:r>
+              <a:rPr lang="hr-HR" dirty="0"/>
+              <a:t>Postoje rješenja sa sličnom idejom</a:t>
+            </a:r>
+          </a:p>
+          <a:p>
+            <a:r>
+              <a:rPr lang="hr-HR" dirty="0">
+                <a:hlinkClick r:id="rId2"/>
+              </a:rPr>
+              <a:t>Generiranje krugova u obliku umjetnosti </a:t>
+            </a:r>
+            <a:r>
+              <a:rPr lang="hr-HR" dirty="0"/>
+              <a:t>u Python-u</a:t>
+            </a:r>
+          </a:p>
+          <a:p>
+            <a:r>
+              <a:rPr lang="hr-HR" dirty="0" err="1"/>
+              <a:t>Error</a:t>
+            </a:r>
+            <a:r>
+              <a:rPr lang="hr-HR" dirty="0"/>
+              <a:t> i </a:t>
+            </a:r>
+            <a:r>
+              <a:rPr lang="hr-HR" dirty="0" err="1"/>
+              <a:t>warning</a:t>
+            </a:r>
+            <a:r>
+              <a:rPr lang="hr-HR" dirty="0"/>
+              <a:t> oznake, ali na drugačiji način – </a:t>
+            </a:r>
+            <a:r>
+              <a:rPr lang="hr-HR" dirty="0" err="1">
+                <a:hlinkClick r:id="rId3"/>
+              </a:rPr>
+              <a:t>Error</a:t>
+            </a:r>
+            <a:r>
+              <a:rPr lang="hr-HR" dirty="0">
+                <a:hlinkClick r:id="rId3"/>
+              </a:rPr>
+              <a:t> </a:t>
+            </a:r>
+            <a:r>
+              <a:rPr lang="hr-HR" dirty="0" err="1">
+                <a:hlinkClick r:id="rId3"/>
+              </a:rPr>
+              <a:t>lens</a:t>
+            </a:r>
+            <a:endParaRPr lang="hr-HR" dirty="0"/>
+          </a:p>
+          <a:p>
+            <a:endParaRPr lang="en-US" dirty="0"/>
+          </a:p>
+        </p:txBody>
+      </p:sp>
+      <p:pic>
+        <p:nvPicPr>
+          <p:cNvPr id="5" name="Picture 4">
+            <a:extLst>
+              <a:ext uri="{FF2B5EF4-FFF2-40B4-BE49-F238E27FC236}">
+                <a16:creationId xmlns:a16="http://schemas.microsoft.com/office/drawing/2014/main" id="{B0C1989A-A62F-AB76-9C83-55E1086815CA}"/>
+              </a:ext>
+            </a:extLst>
+          </p:cNvPr>
+          <p:cNvPicPr>
+            <a:picLocks noChangeAspect="1"/>
+          </p:cNvPicPr>
+          <p:nvPr/>
+        </p:nvPicPr>
+        <p:blipFill>
+          <a:blip r:embed="rId4">
+            <a:extLst>
+              <a:ext uri="{28A0092B-C50C-407E-A947-70E740481C1C}">
+                <a14:useLocalDpi xmlns:a14="http://schemas.microsoft.com/office/drawing/2010/main" val="0"/>
+              </a:ext>
+            </a:extLst>
+          </a:blip>
+          <a:srcRect l="31791" t="26656" r="9796"/>
+          <a:stretch>
+            <a:fillRect/>
+          </a:stretch>
+        </p:blipFill>
+        <p:spPr>
+          <a:xfrm>
+            <a:off x="8553450" y="342900"/>
+            <a:ext cx="3067050" cy="2878478"/>
+          </a:xfrm>
+          <a:prstGeom prst="rect">
+            <a:avLst/>
+          </a:prstGeom>
+        </p:spPr>
+      </p:pic>
+      <p:pic>
+        <p:nvPicPr>
+          <p:cNvPr id="9" name="Picture 8">
+            <a:extLst>
+              <a:ext uri="{FF2B5EF4-FFF2-40B4-BE49-F238E27FC236}">
+                <a16:creationId xmlns:a16="http://schemas.microsoft.com/office/drawing/2014/main" id="{7F4427D1-1736-B9A5-229B-5775933D678C}"/>
+              </a:ext>
+            </a:extLst>
+          </p:cNvPr>
+          <p:cNvPicPr>
+            <a:picLocks noChangeAspect="1"/>
+          </p:cNvPicPr>
+          <p:nvPr/>
+        </p:nvPicPr>
+        <p:blipFill>
+          <a:blip r:embed="rId5">
+            <a:extLst>
+              <a:ext uri="{28A0092B-C50C-407E-A947-70E740481C1C}">
+                <a14:useLocalDpi xmlns:a14="http://schemas.microsoft.com/office/drawing/2010/main" val="0"/>
+              </a:ext>
+            </a:extLst>
+          </a:blip>
+          <a:stretch>
+            <a:fillRect/>
+          </a:stretch>
+        </p:blipFill>
+        <p:spPr>
+          <a:xfrm>
+            <a:off x="2314575" y="3906044"/>
+            <a:ext cx="3200400" cy="2633056"/>
+          </a:xfrm>
+          <a:prstGeom prst="rect">
+            <a:avLst/>
+          </a:prstGeom>
+        </p:spPr>
+      </p:pic>
+    </p:spTree>
+    <p:extLst>
+      <p:ext uri="{BB962C8B-B14F-4D97-AF65-F5344CB8AC3E}">
+        <p14:creationId xmlns:p14="http://schemas.microsoft.com/office/powerpoint/2010/main" val="1591004117"/>
+      </p:ext>
+    </p:extLst>
+  </p:cSld>
+  <p:clrMapOvr>
+    <a:masterClrMapping/>
+  </p:clrMapOvr>
+</p:sld>
+</file>
+
+<file path=ppt/slides/slide17.xml><?xml version="1.0" encoding="utf-8"?>
+<p:sld xmlns:a="http://schemas.openxmlformats.org/drawingml/2006/main" xmlns:r="http://schemas.openxmlformats.org/officeDocument/2006/relationships" xmlns:p="http://schemas.openxmlformats.org/presentationml/2006/main">
+  <p:cSld>
     <p:bg>
       <p:bgPr>
         <a:gradFill rotWithShape="1">
@@ -28480,13 +28839,13 @@
   <p:clrMapOvr>
     <a:masterClrMapping/>
   </p:clrMapOvr>
-  <mc:AlternateContent xmlns:mc="http://schemas.openxmlformats.org/markup-compatibility/2006">
-    <mc:Choice xmlns:p14="http://schemas.microsoft.com/office/powerpoint/2010/main" Requires="p14">
+  <mc:AlternateContent xmlns:mc="http://schemas.openxmlformats.org/markup-compatibility/2006" xmlns:p14="http://schemas.microsoft.com/office/powerpoint/2010/main">
+    <mc:Choice Requires="p14">
       <p:transition spd="slow" p14:dur="1500">
         <p:split orient="vert"/>
       </p:transition>
     </mc:Choice>
-    <mc:Fallback>
+    <mc:Fallback xmlns="">
       <p:transition spd="slow">
         <p:split orient="vert"/>
       </p:transition>
@@ -28680,7 +29039,7 @@
             <a:noFill/>
             <a:extLst>
               <a:ext uri="{909E8E84-426E-40dd-AFC4-6F175D3DCCD1}">
-                <a14:hiddenFill xmlns="" xmlns:a16="http://schemas.microsoft.com/office/drawing/2014/main" xmlns:a14="http://schemas.microsoft.com/office/drawing/2010/main" xmlns:p14="http://schemas.microsoft.com/office/powerpoint/2010/main">
+                <a14:hiddenFill xmlns:p14="http://schemas.microsoft.com/office/powerpoint/2010/main" xmlns:a14="http://schemas.microsoft.com/office/drawing/2010/main" xmlns:a16="http://schemas.microsoft.com/office/drawing/2014/main" xmlns="">
                   <a:solidFill>
                     <a:srgbClr val="FFFFFF"/>
                   </a:solidFill>
@@ -31912,7 +32271,7 @@
             <a:noFill/>
             <a:extLst>
               <a:ext uri="{909E8E84-426E-40dd-AFC4-6F175D3DCCD1}">
-                <a14:hiddenFill xmlns="" xmlns:a16="http://schemas.microsoft.com/office/drawing/2014/main" xmlns:a14="http://schemas.microsoft.com/office/drawing/2010/main" xmlns:p14="http://schemas.microsoft.com/office/powerpoint/2010/main">
+                <a14:hiddenFill xmlns:p14="http://schemas.microsoft.com/office/powerpoint/2010/main" xmlns:a14="http://schemas.microsoft.com/office/drawing/2010/main" xmlns:a16="http://schemas.microsoft.com/office/drawing/2014/main" xmlns="">
                   <a:solidFill>
                     <a:srgbClr val="FFFFFF"/>
                   </a:solidFill>
@@ -32069,7 +32428,7 @@
             </a:ln>
             <a:extLst>
               <a:ext uri="{91240B29-F687-4f45-9708-019B960494DF}">
-                <a14:hiddenLine xmlns="" xmlns:a16="http://schemas.microsoft.com/office/drawing/2014/main" xmlns:a14="http://schemas.microsoft.com/office/drawing/2010/main" xmlns:p14="http://schemas.microsoft.com/office/powerpoint/2010/main" w="9525">
+                <a14:hiddenLine xmlns:p14="http://schemas.microsoft.com/office/powerpoint/2010/main" xmlns:a14="http://schemas.microsoft.com/office/drawing/2010/main" xmlns:a16="http://schemas.microsoft.com/office/drawing/2014/main" xmlns="" w="9525">
                   <a:solidFill>
                     <a:srgbClr val="000000"/>
                   </a:solidFill>
@@ -32181,7 +32540,7 @@
             </a:ln>
             <a:extLst>
               <a:ext uri="{91240B29-F687-4f45-9708-019B960494DF}">
-                <a14:hiddenLine xmlns="" xmlns:a16="http://schemas.microsoft.com/office/drawing/2014/main" xmlns:a14="http://schemas.microsoft.com/office/drawing/2010/main" xmlns:p14="http://schemas.microsoft.com/office/powerpoint/2010/main" w="9525">
+                <a14:hiddenLine xmlns:p14="http://schemas.microsoft.com/office/powerpoint/2010/main" xmlns:a14="http://schemas.microsoft.com/office/drawing/2010/main" xmlns:a16="http://schemas.microsoft.com/office/drawing/2014/main" xmlns="" w="9525">
                   <a:solidFill>
                     <a:srgbClr val="000000"/>
                   </a:solidFill>
@@ -32293,7 +32652,7 @@
             </a:ln>
             <a:extLst>
               <a:ext uri="{91240B29-F687-4f45-9708-019B960494DF}">
-                <a14:hiddenLine xmlns="" xmlns:a16="http://schemas.microsoft.com/office/drawing/2014/main" xmlns:a14="http://schemas.microsoft.com/office/drawing/2010/main" xmlns:p14="http://schemas.microsoft.com/office/powerpoint/2010/main" w="9525">
+                <a14:hiddenLine xmlns:p14="http://schemas.microsoft.com/office/powerpoint/2010/main" xmlns:a14="http://schemas.microsoft.com/office/drawing/2010/main" xmlns:a16="http://schemas.microsoft.com/office/drawing/2014/main" xmlns="" w="9525">
                   <a:solidFill>
                     <a:srgbClr val="000000"/>
                   </a:solidFill>
@@ -32349,7 +32708,7 @@
             </a:ln>
             <a:extLst>
               <a:ext uri="{91240B29-F687-4f45-9708-019B960494DF}">
-                <a14:hiddenLine xmlns="" xmlns:a16="http://schemas.microsoft.com/office/drawing/2014/main" xmlns:a14="http://schemas.microsoft.com/office/drawing/2010/main" xmlns:p14="http://schemas.microsoft.com/office/powerpoint/2010/main" w="9525">
+                <a14:hiddenLine xmlns:p14="http://schemas.microsoft.com/office/powerpoint/2010/main" xmlns:a14="http://schemas.microsoft.com/office/drawing/2010/main" xmlns:a16="http://schemas.microsoft.com/office/drawing/2014/main" xmlns="" w="9525">
                   <a:solidFill>
                     <a:srgbClr val="000000"/>
                   </a:solidFill>
@@ -32461,7 +32820,7 @@
             </a:ln>
             <a:extLst>
               <a:ext uri="{91240B29-F687-4f45-9708-019B960494DF}">
-                <a14:hiddenLine xmlns="" xmlns:a16="http://schemas.microsoft.com/office/drawing/2014/main" xmlns:a14="http://schemas.microsoft.com/office/drawing/2010/main" xmlns:p14="http://schemas.microsoft.com/office/powerpoint/2010/main" w="9525">
+                <a14:hiddenLine xmlns:p14="http://schemas.microsoft.com/office/powerpoint/2010/main" xmlns:a14="http://schemas.microsoft.com/office/drawing/2010/main" xmlns:a16="http://schemas.microsoft.com/office/drawing/2014/main" xmlns="" w="9525">
                   <a:solidFill>
                     <a:srgbClr val="000000"/>
                   </a:solidFill>
@@ -32545,7 +32904,7 @@
             </a:ln>
             <a:extLst>
               <a:ext uri="{91240B29-F687-4f45-9708-019B960494DF}">
-                <a14:hiddenLine xmlns="" xmlns:a16="http://schemas.microsoft.com/office/drawing/2014/main" xmlns:a14="http://schemas.microsoft.com/office/drawing/2010/main" xmlns:p14="http://schemas.microsoft.com/office/powerpoint/2010/main" w="9525">
+                <a14:hiddenLine xmlns:p14="http://schemas.microsoft.com/office/powerpoint/2010/main" xmlns:a14="http://schemas.microsoft.com/office/drawing/2010/main" xmlns:a16="http://schemas.microsoft.com/office/drawing/2014/main" xmlns="" w="9525">
                   <a:solidFill>
                     <a:srgbClr val="000000"/>
                   </a:solidFill>
@@ -32629,7 +32988,7 @@
             </a:ln>
             <a:extLst>
               <a:ext uri="{91240B29-F687-4f45-9708-019B960494DF}">
-                <a14:hiddenLine xmlns="" xmlns:a16="http://schemas.microsoft.com/office/drawing/2014/main" xmlns:a14="http://schemas.microsoft.com/office/drawing/2010/main" xmlns:p14="http://schemas.microsoft.com/office/powerpoint/2010/main" w="9525">
+                <a14:hiddenLine xmlns:p14="http://schemas.microsoft.com/office/powerpoint/2010/main" xmlns:a14="http://schemas.microsoft.com/office/drawing/2010/main" xmlns:a16="http://schemas.microsoft.com/office/drawing/2014/main" xmlns="" w="9525">
                   <a:solidFill>
                     <a:srgbClr val="000000"/>
                   </a:solidFill>
@@ -32741,7 +33100,7 @@
             </a:ln>
             <a:extLst>
               <a:ext uri="{91240B29-F687-4f45-9708-019B960494DF}">
-                <a14:hiddenLine xmlns="" xmlns:a16="http://schemas.microsoft.com/office/drawing/2014/main" xmlns:a14="http://schemas.microsoft.com/office/drawing/2010/main" xmlns:p14="http://schemas.microsoft.com/office/powerpoint/2010/main" w="9525">
+                <a14:hiddenLine xmlns:p14="http://schemas.microsoft.com/office/powerpoint/2010/main" xmlns:a14="http://schemas.microsoft.com/office/drawing/2010/main" xmlns:a16="http://schemas.microsoft.com/office/drawing/2014/main" xmlns="" w="9525">
                   <a:solidFill>
                     <a:srgbClr val="000000"/>
                   </a:solidFill>
@@ -32825,7 +33184,7 @@
             </a:ln>
             <a:extLst>
               <a:ext uri="{91240B29-F687-4f45-9708-019B960494DF}">
-                <a14:hiddenLine xmlns="" xmlns:a16="http://schemas.microsoft.com/office/drawing/2014/main" xmlns:a14="http://schemas.microsoft.com/office/drawing/2010/main" xmlns:p14="http://schemas.microsoft.com/office/powerpoint/2010/main" w="9525">
+                <a14:hiddenLine xmlns:p14="http://schemas.microsoft.com/office/powerpoint/2010/main" xmlns:a14="http://schemas.microsoft.com/office/drawing/2010/main" xmlns:a16="http://schemas.microsoft.com/office/drawing/2014/main" xmlns="" w="9525">
                   <a:solidFill>
                     <a:srgbClr val="000000"/>
                   </a:solidFill>
@@ -32909,7 +33268,7 @@
             </a:ln>
             <a:extLst>
               <a:ext uri="{91240B29-F687-4f45-9708-019B960494DF}">
-                <a14:hiddenLine xmlns="" xmlns:a16="http://schemas.microsoft.com/office/drawing/2014/main" xmlns:a14="http://schemas.microsoft.com/office/drawing/2010/main" xmlns:p14="http://schemas.microsoft.com/office/powerpoint/2010/main" w="9525">
+                <a14:hiddenLine xmlns:p14="http://schemas.microsoft.com/office/powerpoint/2010/main" xmlns:a14="http://schemas.microsoft.com/office/drawing/2010/main" xmlns:a16="http://schemas.microsoft.com/office/drawing/2014/main" xmlns="" w="9525">
                   <a:solidFill>
                     <a:srgbClr val="000000"/>
                   </a:solidFill>
@@ -33021,7 +33380,7 @@
             </a:ln>
             <a:extLst>
               <a:ext uri="{91240B29-F687-4f45-9708-019B960494DF}">
-                <a14:hiddenLine xmlns="" xmlns:a16="http://schemas.microsoft.com/office/drawing/2014/main" xmlns:a14="http://schemas.microsoft.com/office/drawing/2010/main" xmlns:p14="http://schemas.microsoft.com/office/powerpoint/2010/main" w="9525">
+                <a14:hiddenLine xmlns:p14="http://schemas.microsoft.com/office/powerpoint/2010/main" xmlns:a14="http://schemas.microsoft.com/office/drawing/2010/main" xmlns:a16="http://schemas.microsoft.com/office/drawing/2014/main" xmlns="" w="9525">
                   <a:solidFill>
                     <a:srgbClr val="000000"/>
                   </a:solidFill>
@@ -33133,7 +33492,7 @@
             </a:ln>
             <a:extLst>
               <a:ext uri="{91240B29-F687-4f45-9708-019B960494DF}">
-                <a14:hiddenLine xmlns="" xmlns:a16="http://schemas.microsoft.com/office/drawing/2014/main" xmlns:a14="http://schemas.microsoft.com/office/drawing/2010/main" xmlns:p14="http://schemas.microsoft.com/office/powerpoint/2010/main" w="9525">
+                <a14:hiddenLine xmlns:p14="http://schemas.microsoft.com/office/powerpoint/2010/main" xmlns:a14="http://schemas.microsoft.com/office/drawing/2010/main" xmlns:a16="http://schemas.microsoft.com/office/drawing/2014/main" xmlns="" w="9525">
                   <a:solidFill>
                     <a:srgbClr val="000000"/>
                   </a:solidFill>
@@ -33217,7 +33576,7 @@
             </a:ln>
             <a:extLst>
               <a:ext uri="{91240B29-F687-4f45-9708-019B960494DF}">
-                <a14:hiddenLine xmlns="" xmlns:a16="http://schemas.microsoft.com/office/drawing/2014/main" xmlns:a14="http://schemas.microsoft.com/office/drawing/2010/main" xmlns:p14="http://schemas.microsoft.com/office/powerpoint/2010/main" w="9525">
+                <a14:hiddenLine xmlns:p14="http://schemas.microsoft.com/office/powerpoint/2010/main" xmlns:a14="http://schemas.microsoft.com/office/drawing/2010/main" xmlns:a16="http://schemas.microsoft.com/office/drawing/2014/main" xmlns="" w="9525">
                   <a:solidFill>
                     <a:srgbClr val="000000"/>
                   </a:solidFill>
@@ -33349,7 +33708,7 @@
             </a:ln>
             <a:extLst>
               <a:ext uri="{91240B29-F687-4f45-9708-019B960494DF}">
-                <a14:hiddenLine xmlns="" xmlns:a16="http://schemas.microsoft.com/office/drawing/2014/main" xmlns:a14="http://schemas.microsoft.com/office/drawing/2010/main" xmlns:p14="http://schemas.microsoft.com/office/powerpoint/2010/main" w="9525">
+                <a14:hiddenLine xmlns:p14="http://schemas.microsoft.com/office/powerpoint/2010/main" xmlns:a14="http://schemas.microsoft.com/office/drawing/2010/main" xmlns:a16="http://schemas.microsoft.com/office/drawing/2014/main" xmlns="" w="9525">
                   <a:solidFill>
                     <a:srgbClr val="000000"/>
                   </a:solidFill>
@@ -33433,7 +33792,7 @@
             </a:ln>
             <a:extLst>
               <a:ext uri="{91240B29-F687-4f45-9708-019B960494DF}">
-                <a14:hiddenLine xmlns="" xmlns:a16="http://schemas.microsoft.com/office/drawing/2014/main" xmlns:a14="http://schemas.microsoft.com/office/drawing/2010/main" xmlns:p14="http://schemas.microsoft.com/office/powerpoint/2010/main" w="9525">
+                <a14:hiddenLine xmlns:p14="http://schemas.microsoft.com/office/powerpoint/2010/main" xmlns:a14="http://schemas.microsoft.com/office/drawing/2010/main" xmlns:a16="http://schemas.microsoft.com/office/drawing/2014/main" xmlns="" w="9525">
                   <a:solidFill>
                     <a:srgbClr val="000000"/>
                   </a:solidFill>
@@ -33545,7 +33904,7 @@
             </a:ln>
             <a:extLst>
               <a:ext uri="{91240B29-F687-4f45-9708-019B960494DF}">
-                <a14:hiddenLine xmlns="" xmlns:a16="http://schemas.microsoft.com/office/drawing/2014/main" xmlns:a14="http://schemas.microsoft.com/office/drawing/2010/main" xmlns:p14="http://schemas.microsoft.com/office/powerpoint/2010/main" w="9525">
+                <a14:hiddenLine xmlns:p14="http://schemas.microsoft.com/office/powerpoint/2010/main" xmlns:a14="http://schemas.microsoft.com/office/drawing/2010/main" xmlns:a16="http://schemas.microsoft.com/office/drawing/2014/main" xmlns="" w="9525">
                   <a:solidFill>
                     <a:srgbClr val="000000"/>
                   </a:solidFill>
@@ -33657,7 +34016,7 @@
             </a:ln>
             <a:extLst>
               <a:ext uri="{91240B29-F687-4f45-9708-019B960494DF}">
-                <a14:hiddenLine xmlns="" xmlns:a16="http://schemas.microsoft.com/office/drawing/2014/main" xmlns:a14="http://schemas.microsoft.com/office/drawing/2010/main" xmlns:p14="http://schemas.microsoft.com/office/powerpoint/2010/main" w="9525">
+                <a14:hiddenLine xmlns:p14="http://schemas.microsoft.com/office/powerpoint/2010/main" xmlns:a14="http://schemas.microsoft.com/office/drawing/2010/main" xmlns:a16="http://schemas.microsoft.com/office/drawing/2014/main" xmlns="" w="9525">
                   <a:solidFill>
                     <a:srgbClr val="000000"/>
                   </a:solidFill>
@@ -33741,7 +34100,7 @@
             </a:ln>
             <a:extLst>
               <a:ext uri="{91240B29-F687-4f45-9708-019B960494DF}">
-                <a14:hiddenLine xmlns="" xmlns:a16="http://schemas.microsoft.com/office/drawing/2014/main" xmlns:a14="http://schemas.microsoft.com/office/drawing/2010/main" xmlns:p14="http://schemas.microsoft.com/office/powerpoint/2010/main" w="9525">
+                <a14:hiddenLine xmlns:p14="http://schemas.microsoft.com/office/powerpoint/2010/main" xmlns:a14="http://schemas.microsoft.com/office/drawing/2010/main" xmlns:a16="http://schemas.microsoft.com/office/drawing/2014/main" xmlns="" w="9525">
                   <a:solidFill>
                     <a:srgbClr val="000000"/>
                   </a:solidFill>
@@ -33853,7 +34212,7 @@
             </a:ln>
             <a:extLst>
               <a:ext uri="{91240B29-F687-4f45-9708-019B960494DF}">
-                <a14:hiddenLine xmlns="" xmlns:a16="http://schemas.microsoft.com/office/drawing/2014/main" xmlns:a14="http://schemas.microsoft.com/office/drawing/2010/main" xmlns:p14="http://schemas.microsoft.com/office/powerpoint/2010/main" w="9525">
+                <a14:hiddenLine xmlns:p14="http://schemas.microsoft.com/office/powerpoint/2010/main" xmlns:a14="http://schemas.microsoft.com/office/drawing/2010/main" xmlns:a16="http://schemas.microsoft.com/office/drawing/2014/main" xmlns="" w="9525">
                   <a:solidFill>
                     <a:srgbClr val="000000"/>
                   </a:solidFill>
@@ -33965,7 +34324,7 @@
             </a:ln>
             <a:extLst>
               <a:ext uri="{91240B29-F687-4f45-9708-019B960494DF}">
-                <a14:hiddenLine xmlns="" xmlns:a16="http://schemas.microsoft.com/office/drawing/2014/main" xmlns:a14="http://schemas.microsoft.com/office/drawing/2010/main" xmlns:p14="http://schemas.microsoft.com/office/powerpoint/2010/main" w="9525">
+                <a14:hiddenLine xmlns:p14="http://schemas.microsoft.com/office/powerpoint/2010/main" xmlns:a14="http://schemas.microsoft.com/office/drawing/2010/main" xmlns:a16="http://schemas.microsoft.com/office/drawing/2014/main" xmlns="" w="9525">
                   <a:solidFill>
                     <a:srgbClr val="000000"/>
                   </a:solidFill>
@@ -34043,7 +34402,7 @@
             </a:ln>
             <a:extLst>
               <a:ext uri="{91240B29-F687-4f45-9708-019B960494DF}">
-                <a14:hiddenLine xmlns="" xmlns:a16="http://schemas.microsoft.com/office/drawing/2014/main" xmlns:a14="http://schemas.microsoft.com/office/drawing/2010/main" xmlns:p14="http://schemas.microsoft.com/office/powerpoint/2010/main" w="9525">
+                <a14:hiddenLine xmlns:p14="http://schemas.microsoft.com/office/powerpoint/2010/main" xmlns:a14="http://schemas.microsoft.com/office/drawing/2010/main" xmlns:a16="http://schemas.microsoft.com/office/drawing/2014/main" xmlns="" w="9525">
                   <a:solidFill>
                     <a:srgbClr val="000000"/>
                   </a:solidFill>
@@ -34155,7 +34514,7 @@
             </a:ln>
             <a:extLst>
               <a:ext uri="{91240B29-F687-4f45-9708-019B960494DF}">
-                <a14:hiddenLine xmlns="" xmlns:a16="http://schemas.microsoft.com/office/drawing/2014/main" xmlns:a14="http://schemas.microsoft.com/office/drawing/2010/main" xmlns:p14="http://schemas.microsoft.com/office/powerpoint/2010/main" w="9525">
+                <a14:hiddenLine xmlns:p14="http://schemas.microsoft.com/office/powerpoint/2010/main" xmlns:a14="http://schemas.microsoft.com/office/drawing/2010/main" xmlns:a16="http://schemas.microsoft.com/office/drawing/2014/main" xmlns="" w="9525">
                   <a:solidFill>
                     <a:srgbClr val="000000"/>
                   </a:solidFill>
@@ -34233,7 +34592,7 @@
             </a:ln>
             <a:extLst>
               <a:ext uri="{91240B29-F687-4f45-9708-019B960494DF}">
-                <a14:hiddenLine xmlns="" xmlns:a16="http://schemas.microsoft.com/office/drawing/2014/main" xmlns:a14="http://schemas.microsoft.com/office/drawing/2010/main" xmlns:p14="http://schemas.microsoft.com/office/powerpoint/2010/main" w="9525">
+                <a14:hiddenLine xmlns:p14="http://schemas.microsoft.com/office/powerpoint/2010/main" xmlns:a14="http://schemas.microsoft.com/office/drawing/2010/main" xmlns:a16="http://schemas.microsoft.com/office/drawing/2014/main" xmlns="" w="9525">
                   <a:solidFill>
                     <a:srgbClr val="000000"/>
                   </a:solidFill>
@@ -34345,7 +34704,7 @@
             </a:ln>
             <a:extLst>
               <a:ext uri="{91240B29-F687-4f45-9708-019B960494DF}">
-                <a14:hiddenLine xmlns="" xmlns:a16="http://schemas.microsoft.com/office/drawing/2014/main" xmlns:a14="http://schemas.microsoft.com/office/drawing/2010/main" xmlns:p14="http://schemas.microsoft.com/office/powerpoint/2010/main" w="9525">
+                <a14:hiddenLine xmlns:p14="http://schemas.microsoft.com/office/powerpoint/2010/main" xmlns:a14="http://schemas.microsoft.com/office/drawing/2010/main" xmlns:a16="http://schemas.microsoft.com/office/drawing/2014/main" xmlns="" w="9525">
                   <a:solidFill>
                     <a:srgbClr val="000000"/>
                   </a:solidFill>
@@ -34435,7 +34794,7 @@
             </a:ln>
             <a:extLst>
               <a:ext uri="{91240B29-F687-4f45-9708-019B960494DF}">
-                <a14:hiddenLine xmlns="" xmlns:a16="http://schemas.microsoft.com/office/drawing/2014/main" xmlns:a14="http://schemas.microsoft.com/office/drawing/2010/main" xmlns:p14="http://schemas.microsoft.com/office/powerpoint/2010/main" w="9525">
+                <a14:hiddenLine xmlns:p14="http://schemas.microsoft.com/office/powerpoint/2010/main" xmlns:a14="http://schemas.microsoft.com/office/drawing/2010/main" xmlns:a16="http://schemas.microsoft.com/office/drawing/2014/main" xmlns="" w="9525">
                   <a:solidFill>
                     <a:srgbClr val="000000"/>
                   </a:solidFill>
@@ -34547,7 +34906,7 @@
             </a:ln>
             <a:extLst>
               <a:ext uri="{91240B29-F687-4f45-9708-019B960494DF}">
-                <a14:hiddenLine xmlns="" xmlns:a16="http://schemas.microsoft.com/office/drawing/2014/main" xmlns:a14="http://schemas.microsoft.com/office/drawing/2010/main" xmlns:p14="http://schemas.microsoft.com/office/powerpoint/2010/main" w="9525">
+                <a14:hiddenLine xmlns:p14="http://schemas.microsoft.com/office/powerpoint/2010/main" xmlns:a14="http://schemas.microsoft.com/office/drawing/2010/main" xmlns:a16="http://schemas.microsoft.com/office/drawing/2014/main" xmlns="" w="9525">
                   <a:solidFill>
                     <a:srgbClr val="000000"/>
                   </a:solidFill>
@@ -34637,7 +34996,7 @@
             </a:ln>
             <a:extLst>
               <a:ext uri="{91240B29-F687-4f45-9708-019B960494DF}">
-                <a14:hiddenLine xmlns="" xmlns:a16="http://schemas.microsoft.com/office/drawing/2014/main" xmlns:a14="http://schemas.microsoft.com/office/drawing/2010/main" xmlns:p14="http://schemas.microsoft.com/office/powerpoint/2010/main" w="9525">
+                <a14:hiddenLine xmlns:p14="http://schemas.microsoft.com/office/powerpoint/2010/main" xmlns:a14="http://schemas.microsoft.com/office/drawing/2010/main" xmlns:a16="http://schemas.microsoft.com/office/drawing/2014/main" xmlns="" w="9525">
                   <a:solidFill>
                     <a:srgbClr val="000000"/>
                   </a:solidFill>
@@ -34749,7 +35108,7 @@
             </a:ln>
             <a:extLst>
               <a:ext uri="{91240B29-F687-4f45-9708-019B960494DF}">
-                <a14:hiddenLine xmlns="" xmlns:a16="http://schemas.microsoft.com/office/drawing/2014/main" xmlns:a14="http://schemas.microsoft.com/office/drawing/2010/main" xmlns:p14="http://schemas.microsoft.com/office/powerpoint/2010/main" w="9525">
+                <a14:hiddenLine xmlns:p14="http://schemas.microsoft.com/office/powerpoint/2010/main" xmlns:a14="http://schemas.microsoft.com/office/drawing/2010/main" xmlns:a16="http://schemas.microsoft.com/office/drawing/2014/main" xmlns="" w="9525">
                   <a:solidFill>
                     <a:srgbClr val="000000"/>
                   </a:solidFill>
@@ -34805,7 +35164,7 @@
             </a:ln>
             <a:extLst>
               <a:ext uri="{91240B29-F687-4f45-9708-019B960494DF}">
-                <a14:hiddenLine xmlns="" xmlns:a16="http://schemas.microsoft.com/office/drawing/2014/main" xmlns:a14="http://schemas.microsoft.com/office/drawing/2010/main" xmlns:p14="http://schemas.microsoft.com/office/powerpoint/2010/main" w="9525">
+                <a14:hiddenLine xmlns:p14="http://schemas.microsoft.com/office/powerpoint/2010/main" xmlns:a14="http://schemas.microsoft.com/office/drawing/2010/main" xmlns:a16="http://schemas.microsoft.com/office/drawing/2014/main" xmlns="" w="9525">
                   <a:solidFill>
                     <a:srgbClr val="000000"/>
                   </a:solidFill>
@@ -34917,7 +35276,7 @@
             </a:ln>
             <a:extLst>
               <a:ext uri="{91240B29-F687-4f45-9708-019B960494DF}">
-                <a14:hiddenLine xmlns="" xmlns:a16="http://schemas.microsoft.com/office/drawing/2014/main" xmlns:a14="http://schemas.microsoft.com/office/drawing/2010/main" xmlns:p14="http://schemas.microsoft.com/office/powerpoint/2010/main" w="9525">
+                <a14:hiddenLine xmlns:p14="http://schemas.microsoft.com/office/powerpoint/2010/main" xmlns:a14="http://schemas.microsoft.com/office/drawing/2010/main" xmlns:a16="http://schemas.microsoft.com/office/drawing/2014/main" xmlns="" w="9525">
                   <a:solidFill>
                     <a:srgbClr val="000000"/>
                   </a:solidFill>
@@ -35001,7 +35360,7 @@
             </a:ln>
             <a:extLst>
               <a:ext uri="{91240B29-F687-4f45-9708-019B960494DF}">
-                <a14:hiddenLine xmlns="" xmlns:a16="http://schemas.microsoft.com/office/drawing/2014/main" xmlns:a14="http://schemas.microsoft.com/office/drawing/2010/main" xmlns:p14="http://schemas.microsoft.com/office/powerpoint/2010/main" w="9525">
+                <a14:hiddenLine xmlns:p14="http://schemas.microsoft.com/office/powerpoint/2010/main" xmlns:a14="http://schemas.microsoft.com/office/drawing/2010/main" xmlns:a16="http://schemas.microsoft.com/office/drawing/2014/main" xmlns="" w="9525">
                   <a:solidFill>
                     <a:srgbClr val="000000"/>
                   </a:solidFill>
@@ -35085,7 +35444,7 @@
             </a:ln>
             <a:extLst>
               <a:ext uri="{91240B29-F687-4f45-9708-019B960494DF}">
-                <a14:hiddenLine xmlns="" xmlns:a16="http://schemas.microsoft.com/office/drawing/2014/main" xmlns:a14="http://schemas.microsoft.com/office/drawing/2010/main" xmlns:p14="http://schemas.microsoft.com/office/powerpoint/2010/main" w="9525">
+                <a14:hiddenLine xmlns:p14="http://schemas.microsoft.com/office/powerpoint/2010/main" xmlns:a14="http://schemas.microsoft.com/office/drawing/2010/main" xmlns:a16="http://schemas.microsoft.com/office/drawing/2014/main" xmlns="" w="9525">
                   <a:solidFill>
                     <a:srgbClr val="000000"/>
                   </a:solidFill>
@@ -35197,7 +35556,7 @@
             </a:ln>
             <a:extLst>
               <a:ext uri="{91240B29-F687-4f45-9708-019B960494DF}">
-                <a14:hiddenLine xmlns="" xmlns:a16="http://schemas.microsoft.com/office/drawing/2014/main" xmlns:a14="http://schemas.microsoft.com/office/drawing/2010/main" xmlns:p14="http://schemas.microsoft.com/office/powerpoint/2010/main" w="9525">
+                <a14:hiddenLine xmlns:p14="http://schemas.microsoft.com/office/powerpoint/2010/main" xmlns:a14="http://schemas.microsoft.com/office/drawing/2010/main" xmlns:a16="http://schemas.microsoft.com/office/drawing/2014/main" xmlns="" w="9525">
                   <a:solidFill>
                     <a:srgbClr val="000000"/>
                   </a:solidFill>
@@ -35287,7 +35646,7 @@
             </a:ln>
             <a:extLst>
               <a:ext uri="{91240B29-F687-4f45-9708-019B960494DF}">
-                <a14:hiddenLine xmlns="" xmlns:a16="http://schemas.microsoft.com/office/drawing/2014/main" xmlns:a14="http://schemas.microsoft.com/office/drawing/2010/main" xmlns:p14="http://schemas.microsoft.com/office/powerpoint/2010/main" w="9525">
+                <a14:hiddenLine xmlns:p14="http://schemas.microsoft.com/office/powerpoint/2010/main" xmlns:a14="http://schemas.microsoft.com/office/drawing/2010/main" xmlns:a16="http://schemas.microsoft.com/office/drawing/2014/main" xmlns="" w="9525">
                   <a:solidFill>
                     <a:srgbClr val="000000"/>
                   </a:solidFill>
@@ -35371,7 +35730,7 @@
             </a:ln>
             <a:extLst>
               <a:ext uri="{91240B29-F687-4f45-9708-019B960494DF}">
-                <a14:hiddenLine xmlns="" xmlns:a16="http://schemas.microsoft.com/office/drawing/2014/main" xmlns:a14="http://schemas.microsoft.com/office/drawing/2010/main" xmlns:p14="http://schemas.microsoft.com/office/powerpoint/2010/main" w="9525">
+                <a14:hiddenLine xmlns:p14="http://schemas.microsoft.com/office/powerpoint/2010/main" xmlns:a14="http://schemas.microsoft.com/office/drawing/2010/main" xmlns:a16="http://schemas.microsoft.com/office/drawing/2014/main" xmlns="" w="9525">
                   <a:solidFill>
                     <a:srgbClr val="000000"/>
                   </a:solidFill>
@@ -35483,7 +35842,7 @@
             </a:ln>
             <a:extLst>
               <a:ext uri="{91240B29-F687-4f45-9708-019B960494DF}">
-                <a14:hiddenLine xmlns="" xmlns:a16="http://schemas.microsoft.com/office/drawing/2014/main" xmlns:a14="http://schemas.microsoft.com/office/drawing/2010/main" xmlns:p14="http://schemas.microsoft.com/office/powerpoint/2010/main" w="9525">
+                <a14:hiddenLine xmlns:p14="http://schemas.microsoft.com/office/powerpoint/2010/main" xmlns:a14="http://schemas.microsoft.com/office/drawing/2010/main" xmlns:a16="http://schemas.microsoft.com/office/drawing/2014/main" xmlns="" w="9525">
                   <a:solidFill>
                     <a:srgbClr val="000000"/>
                   </a:solidFill>
@@ -35567,7 +35926,7 @@
             </a:ln>
             <a:extLst>
               <a:ext uri="{91240B29-F687-4f45-9708-019B960494DF}">
-                <a14:hiddenLine xmlns="" xmlns:a16="http://schemas.microsoft.com/office/drawing/2014/main" xmlns:a14="http://schemas.microsoft.com/office/drawing/2010/main" xmlns:p14="http://schemas.microsoft.com/office/powerpoint/2010/main" w="9525">
+                <a14:hiddenLine xmlns:p14="http://schemas.microsoft.com/office/powerpoint/2010/main" xmlns:a14="http://schemas.microsoft.com/office/drawing/2010/main" xmlns:a16="http://schemas.microsoft.com/office/drawing/2014/main" xmlns="" w="9525">
                   <a:solidFill>
                     <a:srgbClr val="000000"/>
                   </a:solidFill>
@@ -35679,7 +36038,7 @@
             </a:ln>
             <a:extLst>
               <a:ext uri="{91240B29-F687-4f45-9708-019B960494DF}">
-                <a14:hiddenLine xmlns="" xmlns:a16="http://schemas.microsoft.com/office/drawing/2014/main" xmlns:a14="http://schemas.microsoft.com/office/drawing/2010/main" xmlns:p14="http://schemas.microsoft.com/office/powerpoint/2010/main" w="9525">
+                <a14:hiddenLine xmlns:p14="http://schemas.microsoft.com/office/powerpoint/2010/main" xmlns:a14="http://schemas.microsoft.com/office/drawing/2010/main" xmlns:a16="http://schemas.microsoft.com/office/drawing/2014/main" xmlns="" w="9525">
                   <a:solidFill>
                     <a:srgbClr val="000000"/>
                   </a:solidFill>
@@ -35763,7 +36122,7 @@
             </a:ln>
             <a:extLst>
               <a:ext uri="{91240B29-F687-4f45-9708-019B960494DF}">
-                <a14:hiddenLine xmlns="" xmlns:a16="http://schemas.microsoft.com/office/drawing/2014/main" xmlns:a14="http://schemas.microsoft.com/office/drawing/2010/main" xmlns:p14="http://schemas.microsoft.com/office/powerpoint/2010/main" w="9525">
+                <a14:hiddenLine xmlns:p14="http://schemas.microsoft.com/office/powerpoint/2010/main" xmlns:a14="http://schemas.microsoft.com/office/drawing/2010/main" xmlns:a16="http://schemas.microsoft.com/office/drawing/2014/main" xmlns="" w="9525">
                   <a:solidFill>
                     <a:srgbClr val="000000"/>
                   </a:solidFill>
@@ -35875,7 +36234,7 @@
             </a:ln>
             <a:extLst>
               <a:ext uri="{91240B29-F687-4f45-9708-019B960494DF}">
-                <a14:hiddenLine xmlns="" xmlns:a16="http://schemas.microsoft.com/office/drawing/2014/main" xmlns:a14="http://schemas.microsoft.com/office/drawing/2010/main" xmlns:p14="http://schemas.microsoft.com/office/powerpoint/2010/main" w="9525">
+                <a14:hiddenLine xmlns:p14="http://schemas.microsoft.com/office/powerpoint/2010/main" xmlns:a14="http://schemas.microsoft.com/office/drawing/2010/main" xmlns:a16="http://schemas.microsoft.com/office/drawing/2014/main" xmlns="" w="9525">
                   <a:solidFill>
                     <a:srgbClr val="000000"/>
                   </a:solidFill>
@@ -35931,7 +36290,7 @@
             </a:ln>
             <a:extLst>
               <a:ext uri="{91240B29-F687-4f45-9708-019B960494DF}">
-                <a14:hiddenLine xmlns="" xmlns:a16="http://schemas.microsoft.com/office/drawing/2014/main" xmlns:a14="http://schemas.microsoft.com/office/drawing/2010/main" xmlns:p14="http://schemas.microsoft.com/office/powerpoint/2010/main" w="9525">
+                <a14:hiddenLine xmlns:p14="http://schemas.microsoft.com/office/powerpoint/2010/main" xmlns:a14="http://schemas.microsoft.com/office/drawing/2010/main" xmlns:a16="http://schemas.microsoft.com/office/drawing/2014/main" xmlns="" w="9525">
                   <a:solidFill>
                     <a:srgbClr val="000000"/>
                   </a:solidFill>
@@ -36018,7 +36377,7 @@
             </a:ln>
             <a:extLst>
               <a:ext uri="{91240B29-F687-4f45-9708-019B960494DF}">
-                <a14:hiddenLine xmlns="" xmlns:a16="http://schemas.microsoft.com/office/drawing/2014/main" xmlns:a14="http://schemas.microsoft.com/office/drawing/2010/main" xmlns:p14="http://schemas.microsoft.com/office/powerpoint/2010/main" w="9525">
+                <a14:hiddenLine xmlns:p14="http://schemas.microsoft.com/office/powerpoint/2010/main" xmlns:a14="http://schemas.microsoft.com/office/drawing/2010/main" xmlns:a16="http://schemas.microsoft.com/office/drawing/2014/main" xmlns="" w="9525">
                   <a:solidFill>
                     <a:srgbClr val="000000"/>
                   </a:solidFill>
@@ -36130,7 +36489,7 @@
             </a:ln>
             <a:extLst>
               <a:ext uri="{91240B29-F687-4f45-9708-019B960494DF}">
-                <a14:hiddenLine xmlns="" xmlns:a16="http://schemas.microsoft.com/office/drawing/2014/main" xmlns:a14="http://schemas.microsoft.com/office/drawing/2010/main" xmlns:p14="http://schemas.microsoft.com/office/powerpoint/2010/main" w="9525">
+                <a14:hiddenLine xmlns:p14="http://schemas.microsoft.com/office/powerpoint/2010/main" xmlns:a14="http://schemas.microsoft.com/office/drawing/2010/main" xmlns:a16="http://schemas.microsoft.com/office/drawing/2014/main" xmlns="" w="9525">
                   <a:solidFill>
                     <a:srgbClr val="000000"/>
                   </a:solidFill>
@@ -36214,7 +36573,7 @@
             </a:ln>
             <a:extLst>
               <a:ext uri="{91240B29-F687-4f45-9708-019B960494DF}">
-                <a14:hiddenLine xmlns="" xmlns:a16="http://schemas.microsoft.com/office/drawing/2014/main" xmlns:a14="http://schemas.microsoft.com/office/drawing/2010/main" xmlns:p14="http://schemas.microsoft.com/office/powerpoint/2010/main" w="9525">
+                <a14:hiddenLine xmlns:p14="http://schemas.microsoft.com/office/powerpoint/2010/main" xmlns:a14="http://schemas.microsoft.com/office/drawing/2010/main" xmlns:a16="http://schemas.microsoft.com/office/drawing/2014/main" xmlns="" w="9525">
                   <a:solidFill>
                     <a:srgbClr val="000000"/>
                   </a:solidFill>
@@ -36326,7 +36685,7 @@
             </a:ln>
             <a:extLst>
               <a:ext uri="{91240B29-F687-4f45-9708-019B960494DF}">
-                <a14:hiddenLine xmlns="" xmlns:a16="http://schemas.microsoft.com/office/drawing/2014/main" xmlns:a14="http://schemas.microsoft.com/office/drawing/2010/main" xmlns:p14="http://schemas.microsoft.com/office/powerpoint/2010/main" w="9525">
+                <a14:hiddenLine xmlns:p14="http://schemas.microsoft.com/office/powerpoint/2010/main" xmlns:a14="http://schemas.microsoft.com/office/drawing/2010/main" xmlns:a16="http://schemas.microsoft.com/office/drawing/2014/main" xmlns="" w="9525">
                   <a:solidFill>
                     <a:srgbClr val="000000"/>
                   </a:solidFill>
@@ -36438,7 +36797,7 @@
             </a:ln>
             <a:extLst>
               <a:ext uri="{91240B29-F687-4f45-9708-019B960494DF}">
-                <a14:hiddenLine xmlns="" xmlns:a16="http://schemas.microsoft.com/office/drawing/2014/main" xmlns:a14="http://schemas.microsoft.com/office/drawing/2010/main" xmlns:p14="http://schemas.microsoft.com/office/powerpoint/2010/main" w="9525">
+                <a14:hiddenLine xmlns:p14="http://schemas.microsoft.com/office/powerpoint/2010/main" xmlns:a14="http://schemas.microsoft.com/office/drawing/2010/main" xmlns:a16="http://schemas.microsoft.com/office/drawing/2014/main" xmlns="" w="9525">
                   <a:solidFill>
                     <a:srgbClr val="000000"/>
                   </a:solidFill>
@@ -36525,7 +36884,7 @@
             </a:ln>
             <a:extLst>
               <a:ext uri="{91240B29-F687-4f45-9708-019B960494DF}">
-                <a14:hiddenLine xmlns="" xmlns:a16="http://schemas.microsoft.com/office/drawing/2014/main" xmlns:a14="http://schemas.microsoft.com/office/drawing/2010/main" xmlns:p14="http://schemas.microsoft.com/office/powerpoint/2010/main" w="9525">
+                <a14:hiddenLine xmlns:p14="http://schemas.microsoft.com/office/powerpoint/2010/main" xmlns:a14="http://schemas.microsoft.com/office/drawing/2010/main" xmlns:a16="http://schemas.microsoft.com/office/drawing/2014/main" xmlns="" w="9525">
                   <a:solidFill>
                     <a:srgbClr val="000000"/>
                   </a:solidFill>
@@ -36609,7 +36968,7 @@
             </a:ln>
             <a:extLst>
               <a:ext uri="{91240B29-F687-4f45-9708-019B960494DF}">
-                <a14:hiddenLine xmlns="" xmlns:a16="http://schemas.microsoft.com/office/drawing/2014/main" xmlns:a14="http://schemas.microsoft.com/office/drawing/2010/main" xmlns:p14="http://schemas.microsoft.com/office/powerpoint/2010/main" w="9525">
+                <a14:hiddenLine xmlns:p14="http://schemas.microsoft.com/office/powerpoint/2010/main" xmlns:a14="http://schemas.microsoft.com/office/drawing/2010/main" xmlns:a16="http://schemas.microsoft.com/office/drawing/2014/main" xmlns="" w="9525">
                   <a:solidFill>
                     <a:srgbClr val="000000"/>
                   </a:solidFill>
@@ -36721,7 +37080,7 @@
             </a:ln>
             <a:extLst>
               <a:ext uri="{91240B29-F687-4f45-9708-019B960494DF}">
-                <a14:hiddenLine xmlns="" xmlns:a16="http://schemas.microsoft.com/office/drawing/2014/main" xmlns:a14="http://schemas.microsoft.com/office/drawing/2010/main" xmlns:p14="http://schemas.microsoft.com/office/powerpoint/2010/main" w="9525">
+                <a14:hiddenLine xmlns:p14="http://schemas.microsoft.com/office/powerpoint/2010/main" xmlns:a14="http://schemas.microsoft.com/office/drawing/2010/main" xmlns:a16="http://schemas.microsoft.com/office/drawing/2014/main" xmlns="" w="9525">
                   <a:solidFill>
                     <a:srgbClr val="000000"/>
                   </a:solidFill>
@@ -36833,7 +37192,7 @@
             </a:ln>
             <a:extLst>
               <a:ext uri="{91240B29-F687-4f45-9708-019B960494DF}">
-                <a14:hiddenLine xmlns="" xmlns:a16="http://schemas.microsoft.com/office/drawing/2014/main" xmlns:a14="http://schemas.microsoft.com/office/drawing/2010/main" xmlns:p14="http://schemas.microsoft.com/office/powerpoint/2010/main" w="9525">
+                <a14:hiddenLine xmlns:p14="http://schemas.microsoft.com/office/powerpoint/2010/main" xmlns:a14="http://schemas.microsoft.com/office/drawing/2010/main" xmlns:a16="http://schemas.microsoft.com/office/drawing/2014/main" xmlns="" w="9525">
                   <a:solidFill>
                     <a:srgbClr val="000000"/>
                   </a:solidFill>
@@ -36917,7 +37276,7 @@
             </a:ln>
             <a:extLst>
               <a:ext uri="{91240B29-F687-4f45-9708-019B960494DF}">
-                <a14:hiddenLine xmlns="" xmlns:a16="http://schemas.microsoft.com/office/drawing/2014/main" xmlns:a14="http://schemas.microsoft.com/office/drawing/2010/main" xmlns:p14="http://schemas.microsoft.com/office/powerpoint/2010/main" w="9525">
+                <a14:hiddenLine xmlns:p14="http://schemas.microsoft.com/office/powerpoint/2010/main" xmlns:a14="http://schemas.microsoft.com/office/drawing/2010/main" xmlns:a16="http://schemas.microsoft.com/office/drawing/2014/main" xmlns="" w="9525">
                   <a:solidFill>
                     <a:srgbClr val="000000"/>
                   </a:solidFill>
@@ -37059,7 +37418,7 @@
             </a:ln>
             <a:extLst>
               <a:ext uri="{91240B29-F687-4f45-9708-019B960494DF}">
-                <a14:hiddenLine xmlns="" xmlns:a16="http://schemas.microsoft.com/office/drawing/2014/main" xmlns:a14="http://schemas.microsoft.com/office/drawing/2010/main" xmlns:p14="http://schemas.microsoft.com/office/powerpoint/2010/main" w="9525">
+                <a14:hiddenLine xmlns:p14="http://schemas.microsoft.com/office/powerpoint/2010/main" xmlns:a14="http://schemas.microsoft.com/office/drawing/2010/main" xmlns:a16="http://schemas.microsoft.com/office/drawing/2014/main" xmlns="" w="9525">
                   <a:solidFill>
                     <a:srgbClr val="000000"/>
                   </a:solidFill>
@@ -37149,7 +37508,7 @@
             </a:ln>
             <a:extLst>
               <a:ext uri="{91240B29-F687-4f45-9708-019B960494DF}">
-                <a14:hiddenLine xmlns="" xmlns:a16="http://schemas.microsoft.com/office/drawing/2014/main" xmlns:a14="http://schemas.microsoft.com/office/drawing/2010/main" xmlns:p14="http://schemas.microsoft.com/office/powerpoint/2010/main" w="9525">
+                <a14:hiddenLine xmlns:p14="http://schemas.microsoft.com/office/powerpoint/2010/main" xmlns:a14="http://schemas.microsoft.com/office/drawing/2010/main" xmlns:a16="http://schemas.microsoft.com/office/drawing/2014/main" xmlns="" w="9525">
                   <a:solidFill>
                     <a:srgbClr val="000000"/>
                   </a:solidFill>
@@ -37261,7 +37620,7 @@
             </a:ln>
             <a:extLst>
               <a:ext uri="{91240B29-F687-4f45-9708-019B960494DF}">
-                <a14:hiddenLine xmlns="" xmlns:a16="http://schemas.microsoft.com/office/drawing/2014/main" xmlns:a14="http://schemas.microsoft.com/office/drawing/2010/main" xmlns:p14="http://schemas.microsoft.com/office/powerpoint/2010/main" w="9525">
+                <a14:hiddenLine xmlns:p14="http://schemas.microsoft.com/office/powerpoint/2010/main" xmlns:a14="http://schemas.microsoft.com/office/drawing/2010/main" xmlns:a16="http://schemas.microsoft.com/office/drawing/2014/main" xmlns="" w="9525">
                   <a:solidFill>
                     <a:srgbClr val="000000"/>
                   </a:solidFill>
@@ -37844,13 +38203,13 @@
   <p:clrMapOvr>
     <a:masterClrMapping/>
   </p:clrMapOvr>
-  <mc:AlternateContent xmlns:mc="http://schemas.openxmlformats.org/markup-compatibility/2006">
-    <mc:Choice xmlns:p14="http://schemas.microsoft.com/office/powerpoint/2010/main" Requires="p14">
+  <mc:AlternateContent xmlns:mc="http://schemas.openxmlformats.org/markup-compatibility/2006" xmlns:p14="http://schemas.microsoft.com/office/powerpoint/2010/main">
+    <mc:Choice Requires="p14">
       <p:transition spd="slow" p14:dur="800">
         <p:circle/>
       </p:transition>
     </mc:Choice>
-    <mc:Fallback>
+    <mc:Fallback xmlns="">
       <p:transition spd="slow">
         <p:circle/>
       </p:transition>
@@ -38244,13 +38603,13 @@
   <p:clrMapOvr>
     <a:masterClrMapping/>
   </p:clrMapOvr>
-  <mc:AlternateContent xmlns:mc="http://schemas.openxmlformats.org/markup-compatibility/2006">
-    <mc:Choice xmlns:p15="http://schemas.microsoft.com/office/powerpoint/2012/main" Requires="p15">
+  <mc:AlternateContent xmlns:mc="http://schemas.openxmlformats.org/markup-compatibility/2006" xmlns:p15="http://schemas.microsoft.com/office/powerpoint/2012/main">
+    <mc:Choice Requires="p15">
       <p:transition xmlns:p14="http://schemas.microsoft.com/office/powerpoint/2010/main" spd="slow" p14:dur="2000">
         <p15:prstTrans prst="prestige"/>
       </p:transition>
     </mc:Choice>
-    <mc:Fallback>
+    <mc:Fallback xmlns="">
       <p:transition spd="slow">
         <p:fade/>
       </p:transition>
@@ -39138,13 +39497,13 @@
   <p:clrMapOvr>
     <a:masterClrMapping/>
   </p:clrMapOvr>
-  <mc:AlternateContent xmlns:mc="http://schemas.openxmlformats.org/markup-compatibility/2006">
-    <mc:Choice xmlns:p14="http://schemas.microsoft.com/office/powerpoint/2010/main" Requires="p14">
+  <mc:AlternateContent xmlns:mc="http://schemas.openxmlformats.org/markup-compatibility/2006" xmlns:p14="http://schemas.microsoft.com/office/powerpoint/2010/main">
+    <mc:Choice Requires="p14">
       <p:transition spd="slow" p14:dur="1600">
         <p14:gallery dir="l"/>
       </p:transition>
     </mc:Choice>
-    <mc:Fallback>
+    <mc:Fallback xmlns="">
       <p:transition spd="slow">
         <p:fade/>
       </p:transition>
@@ -39831,13 +40190,13 @@
   <p:clrMapOvr>
     <a:masterClrMapping/>
   </p:clrMapOvr>
-  <mc:AlternateContent xmlns:mc="http://schemas.openxmlformats.org/markup-compatibility/2006">
-    <mc:Choice xmlns:p14="http://schemas.microsoft.com/office/powerpoint/2010/main" Requires="p14">
+  <mc:AlternateContent xmlns:mc="http://schemas.openxmlformats.org/markup-compatibility/2006" xmlns:p14="http://schemas.microsoft.com/office/powerpoint/2010/main">
+    <mc:Choice Requires="p14">
       <p:transition spd="slow" p14:dur="1600">
         <p14:prism isInverted="1"/>
       </p:transition>
     </mc:Choice>
-    <mc:Fallback>
+    <mc:Fallback xmlns="">
       <p:transition spd="slow">
         <p:fade/>
       </p:transition>
@@ -40837,7 +41196,7 @@
           <a:noFill/>
           <a:extLst>
             <a:ext uri="{909E8E84-426E-40dd-AFC4-6F175D3DCCD1}">
-              <a14:hiddenFill xmlns="" xmlns:a16="http://schemas.microsoft.com/office/drawing/2014/main" xmlns:p14="http://schemas.microsoft.com/office/powerpoint/2010/main" xmlns:a14="http://schemas.microsoft.com/office/drawing/2010/main">
+              <a14:hiddenFill xmlns:a14="http://schemas.microsoft.com/office/drawing/2010/main" xmlns:p14="http://schemas.microsoft.com/office/powerpoint/2010/main" xmlns:a16="http://schemas.microsoft.com/office/drawing/2014/main" xmlns="">
                 <a:solidFill>
                   <a:srgbClr val="FFFFFF"/>
                 </a:solidFill>
@@ -41341,7 +41700,7 @@
               <a:rPr lang="hr-HR" altLang="en-US" sz="2000" dirty="0">
                 <a:latin typeface="Arial" panose="020B0604020202020204" pitchFamily="34" charset="0"/>
               </a:rPr>
-              <a:t> za lakše uklapanje</a:t>
+              <a:t>(uz umjetnu inteligenciju) za lakše uklapanje</a:t>
             </a:r>
             <a:endParaRPr kumimoji="0" lang="en-US" altLang="en-US" sz="2000" b="0" i="0" u="none" strike="noStrike" cap="none" normalizeH="0" baseline="0" dirty="0">
               <a:ln>
@@ -41502,7 +41861,7 @@
             </a:ln>
             <a:extLst>
               <a:ext uri="{91240B29-F687-4f45-9708-019B960494DF}">
-                <a14:hiddenLine xmlns="" xmlns:a16="http://schemas.microsoft.com/office/drawing/2014/main" xmlns:p14="http://schemas.microsoft.com/office/powerpoint/2010/main" xmlns:a14="http://schemas.microsoft.com/office/drawing/2010/main" w="9525">
+                <a14:hiddenLine xmlns:a14="http://schemas.microsoft.com/office/drawing/2010/main" xmlns:p14="http://schemas.microsoft.com/office/powerpoint/2010/main" xmlns:a16="http://schemas.microsoft.com/office/drawing/2014/main" xmlns="" w="9525">
                   <a:solidFill>
                     <a:srgbClr val="000000"/>
                   </a:solidFill>
@@ -41614,7 +41973,7 @@
             </a:ln>
             <a:extLst>
               <a:ext uri="{91240B29-F687-4f45-9708-019B960494DF}">
-                <a14:hiddenLine xmlns="" xmlns:a16="http://schemas.microsoft.com/office/drawing/2014/main" xmlns:p14="http://schemas.microsoft.com/office/powerpoint/2010/main" xmlns:a14="http://schemas.microsoft.com/office/drawing/2010/main" w="9525">
+                <a14:hiddenLine xmlns:a14="http://schemas.microsoft.com/office/drawing/2010/main" xmlns:p14="http://schemas.microsoft.com/office/powerpoint/2010/main" xmlns:a16="http://schemas.microsoft.com/office/drawing/2014/main" xmlns="" w="9525">
                   <a:solidFill>
                     <a:srgbClr val="000000"/>
                   </a:solidFill>
@@ -41726,7 +42085,7 @@
             </a:ln>
             <a:extLst>
               <a:ext uri="{91240B29-F687-4f45-9708-019B960494DF}">
-                <a14:hiddenLine xmlns="" xmlns:a16="http://schemas.microsoft.com/office/drawing/2014/main" xmlns:p14="http://schemas.microsoft.com/office/powerpoint/2010/main" xmlns:a14="http://schemas.microsoft.com/office/drawing/2010/main" w="9525">
+                <a14:hiddenLine xmlns:a14="http://schemas.microsoft.com/office/drawing/2010/main" xmlns:p14="http://schemas.microsoft.com/office/powerpoint/2010/main" xmlns:a16="http://schemas.microsoft.com/office/drawing/2014/main" xmlns="" w="9525">
                   <a:solidFill>
                     <a:srgbClr val="000000"/>
                   </a:solidFill>
@@ -41810,7 +42169,7 @@
             </a:ln>
             <a:extLst>
               <a:ext uri="{91240B29-F687-4f45-9708-019B960494DF}">
-                <a14:hiddenLine xmlns="" xmlns:a16="http://schemas.microsoft.com/office/drawing/2014/main" xmlns:p14="http://schemas.microsoft.com/office/powerpoint/2010/main" xmlns:a14="http://schemas.microsoft.com/office/drawing/2010/main" w="9525">
+                <a14:hiddenLine xmlns:a14="http://schemas.microsoft.com/office/drawing/2010/main" xmlns:p14="http://schemas.microsoft.com/office/powerpoint/2010/main" xmlns:a16="http://schemas.microsoft.com/office/drawing/2014/main" xmlns="" w="9525">
                   <a:solidFill>
                     <a:srgbClr val="000000"/>
                   </a:solidFill>
@@ -41922,7 +42281,7 @@
             </a:ln>
             <a:extLst>
               <a:ext uri="{91240B29-F687-4f45-9708-019B960494DF}">
-                <a14:hiddenLine xmlns="" xmlns:a16="http://schemas.microsoft.com/office/drawing/2014/main" xmlns:p14="http://schemas.microsoft.com/office/powerpoint/2010/main" xmlns:a14="http://schemas.microsoft.com/office/drawing/2010/main" w="9525">
+                <a14:hiddenLine xmlns:a14="http://schemas.microsoft.com/office/drawing/2010/main" xmlns:p14="http://schemas.microsoft.com/office/powerpoint/2010/main" xmlns:a16="http://schemas.microsoft.com/office/drawing/2014/main" xmlns="" w="9525">
                   <a:solidFill>
                     <a:srgbClr val="000000"/>
                   </a:solidFill>
@@ -42006,7 +42365,7 @@
             </a:ln>
             <a:extLst>
               <a:ext uri="{91240B29-F687-4f45-9708-019B960494DF}">
-                <a14:hiddenLine xmlns="" xmlns:a16="http://schemas.microsoft.com/office/drawing/2014/main" xmlns:p14="http://schemas.microsoft.com/office/powerpoint/2010/main" xmlns:a14="http://schemas.microsoft.com/office/drawing/2010/main" w="9525">
+                <a14:hiddenLine xmlns:a14="http://schemas.microsoft.com/office/drawing/2010/main" xmlns:p14="http://schemas.microsoft.com/office/powerpoint/2010/main" xmlns:a16="http://schemas.microsoft.com/office/drawing/2014/main" xmlns="" w="9525">
                   <a:solidFill>
                     <a:srgbClr val="000000"/>
                   </a:solidFill>
@@ -42090,7 +42449,7 @@
             </a:ln>
             <a:extLst>
               <a:ext uri="{91240B29-F687-4f45-9708-019B960494DF}">
-                <a14:hiddenLine xmlns="" xmlns:a16="http://schemas.microsoft.com/office/drawing/2014/main" xmlns:p14="http://schemas.microsoft.com/office/powerpoint/2010/main" xmlns:a14="http://schemas.microsoft.com/office/drawing/2010/main" w="9525">
+                <a14:hiddenLine xmlns:a14="http://schemas.microsoft.com/office/drawing/2010/main" xmlns:p14="http://schemas.microsoft.com/office/powerpoint/2010/main" xmlns:a16="http://schemas.microsoft.com/office/drawing/2014/main" xmlns="" w="9525">
                   <a:solidFill>
                     <a:srgbClr val="000000"/>
                   </a:solidFill>
@@ -42202,7 +42561,7 @@
             </a:ln>
             <a:extLst>
               <a:ext uri="{91240B29-F687-4f45-9708-019B960494DF}">
-                <a14:hiddenLine xmlns="" xmlns:a16="http://schemas.microsoft.com/office/drawing/2014/main" xmlns:p14="http://schemas.microsoft.com/office/powerpoint/2010/main" xmlns:a14="http://schemas.microsoft.com/office/drawing/2010/main" w="9525">
+                <a14:hiddenLine xmlns:a14="http://schemas.microsoft.com/office/drawing/2010/main" xmlns:p14="http://schemas.microsoft.com/office/powerpoint/2010/main" xmlns:a16="http://schemas.microsoft.com/office/drawing/2014/main" xmlns="" w="9525">
                   <a:solidFill>
                     <a:srgbClr val="000000"/>
                   </a:solidFill>
@@ -42314,7 +42673,7 @@
             </a:ln>
             <a:extLst>
               <a:ext uri="{91240B29-F687-4f45-9708-019B960494DF}">
-                <a14:hiddenLine xmlns="" xmlns:a16="http://schemas.microsoft.com/office/drawing/2014/main" xmlns:p14="http://schemas.microsoft.com/office/powerpoint/2010/main" xmlns:a14="http://schemas.microsoft.com/office/drawing/2010/main" w="9525">
+                <a14:hiddenLine xmlns:a14="http://schemas.microsoft.com/office/drawing/2010/main" xmlns:p14="http://schemas.microsoft.com/office/powerpoint/2010/main" xmlns:a16="http://schemas.microsoft.com/office/drawing/2014/main" xmlns="" w="9525">
                   <a:solidFill>
                     <a:srgbClr val="000000"/>
                   </a:solidFill>
@@ -42398,7 +42757,7 @@
             </a:ln>
             <a:extLst>
               <a:ext uri="{91240B29-F687-4f45-9708-019B960494DF}">
-                <a14:hiddenLine xmlns="" xmlns:a16="http://schemas.microsoft.com/office/drawing/2014/main" xmlns:p14="http://schemas.microsoft.com/office/powerpoint/2010/main" xmlns:a14="http://schemas.microsoft.com/office/drawing/2010/main" w="9525">
+                <a14:hiddenLine xmlns:a14="http://schemas.microsoft.com/office/drawing/2010/main" xmlns:p14="http://schemas.microsoft.com/office/powerpoint/2010/main" xmlns:a16="http://schemas.microsoft.com/office/drawing/2014/main" xmlns="" w="9525">
                   <a:solidFill>
                     <a:srgbClr val="000000"/>
                   </a:solidFill>
@@ -42530,7 +42889,7 @@
             </a:ln>
             <a:extLst>
               <a:ext uri="{91240B29-F687-4f45-9708-019B960494DF}">
-                <a14:hiddenLine xmlns="" xmlns:a16="http://schemas.microsoft.com/office/drawing/2014/main" xmlns:p14="http://schemas.microsoft.com/office/powerpoint/2010/main" xmlns:a14="http://schemas.microsoft.com/office/drawing/2010/main" w="9525">
+                <a14:hiddenLine xmlns:a14="http://schemas.microsoft.com/office/drawing/2010/main" xmlns:p14="http://schemas.microsoft.com/office/powerpoint/2010/main" xmlns:a16="http://schemas.microsoft.com/office/drawing/2014/main" xmlns="" w="9525">
                   <a:solidFill>
                     <a:srgbClr val="000000"/>
                   </a:solidFill>
@@ -42658,7 +43017,7 @@
             </a:ln>
             <a:extLst>
               <a:ext uri="{91240B29-F687-4f45-9708-019B960494DF}">
-                <a14:hiddenLine xmlns="" xmlns:a16="http://schemas.microsoft.com/office/drawing/2014/main" xmlns:p14="http://schemas.microsoft.com/office/powerpoint/2010/main" xmlns:a14="http://schemas.microsoft.com/office/drawing/2010/main" w="9525">
+                <a14:hiddenLine xmlns:a14="http://schemas.microsoft.com/office/drawing/2010/main" xmlns:p14="http://schemas.microsoft.com/office/powerpoint/2010/main" xmlns:a16="http://schemas.microsoft.com/office/drawing/2014/main" xmlns="" w="9525">
                   <a:solidFill>
                     <a:srgbClr val="000000"/>
                   </a:solidFill>
@@ -42742,7 +43101,7 @@
             </a:ln>
             <a:extLst>
               <a:ext uri="{91240B29-F687-4f45-9708-019B960494DF}">
-                <a14:hiddenLine xmlns="" xmlns:a16="http://schemas.microsoft.com/office/drawing/2014/main" xmlns:p14="http://schemas.microsoft.com/office/powerpoint/2010/main" xmlns:a14="http://schemas.microsoft.com/office/drawing/2010/main" w="9525">
+                <a14:hiddenLine xmlns:a14="http://schemas.microsoft.com/office/drawing/2010/main" xmlns:p14="http://schemas.microsoft.com/office/powerpoint/2010/main" xmlns:a16="http://schemas.microsoft.com/office/drawing/2014/main" xmlns="" w="9525">
                   <a:solidFill>
                     <a:srgbClr val="000000"/>
                   </a:solidFill>
@@ -42826,7 +43185,7 @@
             </a:ln>
             <a:extLst>
               <a:ext uri="{91240B29-F687-4f45-9708-019B960494DF}">
-                <a14:hiddenLine xmlns="" xmlns:a16="http://schemas.microsoft.com/office/drawing/2014/main" xmlns:p14="http://schemas.microsoft.com/office/powerpoint/2010/main" xmlns:a14="http://schemas.microsoft.com/office/drawing/2010/main" w="9525">
+                <a14:hiddenLine xmlns:a14="http://schemas.microsoft.com/office/drawing/2010/main" xmlns:p14="http://schemas.microsoft.com/office/powerpoint/2010/main" xmlns:a16="http://schemas.microsoft.com/office/drawing/2014/main" xmlns="" w="9525">
                   <a:solidFill>
                     <a:srgbClr val="000000"/>
                   </a:solidFill>
@@ -42938,7 +43297,7 @@
             </a:ln>
             <a:extLst>
               <a:ext uri="{91240B29-F687-4f45-9708-019B960494DF}">
-                <a14:hiddenLine xmlns="" xmlns:a16="http://schemas.microsoft.com/office/drawing/2014/main" xmlns:p14="http://schemas.microsoft.com/office/powerpoint/2010/main" xmlns:a14="http://schemas.microsoft.com/office/drawing/2010/main" w="9525">
+                <a14:hiddenLine xmlns:a14="http://schemas.microsoft.com/office/drawing/2010/main" xmlns:p14="http://schemas.microsoft.com/office/powerpoint/2010/main" xmlns:a16="http://schemas.microsoft.com/office/drawing/2014/main" xmlns="" w="9525">
                   <a:solidFill>
                     <a:srgbClr val="000000"/>
                   </a:solidFill>
@@ -42994,7 +43353,7 @@
             </a:ln>
             <a:extLst>
               <a:ext uri="{91240B29-F687-4f45-9708-019B960494DF}">
-                <a14:hiddenLine xmlns="" xmlns:a16="http://schemas.microsoft.com/office/drawing/2014/main" xmlns:p14="http://schemas.microsoft.com/office/powerpoint/2010/main" xmlns:a14="http://schemas.microsoft.com/office/drawing/2010/main" w="9525">
+                <a14:hiddenLine xmlns:a14="http://schemas.microsoft.com/office/drawing/2010/main" xmlns:p14="http://schemas.microsoft.com/office/powerpoint/2010/main" xmlns:a16="http://schemas.microsoft.com/office/drawing/2014/main" xmlns="" w="9525">
                   <a:solidFill>
                     <a:srgbClr val="000000"/>
                   </a:solidFill>
@@ -43081,7 +43440,7 @@
             </a:ln>
             <a:extLst>
               <a:ext uri="{91240B29-F687-4f45-9708-019B960494DF}">
-                <a14:hiddenLine xmlns="" xmlns:a16="http://schemas.microsoft.com/office/drawing/2014/main" xmlns:p14="http://schemas.microsoft.com/office/powerpoint/2010/main" xmlns:a14="http://schemas.microsoft.com/office/drawing/2010/main" w="9525">
+                <a14:hiddenLine xmlns:a14="http://schemas.microsoft.com/office/drawing/2010/main" xmlns:p14="http://schemas.microsoft.com/office/powerpoint/2010/main" xmlns:a16="http://schemas.microsoft.com/office/drawing/2014/main" xmlns="" w="9525">
                   <a:solidFill>
                     <a:srgbClr val="000000"/>
                   </a:solidFill>
@@ -43193,7 +43552,7 @@
             </a:ln>
             <a:extLst>
               <a:ext uri="{91240B29-F687-4f45-9708-019B960494DF}">
-                <a14:hiddenLine xmlns="" xmlns:a16="http://schemas.microsoft.com/office/drawing/2014/main" xmlns:p14="http://schemas.microsoft.com/office/powerpoint/2010/main" xmlns:a14="http://schemas.microsoft.com/office/drawing/2010/main" w="9525">
+                <a14:hiddenLine xmlns:a14="http://schemas.microsoft.com/office/drawing/2010/main" xmlns:p14="http://schemas.microsoft.com/office/powerpoint/2010/main" xmlns:a16="http://schemas.microsoft.com/office/drawing/2014/main" xmlns="" w="9525">
                   <a:solidFill>
                     <a:srgbClr val="000000"/>
                   </a:solidFill>
@@ -43277,7 +43636,7 @@
             </a:ln>
             <a:extLst>
               <a:ext uri="{91240B29-F687-4f45-9708-019B960494DF}">
-                <a14:hiddenLine xmlns="" xmlns:a16="http://schemas.microsoft.com/office/drawing/2014/main" xmlns:p14="http://schemas.microsoft.com/office/powerpoint/2010/main" xmlns:a14="http://schemas.microsoft.com/office/drawing/2010/main" w="9525">
+                <a14:hiddenLine xmlns:a14="http://schemas.microsoft.com/office/drawing/2010/main" xmlns:p14="http://schemas.microsoft.com/office/powerpoint/2010/main" xmlns:a16="http://schemas.microsoft.com/office/drawing/2014/main" xmlns="" w="9525">
                   <a:solidFill>
                     <a:srgbClr val="000000"/>
                   </a:solidFill>
@@ -43389,7 +43748,7 @@
             </a:ln>
             <a:extLst>
               <a:ext uri="{91240B29-F687-4f45-9708-019B960494DF}">
-                <a14:hiddenLine xmlns="" xmlns:a16="http://schemas.microsoft.com/office/drawing/2014/main" xmlns:p14="http://schemas.microsoft.com/office/powerpoint/2010/main" xmlns:a14="http://schemas.microsoft.com/office/drawing/2010/main" w="9525">
+                <a14:hiddenLine xmlns:a14="http://schemas.microsoft.com/office/drawing/2010/main" xmlns:p14="http://schemas.microsoft.com/office/powerpoint/2010/main" xmlns:a16="http://schemas.microsoft.com/office/drawing/2014/main" xmlns="" w="9525">
                   <a:solidFill>
                     <a:srgbClr val="000000"/>
                   </a:solidFill>
@@ -43476,7 +43835,7 @@
             </a:ln>
             <a:extLst>
               <a:ext uri="{91240B29-F687-4f45-9708-019B960494DF}">
-                <a14:hiddenLine xmlns="" xmlns:a16="http://schemas.microsoft.com/office/drawing/2014/main" xmlns:p14="http://schemas.microsoft.com/office/powerpoint/2010/main" xmlns:a14="http://schemas.microsoft.com/office/drawing/2010/main" w="9525">
+                <a14:hiddenLine xmlns:a14="http://schemas.microsoft.com/office/drawing/2010/main" xmlns:p14="http://schemas.microsoft.com/office/powerpoint/2010/main" xmlns:a16="http://schemas.microsoft.com/office/drawing/2014/main" xmlns="" w="9525">
                   <a:solidFill>
                     <a:srgbClr val="000000"/>
                   </a:solidFill>
@@ -43560,7 +43919,7 @@
             </a:ln>
             <a:extLst>
               <a:ext uri="{91240B29-F687-4f45-9708-019B960494DF}">
-                <a14:hiddenLine xmlns="" xmlns:a16="http://schemas.microsoft.com/office/drawing/2014/main" xmlns:p14="http://schemas.microsoft.com/office/powerpoint/2010/main" xmlns:a14="http://schemas.microsoft.com/office/drawing/2010/main" w="9525">
+                <a14:hiddenLine xmlns:a14="http://schemas.microsoft.com/office/drawing/2010/main" xmlns:p14="http://schemas.microsoft.com/office/powerpoint/2010/main" xmlns:a16="http://schemas.microsoft.com/office/drawing/2014/main" xmlns="" w="9525">
                   <a:solidFill>
                     <a:srgbClr val="000000"/>
                   </a:solidFill>
@@ -43672,7 +44031,7 @@
             </a:ln>
             <a:extLst>
               <a:ext uri="{91240B29-F687-4f45-9708-019B960494DF}">
-                <a14:hiddenLine xmlns="" xmlns:a16="http://schemas.microsoft.com/office/drawing/2014/main" xmlns:p14="http://schemas.microsoft.com/office/powerpoint/2010/main" xmlns:a14="http://schemas.microsoft.com/office/drawing/2010/main" w="9525">
+                <a14:hiddenLine xmlns:a14="http://schemas.microsoft.com/office/drawing/2010/main" xmlns:p14="http://schemas.microsoft.com/office/powerpoint/2010/main" xmlns:a16="http://schemas.microsoft.com/office/drawing/2014/main" xmlns="" w="9525">
                   <a:solidFill>
                     <a:srgbClr val="000000"/>
                   </a:solidFill>
@@ -43784,7 +44143,7 @@
             </a:ln>
             <a:extLst>
               <a:ext uri="{91240B29-F687-4f45-9708-019B960494DF}">
-                <a14:hiddenLine xmlns="" xmlns:a16="http://schemas.microsoft.com/office/drawing/2014/main" xmlns:p14="http://schemas.microsoft.com/office/powerpoint/2010/main" xmlns:a14="http://schemas.microsoft.com/office/drawing/2010/main" w="9525">
+                <a14:hiddenLine xmlns:a14="http://schemas.microsoft.com/office/drawing/2010/main" xmlns:p14="http://schemas.microsoft.com/office/powerpoint/2010/main" xmlns:a16="http://schemas.microsoft.com/office/drawing/2014/main" xmlns="" w="9525">
                   <a:solidFill>
                     <a:srgbClr val="000000"/>
                   </a:solidFill>
@@ -43871,7 +44230,7 @@
             </a:ln>
             <a:extLst>
               <a:ext uri="{91240B29-F687-4f45-9708-019B960494DF}">
-                <a14:hiddenLine xmlns="" xmlns:a16="http://schemas.microsoft.com/office/drawing/2014/main" xmlns:p14="http://schemas.microsoft.com/office/powerpoint/2010/main" xmlns:a14="http://schemas.microsoft.com/office/drawing/2010/main" w="9525">
+                <a14:hiddenLine xmlns:a14="http://schemas.microsoft.com/office/drawing/2010/main" xmlns:p14="http://schemas.microsoft.com/office/powerpoint/2010/main" xmlns:a16="http://schemas.microsoft.com/office/drawing/2014/main" xmlns="" w="9525">
                   <a:solidFill>
                     <a:srgbClr val="000000"/>
                   </a:solidFill>
@@ -44013,7 +44372,7 @@
             </a:ln>
             <a:extLst>
               <a:ext uri="{91240B29-F687-4f45-9708-019B960494DF}">
-                <a14:hiddenLine xmlns="" xmlns:a16="http://schemas.microsoft.com/office/drawing/2014/main" xmlns:p14="http://schemas.microsoft.com/office/powerpoint/2010/main" xmlns:a14="http://schemas.microsoft.com/office/drawing/2010/main" w="9525">
+                <a14:hiddenLine xmlns:a14="http://schemas.microsoft.com/office/drawing/2010/main" xmlns:p14="http://schemas.microsoft.com/office/powerpoint/2010/main" xmlns:a16="http://schemas.microsoft.com/office/drawing/2014/main" xmlns="" w="9525">
                   <a:solidFill>
                     <a:srgbClr val="000000"/>
                   </a:solidFill>
@@ -44043,13 +44402,13 @@
   <p:clrMapOvr>
     <a:masterClrMapping/>
   </p:clrMapOvr>
-  <mc:AlternateContent xmlns:mc="http://schemas.openxmlformats.org/markup-compatibility/2006">
-    <mc:Choice xmlns:p14="http://schemas.microsoft.com/office/powerpoint/2010/main" Requires="p14">
+  <mc:AlternateContent xmlns:mc="http://schemas.openxmlformats.org/markup-compatibility/2006" xmlns:p14="http://schemas.microsoft.com/office/powerpoint/2010/main">
+    <mc:Choice Requires="p14">
       <p:transition spd="slow" p14:dur="1500">
         <p:split orient="vert"/>
       </p:transition>
     </mc:Choice>
-    <mc:Fallback>
+    <mc:Fallback xmlns="">
       <p:transition spd="slow">
         <p:split orient="vert"/>
       </p:transition>
@@ -44581,7 +44940,7 @@
             <a:noFill/>
             <a:extLst>
               <a:ext uri="{909E8E84-426E-40dd-AFC4-6F175D3DCCD1}">
-                <a14:hiddenFill xmlns="" xmlns:a16="http://schemas.microsoft.com/office/drawing/2014/main" xmlns:a14="http://schemas.microsoft.com/office/drawing/2010/main" xmlns:p14="http://schemas.microsoft.com/office/powerpoint/2010/main">
+                <a14:hiddenFill xmlns:p14="http://schemas.microsoft.com/office/powerpoint/2010/main" xmlns:a14="http://schemas.microsoft.com/office/drawing/2010/main" xmlns:a16="http://schemas.microsoft.com/office/drawing/2014/main" xmlns="">
                   <a:solidFill>
                     <a:srgbClr val="FFFFFF"/>
                   </a:solidFill>
@@ -44701,7 +45060,7 @@
             </a:ln>
             <a:extLst>
               <a:ext uri="{91240B29-F687-4f45-9708-019B960494DF}">
-                <a14:hiddenLine xmlns="" xmlns:a16="http://schemas.microsoft.com/office/drawing/2014/main" xmlns:a14="http://schemas.microsoft.com/office/drawing/2010/main" xmlns:p14="http://schemas.microsoft.com/office/powerpoint/2010/main" w="9525">
+                <a14:hiddenLine xmlns:p14="http://schemas.microsoft.com/office/powerpoint/2010/main" xmlns:a14="http://schemas.microsoft.com/office/drawing/2010/main" xmlns:a16="http://schemas.microsoft.com/office/drawing/2014/main" xmlns="" w="9525">
                   <a:solidFill>
                     <a:srgbClr val="000000"/>
                   </a:solidFill>
@@ -44813,7 +45172,7 @@
             </a:ln>
             <a:extLst>
               <a:ext uri="{91240B29-F687-4f45-9708-019B960494DF}">
-                <a14:hiddenLine xmlns="" xmlns:a16="http://schemas.microsoft.com/office/drawing/2014/main" xmlns:a14="http://schemas.microsoft.com/office/drawing/2010/main" xmlns:p14="http://schemas.microsoft.com/office/powerpoint/2010/main" w="9525">
+                <a14:hiddenLine xmlns:p14="http://schemas.microsoft.com/office/powerpoint/2010/main" xmlns:a14="http://schemas.microsoft.com/office/drawing/2010/main" xmlns:a16="http://schemas.microsoft.com/office/drawing/2014/main" xmlns="" w="9525">
                   <a:solidFill>
                     <a:srgbClr val="000000"/>
                   </a:solidFill>
@@ -44925,7 +45284,7 @@
             </a:ln>
             <a:extLst>
               <a:ext uri="{91240B29-F687-4f45-9708-019B960494DF}">
-                <a14:hiddenLine xmlns="" xmlns:a16="http://schemas.microsoft.com/office/drawing/2014/main" xmlns:a14="http://schemas.microsoft.com/office/drawing/2010/main" xmlns:p14="http://schemas.microsoft.com/office/powerpoint/2010/main" w="9525">
+                <a14:hiddenLine xmlns:p14="http://schemas.microsoft.com/office/powerpoint/2010/main" xmlns:a14="http://schemas.microsoft.com/office/drawing/2010/main" xmlns:a16="http://schemas.microsoft.com/office/drawing/2014/main" xmlns="" w="9525">
                   <a:solidFill>
                     <a:srgbClr val="000000"/>
                   </a:solidFill>
@@ -44981,7 +45340,7 @@
             </a:ln>
             <a:extLst>
               <a:ext uri="{91240B29-F687-4f45-9708-019B960494DF}">
-                <a14:hiddenLine xmlns="" xmlns:a16="http://schemas.microsoft.com/office/drawing/2014/main" xmlns:a14="http://schemas.microsoft.com/office/drawing/2010/main" xmlns:p14="http://schemas.microsoft.com/office/powerpoint/2010/main" w="9525">
+                <a14:hiddenLine xmlns:p14="http://schemas.microsoft.com/office/powerpoint/2010/main" xmlns:a14="http://schemas.microsoft.com/office/drawing/2010/main" xmlns:a16="http://schemas.microsoft.com/office/drawing/2014/main" xmlns="" w="9525">
                   <a:solidFill>
                     <a:srgbClr val="000000"/>
                   </a:solidFill>
@@ -45093,7 +45452,7 @@
             </a:ln>
             <a:extLst>
               <a:ext uri="{91240B29-F687-4f45-9708-019B960494DF}">
-                <a14:hiddenLine xmlns="" xmlns:a16="http://schemas.microsoft.com/office/drawing/2014/main" xmlns:a14="http://schemas.microsoft.com/office/drawing/2010/main" xmlns:p14="http://schemas.microsoft.com/office/powerpoint/2010/main" w="9525">
+                <a14:hiddenLine xmlns:p14="http://schemas.microsoft.com/office/powerpoint/2010/main" xmlns:a14="http://schemas.microsoft.com/office/drawing/2010/main" xmlns:a16="http://schemas.microsoft.com/office/drawing/2014/main" xmlns="" w="9525">
                   <a:solidFill>
                     <a:srgbClr val="000000"/>
                   </a:solidFill>
@@ -45177,7 +45536,7 @@
             </a:ln>
             <a:extLst>
               <a:ext uri="{91240B29-F687-4f45-9708-019B960494DF}">
-                <a14:hiddenLine xmlns="" xmlns:a16="http://schemas.microsoft.com/office/drawing/2014/main" xmlns:a14="http://schemas.microsoft.com/office/drawing/2010/main" xmlns:p14="http://schemas.microsoft.com/office/powerpoint/2010/main" w="9525">
+                <a14:hiddenLine xmlns:p14="http://schemas.microsoft.com/office/powerpoint/2010/main" xmlns:a14="http://schemas.microsoft.com/office/drawing/2010/main" xmlns:a16="http://schemas.microsoft.com/office/drawing/2014/main" xmlns="" w="9525">
                   <a:solidFill>
                     <a:srgbClr val="000000"/>
                   </a:solidFill>
@@ -45261,7 +45620,7 @@
             </a:ln>
             <a:extLst>
               <a:ext uri="{91240B29-F687-4f45-9708-019B960494DF}">
-                <a14:hiddenLine xmlns="" xmlns:a16="http://schemas.microsoft.com/office/drawing/2014/main" xmlns:a14="http://schemas.microsoft.com/office/drawing/2010/main" xmlns:p14="http://schemas.microsoft.com/office/powerpoint/2010/main" w="9525">
+                <a14:hiddenLine xmlns:p14="http://schemas.microsoft.com/office/powerpoint/2010/main" xmlns:a14="http://schemas.microsoft.com/office/drawing/2010/main" xmlns:a16="http://schemas.microsoft.com/office/drawing/2014/main" xmlns="" w="9525">
                   <a:solidFill>
                     <a:srgbClr val="000000"/>
                   </a:solidFill>
@@ -45373,7 +45732,7 @@
             </a:ln>
             <a:extLst>
               <a:ext uri="{91240B29-F687-4f45-9708-019B960494DF}">
-                <a14:hiddenLine xmlns="" xmlns:a16="http://schemas.microsoft.com/office/drawing/2014/main" xmlns:a14="http://schemas.microsoft.com/office/drawing/2010/main" xmlns:p14="http://schemas.microsoft.com/office/powerpoint/2010/main" w="9525">
+                <a14:hiddenLine xmlns:p14="http://schemas.microsoft.com/office/powerpoint/2010/main" xmlns:a14="http://schemas.microsoft.com/office/drawing/2010/main" xmlns:a16="http://schemas.microsoft.com/office/drawing/2014/main" xmlns="" w="9525">
                   <a:solidFill>
                     <a:srgbClr val="000000"/>
                   </a:solidFill>
@@ -45457,7 +45816,7 @@
             </a:ln>
             <a:extLst>
               <a:ext uri="{91240B29-F687-4f45-9708-019B960494DF}">
-                <a14:hiddenLine xmlns="" xmlns:a16="http://schemas.microsoft.com/office/drawing/2014/main" xmlns:a14="http://schemas.microsoft.com/office/drawing/2010/main" xmlns:p14="http://schemas.microsoft.com/office/powerpoint/2010/main" w="9525">
+                <a14:hiddenLine xmlns:p14="http://schemas.microsoft.com/office/powerpoint/2010/main" xmlns:a14="http://schemas.microsoft.com/office/drawing/2010/main" xmlns:a16="http://schemas.microsoft.com/office/drawing/2014/main" xmlns="" w="9525">
                   <a:solidFill>
                     <a:srgbClr val="000000"/>
                   </a:solidFill>
@@ -45541,7 +45900,7 @@
             </a:ln>
             <a:extLst>
               <a:ext uri="{91240B29-F687-4f45-9708-019B960494DF}">
-                <a14:hiddenLine xmlns="" xmlns:a16="http://schemas.microsoft.com/office/drawing/2014/main" xmlns:a14="http://schemas.microsoft.com/office/drawing/2010/main" xmlns:p14="http://schemas.microsoft.com/office/powerpoint/2010/main" w="9525">
+                <a14:hiddenLine xmlns:p14="http://schemas.microsoft.com/office/powerpoint/2010/main" xmlns:a14="http://schemas.microsoft.com/office/drawing/2010/main" xmlns:a16="http://schemas.microsoft.com/office/drawing/2014/main" xmlns="" w="9525">
                   <a:solidFill>
                     <a:srgbClr val="000000"/>
                   </a:solidFill>
@@ -45653,7 +46012,7 @@
             </a:ln>
             <a:extLst>
               <a:ext uri="{91240B29-F687-4f45-9708-019B960494DF}">
-                <a14:hiddenLine xmlns="" xmlns:a16="http://schemas.microsoft.com/office/drawing/2014/main" xmlns:a14="http://schemas.microsoft.com/office/drawing/2010/main" xmlns:p14="http://schemas.microsoft.com/office/powerpoint/2010/main" w="9525">
+                <a14:hiddenLine xmlns:p14="http://schemas.microsoft.com/office/powerpoint/2010/main" xmlns:a14="http://schemas.microsoft.com/office/drawing/2010/main" xmlns:a16="http://schemas.microsoft.com/office/drawing/2014/main" xmlns="" w="9525">
                   <a:solidFill>
                     <a:srgbClr val="000000"/>
                   </a:solidFill>
@@ -45765,7 +46124,7 @@
             </a:ln>
             <a:extLst>
               <a:ext uri="{91240B29-F687-4f45-9708-019B960494DF}">
-                <a14:hiddenLine xmlns="" xmlns:a16="http://schemas.microsoft.com/office/drawing/2014/main" xmlns:a14="http://schemas.microsoft.com/office/drawing/2010/main" xmlns:p14="http://schemas.microsoft.com/office/powerpoint/2010/main" w="9525">
+                <a14:hiddenLine xmlns:p14="http://schemas.microsoft.com/office/powerpoint/2010/main" xmlns:a14="http://schemas.microsoft.com/office/drawing/2010/main" xmlns:a16="http://schemas.microsoft.com/office/drawing/2014/main" xmlns="" w="9525">
                   <a:solidFill>
                     <a:srgbClr val="000000"/>
                   </a:solidFill>
@@ -45849,7 +46208,7 @@
             </a:ln>
             <a:extLst>
               <a:ext uri="{91240B29-F687-4f45-9708-019B960494DF}">
-                <a14:hiddenLine xmlns="" xmlns:a16="http://schemas.microsoft.com/office/drawing/2014/main" xmlns:a14="http://schemas.microsoft.com/office/drawing/2010/main" xmlns:p14="http://schemas.microsoft.com/office/powerpoint/2010/main" w="9525">
+                <a14:hiddenLine xmlns:p14="http://schemas.microsoft.com/office/powerpoint/2010/main" xmlns:a14="http://schemas.microsoft.com/office/drawing/2010/main" xmlns:a16="http://schemas.microsoft.com/office/drawing/2014/main" xmlns="" w="9525">
                   <a:solidFill>
                     <a:srgbClr val="000000"/>
                   </a:solidFill>
@@ -45981,7 +46340,7 @@
             </a:ln>
             <a:extLst>
               <a:ext uri="{91240B29-F687-4f45-9708-019B960494DF}">
-                <a14:hiddenLine xmlns="" xmlns:a16="http://schemas.microsoft.com/office/drawing/2014/main" xmlns:a14="http://schemas.microsoft.com/office/drawing/2010/main" xmlns:p14="http://schemas.microsoft.com/office/powerpoint/2010/main" w="9525">
+                <a14:hiddenLine xmlns:p14="http://schemas.microsoft.com/office/powerpoint/2010/main" xmlns:a14="http://schemas.microsoft.com/office/drawing/2010/main" xmlns:a16="http://schemas.microsoft.com/office/drawing/2014/main" xmlns="" w="9525">
                   <a:solidFill>
                     <a:srgbClr val="000000"/>
                   </a:solidFill>
@@ -46065,7 +46424,7 @@
             </a:ln>
             <a:extLst>
               <a:ext uri="{91240B29-F687-4f45-9708-019B960494DF}">
-                <a14:hiddenLine xmlns="" xmlns:a16="http://schemas.microsoft.com/office/drawing/2014/main" xmlns:a14="http://schemas.microsoft.com/office/drawing/2010/main" xmlns:p14="http://schemas.microsoft.com/office/powerpoint/2010/main" w="9525">
+                <a14:hiddenLine xmlns:p14="http://schemas.microsoft.com/office/powerpoint/2010/main" xmlns:a14="http://schemas.microsoft.com/office/drawing/2010/main" xmlns:a16="http://schemas.microsoft.com/office/drawing/2014/main" xmlns="" w="9525">
                   <a:solidFill>
                     <a:srgbClr val="000000"/>
                   </a:solidFill>
@@ -46177,7 +46536,7 @@
             </a:ln>
             <a:extLst>
               <a:ext uri="{91240B29-F687-4f45-9708-019B960494DF}">
-                <a14:hiddenLine xmlns="" xmlns:a16="http://schemas.microsoft.com/office/drawing/2014/main" xmlns:a14="http://schemas.microsoft.com/office/drawing/2010/main" xmlns:p14="http://schemas.microsoft.com/office/powerpoint/2010/main" w="9525">
+                <a14:hiddenLine xmlns:p14="http://schemas.microsoft.com/office/powerpoint/2010/main" xmlns:a14="http://schemas.microsoft.com/office/drawing/2010/main" xmlns:a16="http://schemas.microsoft.com/office/drawing/2014/main" xmlns="" w="9525">
                   <a:solidFill>
                     <a:srgbClr val="000000"/>
                   </a:solidFill>
@@ -46289,7 +46648,7 @@
             </a:ln>
             <a:extLst>
               <a:ext uri="{91240B29-F687-4f45-9708-019B960494DF}">
-                <a14:hiddenLine xmlns="" xmlns:a16="http://schemas.microsoft.com/office/drawing/2014/main" xmlns:a14="http://schemas.microsoft.com/office/drawing/2010/main" xmlns:p14="http://schemas.microsoft.com/office/powerpoint/2010/main" w="9525">
+                <a14:hiddenLine xmlns:p14="http://schemas.microsoft.com/office/powerpoint/2010/main" xmlns:a14="http://schemas.microsoft.com/office/drawing/2010/main" xmlns:a16="http://schemas.microsoft.com/office/drawing/2014/main" xmlns="" w="9525">
                   <a:solidFill>
                     <a:srgbClr val="000000"/>
                   </a:solidFill>
@@ -46373,7 +46732,7 @@
             </a:ln>
             <a:extLst>
               <a:ext uri="{91240B29-F687-4f45-9708-019B960494DF}">
-                <a14:hiddenLine xmlns="" xmlns:a16="http://schemas.microsoft.com/office/drawing/2014/main" xmlns:a14="http://schemas.microsoft.com/office/drawing/2010/main" xmlns:p14="http://schemas.microsoft.com/office/powerpoint/2010/main" w="9525">
+                <a14:hiddenLine xmlns:p14="http://schemas.microsoft.com/office/powerpoint/2010/main" xmlns:a14="http://schemas.microsoft.com/office/drawing/2010/main" xmlns:a16="http://schemas.microsoft.com/office/drawing/2014/main" xmlns="" w="9525">
                   <a:solidFill>
                     <a:srgbClr val="000000"/>
                   </a:solidFill>
@@ -46485,7 +46844,7 @@
             </a:ln>
             <a:extLst>
               <a:ext uri="{91240B29-F687-4f45-9708-019B960494DF}">
-                <a14:hiddenLine xmlns="" xmlns:a16="http://schemas.microsoft.com/office/drawing/2014/main" xmlns:a14="http://schemas.microsoft.com/office/drawing/2010/main" xmlns:p14="http://schemas.microsoft.com/office/powerpoint/2010/main" w="9525">
+                <a14:hiddenLine xmlns:p14="http://schemas.microsoft.com/office/powerpoint/2010/main" xmlns:a14="http://schemas.microsoft.com/office/drawing/2010/main" xmlns:a16="http://schemas.microsoft.com/office/drawing/2014/main" xmlns="" w="9525">
                   <a:solidFill>
                     <a:srgbClr val="000000"/>
                   </a:solidFill>
@@ -46597,7 +46956,7 @@
             </a:ln>
             <a:extLst>
               <a:ext uri="{91240B29-F687-4f45-9708-019B960494DF}">
-                <a14:hiddenLine xmlns="" xmlns:a16="http://schemas.microsoft.com/office/drawing/2014/main" xmlns:a14="http://schemas.microsoft.com/office/drawing/2010/main" xmlns:p14="http://schemas.microsoft.com/office/powerpoint/2010/main" w="9525">
+                <a14:hiddenLine xmlns:p14="http://schemas.microsoft.com/office/powerpoint/2010/main" xmlns:a14="http://schemas.microsoft.com/office/drawing/2010/main" xmlns:a16="http://schemas.microsoft.com/office/drawing/2014/main" xmlns="" w="9525">
                   <a:solidFill>
                     <a:srgbClr val="000000"/>
                   </a:solidFill>
@@ -46675,7 +47034,7 @@
             </a:ln>
             <a:extLst>
               <a:ext uri="{91240B29-F687-4f45-9708-019B960494DF}">
-                <a14:hiddenLine xmlns="" xmlns:a16="http://schemas.microsoft.com/office/drawing/2014/main" xmlns:a14="http://schemas.microsoft.com/office/drawing/2010/main" xmlns:p14="http://schemas.microsoft.com/office/powerpoint/2010/main" w="9525">
+                <a14:hiddenLine xmlns:p14="http://schemas.microsoft.com/office/powerpoint/2010/main" xmlns:a14="http://schemas.microsoft.com/office/drawing/2010/main" xmlns:a16="http://schemas.microsoft.com/office/drawing/2014/main" xmlns="" w="9525">
                   <a:solidFill>
                     <a:srgbClr val="000000"/>
                   </a:solidFill>
@@ -46787,7 +47146,7 @@
             </a:ln>
             <a:extLst>
               <a:ext uri="{91240B29-F687-4f45-9708-019B960494DF}">
-                <a14:hiddenLine xmlns="" xmlns:a16="http://schemas.microsoft.com/office/drawing/2014/main" xmlns:a14="http://schemas.microsoft.com/office/drawing/2010/main" xmlns:p14="http://schemas.microsoft.com/office/powerpoint/2010/main" w="9525">
+                <a14:hiddenLine xmlns:p14="http://schemas.microsoft.com/office/powerpoint/2010/main" xmlns:a14="http://schemas.microsoft.com/office/drawing/2010/main" xmlns:a16="http://schemas.microsoft.com/office/drawing/2014/main" xmlns="" w="9525">
                   <a:solidFill>
                     <a:srgbClr val="000000"/>
                   </a:solidFill>
@@ -46865,7 +47224,7 @@
             </a:ln>
             <a:extLst>
               <a:ext uri="{91240B29-F687-4f45-9708-019B960494DF}">
-                <a14:hiddenLine xmlns="" xmlns:a16="http://schemas.microsoft.com/office/drawing/2014/main" xmlns:a14="http://schemas.microsoft.com/office/drawing/2010/main" xmlns:p14="http://schemas.microsoft.com/office/powerpoint/2010/main" w="9525">
+                <a14:hiddenLine xmlns:p14="http://schemas.microsoft.com/office/powerpoint/2010/main" xmlns:a14="http://schemas.microsoft.com/office/drawing/2010/main" xmlns:a16="http://schemas.microsoft.com/office/drawing/2014/main" xmlns="" w="9525">
                   <a:solidFill>
                     <a:srgbClr val="000000"/>
                   </a:solidFill>
@@ -46977,7 +47336,7 @@
             </a:ln>
             <a:extLst>
               <a:ext uri="{91240B29-F687-4f45-9708-019B960494DF}">
-                <a14:hiddenLine xmlns="" xmlns:a16="http://schemas.microsoft.com/office/drawing/2014/main" xmlns:a14="http://schemas.microsoft.com/office/drawing/2010/main" xmlns:p14="http://schemas.microsoft.com/office/powerpoint/2010/main" w="9525">
+                <a14:hiddenLine xmlns:p14="http://schemas.microsoft.com/office/powerpoint/2010/main" xmlns:a14="http://schemas.microsoft.com/office/drawing/2010/main" xmlns:a16="http://schemas.microsoft.com/office/drawing/2014/main" xmlns="" w="9525">
                   <a:solidFill>
                     <a:srgbClr val="000000"/>
                   </a:solidFill>
@@ -47067,7 +47426,7 @@
             </a:ln>
             <a:extLst>
               <a:ext uri="{91240B29-F687-4f45-9708-019B960494DF}">
-                <a14:hiddenLine xmlns="" xmlns:a16="http://schemas.microsoft.com/office/drawing/2014/main" xmlns:a14="http://schemas.microsoft.com/office/drawing/2010/main" xmlns:p14="http://schemas.microsoft.com/office/powerpoint/2010/main" w="9525">
+                <a14:hiddenLine xmlns:p14="http://schemas.microsoft.com/office/powerpoint/2010/main" xmlns:a14="http://schemas.microsoft.com/office/drawing/2010/main" xmlns:a16="http://schemas.microsoft.com/office/drawing/2014/main" xmlns="" w="9525">
                   <a:solidFill>
                     <a:srgbClr val="000000"/>
                   </a:solidFill>
@@ -47179,7 +47538,7 @@
             </a:ln>
             <a:extLst>
               <a:ext uri="{91240B29-F687-4f45-9708-019B960494DF}">
-                <a14:hiddenLine xmlns="" xmlns:a16="http://schemas.microsoft.com/office/drawing/2014/main" xmlns:a14="http://schemas.microsoft.com/office/drawing/2010/main" xmlns:p14="http://schemas.microsoft.com/office/powerpoint/2010/main" w="9525">
+                <a14:hiddenLine xmlns:p14="http://schemas.microsoft.com/office/powerpoint/2010/main" xmlns:a14="http://schemas.microsoft.com/office/drawing/2010/main" xmlns:a16="http://schemas.microsoft.com/office/drawing/2014/main" xmlns="" w="9525">
                   <a:solidFill>
                     <a:srgbClr val="000000"/>
                   </a:solidFill>
@@ -47269,7 +47628,7 @@
             </a:ln>
             <a:extLst>
               <a:ext uri="{91240B29-F687-4f45-9708-019B960494DF}">
-                <a14:hiddenLine xmlns="" xmlns:a16="http://schemas.microsoft.com/office/drawing/2014/main" xmlns:a14="http://schemas.microsoft.com/office/drawing/2010/main" xmlns:p14="http://schemas.microsoft.com/office/powerpoint/2010/main" w="9525">
+                <a14:hiddenLine xmlns:p14="http://schemas.microsoft.com/office/powerpoint/2010/main" xmlns:a14="http://schemas.microsoft.com/office/drawing/2010/main" xmlns:a16="http://schemas.microsoft.com/office/drawing/2014/main" xmlns="" w="9525">
                   <a:solidFill>
                     <a:srgbClr val="000000"/>
                   </a:solidFill>
@@ -47381,7 +47740,7 @@
             </a:ln>
             <a:extLst>
               <a:ext uri="{91240B29-F687-4f45-9708-019B960494DF}">
-                <a14:hiddenLine xmlns="" xmlns:a16="http://schemas.microsoft.com/office/drawing/2014/main" xmlns:a14="http://schemas.microsoft.com/office/drawing/2010/main" xmlns:p14="http://schemas.microsoft.com/office/powerpoint/2010/main" w="9525">
+                <a14:hiddenLine xmlns:p14="http://schemas.microsoft.com/office/powerpoint/2010/main" xmlns:a14="http://schemas.microsoft.com/office/drawing/2010/main" xmlns:a16="http://schemas.microsoft.com/office/drawing/2014/main" xmlns="" w="9525">
                   <a:solidFill>
                     <a:srgbClr val="000000"/>
                   </a:solidFill>
@@ -47437,7 +47796,7 @@
             </a:ln>
             <a:extLst>
               <a:ext uri="{91240B29-F687-4f45-9708-019B960494DF}">
-                <a14:hiddenLine xmlns="" xmlns:a16="http://schemas.microsoft.com/office/drawing/2014/main" xmlns:a14="http://schemas.microsoft.com/office/drawing/2010/main" xmlns:p14="http://schemas.microsoft.com/office/powerpoint/2010/main" w="9525">
+                <a14:hiddenLine xmlns:p14="http://schemas.microsoft.com/office/powerpoint/2010/main" xmlns:a14="http://schemas.microsoft.com/office/drawing/2010/main" xmlns:a16="http://schemas.microsoft.com/office/drawing/2014/main" xmlns="" w="9525">
                   <a:solidFill>
                     <a:srgbClr val="000000"/>
                   </a:solidFill>
@@ -47549,7 +47908,7 @@
             </a:ln>
             <a:extLst>
               <a:ext uri="{91240B29-F687-4f45-9708-019B960494DF}">
-                <a14:hiddenLine xmlns="" xmlns:a16="http://schemas.microsoft.com/office/drawing/2014/main" xmlns:a14="http://schemas.microsoft.com/office/drawing/2010/main" xmlns:p14="http://schemas.microsoft.com/office/powerpoint/2010/main" w="9525">
+                <a14:hiddenLine xmlns:p14="http://schemas.microsoft.com/office/powerpoint/2010/main" xmlns:a14="http://schemas.microsoft.com/office/drawing/2010/main" xmlns:a16="http://schemas.microsoft.com/office/drawing/2014/main" xmlns="" w="9525">
                   <a:solidFill>
                     <a:srgbClr val="000000"/>
                   </a:solidFill>
@@ -47633,7 +47992,7 @@
             </a:ln>
             <a:extLst>
               <a:ext uri="{91240B29-F687-4f45-9708-019B960494DF}">
-                <a14:hiddenLine xmlns="" xmlns:a16="http://schemas.microsoft.com/office/drawing/2014/main" xmlns:a14="http://schemas.microsoft.com/office/drawing/2010/main" xmlns:p14="http://schemas.microsoft.com/office/powerpoint/2010/main" w="9525">
+                <a14:hiddenLine xmlns:p14="http://schemas.microsoft.com/office/powerpoint/2010/main" xmlns:a14="http://schemas.microsoft.com/office/drawing/2010/main" xmlns:a16="http://schemas.microsoft.com/office/drawing/2014/main" xmlns="" w="9525">
                   <a:solidFill>
                     <a:srgbClr val="000000"/>
                   </a:solidFill>
@@ -47717,7 +48076,7 @@
             </a:ln>
             <a:extLst>
               <a:ext uri="{91240B29-F687-4f45-9708-019B960494DF}">
-                <a14:hiddenLine xmlns="" xmlns:a16="http://schemas.microsoft.com/office/drawing/2014/main" xmlns:a14="http://schemas.microsoft.com/office/drawing/2010/main" xmlns:p14="http://schemas.microsoft.com/office/powerpoint/2010/main" w="9525">
+                <a14:hiddenLine xmlns:p14="http://schemas.microsoft.com/office/powerpoint/2010/main" xmlns:a14="http://schemas.microsoft.com/office/drawing/2010/main" xmlns:a16="http://schemas.microsoft.com/office/drawing/2014/main" xmlns="" w="9525">
                   <a:solidFill>
                     <a:srgbClr val="000000"/>
                   </a:solidFill>
@@ -47829,7 +48188,7 @@
             </a:ln>
             <a:extLst>
               <a:ext uri="{91240B29-F687-4f45-9708-019B960494DF}">
-                <a14:hiddenLine xmlns="" xmlns:a16="http://schemas.microsoft.com/office/drawing/2014/main" xmlns:a14="http://schemas.microsoft.com/office/drawing/2010/main" xmlns:p14="http://schemas.microsoft.com/office/powerpoint/2010/main" w="9525">
+                <a14:hiddenLine xmlns:p14="http://schemas.microsoft.com/office/powerpoint/2010/main" xmlns:a14="http://schemas.microsoft.com/office/drawing/2010/main" xmlns:a16="http://schemas.microsoft.com/office/drawing/2014/main" xmlns="" w="9525">
                   <a:solidFill>
                     <a:srgbClr val="000000"/>
                   </a:solidFill>
@@ -47919,7 +48278,7 @@
             </a:ln>
             <a:extLst>
               <a:ext uri="{91240B29-F687-4f45-9708-019B960494DF}">
-                <a14:hiddenLine xmlns="" xmlns:a16="http://schemas.microsoft.com/office/drawing/2014/main" xmlns:a14="http://schemas.microsoft.com/office/drawing/2010/main" xmlns:p14="http://schemas.microsoft.com/office/powerpoint/2010/main" w="9525">
+                <a14:hiddenLine xmlns:p14="http://schemas.microsoft.com/office/powerpoint/2010/main" xmlns:a14="http://schemas.microsoft.com/office/drawing/2010/main" xmlns:a16="http://schemas.microsoft.com/office/drawing/2014/main" xmlns="" w="9525">
                   <a:solidFill>
                     <a:srgbClr val="000000"/>
                   </a:solidFill>
@@ -48003,7 +48362,7 @@
             </a:ln>
             <a:extLst>
               <a:ext uri="{91240B29-F687-4f45-9708-019B960494DF}">
-                <a14:hiddenLine xmlns="" xmlns:a16="http://schemas.microsoft.com/office/drawing/2014/main" xmlns:a14="http://schemas.microsoft.com/office/drawing/2010/main" xmlns:p14="http://schemas.microsoft.com/office/powerpoint/2010/main" w="9525">
+                <a14:hiddenLine xmlns:p14="http://schemas.microsoft.com/office/powerpoint/2010/main" xmlns:a14="http://schemas.microsoft.com/office/drawing/2010/main" xmlns:a16="http://schemas.microsoft.com/office/drawing/2014/main" xmlns="" w="9525">
                   <a:solidFill>
                     <a:srgbClr val="000000"/>
                   </a:solidFill>
@@ -48115,7 +48474,7 @@
             </a:ln>
             <a:extLst>
               <a:ext uri="{91240B29-F687-4f45-9708-019B960494DF}">
-                <a14:hiddenLine xmlns="" xmlns:a16="http://schemas.microsoft.com/office/drawing/2014/main" xmlns:a14="http://schemas.microsoft.com/office/drawing/2010/main" xmlns:p14="http://schemas.microsoft.com/office/powerpoint/2010/main" w="9525">
+                <a14:hiddenLine xmlns:p14="http://schemas.microsoft.com/office/powerpoint/2010/main" xmlns:a14="http://schemas.microsoft.com/office/drawing/2010/main" xmlns:a16="http://schemas.microsoft.com/office/drawing/2014/main" xmlns="" w="9525">
                   <a:solidFill>
                     <a:srgbClr val="000000"/>
                   </a:solidFill>
@@ -48199,7 +48558,7 @@
             </a:ln>
             <a:extLst>
               <a:ext uri="{91240B29-F687-4f45-9708-019B960494DF}">
-                <a14:hiddenLine xmlns="" xmlns:a16="http://schemas.microsoft.com/office/drawing/2014/main" xmlns:a14="http://schemas.microsoft.com/office/drawing/2010/main" xmlns:p14="http://schemas.microsoft.com/office/powerpoint/2010/main" w="9525">
+                <a14:hiddenLine xmlns:p14="http://schemas.microsoft.com/office/powerpoint/2010/main" xmlns:a14="http://schemas.microsoft.com/office/drawing/2010/main" xmlns:a16="http://schemas.microsoft.com/office/drawing/2014/main" xmlns="" w="9525">
                   <a:solidFill>
                     <a:srgbClr val="000000"/>
                   </a:solidFill>
@@ -48311,7 +48670,7 @@
             </a:ln>
             <a:extLst>
               <a:ext uri="{91240B29-F687-4f45-9708-019B960494DF}">
-                <a14:hiddenLine xmlns="" xmlns:a16="http://schemas.microsoft.com/office/drawing/2014/main" xmlns:a14="http://schemas.microsoft.com/office/drawing/2010/main" xmlns:p14="http://schemas.microsoft.com/office/powerpoint/2010/main" w="9525">
+                <a14:hiddenLine xmlns:p14="http://schemas.microsoft.com/office/powerpoint/2010/main" xmlns:a14="http://schemas.microsoft.com/office/drawing/2010/main" xmlns:a16="http://schemas.microsoft.com/office/drawing/2014/main" xmlns="" w="9525">
                   <a:solidFill>
                     <a:srgbClr val="000000"/>
                   </a:solidFill>
@@ -48395,7 +48754,7 @@
             </a:ln>
             <a:extLst>
               <a:ext uri="{91240B29-F687-4f45-9708-019B960494DF}">
-                <a14:hiddenLine xmlns="" xmlns:a16="http://schemas.microsoft.com/office/drawing/2014/main" xmlns:a14="http://schemas.microsoft.com/office/drawing/2010/main" xmlns:p14="http://schemas.microsoft.com/office/powerpoint/2010/main" w="9525">
+                <a14:hiddenLine xmlns:p14="http://schemas.microsoft.com/office/powerpoint/2010/main" xmlns:a14="http://schemas.microsoft.com/office/drawing/2010/main" xmlns:a16="http://schemas.microsoft.com/office/drawing/2014/main" xmlns="" w="9525">
                   <a:solidFill>
                     <a:srgbClr val="000000"/>
                   </a:solidFill>
@@ -48507,7 +48866,7 @@
             </a:ln>
             <a:extLst>
               <a:ext uri="{91240B29-F687-4f45-9708-019B960494DF}">
-                <a14:hiddenLine xmlns="" xmlns:a16="http://schemas.microsoft.com/office/drawing/2014/main" xmlns:a14="http://schemas.microsoft.com/office/drawing/2010/main" xmlns:p14="http://schemas.microsoft.com/office/powerpoint/2010/main" w="9525">
+                <a14:hiddenLine xmlns:p14="http://schemas.microsoft.com/office/powerpoint/2010/main" xmlns:a14="http://schemas.microsoft.com/office/drawing/2010/main" xmlns:a16="http://schemas.microsoft.com/office/drawing/2014/main" xmlns="" w="9525">
                   <a:solidFill>
                     <a:srgbClr val="000000"/>
                   </a:solidFill>
@@ -48563,7 +48922,7 @@
             </a:ln>
             <a:extLst>
               <a:ext uri="{91240B29-F687-4f45-9708-019B960494DF}">
-                <a14:hiddenLine xmlns="" xmlns:a16="http://schemas.microsoft.com/office/drawing/2014/main" xmlns:a14="http://schemas.microsoft.com/office/drawing/2010/main" xmlns:p14="http://schemas.microsoft.com/office/powerpoint/2010/main" w="9525">
+                <a14:hiddenLine xmlns:p14="http://schemas.microsoft.com/office/powerpoint/2010/main" xmlns:a14="http://schemas.microsoft.com/office/drawing/2010/main" xmlns:a16="http://schemas.microsoft.com/office/drawing/2014/main" xmlns="" w="9525">
                   <a:solidFill>
                     <a:srgbClr val="000000"/>
                   </a:solidFill>
@@ -48650,7 +49009,7 @@
             </a:ln>
             <a:extLst>
               <a:ext uri="{91240B29-F687-4f45-9708-019B960494DF}">
-                <a14:hiddenLine xmlns="" xmlns:a16="http://schemas.microsoft.com/office/drawing/2014/main" xmlns:a14="http://schemas.microsoft.com/office/drawing/2010/main" xmlns:p14="http://schemas.microsoft.com/office/powerpoint/2010/main" w="9525">
+                <a14:hiddenLine xmlns:p14="http://schemas.microsoft.com/office/powerpoint/2010/main" xmlns:a14="http://schemas.microsoft.com/office/drawing/2010/main" xmlns:a16="http://schemas.microsoft.com/office/drawing/2014/main" xmlns="" w="9525">
                   <a:solidFill>
                     <a:srgbClr val="000000"/>
                   </a:solidFill>
@@ -48762,7 +49121,7 @@
             </a:ln>
             <a:extLst>
               <a:ext uri="{91240B29-F687-4f45-9708-019B960494DF}">
-                <a14:hiddenLine xmlns="" xmlns:a16="http://schemas.microsoft.com/office/drawing/2014/main" xmlns:a14="http://schemas.microsoft.com/office/drawing/2010/main" xmlns:p14="http://schemas.microsoft.com/office/powerpoint/2010/main" w="9525">
+                <a14:hiddenLine xmlns:p14="http://schemas.microsoft.com/office/powerpoint/2010/main" xmlns:a14="http://schemas.microsoft.com/office/drawing/2010/main" xmlns:a16="http://schemas.microsoft.com/office/drawing/2014/main" xmlns="" w="9525">
                   <a:solidFill>
                     <a:srgbClr val="000000"/>
                   </a:solidFill>
@@ -48846,7 +49205,7 @@
             </a:ln>
             <a:extLst>
               <a:ext uri="{91240B29-F687-4f45-9708-019B960494DF}">
-                <a14:hiddenLine xmlns="" xmlns:a16="http://schemas.microsoft.com/office/drawing/2014/main" xmlns:a14="http://schemas.microsoft.com/office/drawing/2010/main" xmlns:p14="http://schemas.microsoft.com/office/powerpoint/2010/main" w="9525">
+                <a14:hiddenLine xmlns:p14="http://schemas.microsoft.com/office/powerpoint/2010/main" xmlns:a14="http://schemas.microsoft.com/office/drawing/2010/main" xmlns:a16="http://schemas.microsoft.com/office/drawing/2014/main" xmlns="" w="9525">
                   <a:solidFill>
                     <a:srgbClr val="000000"/>
                   </a:solidFill>
@@ -48958,7 +49317,7 @@
             </a:ln>
             <a:extLst>
               <a:ext uri="{91240B29-F687-4f45-9708-019B960494DF}">
-                <a14:hiddenLine xmlns="" xmlns:a16="http://schemas.microsoft.com/office/drawing/2014/main" xmlns:a14="http://schemas.microsoft.com/office/drawing/2010/main" xmlns:p14="http://schemas.microsoft.com/office/powerpoint/2010/main" w="9525">
+                <a14:hiddenLine xmlns:p14="http://schemas.microsoft.com/office/powerpoint/2010/main" xmlns:a14="http://schemas.microsoft.com/office/drawing/2010/main" xmlns:a16="http://schemas.microsoft.com/office/drawing/2014/main" xmlns="" w="9525">
                   <a:solidFill>
                     <a:srgbClr val="000000"/>
                   </a:solidFill>
@@ -49070,7 +49429,7 @@
             </a:ln>
             <a:extLst>
               <a:ext uri="{91240B29-F687-4f45-9708-019B960494DF}">
-                <a14:hiddenLine xmlns="" xmlns:a16="http://schemas.microsoft.com/office/drawing/2014/main" xmlns:a14="http://schemas.microsoft.com/office/drawing/2010/main" xmlns:p14="http://schemas.microsoft.com/office/powerpoint/2010/main" w="9525">
+                <a14:hiddenLine xmlns:p14="http://schemas.microsoft.com/office/powerpoint/2010/main" xmlns:a14="http://schemas.microsoft.com/office/drawing/2010/main" xmlns:a16="http://schemas.microsoft.com/office/drawing/2014/main" xmlns="" w="9525">
                   <a:solidFill>
                     <a:srgbClr val="000000"/>
                   </a:solidFill>
@@ -49157,7 +49516,7 @@
             </a:ln>
             <a:extLst>
               <a:ext uri="{91240B29-F687-4f45-9708-019B960494DF}">
-                <a14:hiddenLine xmlns="" xmlns:a16="http://schemas.microsoft.com/office/drawing/2014/main" xmlns:a14="http://schemas.microsoft.com/office/drawing/2010/main" xmlns:p14="http://schemas.microsoft.com/office/powerpoint/2010/main" w="9525">
+                <a14:hiddenLine xmlns:p14="http://schemas.microsoft.com/office/powerpoint/2010/main" xmlns:a14="http://schemas.microsoft.com/office/drawing/2010/main" xmlns:a16="http://schemas.microsoft.com/office/drawing/2014/main" xmlns="" w="9525">
                   <a:solidFill>
                     <a:srgbClr val="000000"/>
                   </a:solidFill>
@@ -49241,7 +49600,7 @@
             </a:ln>
             <a:extLst>
               <a:ext uri="{91240B29-F687-4f45-9708-019B960494DF}">
-                <a14:hiddenLine xmlns="" xmlns:a16="http://schemas.microsoft.com/office/drawing/2014/main" xmlns:a14="http://schemas.microsoft.com/office/drawing/2010/main" xmlns:p14="http://schemas.microsoft.com/office/powerpoint/2010/main" w="9525">
+                <a14:hiddenLine xmlns:p14="http://schemas.microsoft.com/office/powerpoint/2010/main" xmlns:a14="http://schemas.microsoft.com/office/drawing/2010/main" xmlns:a16="http://schemas.microsoft.com/office/drawing/2014/main" xmlns="" w="9525">
                   <a:solidFill>
                     <a:srgbClr val="000000"/>
                   </a:solidFill>
@@ -49353,7 +49712,7 @@
             </a:ln>
             <a:extLst>
               <a:ext uri="{91240B29-F687-4f45-9708-019B960494DF}">
-                <a14:hiddenLine xmlns="" xmlns:a16="http://schemas.microsoft.com/office/drawing/2014/main" xmlns:a14="http://schemas.microsoft.com/office/drawing/2010/main" xmlns:p14="http://schemas.microsoft.com/office/powerpoint/2010/main" w="9525">
+                <a14:hiddenLine xmlns:p14="http://schemas.microsoft.com/office/powerpoint/2010/main" xmlns:a14="http://schemas.microsoft.com/office/drawing/2010/main" xmlns:a16="http://schemas.microsoft.com/office/drawing/2014/main" xmlns="" w="9525">
                   <a:solidFill>
                     <a:srgbClr val="000000"/>
                   </a:solidFill>
@@ -49465,7 +49824,7 @@
             </a:ln>
             <a:extLst>
               <a:ext uri="{91240B29-F687-4f45-9708-019B960494DF}">
-                <a14:hiddenLine xmlns="" xmlns:a16="http://schemas.microsoft.com/office/drawing/2014/main" xmlns:a14="http://schemas.microsoft.com/office/drawing/2010/main" xmlns:p14="http://schemas.microsoft.com/office/powerpoint/2010/main" w="9525">
+                <a14:hiddenLine xmlns:p14="http://schemas.microsoft.com/office/powerpoint/2010/main" xmlns:a14="http://schemas.microsoft.com/office/drawing/2010/main" xmlns:a16="http://schemas.microsoft.com/office/drawing/2014/main" xmlns="" w="9525">
                   <a:solidFill>
                     <a:srgbClr val="000000"/>
                   </a:solidFill>
@@ -49549,7 +49908,7 @@
             </a:ln>
             <a:extLst>
               <a:ext uri="{91240B29-F687-4f45-9708-019B960494DF}">
-                <a14:hiddenLine xmlns="" xmlns:a16="http://schemas.microsoft.com/office/drawing/2014/main" xmlns:a14="http://schemas.microsoft.com/office/drawing/2010/main" xmlns:p14="http://schemas.microsoft.com/office/powerpoint/2010/main" w="9525">
+                <a14:hiddenLine xmlns:p14="http://schemas.microsoft.com/office/powerpoint/2010/main" xmlns:a14="http://schemas.microsoft.com/office/drawing/2010/main" xmlns:a16="http://schemas.microsoft.com/office/drawing/2014/main" xmlns="" w="9525">
                   <a:solidFill>
                     <a:srgbClr val="000000"/>
                   </a:solidFill>
@@ -49691,7 +50050,7 @@
             </a:ln>
             <a:extLst>
               <a:ext uri="{91240B29-F687-4f45-9708-019B960494DF}">
-                <a14:hiddenLine xmlns="" xmlns:a16="http://schemas.microsoft.com/office/drawing/2014/main" xmlns:a14="http://schemas.microsoft.com/office/drawing/2010/main" xmlns:p14="http://schemas.microsoft.com/office/powerpoint/2010/main" w="9525">
+                <a14:hiddenLine xmlns:p14="http://schemas.microsoft.com/office/powerpoint/2010/main" xmlns:a14="http://schemas.microsoft.com/office/drawing/2010/main" xmlns:a16="http://schemas.microsoft.com/office/drawing/2014/main" xmlns="" w="9525">
                   <a:solidFill>
                     <a:srgbClr val="000000"/>
                   </a:solidFill>
@@ -49781,7 +50140,7 @@
             </a:ln>
             <a:extLst>
               <a:ext uri="{91240B29-F687-4f45-9708-019B960494DF}">
-                <a14:hiddenLine xmlns="" xmlns:a16="http://schemas.microsoft.com/office/drawing/2014/main" xmlns:a14="http://schemas.microsoft.com/office/drawing/2010/main" xmlns:p14="http://schemas.microsoft.com/office/powerpoint/2010/main" w="9525">
+                <a14:hiddenLine xmlns:p14="http://schemas.microsoft.com/office/powerpoint/2010/main" xmlns:a14="http://schemas.microsoft.com/office/drawing/2010/main" xmlns:a16="http://schemas.microsoft.com/office/drawing/2014/main" xmlns="" w="9525">
                   <a:solidFill>
                     <a:srgbClr val="000000"/>
                   </a:solidFill>
@@ -49893,7 +50252,7 @@
             </a:ln>
             <a:extLst>
               <a:ext uri="{91240B29-F687-4f45-9708-019B960494DF}">
-                <a14:hiddenLine xmlns="" xmlns:a16="http://schemas.microsoft.com/office/drawing/2014/main" xmlns:a14="http://schemas.microsoft.com/office/drawing/2010/main" xmlns:p14="http://schemas.microsoft.com/office/powerpoint/2010/main" w="9525">
+                <a14:hiddenLine xmlns:p14="http://schemas.microsoft.com/office/powerpoint/2010/main" xmlns:a14="http://schemas.microsoft.com/office/drawing/2010/main" xmlns:a16="http://schemas.microsoft.com/office/drawing/2014/main" xmlns="" w="9525">
                   <a:solidFill>
                     <a:srgbClr val="000000"/>
                   </a:solidFill>
